--- a/04_제출물/데이터분석_결과보고서.pptx
+++ b/04_제출물/데이터분석_결과보고서.pptx
@@ -5613,7 +5613,7 @@
                   </a:txBody>
                   <a:tcPr marT="27432" marB="27432" marL="73152" marR="73152" anchor="ctr">
                     <a:solidFill>
-                      <a:srgbClr val="1B3A5F"/>
+                      <a:srgbClr val="33393F"/>
                     </a:solidFill>
                   </a:tcPr>
                 </a:tc>
@@ -5641,7 +5641,7 @@
                   </a:txBody>
                   <a:tcPr marT="27432" marB="27432" marL="73152" marR="73152" anchor="ctr">
                     <a:solidFill>
-                      <a:srgbClr val="1B3A5F"/>
+                      <a:srgbClr val="33393F"/>
                     </a:solidFill>
                   </a:tcPr>
                 </a:tc>
@@ -5669,7 +5669,7 @@
                   </a:txBody>
                   <a:tcPr marT="27432" marB="27432" marL="73152" marR="73152" anchor="ctr">
                     <a:solidFill>
-                      <a:srgbClr val="1B3A5F"/>
+                      <a:srgbClr val="33393F"/>
                     </a:solidFill>
                   </a:tcPr>
                 </a:tc>
@@ -9747,7 +9747,7 @@
                   </a:txBody>
                   <a:tcPr marT="27432" marB="27432" marL="73152" marR="73152" anchor="ctr">
                     <a:solidFill>
-                      <a:srgbClr val="1B3A5F"/>
+                      <a:srgbClr val="33393F"/>
                     </a:solidFill>
                   </a:tcPr>
                 </a:tc>
@@ -9775,7 +9775,7 @@
                   </a:txBody>
                   <a:tcPr marT="27432" marB="27432" marL="73152" marR="73152" anchor="ctr">
                     <a:solidFill>
-                      <a:srgbClr val="1B3A5F"/>
+                      <a:srgbClr val="33393F"/>
                     </a:solidFill>
                   </a:tcPr>
                 </a:tc>
@@ -9803,7 +9803,7 @@
                   </a:txBody>
                   <a:tcPr marT="27432" marB="27432" marL="73152" marR="73152" anchor="ctr">
                     <a:solidFill>
-                      <a:srgbClr val="1B3A5F"/>
+                      <a:srgbClr val="33393F"/>
                     </a:solidFill>
                   </a:tcPr>
                 </a:tc>
@@ -9831,7 +9831,7 @@
                   </a:txBody>
                   <a:tcPr marT="27432" marB="27432" marL="73152" marR="73152" anchor="ctr">
                     <a:solidFill>
-                      <a:srgbClr val="1B3A5F"/>
+                      <a:srgbClr val="33393F"/>
                     </a:solidFill>
                   </a:tcPr>
                 </a:tc>
@@ -14848,7 +14848,7 @@
                   </a:txBody>
                   <a:tcPr marT="27432" marB="27432" marL="73152" marR="73152" anchor="ctr">
                     <a:solidFill>
-                      <a:srgbClr val="1B3A5F"/>
+                      <a:srgbClr val="33393F"/>
                     </a:solidFill>
                   </a:tcPr>
                 </a:tc>
@@ -14876,7 +14876,7 @@
                   </a:txBody>
                   <a:tcPr marT="27432" marB="27432" marL="73152" marR="73152" anchor="ctr">
                     <a:solidFill>
-                      <a:srgbClr val="1B3A5F"/>
+                      <a:srgbClr val="33393F"/>
                     </a:solidFill>
                   </a:tcPr>
                 </a:tc>
@@ -14904,7 +14904,7 @@
                   </a:txBody>
                   <a:tcPr marT="27432" marB="27432" marL="73152" marR="73152" anchor="ctr">
                     <a:solidFill>
-                      <a:srgbClr val="1B3A5F"/>
+                      <a:srgbClr val="33393F"/>
                     </a:solidFill>
                   </a:tcPr>
                 </a:tc>
@@ -15967,7 +15967,7 @@
                   </a:txBody>
                   <a:tcPr marT="27432" marB="27432" marL="73152" marR="73152" anchor="ctr">
                     <a:solidFill>
-                      <a:srgbClr val="1B3A5F"/>
+                      <a:srgbClr val="33393F"/>
                     </a:solidFill>
                   </a:tcPr>
                 </a:tc>
@@ -15995,7 +15995,7 @@
                   </a:txBody>
                   <a:tcPr marT="27432" marB="27432" marL="73152" marR="73152" anchor="ctr">
                     <a:solidFill>
-                      <a:srgbClr val="1B3A5F"/>
+                      <a:srgbClr val="33393F"/>
                     </a:solidFill>
                   </a:tcPr>
                 </a:tc>
@@ -16023,7 +16023,7 @@
                   </a:txBody>
                   <a:tcPr marT="27432" marB="27432" marL="73152" marR="73152" anchor="ctr">
                     <a:solidFill>
-                      <a:srgbClr val="1B3A5F"/>
+                      <a:srgbClr val="33393F"/>
                     </a:solidFill>
                   </a:tcPr>
                 </a:tc>
@@ -17154,7 +17154,7 @@
                   </a:txBody>
                   <a:tcPr marT="27432" marB="27432" marL="73152" marR="73152" anchor="ctr">
                     <a:solidFill>
-                      <a:srgbClr val="1B3A5F"/>
+                      <a:srgbClr val="33393F"/>
                     </a:solidFill>
                   </a:tcPr>
                 </a:tc>
@@ -17182,7 +17182,7 @@
                   </a:txBody>
                   <a:tcPr marT="27432" marB="27432" marL="73152" marR="73152" anchor="ctr">
                     <a:solidFill>
-                      <a:srgbClr val="1B3A5F"/>
+                      <a:srgbClr val="33393F"/>
                     </a:solidFill>
                   </a:tcPr>
                 </a:tc>
@@ -18387,7 +18387,7 @@
                   </a:txBody>
                   <a:tcPr marT="27432" marB="27432" marL="73152" marR="73152" anchor="ctr">
                     <a:solidFill>
-                      <a:srgbClr val="1B3A5F"/>
+                      <a:srgbClr val="33393F"/>
                     </a:solidFill>
                   </a:tcPr>
                 </a:tc>
@@ -18415,7 +18415,7 @@
                   </a:txBody>
                   <a:tcPr marT="27432" marB="27432" marL="73152" marR="73152" anchor="ctr">
                     <a:solidFill>
-                      <a:srgbClr val="1B3A5F"/>
+                      <a:srgbClr val="33393F"/>
                     </a:solidFill>
                   </a:tcPr>
                 </a:tc>
@@ -18443,7 +18443,7 @@
                   </a:txBody>
                   <a:tcPr marT="27432" marB="27432" marL="73152" marR="73152" anchor="ctr">
                     <a:solidFill>
-                      <a:srgbClr val="1B3A5F"/>
+                      <a:srgbClr val="33393F"/>
                     </a:solidFill>
                   </a:tcPr>
                 </a:tc>
@@ -18471,7 +18471,7 @@
                   </a:txBody>
                   <a:tcPr marT="27432" marB="27432" marL="73152" marR="73152" anchor="ctr">
                     <a:solidFill>
-                      <a:srgbClr val="1B3A5F"/>
+                      <a:srgbClr val="33393F"/>
                     </a:solidFill>
                   </a:tcPr>
                 </a:tc>
@@ -20196,7 +20196,7 @@
                   </a:txBody>
                   <a:tcPr marT="27432" marB="27432" marL="73152" marR="73152" anchor="ctr">
                     <a:solidFill>
-                      <a:srgbClr val="1B3A5F"/>
+                      <a:srgbClr val="33393F"/>
                     </a:solidFill>
                   </a:tcPr>
                 </a:tc>
@@ -20224,7 +20224,7 @@
                   </a:txBody>
                   <a:tcPr marT="27432" marB="27432" marL="73152" marR="73152" anchor="ctr">
                     <a:solidFill>
-                      <a:srgbClr val="1B3A5F"/>
+                      <a:srgbClr val="33393F"/>
                     </a:solidFill>
                   </a:tcPr>
                 </a:tc>
@@ -20252,7 +20252,7 @@
                   </a:txBody>
                   <a:tcPr marT="27432" marB="27432" marL="73152" marR="73152" anchor="ctr">
                     <a:solidFill>
-                      <a:srgbClr val="1B3A5F"/>
+                      <a:srgbClr val="33393F"/>
                     </a:solidFill>
                   </a:tcPr>
                 </a:tc>

--- a/04_제출물/데이터분석_결과보고서.pptx
+++ b/04_제출물/데이터분석_결과보고서.pptx
@@ -16779,7 +16779,7 @@
                 <a:latin typeface="맑은 고딕"/>
                 <a:ea typeface="맑은 고딕"/>
               </a:rPr>
-              <a:t>병목은 "한 지역에 몇 개"가 아니라 "올해 누구 차례인가"이며, 그 줄을 세우는 규칙이 없다.</a:t>
+              <a:t>제약은 "한 지역에 몇 개"가 아니라 "한 해에 전국 몇 곳"이다 — 관건은 "올해 누구 차례인가"인데, 그 순서 규칙이 없다.</a:t>
             </a:r>
           </a:p>
         </p:txBody>

--- a/04_제출물/데이터분석_결과보고서.pptx
+++ b/04_제출물/데이터분석_결과보고서.pptx
@@ -3150,201 +3150,9 @@
           </a:p>
         </p:txBody>
       </p:sp>
-      <p:pic>
-        <p:nvPicPr>
-          <p:cNvPr id="3" name="Picture 2" descr="blob_coral.png"/>
-          <p:cNvPicPr>
-            <a:picLocks noChangeAspect="1"/>
-          </p:cNvPicPr>
-          <p:nvPr/>
-        </p:nvPicPr>
-        <p:blipFill>
-          <a:blip r:embed="rId2"/>
-          <a:stretch>
-            <a:fillRect/>
-          </a:stretch>
-        </p:blipFill>
-        <p:spPr>
-          <a:xfrm>
-            <a:off x="6949440" y="-2926080"/>
-            <a:ext cx="7315200" cy="7315200"/>
-          </a:xfrm>
-          <a:prstGeom prst="rect">
-            <a:avLst/>
-          </a:prstGeom>
-        </p:spPr>
-      </p:pic>
-      <p:pic>
-        <p:nvPicPr>
-          <p:cNvPr id="4" name="Picture 3" descr="blob_blue.png"/>
-          <p:cNvPicPr>
-            <a:picLocks noChangeAspect="1"/>
-          </p:cNvPicPr>
-          <p:nvPr/>
-        </p:nvPicPr>
-        <p:blipFill>
-          <a:blip r:embed="rId3"/>
-          <a:stretch>
-            <a:fillRect/>
-          </a:stretch>
-        </p:blipFill>
-        <p:spPr>
-          <a:xfrm>
-            <a:off x="-3108960" y="2377440"/>
-            <a:ext cx="7863840" cy="7863840"/>
-          </a:xfrm>
-          <a:prstGeom prst="rect">
-            <a:avLst/>
-          </a:prstGeom>
-        </p:spPr>
-      </p:pic>
-      <p:pic>
-        <p:nvPicPr>
-          <p:cNvPr id="5" name="Picture 4" descr="blob_teal.png"/>
-          <p:cNvPicPr>
-            <a:picLocks noChangeAspect="1"/>
-          </p:cNvPicPr>
-          <p:nvPr/>
-        </p:nvPicPr>
-        <p:blipFill>
-          <a:blip r:embed="rId4"/>
-          <a:stretch>
-            <a:fillRect/>
-          </a:stretch>
-        </p:blipFill>
-        <p:spPr>
-          <a:xfrm>
-            <a:off x="4206240" y="5120640"/>
-            <a:ext cx="4206240" cy="4206240"/>
-          </a:xfrm>
-          <a:prstGeom prst="rect">
-            <a:avLst/>
-          </a:prstGeom>
-        </p:spPr>
-      </p:pic>
-      <p:pic>
-        <p:nvPicPr>
-          <p:cNvPr id="6" name="Picture 5" descr="korea_map.png"/>
-          <p:cNvPicPr>
-            <a:picLocks noChangeAspect="1"/>
-          </p:cNvPicPr>
-          <p:nvPr/>
-        </p:nvPicPr>
-        <p:blipFill>
-          <a:blip r:embed="rId5"/>
-          <a:stretch>
-            <a:fillRect/>
-          </a:stretch>
-        </p:blipFill>
-        <p:spPr>
-          <a:xfrm>
-            <a:off x="8229600" y="777240"/>
-            <a:ext cx="3383280" cy="4687928"/>
-          </a:xfrm>
-          <a:prstGeom prst="rect">
-            <a:avLst/>
-          </a:prstGeom>
-        </p:spPr>
-      </p:pic>
-      <p:pic>
-        <p:nvPicPr>
-          <p:cNvPr id="7" name="Picture 6" descr="icon_pin.png"/>
-          <p:cNvPicPr>
-            <a:picLocks noChangeAspect="1"/>
-          </p:cNvPicPr>
-          <p:nvPr/>
-        </p:nvPicPr>
-        <p:blipFill>
-          <a:blip r:embed="rId6"/>
-          <a:stretch>
-            <a:fillRect/>
-          </a:stretch>
-        </p:blipFill>
-        <p:spPr>
-          <a:xfrm>
-            <a:off x="9464040" y="1234440"/>
-            <a:ext cx="566928" cy="634644"/>
-          </a:xfrm>
-          <a:prstGeom prst="rect">
-            <a:avLst/>
-          </a:prstGeom>
-        </p:spPr>
-      </p:pic>
-      <p:pic>
-        <p:nvPicPr>
-          <p:cNvPr id="8" name="Picture 7" descr="sphere_coral.png"/>
-          <p:cNvPicPr>
-            <a:picLocks noChangeAspect="1"/>
-          </p:cNvPicPr>
-          <p:nvPr/>
-        </p:nvPicPr>
-        <p:blipFill>
-          <a:blip r:embed="rId7"/>
-          <a:stretch>
-            <a:fillRect/>
-          </a:stretch>
-        </p:blipFill>
-        <p:spPr>
-          <a:xfrm>
-            <a:off x="7635240" y="4160520"/>
-            <a:ext cx="1600200" cy="1866899"/>
-          </a:xfrm>
-          <a:prstGeom prst="rect">
-            <a:avLst/>
-          </a:prstGeom>
-        </p:spPr>
-      </p:pic>
-      <p:pic>
-        <p:nvPicPr>
-          <p:cNvPr id="9" name="Picture 8" descr="ring_blue.png"/>
-          <p:cNvPicPr>
-            <a:picLocks noChangeAspect="1"/>
-          </p:cNvPicPr>
-          <p:nvPr/>
-        </p:nvPicPr>
-        <p:blipFill>
-          <a:blip r:embed="rId8"/>
-          <a:stretch>
-            <a:fillRect/>
-          </a:stretch>
-        </p:blipFill>
-        <p:spPr>
-          <a:xfrm>
-            <a:off x="10561320" y="4480560"/>
-            <a:ext cx="1600200" cy="1600200"/>
-          </a:xfrm>
-          <a:prstGeom prst="rect">
-            <a:avLst/>
-          </a:prstGeom>
-        </p:spPr>
-      </p:pic>
-      <p:pic>
-        <p:nvPicPr>
-          <p:cNvPr id="10" name="Picture 9" descr="sphere_teal.png"/>
-          <p:cNvPicPr>
-            <a:picLocks noChangeAspect="1"/>
-          </p:cNvPicPr>
-          <p:nvPr/>
-        </p:nvPicPr>
-        <p:blipFill>
-          <a:blip r:embed="rId9"/>
-          <a:stretch>
-            <a:fillRect/>
-          </a:stretch>
-        </p:blipFill>
-        <p:spPr>
-          <a:xfrm>
-            <a:off x="7452360" y="685800"/>
-            <a:ext cx="658368" cy="767397"/>
-          </a:xfrm>
-          <a:prstGeom prst="rect">
-            <a:avLst/>
-          </a:prstGeom>
-        </p:spPr>
-      </p:pic>
-      <p:sp>
-        <p:nvSpPr>
-          <p:cNvPr id="11" name="Rounded Rectangle 10"/>
+      <p:sp>
+        <p:nvSpPr>
+          <p:cNvPr id="3" name="Rounded Rectangle 2"/>
           <p:cNvSpPr/>
           <p:nvPr/>
         </p:nvSpPr>
@@ -3361,10 +3169,10 @@
           <a:gradFill rotWithShape="1">
             <a:gsLst>
               <a:gs pos="0">
-                <a:srgbClr val="FF7A59"/>
+                <a:srgbClr val="3A3F45"/>
               </a:gs>
               <a:gs pos="100000">
-                <a:srgbClr val="FFB86B"/>
+                <a:srgbClr val="73787E"/>
               </a:gs>
             </a:gsLst>
             <a:lin scaled="0" ang="18900000"/>
@@ -3374,7 +3182,7 @@
           </a:ln>
           <a:effectLst>
             <a:outerShdw blurRad="109728" dist="36576" dir="5400000" rotWithShape="0">
-              <a:srgbClr val="C24E30">
+              <a:srgbClr val="000000">
                 <a:alpha val="35000"/>
               </a:srgbClr>
             </a:outerShdw>
@@ -3404,7 +3212,7 @@
       </p:sp>
       <p:sp>
         <p:nvSpPr>
-          <p:cNvPr id="12" name="TextBox 11"/>
+          <p:cNvPr id="4" name="TextBox 3"/>
           <p:cNvSpPr txBox="1"/>
           <p:nvPr/>
         </p:nvSpPr>
@@ -3435,7 +3243,7 @@
             <a:r>
               <a:rPr sz="1450" b="0">
                 <a:solidFill>
-                  <a:srgbClr val="6A7B92"/>
+                  <a:srgbClr val="767A7F"/>
                 </a:solidFill>
                 <a:latin typeface="맑은 고딕"/>
                 <a:ea typeface="맑은 고딕"/>
@@ -3455,7 +3263,7 @@
             <a:r>
               <a:rPr sz="4700" b="1">
                 <a:solidFill>
-                  <a:srgbClr val="222E40"/>
+                  <a:srgbClr val="1C1C1E"/>
                 </a:solidFill>
                 <a:latin typeface="맑은 고딕"/>
                 <a:ea typeface="맑은 고딕"/>
@@ -3475,7 +3283,7 @@
             <a:r>
               <a:rPr sz="1900" b="0">
                 <a:solidFill>
-                  <a:srgbClr val="17456B"/>
+                  <a:srgbClr val="33393F"/>
                 </a:solidFill>
                 <a:latin typeface="맑은 고딕"/>
                 <a:ea typeface="맑은 고딕"/>
@@ -3485,33 +3293,61 @@
           </a:p>
         </p:txBody>
       </p:sp>
-      <p:pic>
-        <p:nvPicPr>
-          <p:cNvPr id="13" name="Picture 12" descr="glow_bar.png"/>
-          <p:cNvPicPr>
-            <a:picLocks noChangeAspect="1"/>
-          </p:cNvPicPr>
-          <p:nvPr/>
-        </p:nvPicPr>
-        <p:blipFill>
-          <a:blip r:embed="rId10"/>
-          <a:stretch>
-            <a:fillRect/>
-          </a:stretch>
-        </p:blipFill>
+      <p:sp>
+        <p:nvSpPr>
+          <p:cNvPr id="5" name="Rectangle 4"/>
+          <p:cNvSpPr/>
+          <p:nvPr/>
+        </p:nvSpPr>
         <p:spPr>
           <a:xfrm>
             <a:off x="932688" y="4370832"/>
-            <a:ext cx="5852160" cy="50292"/>
+            <a:ext cx="5852160" cy="27432"/>
           </a:xfrm>
           <a:prstGeom prst="rect">
             <a:avLst/>
           </a:prstGeom>
-        </p:spPr>
-      </p:pic>
-      <p:sp>
-        <p:nvSpPr>
-          <p:cNvPr id="14" name="TextBox 13"/>
+          <a:gradFill rotWithShape="1">
+            <a:gsLst>
+              <a:gs pos="0">
+                <a:srgbClr val="2A2E33"/>
+              </a:gs>
+              <a:gs pos="100000">
+                <a:srgbClr val="FFFFFF"/>
+              </a:gs>
+            </a:gsLst>
+            <a:lin scaled="0" ang="0"/>
+          </a:gradFill>
+          <a:ln>
+            <a:noFill/>
+          </a:ln>
+          <a:effectLst/>
+        </p:spPr>
+        <p:style>
+          <a:lnRef idx="1">
+            <a:schemeClr val="accent1"/>
+          </a:lnRef>
+          <a:fillRef idx="3">
+            <a:schemeClr val="accent1"/>
+          </a:fillRef>
+          <a:effectRef idx="2">
+            <a:schemeClr val="accent1"/>
+          </a:effectRef>
+          <a:fontRef idx="minor">
+            <a:schemeClr val="lt1"/>
+          </a:fontRef>
+        </p:style>
+        <p:txBody>
+          <a:bodyPr rtlCol="0" anchor="ctr"/>
+          <a:lstStyle/>
+          <a:p>
+            <a:pPr algn="ctr"/>
+          </a:p>
+        </p:txBody>
+      </p:sp>
+      <p:sp>
+        <p:nvSpPr>
+          <p:cNvPr id="6" name="TextBox 5"/>
           <p:cNvSpPr txBox="1"/>
           <p:nvPr/>
         </p:nvSpPr>
@@ -3542,7 +3378,7 @@
             <a:r>
               <a:rPr sz="1350" b="1">
                 <a:solidFill>
-                  <a:srgbClr val="222E40"/>
+                  <a:srgbClr val="1C1C1E"/>
                 </a:solidFill>
                 <a:latin typeface="맑은 고딕"/>
                 <a:ea typeface="맑은 고딕"/>
@@ -3562,7 +3398,7 @@
             <a:r>
               <a:rPr sz="1250" b="0">
                 <a:solidFill>
-                  <a:srgbClr val="6A7B92"/>
+                  <a:srgbClr val="767A7F"/>
                 </a:solidFill>
                 <a:latin typeface="맑은 고딕"/>
                 <a:ea typeface="맑은 고딕"/>
@@ -3582,7 +3418,7 @@
             <a:r>
               <a:rPr sz="1250" b="0">
                 <a:solidFill>
-                  <a:srgbClr val="6A7B92"/>
+                  <a:srgbClr val="767A7F"/>
                 </a:solidFill>
                 <a:latin typeface="맑은 고딕"/>
                 <a:ea typeface="맑은 고딕"/>
@@ -3654,57 +3490,9 @@
           </a:p>
         </p:txBody>
       </p:sp>
-      <p:pic>
-        <p:nvPicPr>
-          <p:cNvPr id="3" name="Picture 2" descr="blob_blue.png"/>
-          <p:cNvPicPr>
-            <a:picLocks noChangeAspect="1"/>
-          </p:cNvPicPr>
-          <p:nvPr/>
-        </p:nvPicPr>
-        <p:blipFill>
-          <a:blip r:embed="rId2"/>
-          <a:stretch>
-            <a:fillRect/>
-          </a:stretch>
-        </p:blipFill>
-        <p:spPr>
-          <a:xfrm>
-            <a:off x="-3474720" y="3840480"/>
-            <a:ext cx="6583680" cy="6583680"/>
-          </a:xfrm>
-          <a:prstGeom prst="rect">
-            <a:avLst/>
-          </a:prstGeom>
-        </p:spPr>
-      </p:pic>
-      <p:pic>
-        <p:nvPicPr>
-          <p:cNvPr id="4" name="Picture 3" descr="blob_coral.png"/>
-          <p:cNvPicPr>
-            <a:picLocks noChangeAspect="1"/>
-          </p:cNvPicPr>
-          <p:nvPr/>
-        </p:nvPicPr>
-        <p:blipFill>
-          <a:blip r:embed="rId3"/>
-          <a:stretch>
-            <a:fillRect/>
-          </a:stretch>
-        </p:blipFill>
-        <p:spPr>
-          <a:xfrm>
-            <a:off x="8961120" y="-3291840"/>
-            <a:ext cx="6217920" cy="6217920"/>
-          </a:xfrm>
-          <a:prstGeom prst="rect">
-            <a:avLst/>
-          </a:prstGeom>
-        </p:spPr>
-      </p:pic>
-      <p:sp>
-        <p:nvSpPr>
-          <p:cNvPr id="5" name="Rounded Rectangle 4"/>
+      <p:sp>
+        <p:nvSpPr>
+          <p:cNvPr id="3" name="Rounded Rectangle 2"/>
           <p:cNvSpPr/>
           <p:nvPr/>
         </p:nvSpPr>
@@ -3721,10 +3509,10 @@
           <a:gradFill rotWithShape="1">
             <a:gsLst>
               <a:gs pos="0">
-                <a:srgbClr val="FF7A59"/>
+                <a:srgbClr val="3A3F45"/>
               </a:gs>
               <a:gs pos="100000">
-                <a:srgbClr val="FFB86B"/>
+                <a:srgbClr val="73787E"/>
               </a:gs>
             </a:gsLst>
             <a:lin scaled="0" ang="18900000"/>
@@ -3734,7 +3522,7 @@
           </a:ln>
           <a:effectLst>
             <a:outerShdw blurRad="109728" dist="36576" dir="5400000" rotWithShape="0">
-              <a:srgbClr val="C24E30">
+              <a:srgbClr val="000000">
                 <a:alpha val="35000"/>
               </a:srgbClr>
             </a:outerShdw>
@@ -3764,7 +3552,7 @@
       </p:sp>
       <p:sp>
         <p:nvSpPr>
-          <p:cNvPr id="6" name="TextBox 5"/>
+          <p:cNvPr id="4" name="TextBox 3"/>
           <p:cNvSpPr txBox="1"/>
           <p:nvPr/>
         </p:nvSpPr>
@@ -3795,7 +3583,7 @@
             <a:r>
               <a:rPr sz="2150" b="1">
                 <a:solidFill>
-                  <a:srgbClr val="222E40"/>
+                  <a:srgbClr val="1C1C1E"/>
                 </a:solidFill>
                 <a:latin typeface="맑은 고딕"/>
                 <a:ea typeface="맑은 고딕"/>
@@ -3805,33 +3593,61 @@
           </a:p>
         </p:txBody>
       </p:sp>
-      <p:pic>
-        <p:nvPicPr>
-          <p:cNvPr id="7" name="Picture 6" descr="glow_bar.png"/>
-          <p:cNvPicPr>
-            <a:picLocks noChangeAspect="1"/>
-          </p:cNvPicPr>
-          <p:nvPr/>
-        </p:nvPicPr>
-        <p:blipFill>
-          <a:blip r:embed="rId4"/>
-          <a:stretch>
-            <a:fillRect/>
-          </a:stretch>
-        </p:blipFill>
+      <p:sp>
+        <p:nvSpPr>
+          <p:cNvPr id="5" name="Rectangle 4"/>
+          <p:cNvSpPr/>
+          <p:nvPr/>
+        </p:nvSpPr>
         <p:spPr>
           <a:xfrm>
             <a:off x="521207" y="969264"/>
-            <a:ext cx="4206240" cy="50292"/>
+            <a:ext cx="4206240" cy="27432"/>
           </a:xfrm>
           <a:prstGeom prst="rect">
             <a:avLst/>
           </a:prstGeom>
-        </p:spPr>
-      </p:pic>
-      <p:sp>
-        <p:nvSpPr>
-          <p:cNvPr id="8" name="TextBox 7"/>
+          <a:gradFill rotWithShape="1">
+            <a:gsLst>
+              <a:gs pos="0">
+                <a:srgbClr val="2A2E33"/>
+              </a:gs>
+              <a:gs pos="100000">
+                <a:srgbClr val="FFFFFF"/>
+              </a:gs>
+            </a:gsLst>
+            <a:lin scaled="0" ang="0"/>
+          </a:gradFill>
+          <a:ln>
+            <a:noFill/>
+          </a:ln>
+          <a:effectLst/>
+        </p:spPr>
+        <p:style>
+          <a:lnRef idx="1">
+            <a:schemeClr val="accent1"/>
+          </a:lnRef>
+          <a:fillRef idx="3">
+            <a:schemeClr val="accent1"/>
+          </a:fillRef>
+          <a:effectRef idx="2">
+            <a:schemeClr val="accent1"/>
+          </a:effectRef>
+          <a:fontRef idx="minor">
+            <a:schemeClr val="lt1"/>
+          </a:fontRef>
+        </p:style>
+        <p:txBody>
+          <a:bodyPr rtlCol="0" anchor="ctr"/>
+          <a:lstStyle/>
+          <a:p>
+            <a:pPr algn="ctr"/>
+          </a:p>
+        </p:txBody>
+      </p:sp>
+      <p:sp>
+        <p:nvSpPr>
+          <p:cNvPr id="6" name="TextBox 5"/>
           <p:cNvSpPr txBox="1"/>
           <p:nvPr/>
         </p:nvSpPr>
@@ -3862,7 +3678,7 @@
             <a:r>
               <a:rPr sz="3000" b="1">
                 <a:solidFill>
-                  <a:srgbClr val="D3DDEA"/>
+                  <a:srgbClr val="D8DADD"/>
                 </a:solidFill>
                 <a:latin typeface="맑은 고딕"/>
                 <a:ea typeface="맑은 고딕"/>
@@ -3874,7 +3690,7 @@
       </p:sp>
       <p:sp>
         <p:nvSpPr>
-          <p:cNvPr id="9" name="TextBox 8"/>
+          <p:cNvPr id="7" name="TextBox 6"/>
           <p:cNvSpPr txBox="1"/>
           <p:nvPr/>
         </p:nvSpPr>
@@ -3905,7 +3721,7 @@
             <a:r>
               <a:rPr sz="850" b="0">
                 <a:solidFill>
-                  <a:srgbClr val="ABB7C7"/>
+                  <a:srgbClr val="B2B5B9"/>
                 </a:solidFill>
                 <a:latin typeface="맑은 고딕"/>
                 <a:ea typeface="맑은 고딕"/>
@@ -3917,7 +3733,7 @@
       </p:sp>
       <p:sp>
         <p:nvSpPr>
-          <p:cNvPr id="10" name="Rounded Rectangle 9"/>
+          <p:cNvPr id="8" name="Rounded Rectangle 7"/>
           <p:cNvSpPr/>
           <p:nvPr/>
         </p:nvSpPr>
@@ -3936,12 +3752,12 @@
           </a:solidFill>
           <a:ln w="12700">
             <a:solidFill>
-              <a:srgbClr val="E4EAF2"/>
+              <a:srgbClr val="E4E6E9"/>
             </a:solidFill>
           </a:ln>
           <a:effectLst>
             <a:outerShdw blurRad="182880" dist="64008" dir="5400000" rotWithShape="0">
-              <a:srgbClr val="2A3B55">
+              <a:srgbClr val="000000">
                 <a:alpha val="30000"/>
               </a:srgbClr>
             </a:outerShdw>
@@ -3971,7 +3787,7 @@
       </p:sp>
       <p:sp>
         <p:nvSpPr>
-          <p:cNvPr id="11" name="TextBox 10"/>
+          <p:cNvPr id="9" name="TextBox 8"/>
           <p:cNvSpPr txBox="1"/>
           <p:nvPr/>
         </p:nvSpPr>
@@ -4002,7 +3818,7 @@
             <a:r>
               <a:rPr sz="1300" b="1">
                 <a:solidFill>
-                  <a:srgbClr val="17456B"/>
+                  <a:srgbClr val="33393F"/>
                 </a:solidFill>
                 <a:latin typeface="맑은 고딕"/>
                 <a:ea typeface="맑은 고딕"/>
@@ -4022,7 +3838,7 @@
             <a:r>
               <a:rPr sz="1150" b="0">
                 <a:solidFill>
-                  <a:srgbClr val="222E40"/>
+                  <a:srgbClr val="1C1C1E"/>
                 </a:solidFill>
                 <a:latin typeface="맑은 고딕"/>
                 <a:ea typeface="맑은 고딕"/>
@@ -4034,7 +3850,7 @@
       </p:sp>
       <p:sp>
         <p:nvSpPr>
-          <p:cNvPr id="12" name="Rounded Rectangle 11"/>
+          <p:cNvPr id="10" name="Rounded Rectangle 9"/>
           <p:cNvSpPr/>
           <p:nvPr/>
         </p:nvSpPr>
@@ -4053,12 +3869,12 @@
           </a:solidFill>
           <a:ln w="12700">
             <a:solidFill>
-              <a:srgbClr val="E4EAF2"/>
+              <a:srgbClr val="E4E6E9"/>
             </a:solidFill>
           </a:ln>
           <a:effectLst>
             <a:outerShdw blurRad="182880" dist="64008" dir="5400000" rotWithShape="0">
-              <a:srgbClr val="2A3B55">
+              <a:srgbClr val="000000">
                 <a:alpha val="30000"/>
               </a:srgbClr>
             </a:outerShdw>
@@ -4088,7 +3904,7 @@
       </p:sp>
       <p:sp>
         <p:nvSpPr>
-          <p:cNvPr id="13" name="TextBox 12"/>
+          <p:cNvPr id="11" name="TextBox 10"/>
           <p:cNvSpPr txBox="1"/>
           <p:nvPr/>
         </p:nvSpPr>
@@ -4119,7 +3935,7 @@
             <a:r>
               <a:rPr sz="1300" b="1">
                 <a:solidFill>
-                  <a:srgbClr val="17456B"/>
+                  <a:srgbClr val="33393F"/>
                 </a:solidFill>
                 <a:latin typeface="맑은 고딕"/>
                 <a:ea typeface="맑은 고딕"/>
@@ -4139,7 +3955,7 @@
             <a:r>
               <a:rPr sz="1100" b="0">
                 <a:solidFill>
-                  <a:srgbClr val="222E40"/>
+                  <a:srgbClr val="1C1C1E"/>
                 </a:solidFill>
                 <a:latin typeface="맑은 고딕"/>
                 <a:ea typeface="맑은 고딕"/>
@@ -4159,7 +3975,7 @@
             <a:r>
               <a:rPr sz="1100" b="0">
                 <a:solidFill>
-                  <a:srgbClr val="222E40"/>
+                  <a:srgbClr val="1C1C1E"/>
                 </a:solidFill>
                 <a:latin typeface="맑은 고딕"/>
                 <a:ea typeface="맑은 고딕"/>
@@ -4171,7 +3987,7 @@
       </p:sp>
       <p:sp>
         <p:nvSpPr>
-          <p:cNvPr id="14" name="Rounded Rectangle 13"/>
+          <p:cNvPr id="12" name="Rounded Rectangle 11"/>
           <p:cNvSpPr/>
           <p:nvPr/>
         </p:nvSpPr>
@@ -4190,12 +4006,12 @@
           </a:solidFill>
           <a:ln w="12700">
             <a:solidFill>
-              <a:srgbClr val="E4EAF2"/>
+              <a:srgbClr val="E4E6E9"/>
             </a:solidFill>
           </a:ln>
           <a:effectLst>
             <a:outerShdw blurRad="182880" dist="64008" dir="5400000" rotWithShape="0">
-              <a:srgbClr val="2A3B55">
+              <a:srgbClr val="000000">
                 <a:alpha val="30000"/>
               </a:srgbClr>
             </a:outerShdw>
@@ -4225,7 +4041,7 @@
       </p:sp>
       <p:sp>
         <p:nvSpPr>
-          <p:cNvPr id="15" name="TextBox 14"/>
+          <p:cNvPr id="13" name="TextBox 12"/>
           <p:cNvSpPr txBox="1"/>
           <p:nvPr/>
         </p:nvSpPr>
@@ -4256,7 +4072,7 @@
             <a:r>
               <a:rPr sz="1300" b="1">
                 <a:solidFill>
-                  <a:srgbClr val="17456B"/>
+                  <a:srgbClr val="33393F"/>
                 </a:solidFill>
                 <a:latin typeface="맑은 고딕"/>
                 <a:ea typeface="맑은 고딕"/>
@@ -4276,7 +4092,7 @@
             <a:r>
               <a:rPr sz="1100" b="0">
                 <a:solidFill>
-                  <a:srgbClr val="222E40"/>
+                  <a:srgbClr val="1C1C1E"/>
                 </a:solidFill>
                 <a:latin typeface="맑은 고딕"/>
                 <a:ea typeface="맑은 고딕"/>
@@ -4296,7 +4112,7 @@
             <a:r>
               <a:rPr sz="1100" b="0">
                 <a:solidFill>
-                  <a:srgbClr val="222E40"/>
+                  <a:srgbClr val="1C1C1E"/>
                 </a:solidFill>
                 <a:latin typeface="맑은 고딕"/>
                 <a:ea typeface="맑은 고딕"/>
@@ -4308,7 +4124,7 @@
       </p:sp>
       <p:sp>
         <p:nvSpPr>
-          <p:cNvPr id="16" name="Rounded Rectangle 15"/>
+          <p:cNvPr id="14" name="Rounded Rectangle 13"/>
           <p:cNvSpPr/>
           <p:nvPr/>
         </p:nvSpPr>
@@ -4327,12 +4143,12 @@
           </a:solidFill>
           <a:ln w="12700">
             <a:solidFill>
-              <a:srgbClr val="E4EAF2"/>
+              <a:srgbClr val="E4E6E9"/>
             </a:solidFill>
           </a:ln>
           <a:effectLst>
             <a:outerShdw blurRad="182880" dist="64008" dir="5400000" rotWithShape="0">
-              <a:srgbClr val="2A3B55">
+              <a:srgbClr val="000000">
                 <a:alpha val="30000"/>
               </a:srgbClr>
             </a:outerShdw>
@@ -4362,7 +4178,7 @@
       </p:sp>
       <p:sp>
         <p:nvSpPr>
-          <p:cNvPr id="17" name="TextBox 16"/>
+          <p:cNvPr id="15" name="TextBox 14"/>
           <p:cNvSpPr txBox="1"/>
           <p:nvPr/>
         </p:nvSpPr>
@@ -4393,7 +4209,7 @@
             <a:r>
               <a:rPr sz="1300" b="1">
                 <a:solidFill>
-                  <a:srgbClr val="17456B"/>
+                  <a:srgbClr val="33393F"/>
                 </a:solidFill>
                 <a:latin typeface="맑은 고딕"/>
                 <a:ea typeface="맑은 고딕"/>
@@ -4413,7 +4229,7 @@
             <a:r>
               <a:rPr sz="1100" b="0">
                 <a:solidFill>
-                  <a:srgbClr val="222E40"/>
+                  <a:srgbClr val="1C1C1E"/>
                 </a:solidFill>
                 <a:latin typeface="맑은 고딕"/>
                 <a:ea typeface="맑은 고딕"/>
@@ -4433,7 +4249,7 @@
             <a:r>
               <a:rPr sz="1100" b="0">
                 <a:solidFill>
-                  <a:srgbClr val="222E40"/>
+                  <a:srgbClr val="1C1C1E"/>
                 </a:solidFill>
                 <a:latin typeface="맑은 고딕"/>
                 <a:ea typeface="맑은 고딕"/>
@@ -4445,7 +4261,7 @@
       </p:sp>
       <p:sp>
         <p:nvSpPr>
-          <p:cNvPr id="18" name="TextBox 17"/>
+          <p:cNvPr id="16" name="TextBox 15"/>
           <p:cNvSpPr txBox="1"/>
           <p:nvPr/>
         </p:nvSpPr>
@@ -4476,7 +4292,7 @@
             <a:r>
               <a:rPr sz="1150" b="0">
                 <a:solidFill>
-                  <a:srgbClr val="6A7B92"/>
+                  <a:srgbClr val="767A7F"/>
                 </a:solidFill>
                 <a:latin typeface="맑은 고딕"/>
                 <a:ea typeface="맑은 고딕"/>
@@ -4548,57 +4364,9 @@
           </a:p>
         </p:txBody>
       </p:sp>
-      <p:pic>
-        <p:nvPicPr>
-          <p:cNvPr id="3" name="Picture 2" descr="blob_blue.png"/>
-          <p:cNvPicPr>
-            <a:picLocks noChangeAspect="1"/>
-          </p:cNvPicPr>
-          <p:nvPr/>
-        </p:nvPicPr>
-        <p:blipFill>
-          <a:blip r:embed="rId2"/>
-          <a:stretch>
-            <a:fillRect/>
-          </a:stretch>
-        </p:blipFill>
-        <p:spPr>
-          <a:xfrm>
-            <a:off x="-3474720" y="3840480"/>
-            <a:ext cx="6583680" cy="6583680"/>
-          </a:xfrm>
-          <a:prstGeom prst="rect">
-            <a:avLst/>
-          </a:prstGeom>
-        </p:spPr>
-      </p:pic>
-      <p:pic>
-        <p:nvPicPr>
-          <p:cNvPr id="4" name="Picture 3" descr="blob_coral.png"/>
-          <p:cNvPicPr>
-            <a:picLocks noChangeAspect="1"/>
-          </p:cNvPicPr>
-          <p:nvPr/>
-        </p:nvPicPr>
-        <p:blipFill>
-          <a:blip r:embed="rId3"/>
-          <a:stretch>
-            <a:fillRect/>
-          </a:stretch>
-        </p:blipFill>
-        <p:spPr>
-          <a:xfrm>
-            <a:off x="8961120" y="-3291840"/>
-            <a:ext cx="6217920" cy="6217920"/>
-          </a:xfrm>
-          <a:prstGeom prst="rect">
-            <a:avLst/>
-          </a:prstGeom>
-        </p:spPr>
-      </p:pic>
-      <p:sp>
-        <p:nvSpPr>
-          <p:cNvPr id="5" name="Rounded Rectangle 4"/>
+      <p:sp>
+        <p:nvSpPr>
+          <p:cNvPr id="3" name="Rounded Rectangle 2"/>
           <p:cNvSpPr/>
           <p:nvPr/>
         </p:nvSpPr>
@@ -4615,10 +4383,10 @@
           <a:gradFill rotWithShape="1">
             <a:gsLst>
               <a:gs pos="0">
-                <a:srgbClr val="FF7A59"/>
+                <a:srgbClr val="3A3F45"/>
               </a:gs>
               <a:gs pos="100000">
-                <a:srgbClr val="FFB86B"/>
+                <a:srgbClr val="73787E"/>
               </a:gs>
             </a:gsLst>
             <a:lin scaled="0" ang="18900000"/>
@@ -4628,7 +4396,7 @@
           </a:ln>
           <a:effectLst>
             <a:outerShdw blurRad="109728" dist="36576" dir="5400000" rotWithShape="0">
-              <a:srgbClr val="C24E30">
+              <a:srgbClr val="000000">
                 <a:alpha val="35000"/>
               </a:srgbClr>
             </a:outerShdw>
@@ -4658,7 +4426,7 @@
       </p:sp>
       <p:sp>
         <p:nvSpPr>
-          <p:cNvPr id="6" name="TextBox 5"/>
+          <p:cNvPr id="4" name="TextBox 3"/>
           <p:cNvSpPr txBox="1"/>
           <p:nvPr/>
         </p:nvSpPr>
@@ -4689,7 +4457,7 @@
             <a:r>
               <a:rPr sz="2150" b="1">
                 <a:solidFill>
-                  <a:srgbClr val="222E40"/>
+                  <a:srgbClr val="1C1C1E"/>
                 </a:solidFill>
                 <a:latin typeface="맑은 고딕"/>
                 <a:ea typeface="맑은 고딕"/>
@@ -4699,33 +4467,61 @@
           </a:p>
         </p:txBody>
       </p:sp>
-      <p:pic>
-        <p:nvPicPr>
-          <p:cNvPr id="7" name="Picture 6" descr="glow_bar.png"/>
-          <p:cNvPicPr>
-            <a:picLocks noChangeAspect="1"/>
-          </p:cNvPicPr>
-          <p:nvPr/>
-        </p:nvPicPr>
-        <p:blipFill>
-          <a:blip r:embed="rId4"/>
-          <a:stretch>
-            <a:fillRect/>
-          </a:stretch>
-        </p:blipFill>
+      <p:sp>
+        <p:nvSpPr>
+          <p:cNvPr id="5" name="Rectangle 4"/>
+          <p:cNvSpPr/>
+          <p:nvPr/>
+        </p:nvSpPr>
         <p:spPr>
           <a:xfrm>
             <a:off x="521207" y="969264"/>
-            <a:ext cx="4206240" cy="50292"/>
+            <a:ext cx="4206240" cy="27432"/>
           </a:xfrm>
           <a:prstGeom prst="rect">
             <a:avLst/>
           </a:prstGeom>
-        </p:spPr>
-      </p:pic>
-      <p:sp>
-        <p:nvSpPr>
-          <p:cNvPr id="8" name="TextBox 7"/>
+          <a:gradFill rotWithShape="1">
+            <a:gsLst>
+              <a:gs pos="0">
+                <a:srgbClr val="2A2E33"/>
+              </a:gs>
+              <a:gs pos="100000">
+                <a:srgbClr val="FFFFFF"/>
+              </a:gs>
+            </a:gsLst>
+            <a:lin scaled="0" ang="0"/>
+          </a:gradFill>
+          <a:ln>
+            <a:noFill/>
+          </a:ln>
+          <a:effectLst/>
+        </p:spPr>
+        <p:style>
+          <a:lnRef idx="1">
+            <a:schemeClr val="accent1"/>
+          </a:lnRef>
+          <a:fillRef idx="3">
+            <a:schemeClr val="accent1"/>
+          </a:fillRef>
+          <a:effectRef idx="2">
+            <a:schemeClr val="accent1"/>
+          </a:effectRef>
+          <a:fontRef idx="minor">
+            <a:schemeClr val="lt1"/>
+          </a:fontRef>
+        </p:style>
+        <p:txBody>
+          <a:bodyPr rtlCol="0" anchor="ctr"/>
+          <a:lstStyle/>
+          <a:p>
+            <a:pPr algn="ctr"/>
+          </a:p>
+        </p:txBody>
+      </p:sp>
+      <p:sp>
+        <p:nvSpPr>
+          <p:cNvPr id="6" name="TextBox 5"/>
           <p:cNvSpPr txBox="1"/>
           <p:nvPr/>
         </p:nvSpPr>
@@ -4756,7 +4552,7 @@
             <a:r>
               <a:rPr sz="3000" b="1">
                 <a:solidFill>
-                  <a:srgbClr val="D3DDEA"/>
+                  <a:srgbClr val="D8DADD"/>
                 </a:solidFill>
                 <a:latin typeface="맑은 고딕"/>
                 <a:ea typeface="맑은 고딕"/>
@@ -4768,7 +4564,7 @@
       </p:sp>
       <p:sp>
         <p:nvSpPr>
-          <p:cNvPr id="9" name="TextBox 8"/>
+          <p:cNvPr id="7" name="TextBox 6"/>
           <p:cNvSpPr txBox="1"/>
           <p:nvPr/>
         </p:nvSpPr>
@@ -4799,7 +4595,7 @@
             <a:r>
               <a:rPr sz="850" b="0">
                 <a:solidFill>
-                  <a:srgbClr val="ABB7C7"/>
+                  <a:srgbClr val="B2B5B9"/>
                 </a:solidFill>
                 <a:latin typeface="맑은 고딕"/>
                 <a:ea typeface="맑은 고딕"/>
@@ -4811,7 +4607,7 @@
       </p:sp>
       <p:sp>
         <p:nvSpPr>
-          <p:cNvPr id="10" name="Rounded Rectangle 9"/>
+          <p:cNvPr id="8" name="Rounded Rectangle 7"/>
           <p:cNvSpPr/>
           <p:nvPr/>
         </p:nvSpPr>
@@ -4830,12 +4626,12 @@
           </a:solidFill>
           <a:ln w="12700">
             <a:solidFill>
-              <a:srgbClr val="E4EAF2"/>
+              <a:srgbClr val="E4E6E9"/>
             </a:solidFill>
           </a:ln>
           <a:effectLst>
             <a:outerShdw blurRad="182880" dist="64008" dir="5400000" rotWithShape="0">
-              <a:srgbClr val="2A3B55">
+              <a:srgbClr val="000000">
                 <a:alpha val="30000"/>
               </a:srgbClr>
             </a:outerShdw>
@@ -4865,7 +4661,7 @@
       </p:sp>
       <p:sp>
         <p:nvSpPr>
-          <p:cNvPr id="11" name="TextBox 10"/>
+          <p:cNvPr id="9" name="TextBox 8"/>
           <p:cNvSpPr txBox="1"/>
           <p:nvPr/>
         </p:nvSpPr>
@@ -4896,7 +4692,7 @@
             <a:r>
               <a:rPr sz="1300" b="1">
                 <a:solidFill>
-                  <a:srgbClr val="17456B"/>
+                  <a:srgbClr val="33393F"/>
                 </a:solidFill>
                 <a:latin typeface="맑은 고딕"/>
                 <a:ea typeface="맑은 고딕"/>
@@ -4916,7 +4712,7 @@
             <a:r>
               <a:rPr sz="1100" b="0">
                 <a:solidFill>
-                  <a:srgbClr val="222E40"/>
+                  <a:srgbClr val="1C1C1E"/>
                 </a:solidFill>
                 <a:latin typeface="맑은 고딕"/>
                 <a:ea typeface="맑은 고딕"/>
@@ -4936,7 +4732,7 @@
             <a:r>
               <a:rPr sz="1100" b="0">
                 <a:solidFill>
-                  <a:srgbClr val="222E40"/>
+                  <a:srgbClr val="1C1C1E"/>
                 </a:solidFill>
                 <a:latin typeface="맑은 고딕"/>
                 <a:ea typeface="맑은 고딕"/>
@@ -4948,7 +4744,7 @@
       </p:sp>
       <p:sp>
         <p:nvSpPr>
-          <p:cNvPr id="12" name="Rounded Rectangle 11"/>
+          <p:cNvPr id="10" name="Rounded Rectangle 9"/>
           <p:cNvSpPr/>
           <p:nvPr/>
         </p:nvSpPr>
@@ -4967,12 +4763,12 @@
           </a:solidFill>
           <a:ln w="12700">
             <a:solidFill>
-              <a:srgbClr val="E4EAF2"/>
+              <a:srgbClr val="E4E6E9"/>
             </a:solidFill>
           </a:ln>
           <a:effectLst>
             <a:outerShdw blurRad="182880" dist="64008" dir="5400000" rotWithShape="0">
-              <a:srgbClr val="2A3B55">
+              <a:srgbClr val="000000">
                 <a:alpha val="30000"/>
               </a:srgbClr>
             </a:outerShdw>
@@ -5002,7 +4798,7 @@
       </p:sp>
       <p:sp>
         <p:nvSpPr>
-          <p:cNvPr id="13" name="TextBox 12"/>
+          <p:cNvPr id="11" name="TextBox 10"/>
           <p:cNvSpPr txBox="1"/>
           <p:nvPr/>
         </p:nvSpPr>
@@ -5033,7 +4829,7 @@
             <a:r>
               <a:rPr sz="1300" b="1">
                 <a:solidFill>
-                  <a:srgbClr val="17456B"/>
+                  <a:srgbClr val="33393F"/>
                 </a:solidFill>
                 <a:latin typeface="맑은 고딕"/>
                 <a:ea typeface="맑은 고딕"/>
@@ -5053,7 +4849,7 @@
             <a:r>
               <a:rPr sz="1100" b="0">
                 <a:solidFill>
-                  <a:srgbClr val="222E40"/>
+                  <a:srgbClr val="1C1C1E"/>
                 </a:solidFill>
                 <a:latin typeface="맑은 고딕"/>
                 <a:ea typeface="맑은 고딕"/>
@@ -5073,7 +4869,7 @@
             <a:r>
               <a:rPr sz="1100" b="0">
                 <a:solidFill>
-                  <a:srgbClr val="222E40"/>
+                  <a:srgbClr val="1C1C1E"/>
                 </a:solidFill>
                 <a:latin typeface="맑은 고딕"/>
                 <a:ea typeface="맑은 고딕"/>
@@ -5093,7 +4889,7 @@
             <a:r>
               <a:rPr sz="1100" b="0">
                 <a:solidFill>
-                  <a:srgbClr val="222E40"/>
+                  <a:srgbClr val="1C1C1E"/>
                 </a:solidFill>
                 <a:latin typeface="맑은 고딕"/>
                 <a:ea typeface="맑은 고딕"/>
@@ -5113,7 +4909,7 @@
             <a:r>
               <a:rPr sz="1100" b="0">
                 <a:solidFill>
-                  <a:srgbClr val="222E40"/>
+                  <a:srgbClr val="1C1C1E"/>
                 </a:solidFill>
                 <a:latin typeface="맑은 고딕"/>
                 <a:ea typeface="맑은 고딕"/>
@@ -5125,7 +4921,7 @@
       </p:sp>
       <p:sp>
         <p:nvSpPr>
-          <p:cNvPr id="14" name="Rounded Rectangle 13"/>
+          <p:cNvPr id="12" name="Rounded Rectangle 11"/>
           <p:cNvSpPr/>
           <p:nvPr/>
         </p:nvSpPr>
@@ -5147,7 +4943,7 @@
           </a:ln>
           <a:effectLst>
             <a:outerShdw blurRad="219456" dist="64008" dir="5400000" rotWithShape="0">
-              <a:srgbClr val="2A3B55">
+              <a:srgbClr val="000000">
                 <a:alpha val="34000"/>
               </a:srgbClr>
             </a:outerShdw>
@@ -5177,14 +4973,14 @@
       </p:sp>
       <p:pic>
         <p:nvPicPr>
-          <p:cNvPr id="15" name="Picture 14" descr="그림2_등급별_지원율.png"/>
+          <p:cNvPr id="13" name="Picture 12" descr="그림2_등급별_지원율.png"/>
           <p:cNvPicPr>
             <a:picLocks noChangeAspect="1"/>
           </p:cNvPicPr>
           <p:nvPr/>
         </p:nvPicPr>
         <p:blipFill>
-          <a:blip r:embed="rId5"/>
+          <a:blip r:embed="rId2"/>
           <a:stretch>
             <a:fillRect/>
           </a:stretch>
@@ -5261,57 +5057,9 @@
           </a:p>
         </p:txBody>
       </p:sp>
-      <p:pic>
-        <p:nvPicPr>
-          <p:cNvPr id="3" name="Picture 2" descr="blob_blue.png"/>
-          <p:cNvPicPr>
-            <a:picLocks noChangeAspect="1"/>
-          </p:cNvPicPr>
-          <p:nvPr/>
-        </p:nvPicPr>
-        <p:blipFill>
-          <a:blip r:embed="rId2"/>
-          <a:stretch>
-            <a:fillRect/>
-          </a:stretch>
-        </p:blipFill>
-        <p:spPr>
-          <a:xfrm>
-            <a:off x="-3474720" y="3840480"/>
-            <a:ext cx="6583680" cy="6583680"/>
-          </a:xfrm>
-          <a:prstGeom prst="rect">
-            <a:avLst/>
-          </a:prstGeom>
-        </p:spPr>
-      </p:pic>
-      <p:pic>
-        <p:nvPicPr>
-          <p:cNvPr id="4" name="Picture 3" descr="blob_coral.png"/>
-          <p:cNvPicPr>
-            <a:picLocks noChangeAspect="1"/>
-          </p:cNvPicPr>
-          <p:nvPr/>
-        </p:nvPicPr>
-        <p:blipFill>
-          <a:blip r:embed="rId3"/>
-          <a:stretch>
-            <a:fillRect/>
-          </a:stretch>
-        </p:blipFill>
-        <p:spPr>
-          <a:xfrm>
-            <a:off x="8961120" y="-3291840"/>
-            <a:ext cx="6217920" cy="6217920"/>
-          </a:xfrm>
-          <a:prstGeom prst="rect">
-            <a:avLst/>
-          </a:prstGeom>
-        </p:spPr>
-      </p:pic>
-      <p:sp>
-        <p:nvSpPr>
-          <p:cNvPr id="5" name="Rounded Rectangle 4"/>
+      <p:sp>
+        <p:nvSpPr>
+          <p:cNvPr id="3" name="Rounded Rectangle 2"/>
           <p:cNvSpPr/>
           <p:nvPr/>
         </p:nvSpPr>
@@ -5328,10 +5076,10 @@
           <a:gradFill rotWithShape="1">
             <a:gsLst>
               <a:gs pos="0">
-                <a:srgbClr val="FF7A59"/>
+                <a:srgbClr val="3A3F45"/>
               </a:gs>
               <a:gs pos="100000">
-                <a:srgbClr val="FFB86B"/>
+                <a:srgbClr val="73787E"/>
               </a:gs>
             </a:gsLst>
             <a:lin scaled="0" ang="18900000"/>
@@ -5341,7 +5089,7 @@
           </a:ln>
           <a:effectLst>
             <a:outerShdw blurRad="109728" dist="36576" dir="5400000" rotWithShape="0">
-              <a:srgbClr val="C24E30">
+              <a:srgbClr val="000000">
                 <a:alpha val="35000"/>
               </a:srgbClr>
             </a:outerShdw>
@@ -5371,7 +5119,7 @@
       </p:sp>
       <p:sp>
         <p:nvSpPr>
-          <p:cNvPr id="6" name="TextBox 5"/>
+          <p:cNvPr id="4" name="TextBox 3"/>
           <p:cNvSpPr txBox="1"/>
           <p:nvPr/>
         </p:nvSpPr>
@@ -5402,7 +5150,7 @@
             <a:r>
               <a:rPr sz="2150" b="1">
                 <a:solidFill>
-                  <a:srgbClr val="222E40"/>
+                  <a:srgbClr val="1C1C1E"/>
                 </a:solidFill>
                 <a:latin typeface="맑은 고딕"/>
                 <a:ea typeface="맑은 고딕"/>
@@ -5412,33 +5160,61 @@
           </a:p>
         </p:txBody>
       </p:sp>
-      <p:pic>
-        <p:nvPicPr>
-          <p:cNvPr id="7" name="Picture 6" descr="glow_bar.png"/>
-          <p:cNvPicPr>
-            <a:picLocks noChangeAspect="1"/>
-          </p:cNvPicPr>
-          <p:nvPr/>
-        </p:nvPicPr>
-        <p:blipFill>
-          <a:blip r:embed="rId4"/>
-          <a:stretch>
-            <a:fillRect/>
-          </a:stretch>
-        </p:blipFill>
+      <p:sp>
+        <p:nvSpPr>
+          <p:cNvPr id="5" name="Rectangle 4"/>
+          <p:cNvSpPr/>
+          <p:nvPr/>
+        </p:nvSpPr>
         <p:spPr>
           <a:xfrm>
             <a:off x="521207" y="969264"/>
-            <a:ext cx="4206240" cy="50292"/>
+            <a:ext cx="4206240" cy="27432"/>
           </a:xfrm>
           <a:prstGeom prst="rect">
             <a:avLst/>
           </a:prstGeom>
-        </p:spPr>
-      </p:pic>
-      <p:sp>
-        <p:nvSpPr>
-          <p:cNvPr id="8" name="TextBox 7"/>
+          <a:gradFill rotWithShape="1">
+            <a:gsLst>
+              <a:gs pos="0">
+                <a:srgbClr val="2A2E33"/>
+              </a:gs>
+              <a:gs pos="100000">
+                <a:srgbClr val="FFFFFF"/>
+              </a:gs>
+            </a:gsLst>
+            <a:lin scaled="0" ang="0"/>
+          </a:gradFill>
+          <a:ln>
+            <a:noFill/>
+          </a:ln>
+          <a:effectLst/>
+        </p:spPr>
+        <p:style>
+          <a:lnRef idx="1">
+            <a:schemeClr val="accent1"/>
+          </a:lnRef>
+          <a:fillRef idx="3">
+            <a:schemeClr val="accent1"/>
+          </a:fillRef>
+          <a:effectRef idx="2">
+            <a:schemeClr val="accent1"/>
+          </a:effectRef>
+          <a:fontRef idx="minor">
+            <a:schemeClr val="lt1"/>
+          </a:fontRef>
+        </p:style>
+        <p:txBody>
+          <a:bodyPr rtlCol="0" anchor="ctr"/>
+          <a:lstStyle/>
+          <a:p>
+            <a:pPr algn="ctr"/>
+          </a:p>
+        </p:txBody>
+      </p:sp>
+      <p:sp>
+        <p:nvSpPr>
+          <p:cNvPr id="6" name="TextBox 5"/>
           <p:cNvSpPr txBox="1"/>
           <p:nvPr/>
         </p:nvSpPr>
@@ -5469,7 +5245,7 @@
             <a:r>
               <a:rPr sz="3000" b="1">
                 <a:solidFill>
-                  <a:srgbClr val="D3DDEA"/>
+                  <a:srgbClr val="D8DADD"/>
                 </a:solidFill>
                 <a:latin typeface="맑은 고딕"/>
                 <a:ea typeface="맑은 고딕"/>
@@ -5481,7 +5257,7 @@
       </p:sp>
       <p:sp>
         <p:nvSpPr>
-          <p:cNvPr id="9" name="TextBox 8"/>
+          <p:cNvPr id="7" name="TextBox 6"/>
           <p:cNvSpPr txBox="1"/>
           <p:nvPr/>
         </p:nvSpPr>
@@ -5512,7 +5288,7 @@
             <a:r>
               <a:rPr sz="1250" b="0">
                 <a:solidFill>
-                  <a:srgbClr val="6A7B92"/>
+                  <a:srgbClr val="767A7F"/>
                 </a:solidFill>
                 <a:latin typeface="맑은 고딕"/>
                 <a:ea typeface="맑은 고딕"/>
@@ -5524,7 +5300,7 @@
       </p:sp>
       <p:sp>
         <p:nvSpPr>
-          <p:cNvPr id="10" name="TextBox 9"/>
+          <p:cNvPr id="8" name="TextBox 7"/>
           <p:cNvSpPr txBox="1"/>
           <p:nvPr/>
         </p:nvSpPr>
@@ -5555,7 +5331,7 @@
             <a:r>
               <a:rPr sz="850" b="0">
                 <a:solidFill>
-                  <a:srgbClr val="ABB7C7"/>
+                  <a:srgbClr val="B2B5B9"/>
                 </a:solidFill>
                 <a:latin typeface="맑은 고딕"/>
                 <a:ea typeface="맑은 고딕"/>
@@ -5567,7 +5343,7 @@
       </p:sp>
       <p:graphicFrame>
         <p:nvGraphicFramePr>
-          <p:cNvPr id="11" name="Table 10"/>
+          <p:cNvPr id="9" name="Table 8"/>
           <p:cNvGraphicFramePr>
             <a:graphicFrameLocks noGrp="1"/>
           </p:cNvGraphicFramePr>
@@ -5688,7 +5464,7 @@
                       <a:r>
                         <a:rPr sz="1100" b="0">
                           <a:solidFill>
-                            <a:srgbClr val="222E40"/>
+                            <a:srgbClr val="1C1C1E"/>
                           </a:solidFill>
                           <a:latin typeface="맑은 고딕"/>
                           <a:ea typeface="맑은 고딕"/>
@@ -5716,7 +5492,7 @@
                       <a:r>
                         <a:rPr sz="1100" b="0">
                           <a:solidFill>
-                            <a:srgbClr val="222E40"/>
+                            <a:srgbClr val="1C1C1E"/>
                           </a:solidFill>
                           <a:latin typeface="맑은 고딕"/>
                           <a:ea typeface="맑은 고딕"/>
@@ -5744,7 +5520,7 @@
                       <a:r>
                         <a:rPr sz="1100" b="0">
                           <a:solidFill>
-                            <a:srgbClr val="222E40"/>
+                            <a:srgbClr val="1C1C1E"/>
                           </a:solidFill>
                           <a:latin typeface="맑은 고딕"/>
                           <a:ea typeface="맑은 고딕"/>
@@ -5774,7 +5550,7 @@
                       <a:r>
                         <a:rPr sz="1100" b="0">
                           <a:solidFill>
-                            <a:srgbClr val="222E40"/>
+                            <a:srgbClr val="1C1C1E"/>
                           </a:solidFill>
                           <a:latin typeface="맑은 고딕"/>
                           <a:ea typeface="맑은 고딕"/>
@@ -5785,7 +5561,7 @@
                   </a:txBody>
                   <a:tcPr marT="27432" marB="27432" marL="73152" marR="73152" anchor="ctr">
                     <a:solidFill>
-                      <a:srgbClr val="F5F8FC"/>
+                      <a:srgbClr val="F6F7F8"/>
                     </a:solidFill>
                   </a:tcPr>
                 </a:tc>
@@ -5802,7 +5578,7 @@
                       <a:r>
                         <a:rPr sz="1100" b="0">
                           <a:solidFill>
-                            <a:srgbClr val="222E40"/>
+                            <a:srgbClr val="1C1C1E"/>
                           </a:solidFill>
                           <a:latin typeface="맑은 고딕"/>
                           <a:ea typeface="맑은 고딕"/>
@@ -5813,7 +5589,7 @@
                   </a:txBody>
                   <a:tcPr marT="27432" marB="27432" marL="73152" marR="73152" anchor="ctr">
                     <a:solidFill>
-                      <a:srgbClr val="F5F8FC"/>
+                      <a:srgbClr val="F6F7F8"/>
                     </a:solidFill>
                   </a:tcPr>
                 </a:tc>
@@ -5830,7 +5606,7 @@
                       <a:r>
                         <a:rPr sz="1100" b="0">
                           <a:solidFill>
-                            <a:srgbClr val="222E40"/>
+                            <a:srgbClr val="1C1C1E"/>
                           </a:solidFill>
                           <a:latin typeface="맑은 고딕"/>
                           <a:ea typeface="맑은 고딕"/>
@@ -5841,7 +5617,7 @@
                   </a:txBody>
                   <a:tcPr marT="27432" marB="27432" marL="73152" marR="73152" anchor="ctr">
                     <a:solidFill>
-                      <a:srgbClr val="F5F8FC"/>
+                      <a:srgbClr val="F6F7F8"/>
                     </a:solidFill>
                   </a:tcPr>
                 </a:tc>
@@ -5860,7 +5636,7 @@
                       <a:r>
                         <a:rPr sz="1100" b="0">
                           <a:solidFill>
-                            <a:srgbClr val="222E40"/>
+                            <a:srgbClr val="1C1C1E"/>
                           </a:solidFill>
                           <a:latin typeface="맑은 고딕"/>
                           <a:ea typeface="맑은 고딕"/>
@@ -5888,7 +5664,7 @@
                       <a:r>
                         <a:rPr sz="1100" b="0">
                           <a:solidFill>
-                            <a:srgbClr val="222E40"/>
+                            <a:srgbClr val="1C1C1E"/>
                           </a:solidFill>
                           <a:latin typeface="맑은 고딕"/>
                           <a:ea typeface="맑은 고딕"/>
@@ -5916,7 +5692,7 @@
                       <a:r>
                         <a:rPr sz="1100" b="0">
                           <a:solidFill>
-                            <a:srgbClr val="222E40"/>
+                            <a:srgbClr val="1C1C1E"/>
                           </a:solidFill>
                           <a:latin typeface="맑은 고딕"/>
                           <a:ea typeface="맑은 고딕"/>
@@ -5946,7 +5722,7 @@
                       <a:r>
                         <a:rPr sz="1100" b="0">
                           <a:solidFill>
-                            <a:srgbClr val="222E40"/>
+                            <a:srgbClr val="1C1C1E"/>
                           </a:solidFill>
                           <a:latin typeface="맑은 고딕"/>
                           <a:ea typeface="맑은 고딕"/>
@@ -5957,7 +5733,7 @@
                   </a:txBody>
                   <a:tcPr marT="27432" marB="27432" marL="73152" marR="73152" anchor="ctr">
                     <a:solidFill>
-                      <a:srgbClr val="F5F8FC"/>
+                      <a:srgbClr val="F6F7F8"/>
                     </a:solidFill>
                   </a:tcPr>
                 </a:tc>
@@ -5974,7 +5750,7 @@
                       <a:r>
                         <a:rPr sz="1100" b="0">
                           <a:solidFill>
-                            <a:srgbClr val="222E40"/>
+                            <a:srgbClr val="1C1C1E"/>
                           </a:solidFill>
                           <a:latin typeface="맑은 고딕"/>
                           <a:ea typeface="맑은 고딕"/>
@@ -5985,7 +5761,7 @@
                   </a:txBody>
                   <a:tcPr marT="27432" marB="27432" marL="73152" marR="73152" anchor="ctr">
                     <a:solidFill>
-                      <a:srgbClr val="F5F8FC"/>
+                      <a:srgbClr val="F6F7F8"/>
                     </a:solidFill>
                   </a:tcPr>
                 </a:tc>
@@ -6002,7 +5778,7 @@
                       <a:r>
                         <a:rPr sz="1100" b="0">
                           <a:solidFill>
-                            <a:srgbClr val="222E40"/>
+                            <a:srgbClr val="1C1C1E"/>
                           </a:solidFill>
                           <a:latin typeface="맑은 고딕"/>
                           <a:ea typeface="맑은 고딕"/>
@@ -6013,7 +5789,7 @@
                   </a:txBody>
                   <a:tcPr marT="27432" marB="27432" marL="73152" marR="73152" anchor="ctr">
                     <a:solidFill>
-                      <a:srgbClr val="F5F8FC"/>
+                      <a:srgbClr val="F6F7F8"/>
                     </a:solidFill>
                   </a:tcPr>
                 </a:tc>
@@ -6032,7 +5808,7 @@
                       <a:r>
                         <a:rPr sz="1100" b="1">
                           <a:solidFill>
-                            <a:srgbClr val="E85D42"/>
+                            <a:srgbClr val="000000"/>
                           </a:solidFill>
                           <a:latin typeface="맑은 고딕"/>
                           <a:ea typeface="맑은 고딕"/>
@@ -6043,7 +5819,7 @@
                   </a:txBody>
                   <a:tcPr marT="27432" marB="27432" marL="73152" marR="73152" anchor="ctr">
                     <a:solidFill>
-                      <a:srgbClr val="FFEDE6"/>
+                      <a:srgbClr val="E3E5E8"/>
                     </a:solidFill>
                   </a:tcPr>
                 </a:tc>
@@ -6060,7 +5836,7 @@
                       <a:r>
                         <a:rPr sz="1100" b="1">
                           <a:solidFill>
-                            <a:srgbClr val="E85D42"/>
+                            <a:srgbClr val="000000"/>
                           </a:solidFill>
                           <a:latin typeface="맑은 고딕"/>
                           <a:ea typeface="맑은 고딕"/>
@@ -6071,7 +5847,7 @@
                   </a:txBody>
                   <a:tcPr marT="27432" marB="27432" marL="73152" marR="73152" anchor="ctr">
                     <a:solidFill>
-                      <a:srgbClr val="FFEDE6"/>
+                      <a:srgbClr val="E3E5E8"/>
                     </a:solidFill>
                   </a:tcPr>
                 </a:tc>
@@ -6088,7 +5864,7 @@
                       <a:r>
                         <a:rPr sz="1100" b="1">
                           <a:solidFill>
-                            <a:srgbClr val="E85D42"/>
+                            <a:srgbClr val="000000"/>
                           </a:solidFill>
                           <a:latin typeface="맑은 고딕"/>
                           <a:ea typeface="맑은 고딕"/>
@@ -6099,7 +5875,7 @@
                   </a:txBody>
                   <a:tcPr marT="27432" marB="27432" marL="73152" marR="73152" anchor="ctr">
                     <a:solidFill>
-                      <a:srgbClr val="FFEDE6"/>
+                      <a:srgbClr val="E3E5E8"/>
                     </a:solidFill>
                   </a:tcPr>
                 </a:tc>
@@ -6110,7 +5886,7 @@
       </p:graphicFrame>
       <p:sp>
         <p:nvSpPr>
-          <p:cNvPr id="12" name="Rounded Rectangle 11"/>
+          <p:cNvPr id="10" name="Rounded Rectangle 9"/>
           <p:cNvSpPr/>
           <p:nvPr/>
         </p:nvSpPr>
@@ -6129,12 +5905,12 @@
           </a:solidFill>
           <a:ln w="12700">
             <a:solidFill>
-              <a:srgbClr val="E4EAF2"/>
+              <a:srgbClr val="E4E6E9"/>
             </a:solidFill>
           </a:ln>
           <a:effectLst>
             <a:outerShdw blurRad="182880" dist="64008" dir="5400000" rotWithShape="0">
-              <a:srgbClr val="2A3B55">
+              <a:srgbClr val="000000">
                 <a:alpha val="30000"/>
               </a:srgbClr>
             </a:outerShdw>
@@ -6164,7 +5940,7 @@
       </p:sp>
       <p:sp>
         <p:nvSpPr>
-          <p:cNvPr id="13" name="TextBox 12"/>
+          <p:cNvPr id="11" name="TextBox 10"/>
           <p:cNvSpPr txBox="1"/>
           <p:nvPr/>
         </p:nvSpPr>
@@ -6195,7 +5971,7 @@
             <a:r>
               <a:rPr sz="1300" b="1">
                 <a:solidFill>
-                  <a:srgbClr val="17456B"/>
+                  <a:srgbClr val="33393F"/>
                 </a:solidFill>
                 <a:latin typeface="맑은 고딕"/>
                 <a:ea typeface="맑은 고딕"/>
@@ -6215,7 +5991,7 @@
             <a:r>
               <a:rPr sz="1100" b="0">
                 <a:solidFill>
-                  <a:srgbClr val="222E40"/>
+                  <a:srgbClr val="1C1C1E"/>
                 </a:solidFill>
                 <a:latin typeface="맑은 고딕"/>
                 <a:ea typeface="맑은 고딕"/>
@@ -6235,7 +6011,7 @@
             <a:r>
               <a:rPr sz="1100" b="0">
                 <a:solidFill>
-                  <a:srgbClr val="222E40"/>
+                  <a:srgbClr val="1C1C1E"/>
                 </a:solidFill>
                 <a:latin typeface="맑은 고딕"/>
                 <a:ea typeface="맑은 고딕"/>
@@ -6255,7 +6031,7 @@
             <a:r>
               <a:rPr sz="1100" b="0">
                 <a:solidFill>
-                  <a:srgbClr val="222E40"/>
+                  <a:srgbClr val="1C1C1E"/>
                 </a:solidFill>
                 <a:latin typeface="맑은 고딕"/>
                 <a:ea typeface="맑은 고딕"/>
@@ -6327,57 +6103,9 @@
           </a:p>
         </p:txBody>
       </p:sp>
-      <p:pic>
-        <p:nvPicPr>
-          <p:cNvPr id="3" name="Picture 2" descr="blob_blue.png"/>
-          <p:cNvPicPr>
-            <a:picLocks noChangeAspect="1"/>
-          </p:cNvPicPr>
-          <p:nvPr/>
-        </p:nvPicPr>
-        <p:blipFill>
-          <a:blip r:embed="rId2"/>
-          <a:stretch>
-            <a:fillRect/>
-          </a:stretch>
-        </p:blipFill>
-        <p:spPr>
-          <a:xfrm>
-            <a:off x="-3474720" y="3840480"/>
-            <a:ext cx="6583680" cy="6583680"/>
-          </a:xfrm>
-          <a:prstGeom prst="rect">
-            <a:avLst/>
-          </a:prstGeom>
-        </p:spPr>
-      </p:pic>
-      <p:pic>
-        <p:nvPicPr>
-          <p:cNvPr id="4" name="Picture 3" descr="blob_coral.png"/>
-          <p:cNvPicPr>
-            <a:picLocks noChangeAspect="1"/>
-          </p:cNvPicPr>
-          <p:nvPr/>
-        </p:nvPicPr>
-        <p:blipFill>
-          <a:blip r:embed="rId3"/>
-          <a:stretch>
-            <a:fillRect/>
-          </a:stretch>
-        </p:blipFill>
-        <p:spPr>
-          <a:xfrm>
-            <a:off x="8961120" y="-3291840"/>
-            <a:ext cx="6217920" cy="6217920"/>
-          </a:xfrm>
-          <a:prstGeom prst="rect">
-            <a:avLst/>
-          </a:prstGeom>
-        </p:spPr>
-      </p:pic>
-      <p:sp>
-        <p:nvSpPr>
-          <p:cNvPr id="5" name="Rounded Rectangle 4"/>
+      <p:sp>
+        <p:nvSpPr>
+          <p:cNvPr id="3" name="Rounded Rectangle 2"/>
           <p:cNvSpPr/>
           <p:nvPr/>
         </p:nvSpPr>
@@ -6394,10 +6122,10 @@
           <a:gradFill rotWithShape="1">
             <a:gsLst>
               <a:gs pos="0">
-                <a:srgbClr val="FF7A59"/>
+                <a:srgbClr val="3A3F45"/>
               </a:gs>
               <a:gs pos="100000">
-                <a:srgbClr val="FFB86B"/>
+                <a:srgbClr val="73787E"/>
               </a:gs>
             </a:gsLst>
             <a:lin scaled="0" ang="18900000"/>
@@ -6407,7 +6135,7 @@
           </a:ln>
           <a:effectLst>
             <a:outerShdw blurRad="109728" dist="36576" dir="5400000" rotWithShape="0">
-              <a:srgbClr val="C24E30">
+              <a:srgbClr val="000000">
                 <a:alpha val="35000"/>
               </a:srgbClr>
             </a:outerShdw>
@@ -6437,7 +6165,7 @@
       </p:sp>
       <p:sp>
         <p:nvSpPr>
-          <p:cNvPr id="6" name="TextBox 5"/>
+          <p:cNvPr id="4" name="TextBox 3"/>
           <p:cNvSpPr txBox="1"/>
           <p:nvPr/>
         </p:nvSpPr>
@@ -6468,7 +6196,7 @@
             <a:r>
               <a:rPr sz="2150" b="1">
                 <a:solidFill>
-                  <a:srgbClr val="222E40"/>
+                  <a:srgbClr val="1C1C1E"/>
                 </a:solidFill>
                 <a:latin typeface="맑은 고딕"/>
                 <a:ea typeface="맑은 고딕"/>
@@ -6478,33 +6206,61 @@
           </a:p>
         </p:txBody>
       </p:sp>
-      <p:pic>
-        <p:nvPicPr>
-          <p:cNvPr id="7" name="Picture 6" descr="glow_bar.png"/>
-          <p:cNvPicPr>
-            <a:picLocks noChangeAspect="1"/>
-          </p:cNvPicPr>
-          <p:nvPr/>
-        </p:nvPicPr>
-        <p:blipFill>
-          <a:blip r:embed="rId4"/>
-          <a:stretch>
-            <a:fillRect/>
-          </a:stretch>
-        </p:blipFill>
+      <p:sp>
+        <p:nvSpPr>
+          <p:cNvPr id="5" name="Rectangle 4"/>
+          <p:cNvSpPr/>
+          <p:nvPr/>
+        </p:nvSpPr>
         <p:spPr>
           <a:xfrm>
             <a:off x="521207" y="969264"/>
-            <a:ext cx="4206240" cy="50292"/>
+            <a:ext cx="4206240" cy="27432"/>
           </a:xfrm>
           <a:prstGeom prst="rect">
             <a:avLst/>
           </a:prstGeom>
-        </p:spPr>
-      </p:pic>
-      <p:sp>
-        <p:nvSpPr>
-          <p:cNvPr id="8" name="TextBox 7"/>
+          <a:gradFill rotWithShape="1">
+            <a:gsLst>
+              <a:gs pos="0">
+                <a:srgbClr val="2A2E33"/>
+              </a:gs>
+              <a:gs pos="100000">
+                <a:srgbClr val="FFFFFF"/>
+              </a:gs>
+            </a:gsLst>
+            <a:lin scaled="0" ang="0"/>
+          </a:gradFill>
+          <a:ln>
+            <a:noFill/>
+          </a:ln>
+          <a:effectLst/>
+        </p:spPr>
+        <p:style>
+          <a:lnRef idx="1">
+            <a:schemeClr val="accent1"/>
+          </a:lnRef>
+          <a:fillRef idx="3">
+            <a:schemeClr val="accent1"/>
+          </a:fillRef>
+          <a:effectRef idx="2">
+            <a:schemeClr val="accent1"/>
+          </a:effectRef>
+          <a:fontRef idx="minor">
+            <a:schemeClr val="lt1"/>
+          </a:fontRef>
+        </p:style>
+        <p:txBody>
+          <a:bodyPr rtlCol="0" anchor="ctr"/>
+          <a:lstStyle/>
+          <a:p>
+            <a:pPr algn="ctr"/>
+          </a:p>
+        </p:txBody>
+      </p:sp>
+      <p:sp>
+        <p:nvSpPr>
+          <p:cNvPr id="6" name="TextBox 5"/>
           <p:cNvSpPr txBox="1"/>
           <p:nvPr/>
         </p:nvSpPr>
@@ -6535,7 +6291,7 @@
             <a:r>
               <a:rPr sz="3000" b="1">
                 <a:solidFill>
-                  <a:srgbClr val="D3DDEA"/>
+                  <a:srgbClr val="D8DADD"/>
                 </a:solidFill>
                 <a:latin typeface="맑은 고딕"/>
                 <a:ea typeface="맑은 고딕"/>
@@ -6547,7 +6303,7 @@
       </p:sp>
       <p:sp>
         <p:nvSpPr>
-          <p:cNvPr id="9" name="TextBox 8"/>
+          <p:cNvPr id="7" name="TextBox 6"/>
           <p:cNvSpPr txBox="1"/>
           <p:nvPr/>
         </p:nvSpPr>
@@ -6578,7 +6334,7 @@
             <a:r>
               <a:rPr sz="850" b="0">
                 <a:solidFill>
-                  <a:srgbClr val="ABB7C7"/>
+                  <a:srgbClr val="B2B5B9"/>
                 </a:solidFill>
                 <a:latin typeface="맑은 고딕"/>
                 <a:ea typeface="맑은 고딕"/>
@@ -6590,7 +6346,7 @@
       </p:sp>
       <p:sp>
         <p:nvSpPr>
-          <p:cNvPr id="10" name="Rounded Rectangle 9"/>
+          <p:cNvPr id="8" name="Rounded Rectangle 7"/>
           <p:cNvSpPr/>
           <p:nvPr/>
         </p:nvSpPr>
@@ -6609,12 +6365,12 @@
           </a:solidFill>
           <a:ln w="12700">
             <a:solidFill>
-              <a:srgbClr val="E4EAF2"/>
+              <a:srgbClr val="E4E6E9"/>
             </a:solidFill>
           </a:ln>
           <a:effectLst>
             <a:outerShdw blurRad="182880" dist="64008" dir="5400000" rotWithShape="0">
-              <a:srgbClr val="2A3B55">
+              <a:srgbClr val="000000">
                 <a:alpha val="30000"/>
               </a:srgbClr>
             </a:outerShdw>
@@ -6644,7 +6400,7 @@
       </p:sp>
       <p:sp>
         <p:nvSpPr>
-          <p:cNvPr id="11" name="TextBox 10"/>
+          <p:cNvPr id="9" name="TextBox 8"/>
           <p:cNvSpPr txBox="1"/>
           <p:nvPr/>
         </p:nvSpPr>
@@ -6675,7 +6431,7 @@
             <a:r>
               <a:rPr sz="1300" b="1">
                 <a:solidFill>
-                  <a:srgbClr val="17456B"/>
+                  <a:srgbClr val="33393F"/>
                 </a:solidFill>
                 <a:latin typeface="맑은 고딕"/>
                 <a:ea typeface="맑은 고딕"/>
@@ -6695,7 +6451,7 @@
             <a:r>
               <a:rPr sz="1100" b="0">
                 <a:solidFill>
-                  <a:srgbClr val="222E40"/>
+                  <a:srgbClr val="1C1C1E"/>
                 </a:solidFill>
                 <a:latin typeface="맑은 고딕"/>
                 <a:ea typeface="맑은 고딕"/>
@@ -6715,7 +6471,7 @@
             <a:r>
               <a:rPr sz="1100" b="0">
                 <a:solidFill>
-                  <a:srgbClr val="222E40"/>
+                  <a:srgbClr val="1C1C1E"/>
                 </a:solidFill>
                 <a:latin typeface="맑은 고딕"/>
                 <a:ea typeface="맑은 고딕"/>
@@ -6735,7 +6491,7 @@
             <a:r>
               <a:rPr sz="1100" b="0">
                 <a:solidFill>
-                  <a:srgbClr val="222E40"/>
+                  <a:srgbClr val="1C1C1E"/>
                 </a:solidFill>
                 <a:latin typeface="맑은 고딕"/>
                 <a:ea typeface="맑은 고딕"/>
@@ -6747,7 +6503,7 @@
       </p:sp>
       <p:sp>
         <p:nvSpPr>
-          <p:cNvPr id="12" name="Rounded Rectangle 11"/>
+          <p:cNvPr id="10" name="Rounded Rectangle 9"/>
           <p:cNvSpPr/>
           <p:nvPr/>
         </p:nvSpPr>
@@ -6766,12 +6522,12 @@
           </a:solidFill>
           <a:ln w="12700">
             <a:solidFill>
-              <a:srgbClr val="E4EAF2"/>
+              <a:srgbClr val="E4E6E9"/>
             </a:solidFill>
           </a:ln>
           <a:effectLst>
             <a:outerShdw blurRad="182880" dist="64008" dir="5400000" rotWithShape="0">
-              <a:srgbClr val="2A3B55">
+              <a:srgbClr val="000000">
                 <a:alpha val="30000"/>
               </a:srgbClr>
             </a:outerShdw>
@@ -6801,7 +6557,7 @@
       </p:sp>
       <p:sp>
         <p:nvSpPr>
-          <p:cNvPr id="13" name="TextBox 12"/>
+          <p:cNvPr id="11" name="TextBox 10"/>
           <p:cNvSpPr txBox="1"/>
           <p:nvPr/>
         </p:nvSpPr>
@@ -6832,7 +6588,7 @@
             <a:r>
               <a:rPr sz="1300" b="1">
                 <a:solidFill>
-                  <a:srgbClr val="17456B"/>
+                  <a:srgbClr val="33393F"/>
                 </a:solidFill>
                 <a:latin typeface="맑은 고딕"/>
                 <a:ea typeface="맑은 고딕"/>
@@ -6852,7 +6608,7 @@
             <a:r>
               <a:rPr sz="1100" b="0">
                 <a:solidFill>
-                  <a:srgbClr val="222E40"/>
+                  <a:srgbClr val="1C1C1E"/>
                 </a:solidFill>
                 <a:latin typeface="맑은 고딕"/>
                 <a:ea typeface="맑은 고딕"/>
@@ -6872,7 +6628,7 @@
             <a:r>
               <a:rPr sz="1100" b="0">
                 <a:solidFill>
-                  <a:srgbClr val="222E40"/>
+                  <a:srgbClr val="1C1C1E"/>
                 </a:solidFill>
                 <a:latin typeface="맑은 고딕"/>
                 <a:ea typeface="맑은 고딕"/>
@@ -6892,7 +6648,7 @@
             <a:r>
               <a:rPr sz="1100" b="0">
                 <a:solidFill>
-                  <a:srgbClr val="222E40"/>
+                  <a:srgbClr val="1C1C1E"/>
                 </a:solidFill>
                 <a:latin typeface="맑은 고딕"/>
                 <a:ea typeface="맑은 고딕"/>
@@ -6904,7 +6660,7 @@
       </p:sp>
       <p:sp>
         <p:nvSpPr>
-          <p:cNvPr id="14" name="Rounded Rectangle 13"/>
+          <p:cNvPr id="12" name="Rounded Rectangle 11"/>
           <p:cNvSpPr/>
           <p:nvPr/>
         </p:nvSpPr>
@@ -6926,7 +6682,7 @@
           </a:ln>
           <a:effectLst>
             <a:outerShdw blurRad="219456" dist="64008" dir="5400000" rotWithShape="0">
-              <a:srgbClr val="2A3B55">
+              <a:srgbClr val="000000">
                 <a:alpha val="34000"/>
               </a:srgbClr>
             </a:outerShdw>
@@ -6956,14 +6712,14 @@
       </p:sp>
       <p:pic>
         <p:nvPicPr>
-          <p:cNvPr id="15" name="Picture 14" descr="그림1_심도부담_산점도.png"/>
+          <p:cNvPr id="13" name="Picture 12" descr="그림1_심도부담_산점도.png"/>
           <p:cNvPicPr>
             <a:picLocks noChangeAspect="1"/>
           </p:cNvPicPr>
           <p:nvPr/>
         </p:nvPicPr>
         <p:blipFill>
-          <a:blip r:embed="rId5"/>
+          <a:blip r:embed="rId2"/>
           <a:stretch>
             <a:fillRect/>
           </a:stretch>
@@ -7040,57 +6796,9 @@
           </a:p>
         </p:txBody>
       </p:sp>
-      <p:pic>
-        <p:nvPicPr>
-          <p:cNvPr id="3" name="Picture 2" descr="blob_blue.png"/>
-          <p:cNvPicPr>
-            <a:picLocks noChangeAspect="1"/>
-          </p:cNvPicPr>
-          <p:nvPr/>
-        </p:nvPicPr>
-        <p:blipFill>
-          <a:blip r:embed="rId2"/>
-          <a:stretch>
-            <a:fillRect/>
-          </a:stretch>
-        </p:blipFill>
-        <p:spPr>
-          <a:xfrm>
-            <a:off x="-3474720" y="3840480"/>
-            <a:ext cx="6583680" cy="6583680"/>
-          </a:xfrm>
-          <a:prstGeom prst="rect">
-            <a:avLst/>
-          </a:prstGeom>
-        </p:spPr>
-      </p:pic>
-      <p:pic>
-        <p:nvPicPr>
-          <p:cNvPr id="4" name="Picture 3" descr="blob_coral.png"/>
-          <p:cNvPicPr>
-            <a:picLocks noChangeAspect="1"/>
-          </p:cNvPicPr>
-          <p:nvPr/>
-        </p:nvPicPr>
-        <p:blipFill>
-          <a:blip r:embed="rId3"/>
-          <a:stretch>
-            <a:fillRect/>
-          </a:stretch>
-        </p:blipFill>
-        <p:spPr>
-          <a:xfrm>
-            <a:off x="8961120" y="-3291840"/>
-            <a:ext cx="6217920" cy="6217920"/>
-          </a:xfrm>
-          <a:prstGeom prst="rect">
-            <a:avLst/>
-          </a:prstGeom>
-        </p:spPr>
-      </p:pic>
-      <p:sp>
-        <p:nvSpPr>
-          <p:cNvPr id="5" name="Rounded Rectangle 4"/>
+      <p:sp>
+        <p:nvSpPr>
+          <p:cNvPr id="3" name="Rounded Rectangle 2"/>
           <p:cNvSpPr/>
           <p:nvPr/>
         </p:nvSpPr>
@@ -7107,10 +6815,10 @@
           <a:gradFill rotWithShape="1">
             <a:gsLst>
               <a:gs pos="0">
-                <a:srgbClr val="FF7A59"/>
+                <a:srgbClr val="3A3F45"/>
               </a:gs>
               <a:gs pos="100000">
-                <a:srgbClr val="FFB86B"/>
+                <a:srgbClr val="73787E"/>
               </a:gs>
             </a:gsLst>
             <a:lin scaled="0" ang="18900000"/>
@@ -7120,7 +6828,7 @@
           </a:ln>
           <a:effectLst>
             <a:outerShdw blurRad="109728" dist="36576" dir="5400000" rotWithShape="0">
-              <a:srgbClr val="C24E30">
+              <a:srgbClr val="000000">
                 <a:alpha val="35000"/>
               </a:srgbClr>
             </a:outerShdw>
@@ -7150,7 +6858,7 @@
       </p:sp>
       <p:sp>
         <p:nvSpPr>
-          <p:cNvPr id="6" name="TextBox 5"/>
+          <p:cNvPr id="4" name="TextBox 3"/>
           <p:cNvSpPr txBox="1"/>
           <p:nvPr/>
         </p:nvSpPr>
@@ -7181,7 +6889,7 @@
             <a:r>
               <a:rPr sz="2150" b="1">
                 <a:solidFill>
-                  <a:srgbClr val="222E40"/>
+                  <a:srgbClr val="1C1C1E"/>
                 </a:solidFill>
                 <a:latin typeface="맑은 고딕"/>
                 <a:ea typeface="맑은 고딕"/>
@@ -7191,33 +6899,61 @@
           </a:p>
         </p:txBody>
       </p:sp>
-      <p:pic>
-        <p:nvPicPr>
-          <p:cNvPr id="7" name="Picture 6" descr="glow_bar.png"/>
-          <p:cNvPicPr>
-            <a:picLocks noChangeAspect="1"/>
-          </p:cNvPicPr>
-          <p:nvPr/>
-        </p:nvPicPr>
-        <p:blipFill>
-          <a:blip r:embed="rId4"/>
-          <a:stretch>
-            <a:fillRect/>
-          </a:stretch>
-        </p:blipFill>
+      <p:sp>
+        <p:nvSpPr>
+          <p:cNvPr id="5" name="Rectangle 4"/>
+          <p:cNvSpPr/>
+          <p:nvPr/>
+        </p:nvSpPr>
         <p:spPr>
           <a:xfrm>
             <a:off x="521207" y="969264"/>
-            <a:ext cx="4206240" cy="50292"/>
+            <a:ext cx="4206240" cy="27432"/>
           </a:xfrm>
           <a:prstGeom prst="rect">
             <a:avLst/>
           </a:prstGeom>
-        </p:spPr>
-      </p:pic>
-      <p:sp>
-        <p:nvSpPr>
-          <p:cNvPr id="8" name="TextBox 7"/>
+          <a:gradFill rotWithShape="1">
+            <a:gsLst>
+              <a:gs pos="0">
+                <a:srgbClr val="2A2E33"/>
+              </a:gs>
+              <a:gs pos="100000">
+                <a:srgbClr val="FFFFFF"/>
+              </a:gs>
+            </a:gsLst>
+            <a:lin scaled="0" ang="0"/>
+          </a:gradFill>
+          <a:ln>
+            <a:noFill/>
+          </a:ln>
+          <a:effectLst/>
+        </p:spPr>
+        <p:style>
+          <a:lnRef idx="1">
+            <a:schemeClr val="accent1"/>
+          </a:lnRef>
+          <a:fillRef idx="3">
+            <a:schemeClr val="accent1"/>
+          </a:fillRef>
+          <a:effectRef idx="2">
+            <a:schemeClr val="accent1"/>
+          </a:effectRef>
+          <a:fontRef idx="minor">
+            <a:schemeClr val="lt1"/>
+          </a:fontRef>
+        </p:style>
+        <p:txBody>
+          <a:bodyPr rtlCol="0" anchor="ctr"/>
+          <a:lstStyle/>
+          <a:p>
+            <a:pPr algn="ctr"/>
+          </a:p>
+        </p:txBody>
+      </p:sp>
+      <p:sp>
+        <p:nvSpPr>
+          <p:cNvPr id="6" name="TextBox 5"/>
           <p:cNvSpPr txBox="1"/>
           <p:nvPr/>
         </p:nvSpPr>
@@ -7248,7 +6984,7 @@
             <a:r>
               <a:rPr sz="3000" b="1">
                 <a:solidFill>
-                  <a:srgbClr val="D3DDEA"/>
+                  <a:srgbClr val="D8DADD"/>
                 </a:solidFill>
                 <a:latin typeface="맑은 고딕"/>
                 <a:ea typeface="맑은 고딕"/>
@@ -7260,7 +6996,7 @@
       </p:sp>
       <p:sp>
         <p:nvSpPr>
-          <p:cNvPr id="9" name="TextBox 8"/>
+          <p:cNvPr id="7" name="TextBox 6"/>
           <p:cNvSpPr txBox="1"/>
           <p:nvPr/>
         </p:nvSpPr>
@@ -7291,7 +7027,7 @@
             <a:r>
               <a:rPr sz="850" b="0">
                 <a:solidFill>
-                  <a:srgbClr val="ABB7C7"/>
+                  <a:srgbClr val="B2B5B9"/>
                 </a:solidFill>
                 <a:latin typeface="맑은 고딕"/>
                 <a:ea typeface="맑은 고딕"/>
@@ -7303,7 +7039,7 @@
       </p:sp>
       <p:sp>
         <p:nvSpPr>
-          <p:cNvPr id="10" name="Rounded Rectangle 9"/>
+          <p:cNvPr id="8" name="Rounded Rectangle 7"/>
           <p:cNvSpPr/>
           <p:nvPr/>
         </p:nvSpPr>
@@ -7322,12 +7058,12 @@
           </a:solidFill>
           <a:ln w="12700">
             <a:solidFill>
-              <a:srgbClr val="E4EAF2"/>
+              <a:srgbClr val="E4E6E9"/>
             </a:solidFill>
           </a:ln>
           <a:effectLst>
             <a:outerShdw blurRad="182880" dist="64008" dir="5400000" rotWithShape="0">
-              <a:srgbClr val="2A3B55">
+              <a:srgbClr val="000000">
                 <a:alpha val="30000"/>
               </a:srgbClr>
             </a:outerShdw>
@@ -7357,7 +7093,7 @@
       </p:sp>
       <p:sp>
         <p:nvSpPr>
-          <p:cNvPr id="11" name="TextBox 10"/>
+          <p:cNvPr id="9" name="TextBox 8"/>
           <p:cNvSpPr txBox="1"/>
           <p:nvPr/>
         </p:nvSpPr>
@@ -7388,7 +7124,7 @@
             <a:r>
               <a:rPr sz="1300" b="1">
                 <a:solidFill>
-                  <a:srgbClr val="17456B"/>
+                  <a:srgbClr val="33393F"/>
                 </a:solidFill>
                 <a:latin typeface="맑은 고딕"/>
                 <a:ea typeface="맑은 고딕"/>
@@ -7408,7 +7144,7 @@
             <a:r>
               <a:rPr sz="1100" b="0">
                 <a:solidFill>
-                  <a:srgbClr val="222E40"/>
+                  <a:srgbClr val="1C1C1E"/>
                 </a:solidFill>
                 <a:latin typeface="맑은 고딕"/>
                 <a:ea typeface="맑은 고딕"/>
@@ -7428,7 +7164,7 @@
             <a:r>
               <a:rPr sz="1100" b="0">
                 <a:solidFill>
-                  <a:srgbClr val="222E40"/>
+                  <a:srgbClr val="1C1C1E"/>
                 </a:solidFill>
                 <a:latin typeface="맑은 고딕"/>
                 <a:ea typeface="맑은 고딕"/>
@@ -7448,7 +7184,7 @@
             <a:r>
               <a:rPr sz="1100" b="0">
                 <a:solidFill>
-                  <a:srgbClr val="222E40"/>
+                  <a:srgbClr val="1C1C1E"/>
                 </a:solidFill>
                 <a:latin typeface="맑은 고딕"/>
                 <a:ea typeface="맑은 고딕"/>
@@ -7468,7 +7204,7 @@
             <a:r>
               <a:rPr sz="1100" b="0">
                 <a:solidFill>
-                  <a:srgbClr val="222E40"/>
+                  <a:srgbClr val="1C1C1E"/>
                 </a:solidFill>
                 <a:latin typeface="맑은 고딕"/>
                 <a:ea typeface="맑은 고딕"/>
@@ -7488,7 +7224,7 @@
             <a:r>
               <a:rPr sz="1100" b="0">
                 <a:solidFill>
-                  <a:srgbClr val="222E40"/>
+                  <a:srgbClr val="1C1C1E"/>
                 </a:solidFill>
                 <a:latin typeface="맑은 고딕"/>
                 <a:ea typeface="맑은 고딕"/>
@@ -7500,7 +7236,7 @@
       </p:sp>
       <p:sp>
         <p:nvSpPr>
-          <p:cNvPr id="12" name="Rounded Rectangle 11"/>
+          <p:cNvPr id="10" name="Rounded Rectangle 9"/>
           <p:cNvSpPr/>
           <p:nvPr/>
         </p:nvSpPr>
@@ -7519,12 +7255,12 @@
           </a:solidFill>
           <a:ln w="12700">
             <a:solidFill>
-              <a:srgbClr val="E4EAF2"/>
+              <a:srgbClr val="E4E6E9"/>
             </a:solidFill>
           </a:ln>
           <a:effectLst>
             <a:outerShdw blurRad="182880" dist="64008" dir="5400000" rotWithShape="0">
-              <a:srgbClr val="2A3B55">
+              <a:srgbClr val="000000">
                 <a:alpha val="30000"/>
               </a:srgbClr>
             </a:outerShdw>
@@ -7554,7 +7290,7 @@
       </p:sp>
       <p:sp>
         <p:nvSpPr>
-          <p:cNvPr id="13" name="TextBox 12"/>
+          <p:cNvPr id="11" name="TextBox 10"/>
           <p:cNvSpPr txBox="1"/>
           <p:nvPr/>
         </p:nvSpPr>
@@ -7585,7 +7321,7 @@
             <a:r>
               <a:rPr sz="1300" b="1">
                 <a:solidFill>
-                  <a:srgbClr val="17456B"/>
+                  <a:srgbClr val="33393F"/>
                 </a:solidFill>
                 <a:latin typeface="맑은 고딕"/>
                 <a:ea typeface="맑은 고딕"/>
@@ -7605,7 +7341,7 @@
             <a:r>
               <a:rPr sz="1100" b="0">
                 <a:solidFill>
-                  <a:srgbClr val="222E40"/>
+                  <a:srgbClr val="1C1C1E"/>
                 </a:solidFill>
                 <a:latin typeface="맑은 고딕"/>
                 <a:ea typeface="맑은 고딕"/>
@@ -7625,7 +7361,7 @@
             <a:r>
               <a:rPr sz="1100" b="0">
                 <a:solidFill>
-                  <a:srgbClr val="222E40"/>
+                  <a:srgbClr val="1C1C1E"/>
                 </a:solidFill>
                 <a:latin typeface="맑은 고딕"/>
                 <a:ea typeface="맑은 고딕"/>
@@ -7645,7 +7381,7 @@
             <a:r>
               <a:rPr sz="1100" b="0">
                 <a:solidFill>
-                  <a:srgbClr val="222E40"/>
+                  <a:srgbClr val="1C1C1E"/>
                 </a:solidFill>
                 <a:latin typeface="맑은 고딕"/>
                 <a:ea typeface="맑은 고딕"/>
@@ -7657,7 +7393,7 @@
       </p:sp>
       <p:sp>
         <p:nvSpPr>
-          <p:cNvPr id="14" name="Rounded Rectangle 13"/>
+          <p:cNvPr id="12" name="Rounded Rectangle 11"/>
           <p:cNvSpPr/>
           <p:nvPr/>
         </p:nvSpPr>
@@ -7679,7 +7415,7 @@
           </a:ln>
           <a:effectLst>
             <a:outerShdw blurRad="219456" dist="64008" dir="5400000" rotWithShape="0">
-              <a:srgbClr val="2A3B55">
+              <a:srgbClr val="000000">
                 <a:alpha val="34000"/>
               </a:srgbClr>
             </a:outerShdw>
@@ -7709,14 +7445,14 @@
       </p:sp>
       <p:pic>
         <p:nvPicPr>
-          <p:cNvPr id="15" name="Picture 14" descr="그림3_배정_교차표.png"/>
+          <p:cNvPr id="13" name="Picture 12" descr="그림3_배정_교차표.png"/>
           <p:cNvPicPr>
             <a:picLocks noChangeAspect="1"/>
           </p:cNvPicPr>
           <p:nvPr/>
         </p:nvPicPr>
         <p:blipFill>
-          <a:blip r:embed="rId5"/>
+          <a:blip r:embed="rId2"/>
           <a:stretch>
             <a:fillRect/>
           </a:stretch>
@@ -7793,57 +7529,9 @@
           </a:p>
         </p:txBody>
       </p:sp>
-      <p:pic>
-        <p:nvPicPr>
-          <p:cNvPr id="3" name="Picture 2" descr="blob_blue.png"/>
-          <p:cNvPicPr>
-            <a:picLocks noChangeAspect="1"/>
-          </p:cNvPicPr>
-          <p:nvPr/>
-        </p:nvPicPr>
-        <p:blipFill>
-          <a:blip r:embed="rId2"/>
-          <a:stretch>
-            <a:fillRect/>
-          </a:stretch>
-        </p:blipFill>
-        <p:spPr>
-          <a:xfrm>
-            <a:off x="-3474720" y="3840480"/>
-            <a:ext cx="6583680" cy="6583680"/>
-          </a:xfrm>
-          <a:prstGeom prst="rect">
-            <a:avLst/>
-          </a:prstGeom>
-        </p:spPr>
-      </p:pic>
-      <p:pic>
-        <p:nvPicPr>
-          <p:cNvPr id="4" name="Picture 3" descr="blob_coral.png"/>
-          <p:cNvPicPr>
-            <a:picLocks noChangeAspect="1"/>
-          </p:cNvPicPr>
-          <p:nvPr/>
-        </p:nvPicPr>
-        <p:blipFill>
-          <a:blip r:embed="rId3"/>
-          <a:stretch>
-            <a:fillRect/>
-          </a:stretch>
-        </p:blipFill>
-        <p:spPr>
-          <a:xfrm>
-            <a:off x="8961120" y="-3291840"/>
-            <a:ext cx="6217920" cy="6217920"/>
-          </a:xfrm>
-          <a:prstGeom prst="rect">
-            <a:avLst/>
-          </a:prstGeom>
-        </p:spPr>
-      </p:pic>
-      <p:sp>
-        <p:nvSpPr>
-          <p:cNvPr id="5" name="Rounded Rectangle 4"/>
+      <p:sp>
+        <p:nvSpPr>
+          <p:cNvPr id="3" name="Rounded Rectangle 2"/>
           <p:cNvSpPr/>
           <p:nvPr/>
         </p:nvSpPr>
@@ -7860,10 +7548,10 @@
           <a:gradFill rotWithShape="1">
             <a:gsLst>
               <a:gs pos="0">
-                <a:srgbClr val="FF7A59"/>
+                <a:srgbClr val="3A3F45"/>
               </a:gs>
               <a:gs pos="100000">
-                <a:srgbClr val="FFB86B"/>
+                <a:srgbClr val="73787E"/>
               </a:gs>
             </a:gsLst>
             <a:lin scaled="0" ang="18900000"/>
@@ -7873,7 +7561,7 @@
           </a:ln>
           <a:effectLst>
             <a:outerShdw blurRad="109728" dist="36576" dir="5400000" rotWithShape="0">
-              <a:srgbClr val="C24E30">
+              <a:srgbClr val="000000">
                 <a:alpha val="35000"/>
               </a:srgbClr>
             </a:outerShdw>
@@ -7903,7 +7591,7 @@
       </p:sp>
       <p:sp>
         <p:nvSpPr>
-          <p:cNvPr id="6" name="TextBox 5"/>
+          <p:cNvPr id="4" name="TextBox 3"/>
           <p:cNvSpPr txBox="1"/>
           <p:nvPr/>
         </p:nvSpPr>
@@ -7934,7 +7622,7 @@
             <a:r>
               <a:rPr sz="2150" b="1">
                 <a:solidFill>
-                  <a:srgbClr val="222E40"/>
+                  <a:srgbClr val="1C1C1E"/>
                 </a:solidFill>
                 <a:latin typeface="맑은 고딕"/>
                 <a:ea typeface="맑은 고딕"/>
@@ -7944,33 +7632,61 @@
           </a:p>
         </p:txBody>
       </p:sp>
-      <p:pic>
-        <p:nvPicPr>
-          <p:cNvPr id="7" name="Picture 6" descr="glow_bar.png"/>
-          <p:cNvPicPr>
-            <a:picLocks noChangeAspect="1"/>
-          </p:cNvPicPr>
-          <p:nvPr/>
-        </p:nvPicPr>
-        <p:blipFill>
-          <a:blip r:embed="rId4"/>
-          <a:stretch>
-            <a:fillRect/>
-          </a:stretch>
-        </p:blipFill>
+      <p:sp>
+        <p:nvSpPr>
+          <p:cNvPr id="5" name="Rectangle 4"/>
+          <p:cNvSpPr/>
+          <p:nvPr/>
+        </p:nvSpPr>
         <p:spPr>
           <a:xfrm>
             <a:off x="521207" y="969264"/>
-            <a:ext cx="4206240" cy="50292"/>
+            <a:ext cx="4206240" cy="27432"/>
           </a:xfrm>
           <a:prstGeom prst="rect">
             <a:avLst/>
           </a:prstGeom>
-        </p:spPr>
-      </p:pic>
-      <p:sp>
-        <p:nvSpPr>
-          <p:cNvPr id="8" name="TextBox 7"/>
+          <a:gradFill rotWithShape="1">
+            <a:gsLst>
+              <a:gs pos="0">
+                <a:srgbClr val="2A2E33"/>
+              </a:gs>
+              <a:gs pos="100000">
+                <a:srgbClr val="FFFFFF"/>
+              </a:gs>
+            </a:gsLst>
+            <a:lin scaled="0" ang="0"/>
+          </a:gradFill>
+          <a:ln>
+            <a:noFill/>
+          </a:ln>
+          <a:effectLst/>
+        </p:spPr>
+        <p:style>
+          <a:lnRef idx="1">
+            <a:schemeClr val="accent1"/>
+          </a:lnRef>
+          <a:fillRef idx="3">
+            <a:schemeClr val="accent1"/>
+          </a:fillRef>
+          <a:effectRef idx="2">
+            <a:schemeClr val="accent1"/>
+          </a:effectRef>
+          <a:fontRef idx="minor">
+            <a:schemeClr val="lt1"/>
+          </a:fontRef>
+        </p:style>
+        <p:txBody>
+          <a:bodyPr rtlCol="0" anchor="ctr"/>
+          <a:lstStyle/>
+          <a:p>
+            <a:pPr algn="ctr"/>
+          </a:p>
+        </p:txBody>
+      </p:sp>
+      <p:sp>
+        <p:nvSpPr>
+          <p:cNvPr id="6" name="TextBox 5"/>
           <p:cNvSpPr txBox="1"/>
           <p:nvPr/>
         </p:nvSpPr>
@@ -8001,7 +7717,7 @@
             <a:r>
               <a:rPr sz="3000" b="1">
                 <a:solidFill>
-                  <a:srgbClr val="D3DDEA"/>
+                  <a:srgbClr val="D8DADD"/>
                 </a:solidFill>
                 <a:latin typeface="맑은 고딕"/>
                 <a:ea typeface="맑은 고딕"/>
@@ -8013,7 +7729,7 @@
       </p:sp>
       <p:sp>
         <p:nvSpPr>
-          <p:cNvPr id="9" name="TextBox 8"/>
+          <p:cNvPr id="7" name="TextBox 6"/>
           <p:cNvSpPr txBox="1"/>
           <p:nvPr/>
         </p:nvSpPr>
@@ -8044,7 +7760,7 @@
             <a:r>
               <a:rPr sz="850" b="0">
                 <a:solidFill>
-                  <a:srgbClr val="ABB7C7"/>
+                  <a:srgbClr val="B2B5B9"/>
                 </a:solidFill>
                 <a:latin typeface="맑은 고딕"/>
                 <a:ea typeface="맑은 고딕"/>
@@ -8056,7 +7772,7 @@
       </p:sp>
       <p:sp>
         <p:nvSpPr>
-          <p:cNvPr id="10" name="Rounded Rectangle 9"/>
+          <p:cNvPr id="8" name="Rounded Rectangle 7"/>
           <p:cNvSpPr/>
           <p:nvPr/>
         </p:nvSpPr>
@@ -8078,7 +7794,7 @@
           </a:ln>
           <a:effectLst>
             <a:outerShdw blurRad="219456" dist="64008" dir="5400000" rotWithShape="0">
-              <a:srgbClr val="2A3B55">
+              <a:srgbClr val="000000">
                 <a:alpha val="34000"/>
               </a:srgbClr>
             </a:outerShdw>
@@ -8108,14 +7824,14 @@
       </p:sp>
       <p:pic>
         <p:nvPicPr>
-          <p:cNvPr id="11" name="Picture 10" descr="그림4_지도_우선순위.png"/>
+          <p:cNvPr id="9" name="Picture 8" descr="그림4_지도_우선순위.png"/>
           <p:cNvPicPr>
             <a:picLocks noChangeAspect="1"/>
           </p:cNvPicPr>
           <p:nvPr/>
         </p:nvPicPr>
         <p:blipFill>
-          <a:blip r:embed="rId5"/>
+          <a:blip r:embed="rId2"/>
           <a:stretch>
             <a:fillRect/>
           </a:stretch>
@@ -8132,7 +7848,7 @@
       </p:pic>
       <p:sp>
         <p:nvSpPr>
-          <p:cNvPr id="12" name="Rounded Rectangle 11"/>
+          <p:cNvPr id="10" name="Rounded Rectangle 9"/>
           <p:cNvSpPr/>
           <p:nvPr/>
         </p:nvSpPr>
@@ -8147,17 +7863,17 @@
             </a:avLst>
           </a:prstGeom>
           <a:solidFill>
-            <a:srgbClr val="FFF3EE"/>
+            <a:srgbClr val="F1F2F3"/>
           </a:solidFill>
-          <a:ln w="12700">
+          <a:ln w="15875">
             <a:solidFill>
-              <a:srgbClr val="F6CDBE"/>
+              <a:srgbClr val="9AA0A6"/>
             </a:solidFill>
           </a:ln>
           <a:effectLst>
             <a:outerShdw blurRad="182880" dist="64008" dir="5400000" rotWithShape="0">
-              <a:srgbClr val="B24A32">
-                <a:alpha val="26000"/>
+              <a:srgbClr val="000000">
+                <a:alpha val="32000"/>
               </a:srgbClr>
             </a:outerShdw>
           </a:effectLst>
@@ -8186,7 +7902,7 @@
       </p:sp>
       <p:sp>
         <p:nvSpPr>
-          <p:cNvPr id="13" name="TextBox 12"/>
+          <p:cNvPr id="11" name="TextBox 10"/>
           <p:cNvSpPr txBox="1"/>
           <p:nvPr/>
         </p:nvSpPr>
@@ -8217,7 +7933,7 @@
             <a:r>
               <a:rPr sz="1300" b="1">
                 <a:solidFill>
-                  <a:srgbClr val="E85D42"/>
+                  <a:srgbClr val="000000"/>
                 </a:solidFill>
                 <a:latin typeface="맑은 고딕"/>
                 <a:ea typeface="맑은 고딕"/>
@@ -8237,7 +7953,7 @@
             <a:r>
               <a:rPr sz="1100" b="0">
                 <a:solidFill>
-                  <a:srgbClr val="222E40"/>
+                  <a:srgbClr val="1C1C1E"/>
                 </a:solidFill>
                 <a:latin typeface="맑은 고딕"/>
                 <a:ea typeface="맑은 고딕"/>
@@ -8257,7 +7973,7 @@
             <a:r>
               <a:rPr sz="1100" b="0">
                 <a:solidFill>
-                  <a:srgbClr val="222E40"/>
+                  <a:srgbClr val="1C1C1E"/>
                 </a:solidFill>
                 <a:latin typeface="맑은 고딕"/>
                 <a:ea typeface="맑은 고딕"/>
@@ -8277,7 +7993,7 @@
             <a:r>
               <a:rPr sz="1100" b="0">
                 <a:solidFill>
-                  <a:srgbClr val="222E40"/>
+                  <a:srgbClr val="1C1C1E"/>
                 </a:solidFill>
                 <a:latin typeface="맑은 고딕"/>
                 <a:ea typeface="맑은 고딕"/>
@@ -8289,7 +8005,7 @@
       </p:sp>
       <p:sp>
         <p:nvSpPr>
-          <p:cNvPr id="14" name="Rounded Rectangle 13"/>
+          <p:cNvPr id="12" name="Rounded Rectangle 11"/>
           <p:cNvSpPr/>
           <p:nvPr/>
         </p:nvSpPr>
@@ -8308,12 +8024,12 @@
           </a:solidFill>
           <a:ln w="12700">
             <a:solidFill>
-              <a:srgbClr val="E4EAF2"/>
+              <a:srgbClr val="E4E6E9"/>
             </a:solidFill>
           </a:ln>
           <a:effectLst>
             <a:outerShdw blurRad="182880" dist="64008" dir="5400000" rotWithShape="0">
-              <a:srgbClr val="2A3B55">
+              <a:srgbClr val="000000">
                 <a:alpha val="30000"/>
               </a:srgbClr>
             </a:outerShdw>
@@ -8343,7 +8059,7 @@
       </p:sp>
       <p:sp>
         <p:nvSpPr>
-          <p:cNvPr id="15" name="TextBox 14"/>
+          <p:cNvPr id="13" name="TextBox 12"/>
           <p:cNvSpPr txBox="1"/>
           <p:nvPr/>
         </p:nvSpPr>
@@ -8374,7 +8090,7 @@
             <a:r>
               <a:rPr sz="1300" b="1">
                 <a:solidFill>
-                  <a:srgbClr val="17456B"/>
+                  <a:srgbClr val="33393F"/>
                 </a:solidFill>
                 <a:latin typeface="맑은 고딕"/>
                 <a:ea typeface="맑은 고딕"/>
@@ -8394,7 +8110,7 @@
             <a:r>
               <a:rPr sz="1100" b="0">
                 <a:solidFill>
-                  <a:srgbClr val="222E40"/>
+                  <a:srgbClr val="1C1C1E"/>
                 </a:solidFill>
                 <a:latin typeface="맑은 고딕"/>
                 <a:ea typeface="맑은 고딕"/>
@@ -8414,7 +8130,7 @@
             <a:r>
               <a:rPr sz="1100" b="0">
                 <a:solidFill>
-                  <a:srgbClr val="222E40"/>
+                  <a:srgbClr val="1C1C1E"/>
                 </a:solidFill>
                 <a:latin typeface="맑은 고딕"/>
                 <a:ea typeface="맑은 고딕"/>
@@ -8434,7 +8150,7 @@
             <a:r>
               <a:rPr sz="1100" b="0">
                 <a:solidFill>
-                  <a:srgbClr val="222E40"/>
+                  <a:srgbClr val="1C1C1E"/>
                 </a:solidFill>
                 <a:latin typeface="맑은 고딕"/>
                 <a:ea typeface="맑은 고딕"/>
@@ -8506,57 +8222,9 @@
           </a:p>
         </p:txBody>
       </p:sp>
-      <p:pic>
-        <p:nvPicPr>
-          <p:cNvPr id="3" name="Picture 2" descr="blob_blue.png"/>
-          <p:cNvPicPr>
-            <a:picLocks noChangeAspect="1"/>
-          </p:cNvPicPr>
-          <p:nvPr/>
-        </p:nvPicPr>
-        <p:blipFill>
-          <a:blip r:embed="rId2"/>
-          <a:stretch>
-            <a:fillRect/>
-          </a:stretch>
-        </p:blipFill>
-        <p:spPr>
-          <a:xfrm>
-            <a:off x="-3474720" y="3840480"/>
-            <a:ext cx="6583680" cy="6583680"/>
-          </a:xfrm>
-          <a:prstGeom prst="rect">
-            <a:avLst/>
-          </a:prstGeom>
-        </p:spPr>
-      </p:pic>
-      <p:pic>
-        <p:nvPicPr>
-          <p:cNvPr id="4" name="Picture 3" descr="blob_coral.png"/>
-          <p:cNvPicPr>
-            <a:picLocks noChangeAspect="1"/>
-          </p:cNvPicPr>
-          <p:nvPr/>
-        </p:nvPicPr>
-        <p:blipFill>
-          <a:blip r:embed="rId3"/>
-          <a:stretch>
-            <a:fillRect/>
-          </a:stretch>
-        </p:blipFill>
-        <p:spPr>
-          <a:xfrm>
-            <a:off x="8961120" y="-3291840"/>
-            <a:ext cx="6217920" cy="6217920"/>
-          </a:xfrm>
-          <a:prstGeom prst="rect">
-            <a:avLst/>
-          </a:prstGeom>
-        </p:spPr>
-      </p:pic>
-      <p:sp>
-        <p:nvSpPr>
-          <p:cNvPr id="5" name="Rounded Rectangle 4"/>
+      <p:sp>
+        <p:nvSpPr>
+          <p:cNvPr id="3" name="Rounded Rectangle 2"/>
           <p:cNvSpPr/>
           <p:nvPr/>
         </p:nvSpPr>
@@ -8573,10 +8241,10 @@
           <a:gradFill rotWithShape="1">
             <a:gsLst>
               <a:gs pos="0">
-                <a:srgbClr val="FF7A59"/>
+                <a:srgbClr val="3A3F45"/>
               </a:gs>
               <a:gs pos="100000">
-                <a:srgbClr val="FFB86B"/>
+                <a:srgbClr val="73787E"/>
               </a:gs>
             </a:gsLst>
             <a:lin scaled="0" ang="18900000"/>
@@ -8586,7 +8254,7 @@
           </a:ln>
           <a:effectLst>
             <a:outerShdw blurRad="109728" dist="36576" dir="5400000" rotWithShape="0">
-              <a:srgbClr val="C24E30">
+              <a:srgbClr val="000000">
                 <a:alpha val="35000"/>
               </a:srgbClr>
             </a:outerShdw>
@@ -8616,7 +8284,7 @@
       </p:sp>
       <p:sp>
         <p:nvSpPr>
-          <p:cNvPr id="6" name="TextBox 5"/>
+          <p:cNvPr id="4" name="TextBox 3"/>
           <p:cNvSpPr txBox="1"/>
           <p:nvPr/>
         </p:nvSpPr>
@@ -8647,7 +8315,7 @@
             <a:r>
               <a:rPr sz="2150" b="1">
                 <a:solidFill>
-                  <a:srgbClr val="222E40"/>
+                  <a:srgbClr val="1C1C1E"/>
                 </a:solidFill>
                 <a:latin typeface="맑은 고딕"/>
                 <a:ea typeface="맑은 고딕"/>
@@ -8657,33 +8325,61 @@
           </a:p>
         </p:txBody>
       </p:sp>
-      <p:pic>
-        <p:nvPicPr>
-          <p:cNvPr id="7" name="Picture 6" descr="glow_bar.png"/>
-          <p:cNvPicPr>
-            <a:picLocks noChangeAspect="1"/>
-          </p:cNvPicPr>
-          <p:nvPr/>
-        </p:nvPicPr>
-        <p:blipFill>
-          <a:blip r:embed="rId4"/>
-          <a:stretch>
-            <a:fillRect/>
-          </a:stretch>
-        </p:blipFill>
+      <p:sp>
+        <p:nvSpPr>
+          <p:cNvPr id="5" name="Rectangle 4"/>
+          <p:cNvSpPr/>
+          <p:nvPr/>
+        </p:nvSpPr>
         <p:spPr>
           <a:xfrm>
             <a:off x="521207" y="969264"/>
-            <a:ext cx="4206240" cy="50292"/>
+            <a:ext cx="4206240" cy="27432"/>
           </a:xfrm>
           <a:prstGeom prst="rect">
             <a:avLst/>
           </a:prstGeom>
-        </p:spPr>
-      </p:pic>
-      <p:sp>
-        <p:nvSpPr>
-          <p:cNvPr id="8" name="TextBox 7"/>
+          <a:gradFill rotWithShape="1">
+            <a:gsLst>
+              <a:gs pos="0">
+                <a:srgbClr val="2A2E33"/>
+              </a:gs>
+              <a:gs pos="100000">
+                <a:srgbClr val="FFFFFF"/>
+              </a:gs>
+            </a:gsLst>
+            <a:lin scaled="0" ang="0"/>
+          </a:gradFill>
+          <a:ln>
+            <a:noFill/>
+          </a:ln>
+          <a:effectLst/>
+        </p:spPr>
+        <p:style>
+          <a:lnRef idx="1">
+            <a:schemeClr val="accent1"/>
+          </a:lnRef>
+          <a:fillRef idx="3">
+            <a:schemeClr val="accent1"/>
+          </a:fillRef>
+          <a:effectRef idx="2">
+            <a:schemeClr val="accent1"/>
+          </a:effectRef>
+          <a:fontRef idx="minor">
+            <a:schemeClr val="lt1"/>
+          </a:fontRef>
+        </p:style>
+        <p:txBody>
+          <a:bodyPr rtlCol="0" anchor="ctr"/>
+          <a:lstStyle/>
+          <a:p>
+            <a:pPr algn="ctr"/>
+          </a:p>
+        </p:txBody>
+      </p:sp>
+      <p:sp>
+        <p:nvSpPr>
+          <p:cNvPr id="6" name="TextBox 5"/>
           <p:cNvSpPr txBox="1"/>
           <p:nvPr/>
         </p:nvSpPr>
@@ -8714,7 +8410,7 @@
             <a:r>
               <a:rPr sz="3000" b="1">
                 <a:solidFill>
-                  <a:srgbClr val="D3DDEA"/>
+                  <a:srgbClr val="D8DADD"/>
                 </a:solidFill>
                 <a:latin typeface="맑은 고딕"/>
                 <a:ea typeface="맑은 고딕"/>
@@ -8726,7 +8422,7 @@
       </p:sp>
       <p:sp>
         <p:nvSpPr>
-          <p:cNvPr id="9" name="TextBox 8"/>
+          <p:cNvPr id="7" name="TextBox 6"/>
           <p:cNvSpPr txBox="1"/>
           <p:nvPr/>
         </p:nvSpPr>
@@ -8757,7 +8453,7 @@
             <a:r>
               <a:rPr sz="850" b="0">
                 <a:solidFill>
-                  <a:srgbClr val="ABB7C7"/>
+                  <a:srgbClr val="B2B5B9"/>
                 </a:solidFill>
                 <a:latin typeface="맑은 고딕"/>
                 <a:ea typeface="맑은 고딕"/>
@@ -8769,7 +8465,7 @@
       </p:sp>
       <p:sp>
         <p:nvSpPr>
-          <p:cNvPr id="10" name="Rounded Rectangle 9"/>
+          <p:cNvPr id="8" name="Rounded Rectangle 7"/>
           <p:cNvSpPr/>
           <p:nvPr/>
         </p:nvSpPr>
@@ -8788,12 +8484,12 @@
           </a:solidFill>
           <a:ln w="12700">
             <a:solidFill>
-              <a:srgbClr val="E4EAF2"/>
+              <a:srgbClr val="E4E6E9"/>
             </a:solidFill>
           </a:ln>
           <a:effectLst>
             <a:outerShdw blurRad="182880" dist="64008" dir="5400000" rotWithShape="0">
-              <a:srgbClr val="2A3B55">
+              <a:srgbClr val="000000">
                 <a:alpha val="30000"/>
               </a:srgbClr>
             </a:outerShdw>
@@ -8823,7 +8519,7 @@
       </p:sp>
       <p:sp>
         <p:nvSpPr>
-          <p:cNvPr id="11" name="TextBox 10"/>
+          <p:cNvPr id="9" name="TextBox 8"/>
           <p:cNvSpPr txBox="1"/>
           <p:nvPr/>
         </p:nvSpPr>
@@ -8854,7 +8550,7 @@
             <a:r>
               <a:rPr sz="1300" b="1">
                 <a:solidFill>
-                  <a:srgbClr val="17456B"/>
+                  <a:srgbClr val="33393F"/>
                 </a:solidFill>
                 <a:latin typeface="맑은 고딕"/>
                 <a:ea typeface="맑은 고딕"/>
@@ -8874,7 +8570,7 @@
             <a:r>
               <a:rPr sz="1050" b="0">
                 <a:solidFill>
-                  <a:srgbClr val="222E40"/>
+                  <a:srgbClr val="1C1C1E"/>
                 </a:solidFill>
                 <a:latin typeface="맑은 고딕"/>
                 <a:ea typeface="맑은 고딕"/>
@@ -8894,7 +8590,7 @@
             <a:r>
               <a:rPr sz="1050" b="0">
                 <a:solidFill>
-                  <a:srgbClr val="222E40"/>
+                  <a:srgbClr val="1C1C1E"/>
                 </a:solidFill>
                 <a:latin typeface="맑은 고딕"/>
                 <a:ea typeface="맑은 고딕"/>
@@ -8914,7 +8610,7 @@
             <a:r>
               <a:rPr sz="1050" b="0">
                 <a:solidFill>
-                  <a:srgbClr val="222E40"/>
+                  <a:srgbClr val="1C1C1E"/>
                 </a:solidFill>
                 <a:latin typeface="맑은 고딕"/>
                 <a:ea typeface="맑은 고딕"/>
@@ -8926,7 +8622,7 @@
       </p:sp>
       <p:sp>
         <p:nvSpPr>
-          <p:cNvPr id="12" name="Rounded Rectangle 11"/>
+          <p:cNvPr id="10" name="Rounded Rectangle 9"/>
           <p:cNvSpPr/>
           <p:nvPr/>
         </p:nvSpPr>
@@ -8945,12 +8641,12 @@
           </a:solidFill>
           <a:ln w="12700">
             <a:solidFill>
-              <a:srgbClr val="E4EAF2"/>
+              <a:srgbClr val="E4E6E9"/>
             </a:solidFill>
           </a:ln>
           <a:effectLst>
             <a:outerShdw blurRad="182880" dist="64008" dir="5400000" rotWithShape="0">
-              <a:srgbClr val="2A3B55">
+              <a:srgbClr val="000000">
                 <a:alpha val="30000"/>
               </a:srgbClr>
             </a:outerShdw>
@@ -8980,7 +8676,7 @@
       </p:sp>
       <p:sp>
         <p:nvSpPr>
-          <p:cNvPr id="13" name="TextBox 12"/>
+          <p:cNvPr id="11" name="TextBox 10"/>
           <p:cNvSpPr txBox="1"/>
           <p:nvPr/>
         </p:nvSpPr>
@@ -9011,7 +8707,7 @@
             <a:r>
               <a:rPr sz="1300" b="1">
                 <a:solidFill>
-                  <a:srgbClr val="17456B"/>
+                  <a:srgbClr val="33393F"/>
                 </a:solidFill>
                 <a:latin typeface="맑은 고딕"/>
                 <a:ea typeface="맑은 고딕"/>
@@ -9031,7 +8727,7 @@
             <a:r>
               <a:rPr sz="1050" b="0">
                 <a:solidFill>
-                  <a:srgbClr val="222E40"/>
+                  <a:srgbClr val="1C1C1E"/>
                 </a:solidFill>
                 <a:latin typeface="맑은 고딕"/>
                 <a:ea typeface="맑은 고딕"/>
@@ -9051,7 +8747,7 @@
             <a:r>
               <a:rPr sz="1050" b="0">
                 <a:solidFill>
-                  <a:srgbClr val="222E40"/>
+                  <a:srgbClr val="1C1C1E"/>
                 </a:solidFill>
                 <a:latin typeface="맑은 고딕"/>
                 <a:ea typeface="맑은 고딕"/>
@@ -9071,7 +8767,7 @@
             <a:r>
               <a:rPr sz="1050" b="0">
                 <a:solidFill>
-                  <a:srgbClr val="222E40"/>
+                  <a:srgbClr val="1C1C1E"/>
                 </a:solidFill>
                 <a:latin typeface="맑은 고딕"/>
                 <a:ea typeface="맑은 고딕"/>
@@ -9083,7 +8779,7 @@
       </p:sp>
       <p:sp>
         <p:nvSpPr>
-          <p:cNvPr id="14" name="Rounded Rectangle 13"/>
+          <p:cNvPr id="12" name="Rounded Rectangle 11"/>
           <p:cNvSpPr/>
           <p:nvPr/>
         </p:nvSpPr>
@@ -9102,12 +8798,12 @@
           </a:solidFill>
           <a:ln w="12700">
             <a:solidFill>
-              <a:srgbClr val="E4EAF2"/>
+              <a:srgbClr val="E4E6E9"/>
             </a:solidFill>
           </a:ln>
           <a:effectLst>
             <a:outerShdw blurRad="182880" dist="64008" dir="5400000" rotWithShape="0">
-              <a:srgbClr val="2A3B55">
+              <a:srgbClr val="000000">
                 <a:alpha val="30000"/>
               </a:srgbClr>
             </a:outerShdw>
@@ -9137,7 +8833,7 @@
       </p:sp>
       <p:sp>
         <p:nvSpPr>
-          <p:cNvPr id="15" name="TextBox 14"/>
+          <p:cNvPr id="13" name="TextBox 12"/>
           <p:cNvSpPr txBox="1"/>
           <p:nvPr/>
         </p:nvSpPr>
@@ -9168,7 +8864,7 @@
             <a:r>
               <a:rPr sz="1300" b="1">
                 <a:solidFill>
-                  <a:srgbClr val="17456B"/>
+                  <a:srgbClr val="33393F"/>
                 </a:solidFill>
                 <a:latin typeface="맑은 고딕"/>
                 <a:ea typeface="맑은 고딕"/>
@@ -9188,7 +8884,7 @@
             <a:r>
               <a:rPr sz="1050" b="0">
                 <a:solidFill>
-                  <a:srgbClr val="222E40"/>
+                  <a:srgbClr val="1C1C1E"/>
                 </a:solidFill>
                 <a:latin typeface="맑은 고딕"/>
                 <a:ea typeface="맑은 고딕"/>
@@ -9208,7 +8904,7 @@
             <a:r>
               <a:rPr sz="1050" b="0">
                 <a:solidFill>
-                  <a:srgbClr val="222E40"/>
+                  <a:srgbClr val="1C1C1E"/>
                 </a:solidFill>
                 <a:latin typeface="맑은 고딕"/>
                 <a:ea typeface="맑은 고딕"/>
@@ -9228,7 +8924,7 @@
             <a:r>
               <a:rPr sz="1050" b="0">
                 <a:solidFill>
-                  <a:srgbClr val="222E40"/>
+                  <a:srgbClr val="1C1C1E"/>
                 </a:solidFill>
                 <a:latin typeface="맑은 고딕"/>
                 <a:ea typeface="맑은 고딕"/>
@@ -9240,7 +8936,7 @@
       </p:sp>
       <p:sp>
         <p:nvSpPr>
-          <p:cNvPr id="16" name="Rounded Rectangle 15"/>
+          <p:cNvPr id="14" name="Rounded Rectangle 13"/>
           <p:cNvSpPr/>
           <p:nvPr/>
         </p:nvSpPr>
@@ -9259,12 +8955,12 @@
           </a:solidFill>
           <a:ln w="12700">
             <a:solidFill>
-              <a:srgbClr val="E4EAF2"/>
+              <a:srgbClr val="E4E6E9"/>
             </a:solidFill>
           </a:ln>
           <a:effectLst>
             <a:outerShdw blurRad="182880" dist="64008" dir="5400000" rotWithShape="0">
-              <a:srgbClr val="2A3B55">
+              <a:srgbClr val="000000">
                 <a:alpha val="30000"/>
               </a:srgbClr>
             </a:outerShdw>
@@ -9294,7 +8990,7 @@
       </p:sp>
       <p:sp>
         <p:nvSpPr>
-          <p:cNvPr id="17" name="TextBox 16"/>
+          <p:cNvPr id="15" name="TextBox 14"/>
           <p:cNvSpPr txBox="1"/>
           <p:nvPr/>
         </p:nvSpPr>
@@ -9325,7 +9021,7 @@
             <a:r>
               <a:rPr sz="1300" b="1">
                 <a:solidFill>
-                  <a:srgbClr val="17456B"/>
+                  <a:srgbClr val="33393F"/>
                 </a:solidFill>
                 <a:latin typeface="맑은 고딕"/>
                 <a:ea typeface="맑은 고딕"/>
@@ -9345,7 +9041,7 @@
             <a:r>
               <a:rPr sz="1100" b="0">
                 <a:solidFill>
-                  <a:srgbClr val="222E40"/>
+                  <a:srgbClr val="1C1C1E"/>
                 </a:solidFill>
                 <a:latin typeface="맑은 고딕"/>
                 <a:ea typeface="맑은 고딕"/>
@@ -9365,7 +9061,7 @@
             <a:r>
               <a:rPr sz="1100" b="0">
                 <a:solidFill>
-                  <a:srgbClr val="222E40"/>
+                  <a:srgbClr val="1C1C1E"/>
                 </a:solidFill>
                 <a:latin typeface="맑은 고딕"/>
                 <a:ea typeface="맑은 고딕"/>
@@ -9437,57 +9133,9 @@
           </a:p>
         </p:txBody>
       </p:sp>
-      <p:pic>
-        <p:nvPicPr>
-          <p:cNvPr id="3" name="Picture 2" descr="blob_blue.png"/>
-          <p:cNvPicPr>
-            <a:picLocks noChangeAspect="1"/>
-          </p:cNvPicPr>
-          <p:nvPr/>
-        </p:nvPicPr>
-        <p:blipFill>
-          <a:blip r:embed="rId2"/>
-          <a:stretch>
-            <a:fillRect/>
-          </a:stretch>
-        </p:blipFill>
-        <p:spPr>
-          <a:xfrm>
-            <a:off x="-3474720" y="3840480"/>
-            <a:ext cx="6583680" cy="6583680"/>
-          </a:xfrm>
-          <a:prstGeom prst="rect">
-            <a:avLst/>
-          </a:prstGeom>
-        </p:spPr>
-      </p:pic>
-      <p:pic>
-        <p:nvPicPr>
-          <p:cNvPr id="4" name="Picture 3" descr="blob_coral.png"/>
-          <p:cNvPicPr>
-            <a:picLocks noChangeAspect="1"/>
-          </p:cNvPicPr>
-          <p:nvPr/>
-        </p:nvPicPr>
-        <p:blipFill>
-          <a:blip r:embed="rId3"/>
-          <a:stretch>
-            <a:fillRect/>
-          </a:stretch>
-        </p:blipFill>
-        <p:spPr>
-          <a:xfrm>
-            <a:off x="8961120" y="-3291840"/>
-            <a:ext cx="6217920" cy="6217920"/>
-          </a:xfrm>
-          <a:prstGeom prst="rect">
-            <a:avLst/>
-          </a:prstGeom>
-        </p:spPr>
-      </p:pic>
-      <p:sp>
-        <p:nvSpPr>
-          <p:cNvPr id="5" name="Rounded Rectangle 4"/>
+      <p:sp>
+        <p:nvSpPr>
+          <p:cNvPr id="3" name="Rounded Rectangle 2"/>
           <p:cNvSpPr/>
           <p:nvPr/>
         </p:nvSpPr>
@@ -9504,10 +9152,10 @@
           <a:gradFill rotWithShape="1">
             <a:gsLst>
               <a:gs pos="0">
-                <a:srgbClr val="FF7A59"/>
+                <a:srgbClr val="3A3F45"/>
               </a:gs>
               <a:gs pos="100000">
-                <a:srgbClr val="FFB86B"/>
+                <a:srgbClr val="73787E"/>
               </a:gs>
             </a:gsLst>
             <a:lin scaled="0" ang="18900000"/>
@@ -9517,7 +9165,7 @@
           </a:ln>
           <a:effectLst>
             <a:outerShdw blurRad="109728" dist="36576" dir="5400000" rotWithShape="0">
-              <a:srgbClr val="C24E30">
+              <a:srgbClr val="000000">
                 <a:alpha val="35000"/>
               </a:srgbClr>
             </a:outerShdw>
@@ -9547,7 +9195,7 @@
       </p:sp>
       <p:sp>
         <p:nvSpPr>
-          <p:cNvPr id="6" name="TextBox 5"/>
+          <p:cNvPr id="4" name="TextBox 3"/>
           <p:cNvSpPr txBox="1"/>
           <p:nvPr/>
         </p:nvSpPr>
@@ -9578,7 +9226,7 @@
             <a:r>
               <a:rPr sz="2150" b="1">
                 <a:solidFill>
-                  <a:srgbClr val="222E40"/>
+                  <a:srgbClr val="1C1C1E"/>
                 </a:solidFill>
                 <a:latin typeface="맑은 고딕"/>
                 <a:ea typeface="맑은 고딕"/>
@@ -9588,33 +9236,61 @@
           </a:p>
         </p:txBody>
       </p:sp>
-      <p:pic>
-        <p:nvPicPr>
-          <p:cNvPr id="7" name="Picture 6" descr="glow_bar.png"/>
-          <p:cNvPicPr>
-            <a:picLocks noChangeAspect="1"/>
-          </p:cNvPicPr>
-          <p:nvPr/>
-        </p:nvPicPr>
-        <p:blipFill>
-          <a:blip r:embed="rId4"/>
-          <a:stretch>
-            <a:fillRect/>
-          </a:stretch>
-        </p:blipFill>
+      <p:sp>
+        <p:nvSpPr>
+          <p:cNvPr id="5" name="Rectangle 4"/>
+          <p:cNvSpPr/>
+          <p:nvPr/>
+        </p:nvSpPr>
         <p:spPr>
           <a:xfrm>
             <a:off x="521207" y="969264"/>
-            <a:ext cx="4206240" cy="50292"/>
+            <a:ext cx="4206240" cy="27432"/>
           </a:xfrm>
           <a:prstGeom prst="rect">
             <a:avLst/>
           </a:prstGeom>
-        </p:spPr>
-      </p:pic>
-      <p:sp>
-        <p:nvSpPr>
-          <p:cNvPr id="8" name="TextBox 7"/>
+          <a:gradFill rotWithShape="1">
+            <a:gsLst>
+              <a:gs pos="0">
+                <a:srgbClr val="2A2E33"/>
+              </a:gs>
+              <a:gs pos="100000">
+                <a:srgbClr val="FFFFFF"/>
+              </a:gs>
+            </a:gsLst>
+            <a:lin scaled="0" ang="0"/>
+          </a:gradFill>
+          <a:ln>
+            <a:noFill/>
+          </a:ln>
+          <a:effectLst/>
+        </p:spPr>
+        <p:style>
+          <a:lnRef idx="1">
+            <a:schemeClr val="accent1"/>
+          </a:lnRef>
+          <a:fillRef idx="3">
+            <a:schemeClr val="accent1"/>
+          </a:fillRef>
+          <a:effectRef idx="2">
+            <a:schemeClr val="accent1"/>
+          </a:effectRef>
+          <a:fontRef idx="minor">
+            <a:schemeClr val="lt1"/>
+          </a:fontRef>
+        </p:style>
+        <p:txBody>
+          <a:bodyPr rtlCol="0" anchor="ctr"/>
+          <a:lstStyle/>
+          <a:p>
+            <a:pPr algn="ctr"/>
+          </a:p>
+        </p:txBody>
+      </p:sp>
+      <p:sp>
+        <p:nvSpPr>
+          <p:cNvPr id="6" name="TextBox 5"/>
           <p:cNvSpPr txBox="1"/>
           <p:nvPr/>
         </p:nvSpPr>
@@ -9645,7 +9321,7 @@
             <a:r>
               <a:rPr sz="3000" b="1">
                 <a:solidFill>
-                  <a:srgbClr val="D3DDEA"/>
+                  <a:srgbClr val="D8DADD"/>
                 </a:solidFill>
                 <a:latin typeface="맑은 고딕"/>
                 <a:ea typeface="맑은 고딕"/>
@@ -9657,7 +9333,7 @@
       </p:sp>
       <p:sp>
         <p:nvSpPr>
-          <p:cNvPr id="9" name="TextBox 8"/>
+          <p:cNvPr id="7" name="TextBox 6"/>
           <p:cNvSpPr txBox="1"/>
           <p:nvPr/>
         </p:nvSpPr>
@@ -9688,7 +9364,7 @@
             <a:r>
               <a:rPr sz="850" b="0">
                 <a:solidFill>
-                  <a:srgbClr val="ABB7C7"/>
+                  <a:srgbClr val="B2B5B9"/>
                 </a:solidFill>
                 <a:latin typeface="맑은 고딕"/>
                 <a:ea typeface="맑은 고딕"/>
@@ -9700,7 +9376,7 @@
       </p:sp>
       <p:graphicFrame>
         <p:nvGraphicFramePr>
-          <p:cNvPr id="10" name="Table 9"/>
+          <p:cNvPr id="8" name="Table 7"/>
           <p:cNvGraphicFramePr>
             <a:graphicFrameLocks noGrp="1"/>
           </p:cNvGraphicFramePr>
@@ -9850,7 +9526,7 @@
                       <a:r>
                         <a:rPr sz="1100" b="0">
                           <a:solidFill>
-                            <a:srgbClr val="222E40"/>
+                            <a:srgbClr val="1C1C1E"/>
                           </a:solidFill>
                           <a:latin typeface="맑은 고딕"/>
                           <a:ea typeface="맑은 고딕"/>
@@ -9878,7 +9554,7 @@
                       <a:r>
                         <a:rPr sz="1100" b="0">
                           <a:solidFill>
-                            <a:srgbClr val="222E40"/>
+                            <a:srgbClr val="1C1C1E"/>
                           </a:solidFill>
                           <a:latin typeface="맑은 고딕"/>
                           <a:ea typeface="맑은 고딕"/>
@@ -9906,7 +9582,7 @@
                       <a:r>
                         <a:rPr sz="1100" b="0">
                           <a:solidFill>
-                            <a:srgbClr val="222E40"/>
+                            <a:srgbClr val="1C1C1E"/>
                           </a:solidFill>
                           <a:latin typeface="맑은 고딕"/>
                           <a:ea typeface="맑은 고딕"/>
@@ -9934,7 +9610,7 @@
                       <a:r>
                         <a:rPr sz="1100" b="0">
                           <a:solidFill>
-                            <a:srgbClr val="222E40"/>
+                            <a:srgbClr val="1C1C1E"/>
                           </a:solidFill>
                           <a:latin typeface="맑은 고딕"/>
                           <a:ea typeface="맑은 고딕"/>
@@ -9964,7 +9640,7 @@
                       <a:r>
                         <a:rPr sz="1100" b="0">
                           <a:solidFill>
-                            <a:srgbClr val="222E40"/>
+                            <a:srgbClr val="1C1C1E"/>
                           </a:solidFill>
                           <a:latin typeface="맑은 고딕"/>
                           <a:ea typeface="맑은 고딕"/>
@@ -9975,7 +9651,7 @@
                   </a:txBody>
                   <a:tcPr marT="27432" marB="27432" marL="73152" marR="73152" anchor="ctr">
                     <a:solidFill>
-                      <a:srgbClr val="F5F8FC"/>
+                      <a:srgbClr val="F6F7F8"/>
                     </a:solidFill>
                   </a:tcPr>
                 </a:tc>
@@ -9992,7 +9668,7 @@
                       <a:r>
                         <a:rPr sz="1100" b="0">
                           <a:solidFill>
-                            <a:srgbClr val="222E40"/>
+                            <a:srgbClr val="1C1C1E"/>
                           </a:solidFill>
                           <a:latin typeface="맑은 고딕"/>
                           <a:ea typeface="맑은 고딕"/>
@@ -10003,7 +9679,7 @@
                   </a:txBody>
                   <a:tcPr marT="27432" marB="27432" marL="73152" marR="73152" anchor="ctr">
                     <a:solidFill>
-                      <a:srgbClr val="F5F8FC"/>
+                      <a:srgbClr val="F6F7F8"/>
                     </a:solidFill>
                   </a:tcPr>
                 </a:tc>
@@ -10020,7 +9696,7 @@
                       <a:r>
                         <a:rPr sz="1100" b="0">
                           <a:solidFill>
-                            <a:srgbClr val="222E40"/>
+                            <a:srgbClr val="1C1C1E"/>
                           </a:solidFill>
                           <a:latin typeface="맑은 고딕"/>
                           <a:ea typeface="맑은 고딕"/>
@@ -10031,7 +9707,7 @@
                   </a:txBody>
                   <a:tcPr marT="27432" marB="27432" marL="73152" marR="73152" anchor="ctr">
                     <a:solidFill>
-                      <a:srgbClr val="F5F8FC"/>
+                      <a:srgbClr val="F6F7F8"/>
                     </a:solidFill>
                   </a:tcPr>
                 </a:tc>
@@ -10048,7 +9724,7 @@
                       <a:r>
                         <a:rPr sz="1100" b="0">
                           <a:solidFill>
-                            <a:srgbClr val="222E40"/>
+                            <a:srgbClr val="1C1C1E"/>
                           </a:solidFill>
                           <a:latin typeface="맑은 고딕"/>
                           <a:ea typeface="맑은 고딕"/>
@@ -10059,7 +9735,7 @@
                   </a:txBody>
                   <a:tcPr marT="27432" marB="27432" marL="73152" marR="73152" anchor="ctr">
                     <a:solidFill>
-                      <a:srgbClr val="F5F8FC"/>
+                      <a:srgbClr val="F6F7F8"/>
                     </a:solidFill>
                   </a:tcPr>
                 </a:tc>
@@ -10078,7 +9754,7 @@
                       <a:r>
                         <a:rPr sz="1100" b="0">
                           <a:solidFill>
-                            <a:srgbClr val="222E40"/>
+                            <a:srgbClr val="1C1C1E"/>
                           </a:solidFill>
                           <a:latin typeface="맑은 고딕"/>
                           <a:ea typeface="맑은 고딕"/>
@@ -10106,7 +9782,7 @@
                       <a:r>
                         <a:rPr sz="1100" b="0">
                           <a:solidFill>
-                            <a:srgbClr val="222E40"/>
+                            <a:srgbClr val="1C1C1E"/>
                           </a:solidFill>
                           <a:latin typeface="맑은 고딕"/>
                           <a:ea typeface="맑은 고딕"/>
@@ -10134,7 +9810,7 @@
                       <a:r>
                         <a:rPr sz="1100" b="0">
                           <a:solidFill>
-                            <a:srgbClr val="222E40"/>
+                            <a:srgbClr val="1C1C1E"/>
                           </a:solidFill>
                           <a:latin typeface="맑은 고딕"/>
                           <a:ea typeface="맑은 고딕"/>
@@ -10162,7 +9838,7 @@
                       <a:r>
                         <a:rPr sz="1100" b="0">
                           <a:solidFill>
-                            <a:srgbClr val="222E40"/>
+                            <a:srgbClr val="1C1C1E"/>
                           </a:solidFill>
                           <a:latin typeface="맑은 고딕"/>
                           <a:ea typeface="맑은 고딕"/>
@@ -10192,7 +9868,7 @@
                       <a:r>
                         <a:rPr sz="1100" b="0">
                           <a:solidFill>
-                            <a:srgbClr val="222E40"/>
+                            <a:srgbClr val="1C1C1E"/>
                           </a:solidFill>
                           <a:latin typeface="맑은 고딕"/>
                           <a:ea typeface="맑은 고딕"/>
@@ -10203,7 +9879,7 @@
                   </a:txBody>
                   <a:tcPr marT="27432" marB="27432" marL="73152" marR="73152" anchor="ctr">
                     <a:solidFill>
-                      <a:srgbClr val="F5F8FC"/>
+                      <a:srgbClr val="F6F7F8"/>
                     </a:solidFill>
                   </a:tcPr>
                 </a:tc>
@@ -10220,7 +9896,7 @@
                       <a:r>
                         <a:rPr sz="1100" b="0">
                           <a:solidFill>
-                            <a:srgbClr val="222E40"/>
+                            <a:srgbClr val="1C1C1E"/>
                           </a:solidFill>
                           <a:latin typeface="맑은 고딕"/>
                           <a:ea typeface="맑은 고딕"/>
@@ -10231,7 +9907,7 @@
                   </a:txBody>
                   <a:tcPr marT="27432" marB="27432" marL="73152" marR="73152" anchor="ctr">
                     <a:solidFill>
-                      <a:srgbClr val="F5F8FC"/>
+                      <a:srgbClr val="F6F7F8"/>
                     </a:solidFill>
                   </a:tcPr>
                 </a:tc>
@@ -10248,7 +9924,7 @@
                       <a:r>
                         <a:rPr sz="1100" b="0">
                           <a:solidFill>
-                            <a:srgbClr val="222E40"/>
+                            <a:srgbClr val="1C1C1E"/>
                           </a:solidFill>
                           <a:latin typeface="맑은 고딕"/>
                           <a:ea typeface="맑은 고딕"/>
@@ -10259,7 +9935,7 @@
                   </a:txBody>
                   <a:tcPr marT="27432" marB="27432" marL="73152" marR="73152" anchor="ctr">
                     <a:solidFill>
-                      <a:srgbClr val="F5F8FC"/>
+                      <a:srgbClr val="F6F7F8"/>
                     </a:solidFill>
                   </a:tcPr>
                 </a:tc>
@@ -10276,7 +9952,7 @@
                       <a:r>
                         <a:rPr sz="1100" b="0">
                           <a:solidFill>
-                            <a:srgbClr val="222E40"/>
+                            <a:srgbClr val="1C1C1E"/>
                           </a:solidFill>
                           <a:latin typeface="맑은 고딕"/>
                           <a:ea typeface="맑은 고딕"/>
@@ -10287,7 +9963,7 @@
                   </a:txBody>
                   <a:tcPr marT="27432" marB="27432" marL="73152" marR="73152" anchor="ctr">
                     <a:solidFill>
-                      <a:srgbClr val="F5F8FC"/>
+                      <a:srgbClr val="F6F7F8"/>
                     </a:solidFill>
                   </a:tcPr>
                 </a:tc>
@@ -10306,7 +9982,7 @@
                       <a:r>
                         <a:rPr sz="1100" b="0">
                           <a:solidFill>
-                            <a:srgbClr val="222E40"/>
+                            <a:srgbClr val="1C1C1E"/>
                           </a:solidFill>
                           <a:latin typeface="맑은 고딕"/>
                           <a:ea typeface="맑은 고딕"/>
@@ -10334,7 +10010,7 @@
                       <a:r>
                         <a:rPr sz="1100" b="0">
                           <a:solidFill>
-                            <a:srgbClr val="222E40"/>
+                            <a:srgbClr val="1C1C1E"/>
                           </a:solidFill>
                           <a:latin typeface="맑은 고딕"/>
                           <a:ea typeface="맑은 고딕"/>
@@ -10362,7 +10038,7 @@
                       <a:r>
                         <a:rPr sz="1100" b="0">
                           <a:solidFill>
-                            <a:srgbClr val="222E40"/>
+                            <a:srgbClr val="1C1C1E"/>
                           </a:solidFill>
                           <a:latin typeface="맑은 고딕"/>
                           <a:ea typeface="맑은 고딕"/>
@@ -10390,7 +10066,7 @@
                       <a:r>
                         <a:rPr sz="1100" b="0">
                           <a:solidFill>
-                            <a:srgbClr val="222E40"/>
+                            <a:srgbClr val="1C1C1E"/>
                           </a:solidFill>
                           <a:latin typeface="맑은 고딕"/>
                           <a:ea typeface="맑은 고딕"/>
@@ -10412,7 +10088,7 @@
       </p:graphicFrame>
       <p:sp>
         <p:nvSpPr>
-          <p:cNvPr id="11" name="TextBox 10"/>
+          <p:cNvPr id="9" name="TextBox 8"/>
           <p:cNvSpPr txBox="1"/>
           <p:nvPr/>
         </p:nvSpPr>
@@ -10443,7 +10119,7 @@
             <a:r>
               <a:rPr sz="1300" b="1">
                 <a:solidFill>
-                  <a:srgbClr val="222E40"/>
+                  <a:srgbClr val="1C1C1E"/>
                 </a:solidFill>
                 <a:latin typeface="맑은 고딕"/>
                 <a:ea typeface="맑은 고딕"/>
@@ -10463,7 +10139,7 @@
             <a:r>
               <a:rPr sz="1150" b="0">
                 <a:solidFill>
-                  <a:srgbClr val="6A7B92"/>
+                  <a:srgbClr val="767A7F"/>
                 </a:solidFill>
                 <a:latin typeface="맑은 고딕"/>
                 <a:ea typeface="맑은 고딕"/>
@@ -10535,57 +10211,9 @@
           </a:p>
         </p:txBody>
       </p:sp>
-      <p:pic>
-        <p:nvPicPr>
-          <p:cNvPr id="3" name="Picture 2" descr="blob_blue.png"/>
-          <p:cNvPicPr>
-            <a:picLocks noChangeAspect="1"/>
-          </p:cNvPicPr>
-          <p:nvPr/>
-        </p:nvPicPr>
-        <p:blipFill>
-          <a:blip r:embed="rId2"/>
-          <a:stretch>
-            <a:fillRect/>
-          </a:stretch>
-        </p:blipFill>
-        <p:spPr>
-          <a:xfrm>
-            <a:off x="-3474720" y="3840480"/>
-            <a:ext cx="6583680" cy="6583680"/>
-          </a:xfrm>
-          <a:prstGeom prst="rect">
-            <a:avLst/>
-          </a:prstGeom>
-        </p:spPr>
-      </p:pic>
-      <p:pic>
-        <p:nvPicPr>
-          <p:cNvPr id="4" name="Picture 3" descr="blob_coral.png"/>
-          <p:cNvPicPr>
-            <a:picLocks noChangeAspect="1"/>
-          </p:cNvPicPr>
-          <p:nvPr/>
-        </p:nvPicPr>
-        <p:blipFill>
-          <a:blip r:embed="rId3"/>
-          <a:stretch>
-            <a:fillRect/>
-          </a:stretch>
-        </p:blipFill>
-        <p:spPr>
-          <a:xfrm>
-            <a:off x="8961120" y="-3291840"/>
-            <a:ext cx="6217920" cy="6217920"/>
-          </a:xfrm>
-          <a:prstGeom prst="rect">
-            <a:avLst/>
-          </a:prstGeom>
-        </p:spPr>
-      </p:pic>
-      <p:sp>
-        <p:nvSpPr>
-          <p:cNvPr id="5" name="Rounded Rectangle 4"/>
+      <p:sp>
+        <p:nvSpPr>
+          <p:cNvPr id="3" name="Rounded Rectangle 2"/>
           <p:cNvSpPr/>
           <p:nvPr/>
         </p:nvSpPr>
@@ -10602,10 +10230,10 @@
           <a:gradFill rotWithShape="1">
             <a:gsLst>
               <a:gs pos="0">
-                <a:srgbClr val="FF7A59"/>
+                <a:srgbClr val="3A3F45"/>
               </a:gs>
               <a:gs pos="100000">
-                <a:srgbClr val="FFB86B"/>
+                <a:srgbClr val="73787E"/>
               </a:gs>
             </a:gsLst>
             <a:lin scaled="0" ang="18900000"/>
@@ -10615,7 +10243,7 @@
           </a:ln>
           <a:effectLst>
             <a:outerShdw blurRad="109728" dist="36576" dir="5400000" rotWithShape="0">
-              <a:srgbClr val="C24E30">
+              <a:srgbClr val="000000">
                 <a:alpha val="35000"/>
               </a:srgbClr>
             </a:outerShdw>
@@ -10645,7 +10273,7 @@
       </p:sp>
       <p:sp>
         <p:nvSpPr>
-          <p:cNvPr id="6" name="TextBox 5"/>
+          <p:cNvPr id="4" name="TextBox 3"/>
           <p:cNvSpPr txBox="1"/>
           <p:nvPr/>
         </p:nvSpPr>
@@ -10676,7 +10304,7 @@
             <a:r>
               <a:rPr sz="2150" b="1">
                 <a:solidFill>
-                  <a:srgbClr val="222E40"/>
+                  <a:srgbClr val="1C1C1E"/>
                 </a:solidFill>
                 <a:latin typeface="맑은 고딕"/>
                 <a:ea typeface="맑은 고딕"/>
@@ -10686,33 +10314,61 @@
           </a:p>
         </p:txBody>
       </p:sp>
-      <p:pic>
-        <p:nvPicPr>
-          <p:cNvPr id="7" name="Picture 6" descr="glow_bar.png"/>
-          <p:cNvPicPr>
-            <a:picLocks noChangeAspect="1"/>
-          </p:cNvPicPr>
-          <p:nvPr/>
-        </p:nvPicPr>
-        <p:blipFill>
-          <a:blip r:embed="rId4"/>
-          <a:stretch>
-            <a:fillRect/>
-          </a:stretch>
-        </p:blipFill>
+      <p:sp>
+        <p:nvSpPr>
+          <p:cNvPr id="5" name="Rectangle 4"/>
+          <p:cNvSpPr/>
+          <p:nvPr/>
+        </p:nvSpPr>
         <p:spPr>
           <a:xfrm>
             <a:off x="521207" y="969264"/>
-            <a:ext cx="4206240" cy="50292"/>
+            <a:ext cx="4206240" cy="27432"/>
           </a:xfrm>
           <a:prstGeom prst="rect">
             <a:avLst/>
           </a:prstGeom>
-        </p:spPr>
-      </p:pic>
-      <p:sp>
-        <p:nvSpPr>
-          <p:cNvPr id="8" name="TextBox 7"/>
+          <a:gradFill rotWithShape="1">
+            <a:gsLst>
+              <a:gs pos="0">
+                <a:srgbClr val="2A2E33"/>
+              </a:gs>
+              <a:gs pos="100000">
+                <a:srgbClr val="FFFFFF"/>
+              </a:gs>
+            </a:gsLst>
+            <a:lin scaled="0" ang="0"/>
+          </a:gradFill>
+          <a:ln>
+            <a:noFill/>
+          </a:ln>
+          <a:effectLst/>
+        </p:spPr>
+        <p:style>
+          <a:lnRef idx="1">
+            <a:schemeClr val="accent1"/>
+          </a:lnRef>
+          <a:fillRef idx="3">
+            <a:schemeClr val="accent1"/>
+          </a:fillRef>
+          <a:effectRef idx="2">
+            <a:schemeClr val="accent1"/>
+          </a:effectRef>
+          <a:fontRef idx="minor">
+            <a:schemeClr val="lt1"/>
+          </a:fontRef>
+        </p:style>
+        <p:txBody>
+          <a:bodyPr rtlCol="0" anchor="ctr"/>
+          <a:lstStyle/>
+          <a:p>
+            <a:pPr algn="ctr"/>
+          </a:p>
+        </p:txBody>
+      </p:sp>
+      <p:sp>
+        <p:nvSpPr>
+          <p:cNvPr id="6" name="TextBox 5"/>
           <p:cNvSpPr txBox="1"/>
           <p:nvPr/>
         </p:nvSpPr>
@@ -10743,7 +10399,7 @@
             <a:r>
               <a:rPr sz="3000" b="1">
                 <a:solidFill>
-                  <a:srgbClr val="D3DDEA"/>
+                  <a:srgbClr val="D8DADD"/>
                 </a:solidFill>
                 <a:latin typeface="맑은 고딕"/>
                 <a:ea typeface="맑은 고딕"/>
@@ -10755,7 +10411,7 @@
       </p:sp>
       <p:sp>
         <p:nvSpPr>
-          <p:cNvPr id="9" name="TextBox 8"/>
+          <p:cNvPr id="7" name="TextBox 6"/>
           <p:cNvSpPr txBox="1"/>
           <p:nvPr/>
         </p:nvSpPr>
@@ -10786,7 +10442,7 @@
             <a:r>
               <a:rPr sz="850" b="0">
                 <a:solidFill>
-                  <a:srgbClr val="ABB7C7"/>
+                  <a:srgbClr val="B2B5B9"/>
                 </a:solidFill>
                 <a:latin typeface="맑은 고딕"/>
                 <a:ea typeface="맑은 고딕"/>
@@ -10798,7 +10454,7 @@
       </p:sp>
       <p:sp>
         <p:nvSpPr>
-          <p:cNvPr id="10" name="Rounded Rectangle 9"/>
+          <p:cNvPr id="8" name="Rounded Rectangle 7"/>
           <p:cNvSpPr/>
           <p:nvPr/>
         </p:nvSpPr>
@@ -10817,12 +10473,12 @@
           </a:solidFill>
           <a:ln w="12700">
             <a:solidFill>
-              <a:srgbClr val="E4EAF2"/>
+              <a:srgbClr val="E4E6E9"/>
             </a:solidFill>
           </a:ln>
           <a:effectLst>
             <a:outerShdw blurRad="182880" dist="64008" dir="5400000" rotWithShape="0">
-              <a:srgbClr val="2A3B55">
+              <a:srgbClr val="000000">
                 <a:alpha val="30000"/>
               </a:srgbClr>
             </a:outerShdw>
@@ -10852,7 +10508,7 @@
       </p:sp>
       <p:sp>
         <p:nvSpPr>
-          <p:cNvPr id="11" name="TextBox 10"/>
+          <p:cNvPr id="9" name="TextBox 8"/>
           <p:cNvSpPr txBox="1"/>
           <p:nvPr/>
         </p:nvSpPr>
@@ -10883,7 +10539,7 @@
             <a:r>
               <a:rPr sz="1300" b="1">
                 <a:solidFill>
-                  <a:srgbClr val="17456B"/>
+                  <a:srgbClr val="33393F"/>
                 </a:solidFill>
                 <a:latin typeface="맑은 고딕"/>
                 <a:ea typeface="맑은 고딕"/>
@@ -10903,7 +10559,7 @@
             <a:r>
               <a:rPr sz="1100" b="0">
                 <a:solidFill>
-                  <a:srgbClr val="222E40"/>
+                  <a:srgbClr val="1C1C1E"/>
                 </a:solidFill>
                 <a:latin typeface="맑은 고딕"/>
                 <a:ea typeface="맑은 고딕"/>
@@ -10923,7 +10579,7 @@
             <a:r>
               <a:rPr sz="1100" b="0">
                 <a:solidFill>
-                  <a:srgbClr val="222E40"/>
+                  <a:srgbClr val="1C1C1E"/>
                 </a:solidFill>
                 <a:latin typeface="맑은 고딕"/>
                 <a:ea typeface="맑은 고딕"/>
@@ -10943,7 +10599,7 @@
             <a:r>
               <a:rPr sz="1100" b="0">
                 <a:solidFill>
-                  <a:srgbClr val="222E40"/>
+                  <a:srgbClr val="1C1C1E"/>
                 </a:solidFill>
                 <a:latin typeface="맑은 고딕"/>
                 <a:ea typeface="맑은 고딕"/>
@@ -10963,7 +10619,7 @@
             <a:r>
               <a:rPr sz="1100" b="0">
                 <a:solidFill>
-                  <a:srgbClr val="222E40"/>
+                  <a:srgbClr val="1C1C1E"/>
                 </a:solidFill>
                 <a:latin typeface="맑은 고딕"/>
                 <a:ea typeface="맑은 고딕"/>
@@ -10983,7 +10639,7 @@
             <a:r>
               <a:rPr sz="1100" b="0">
                 <a:solidFill>
-                  <a:srgbClr val="222E40"/>
+                  <a:srgbClr val="1C1C1E"/>
                 </a:solidFill>
                 <a:latin typeface="맑은 고딕"/>
                 <a:ea typeface="맑은 고딕"/>
@@ -10995,7 +10651,7 @@
       </p:sp>
       <p:sp>
         <p:nvSpPr>
-          <p:cNvPr id="12" name="Rounded Rectangle 11"/>
+          <p:cNvPr id="10" name="Rounded Rectangle 9"/>
           <p:cNvSpPr/>
           <p:nvPr/>
         </p:nvSpPr>
@@ -11014,12 +10670,12 @@
           </a:solidFill>
           <a:ln w="12700">
             <a:solidFill>
-              <a:srgbClr val="E4EAF2"/>
+              <a:srgbClr val="E4E6E9"/>
             </a:solidFill>
           </a:ln>
           <a:effectLst>
             <a:outerShdw blurRad="182880" dist="64008" dir="5400000" rotWithShape="0">
-              <a:srgbClr val="2A3B55">
+              <a:srgbClr val="000000">
                 <a:alpha val="30000"/>
               </a:srgbClr>
             </a:outerShdw>
@@ -11049,7 +10705,7 @@
       </p:sp>
       <p:sp>
         <p:nvSpPr>
-          <p:cNvPr id="13" name="TextBox 12"/>
+          <p:cNvPr id="11" name="TextBox 10"/>
           <p:cNvSpPr txBox="1"/>
           <p:nvPr/>
         </p:nvSpPr>
@@ -11080,7 +10736,7 @@
             <a:r>
               <a:rPr sz="1300" b="1">
                 <a:solidFill>
-                  <a:srgbClr val="17456B"/>
+                  <a:srgbClr val="33393F"/>
                 </a:solidFill>
                 <a:latin typeface="맑은 고딕"/>
                 <a:ea typeface="맑은 고딕"/>
@@ -11100,7 +10756,7 @@
             <a:r>
               <a:rPr sz="1100" b="0">
                 <a:solidFill>
-                  <a:srgbClr val="222E40"/>
+                  <a:srgbClr val="1C1C1E"/>
                 </a:solidFill>
                 <a:latin typeface="맑은 고딕"/>
                 <a:ea typeface="맑은 고딕"/>
@@ -11120,7 +10776,7 @@
             <a:r>
               <a:rPr sz="1100" b="0">
                 <a:solidFill>
-                  <a:srgbClr val="222E40"/>
+                  <a:srgbClr val="1C1C1E"/>
                 </a:solidFill>
                 <a:latin typeface="맑은 고딕"/>
                 <a:ea typeface="맑은 고딕"/>
@@ -11140,7 +10796,7 @@
             <a:r>
               <a:rPr sz="1100" b="0">
                 <a:solidFill>
-                  <a:srgbClr val="222E40"/>
+                  <a:srgbClr val="1C1C1E"/>
                 </a:solidFill>
                 <a:latin typeface="맑은 고딕"/>
                 <a:ea typeface="맑은 고딕"/>
@@ -11160,7 +10816,7 @@
             <a:r>
               <a:rPr sz="1100" b="0">
                 <a:solidFill>
-                  <a:srgbClr val="222E40"/>
+                  <a:srgbClr val="1C1C1E"/>
                 </a:solidFill>
                 <a:latin typeface="맑은 고딕"/>
                 <a:ea typeface="맑은 고딕"/>
@@ -11172,7 +10828,7 @@
       </p:sp>
       <p:sp>
         <p:nvSpPr>
-          <p:cNvPr id="14" name="TextBox 13"/>
+          <p:cNvPr id="12" name="TextBox 11"/>
           <p:cNvSpPr txBox="1"/>
           <p:nvPr/>
         </p:nvSpPr>
@@ -11203,7 +10859,7 @@
             <a:r>
               <a:rPr sz="1300" b="1">
                 <a:solidFill>
-                  <a:srgbClr val="222E40"/>
+                  <a:srgbClr val="1C1C1E"/>
                 </a:solidFill>
                 <a:latin typeface="맑은 고딕"/>
                 <a:ea typeface="맑은 고딕"/>
@@ -11275,129 +10931,9 @@
           </a:p>
         </p:txBody>
       </p:sp>
-      <p:pic>
-        <p:nvPicPr>
-          <p:cNvPr id="3" name="Picture 2" descr="blob_blue.png"/>
-          <p:cNvPicPr>
-            <a:picLocks noChangeAspect="1"/>
-          </p:cNvPicPr>
-          <p:nvPr/>
-        </p:nvPicPr>
-        <p:blipFill>
-          <a:blip r:embed="rId2"/>
-          <a:stretch>
-            <a:fillRect/>
-          </a:stretch>
-        </p:blipFill>
-        <p:spPr>
-          <a:xfrm>
-            <a:off x="6217920" y="-3291840"/>
-            <a:ext cx="8229600" cy="8229600"/>
-          </a:xfrm>
-          <a:prstGeom prst="rect">
-            <a:avLst/>
-          </a:prstGeom>
-        </p:spPr>
-      </p:pic>
-      <p:pic>
-        <p:nvPicPr>
-          <p:cNvPr id="4" name="Picture 3" descr="blob_coral.png"/>
-          <p:cNvPicPr>
-            <a:picLocks noChangeAspect="1"/>
-          </p:cNvPicPr>
-          <p:nvPr/>
-        </p:nvPicPr>
-        <p:blipFill>
-          <a:blip r:embed="rId3"/>
-          <a:stretch>
-            <a:fillRect/>
-          </a:stretch>
-        </p:blipFill>
-        <p:spPr>
-          <a:xfrm>
-            <a:off x="-2743200" y="3108960"/>
-            <a:ext cx="6949440" cy="6949440"/>
-          </a:xfrm>
-          <a:prstGeom prst="rect">
-            <a:avLst/>
-          </a:prstGeom>
-        </p:spPr>
-      </p:pic>
-      <p:pic>
-        <p:nvPicPr>
-          <p:cNvPr id="5" name="Picture 4" descr="ring_coral.png"/>
-          <p:cNvPicPr>
-            <a:picLocks noChangeAspect="1"/>
-          </p:cNvPicPr>
-          <p:nvPr/>
-        </p:nvPicPr>
-        <p:blipFill>
-          <a:blip r:embed="rId4"/>
-          <a:stretch>
-            <a:fillRect/>
-          </a:stretch>
-        </p:blipFill>
-        <p:spPr>
-          <a:xfrm>
-            <a:off x="9692640" y="3977639"/>
-            <a:ext cx="2103120" cy="2103120"/>
-          </a:xfrm>
-          <a:prstGeom prst="rect">
-            <a:avLst/>
-          </a:prstGeom>
-        </p:spPr>
-      </p:pic>
-      <p:pic>
-        <p:nvPicPr>
-          <p:cNvPr id="6" name="Picture 5" descr="sphere_blue.png"/>
-          <p:cNvPicPr>
-            <a:picLocks noChangeAspect="1"/>
-          </p:cNvPicPr>
-          <p:nvPr/>
-        </p:nvPicPr>
-        <p:blipFill>
-          <a:blip r:embed="rId5"/>
-          <a:stretch>
-            <a:fillRect/>
-          </a:stretch>
-        </p:blipFill>
-        <p:spPr>
-          <a:xfrm>
-            <a:off x="10927080" y="777240"/>
-            <a:ext cx="960120" cy="1120140"/>
-          </a:xfrm>
-          <a:prstGeom prst="rect">
-            <a:avLst/>
-          </a:prstGeom>
-        </p:spPr>
-      </p:pic>
-      <p:pic>
-        <p:nvPicPr>
-          <p:cNvPr id="7" name="Picture 6" descr="icon_med.png"/>
-          <p:cNvPicPr>
-            <a:picLocks noChangeAspect="1"/>
-          </p:cNvPicPr>
-          <p:nvPr/>
-        </p:nvPicPr>
-        <p:blipFill>
-          <a:blip r:embed="rId6"/>
-          <a:stretch>
-            <a:fillRect/>
-          </a:stretch>
-        </p:blipFill>
-        <p:spPr>
-          <a:xfrm>
-            <a:off x="9829800" y="2377440"/>
-            <a:ext cx="685800" cy="767715"/>
-          </a:xfrm>
-          <a:prstGeom prst="rect">
-            <a:avLst/>
-          </a:prstGeom>
-        </p:spPr>
-      </p:pic>
-      <p:sp>
-        <p:nvSpPr>
-          <p:cNvPr id="8" name="TextBox 7"/>
+      <p:sp>
+        <p:nvSpPr>
+          <p:cNvPr id="3" name="TextBox 2"/>
           <p:cNvSpPr txBox="1"/>
           <p:nvPr/>
         </p:nvSpPr>
@@ -11428,7 +10964,7 @@
             <a:r>
               <a:rPr sz="2600" b="1">
                 <a:solidFill>
-                  <a:srgbClr val="222E40"/>
+                  <a:srgbClr val="1C1C1E"/>
                 </a:solidFill>
                 <a:latin typeface="맑은 고딕"/>
                 <a:ea typeface="맑은 고딕"/>
@@ -11438,33 +10974,61 @@
           </a:p>
         </p:txBody>
       </p:sp>
-      <p:pic>
-        <p:nvPicPr>
-          <p:cNvPr id="9" name="Picture 8" descr="glow_bar.png"/>
-          <p:cNvPicPr>
-            <a:picLocks noChangeAspect="1"/>
-          </p:cNvPicPr>
-          <p:nvPr/>
-        </p:nvPicPr>
-        <p:blipFill>
-          <a:blip r:embed="rId7"/>
-          <a:stretch>
-            <a:fillRect/>
-          </a:stretch>
-        </p:blipFill>
+      <p:sp>
+        <p:nvSpPr>
+          <p:cNvPr id="4" name="Rectangle 3"/>
+          <p:cNvSpPr/>
+          <p:nvPr/>
+        </p:nvSpPr>
         <p:spPr>
           <a:xfrm>
             <a:off x="932688" y="1920240"/>
-            <a:ext cx="4754880" cy="50292"/>
+            <a:ext cx="4754880" cy="27432"/>
           </a:xfrm>
           <a:prstGeom prst="rect">
             <a:avLst/>
           </a:prstGeom>
-        </p:spPr>
-      </p:pic>
-      <p:sp>
-        <p:nvSpPr>
-          <p:cNvPr id="10" name="TextBox 9"/>
+          <a:gradFill rotWithShape="1">
+            <a:gsLst>
+              <a:gs pos="0">
+                <a:srgbClr val="2A2E33"/>
+              </a:gs>
+              <a:gs pos="100000">
+                <a:srgbClr val="FFFFFF"/>
+              </a:gs>
+            </a:gsLst>
+            <a:lin scaled="0" ang="0"/>
+          </a:gradFill>
+          <a:ln>
+            <a:noFill/>
+          </a:ln>
+          <a:effectLst/>
+        </p:spPr>
+        <p:style>
+          <a:lnRef idx="1">
+            <a:schemeClr val="accent1"/>
+          </a:lnRef>
+          <a:fillRef idx="3">
+            <a:schemeClr val="accent1"/>
+          </a:fillRef>
+          <a:effectRef idx="2">
+            <a:schemeClr val="accent1"/>
+          </a:effectRef>
+          <a:fontRef idx="minor">
+            <a:schemeClr val="lt1"/>
+          </a:fontRef>
+        </p:style>
+        <p:txBody>
+          <a:bodyPr rtlCol="0" anchor="ctr"/>
+          <a:lstStyle/>
+          <a:p>
+            <a:pPr algn="ctr"/>
+          </a:p>
+        </p:txBody>
+      </p:sp>
+      <p:sp>
+        <p:nvSpPr>
+          <p:cNvPr id="5" name="TextBox 4"/>
           <p:cNvSpPr txBox="1"/>
           <p:nvPr/>
         </p:nvSpPr>
@@ -11495,7 +11059,7 @@
             <a:r>
               <a:rPr sz="2200" b="1">
                 <a:solidFill>
-                  <a:srgbClr val="222E40"/>
+                  <a:srgbClr val="1C1C1E"/>
                 </a:solidFill>
                 <a:latin typeface="맑은 고딕"/>
                 <a:ea typeface="맑은 고딕"/>
@@ -11515,7 +11079,7 @@
             <a:r>
               <a:rPr sz="2200" b="1">
                 <a:solidFill>
-                  <a:srgbClr val="222E40"/>
+                  <a:srgbClr val="1C1C1E"/>
                 </a:solidFill>
                 <a:latin typeface="맑은 고딕"/>
                 <a:ea typeface="맑은 고딕"/>
@@ -11535,7 +11099,7 @@
             <a:r>
               <a:rPr sz="2200" b="1">
                 <a:solidFill>
-                  <a:srgbClr val="E85D42"/>
+                  <a:srgbClr val="000000"/>
                 </a:solidFill>
                 <a:latin typeface="맑은 고딕"/>
                 <a:ea typeface="맑은 고딕"/>
@@ -11547,7 +11111,7 @@
       </p:sp>
       <p:sp>
         <p:nvSpPr>
-          <p:cNvPr id="11" name="TextBox 10"/>
+          <p:cNvPr id="6" name="TextBox 5"/>
           <p:cNvSpPr txBox="1"/>
           <p:nvPr/>
         </p:nvSpPr>
@@ -11578,7 +11142,7 @@
             <a:r>
               <a:rPr sz="1300" b="0">
                 <a:solidFill>
-                  <a:srgbClr val="6A7B92"/>
+                  <a:srgbClr val="767A7F"/>
                 </a:solidFill>
                 <a:latin typeface="맑은 고딕"/>
                 <a:ea typeface="맑은 고딕"/>
@@ -11598,7 +11162,7 @@
             <a:r>
               <a:rPr sz="1300" b="0">
                 <a:solidFill>
-                  <a:srgbClr val="6A7B92"/>
+                  <a:srgbClr val="767A7F"/>
                 </a:solidFill>
                 <a:latin typeface="맑은 고딕"/>
                 <a:ea typeface="맑은 고딕"/>
@@ -11618,7 +11182,7 @@
             <a:r>
               <a:rPr sz="1300" b="1">
                 <a:solidFill>
-                  <a:srgbClr val="17456B"/>
+                  <a:srgbClr val="33393F"/>
                 </a:solidFill>
                 <a:latin typeface="맑은 고딕"/>
                 <a:ea typeface="맑은 고딕"/>
@@ -11690,57 +11254,9 @@
           </a:p>
         </p:txBody>
       </p:sp>
-      <p:pic>
-        <p:nvPicPr>
-          <p:cNvPr id="3" name="Picture 2" descr="blob_blue.png"/>
-          <p:cNvPicPr>
-            <a:picLocks noChangeAspect="1"/>
-          </p:cNvPicPr>
-          <p:nvPr/>
-        </p:nvPicPr>
-        <p:blipFill>
-          <a:blip r:embed="rId2"/>
-          <a:stretch>
-            <a:fillRect/>
-          </a:stretch>
-        </p:blipFill>
-        <p:spPr>
-          <a:xfrm>
-            <a:off x="-3474720" y="3840480"/>
-            <a:ext cx="6583680" cy="6583680"/>
-          </a:xfrm>
-          <a:prstGeom prst="rect">
-            <a:avLst/>
-          </a:prstGeom>
-        </p:spPr>
-      </p:pic>
-      <p:pic>
-        <p:nvPicPr>
-          <p:cNvPr id="4" name="Picture 3" descr="blob_coral.png"/>
-          <p:cNvPicPr>
-            <a:picLocks noChangeAspect="1"/>
-          </p:cNvPicPr>
-          <p:nvPr/>
-        </p:nvPicPr>
-        <p:blipFill>
-          <a:blip r:embed="rId3"/>
-          <a:stretch>
-            <a:fillRect/>
-          </a:stretch>
-        </p:blipFill>
-        <p:spPr>
-          <a:xfrm>
-            <a:off x="8961120" y="-3291840"/>
-            <a:ext cx="6217920" cy="6217920"/>
-          </a:xfrm>
-          <a:prstGeom prst="rect">
-            <a:avLst/>
-          </a:prstGeom>
-        </p:spPr>
-      </p:pic>
-      <p:sp>
-        <p:nvSpPr>
-          <p:cNvPr id="5" name="Rounded Rectangle 4"/>
+      <p:sp>
+        <p:nvSpPr>
+          <p:cNvPr id="3" name="Rounded Rectangle 2"/>
           <p:cNvSpPr/>
           <p:nvPr/>
         </p:nvSpPr>
@@ -11757,10 +11273,10 @@
           <a:gradFill rotWithShape="1">
             <a:gsLst>
               <a:gs pos="0">
-                <a:srgbClr val="FF7A59"/>
+                <a:srgbClr val="3A3F45"/>
               </a:gs>
               <a:gs pos="100000">
-                <a:srgbClr val="FFB86B"/>
+                <a:srgbClr val="73787E"/>
               </a:gs>
             </a:gsLst>
             <a:lin scaled="0" ang="18900000"/>
@@ -11770,7 +11286,7 @@
           </a:ln>
           <a:effectLst>
             <a:outerShdw blurRad="109728" dist="36576" dir="5400000" rotWithShape="0">
-              <a:srgbClr val="C24E30">
+              <a:srgbClr val="000000">
                 <a:alpha val="35000"/>
               </a:srgbClr>
             </a:outerShdw>
@@ -11800,7 +11316,7 @@
       </p:sp>
       <p:sp>
         <p:nvSpPr>
-          <p:cNvPr id="6" name="TextBox 5"/>
+          <p:cNvPr id="4" name="TextBox 3"/>
           <p:cNvSpPr txBox="1"/>
           <p:nvPr/>
         </p:nvSpPr>
@@ -11831,7 +11347,7 @@
             <a:r>
               <a:rPr sz="2150" b="1">
                 <a:solidFill>
-                  <a:srgbClr val="222E40"/>
+                  <a:srgbClr val="1C1C1E"/>
                 </a:solidFill>
                 <a:latin typeface="맑은 고딕"/>
                 <a:ea typeface="맑은 고딕"/>
@@ -11841,33 +11357,61 @@
           </a:p>
         </p:txBody>
       </p:sp>
-      <p:pic>
-        <p:nvPicPr>
-          <p:cNvPr id="7" name="Picture 6" descr="glow_bar.png"/>
-          <p:cNvPicPr>
-            <a:picLocks noChangeAspect="1"/>
-          </p:cNvPicPr>
-          <p:nvPr/>
-        </p:nvPicPr>
-        <p:blipFill>
-          <a:blip r:embed="rId4"/>
-          <a:stretch>
-            <a:fillRect/>
-          </a:stretch>
-        </p:blipFill>
+      <p:sp>
+        <p:nvSpPr>
+          <p:cNvPr id="5" name="Rectangle 4"/>
+          <p:cNvSpPr/>
+          <p:nvPr/>
+        </p:nvSpPr>
         <p:spPr>
           <a:xfrm>
             <a:off x="521207" y="969264"/>
-            <a:ext cx="4206240" cy="50292"/>
+            <a:ext cx="4206240" cy="27432"/>
           </a:xfrm>
           <a:prstGeom prst="rect">
             <a:avLst/>
           </a:prstGeom>
-        </p:spPr>
-      </p:pic>
-      <p:sp>
-        <p:nvSpPr>
-          <p:cNvPr id="8" name="TextBox 7"/>
+          <a:gradFill rotWithShape="1">
+            <a:gsLst>
+              <a:gs pos="0">
+                <a:srgbClr val="2A2E33"/>
+              </a:gs>
+              <a:gs pos="100000">
+                <a:srgbClr val="FFFFFF"/>
+              </a:gs>
+            </a:gsLst>
+            <a:lin scaled="0" ang="0"/>
+          </a:gradFill>
+          <a:ln>
+            <a:noFill/>
+          </a:ln>
+          <a:effectLst/>
+        </p:spPr>
+        <p:style>
+          <a:lnRef idx="1">
+            <a:schemeClr val="accent1"/>
+          </a:lnRef>
+          <a:fillRef idx="3">
+            <a:schemeClr val="accent1"/>
+          </a:fillRef>
+          <a:effectRef idx="2">
+            <a:schemeClr val="accent1"/>
+          </a:effectRef>
+          <a:fontRef idx="minor">
+            <a:schemeClr val="lt1"/>
+          </a:fontRef>
+        </p:style>
+        <p:txBody>
+          <a:bodyPr rtlCol="0" anchor="ctr"/>
+          <a:lstStyle/>
+          <a:p>
+            <a:pPr algn="ctr"/>
+          </a:p>
+        </p:txBody>
+      </p:sp>
+      <p:sp>
+        <p:nvSpPr>
+          <p:cNvPr id="6" name="TextBox 5"/>
           <p:cNvSpPr txBox="1"/>
           <p:nvPr/>
         </p:nvSpPr>
@@ -11898,7 +11442,7 @@
             <a:r>
               <a:rPr sz="3000" b="1">
                 <a:solidFill>
-                  <a:srgbClr val="D3DDEA"/>
+                  <a:srgbClr val="D8DADD"/>
                 </a:solidFill>
                 <a:latin typeface="맑은 고딕"/>
                 <a:ea typeface="맑은 고딕"/>
@@ -11910,7 +11454,7 @@
       </p:sp>
       <p:sp>
         <p:nvSpPr>
-          <p:cNvPr id="9" name="TextBox 8"/>
+          <p:cNvPr id="7" name="TextBox 6"/>
           <p:cNvSpPr txBox="1"/>
           <p:nvPr/>
         </p:nvSpPr>
@@ -11941,7 +11485,7 @@
             <a:r>
               <a:rPr sz="850" b="0">
                 <a:solidFill>
-                  <a:srgbClr val="ABB7C7"/>
+                  <a:srgbClr val="B2B5B9"/>
                 </a:solidFill>
                 <a:latin typeface="맑은 고딕"/>
                 <a:ea typeface="맑은 고딕"/>
@@ -11953,7 +11497,7 @@
       </p:sp>
       <p:sp>
         <p:nvSpPr>
-          <p:cNvPr id="10" name="Rounded Rectangle 9"/>
+          <p:cNvPr id="8" name="Rounded Rectangle 7"/>
           <p:cNvSpPr/>
           <p:nvPr/>
         </p:nvSpPr>
@@ -11972,12 +11516,12 @@
           </a:solidFill>
           <a:ln w="12700">
             <a:solidFill>
-              <a:srgbClr val="E4EAF2"/>
+              <a:srgbClr val="E4E6E9"/>
             </a:solidFill>
           </a:ln>
           <a:effectLst>
             <a:outerShdw blurRad="182880" dist="64008" dir="5400000" rotWithShape="0">
-              <a:srgbClr val="2A3B55">
+              <a:srgbClr val="000000">
                 <a:alpha val="30000"/>
               </a:srgbClr>
             </a:outerShdw>
@@ -12007,7 +11551,7 @@
       </p:sp>
       <p:sp>
         <p:nvSpPr>
-          <p:cNvPr id="11" name="TextBox 10"/>
+          <p:cNvPr id="9" name="TextBox 8"/>
           <p:cNvSpPr txBox="1"/>
           <p:nvPr/>
         </p:nvSpPr>
@@ -12038,7 +11582,7 @@
             <a:r>
               <a:rPr sz="1300" b="1">
                 <a:solidFill>
-                  <a:srgbClr val="17456B"/>
+                  <a:srgbClr val="33393F"/>
                 </a:solidFill>
                 <a:latin typeface="맑은 고딕"/>
                 <a:ea typeface="맑은 고딕"/>
@@ -12058,7 +11602,7 @@
             <a:r>
               <a:rPr sz="1150" b="0">
                 <a:solidFill>
-                  <a:srgbClr val="222E40"/>
+                  <a:srgbClr val="1C1C1E"/>
                 </a:solidFill>
                 <a:latin typeface="맑은 고딕"/>
                 <a:ea typeface="맑은 고딕"/>
@@ -12070,7 +11614,7 @@
       </p:sp>
       <p:sp>
         <p:nvSpPr>
-          <p:cNvPr id="12" name="Rounded Rectangle 11"/>
+          <p:cNvPr id="10" name="Rounded Rectangle 9"/>
           <p:cNvSpPr/>
           <p:nvPr/>
         </p:nvSpPr>
@@ -12085,17 +11629,17 @@
             </a:avLst>
           </a:prstGeom>
           <a:solidFill>
-            <a:srgbClr val="FFF3EE"/>
+            <a:srgbClr val="F1F2F3"/>
           </a:solidFill>
-          <a:ln w="12700">
+          <a:ln w="15875">
             <a:solidFill>
-              <a:srgbClr val="F6CDBE"/>
+              <a:srgbClr val="9AA0A6"/>
             </a:solidFill>
           </a:ln>
           <a:effectLst>
             <a:outerShdw blurRad="182880" dist="64008" dir="5400000" rotWithShape="0">
-              <a:srgbClr val="B24A32">
-                <a:alpha val="26000"/>
+              <a:srgbClr val="000000">
+                <a:alpha val="32000"/>
               </a:srgbClr>
             </a:outerShdw>
           </a:effectLst>
@@ -12124,7 +11668,7 @@
       </p:sp>
       <p:sp>
         <p:nvSpPr>
-          <p:cNvPr id="13" name="TextBox 12"/>
+          <p:cNvPr id="11" name="TextBox 10"/>
           <p:cNvSpPr txBox="1"/>
           <p:nvPr/>
         </p:nvSpPr>
@@ -12155,7 +11699,7 @@
             <a:r>
               <a:rPr sz="1300" b="1">
                 <a:solidFill>
-                  <a:srgbClr val="E85D42"/>
+                  <a:srgbClr val="000000"/>
                 </a:solidFill>
                 <a:latin typeface="맑은 고딕"/>
                 <a:ea typeface="맑은 고딕"/>
@@ -12175,7 +11719,7 @@
             <a:r>
               <a:rPr sz="1150" b="0">
                 <a:solidFill>
-                  <a:srgbClr val="222E40"/>
+                  <a:srgbClr val="1C1C1E"/>
                 </a:solidFill>
                 <a:latin typeface="맑은 고딕"/>
                 <a:ea typeface="맑은 고딕"/>
@@ -12187,7 +11731,7 @@
       </p:sp>
       <p:sp>
         <p:nvSpPr>
-          <p:cNvPr id="14" name="Rounded Rectangle 13"/>
+          <p:cNvPr id="12" name="Rounded Rectangle 11"/>
           <p:cNvSpPr/>
           <p:nvPr/>
         </p:nvSpPr>
@@ -12202,17 +11746,17 @@
             </a:avLst>
           </a:prstGeom>
           <a:solidFill>
-            <a:srgbClr val="FFF3EE"/>
+            <a:srgbClr val="F1F2F3"/>
           </a:solidFill>
-          <a:ln w="12700">
+          <a:ln w="15875">
             <a:solidFill>
-              <a:srgbClr val="F6CDBE"/>
+              <a:srgbClr val="9AA0A6"/>
             </a:solidFill>
           </a:ln>
           <a:effectLst>
             <a:outerShdw blurRad="182880" dist="64008" dir="5400000" rotWithShape="0">
-              <a:srgbClr val="B24A32">
-                <a:alpha val="26000"/>
+              <a:srgbClr val="000000">
+                <a:alpha val="32000"/>
               </a:srgbClr>
             </a:outerShdw>
           </a:effectLst>
@@ -12241,7 +11785,7 @@
       </p:sp>
       <p:sp>
         <p:nvSpPr>
-          <p:cNvPr id="15" name="TextBox 14"/>
+          <p:cNvPr id="13" name="TextBox 12"/>
           <p:cNvSpPr txBox="1"/>
           <p:nvPr/>
         </p:nvSpPr>
@@ -12272,7 +11816,7 @@
             <a:r>
               <a:rPr sz="1300" b="1">
                 <a:solidFill>
-                  <a:srgbClr val="E85D42"/>
+                  <a:srgbClr val="000000"/>
                 </a:solidFill>
                 <a:latin typeface="맑은 고딕"/>
                 <a:ea typeface="맑은 고딕"/>
@@ -12292,7 +11836,7 @@
             <a:r>
               <a:rPr sz="1150" b="0">
                 <a:solidFill>
-                  <a:srgbClr val="222E40"/>
+                  <a:srgbClr val="1C1C1E"/>
                 </a:solidFill>
                 <a:latin typeface="맑은 고딕"/>
                 <a:ea typeface="맑은 고딕"/>
@@ -12304,7 +11848,7 @@
       </p:sp>
       <p:sp>
         <p:nvSpPr>
-          <p:cNvPr id="16" name="Rounded Rectangle 15"/>
+          <p:cNvPr id="14" name="Rounded Rectangle 13"/>
           <p:cNvSpPr/>
           <p:nvPr/>
         </p:nvSpPr>
@@ -12323,12 +11867,12 @@
           </a:solidFill>
           <a:ln w="12700">
             <a:solidFill>
-              <a:srgbClr val="E4EAF2"/>
+              <a:srgbClr val="E4E6E9"/>
             </a:solidFill>
           </a:ln>
           <a:effectLst>
             <a:outerShdw blurRad="182880" dist="64008" dir="5400000" rotWithShape="0">
-              <a:srgbClr val="2A3B55">
+              <a:srgbClr val="000000">
                 <a:alpha val="30000"/>
               </a:srgbClr>
             </a:outerShdw>
@@ -12358,7 +11902,7 @@
       </p:sp>
       <p:sp>
         <p:nvSpPr>
-          <p:cNvPr id="17" name="TextBox 16"/>
+          <p:cNvPr id="15" name="TextBox 14"/>
           <p:cNvSpPr txBox="1"/>
           <p:nvPr/>
         </p:nvSpPr>
@@ -12389,7 +11933,7 @@
             <a:r>
               <a:rPr sz="1300" b="1">
                 <a:solidFill>
-                  <a:srgbClr val="17456B"/>
+                  <a:srgbClr val="33393F"/>
                 </a:solidFill>
                 <a:latin typeface="맑은 고딕"/>
                 <a:ea typeface="맑은 고딕"/>
@@ -12409,7 +11953,7 @@
             <a:r>
               <a:rPr sz="1150" b="0">
                 <a:solidFill>
-                  <a:srgbClr val="222E40"/>
+                  <a:srgbClr val="1C1C1E"/>
                 </a:solidFill>
                 <a:latin typeface="맑은 고딕"/>
                 <a:ea typeface="맑은 고딕"/>
@@ -12421,7 +11965,7 @@
       </p:sp>
       <p:sp>
         <p:nvSpPr>
-          <p:cNvPr id="18" name="TextBox 17"/>
+          <p:cNvPr id="16" name="TextBox 15"/>
           <p:cNvSpPr txBox="1"/>
           <p:nvPr/>
         </p:nvSpPr>
@@ -12452,7 +11996,7 @@
             <a:r>
               <a:rPr sz="1200" b="1">
                 <a:solidFill>
-                  <a:srgbClr val="222E40"/>
+                  <a:srgbClr val="1C1C1E"/>
                 </a:solidFill>
                 <a:latin typeface="맑은 고딕"/>
                 <a:ea typeface="맑은 고딕"/>
@@ -12524,57 +12068,9 @@
           </a:p>
         </p:txBody>
       </p:sp>
-      <p:pic>
-        <p:nvPicPr>
-          <p:cNvPr id="3" name="Picture 2" descr="blob_blue.png"/>
-          <p:cNvPicPr>
-            <a:picLocks noChangeAspect="1"/>
-          </p:cNvPicPr>
-          <p:nvPr/>
-        </p:nvPicPr>
-        <p:blipFill>
-          <a:blip r:embed="rId2"/>
-          <a:stretch>
-            <a:fillRect/>
-          </a:stretch>
-        </p:blipFill>
-        <p:spPr>
-          <a:xfrm>
-            <a:off x="-3474720" y="3840480"/>
-            <a:ext cx="6583680" cy="6583680"/>
-          </a:xfrm>
-          <a:prstGeom prst="rect">
-            <a:avLst/>
-          </a:prstGeom>
-        </p:spPr>
-      </p:pic>
-      <p:pic>
-        <p:nvPicPr>
-          <p:cNvPr id="4" name="Picture 3" descr="blob_coral.png"/>
-          <p:cNvPicPr>
-            <a:picLocks noChangeAspect="1"/>
-          </p:cNvPicPr>
-          <p:nvPr/>
-        </p:nvPicPr>
-        <p:blipFill>
-          <a:blip r:embed="rId3"/>
-          <a:stretch>
-            <a:fillRect/>
-          </a:stretch>
-        </p:blipFill>
-        <p:spPr>
-          <a:xfrm>
-            <a:off x="8961120" y="-3291840"/>
-            <a:ext cx="6217920" cy="6217920"/>
-          </a:xfrm>
-          <a:prstGeom prst="rect">
-            <a:avLst/>
-          </a:prstGeom>
-        </p:spPr>
-      </p:pic>
-      <p:sp>
-        <p:nvSpPr>
-          <p:cNvPr id="5" name="Rounded Rectangle 4"/>
+      <p:sp>
+        <p:nvSpPr>
+          <p:cNvPr id="3" name="Rounded Rectangle 2"/>
           <p:cNvSpPr/>
           <p:nvPr/>
         </p:nvSpPr>
@@ -12591,10 +12087,10 @@
           <a:gradFill rotWithShape="1">
             <a:gsLst>
               <a:gs pos="0">
-                <a:srgbClr val="FF7A59"/>
+                <a:srgbClr val="3A3F45"/>
               </a:gs>
               <a:gs pos="100000">
-                <a:srgbClr val="FFB86B"/>
+                <a:srgbClr val="73787E"/>
               </a:gs>
             </a:gsLst>
             <a:lin scaled="0" ang="18900000"/>
@@ -12604,7 +12100,7 @@
           </a:ln>
           <a:effectLst>
             <a:outerShdw blurRad="109728" dist="36576" dir="5400000" rotWithShape="0">
-              <a:srgbClr val="C24E30">
+              <a:srgbClr val="000000">
                 <a:alpha val="35000"/>
               </a:srgbClr>
             </a:outerShdw>
@@ -12634,7 +12130,7 @@
       </p:sp>
       <p:sp>
         <p:nvSpPr>
-          <p:cNvPr id="6" name="TextBox 5"/>
+          <p:cNvPr id="4" name="TextBox 3"/>
           <p:cNvSpPr txBox="1"/>
           <p:nvPr/>
         </p:nvSpPr>
@@ -12665,7 +12161,7 @@
             <a:r>
               <a:rPr sz="2150" b="1">
                 <a:solidFill>
-                  <a:srgbClr val="222E40"/>
+                  <a:srgbClr val="1C1C1E"/>
                 </a:solidFill>
                 <a:latin typeface="맑은 고딕"/>
                 <a:ea typeface="맑은 고딕"/>
@@ -12675,33 +12171,61 @@
           </a:p>
         </p:txBody>
       </p:sp>
-      <p:pic>
-        <p:nvPicPr>
-          <p:cNvPr id="7" name="Picture 6" descr="glow_bar.png"/>
-          <p:cNvPicPr>
-            <a:picLocks noChangeAspect="1"/>
-          </p:cNvPicPr>
-          <p:nvPr/>
-        </p:nvPicPr>
-        <p:blipFill>
-          <a:blip r:embed="rId4"/>
-          <a:stretch>
-            <a:fillRect/>
-          </a:stretch>
-        </p:blipFill>
+      <p:sp>
+        <p:nvSpPr>
+          <p:cNvPr id="5" name="Rectangle 4"/>
+          <p:cNvSpPr/>
+          <p:nvPr/>
+        </p:nvSpPr>
         <p:spPr>
           <a:xfrm>
             <a:off x="521207" y="969264"/>
-            <a:ext cx="4206240" cy="50292"/>
+            <a:ext cx="4206240" cy="27432"/>
           </a:xfrm>
           <a:prstGeom prst="rect">
             <a:avLst/>
           </a:prstGeom>
-        </p:spPr>
-      </p:pic>
-      <p:sp>
-        <p:nvSpPr>
-          <p:cNvPr id="8" name="TextBox 7"/>
+          <a:gradFill rotWithShape="1">
+            <a:gsLst>
+              <a:gs pos="0">
+                <a:srgbClr val="2A2E33"/>
+              </a:gs>
+              <a:gs pos="100000">
+                <a:srgbClr val="FFFFFF"/>
+              </a:gs>
+            </a:gsLst>
+            <a:lin scaled="0" ang="0"/>
+          </a:gradFill>
+          <a:ln>
+            <a:noFill/>
+          </a:ln>
+          <a:effectLst/>
+        </p:spPr>
+        <p:style>
+          <a:lnRef idx="1">
+            <a:schemeClr val="accent1"/>
+          </a:lnRef>
+          <a:fillRef idx="3">
+            <a:schemeClr val="accent1"/>
+          </a:fillRef>
+          <a:effectRef idx="2">
+            <a:schemeClr val="accent1"/>
+          </a:effectRef>
+          <a:fontRef idx="minor">
+            <a:schemeClr val="lt1"/>
+          </a:fontRef>
+        </p:style>
+        <p:txBody>
+          <a:bodyPr rtlCol="0" anchor="ctr"/>
+          <a:lstStyle/>
+          <a:p>
+            <a:pPr algn="ctr"/>
+          </a:p>
+        </p:txBody>
+      </p:sp>
+      <p:sp>
+        <p:nvSpPr>
+          <p:cNvPr id="6" name="TextBox 5"/>
           <p:cNvSpPr txBox="1"/>
           <p:nvPr/>
         </p:nvSpPr>
@@ -12732,7 +12256,7 @@
             <a:r>
               <a:rPr sz="3000" b="1">
                 <a:solidFill>
-                  <a:srgbClr val="D3DDEA"/>
+                  <a:srgbClr val="D8DADD"/>
                 </a:solidFill>
                 <a:latin typeface="맑은 고딕"/>
                 <a:ea typeface="맑은 고딕"/>
@@ -12744,7 +12268,7 @@
       </p:sp>
       <p:sp>
         <p:nvSpPr>
-          <p:cNvPr id="9" name="TextBox 8"/>
+          <p:cNvPr id="7" name="TextBox 6"/>
           <p:cNvSpPr txBox="1"/>
           <p:nvPr/>
         </p:nvSpPr>
@@ -12775,7 +12299,7 @@
             <a:r>
               <a:rPr sz="850" b="0">
                 <a:solidFill>
-                  <a:srgbClr val="ABB7C7"/>
+                  <a:srgbClr val="B2B5B9"/>
                 </a:solidFill>
                 <a:latin typeface="맑은 고딕"/>
                 <a:ea typeface="맑은 고딕"/>
@@ -12787,7 +12311,7 @@
       </p:sp>
       <p:sp>
         <p:nvSpPr>
-          <p:cNvPr id="10" name="Rounded Rectangle 9"/>
+          <p:cNvPr id="8" name="Rounded Rectangle 7"/>
           <p:cNvSpPr/>
           <p:nvPr/>
         </p:nvSpPr>
@@ -12806,12 +12330,12 @@
           </a:solidFill>
           <a:ln w="12700">
             <a:solidFill>
-              <a:srgbClr val="E4EAF2"/>
+              <a:srgbClr val="E4E6E9"/>
             </a:solidFill>
           </a:ln>
           <a:effectLst>
             <a:outerShdw blurRad="182880" dist="64008" dir="5400000" rotWithShape="0">
-              <a:srgbClr val="2A3B55">
+              <a:srgbClr val="000000">
                 <a:alpha val="30000"/>
               </a:srgbClr>
             </a:outerShdw>
@@ -12841,7 +12365,7 @@
       </p:sp>
       <p:sp>
         <p:nvSpPr>
-          <p:cNvPr id="11" name="TextBox 10"/>
+          <p:cNvPr id="9" name="TextBox 8"/>
           <p:cNvSpPr txBox="1"/>
           <p:nvPr/>
         </p:nvSpPr>
@@ -12872,7 +12396,7 @@
             <a:r>
               <a:rPr sz="1400" b="1">
                 <a:solidFill>
-                  <a:srgbClr val="17456B"/>
+                  <a:srgbClr val="33393F"/>
                 </a:solidFill>
                 <a:latin typeface="맑은 고딕"/>
                 <a:ea typeface="맑은 고딕"/>
@@ -12892,7 +12416,7 @@
             <a:r>
               <a:rPr sz="1150" b="0">
                 <a:solidFill>
-                  <a:srgbClr val="222E40"/>
+                  <a:srgbClr val="1C1C1E"/>
                 </a:solidFill>
                 <a:latin typeface="맑은 고딕"/>
                 <a:ea typeface="맑은 고딕"/>
@@ -12904,7 +12428,7 @@
       </p:sp>
       <p:sp>
         <p:nvSpPr>
-          <p:cNvPr id="12" name="TextBox 11"/>
+          <p:cNvPr id="10" name="TextBox 9"/>
           <p:cNvSpPr txBox="1"/>
           <p:nvPr/>
         </p:nvSpPr>
@@ -12935,7 +12459,7 @@
             <a:r>
               <a:rPr sz="2200" b="1">
                 <a:solidFill>
-                  <a:srgbClr val="6A7B92"/>
+                  <a:srgbClr val="767A7F"/>
                 </a:solidFill>
                 <a:latin typeface="맑은 고딕"/>
                 <a:ea typeface="맑은 고딕"/>
@@ -12947,7 +12471,7 @@
       </p:sp>
       <p:sp>
         <p:nvSpPr>
-          <p:cNvPr id="13" name="Rounded Rectangle 12"/>
+          <p:cNvPr id="11" name="Rounded Rectangle 10"/>
           <p:cNvSpPr/>
           <p:nvPr/>
         </p:nvSpPr>
@@ -12962,17 +12486,17 @@
             </a:avLst>
           </a:prstGeom>
           <a:solidFill>
-            <a:srgbClr val="FFF3EE"/>
+            <a:srgbClr val="F1F2F3"/>
           </a:solidFill>
-          <a:ln w="12700">
+          <a:ln w="15875">
             <a:solidFill>
-              <a:srgbClr val="F6CDBE"/>
+              <a:srgbClr val="9AA0A6"/>
             </a:solidFill>
           </a:ln>
           <a:effectLst>
             <a:outerShdw blurRad="182880" dist="64008" dir="5400000" rotWithShape="0">
-              <a:srgbClr val="B24A32">
-                <a:alpha val="26000"/>
+              <a:srgbClr val="000000">
+                <a:alpha val="32000"/>
               </a:srgbClr>
             </a:outerShdw>
           </a:effectLst>
@@ -13001,7 +12525,7 @@
       </p:sp>
       <p:sp>
         <p:nvSpPr>
-          <p:cNvPr id="14" name="TextBox 13"/>
+          <p:cNvPr id="12" name="TextBox 11"/>
           <p:cNvSpPr txBox="1"/>
           <p:nvPr/>
         </p:nvSpPr>
@@ -13032,7 +12556,7 @@
             <a:r>
               <a:rPr sz="1400" b="1">
                 <a:solidFill>
-                  <a:srgbClr val="17456B"/>
+                  <a:srgbClr val="33393F"/>
                 </a:solidFill>
                 <a:latin typeface="맑은 고딕"/>
                 <a:ea typeface="맑은 고딕"/>
@@ -13052,7 +12576,7 @@
             <a:r>
               <a:rPr sz="1150" b="0">
                 <a:solidFill>
-                  <a:srgbClr val="222E40"/>
+                  <a:srgbClr val="1C1C1E"/>
                 </a:solidFill>
                 <a:latin typeface="맑은 고딕"/>
                 <a:ea typeface="맑은 고딕"/>
@@ -13064,7 +12588,7 @@
       </p:sp>
       <p:sp>
         <p:nvSpPr>
-          <p:cNvPr id="15" name="TextBox 14"/>
+          <p:cNvPr id="13" name="TextBox 12"/>
           <p:cNvSpPr txBox="1"/>
           <p:nvPr/>
         </p:nvSpPr>
@@ -13095,7 +12619,7 @@
             <a:r>
               <a:rPr sz="2200" b="1">
                 <a:solidFill>
-                  <a:srgbClr val="6A7B92"/>
+                  <a:srgbClr val="767A7F"/>
                 </a:solidFill>
                 <a:latin typeface="맑은 고딕"/>
                 <a:ea typeface="맑은 고딕"/>
@@ -13107,7 +12631,7 @@
       </p:sp>
       <p:sp>
         <p:nvSpPr>
-          <p:cNvPr id="16" name="Rounded Rectangle 15"/>
+          <p:cNvPr id="14" name="Rounded Rectangle 13"/>
           <p:cNvSpPr/>
           <p:nvPr/>
         </p:nvSpPr>
@@ -13122,17 +12646,17 @@
             </a:avLst>
           </a:prstGeom>
           <a:solidFill>
-            <a:srgbClr val="FFF3EE"/>
+            <a:srgbClr val="F1F2F3"/>
           </a:solidFill>
-          <a:ln w="12700">
+          <a:ln w="15875">
             <a:solidFill>
-              <a:srgbClr val="F6CDBE"/>
+              <a:srgbClr val="9AA0A6"/>
             </a:solidFill>
           </a:ln>
           <a:effectLst>
             <a:outerShdw blurRad="182880" dist="64008" dir="5400000" rotWithShape="0">
-              <a:srgbClr val="B24A32">
-                <a:alpha val="26000"/>
+              <a:srgbClr val="000000">
+                <a:alpha val="32000"/>
               </a:srgbClr>
             </a:outerShdw>
           </a:effectLst>
@@ -13161,7 +12685,7 @@
       </p:sp>
       <p:sp>
         <p:nvSpPr>
-          <p:cNvPr id="17" name="TextBox 16"/>
+          <p:cNvPr id="15" name="TextBox 14"/>
           <p:cNvSpPr txBox="1"/>
           <p:nvPr/>
         </p:nvSpPr>
@@ -13192,7 +12716,7 @@
             <a:r>
               <a:rPr sz="1400" b="1">
                 <a:solidFill>
-                  <a:srgbClr val="17456B"/>
+                  <a:srgbClr val="33393F"/>
                 </a:solidFill>
                 <a:latin typeface="맑은 고딕"/>
                 <a:ea typeface="맑은 고딕"/>
@@ -13212,7 +12736,7 @@
             <a:r>
               <a:rPr sz="1150" b="0">
                 <a:solidFill>
-                  <a:srgbClr val="222E40"/>
+                  <a:srgbClr val="1C1C1E"/>
                 </a:solidFill>
                 <a:latin typeface="맑은 고딕"/>
                 <a:ea typeface="맑은 고딕"/>
@@ -13224,7 +12748,7 @@
       </p:sp>
       <p:sp>
         <p:nvSpPr>
-          <p:cNvPr id="18" name="Rounded Rectangle 17"/>
+          <p:cNvPr id="16" name="Rounded Rectangle 15"/>
           <p:cNvSpPr/>
           <p:nvPr/>
         </p:nvSpPr>
@@ -13241,10 +12765,10 @@
           <a:gradFill rotWithShape="1">
             <a:gsLst>
               <a:gs pos="0">
-                <a:srgbClr val="1B3A5F"/>
+                <a:srgbClr val="2A2E33"/>
               </a:gs>
               <a:gs pos="100000">
-                <a:srgbClr val="17456B"/>
+                <a:srgbClr val="4A4F55"/>
               </a:gs>
             </a:gsLst>
             <a:lin scaled="0" ang="14700000"/>
@@ -13254,7 +12778,7 @@
           </a:ln>
           <a:effectLst>
             <a:outerShdw blurRad="182880" dist="64008" dir="5400000" rotWithShape="0">
-              <a:srgbClr val="2A3B55">
+              <a:srgbClr val="000000">
                 <a:alpha val="38000"/>
               </a:srgbClr>
             </a:outerShdw>
@@ -13284,7 +12808,7 @@
       </p:sp>
       <p:sp>
         <p:nvSpPr>
-          <p:cNvPr id="19" name="TextBox 18"/>
+          <p:cNvPr id="17" name="TextBox 16"/>
           <p:cNvSpPr txBox="1"/>
           <p:nvPr/>
         </p:nvSpPr>
@@ -13327,7 +12851,7 @@
       </p:sp>
       <p:sp>
         <p:nvSpPr>
-          <p:cNvPr id="20" name="Rounded Rectangle 19"/>
+          <p:cNvPr id="18" name="Rounded Rectangle 17"/>
           <p:cNvSpPr/>
           <p:nvPr/>
         </p:nvSpPr>
@@ -13346,12 +12870,12 @@
           </a:solidFill>
           <a:ln w="12700">
             <a:solidFill>
-              <a:srgbClr val="E4EAF2"/>
+              <a:srgbClr val="E4E6E9"/>
             </a:solidFill>
           </a:ln>
           <a:effectLst>
             <a:outerShdw blurRad="182880" dist="64008" dir="5400000" rotWithShape="0">
-              <a:srgbClr val="2A3B55">
+              <a:srgbClr val="000000">
                 <a:alpha val="30000"/>
               </a:srgbClr>
             </a:outerShdw>
@@ -13381,7 +12905,7 @@
       </p:sp>
       <p:sp>
         <p:nvSpPr>
-          <p:cNvPr id="21" name="TextBox 20"/>
+          <p:cNvPr id="19" name="TextBox 18"/>
           <p:cNvSpPr txBox="1"/>
           <p:nvPr/>
         </p:nvSpPr>
@@ -13412,7 +12936,7 @@
             <a:r>
               <a:rPr sz="1250" b="0">
                 <a:solidFill>
-                  <a:srgbClr val="222E40"/>
+                  <a:srgbClr val="1C1C1E"/>
                 </a:solidFill>
                 <a:latin typeface="맑은 고딕"/>
                 <a:ea typeface="맑은 고딕"/>
@@ -13424,7 +12948,7 @@
       </p:sp>
       <p:sp>
         <p:nvSpPr>
-          <p:cNvPr id="22" name="Rounded Rectangle 21"/>
+          <p:cNvPr id="20" name="Rounded Rectangle 19"/>
           <p:cNvSpPr/>
           <p:nvPr/>
         </p:nvSpPr>
@@ -13441,10 +12965,10 @@
           <a:gradFill rotWithShape="1">
             <a:gsLst>
               <a:gs pos="0">
-                <a:srgbClr val="1B3A5F"/>
+                <a:srgbClr val="2A2E33"/>
               </a:gs>
               <a:gs pos="100000">
-                <a:srgbClr val="17456B"/>
+                <a:srgbClr val="4A4F55"/>
               </a:gs>
             </a:gsLst>
             <a:lin scaled="0" ang="14700000"/>
@@ -13454,7 +12978,7 @@
           </a:ln>
           <a:effectLst>
             <a:outerShdw blurRad="182880" dist="64008" dir="5400000" rotWithShape="0">
-              <a:srgbClr val="2A3B55">
+              <a:srgbClr val="000000">
                 <a:alpha val="38000"/>
               </a:srgbClr>
             </a:outerShdw>
@@ -13484,7 +13008,7 @@
       </p:sp>
       <p:sp>
         <p:nvSpPr>
-          <p:cNvPr id="23" name="TextBox 22"/>
+          <p:cNvPr id="21" name="TextBox 20"/>
           <p:cNvSpPr txBox="1"/>
           <p:nvPr/>
         </p:nvSpPr>
@@ -13515,7 +13039,7 @@
             <a:r>
               <a:rPr sz="1150" b="1">
                 <a:solidFill>
-                  <a:srgbClr val="17456B"/>
+                  <a:srgbClr val="33393F"/>
                 </a:solidFill>
                 <a:latin typeface="맑은 고딕"/>
                 <a:ea typeface="맑은 고딕"/>
@@ -13527,7 +13051,7 @@
       </p:sp>
       <p:sp>
         <p:nvSpPr>
-          <p:cNvPr id="24" name="Rounded Rectangle 23"/>
+          <p:cNvPr id="22" name="Rounded Rectangle 21"/>
           <p:cNvSpPr/>
           <p:nvPr/>
         </p:nvSpPr>
@@ -13544,10 +13068,10 @@
           <a:gradFill rotWithShape="1">
             <a:gsLst>
               <a:gs pos="0">
-                <a:srgbClr val="1B3A5F"/>
+                <a:srgbClr val="2A2E33"/>
               </a:gs>
               <a:gs pos="100000">
-                <a:srgbClr val="17456B"/>
+                <a:srgbClr val="4A4F55"/>
               </a:gs>
             </a:gsLst>
             <a:lin scaled="0" ang="14700000"/>
@@ -13557,7 +13081,7 @@
           </a:ln>
           <a:effectLst>
             <a:outerShdw blurRad="182880" dist="64008" dir="5400000" rotWithShape="0">
-              <a:srgbClr val="2A3B55">
+              <a:srgbClr val="000000">
                 <a:alpha val="38000"/>
               </a:srgbClr>
             </a:outerShdw>
@@ -13587,7 +13111,7 @@
       </p:sp>
       <p:sp>
         <p:nvSpPr>
-          <p:cNvPr id="25" name="TextBox 24"/>
+          <p:cNvPr id="23" name="TextBox 22"/>
           <p:cNvSpPr txBox="1"/>
           <p:nvPr/>
         </p:nvSpPr>
@@ -13630,7 +13154,7 @@
       </p:sp>
       <p:sp>
         <p:nvSpPr>
-          <p:cNvPr id="26" name="Rounded Rectangle 25"/>
+          <p:cNvPr id="24" name="Rounded Rectangle 23"/>
           <p:cNvSpPr/>
           <p:nvPr/>
         </p:nvSpPr>
@@ -13649,12 +13173,12 @@
           </a:solidFill>
           <a:ln w="12700">
             <a:solidFill>
-              <a:srgbClr val="E4EAF2"/>
+              <a:srgbClr val="E4E6E9"/>
             </a:solidFill>
           </a:ln>
           <a:effectLst>
             <a:outerShdw blurRad="182880" dist="64008" dir="5400000" rotWithShape="0">
-              <a:srgbClr val="2A3B55">
+              <a:srgbClr val="000000">
                 <a:alpha val="30000"/>
               </a:srgbClr>
             </a:outerShdw>
@@ -13684,7 +13208,7 @@
       </p:sp>
       <p:sp>
         <p:nvSpPr>
-          <p:cNvPr id="27" name="TextBox 26"/>
+          <p:cNvPr id="25" name="TextBox 24"/>
           <p:cNvSpPr txBox="1"/>
           <p:nvPr/>
         </p:nvSpPr>
@@ -13715,7 +13239,7 @@
             <a:r>
               <a:rPr sz="1250" b="0">
                 <a:solidFill>
-                  <a:srgbClr val="222E40"/>
+                  <a:srgbClr val="1C1C1E"/>
                 </a:solidFill>
                 <a:latin typeface="맑은 고딕"/>
                 <a:ea typeface="맑은 고딕"/>
@@ -13727,7 +13251,7 @@
       </p:sp>
       <p:sp>
         <p:nvSpPr>
-          <p:cNvPr id="28" name="Rounded Rectangle 27"/>
+          <p:cNvPr id="26" name="Rounded Rectangle 25"/>
           <p:cNvSpPr/>
           <p:nvPr/>
         </p:nvSpPr>
@@ -13744,10 +13268,10 @@
           <a:gradFill rotWithShape="1">
             <a:gsLst>
               <a:gs pos="0">
-                <a:srgbClr val="1B3A5F"/>
+                <a:srgbClr val="2A2E33"/>
               </a:gs>
               <a:gs pos="100000">
-                <a:srgbClr val="17456B"/>
+                <a:srgbClr val="4A4F55"/>
               </a:gs>
             </a:gsLst>
             <a:lin scaled="0" ang="14700000"/>
@@ -13757,7 +13281,7 @@
           </a:ln>
           <a:effectLst>
             <a:outerShdw blurRad="182880" dist="64008" dir="5400000" rotWithShape="0">
-              <a:srgbClr val="2A3B55">
+              <a:srgbClr val="000000">
                 <a:alpha val="38000"/>
               </a:srgbClr>
             </a:outerShdw>
@@ -13787,7 +13311,7 @@
       </p:sp>
       <p:sp>
         <p:nvSpPr>
-          <p:cNvPr id="29" name="TextBox 28"/>
+          <p:cNvPr id="27" name="TextBox 26"/>
           <p:cNvSpPr txBox="1"/>
           <p:nvPr/>
         </p:nvSpPr>
@@ -13818,7 +13342,7 @@
             <a:r>
               <a:rPr sz="1150" b="1">
                 <a:solidFill>
-                  <a:srgbClr val="17456B"/>
+                  <a:srgbClr val="33393F"/>
                 </a:solidFill>
                 <a:latin typeface="맑은 고딕"/>
                 <a:ea typeface="맑은 고딕"/>
@@ -13830,7 +13354,7 @@
       </p:sp>
       <p:sp>
         <p:nvSpPr>
-          <p:cNvPr id="30" name="Rounded Rectangle 29"/>
+          <p:cNvPr id="28" name="Rounded Rectangle 27"/>
           <p:cNvSpPr/>
           <p:nvPr/>
         </p:nvSpPr>
@@ -13847,10 +13371,10 @@
           <a:gradFill rotWithShape="1">
             <a:gsLst>
               <a:gs pos="0">
-                <a:srgbClr val="1B3A5F"/>
+                <a:srgbClr val="2A2E33"/>
               </a:gs>
               <a:gs pos="100000">
-                <a:srgbClr val="17456B"/>
+                <a:srgbClr val="4A4F55"/>
               </a:gs>
             </a:gsLst>
             <a:lin scaled="0" ang="14700000"/>
@@ -13860,7 +13384,7 @@
           </a:ln>
           <a:effectLst>
             <a:outerShdw blurRad="182880" dist="64008" dir="5400000" rotWithShape="0">
-              <a:srgbClr val="2A3B55">
+              <a:srgbClr val="000000">
                 <a:alpha val="38000"/>
               </a:srgbClr>
             </a:outerShdw>
@@ -13890,7 +13414,7 @@
       </p:sp>
       <p:sp>
         <p:nvSpPr>
-          <p:cNvPr id="31" name="TextBox 30"/>
+          <p:cNvPr id="29" name="TextBox 28"/>
           <p:cNvSpPr txBox="1"/>
           <p:nvPr/>
         </p:nvSpPr>
@@ -13933,7 +13457,7 @@
       </p:sp>
       <p:sp>
         <p:nvSpPr>
-          <p:cNvPr id="32" name="Rounded Rectangle 31"/>
+          <p:cNvPr id="30" name="Rounded Rectangle 29"/>
           <p:cNvSpPr/>
           <p:nvPr/>
         </p:nvSpPr>
@@ -13952,12 +13476,12 @@
           </a:solidFill>
           <a:ln w="12700">
             <a:solidFill>
-              <a:srgbClr val="E4EAF2"/>
+              <a:srgbClr val="E4E6E9"/>
             </a:solidFill>
           </a:ln>
           <a:effectLst>
             <a:outerShdw blurRad="182880" dist="64008" dir="5400000" rotWithShape="0">
-              <a:srgbClr val="2A3B55">
+              <a:srgbClr val="000000">
                 <a:alpha val="30000"/>
               </a:srgbClr>
             </a:outerShdw>
@@ -13987,7 +13511,7 @@
       </p:sp>
       <p:sp>
         <p:nvSpPr>
-          <p:cNvPr id="33" name="TextBox 32"/>
+          <p:cNvPr id="31" name="TextBox 30"/>
           <p:cNvSpPr txBox="1"/>
           <p:nvPr/>
         </p:nvSpPr>
@@ -14018,7 +13542,7 @@
             <a:r>
               <a:rPr sz="1250" b="0">
                 <a:solidFill>
-                  <a:srgbClr val="222E40"/>
+                  <a:srgbClr val="1C1C1E"/>
                 </a:solidFill>
                 <a:latin typeface="맑은 고딕"/>
                 <a:ea typeface="맑은 고딕"/>
@@ -14030,7 +13554,7 @@
       </p:sp>
       <p:sp>
         <p:nvSpPr>
-          <p:cNvPr id="34" name="Rounded Rectangle 33"/>
+          <p:cNvPr id="32" name="Rounded Rectangle 31"/>
           <p:cNvSpPr/>
           <p:nvPr/>
         </p:nvSpPr>
@@ -14047,10 +13571,10 @@
           <a:gradFill rotWithShape="1">
             <a:gsLst>
               <a:gs pos="0">
-                <a:srgbClr val="1B3A5F"/>
+                <a:srgbClr val="2A2E33"/>
               </a:gs>
               <a:gs pos="100000">
-                <a:srgbClr val="17456B"/>
+                <a:srgbClr val="4A4F55"/>
               </a:gs>
             </a:gsLst>
             <a:lin scaled="0" ang="14700000"/>
@@ -14060,7 +13584,7 @@
           </a:ln>
           <a:effectLst>
             <a:outerShdw blurRad="182880" dist="64008" dir="5400000" rotWithShape="0">
-              <a:srgbClr val="2A3B55">
+              <a:srgbClr val="000000">
                 <a:alpha val="38000"/>
               </a:srgbClr>
             </a:outerShdw>
@@ -14090,7 +13614,7 @@
       </p:sp>
       <p:sp>
         <p:nvSpPr>
-          <p:cNvPr id="35" name="TextBox 34"/>
+          <p:cNvPr id="33" name="TextBox 32"/>
           <p:cNvSpPr txBox="1"/>
           <p:nvPr/>
         </p:nvSpPr>
@@ -14121,7 +13645,7 @@
             <a:r>
               <a:rPr sz="1150" b="1">
                 <a:solidFill>
-                  <a:srgbClr val="17456B"/>
+                  <a:srgbClr val="33393F"/>
                 </a:solidFill>
                 <a:latin typeface="맑은 고딕"/>
                 <a:ea typeface="맑은 고딕"/>
@@ -14133,7 +13657,7 @@
       </p:sp>
       <p:sp>
         <p:nvSpPr>
-          <p:cNvPr id="36" name="Rounded Rectangle 35"/>
+          <p:cNvPr id="34" name="Rounded Rectangle 33"/>
           <p:cNvSpPr/>
           <p:nvPr/>
         </p:nvSpPr>
@@ -14150,10 +13674,10 @@
           <a:gradFill rotWithShape="1">
             <a:gsLst>
               <a:gs pos="0">
-                <a:srgbClr val="1B3A5F"/>
+                <a:srgbClr val="2A2E33"/>
               </a:gs>
               <a:gs pos="100000">
-                <a:srgbClr val="17456B"/>
+                <a:srgbClr val="4A4F55"/>
               </a:gs>
             </a:gsLst>
             <a:lin scaled="0" ang="14700000"/>
@@ -14163,7 +13687,7 @@
           </a:ln>
           <a:effectLst>
             <a:outerShdw blurRad="182880" dist="64008" dir="5400000" rotWithShape="0">
-              <a:srgbClr val="2A3B55">
+              <a:srgbClr val="000000">
                 <a:alpha val="38000"/>
               </a:srgbClr>
             </a:outerShdw>
@@ -14193,7 +13717,7 @@
       </p:sp>
       <p:sp>
         <p:nvSpPr>
-          <p:cNvPr id="37" name="TextBox 36"/>
+          <p:cNvPr id="35" name="TextBox 34"/>
           <p:cNvSpPr txBox="1"/>
           <p:nvPr/>
         </p:nvSpPr>
@@ -14236,7 +13760,7 @@
       </p:sp>
       <p:sp>
         <p:nvSpPr>
-          <p:cNvPr id="38" name="Rounded Rectangle 37"/>
+          <p:cNvPr id="36" name="Rounded Rectangle 35"/>
           <p:cNvSpPr/>
           <p:nvPr/>
         </p:nvSpPr>
@@ -14255,12 +13779,12 @@
           </a:solidFill>
           <a:ln w="12700">
             <a:solidFill>
-              <a:srgbClr val="E4EAF2"/>
+              <a:srgbClr val="E4E6E9"/>
             </a:solidFill>
           </a:ln>
           <a:effectLst>
             <a:outerShdw blurRad="182880" dist="64008" dir="5400000" rotWithShape="0">
-              <a:srgbClr val="2A3B55">
+              <a:srgbClr val="000000">
                 <a:alpha val="30000"/>
               </a:srgbClr>
             </a:outerShdw>
@@ -14290,7 +13814,7 @@
       </p:sp>
       <p:sp>
         <p:nvSpPr>
-          <p:cNvPr id="39" name="TextBox 38"/>
+          <p:cNvPr id="37" name="TextBox 36"/>
           <p:cNvSpPr txBox="1"/>
           <p:nvPr/>
         </p:nvSpPr>
@@ -14321,7 +13845,7 @@
             <a:r>
               <a:rPr sz="1250" b="0">
                 <a:solidFill>
-                  <a:srgbClr val="222E40"/>
+                  <a:srgbClr val="1C1C1E"/>
                 </a:solidFill>
                 <a:latin typeface="맑은 고딕"/>
                 <a:ea typeface="맑은 고딕"/>
@@ -14333,7 +13857,7 @@
       </p:sp>
       <p:sp>
         <p:nvSpPr>
-          <p:cNvPr id="40" name="Rounded Rectangle 39"/>
+          <p:cNvPr id="38" name="Rounded Rectangle 37"/>
           <p:cNvSpPr/>
           <p:nvPr/>
         </p:nvSpPr>
@@ -14350,10 +13874,10 @@
           <a:gradFill rotWithShape="1">
             <a:gsLst>
               <a:gs pos="0">
-                <a:srgbClr val="1B3A5F"/>
+                <a:srgbClr val="2A2E33"/>
               </a:gs>
               <a:gs pos="100000">
-                <a:srgbClr val="17456B"/>
+                <a:srgbClr val="4A4F55"/>
               </a:gs>
             </a:gsLst>
             <a:lin scaled="0" ang="14700000"/>
@@ -14363,7 +13887,7 @@
           </a:ln>
           <a:effectLst>
             <a:outerShdw blurRad="182880" dist="64008" dir="5400000" rotWithShape="0">
-              <a:srgbClr val="2A3B55">
+              <a:srgbClr val="000000">
                 <a:alpha val="38000"/>
               </a:srgbClr>
             </a:outerShdw>
@@ -14393,7 +13917,7 @@
       </p:sp>
       <p:sp>
         <p:nvSpPr>
-          <p:cNvPr id="41" name="TextBox 40"/>
+          <p:cNvPr id="39" name="TextBox 38"/>
           <p:cNvSpPr txBox="1"/>
           <p:nvPr/>
         </p:nvSpPr>
@@ -14424,7 +13948,7 @@
             <a:r>
               <a:rPr sz="1150" b="1">
                 <a:solidFill>
-                  <a:srgbClr val="17456B"/>
+                  <a:srgbClr val="33393F"/>
                 </a:solidFill>
                 <a:latin typeface="맑은 고딕"/>
                 <a:ea typeface="맑은 고딕"/>
@@ -14436,7 +13960,7 @@
       </p:sp>
       <p:sp>
         <p:nvSpPr>
-          <p:cNvPr id="42" name="TextBox 41"/>
+          <p:cNvPr id="40" name="TextBox 39"/>
           <p:cNvSpPr txBox="1"/>
           <p:nvPr/>
         </p:nvSpPr>
@@ -14467,7 +13991,7 @@
             <a:r>
               <a:rPr sz="1250" b="1">
                 <a:solidFill>
-                  <a:srgbClr val="222E40"/>
+                  <a:srgbClr val="1C1C1E"/>
                 </a:solidFill>
                 <a:latin typeface="맑은 고딕"/>
                 <a:ea typeface="맑은 고딕"/>
@@ -14539,57 +14063,9 @@
           </a:p>
         </p:txBody>
       </p:sp>
-      <p:pic>
-        <p:nvPicPr>
-          <p:cNvPr id="3" name="Picture 2" descr="blob_blue.png"/>
-          <p:cNvPicPr>
-            <a:picLocks noChangeAspect="1"/>
-          </p:cNvPicPr>
-          <p:nvPr/>
-        </p:nvPicPr>
-        <p:blipFill>
-          <a:blip r:embed="rId2"/>
-          <a:stretch>
-            <a:fillRect/>
-          </a:stretch>
-        </p:blipFill>
-        <p:spPr>
-          <a:xfrm>
-            <a:off x="-3474720" y="3840480"/>
-            <a:ext cx="6583680" cy="6583680"/>
-          </a:xfrm>
-          <a:prstGeom prst="rect">
-            <a:avLst/>
-          </a:prstGeom>
-        </p:spPr>
-      </p:pic>
-      <p:pic>
-        <p:nvPicPr>
-          <p:cNvPr id="4" name="Picture 3" descr="blob_coral.png"/>
-          <p:cNvPicPr>
-            <a:picLocks noChangeAspect="1"/>
-          </p:cNvPicPr>
-          <p:nvPr/>
-        </p:nvPicPr>
-        <p:blipFill>
-          <a:blip r:embed="rId3"/>
-          <a:stretch>
-            <a:fillRect/>
-          </a:stretch>
-        </p:blipFill>
-        <p:spPr>
-          <a:xfrm>
-            <a:off x="8961120" y="-3291840"/>
-            <a:ext cx="6217920" cy="6217920"/>
-          </a:xfrm>
-          <a:prstGeom prst="rect">
-            <a:avLst/>
-          </a:prstGeom>
-        </p:spPr>
-      </p:pic>
-      <p:sp>
-        <p:nvSpPr>
-          <p:cNvPr id="5" name="Rounded Rectangle 4"/>
+      <p:sp>
+        <p:nvSpPr>
+          <p:cNvPr id="3" name="Rounded Rectangle 2"/>
           <p:cNvSpPr/>
           <p:nvPr/>
         </p:nvSpPr>
@@ -14606,10 +14082,10 @@
           <a:gradFill rotWithShape="1">
             <a:gsLst>
               <a:gs pos="0">
-                <a:srgbClr val="FF7A59"/>
+                <a:srgbClr val="3A3F45"/>
               </a:gs>
               <a:gs pos="100000">
-                <a:srgbClr val="FFB86B"/>
+                <a:srgbClr val="73787E"/>
               </a:gs>
             </a:gsLst>
             <a:lin scaled="0" ang="18900000"/>
@@ -14619,7 +14095,7 @@
           </a:ln>
           <a:effectLst>
             <a:outerShdw blurRad="109728" dist="36576" dir="5400000" rotWithShape="0">
-              <a:srgbClr val="C24E30">
+              <a:srgbClr val="000000">
                 <a:alpha val="35000"/>
               </a:srgbClr>
             </a:outerShdw>
@@ -14649,7 +14125,7 @@
       </p:sp>
       <p:sp>
         <p:nvSpPr>
-          <p:cNvPr id="6" name="TextBox 5"/>
+          <p:cNvPr id="4" name="TextBox 3"/>
           <p:cNvSpPr txBox="1"/>
           <p:nvPr/>
         </p:nvSpPr>
@@ -14680,7 +14156,7 @@
             <a:r>
               <a:rPr sz="2150" b="1">
                 <a:solidFill>
-                  <a:srgbClr val="222E40"/>
+                  <a:srgbClr val="1C1C1E"/>
                 </a:solidFill>
                 <a:latin typeface="맑은 고딕"/>
                 <a:ea typeface="맑은 고딕"/>
@@ -14690,33 +14166,61 @@
           </a:p>
         </p:txBody>
       </p:sp>
-      <p:pic>
-        <p:nvPicPr>
-          <p:cNvPr id="7" name="Picture 6" descr="glow_bar.png"/>
-          <p:cNvPicPr>
-            <a:picLocks noChangeAspect="1"/>
-          </p:cNvPicPr>
-          <p:nvPr/>
-        </p:nvPicPr>
-        <p:blipFill>
-          <a:blip r:embed="rId4"/>
-          <a:stretch>
-            <a:fillRect/>
-          </a:stretch>
-        </p:blipFill>
+      <p:sp>
+        <p:nvSpPr>
+          <p:cNvPr id="5" name="Rectangle 4"/>
+          <p:cNvSpPr/>
+          <p:nvPr/>
+        </p:nvSpPr>
         <p:spPr>
           <a:xfrm>
             <a:off x="521207" y="969264"/>
-            <a:ext cx="4206240" cy="50292"/>
+            <a:ext cx="4206240" cy="27432"/>
           </a:xfrm>
           <a:prstGeom prst="rect">
             <a:avLst/>
           </a:prstGeom>
-        </p:spPr>
-      </p:pic>
-      <p:sp>
-        <p:nvSpPr>
-          <p:cNvPr id="8" name="TextBox 7"/>
+          <a:gradFill rotWithShape="1">
+            <a:gsLst>
+              <a:gs pos="0">
+                <a:srgbClr val="2A2E33"/>
+              </a:gs>
+              <a:gs pos="100000">
+                <a:srgbClr val="FFFFFF"/>
+              </a:gs>
+            </a:gsLst>
+            <a:lin scaled="0" ang="0"/>
+          </a:gradFill>
+          <a:ln>
+            <a:noFill/>
+          </a:ln>
+          <a:effectLst/>
+        </p:spPr>
+        <p:style>
+          <a:lnRef idx="1">
+            <a:schemeClr val="accent1"/>
+          </a:lnRef>
+          <a:fillRef idx="3">
+            <a:schemeClr val="accent1"/>
+          </a:fillRef>
+          <a:effectRef idx="2">
+            <a:schemeClr val="accent1"/>
+          </a:effectRef>
+          <a:fontRef idx="minor">
+            <a:schemeClr val="lt1"/>
+          </a:fontRef>
+        </p:style>
+        <p:txBody>
+          <a:bodyPr rtlCol="0" anchor="ctr"/>
+          <a:lstStyle/>
+          <a:p>
+            <a:pPr algn="ctr"/>
+          </a:p>
+        </p:txBody>
+      </p:sp>
+      <p:sp>
+        <p:nvSpPr>
+          <p:cNvPr id="6" name="TextBox 5"/>
           <p:cNvSpPr txBox="1"/>
           <p:nvPr/>
         </p:nvSpPr>
@@ -14747,7 +14251,7 @@
             <a:r>
               <a:rPr sz="3000" b="1">
                 <a:solidFill>
-                  <a:srgbClr val="D3DDEA"/>
+                  <a:srgbClr val="D8DADD"/>
                 </a:solidFill>
                 <a:latin typeface="맑은 고딕"/>
                 <a:ea typeface="맑은 고딕"/>
@@ -14759,7 +14263,7 @@
       </p:sp>
       <p:sp>
         <p:nvSpPr>
-          <p:cNvPr id="9" name="TextBox 8"/>
+          <p:cNvPr id="7" name="TextBox 6"/>
           <p:cNvSpPr txBox="1"/>
           <p:nvPr/>
         </p:nvSpPr>
@@ -14790,7 +14294,7 @@
             <a:r>
               <a:rPr sz="850" b="0">
                 <a:solidFill>
-                  <a:srgbClr val="ABB7C7"/>
+                  <a:srgbClr val="B2B5B9"/>
                 </a:solidFill>
                 <a:latin typeface="맑은 고딕"/>
                 <a:ea typeface="맑은 고딕"/>
@@ -14802,7 +14306,7 @@
       </p:sp>
       <p:graphicFrame>
         <p:nvGraphicFramePr>
-          <p:cNvPr id="10" name="Table 9"/>
+          <p:cNvPr id="8" name="Table 7"/>
           <p:cNvGraphicFramePr>
             <a:graphicFrameLocks noGrp="1"/>
           </p:cNvGraphicFramePr>
@@ -14923,7 +14427,7 @@
                       <a:r>
                         <a:rPr sz="1100" b="0">
                           <a:solidFill>
-                            <a:srgbClr val="222E40"/>
+                            <a:srgbClr val="1C1C1E"/>
                           </a:solidFill>
                           <a:latin typeface="맑은 고딕"/>
                           <a:ea typeface="맑은 고딕"/>
@@ -14951,7 +14455,7 @@
                       <a:r>
                         <a:rPr sz="1100" b="0">
                           <a:solidFill>
-                            <a:srgbClr val="222E40"/>
+                            <a:srgbClr val="1C1C1E"/>
                           </a:solidFill>
                           <a:latin typeface="맑은 고딕"/>
                           <a:ea typeface="맑은 고딕"/>
@@ -14979,7 +14483,7 @@
                       <a:r>
                         <a:rPr sz="1100" b="0">
                           <a:solidFill>
-                            <a:srgbClr val="222E40"/>
+                            <a:srgbClr val="1C1C1E"/>
                           </a:solidFill>
                           <a:latin typeface="맑은 고딕"/>
                           <a:ea typeface="맑은 고딕"/>
@@ -15009,7 +14513,7 @@
                       <a:r>
                         <a:rPr sz="1100" b="0">
                           <a:solidFill>
-                            <a:srgbClr val="222E40"/>
+                            <a:srgbClr val="1C1C1E"/>
                           </a:solidFill>
                           <a:latin typeface="맑은 고딕"/>
                           <a:ea typeface="맑은 고딕"/>
@@ -15020,7 +14524,7 @@
                   </a:txBody>
                   <a:tcPr marT="27432" marB="27432" marL="73152" marR="73152" anchor="ctr">
                     <a:solidFill>
-                      <a:srgbClr val="F5F8FC"/>
+                      <a:srgbClr val="F6F7F8"/>
                     </a:solidFill>
                   </a:tcPr>
                 </a:tc>
@@ -15037,7 +14541,7 @@
                       <a:r>
                         <a:rPr sz="1100" b="0">
                           <a:solidFill>
-                            <a:srgbClr val="222E40"/>
+                            <a:srgbClr val="1C1C1E"/>
                           </a:solidFill>
                           <a:latin typeface="맑은 고딕"/>
                           <a:ea typeface="맑은 고딕"/>
@@ -15048,7 +14552,7 @@
                   </a:txBody>
                   <a:tcPr marT="27432" marB="27432" marL="73152" marR="73152" anchor="ctr">
                     <a:solidFill>
-                      <a:srgbClr val="F5F8FC"/>
+                      <a:srgbClr val="F6F7F8"/>
                     </a:solidFill>
                   </a:tcPr>
                 </a:tc>
@@ -15065,7 +14569,7 @@
                       <a:r>
                         <a:rPr sz="1100" b="0">
                           <a:solidFill>
-                            <a:srgbClr val="222E40"/>
+                            <a:srgbClr val="1C1C1E"/>
                           </a:solidFill>
                           <a:latin typeface="맑은 고딕"/>
                           <a:ea typeface="맑은 고딕"/>
@@ -15076,7 +14580,7 @@
                   </a:txBody>
                   <a:tcPr marT="27432" marB="27432" marL="73152" marR="73152" anchor="ctr">
                     <a:solidFill>
-                      <a:srgbClr val="F5F8FC"/>
+                      <a:srgbClr val="F6F7F8"/>
                     </a:solidFill>
                   </a:tcPr>
                 </a:tc>
@@ -15087,7 +14591,7 @@
       </p:graphicFrame>
       <p:sp>
         <p:nvSpPr>
-          <p:cNvPr id="11" name="TextBox 10"/>
+          <p:cNvPr id="9" name="TextBox 8"/>
           <p:cNvSpPr txBox="1"/>
           <p:nvPr/>
         </p:nvSpPr>
@@ -15118,7 +14622,7 @@
             <a:r>
               <a:rPr sz="1400" b="1">
                 <a:solidFill>
-                  <a:srgbClr val="17456B"/>
+                  <a:srgbClr val="33393F"/>
                 </a:solidFill>
                 <a:latin typeface="맑은 고딕"/>
                 <a:ea typeface="맑은 고딕"/>
@@ -15130,7 +14634,7 @@
       </p:sp>
       <p:sp>
         <p:nvSpPr>
-          <p:cNvPr id="12" name="Rounded Rectangle 11"/>
+          <p:cNvPr id="10" name="Rounded Rectangle 9"/>
           <p:cNvSpPr/>
           <p:nvPr/>
         </p:nvSpPr>
@@ -15149,12 +14653,12 @@
           </a:solidFill>
           <a:ln w="12700">
             <a:solidFill>
-              <a:srgbClr val="E4EAF2"/>
+              <a:srgbClr val="E4E6E9"/>
             </a:solidFill>
           </a:ln>
           <a:effectLst>
             <a:outerShdw blurRad="182880" dist="64008" dir="5400000" rotWithShape="0">
-              <a:srgbClr val="2A3B55">
+              <a:srgbClr val="000000">
                 <a:alpha val="30000"/>
               </a:srgbClr>
             </a:outerShdw>
@@ -15184,7 +14688,7 @@
       </p:sp>
       <p:sp>
         <p:nvSpPr>
-          <p:cNvPr id="13" name="TextBox 12"/>
+          <p:cNvPr id="11" name="TextBox 10"/>
           <p:cNvSpPr txBox="1"/>
           <p:nvPr/>
         </p:nvSpPr>
@@ -15215,7 +14719,7 @@
             <a:r>
               <a:rPr sz="1300" b="1">
                 <a:solidFill>
-                  <a:srgbClr val="17456B"/>
+                  <a:srgbClr val="33393F"/>
                 </a:solidFill>
                 <a:latin typeface="맑은 고딕"/>
                 <a:ea typeface="맑은 고딕"/>
@@ -15235,7 +14739,7 @@
             <a:r>
               <a:rPr sz="1100" b="0">
                 <a:solidFill>
-                  <a:srgbClr val="222E40"/>
+                  <a:srgbClr val="1C1C1E"/>
                 </a:solidFill>
                 <a:latin typeface="맑은 고딕"/>
                 <a:ea typeface="맑은 고딕"/>
@@ -15247,7 +14751,7 @@
       </p:sp>
       <p:sp>
         <p:nvSpPr>
-          <p:cNvPr id="14" name="Rounded Rectangle 13"/>
+          <p:cNvPr id="12" name="Rounded Rectangle 11"/>
           <p:cNvSpPr/>
           <p:nvPr/>
         </p:nvSpPr>
@@ -15266,12 +14770,12 @@
           </a:solidFill>
           <a:ln w="12700">
             <a:solidFill>
-              <a:srgbClr val="E4EAF2"/>
+              <a:srgbClr val="E4E6E9"/>
             </a:solidFill>
           </a:ln>
           <a:effectLst>
             <a:outerShdw blurRad="182880" dist="64008" dir="5400000" rotWithShape="0">
-              <a:srgbClr val="2A3B55">
+              <a:srgbClr val="000000">
                 <a:alpha val="30000"/>
               </a:srgbClr>
             </a:outerShdw>
@@ -15301,7 +14805,7 @@
       </p:sp>
       <p:sp>
         <p:nvSpPr>
-          <p:cNvPr id="15" name="TextBox 14"/>
+          <p:cNvPr id="13" name="TextBox 12"/>
           <p:cNvSpPr txBox="1"/>
           <p:nvPr/>
         </p:nvSpPr>
@@ -15332,7 +14836,7 @@
             <a:r>
               <a:rPr sz="1300" b="1">
                 <a:solidFill>
-                  <a:srgbClr val="17456B"/>
+                  <a:srgbClr val="33393F"/>
                 </a:solidFill>
                 <a:latin typeface="맑은 고딕"/>
                 <a:ea typeface="맑은 고딕"/>
@@ -15352,7 +14856,7 @@
             <a:r>
               <a:rPr sz="1100" b="0">
                 <a:solidFill>
-                  <a:srgbClr val="222E40"/>
+                  <a:srgbClr val="1C1C1E"/>
                 </a:solidFill>
                 <a:latin typeface="맑은 고딕"/>
                 <a:ea typeface="맑은 고딕"/>
@@ -15364,7 +14868,7 @@
       </p:sp>
       <p:sp>
         <p:nvSpPr>
-          <p:cNvPr id="16" name="Rounded Rectangle 15"/>
+          <p:cNvPr id="14" name="Rounded Rectangle 13"/>
           <p:cNvSpPr/>
           <p:nvPr/>
         </p:nvSpPr>
@@ -15379,17 +14883,17 @@
             </a:avLst>
           </a:prstGeom>
           <a:solidFill>
-            <a:srgbClr val="FFF3EE"/>
+            <a:srgbClr val="F1F2F3"/>
           </a:solidFill>
-          <a:ln w="12700">
+          <a:ln w="15875">
             <a:solidFill>
-              <a:srgbClr val="F6CDBE"/>
+              <a:srgbClr val="9AA0A6"/>
             </a:solidFill>
           </a:ln>
           <a:effectLst>
             <a:outerShdw blurRad="182880" dist="64008" dir="5400000" rotWithShape="0">
-              <a:srgbClr val="B24A32">
-                <a:alpha val="26000"/>
+              <a:srgbClr val="000000">
+                <a:alpha val="32000"/>
               </a:srgbClr>
             </a:outerShdw>
           </a:effectLst>
@@ -15418,7 +14922,7 @@
       </p:sp>
       <p:sp>
         <p:nvSpPr>
-          <p:cNvPr id="17" name="TextBox 16"/>
+          <p:cNvPr id="15" name="TextBox 14"/>
           <p:cNvSpPr txBox="1"/>
           <p:nvPr/>
         </p:nvSpPr>
@@ -15449,7 +14953,7 @@
             <a:r>
               <a:rPr sz="1300" b="1">
                 <a:solidFill>
-                  <a:srgbClr val="E85D42"/>
+                  <a:srgbClr val="000000"/>
                 </a:solidFill>
                 <a:latin typeface="맑은 고딕"/>
                 <a:ea typeface="맑은 고딕"/>
@@ -15469,7 +14973,7 @@
             <a:r>
               <a:rPr sz="1100" b="0">
                 <a:solidFill>
-                  <a:srgbClr val="222E40"/>
+                  <a:srgbClr val="1C1C1E"/>
                 </a:solidFill>
                 <a:latin typeface="맑은 고딕"/>
                 <a:ea typeface="맑은 고딕"/>
@@ -15481,7 +14985,7 @@
       </p:sp>
       <p:sp>
         <p:nvSpPr>
-          <p:cNvPr id="18" name="Rounded Rectangle 17"/>
+          <p:cNvPr id="16" name="Rounded Rectangle 15"/>
           <p:cNvSpPr/>
           <p:nvPr/>
         </p:nvSpPr>
@@ -15500,12 +15004,12 @@
           </a:solidFill>
           <a:ln w="12700">
             <a:solidFill>
-              <a:srgbClr val="E4EAF2"/>
+              <a:srgbClr val="E4E6E9"/>
             </a:solidFill>
           </a:ln>
           <a:effectLst>
             <a:outerShdw blurRad="182880" dist="64008" dir="5400000" rotWithShape="0">
-              <a:srgbClr val="2A3B55">
+              <a:srgbClr val="000000">
                 <a:alpha val="30000"/>
               </a:srgbClr>
             </a:outerShdw>
@@ -15535,7 +15039,7 @@
       </p:sp>
       <p:sp>
         <p:nvSpPr>
-          <p:cNvPr id="19" name="TextBox 18"/>
+          <p:cNvPr id="17" name="TextBox 16"/>
           <p:cNvSpPr txBox="1"/>
           <p:nvPr/>
         </p:nvSpPr>
@@ -15566,7 +15070,7 @@
             <a:r>
               <a:rPr sz="1300" b="1">
                 <a:solidFill>
-                  <a:srgbClr val="17456B"/>
+                  <a:srgbClr val="33393F"/>
                 </a:solidFill>
                 <a:latin typeface="맑은 고딕"/>
                 <a:ea typeface="맑은 고딕"/>
@@ -15586,7 +15090,7 @@
             <a:r>
               <a:rPr sz="1150" b="0">
                 <a:solidFill>
-                  <a:srgbClr val="222E40"/>
+                  <a:srgbClr val="1C1C1E"/>
                 </a:solidFill>
                 <a:latin typeface="맑은 고딕"/>
                 <a:ea typeface="맑은 고딕"/>
@@ -15658,57 +15162,9 @@
           </a:p>
         </p:txBody>
       </p:sp>
-      <p:pic>
-        <p:nvPicPr>
-          <p:cNvPr id="3" name="Picture 2" descr="blob_blue.png"/>
-          <p:cNvPicPr>
-            <a:picLocks noChangeAspect="1"/>
-          </p:cNvPicPr>
-          <p:nvPr/>
-        </p:nvPicPr>
-        <p:blipFill>
-          <a:blip r:embed="rId2"/>
-          <a:stretch>
-            <a:fillRect/>
-          </a:stretch>
-        </p:blipFill>
-        <p:spPr>
-          <a:xfrm>
-            <a:off x="-3474720" y="3840480"/>
-            <a:ext cx="6583680" cy="6583680"/>
-          </a:xfrm>
-          <a:prstGeom prst="rect">
-            <a:avLst/>
-          </a:prstGeom>
-        </p:spPr>
-      </p:pic>
-      <p:pic>
-        <p:nvPicPr>
-          <p:cNvPr id="4" name="Picture 3" descr="blob_coral.png"/>
-          <p:cNvPicPr>
-            <a:picLocks noChangeAspect="1"/>
-          </p:cNvPicPr>
-          <p:nvPr/>
-        </p:nvPicPr>
-        <p:blipFill>
-          <a:blip r:embed="rId3"/>
-          <a:stretch>
-            <a:fillRect/>
-          </a:stretch>
-        </p:blipFill>
-        <p:spPr>
-          <a:xfrm>
-            <a:off x="8961120" y="-3291840"/>
-            <a:ext cx="6217920" cy="6217920"/>
-          </a:xfrm>
-          <a:prstGeom prst="rect">
-            <a:avLst/>
-          </a:prstGeom>
-        </p:spPr>
-      </p:pic>
-      <p:sp>
-        <p:nvSpPr>
-          <p:cNvPr id="5" name="Rounded Rectangle 4"/>
+      <p:sp>
+        <p:nvSpPr>
+          <p:cNvPr id="3" name="Rounded Rectangle 2"/>
           <p:cNvSpPr/>
           <p:nvPr/>
         </p:nvSpPr>
@@ -15725,10 +15181,10 @@
           <a:gradFill rotWithShape="1">
             <a:gsLst>
               <a:gs pos="0">
-                <a:srgbClr val="FF7A59"/>
+                <a:srgbClr val="3A3F45"/>
               </a:gs>
               <a:gs pos="100000">
-                <a:srgbClr val="FFB86B"/>
+                <a:srgbClr val="73787E"/>
               </a:gs>
             </a:gsLst>
             <a:lin scaled="0" ang="18900000"/>
@@ -15738,7 +15194,7 @@
           </a:ln>
           <a:effectLst>
             <a:outerShdw blurRad="109728" dist="36576" dir="5400000" rotWithShape="0">
-              <a:srgbClr val="C24E30">
+              <a:srgbClr val="000000">
                 <a:alpha val="35000"/>
               </a:srgbClr>
             </a:outerShdw>
@@ -15768,7 +15224,7 @@
       </p:sp>
       <p:sp>
         <p:nvSpPr>
-          <p:cNvPr id="6" name="TextBox 5"/>
+          <p:cNvPr id="4" name="TextBox 3"/>
           <p:cNvSpPr txBox="1"/>
           <p:nvPr/>
         </p:nvSpPr>
@@ -15799,7 +15255,7 @@
             <a:r>
               <a:rPr sz="2150" b="1">
                 <a:solidFill>
-                  <a:srgbClr val="222E40"/>
+                  <a:srgbClr val="1C1C1E"/>
                 </a:solidFill>
                 <a:latin typeface="맑은 고딕"/>
                 <a:ea typeface="맑은 고딕"/>
@@ -15809,33 +15265,61 @@
           </a:p>
         </p:txBody>
       </p:sp>
-      <p:pic>
-        <p:nvPicPr>
-          <p:cNvPr id="7" name="Picture 6" descr="glow_bar.png"/>
-          <p:cNvPicPr>
-            <a:picLocks noChangeAspect="1"/>
-          </p:cNvPicPr>
-          <p:nvPr/>
-        </p:nvPicPr>
-        <p:blipFill>
-          <a:blip r:embed="rId4"/>
-          <a:stretch>
-            <a:fillRect/>
-          </a:stretch>
-        </p:blipFill>
+      <p:sp>
+        <p:nvSpPr>
+          <p:cNvPr id="5" name="Rectangle 4"/>
+          <p:cNvSpPr/>
+          <p:nvPr/>
+        </p:nvSpPr>
         <p:spPr>
           <a:xfrm>
             <a:off x="521207" y="969264"/>
-            <a:ext cx="4206240" cy="50292"/>
+            <a:ext cx="4206240" cy="27432"/>
           </a:xfrm>
           <a:prstGeom prst="rect">
             <a:avLst/>
           </a:prstGeom>
-        </p:spPr>
-      </p:pic>
-      <p:sp>
-        <p:nvSpPr>
-          <p:cNvPr id="8" name="TextBox 7"/>
+          <a:gradFill rotWithShape="1">
+            <a:gsLst>
+              <a:gs pos="0">
+                <a:srgbClr val="2A2E33"/>
+              </a:gs>
+              <a:gs pos="100000">
+                <a:srgbClr val="FFFFFF"/>
+              </a:gs>
+            </a:gsLst>
+            <a:lin scaled="0" ang="0"/>
+          </a:gradFill>
+          <a:ln>
+            <a:noFill/>
+          </a:ln>
+          <a:effectLst/>
+        </p:spPr>
+        <p:style>
+          <a:lnRef idx="1">
+            <a:schemeClr val="accent1"/>
+          </a:lnRef>
+          <a:fillRef idx="3">
+            <a:schemeClr val="accent1"/>
+          </a:fillRef>
+          <a:effectRef idx="2">
+            <a:schemeClr val="accent1"/>
+          </a:effectRef>
+          <a:fontRef idx="minor">
+            <a:schemeClr val="lt1"/>
+          </a:fontRef>
+        </p:style>
+        <p:txBody>
+          <a:bodyPr rtlCol="0" anchor="ctr"/>
+          <a:lstStyle/>
+          <a:p>
+            <a:pPr algn="ctr"/>
+          </a:p>
+        </p:txBody>
+      </p:sp>
+      <p:sp>
+        <p:nvSpPr>
+          <p:cNvPr id="6" name="TextBox 5"/>
           <p:cNvSpPr txBox="1"/>
           <p:nvPr/>
         </p:nvSpPr>
@@ -15866,7 +15350,7 @@
             <a:r>
               <a:rPr sz="3000" b="1">
                 <a:solidFill>
-                  <a:srgbClr val="D3DDEA"/>
+                  <a:srgbClr val="D8DADD"/>
                 </a:solidFill>
                 <a:latin typeface="맑은 고딕"/>
                 <a:ea typeface="맑은 고딕"/>
@@ -15878,7 +15362,7 @@
       </p:sp>
       <p:sp>
         <p:nvSpPr>
-          <p:cNvPr id="9" name="TextBox 8"/>
+          <p:cNvPr id="7" name="TextBox 6"/>
           <p:cNvSpPr txBox="1"/>
           <p:nvPr/>
         </p:nvSpPr>
@@ -15909,7 +15393,7 @@
             <a:r>
               <a:rPr sz="850" b="0">
                 <a:solidFill>
-                  <a:srgbClr val="ABB7C7"/>
+                  <a:srgbClr val="B2B5B9"/>
                 </a:solidFill>
                 <a:latin typeface="맑은 고딕"/>
                 <a:ea typeface="맑은 고딕"/>
@@ -15921,7 +15405,7 @@
       </p:sp>
       <p:graphicFrame>
         <p:nvGraphicFramePr>
-          <p:cNvPr id="10" name="Table 9"/>
+          <p:cNvPr id="8" name="Table 7"/>
           <p:cNvGraphicFramePr>
             <a:graphicFrameLocks noGrp="1"/>
           </p:cNvGraphicFramePr>
@@ -16042,7 +15526,7 @@
                       <a:r>
                         <a:rPr sz="1100" b="0">
                           <a:solidFill>
-                            <a:srgbClr val="222E40"/>
+                            <a:srgbClr val="1C1C1E"/>
                           </a:solidFill>
                           <a:latin typeface="맑은 고딕"/>
                           <a:ea typeface="맑은 고딕"/>
@@ -16070,7 +15554,7 @@
                       <a:r>
                         <a:rPr sz="1100" b="0">
                           <a:solidFill>
-                            <a:srgbClr val="222E40"/>
+                            <a:srgbClr val="1C1C1E"/>
                           </a:solidFill>
                           <a:latin typeface="맑은 고딕"/>
                           <a:ea typeface="맑은 고딕"/>
@@ -16098,7 +15582,7 @@
                       <a:r>
                         <a:rPr sz="1100" b="0">
                           <a:solidFill>
-                            <a:srgbClr val="222E40"/>
+                            <a:srgbClr val="1C1C1E"/>
                           </a:solidFill>
                           <a:latin typeface="맑은 고딕"/>
                           <a:ea typeface="맑은 고딕"/>
@@ -16128,7 +15612,7 @@
                       <a:r>
                         <a:rPr sz="1100" b="0">
                           <a:solidFill>
-                            <a:srgbClr val="222E40"/>
+                            <a:srgbClr val="1C1C1E"/>
                           </a:solidFill>
                           <a:latin typeface="맑은 고딕"/>
                           <a:ea typeface="맑은 고딕"/>
@@ -16139,7 +15623,7 @@
                   </a:txBody>
                   <a:tcPr marT="27432" marB="27432" marL="73152" marR="73152" anchor="ctr">
                     <a:solidFill>
-                      <a:srgbClr val="F5F8FC"/>
+                      <a:srgbClr val="F6F7F8"/>
                     </a:solidFill>
                   </a:tcPr>
                 </a:tc>
@@ -16156,7 +15640,7 @@
                       <a:r>
                         <a:rPr sz="1100" b="0">
                           <a:solidFill>
-                            <a:srgbClr val="222E40"/>
+                            <a:srgbClr val="1C1C1E"/>
                           </a:solidFill>
                           <a:latin typeface="맑은 고딕"/>
                           <a:ea typeface="맑은 고딕"/>
@@ -16167,7 +15651,7 @@
                   </a:txBody>
                   <a:tcPr marT="27432" marB="27432" marL="73152" marR="73152" anchor="ctr">
                     <a:solidFill>
-                      <a:srgbClr val="F5F8FC"/>
+                      <a:srgbClr val="F6F7F8"/>
                     </a:solidFill>
                   </a:tcPr>
                 </a:tc>
@@ -16184,7 +15668,7 @@
                       <a:r>
                         <a:rPr sz="1100" b="0">
                           <a:solidFill>
-                            <a:srgbClr val="222E40"/>
+                            <a:srgbClr val="1C1C1E"/>
                           </a:solidFill>
                           <a:latin typeface="맑은 고딕"/>
                           <a:ea typeface="맑은 고딕"/>
@@ -16195,7 +15679,7 @@
                   </a:txBody>
                   <a:tcPr marT="27432" marB="27432" marL="73152" marR="73152" anchor="ctr">
                     <a:solidFill>
-                      <a:srgbClr val="F5F8FC"/>
+                      <a:srgbClr val="F6F7F8"/>
                     </a:solidFill>
                   </a:tcPr>
                 </a:tc>
@@ -16214,7 +15698,7 @@
                       <a:r>
                         <a:rPr sz="1100" b="0">
                           <a:solidFill>
-                            <a:srgbClr val="222E40"/>
+                            <a:srgbClr val="1C1C1E"/>
                           </a:solidFill>
                           <a:latin typeface="맑은 고딕"/>
                           <a:ea typeface="맑은 고딕"/>
@@ -16242,7 +15726,7 @@
                       <a:r>
                         <a:rPr sz="1100" b="0">
                           <a:solidFill>
-                            <a:srgbClr val="222E40"/>
+                            <a:srgbClr val="1C1C1E"/>
                           </a:solidFill>
                           <a:latin typeface="맑은 고딕"/>
                           <a:ea typeface="맑은 고딕"/>
@@ -16270,7 +15754,7 @@
                       <a:r>
                         <a:rPr sz="1100" b="0">
                           <a:solidFill>
-                            <a:srgbClr val="222E40"/>
+                            <a:srgbClr val="1C1C1E"/>
                           </a:solidFill>
                           <a:latin typeface="맑은 고딕"/>
                           <a:ea typeface="맑은 고딕"/>
@@ -16292,7 +15776,7 @@
       </p:graphicFrame>
       <p:sp>
         <p:nvSpPr>
-          <p:cNvPr id="11" name="Rounded Rectangle 10"/>
+          <p:cNvPr id="9" name="Rounded Rectangle 8"/>
           <p:cNvSpPr/>
           <p:nvPr/>
         </p:nvSpPr>
@@ -16311,12 +15795,12 @@
           </a:solidFill>
           <a:ln w="12700">
             <a:solidFill>
-              <a:srgbClr val="E4EAF2"/>
+              <a:srgbClr val="E4E6E9"/>
             </a:solidFill>
           </a:ln>
           <a:effectLst>
             <a:outerShdw blurRad="182880" dist="64008" dir="5400000" rotWithShape="0">
-              <a:srgbClr val="2A3B55">
+              <a:srgbClr val="000000">
                 <a:alpha val="30000"/>
               </a:srgbClr>
             </a:outerShdw>
@@ -16346,7 +15830,7 @@
       </p:sp>
       <p:sp>
         <p:nvSpPr>
-          <p:cNvPr id="12" name="TextBox 11"/>
+          <p:cNvPr id="10" name="TextBox 9"/>
           <p:cNvSpPr txBox="1"/>
           <p:nvPr/>
         </p:nvSpPr>
@@ -16377,7 +15861,7 @@
             <a:r>
               <a:rPr sz="1300" b="1">
                 <a:solidFill>
-                  <a:srgbClr val="17456B"/>
+                  <a:srgbClr val="33393F"/>
                 </a:solidFill>
                 <a:latin typeface="맑은 고딕"/>
                 <a:ea typeface="맑은 고딕"/>
@@ -16397,7 +15881,7 @@
             <a:r>
               <a:rPr sz="1100" b="0">
                 <a:solidFill>
-                  <a:srgbClr val="222E40"/>
+                  <a:srgbClr val="1C1C1E"/>
                 </a:solidFill>
                 <a:latin typeface="맑은 고딕"/>
                 <a:ea typeface="맑은 고딕"/>
@@ -16417,7 +15901,7 @@
             <a:r>
               <a:rPr sz="1100" b="0">
                 <a:solidFill>
-                  <a:srgbClr val="222E40"/>
+                  <a:srgbClr val="1C1C1E"/>
                 </a:solidFill>
                 <a:latin typeface="맑은 고딕"/>
                 <a:ea typeface="맑은 고딕"/>
@@ -16429,7 +15913,7 @@
       </p:sp>
       <p:sp>
         <p:nvSpPr>
-          <p:cNvPr id="13" name="Rounded Rectangle 12"/>
+          <p:cNvPr id="11" name="Rounded Rectangle 10"/>
           <p:cNvSpPr/>
           <p:nvPr/>
         </p:nvSpPr>
@@ -16448,12 +15932,12 @@
           </a:solidFill>
           <a:ln w="12700">
             <a:solidFill>
-              <a:srgbClr val="E4EAF2"/>
+              <a:srgbClr val="E4E6E9"/>
             </a:solidFill>
           </a:ln>
           <a:effectLst>
             <a:outerShdw blurRad="182880" dist="64008" dir="5400000" rotWithShape="0">
-              <a:srgbClr val="2A3B55">
+              <a:srgbClr val="000000">
                 <a:alpha val="30000"/>
               </a:srgbClr>
             </a:outerShdw>
@@ -16483,7 +15967,7 @@
       </p:sp>
       <p:sp>
         <p:nvSpPr>
-          <p:cNvPr id="14" name="TextBox 13"/>
+          <p:cNvPr id="12" name="TextBox 11"/>
           <p:cNvSpPr txBox="1"/>
           <p:nvPr/>
         </p:nvSpPr>
@@ -16514,7 +15998,7 @@
             <a:r>
               <a:rPr sz="1300" b="1">
                 <a:solidFill>
-                  <a:srgbClr val="17456B"/>
+                  <a:srgbClr val="33393F"/>
                 </a:solidFill>
                 <a:latin typeface="맑은 고딕"/>
                 <a:ea typeface="맑은 고딕"/>
@@ -16534,7 +16018,7 @@
             <a:r>
               <a:rPr sz="1100" b="0">
                 <a:solidFill>
-                  <a:srgbClr val="222E40"/>
+                  <a:srgbClr val="1C1C1E"/>
                 </a:solidFill>
                 <a:latin typeface="맑은 고딕"/>
                 <a:ea typeface="맑은 고딕"/>
@@ -16554,7 +16038,7 @@
             <a:r>
               <a:rPr sz="1100" b="0">
                 <a:solidFill>
-                  <a:srgbClr val="222E40"/>
+                  <a:srgbClr val="1C1C1E"/>
                 </a:solidFill>
                 <a:latin typeface="맑은 고딕"/>
                 <a:ea typeface="맑은 고딕"/>
@@ -16574,7 +16058,7 @@
             <a:r>
               <a:rPr sz="1100" b="0">
                 <a:solidFill>
-                  <a:srgbClr val="222E40"/>
+                  <a:srgbClr val="1C1C1E"/>
                 </a:solidFill>
                 <a:latin typeface="맑은 고딕"/>
                 <a:ea typeface="맑은 고딕"/>
@@ -16594,7 +16078,7 @@
             <a:r>
               <a:rPr sz="1100" b="0">
                 <a:solidFill>
-                  <a:srgbClr val="222E40"/>
+                  <a:srgbClr val="1C1C1E"/>
                 </a:solidFill>
                 <a:latin typeface="맑은 고딕"/>
                 <a:ea typeface="맑은 고딕"/>
@@ -16606,7 +16090,7 @@
       </p:sp>
       <p:sp>
         <p:nvSpPr>
-          <p:cNvPr id="15" name="Rounded Rectangle 14"/>
+          <p:cNvPr id="13" name="Rounded Rectangle 12"/>
           <p:cNvSpPr/>
           <p:nvPr/>
         </p:nvSpPr>
@@ -16625,12 +16109,12 @@
           </a:solidFill>
           <a:ln w="12700">
             <a:solidFill>
-              <a:srgbClr val="E4EAF2"/>
+              <a:srgbClr val="E4E6E9"/>
             </a:solidFill>
           </a:ln>
           <a:effectLst>
             <a:outerShdw blurRad="182880" dist="64008" dir="5400000" rotWithShape="0">
-              <a:srgbClr val="2A3B55">
+              <a:srgbClr val="000000">
                 <a:alpha val="30000"/>
               </a:srgbClr>
             </a:outerShdw>
@@ -16660,7 +16144,7 @@
       </p:sp>
       <p:sp>
         <p:nvSpPr>
-          <p:cNvPr id="16" name="TextBox 15"/>
+          <p:cNvPr id="14" name="TextBox 13"/>
           <p:cNvSpPr txBox="1"/>
           <p:nvPr/>
         </p:nvSpPr>
@@ -16691,7 +16175,7 @@
             <a:r>
               <a:rPr sz="1300" b="1">
                 <a:solidFill>
-                  <a:srgbClr val="17456B"/>
+                  <a:srgbClr val="33393F"/>
                 </a:solidFill>
                 <a:latin typeface="맑은 고딕"/>
                 <a:ea typeface="맑은 고딕"/>
@@ -16711,7 +16195,7 @@
             <a:r>
               <a:rPr sz="1100" b="0">
                 <a:solidFill>
-                  <a:srgbClr val="222E40"/>
+                  <a:srgbClr val="1C1C1E"/>
                 </a:solidFill>
                 <a:latin typeface="맑은 고딕"/>
                 <a:ea typeface="맑은 고딕"/>
@@ -16731,7 +16215,7 @@
             <a:r>
               <a:rPr sz="1100" b="0">
                 <a:solidFill>
-                  <a:srgbClr val="222E40"/>
+                  <a:srgbClr val="1C1C1E"/>
                 </a:solidFill>
                 <a:latin typeface="맑은 고딕"/>
                 <a:ea typeface="맑은 고딕"/>
@@ -16743,7 +16227,7 @@
       </p:sp>
       <p:sp>
         <p:nvSpPr>
-          <p:cNvPr id="17" name="TextBox 16"/>
+          <p:cNvPr id="15" name="TextBox 14"/>
           <p:cNvSpPr txBox="1"/>
           <p:nvPr/>
         </p:nvSpPr>
@@ -16774,7 +16258,7 @@
             <a:r>
               <a:rPr sz="1300" b="1">
                 <a:solidFill>
-                  <a:srgbClr val="E85D42"/>
+                  <a:srgbClr val="000000"/>
                 </a:solidFill>
                 <a:latin typeface="맑은 고딕"/>
                 <a:ea typeface="맑은 고딕"/>
@@ -16846,57 +16330,9 @@
           </a:p>
         </p:txBody>
       </p:sp>
-      <p:pic>
-        <p:nvPicPr>
-          <p:cNvPr id="3" name="Picture 2" descr="blob_blue.png"/>
-          <p:cNvPicPr>
-            <a:picLocks noChangeAspect="1"/>
-          </p:cNvPicPr>
-          <p:nvPr/>
-        </p:nvPicPr>
-        <p:blipFill>
-          <a:blip r:embed="rId2"/>
-          <a:stretch>
-            <a:fillRect/>
-          </a:stretch>
-        </p:blipFill>
-        <p:spPr>
-          <a:xfrm>
-            <a:off x="-3474720" y="3840480"/>
-            <a:ext cx="6583680" cy="6583680"/>
-          </a:xfrm>
-          <a:prstGeom prst="rect">
-            <a:avLst/>
-          </a:prstGeom>
-        </p:spPr>
-      </p:pic>
-      <p:pic>
-        <p:nvPicPr>
-          <p:cNvPr id="4" name="Picture 3" descr="blob_coral.png"/>
-          <p:cNvPicPr>
-            <a:picLocks noChangeAspect="1"/>
-          </p:cNvPicPr>
-          <p:nvPr/>
-        </p:nvPicPr>
-        <p:blipFill>
-          <a:blip r:embed="rId3"/>
-          <a:stretch>
-            <a:fillRect/>
-          </a:stretch>
-        </p:blipFill>
-        <p:spPr>
-          <a:xfrm>
-            <a:off x="8961120" y="-3291840"/>
-            <a:ext cx="6217920" cy="6217920"/>
-          </a:xfrm>
-          <a:prstGeom prst="rect">
-            <a:avLst/>
-          </a:prstGeom>
-        </p:spPr>
-      </p:pic>
-      <p:sp>
-        <p:nvSpPr>
-          <p:cNvPr id="5" name="Rounded Rectangle 4"/>
+      <p:sp>
+        <p:nvSpPr>
+          <p:cNvPr id="3" name="Rounded Rectangle 2"/>
           <p:cNvSpPr/>
           <p:nvPr/>
         </p:nvSpPr>
@@ -16913,10 +16349,10 @@
           <a:gradFill rotWithShape="1">
             <a:gsLst>
               <a:gs pos="0">
-                <a:srgbClr val="FF7A59"/>
+                <a:srgbClr val="3A3F45"/>
               </a:gs>
               <a:gs pos="100000">
-                <a:srgbClr val="FFB86B"/>
+                <a:srgbClr val="73787E"/>
               </a:gs>
             </a:gsLst>
             <a:lin scaled="0" ang="18900000"/>
@@ -16926,7 +16362,7 @@
           </a:ln>
           <a:effectLst>
             <a:outerShdw blurRad="109728" dist="36576" dir="5400000" rotWithShape="0">
-              <a:srgbClr val="C24E30">
+              <a:srgbClr val="000000">
                 <a:alpha val="35000"/>
               </a:srgbClr>
             </a:outerShdw>
@@ -16956,7 +16392,7 @@
       </p:sp>
       <p:sp>
         <p:nvSpPr>
-          <p:cNvPr id="6" name="TextBox 5"/>
+          <p:cNvPr id="4" name="TextBox 3"/>
           <p:cNvSpPr txBox="1"/>
           <p:nvPr/>
         </p:nvSpPr>
@@ -16987,7 +16423,7 @@
             <a:r>
               <a:rPr sz="2150" b="1">
                 <a:solidFill>
-                  <a:srgbClr val="222E40"/>
+                  <a:srgbClr val="1C1C1E"/>
                 </a:solidFill>
                 <a:latin typeface="맑은 고딕"/>
                 <a:ea typeface="맑은 고딕"/>
@@ -16997,33 +16433,61 @@
           </a:p>
         </p:txBody>
       </p:sp>
-      <p:pic>
-        <p:nvPicPr>
-          <p:cNvPr id="7" name="Picture 6" descr="glow_bar.png"/>
-          <p:cNvPicPr>
-            <a:picLocks noChangeAspect="1"/>
-          </p:cNvPicPr>
-          <p:nvPr/>
-        </p:nvPicPr>
-        <p:blipFill>
-          <a:blip r:embed="rId4"/>
-          <a:stretch>
-            <a:fillRect/>
-          </a:stretch>
-        </p:blipFill>
+      <p:sp>
+        <p:nvSpPr>
+          <p:cNvPr id="5" name="Rectangle 4"/>
+          <p:cNvSpPr/>
+          <p:nvPr/>
+        </p:nvSpPr>
         <p:spPr>
           <a:xfrm>
             <a:off x="521207" y="969264"/>
-            <a:ext cx="4206240" cy="50292"/>
+            <a:ext cx="4206240" cy="27432"/>
           </a:xfrm>
           <a:prstGeom prst="rect">
             <a:avLst/>
           </a:prstGeom>
-        </p:spPr>
-      </p:pic>
-      <p:sp>
-        <p:nvSpPr>
-          <p:cNvPr id="8" name="TextBox 7"/>
+          <a:gradFill rotWithShape="1">
+            <a:gsLst>
+              <a:gs pos="0">
+                <a:srgbClr val="2A2E33"/>
+              </a:gs>
+              <a:gs pos="100000">
+                <a:srgbClr val="FFFFFF"/>
+              </a:gs>
+            </a:gsLst>
+            <a:lin scaled="0" ang="0"/>
+          </a:gradFill>
+          <a:ln>
+            <a:noFill/>
+          </a:ln>
+          <a:effectLst/>
+        </p:spPr>
+        <p:style>
+          <a:lnRef idx="1">
+            <a:schemeClr val="accent1"/>
+          </a:lnRef>
+          <a:fillRef idx="3">
+            <a:schemeClr val="accent1"/>
+          </a:fillRef>
+          <a:effectRef idx="2">
+            <a:schemeClr val="accent1"/>
+          </a:effectRef>
+          <a:fontRef idx="minor">
+            <a:schemeClr val="lt1"/>
+          </a:fontRef>
+        </p:style>
+        <p:txBody>
+          <a:bodyPr rtlCol="0" anchor="ctr"/>
+          <a:lstStyle/>
+          <a:p>
+            <a:pPr algn="ctr"/>
+          </a:p>
+        </p:txBody>
+      </p:sp>
+      <p:sp>
+        <p:nvSpPr>
+          <p:cNvPr id="6" name="TextBox 5"/>
           <p:cNvSpPr txBox="1"/>
           <p:nvPr/>
         </p:nvSpPr>
@@ -17054,7 +16518,7 @@
             <a:r>
               <a:rPr sz="3000" b="1">
                 <a:solidFill>
-                  <a:srgbClr val="D3DDEA"/>
+                  <a:srgbClr val="D8DADD"/>
                 </a:solidFill>
                 <a:latin typeface="맑은 고딕"/>
                 <a:ea typeface="맑은 고딕"/>
@@ -17066,7 +16530,7 @@
       </p:sp>
       <p:sp>
         <p:nvSpPr>
-          <p:cNvPr id="9" name="TextBox 8"/>
+          <p:cNvPr id="7" name="TextBox 6"/>
           <p:cNvSpPr txBox="1"/>
           <p:nvPr/>
         </p:nvSpPr>
@@ -17097,7 +16561,7 @@
             <a:r>
               <a:rPr sz="850" b="0">
                 <a:solidFill>
-                  <a:srgbClr val="ABB7C7"/>
+                  <a:srgbClr val="B2B5B9"/>
                 </a:solidFill>
                 <a:latin typeface="맑은 고딕"/>
                 <a:ea typeface="맑은 고딕"/>
@@ -17109,7 +16573,7 @@
       </p:sp>
       <p:graphicFrame>
         <p:nvGraphicFramePr>
-          <p:cNvPr id="10" name="Table 9"/>
+          <p:cNvPr id="8" name="Table 7"/>
           <p:cNvGraphicFramePr>
             <a:graphicFrameLocks noGrp="1"/>
           </p:cNvGraphicFramePr>
@@ -17201,7 +16665,7 @@
                       <a:r>
                         <a:rPr sz="1100" b="0">
                           <a:solidFill>
-                            <a:srgbClr val="222E40"/>
+                            <a:srgbClr val="1C1C1E"/>
                           </a:solidFill>
                           <a:latin typeface="맑은 고딕"/>
                           <a:ea typeface="맑은 고딕"/>
@@ -17229,7 +16693,7 @@
                       <a:r>
                         <a:rPr sz="1100" b="0">
                           <a:solidFill>
-                            <a:srgbClr val="222E40"/>
+                            <a:srgbClr val="1C1C1E"/>
                           </a:solidFill>
                           <a:latin typeface="맑은 고딕"/>
                           <a:ea typeface="맑은 고딕"/>
@@ -17259,7 +16723,7 @@
                       <a:r>
                         <a:rPr sz="1100" b="0">
                           <a:solidFill>
-                            <a:srgbClr val="222E40"/>
+                            <a:srgbClr val="1C1C1E"/>
                           </a:solidFill>
                           <a:latin typeface="맑은 고딕"/>
                           <a:ea typeface="맑은 고딕"/>
@@ -17270,7 +16734,7 @@
                   </a:txBody>
                   <a:tcPr marT="27432" marB="27432" marL="73152" marR="73152" anchor="ctr">
                     <a:solidFill>
-                      <a:srgbClr val="F5F8FC"/>
+                      <a:srgbClr val="F6F7F8"/>
                     </a:solidFill>
                   </a:tcPr>
                 </a:tc>
@@ -17287,7 +16751,7 @@
                       <a:r>
                         <a:rPr sz="1100" b="0">
                           <a:solidFill>
-                            <a:srgbClr val="222E40"/>
+                            <a:srgbClr val="1C1C1E"/>
                           </a:solidFill>
                           <a:latin typeface="맑은 고딕"/>
                           <a:ea typeface="맑은 고딕"/>
@@ -17298,7 +16762,7 @@
                   </a:txBody>
                   <a:tcPr marT="27432" marB="27432" marL="73152" marR="73152" anchor="ctr">
                     <a:solidFill>
-                      <a:srgbClr val="F5F8FC"/>
+                      <a:srgbClr val="F6F7F8"/>
                     </a:solidFill>
                   </a:tcPr>
                 </a:tc>
@@ -17309,7 +16773,7 @@
       </p:graphicFrame>
       <p:sp>
         <p:nvSpPr>
-          <p:cNvPr id="11" name="Rounded Rectangle 10"/>
+          <p:cNvPr id="9" name="Rounded Rectangle 8"/>
           <p:cNvSpPr/>
           <p:nvPr/>
         </p:nvSpPr>
@@ -17328,12 +16792,12 @@
           </a:solidFill>
           <a:ln w="12700">
             <a:solidFill>
-              <a:srgbClr val="E4EAF2"/>
+              <a:srgbClr val="E4E6E9"/>
             </a:solidFill>
           </a:ln>
           <a:effectLst>
             <a:outerShdw blurRad="182880" dist="64008" dir="5400000" rotWithShape="0">
-              <a:srgbClr val="2A3B55">
+              <a:srgbClr val="000000">
                 <a:alpha val="30000"/>
               </a:srgbClr>
             </a:outerShdw>
@@ -17363,7 +16827,7 @@
       </p:sp>
       <p:sp>
         <p:nvSpPr>
-          <p:cNvPr id="12" name="TextBox 11"/>
+          <p:cNvPr id="10" name="TextBox 9"/>
           <p:cNvSpPr txBox="1"/>
           <p:nvPr/>
         </p:nvSpPr>
@@ -17394,7 +16858,7 @@
             <a:r>
               <a:rPr sz="1300" b="1">
                 <a:solidFill>
-                  <a:srgbClr val="17456B"/>
+                  <a:srgbClr val="33393F"/>
                 </a:solidFill>
                 <a:latin typeface="맑은 고딕"/>
                 <a:ea typeface="맑은 고딕"/>
@@ -17414,7 +16878,7 @@
             <a:r>
               <a:rPr sz="1050" b="0">
                 <a:solidFill>
-                  <a:srgbClr val="222E40"/>
+                  <a:srgbClr val="1C1C1E"/>
                 </a:solidFill>
                 <a:latin typeface="맑은 고딕"/>
                 <a:ea typeface="맑은 고딕"/>
@@ -17426,7 +16890,7 @@
       </p:sp>
       <p:sp>
         <p:nvSpPr>
-          <p:cNvPr id="13" name="Rounded Rectangle 12"/>
+          <p:cNvPr id="11" name="Rounded Rectangle 10"/>
           <p:cNvSpPr/>
           <p:nvPr/>
         </p:nvSpPr>
@@ -17445,12 +16909,12 @@
           </a:solidFill>
           <a:ln w="12700">
             <a:solidFill>
-              <a:srgbClr val="E4EAF2"/>
+              <a:srgbClr val="E4E6E9"/>
             </a:solidFill>
           </a:ln>
           <a:effectLst>
             <a:outerShdw blurRad="182880" dist="64008" dir="5400000" rotWithShape="0">
-              <a:srgbClr val="2A3B55">
+              <a:srgbClr val="000000">
                 <a:alpha val="30000"/>
               </a:srgbClr>
             </a:outerShdw>
@@ -17480,7 +16944,7 @@
       </p:sp>
       <p:sp>
         <p:nvSpPr>
-          <p:cNvPr id="14" name="TextBox 13"/>
+          <p:cNvPr id="12" name="TextBox 11"/>
           <p:cNvSpPr txBox="1"/>
           <p:nvPr/>
         </p:nvSpPr>
@@ -17511,7 +16975,7 @@
             <a:r>
               <a:rPr sz="1300" b="1">
                 <a:solidFill>
-                  <a:srgbClr val="17456B"/>
+                  <a:srgbClr val="33393F"/>
                 </a:solidFill>
                 <a:latin typeface="맑은 고딕"/>
                 <a:ea typeface="맑은 고딕"/>
@@ -17531,7 +16995,7 @@
             <a:r>
               <a:rPr sz="1050" b="0">
                 <a:solidFill>
-                  <a:srgbClr val="222E40"/>
+                  <a:srgbClr val="1C1C1E"/>
                 </a:solidFill>
                 <a:latin typeface="맑은 고딕"/>
                 <a:ea typeface="맑은 고딕"/>
@@ -17543,7 +17007,7 @@
       </p:sp>
       <p:sp>
         <p:nvSpPr>
-          <p:cNvPr id="15" name="Rounded Rectangle 14"/>
+          <p:cNvPr id="13" name="Rounded Rectangle 12"/>
           <p:cNvSpPr/>
           <p:nvPr/>
         </p:nvSpPr>
@@ -17562,12 +17026,12 @@
           </a:solidFill>
           <a:ln w="12700">
             <a:solidFill>
-              <a:srgbClr val="E4EAF2"/>
+              <a:srgbClr val="E4E6E9"/>
             </a:solidFill>
           </a:ln>
           <a:effectLst>
             <a:outerShdw blurRad="182880" dist="64008" dir="5400000" rotWithShape="0">
-              <a:srgbClr val="2A3B55">
+              <a:srgbClr val="000000">
                 <a:alpha val="30000"/>
               </a:srgbClr>
             </a:outerShdw>
@@ -17597,7 +17061,7 @@
       </p:sp>
       <p:sp>
         <p:nvSpPr>
-          <p:cNvPr id="16" name="TextBox 15"/>
+          <p:cNvPr id="14" name="TextBox 13"/>
           <p:cNvSpPr txBox="1"/>
           <p:nvPr/>
         </p:nvSpPr>
@@ -17628,7 +17092,7 @@
             <a:r>
               <a:rPr sz="1300" b="1">
                 <a:solidFill>
-                  <a:srgbClr val="17456B"/>
+                  <a:srgbClr val="33393F"/>
                 </a:solidFill>
                 <a:latin typeface="맑은 고딕"/>
                 <a:ea typeface="맑은 고딕"/>
@@ -17648,7 +17112,7 @@
             <a:r>
               <a:rPr sz="1050" b="0">
                 <a:solidFill>
-                  <a:srgbClr val="222E40"/>
+                  <a:srgbClr val="1C1C1E"/>
                 </a:solidFill>
                 <a:latin typeface="맑은 고딕"/>
                 <a:ea typeface="맑은 고딕"/>
@@ -17660,7 +17124,7 @@
       </p:sp>
       <p:sp>
         <p:nvSpPr>
-          <p:cNvPr id="17" name="Rounded Rectangle 16"/>
+          <p:cNvPr id="15" name="Rounded Rectangle 14"/>
           <p:cNvSpPr/>
           <p:nvPr/>
         </p:nvSpPr>
@@ -17679,12 +17143,12 @@
           </a:solidFill>
           <a:ln w="12700">
             <a:solidFill>
-              <a:srgbClr val="E4EAF2"/>
+              <a:srgbClr val="E4E6E9"/>
             </a:solidFill>
           </a:ln>
           <a:effectLst>
             <a:outerShdw blurRad="182880" dist="64008" dir="5400000" rotWithShape="0">
-              <a:srgbClr val="2A3B55">
+              <a:srgbClr val="000000">
                 <a:alpha val="30000"/>
               </a:srgbClr>
             </a:outerShdw>
@@ -17714,7 +17178,7 @@
       </p:sp>
       <p:sp>
         <p:nvSpPr>
-          <p:cNvPr id="18" name="TextBox 17"/>
+          <p:cNvPr id="16" name="TextBox 15"/>
           <p:cNvSpPr txBox="1"/>
           <p:nvPr/>
         </p:nvSpPr>
@@ -17745,7 +17209,7 @@
             <a:r>
               <a:rPr sz="1300" b="1">
                 <a:solidFill>
-                  <a:srgbClr val="17456B"/>
+                  <a:srgbClr val="33393F"/>
                 </a:solidFill>
                 <a:latin typeface="맑은 고딕"/>
                 <a:ea typeface="맑은 고딕"/>
@@ -17765,7 +17229,7 @@
             <a:r>
               <a:rPr sz="1100" b="0">
                 <a:solidFill>
-                  <a:srgbClr val="222E40"/>
+                  <a:srgbClr val="1C1C1E"/>
                 </a:solidFill>
                 <a:latin typeface="맑은 고딕"/>
                 <a:ea typeface="맑은 고딕"/>
@@ -17785,7 +17249,7 @@
             <a:r>
               <a:rPr sz="1100" b="0">
                 <a:solidFill>
-                  <a:srgbClr val="222E40"/>
+                  <a:srgbClr val="1C1C1E"/>
                 </a:solidFill>
                 <a:latin typeface="맑은 고딕"/>
                 <a:ea typeface="맑은 고딕"/>
@@ -17805,7 +17269,7 @@
             <a:r>
               <a:rPr sz="1100" b="0">
                 <a:solidFill>
-                  <a:srgbClr val="222E40"/>
+                  <a:srgbClr val="1C1C1E"/>
                 </a:solidFill>
                 <a:latin typeface="맑은 고딕"/>
                 <a:ea typeface="맑은 고딕"/>
@@ -17877,57 +17341,9 @@
           </a:p>
         </p:txBody>
       </p:sp>
-      <p:pic>
-        <p:nvPicPr>
-          <p:cNvPr id="3" name="Picture 2" descr="blob_blue.png"/>
-          <p:cNvPicPr>
-            <a:picLocks noChangeAspect="1"/>
-          </p:cNvPicPr>
-          <p:nvPr/>
-        </p:nvPicPr>
-        <p:blipFill>
-          <a:blip r:embed="rId2"/>
-          <a:stretch>
-            <a:fillRect/>
-          </a:stretch>
-        </p:blipFill>
-        <p:spPr>
-          <a:xfrm>
-            <a:off x="-3474720" y="3840480"/>
-            <a:ext cx="6583680" cy="6583680"/>
-          </a:xfrm>
-          <a:prstGeom prst="rect">
-            <a:avLst/>
-          </a:prstGeom>
-        </p:spPr>
-      </p:pic>
-      <p:pic>
-        <p:nvPicPr>
-          <p:cNvPr id="4" name="Picture 3" descr="blob_coral.png"/>
-          <p:cNvPicPr>
-            <a:picLocks noChangeAspect="1"/>
-          </p:cNvPicPr>
-          <p:nvPr/>
-        </p:nvPicPr>
-        <p:blipFill>
-          <a:blip r:embed="rId3"/>
-          <a:stretch>
-            <a:fillRect/>
-          </a:stretch>
-        </p:blipFill>
-        <p:spPr>
-          <a:xfrm>
-            <a:off x="8961120" y="-3291840"/>
-            <a:ext cx="6217920" cy="6217920"/>
-          </a:xfrm>
-          <a:prstGeom prst="rect">
-            <a:avLst/>
-          </a:prstGeom>
-        </p:spPr>
-      </p:pic>
-      <p:sp>
-        <p:nvSpPr>
-          <p:cNvPr id="5" name="Rounded Rectangle 4"/>
+      <p:sp>
+        <p:nvSpPr>
+          <p:cNvPr id="3" name="Rounded Rectangle 2"/>
           <p:cNvSpPr/>
           <p:nvPr/>
         </p:nvSpPr>
@@ -17944,10 +17360,10 @@
           <a:gradFill rotWithShape="1">
             <a:gsLst>
               <a:gs pos="0">
-                <a:srgbClr val="FF7A59"/>
+                <a:srgbClr val="3A3F45"/>
               </a:gs>
               <a:gs pos="100000">
-                <a:srgbClr val="FFB86B"/>
+                <a:srgbClr val="73787E"/>
               </a:gs>
             </a:gsLst>
             <a:lin scaled="0" ang="18900000"/>
@@ -17957,7 +17373,7 @@
           </a:ln>
           <a:effectLst>
             <a:outerShdw blurRad="109728" dist="36576" dir="5400000" rotWithShape="0">
-              <a:srgbClr val="C24E30">
+              <a:srgbClr val="000000">
                 <a:alpha val="35000"/>
               </a:srgbClr>
             </a:outerShdw>
@@ -17987,7 +17403,7 @@
       </p:sp>
       <p:sp>
         <p:nvSpPr>
-          <p:cNvPr id="6" name="TextBox 5"/>
+          <p:cNvPr id="4" name="TextBox 3"/>
           <p:cNvSpPr txBox="1"/>
           <p:nvPr/>
         </p:nvSpPr>
@@ -18018,7 +17434,7 @@
             <a:r>
               <a:rPr sz="2150" b="1">
                 <a:solidFill>
-                  <a:srgbClr val="222E40"/>
+                  <a:srgbClr val="1C1C1E"/>
                 </a:solidFill>
                 <a:latin typeface="맑은 고딕"/>
                 <a:ea typeface="맑은 고딕"/>
@@ -18028,33 +17444,61 @@
           </a:p>
         </p:txBody>
       </p:sp>
-      <p:pic>
-        <p:nvPicPr>
-          <p:cNvPr id="7" name="Picture 6" descr="glow_bar.png"/>
-          <p:cNvPicPr>
-            <a:picLocks noChangeAspect="1"/>
-          </p:cNvPicPr>
-          <p:nvPr/>
-        </p:nvPicPr>
-        <p:blipFill>
-          <a:blip r:embed="rId4"/>
-          <a:stretch>
-            <a:fillRect/>
-          </a:stretch>
-        </p:blipFill>
+      <p:sp>
+        <p:nvSpPr>
+          <p:cNvPr id="5" name="Rectangle 4"/>
+          <p:cNvSpPr/>
+          <p:nvPr/>
+        </p:nvSpPr>
         <p:spPr>
           <a:xfrm>
             <a:off x="521207" y="969264"/>
-            <a:ext cx="4206240" cy="50292"/>
+            <a:ext cx="4206240" cy="27432"/>
           </a:xfrm>
           <a:prstGeom prst="rect">
             <a:avLst/>
           </a:prstGeom>
-        </p:spPr>
-      </p:pic>
-      <p:sp>
-        <p:nvSpPr>
-          <p:cNvPr id="8" name="TextBox 7"/>
+          <a:gradFill rotWithShape="1">
+            <a:gsLst>
+              <a:gs pos="0">
+                <a:srgbClr val="2A2E33"/>
+              </a:gs>
+              <a:gs pos="100000">
+                <a:srgbClr val="FFFFFF"/>
+              </a:gs>
+            </a:gsLst>
+            <a:lin scaled="0" ang="0"/>
+          </a:gradFill>
+          <a:ln>
+            <a:noFill/>
+          </a:ln>
+          <a:effectLst/>
+        </p:spPr>
+        <p:style>
+          <a:lnRef idx="1">
+            <a:schemeClr val="accent1"/>
+          </a:lnRef>
+          <a:fillRef idx="3">
+            <a:schemeClr val="accent1"/>
+          </a:fillRef>
+          <a:effectRef idx="2">
+            <a:schemeClr val="accent1"/>
+          </a:effectRef>
+          <a:fontRef idx="minor">
+            <a:schemeClr val="lt1"/>
+          </a:fontRef>
+        </p:style>
+        <p:txBody>
+          <a:bodyPr rtlCol="0" anchor="ctr"/>
+          <a:lstStyle/>
+          <a:p>
+            <a:pPr algn="ctr"/>
+          </a:p>
+        </p:txBody>
+      </p:sp>
+      <p:sp>
+        <p:nvSpPr>
+          <p:cNvPr id="6" name="TextBox 5"/>
           <p:cNvSpPr txBox="1"/>
           <p:nvPr/>
         </p:nvSpPr>
@@ -18085,7 +17529,7 @@
             <a:r>
               <a:rPr sz="3000" b="1">
                 <a:solidFill>
-                  <a:srgbClr val="D3DDEA"/>
+                  <a:srgbClr val="D8DADD"/>
                 </a:solidFill>
                 <a:latin typeface="맑은 고딕"/>
                 <a:ea typeface="맑은 고딕"/>
@@ -18097,7 +17541,7 @@
       </p:sp>
       <p:sp>
         <p:nvSpPr>
-          <p:cNvPr id="9" name="TextBox 8"/>
+          <p:cNvPr id="7" name="TextBox 6"/>
           <p:cNvSpPr txBox="1"/>
           <p:nvPr/>
         </p:nvSpPr>
@@ -18128,7 +17572,7 @@
             <a:r>
               <a:rPr sz="850" b="0">
                 <a:solidFill>
-                  <a:srgbClr val="ABB7C7"/>
+                  <a:srgbClr val="B2B5B9"/>
                 </a:solidFill>
                 <a:latin typeface="맑은 고딕"/>
                 <a:ea typeface="맑은 고딕"/>
@@ -18140,7 +17584,7 @@
       </p:sp>
       <p:sp>
         <p:nvSpPr>
-          <p:cNvPr id="10" name="Rounded Rectangle 9"/>
+          <p:cNvPr id="8" name="Rounded Rectangle 7"/>
           <p:cNvSpPr/>
           <p:nvPr/>
         </p:nvSpPr>
@@ -18159,12 +17603,12 @@
           </a:solidFill>
           <a:ln w="12700">
             <a:solidFill>
-              <a:srgbClr val="E4EAF2"/>
+              <a:srgbClr val="E4E6E9"/>
             </a:solidFill>
           </a:ln>
           <a:effectLst>
             <a:outerShdw blurRad="182880" dist="64008" dir="5400000" rotWithShape="0">
-              <a:srgbClr val="2A3B55">
+              <a:srgbClr val="000000">
                 <a:alpha val="30000"/>
               </a:srgbClr>
             </a:outerShdw>
@@ -18194,7 +17638,7 @@
       </p:sp>
       <p:sp>
         <p:nvSpPr>
-          <p:cNvPr id="11" name="TextBox 10"/>
+          <p:cNvPr id="9" name="TextBox 8"/>
           <p:cNvSpPr txBox="1"/>
           <p:nvPr/>
         </p:nvSpPr>
@@ -18225,7 +17669,7 @@
             <a:r>
               <a:rPr sz="1300" b="1">
                 <a:solidFill>
-                  <a:srgbClr val="17456B"/>
+                  <a:srgbClr val="33393F"/>
                 </a:solidFill>
                 <a:latin typeface="맑은 고딕"/>
                 <a:ea typeface="맑은 고딕"/>
@@ -18245,7 +17689,7 @@
             <a:r>
               <a:rPr sz="1100" b="0">
                 <a:solidFill>
-                  <a:srgbClr val="222E40"/>
+                  <a:srgbClr val="1C1C1E"/>
                 </a:solidFill>
                 <a:latin typeface="맑은 고딕"/>
                 <a:ea typeface="맑은 고딕"/>
@@ -18265,7 +17709,7 @@
             <a:r>
               <a:rPr sz="1100" b="0">
                 <a:solidFill>
-                  <a:srgbClr val="222E40"/>
+                  <a:srgbClr val="1C1C1E"/>
                 </a:solidFill>
                 <a:latin typeface="맑은 고딕"/>
                 <a:ea typeface="맑은 고딕"/>
@@ -18285,7 +17729,7 @@
             <a:r>
               <a:rPr sz="1100" b="0">
                 <a:solidFill>
-                  <a:srgbClr val="222E40"/>
+                  <a:srgbClr val="1C1C1E"/>
                 </a:solidFill>
                 <a:latin typeface="맑은 고딕"/>
                 <a:ea typeface="맑은 고딕"/>
@@ -18297,7 +17741,7 @@
       </p:sp>
       <p:sp>
         <p:nvSpPr>
-          <p:cNvPr id="12" name="TextBox 11"/>
+          <p:cNvPr id="10" name="TextBox 9"/>
           <p:cNvSpPr txBox="1"/>
           <p:nvPr/>
         </p:nvSpPr>
@@ -18328,7 +17772,7 @@
             <a:r>
               <a:rPr sz="1350" b="1">
                 <a:solidFill>
-                  <a:srgbClr val="17456B"/>
+                  <a:srgbClr val="33393F"/>
                 </a:solidFill>
                 <a:latin typeface="맑은 고딕"/>
                 <a:ea typeface="맑은 고딕"/>
@@ -18340,7 +17784,7 @@
       </p:sp>
       <p:graphicFrame>
         <p:nvGraphicFramePr>
-          <p:cNvPr id="13" name="Table 12"/>
+          <p:cNvPr id="11" name="Table 10"/>
           <p:cNvGraphicFramePr>
             <a:graphicFrameLocks noGrp="1"/>
           </p:cNvGraphicFramePr>
@@ -18490,7 +17934,7 @@
                       <a:r>
                         <a:rPr sz="1100" b="0">
                           <a:solidFill>
-                            <a:srgbClr val="222E40"/>
+                            <a:srgbClr val="1C1C1E"/>
                           </a:solidFill>
                           <a:latin typeface="맑은 고딕"/>
                           <a:ea typeface="맑은 고딕"/>
@@ -18518,7 +17962,7 @@
                       <a:r>
                         <a:rPr sz="1100" b="0">
                           <a:solidFill>
-                            <a:srgbClr val="222E40"/>
+                            <a:srgbClr val="1C1C1E"/>
                           </a:solidFill>
                           <a:latin typeface="맑은 고딕"/>
                           <a:ea typeface="맑은 고딕"/>
@@ -18546,7 +17990,7 @@
                       <a:r>
                         <a:rPr sz="1100" b="0">
                           <a:solidFill>
-                            <a:srgbClr val="222E40"/>
+                            <a:srgbClr val="1C1C1E"/>
                           </a:solidFill>
                           <a:latin typeface="맑은 고딕"/>
                           <a:ea typeface="맑은 고딕"/>
@@ -18574,7 +18018,7 @@
                       <a:r>
                         <a:rPr sz="1100" b="0">
                           <a:solidFill>
-                            <a:srgbClr val="222E40"/>
+                            <a:srgbClr val="1C1C1E"/>
                           </a:solidFill>
                           <a:latin typeface="맑은 고딕"/>
                           <a:ea typeface="맑은 고딕"/>
@@ -18604,7 +18048,7 @@
                       <a:r>
                         <a:rPr sz="1100" b="1">
                           <a:solidFill>
-                            <a:srgbClr val="E85D42"/>
+                            <a:srgbClr val="000000"/>
                           </a:solidFill>
                           <a:latin typeface="맑은 고딕"/>
                           <a:ea typeface="맑은 고딕"/>
@@ -18615,7 +18059,7 @@
                   </a:txBody>
                   <a:tcPr marT="27432" marB="27432" marL="73152" marR="73152" anchor="ctr">
                     <a:solidFill>
-                      <a:srgbClr val="FFEDE6"/>
+                      <a:srgbClr val="E3E5E8"/>
                     </a:solidFill>
                   </a:tcPr>
                 </a:tc>
@@ -18632,7 +18076,7 @@
                       <a:r>
                         <a:rPr sz="1100" b="1">
                           <a:solidFill>
-                            <a:srgbClr val="E85D42"/>
+                            <a:srgbClr val="000000"/>
                           </a:solidFill>
                           <a:latin typeface="맑은 고딕"/>
                           <a:ea typeface="맑은 고딕"/>
@@ -18643,7 +18087,7 @@
                   </a:txBody>
                   <a:tcPr marT="27432" marB="27432" marL="73152" marR="73152" anchor="ctr">
                     <a:solidFill>
-                      <a:srgbClr val="FFEDE6"/>
+                      <a:srgbClr val="E3E5E8"/>
                     </a:solidFill>
                   </a:tcPr>
                 </a:tc>
@@ -18660,7 +18104,7 @@
                       <a:r>
                         <a:rPr sz="1100" b="1">
                           <a:solidFill>
-                            <a:srgbClr val="E85D42"/>
+                            <a:srgbClr val="000000"/>
                           </a:solidFill>
                           <a:latin typeface="맑은 고딕"/>
                           <a:ea typeface="맑은 고딕"/>
@@ -18671,7 +18115,7 @@
                   </a:txBody>
                   <a:tcPr marT="27432" marB="27432" marL="73152" marR="73152" anchor="ctr">
                     <a:solidFill>
-                      <a:srgbClr val="FFEDE6"/>
+                      <a:srgbClr val="E3E5E8"/>
                     </a:solidFill>
                   </a:tcPr>
                 </a:tc>
@@ -18688,7 +18132,7 @@
                       <a:r>
                         <a:rPr sz="1100" b="1">
                           <a:solidFill>
-                            <a:srgbClr val="E85D42"/>
+                            <a:srgbClr val="000000"/>
                           </a:solidFill>
                           <a:latin typeface="맑은 고딕"/>
                           <a:ea typeface="맑은 고딕"/>
@@ -18699,7 +18143,7 @@
                   </a:txBody>
                   <a:tcPr marT="27432" marB="27432" marL="73152" marR="73152" anchor="ctr">
                     <a:solidFill>
-                      <a:srgbClr val="FFEDE6"/>
+                      <a:srgbClr val="E3E5E8"/>
                     </a:solidFill>
                   </a:tcPr>
                 </a:tc>
@@ -18718,7 +18162,7 @@
                       <a:r>
                         <a:rPr sz="1100" b="0">
                           <a:solidFill>
-                            <a:srgbClr val="222E40"/>
+                            <a:srgbClr val="1C1C1E"/>
                           </a:solidFill>
                           <a:latin typeface="맑은 고딕"/>
                           <a:ea typeface="맑은 고딕"/>
@@ -18746,7 +18190,7 @@
                       <a:r>
                         <a:rPr sz="1100" b="0">
                           <a:solidFill>
-                            <a:srgbClr val="222E40"/>
+                            <a:srgbClr val="1C1C1E"/>
                           </a:solidFill>
                           <a:latin typeface="맑은 고딕"/>
                           <a:ea typeface="맑은 고딕"/>
@@ -18774,7 +18218,7 @@
                       <a:r>
                         <a:rPr sz="1100" b="0">
                           <a:solidFill>
-                            <a:srgbClr val="222E40"/>
+                            <a:srgbClr val="1C1C1E"/>
                           </a:solidFill>
                           <a:latin typeface="맑은 고딕"/>
                           <a:ea typeface="맑은 고딕"/>
@@ -18802,7 +18246,7 @@
                       <a:r>
                         <a:rPr sz="1100" b="0">
                           <a:solidFill>
-                            <a:srgbClr val="222E40"/>
+                            <a:srgbClr val="1C1C1E"/>
                           </a:solidFill>
                           <a:latin typeface="맑은 고딕"/>
                           <a:ea typeface="맑은 고딕"/>
@@ -18824,7 +18268,7 @@
       </p:graphicFrame>
       <p:sp>
         <p:nvSpPr>
-          <p:cNvPr id="14" name="Rounded Rectangle 13"/>
+          <p:cNvPr id="12" name="Rounded Rectangle 11"/>
           <p:cNvSpPr/>
           <p:nvPr/>
         </p:nvSpPr>
@@ -18843,12 +18287,12 @@
           </a:solidFill>
           <a:ln w="12700">
             <a:solidFill>
-              <a:srgbClr val="E4EAF2"/>
+              <a:srgbClr val="E4E6E9"/>
             </a:solidFill>
           </a:ln>
           <a:effectLst>
             <a:outerShdw blurRad="182880" dist="64008" dir="5400000" rotWithShape="0">
-              <a:srgbClr val="2A3B55">
+              <a:srgbClr val="000000">
                 <a:alpha val="30000"/>
               </a:srgbClr>
             </a:outerShdw>
@@ -18878,7 +18322,7 @@
       </p:sp>
       <p:sp>
         <p:nvSpPr>
-          <p:cNvPr id="15" name="TextBox 14"/>
+          <p:cNvPr id="13" name="TextBox 12"/>
           <p:cNvSpPr txBox="1"/>
           <p:nvPr/>
         </p:nvSpPr>
@@ -18909,7 +18353,7 @@
             <a:r>
               <a:rPr sz="1300" b="1">
                 <a:solidFill>
-                  <a:srgbClr val="17456B"/>
+                  <a:srgbClr val="33393F"/>
                 </a:solidFill>
                 <a:latin typeface="맑은 고딕"/>
                 <a:ea typeface="맑은 고딕"/>
@@ -18929,7 +18373,7 @@
             <a:r>
               <a:rPr sz="1150" b="0">
                 <a:solidFill>
-                  <a:srgbClr val="222E40"/>
+                  <a:srgbClr val="1C1C1E"/>
                 </a:solidFill>
                 <a:latin typeface="맑은 고딕"/>
                 <a:ea typeface="맑은 고딕"/>
@@ -18949,7 +18393,7 @@
             <a:r>
               <a:rPr sz="1150" b="0">
                 <a:solidFill>
-                  <a:srgbClr val="222E40"/>
+                  <a:srgbClr val="1C1C1E"/>
                 </a:solidFill>
                 <a:latin typeface="맑은 고딕"/>
                 <a:ea typeface="맑은 고딕"/>
@@ -18961,7 +18405,7 @@
       </p:sp>
       <p:sp>
         <p:nvSpPr>
-          <p:cNvPr id="16" name="TextBox 15"/>
+          <p:cNvPr id="14" name="TextBox 13"/>
           <p:cNvSpPr txBox="1"/>
           <p:nvPr/>
         </p:nvSpPr>
@@ -18992,7 +18436,7 @@
             <a:r>
               <a:rPr sz="1150" b="0">
                 <a:solidFill>
-                  <a:srgbClr val="6A7B92"/>
+                  <a:srgbClr val="767A7F"/>
                 </a:solidFill>
                 <a:latin typeface="맑은 고딕"/>
                 <a:ea typeface="맑은 고딕"/>
@@ -19064,57 +18508,9 @@
           </a:p>
         </p:txBody>
       </p:sp>
-      <p:pic>
-        <p:nvPicPr>
-          <p:cNvPr id="3" name="Picture 2" descr="blob_blue.png"/>
-          <p:cNvPicPr>
-            <a:picLocks noChangeAspect="1"/>
-          </p:cNvPicPr>
-          <p:nvPr/>
-        </p:nvPicPr>
-        <p:blipFill>
-          <a:blip r:embed="rId2"/>
-          <a:stretch>
-            <a:fillRect/>
-          </a:stretch>
-        </p:blipFill>
-        <p:spPr>
-          <a:xfrm>
-            <a:off x="-3474720" y="3840480"/>
-            <a:ext cx="6583680" cy="6583680"/>
-          </a:xfrm>
-          <a:prstGeom prst="rect">
-            <a:avLst/>
-          </a:prstGeom>
-        </p:spPr>
-      </p:pic>
-      <p:pic>
-        <p:nvPicPr>
-          <p:cNvPr id="4" name="Picture 3" descr="blob_coral.png"/>
-          <p:cNvPicPr>
-            <a:picLocks noChangeAspect="1"/>
-          </p:cNvPicPr>
-          <p:nvPr/>
-        </p:nvPicPr>
-        <p:blipFill>
-          <a:blip r:embed="rId3"/>
-          <a:stretch>
-            <a:fillRect/>
-          </a:stretch>
-        </p:blipFill>
-        <p:spPr>
-          <a:xfrm>
-            <a:off x="8961120" y="-3291840"/>
-            <a:ext cx="6217920" cy="6217920"/>
-          </a:xfrm>
-          <a:prstGeom prst="rect">
-            <a:avLst/>
-          </a:prstGeom>
-        </p:spPr>
-      </p:pic>
-      <p:sp>
-        <p:nvSpPr>
-          <p:cNvPr id="5" name="Rounded Rectangle 4"/>
+      <p:sp>
+        <p:nvSpPr>
+          <p:cNvPr id="3" name="Rounded Rectangle 2"/>
           <p:cNvSpPr/>
           <p:nvPr/>
         </p:nvSpPr>
@@ -19131,10 +18527,10 @@
           <a:gradFill rotWithShape="1">
             <a:gsLst>
               <a:gs pos="0">
-                <a:srgbClr val="FF7A59"/>
+                <a:srgbClr val="3A3F45"/>
               </a:gs>
               <a:gs pos="100000">
-                <a:srgbClr val="FFB86B"/>
+                <a:srgbClr val="73787E"/>
               </a:gs>
             </a:gsLst>
             <a:lin scaled="0" ang="18900000"/>
@@ -19144,7 +18540,7 @@
           </a:ln>
           <a:effectLst>
             <a:outerShdw blurRad="109728" dist="36576" dir="5400000" rotWithShape="0">
-              <a:srgbClr val="C24E30">
+              <a:srgbClr val="000000">
                 <a:alpha val="35000"/>
               </a:srgbClr>
             </a:outerShdw>
@@ -19174,7 +18570,7 @@
       </p:sp>
       <p:sp>
         <p:nvSpPr>
-          <p:cNvPr id="6" name="TextBox 5"/>
+          <p:cNvPr id="4" name="TextBox 3"/>
           <p:cNvSpPr txBox="1"/>
           <p:nvPr/>
         </p:nvSpPr>
@@ -19205,7 +18601,7 @@
             <a:r>
               <a:rPr sz="2150" b="1">
                 <a:solidFill>
-                  <a:srgbClr val="222E40"/>
+                  <a:srgbClr val="1C1C1E"/>
                 </a:solidFill>
                 <a:latin typeface="맑은 고딕"/>
                 <a:ea typeface="맑은 고딕"/>
@@ -19215,33 +18611,61 @@
           </a:p>
         </p:txBody>
       </p:sp>
-      <p:pic>
-        <p:nvPicPr>
-          <p:cNvPr id="7" name="Picture 6" descr="glow_bar.png"/>
-          <p:cNvPicPr>
-            <a:picLocks noChangeAspect="1"/>
-          </p:cNvPicPr>
-          <p:nvPr/>
-        </p:nvPicPr>
-        <p:blipFill>
-          <a:blip r:embed="rId4"/>
-          <a:stretch>
-            <a:fillRect/>
-          </a:stretch>
-        </p:blipFill>
+      <p:sp>
+        <p:nvSpPr>
+          <p:cNvPr id="5" name="Rectangle 4"/>
+          <p:cNvSpPr/>
+          <p:nvPr/>
+        </p:nvSpPr>
         <p:spPr>
           <a:xfrm>
             <a:off x="521207" y="969264"/>
-            <a:ext cx="4206240" cy="50292"/>
+            <a:ext cx="4206240" cy="27432"/>
           </a:xfrm>
           <a:prstGeom prst="rect">
             <a:avLst/>
           </a:prstGeom>
-        </p:spPr>
-      </p:pic>
-      <p:sp>
-        <p:nvSpPr>
-          <p:cNvPr id="8" name="TextBox 7"/>
+          <a:gradFill rotWithShape="1">
+            <a:gsLst>
+              <a:gs pos="0">
+                <a:srgbClr val="2A2E33"/>
+              </a:gs>
+              <a:gs pos="100000">
+                <a:srgbClr val="FFFFFF"/>
+              </a:gs>
+            </a:gsLst>
+            <a:lin scaled="0" ang="0"/>
+          </a:gradFill>
+          <a:ln>
+            <a:noFill/>
+          </a:ln>
+          <a:effectLst/>
+        </p:spPr>
+        <p:style>
+          <a:lnRef idx="1">
+            <a:schemeClr val="accent1"/>
+          </a:lnRef>
+          <a:fillRef idx="3">
+            <a:schemeClr val="accent1"/>
+          </a:fillRef>
+          <a:effectRef idx="2">
+            <a:schemeClr val="accent1"/>
+          </a:effectRef>
+          <a:fontRef idx="minor">
+            <a:schemeClr val="lt1"/>
+          </a:fontRef>
+        </p:style>
+        <p:txBody>
+          <a:bodyPr rtlCol="0" anchor="ctr"/>
+          <a:lstStyle/>
+          <a:p>
+            <a:pPr algn="ctr"/>
+          </a:p>
+        </p:txBody>
+      </p:sp>
+      <p:sp>
+        <p:nvSpPr>
+          <p:cNvPr id="6" name="TextBox 5"/>
           <p:cNvSpPr txBox="1"/>
           <p:nvPr/>
         </p:nvSpPr>
@@ -19272,7 +18696,7 @@
             <a:r>
               <a:rPr sz="3000" b="1">
                 <a:solidFill>
-                  <a:srgbClr val="D3DDEA"/>
+                  <a:srgbClr val="D8DADD"/>
                 </a:solidFill>
                 <a:latin typeface="맑은 고딕"/>
                 <a:ea typeface="맑은 고딕"/>
@@ -19284,7 +18708,7 @@
       </p:sp>
       <p:sp>
         <p:nvSpPr>
-          <p:cNvPr id="9" name="TextBox 8"/>
+          <p:cNvPr id="7" name="TextBox 6"/>
           <p:cNvSpPr txBox="1"/>
           <p:nvPr/>
         </p:nvSpPr>
@@ -19315,7 +18739,7 @@
             <a:r>
               <a:rPr sz="1250" b="0">
                 <a:solidFill>
-                  <a:srgbClr val="6A7B92"/>
+                  <a:srgbClr val="767A7F"/>
                 </a:solidFill>
                 <a:latin typeface="맑은 고딕"/>
                 <a:ea typeface="맑은 고딕"/>
@@ -19327,7 +18751,7 @@
       </p:sp>
       <p:sp>
         <p:nvSpPr>
-          <p:cNvPr id="10" name="TextBox 9"/>
+          <p:cNvPr id="8" name="TextBox 7"/>
           <p:cNvSpPr txBox="1"/>
           <p:nvPr/>
         </p:nvSpPr>
@@ -19358,7 +18782,7 @@
             <a:r>
               <a:rPr sz="850" b="0">
                 <a:solidFill>
-                  <a:srgbClr val="ABB7C7"/>
+                  <a:srgbClr val="B2B5B9"/>
                 </a:solidFill>
                 <a:latin typeface="맑은 고딕"/>
                 <a:ea typeface="맑은 고딕"/>
@@ -19370,7 +18794,7 @@
       </p:sp>
       <p:sp>
         <p:nvSpPr>
-          <p:cNvPr id="11" name="Rounded Rectangle 10"/>
+          <p:cNvPr id="9" name="Rounded Rectangle 8"/>
           <p:cNvSpPr/>
           <p:nvPr/>
         </p:nvSpPr>
@@ -19387,10 +18811,10 @@
           <a:gradFill rotWithShape="1">
             <a:gsLst>
               <a:gs pos="0">
-                <a:srgbClr val="1B3A5F"/>
+                <a:srgbClr val="2A2E33"/>
               </a:gs>
               <a:gs pos="100000">
-                <a:srgbClr val="17456B"/>
+                <a:srgbClr val="4A4F55"/>
               </a:gs>
             </a:gsLst>
             <a:lin scaled="0" ang="14700000"/>
@@ -19400,7 +18824,7 @@
           </a:ln>
           <a:effectLst>
             <a:outerShdw blurRad="182880" dist="64008" dir="5400000" rotWithShape="0">
-              <a:srgbClr val="2A3B55">
+              <a:srgbClr val="000000">
                 <a:alpha val="38000"/>
               </a:srgbClr>
             </a:outerShdw>
@@ -19430,7 +18854,7 @@
       </p:sp>
       <p:sp>
         <p:nvSpPr>
-          <p:cNvPr id="12" name="TextBox 11"/>
+          <p:cNvPr id="10" name="TextBox 9"/>
           <p:cNvSpPr txBox="1"/>
           <p:nvPr/>
         </p:nvSpPr>
@@ -19481,7 +18905,7 @@
             <a:r>
               <a:rPr sz="1200" b="0">
                 <a:solidFill>
-                  <a:srgbClr val="D8E2EC"/>
+                  <a:srgbClr val="D5D7DA"/>
                 </a:solidFill>
                 <a:latin typeface="맑은 고딕"/>
                 <a:ea typeface="맑은 고딕"/>
@@ -19493,7 +18917,7 @@
       </p:sp>
       <p:sp>
         <p:nvSpPr>
-          <p:cNvPr id="13" name="Rounded Rectangle 12"/>
+          <p:cNvPr id="11" name="Rounded Rectangle 10"/>
           <p:cNvSpPr/>
           <p:nvPr/>
         </p:nvSpPr>
@@ -19512,12 +18936,12 @@
           </a:solidFill>
           <a:ln w="12700">
             <a:solidFill>
-              <a:srgbClr val="E4EAF2"/>
+              <a:srgbClr val="E4E6E9"/>
             </a:solidFill>
           </a:ln>
           <a:effectLst>
             <a:outerShdw blurRad="182880" dist="64008" dir="5400000" rotWithShape="0">
-              <a:srgbClr val="2A3B55">
+              <a:srgbClr val="000000">
                 <a:alpha val="30000"/>
               </a:srgbClr>
             </a:outerShdw>
@@ -19547,7 +18971,7 @@
       </p:sp>
       <p:sp>
         <p:nvSpPr>
-          <p:cNvPr id="14" name="TextBox 13"/>
+          <p:cNvPr id="12" name="TextBox 11"/>
           <p:cNvSpPr txBox="1"/>
           <p:nvPr/>
         </p:nvSpPr>
@@ -19578,7 +19002,7 @@
             <a:r>
               <a:rPr sz="1300" b="1">
                 <a:solidFill>
-                  <a:srgbClr val="17456B"/>
+                  <a:srgbClr val="33393F"/>
                 </a:solidFill>
                 <a:latin typeface="맑은 고딕"/>
                 <a:ea typeface="맑은 고딕"/>
@@ -19598,7 +19022,7 @@
             <a:r>
               <a:rPr sz="1100" b="0">
                 <a:solidFill>
-                  <a:srgbClr val="222E40"/>
+                  <a:srgbClr val="1C1C1E"/>
                 </a:solidFill>
                 <a:latin typeface="맑은 고딕"/>
                 <a:ea typeface="맑은 고딕"/>
@@ -19618,7 +19042,7 @@
             <a:r>
               <a:rPr sz="1100" b="0">
                 <a:solidFill>
-                  <a:srgbClr val="222E40"/>
+                  <a:srgbClr val="1C1C1E"/>
                 </a:solidFill>
                 <a:latin typeface="맑은 고딕"/>
                 <a:ea typeface="맑은 고딕"/>
@@ -19638,7 +19062,7 @@
             <a:r>
               <a:rPr sz="1100" b="0">
                 <a:solidFill>
-                  <a:srgbClr val="222E40"/>
+                  <a:srgbClr val="1C1C1E"/>
                 </a:solidFill>
                 <a:latin typeface="맑은 고딕"/>
                 <a:ea typeface="맑은 고딕"/>
@@ -19650,7 +19074,7 @@
       </p:sp>
       <p:sp>
         <p:nvSpPr>
-          <p:cNvPr id="15" name="Rounded Rectangle 14"/>
+          <p:cNvPr id="13" name="Rounded Rectangle 12"/>
           <p:cNvSpPr/>
           <p:nvPr/>
         </p:nvSpPr>
@@ -19669,12 +19093,12 @@
           </a:solidFill>
           <a:ln w="12700">
             <a:solidFill>
-              <a:srgbClr val="E4EAF2"/>
+              <a:srgbClr val="E4E6E9"/>
             </a:solidFill>
           </a:ln>
           <a:effectLst>
             <a:outerShdw blurRad="182880" dist="64008" dir="5400000" rotWithShape="0">
-              <a:srgbClr val="2A3B55">
+              <a:srgbClr val="000000">
                 <a:alpha val="30000"/>
               </a:srgbClr>
             </a:outerShdw>
@@ -19704,7 +19128,7 @@
       </p:sp>
       <p:sp>
         <p:nvSpPr>
-          <p:cNvPr id="16" name="TextBox 15"/>
+          <p:cNvPr id="14" name="TextBox 13"/>
           <p:cNvSpPr txBox="1"/>
           <p:nvPr/>
         </p:nvSpPr>
@@ -19735,7 +19159,7 @@
             <a:r>
               <a:rPr sz="1300" b="1">
                 <a:solidFill>
-                  <a:srgbClr val="17456B"/>
+                  <a:srgbClr val="33393F"/>
                 </a:solidFill>
                 <a:latin typeface="맑은 고딕"/>
                 <a:ea typeface="맑은 고딕"/>
@@ -19755,7 +19179,7 @@
             <a:r>
               <a:rPr sz="1150" b="0">
                 <a:solidFill>
-                  <a:srgbClr val="222E40"/>
+                  <a:srgbClr val="1C1C1E"/>
                 </a:solidFill>
                 <a:latin typeface="맑은 고딕"/>
                 <a:ea typeface="맑은 고딕"/>
@@ -19775,7 +19199,7 @@
             <a:r>
               <a:rPr sz="1150" b="0">
                 <a:solidFill>
-                  <a:srgbClr val="222E40"/>
+                  <a:srgbClr val="1C1C1E"/>
                 </a:solidFill>
                 <a:latin typeface="맑은 고딕"/>
                 <a:ea typeface="맑은 고딕"/>
@@ -19795,7 +19219,7 @@
             <a:r>
               <a:rPr sz="1150" b="0">
                 <a:solidFill>
-                  <a:srgbClr val="222E40"/>
+                  <a:srgbClr val="1C1C1E"/>
                 </a:solidFill>
                 <a:latin typeface="맑은 고딕"/>
                 <a:ea typeface="맑은 고딕"/>
@@ -19815,7 +19239,7 @@
             <a:r>
               <a:rPr sz="1150" b="0">
                 <a:solidFill>
-                  <a:srgbClr val="222E40"/>
+                  <a:srgbClr val="1C1C1E"/>
                 </a:solidFill>
                 <a:latin typeface="맑은 고딕"/>
                 <a:ea typeface="맑은 고딕"/>
@@ -19887,57 +19311,9 @@
           </a:p>
         </p:txBody>
       </p:sp>
-      <p:pic>
-        <p:nvPicPr>
-          <p:cNvPr id="3" name="Picture 2" descr="blob_blue.png"/>
-          <p:cNvPicPr>
-            <a:picLocks noChangeAspect="1"/>
-          </p:cNvPicPr>
-          <p:nvPr/>
-        </p:nvPicPr>
-        <p:blipFill>
-          <a:blip r:embed="rId2"/>
-          <a:stretch>
-            <a:fillRect/>
-          </a:stretch>
-        </p:blipFill>
-        <p:spPr>
-          <a:xfrm>
-            <a:off x="-3474720" y="3840480"/>
-            <a:ext cx="6583680" cy="6583680"/>
-          </a:xfrm>
-          <a:prstGeom prst="rect">
-            <a:avLst/>
-          </a:prstGeom>
-        </p:spPr>
-      </p:pic>
-      <p:pic>
-        <p:nvPicPr>
-          <p:cNvPr id="4" name="Picture 3" descr="blob_coral.png"/>
-          <p:cNvPicPr>
-            <a:picLocks noChangeAspect="1"/>
-          </p:cNvPicPr>
-          <p:nvPr/>
-        </p:nvPicPr>
-        <p:blipFill>
-          <a:blip r:embed="rId3"/>
-          <a:stretch>
-            <a:fillRect/>
-          </a:stretch>
-        </p:blipFill>
-        <p:spPr>
-          <a:xfrm>
-            <a:off x="8961120" y="-3291840"/>
-            <a:ext cx="6217920" cy="6217920"/>
-          </a:xfrm>
-          <a:prstGeom prst="rect">
-            <a:avLst/>
-          </a:prstGeom>
-        </p:spPr>
-      </p:pic>
-      <p:sp>
-        <p:nvSpPr>
-          <p:cNvPr id="5" name="Rounded Rectangle 4"/>
+      <p:sp>
+        <p:nvSpPr>
+          <p:cNvPr id="3" name="Rounded Rectangle 2"/>
           <p:cNvSpPr/>
           <p:nvPr/>
         </p:nvSpPr>
@@ -19954,10 +19330,10 @@
           <a:gradFill rotWithShape="1">
             <a:gsLst>
               <a:gs pos="0">
-                <a:srgbClr val="FF7A59"/>
+                <a:srgbClr val="3A3F45"/>
               </a:gs>
               <a:gs pos="100000">
-                <a:srgbClr val="FFB86B"/>
+                <a:srgbClr val="73787E"/>
               </a:gs>
             </a:gsLst>
             <a:lin scaled="0" ang="18900000"/>
@@ -19967,7 +19343,7 @@
           </a:ln>
           <a:effectLst>
             <a:outerShdw blurRad="109728" dist="36576" dir="5400000" rotWithShape="0">
-              <a:srgbClr val="C24E30">
+              <a:srgbClr val="000000">
                 <a:alpha val="35000"/>
               </a:srgbClr>
             </a:outerShdw>
@@ -19997,7 +19373,7 @@
       </p:sp>
       <p:sp>
         <p:nvSpPr>
-          <p:cNvPr id="6" name="TextBox 5"/>
+          <p:cNvPr id="4" name="TextBox 3"/>
           <p:cNvSpPr txBox="1"/>
           <p:nvPr/>
         </p:nvSpPr>
@@ -20028,7 +19404,7 @@
             <a:r>
               <a:rPr sz="2150" b="1">
                 <a:solidFill>
-                  <a:srgbClr val="222E40"/>
+                  <a:srgbClr val="1C1C1E"/>
                 </a:solidFill>
                 <a:latin typeface="맑은 고딕"/>
                 <a:ea typeface="맑은 고딕"/>
@@ -20038,33 +19414,61 @@
           </a:p>
         </p:txBody>
       </p:sp>
-      <p:pic>
-        <p:nvPicPr>
-          <p:cNvPr id="7" name="Picture 6" descr="glow_bar.png"/>
-          <p:cNvPicPr>
-            <a:picLocks noChangeAspect="1"/>
-          </p:cNvPicPr>
-          <p:nvPr/>
-        </p:nvPicPr>
-        <p:blipFill>
-          <a:blip r:embed="rId4"/>
-          <a:stretch>
-            <a:fillRect/>
-          </a:stretch>
-        </p:blipFill>
+      <p:sp>
+        <p:nvSpPr>
+          <p:cNvPr id="5" name="Rectangle 4"/>
+          <p:cNvSpPr/>
+          <p:nvPr/>
+        </p:nvSpPr>
         <p:spPr>
           <a:xfrm>
             <a:off x="521207" y="969264"/>
-            <a:ext cx="4206240" cy="50292"/>
+            <a:ext cx="4206240" cy="27432"/>
           </a:xfrm>
           <a:prstGeom prst="rect">
             <a:avLst/>
           </a:prstGeom>
-        </p:spPr>
-      </p:pic>
-      <p:sp>
-        <p:nvSpPr>
-          <p:cNvPr id="8" name="TextBox 7"/>
+          <a:gradFill rotWithShape="1">
+            <a:gsLst>
+              <a:gs pos="0">
+                <a:srgbClr val="2A2E33"/>
+              </a:gs>
+              <a:gs pos="100000">
+                <a:srgbClr val="FFFFFF"/>
+              </a:gs>
+            </a:gsLst>
+            <a:lin scaled="0" ang="0"/>
+          </a:gradFill>
+          <a:ln>
+            <a:noFill/>
+          </a:ln>
+          <a:effectLst/>
+        </p:spPr>
+        <p:style>
+          <a:lnRef idx="1">
+            <a:schemeClr val="accent1"/>
+          </a:lnRef>
+          <a:fillRef idx="3">
+            <a:schemeClr val="accent1"/>
+          </a:fillRef>
+          <a:effectRef idx="2">
+            <a:schemeClr val="accent1"/>
+          </a:effectRef>
+          <a:fontRef idx="minor">
+            <a:schemeClr val="lt1"/>
+          </a:fontRef>
+        </p:style>
+        <p:txBody>
+          <a:bodyPr rtlCol="0" anchor="ctr"/>
+          <a:lstStyle/>
+          <a:p>
+            <a:pPr algn="ctr"/>
+          </a:p>
+        </p:txBody>
+      </p:sp>
+      <p:sp>
+        <p:nvSpPr>
+          <p:cNvPr id="6" name="TextBox 5"/>
           <p:cNvSpPr txBox="1"/>
           <p:nvPr/>
         </p:nvSpPr>
@@ -20095,7 +19499,7 @@
             <a:r>
               <a:rPr sz="3000" b="1">
                 <a:solidFill>
-                  <a:srgbClr val="D3DDEA"/>
+                  <a:srgbClr val="D8DADD"/>
                 </a:solidFill>
                 <a:latin typeface="맑은 고딕"/>
                 <a:ea typeface="맑은 고딕"/>
@@ -20107,7 +19511,7 @@
       </p:sp>
       <p:sp>
         <p:nvSpPr>
-          <p:cNvPr id="9" name="TextBox 8"/>
+          <p:cNvPr id="7" name="TextBox 6"/>
           <p:cNvSpPr txBox="1"/>
           <p:nvPr/>
         </p:nvSpPr>
@@ -20138,7 +19542,7 @@
             <a:r>
               <a:rPr sz="850" b="0">
                 <a:solidFill>
-                  <a:srgbClr val="ABB7C7"/>
+                  <a:srgbClr val="B2B5B9"/>
                 </a:solidFill>
                 <a:latin typeface="맑은 고딕"/>
                 <a:ea typeface="맑은 고딕"/>
@@ -20150,7 +19554,7 @@
       </p:sp>
       <p:graphicFrame>
         <p:nvGraphicFramePr>
-          <p:cNvPr id="10" name="Table 9"/>
+          <p:cNvPr id="8" name="Table 7"/>
           <p:cNvGraphicFramePr>
             <a:graphicFrameLocks noGrp="1"/>
           </p:cNvGraphicFramePr>
@@ -20271,7 +19675,7 @@
                       <a:r>
                         <a:rPr sz="1100" b="1">
                           <a:solidFill>
-                            <a:srgbClr val="E85D42"/>
+                            <a:srgbClr val="000000"/>
                           </a:solidFill>
                           <a:latin typeface="맑은 고딕"/>
                           <a:ea typeface="맑은 고딕"/>
@@ -20282,7 +19686,7 @@
                   </a:txBody>
                   <a:tcPr marT="27432" marB="27432" marL="73152" marR="73152" anchor="ctr">
                     <a:solidFill>
-                      <a:srgbClr val="FFEDE6"/>
+                      <a:srgbClr val="E3E5E8"/>
                     </a:solidFill>
                   </a:tcPr>
                 </a:tc>
@@ -20299,7 +19703,7 @@
                       <a:r>
                         <a:rPr sz="1100" b="1">
                           <a:solidFill>
-                            <a:srgbClr val="E85D42"/>
+                            <a:srgbClr val="000000"/>
                           </a:solidFill>
                           <a:latin typeface="맑은 고딕"/>
                           <a:ea typeface="맑은 고딕"/>
@@ -20310,7 +19714,7 @@
                   </a:txBody>
                   <a:tcPr marT="27432" marB="27432" marL="73152" marR="73152" anchor="ctr">
                     <a:solidFill>
-                      <a:srgbClr val="FFEDE6"/>
+                      <a:srgbClr val="E3E5E8"/>
                     </a:solidFill>
                   </a:tcPr>
                 </a:tc>
@@ -20327,7 +19731,7 @@
                       <a:r>
                         <a:rPr sz="1100" b="1">
                           <a:solidFill>
-                            <a:srgbClr val="E85D42"/>
+                            <a:srgbClr val="000000"/>
                           </a:solidFill>
                           <a:latin typeface="맑은 고딕"/>
                           <a:ea typeface="맑은 고딕"/>
@@ -20338,7 +19742,7 @@
                   </a:txBody>
                   <a:tcPr marT="27432" marB="27432" marL="73152" marR="73152" anchor="ctr">
                     <a:solidFill>
-                      <a:srgbClr val="FFEDE6"/>
+                      <a:srgbClr val="E3E5E8"/>
                     </a:solidFill>
                   </a:tcPr>
                 </a:tc>
@@ -20357,7 +19761,7 @@
                       <a:r>
                         <a:rPr sz="1100" b="0">
                           <a:solidFill>
-                            <a:srgbClr val="222E40"/>
+                            <a:srgbClr val="1C1C1E"/>
                           </a:solidFill>
                           <a:latin typeface="맑은 고딕"/>
                           <a:ea typeface="맑은 고딕"/>
@@ -20368,7 +19772,7 @@
                   </a:txBody>
                   <a:tcPr marT="27432" marB="27432" marL="73152" marR="73152" anchor="ctr">
                     <a:solidFill>
-                      <a:srgbClr val="F5F8FC"/>
+                      <a:srgbClr val="F6F7F8"/>
                     </a:solidFill>
                   </a:tcPr>
                 </a:tc>
@@ -20385,7 +19789,7 @@
                       <a:r>
                         <a:rPr sz="1100" b="0">
                           <a:solidFill>
-                            <a:srgbClr val="222E40"/>
+                            <a:srgbClr val="1C1C1E"/>
                           </a:solidFill>
                           <a:latin typeface="맑은 고딕"/>
                           <a:ea typeface="맑은 고딕"/>
@@ -20396,7 +19800,7 @@
                   </a:txBody>
                   <a:tcPr marT="27432" marB="27432" marL="73152" marR="73152" anchor="ctr">
                     <a:solidFill>
-                      <a:srgbClr val="F5F8FC"/>
+                      <a:srgbClr val="F6F7F8"/>
                     </a:solidFill>
                   </a:tcPr>
                 </a:tc>
@@ -20413,7 +19817,7 @@
                       <a:r>
                         <a:rPr sz="1100" b="0">
                           <a:solidFill>
-                            <a:srgbClr val="222E40"/>
+                            <a:srgbClr val="1C1C1E"/>
                           </a:solidFill>
                           <a:latin typeface="맑은 고딕"/>
                           <a:ea typeface="맑은 고딕"/>
@@ -20424,7 +19828,7 @@
                   </a:txBody>
                   <a:tcPr marT="27432" marB="27432" marL="73152" marR="73152" anchor="ctr">
                     <a:solidFill>
-                      <a:srgbClr val="F5F8FC"/>
+                      <a:srgbClr val="F6F7F8"/>
                     </a:solidFill>
                   </a:tcPr>
                 </a:tc>
@@ -20435,7 +19839,7 @@
       </p:graphicFrame>
       <p:sp>
         <p:nvSpPr>
-          <p:cNvPr id="11" name="Rounded Rectangle 10"/>
+          <p:cNvPr id="9" name="Rounded Rectangle 8"/>
           <p:cNvSpPr/>
           <p:nvPr/>
         </p:nvSpPr>
@@ -20454,12 +19858,12 @@
           </a:solidFill>
           <a:ln w="12700">
             <a:solidFill>
-              <a:srgbClr val="E4EAF2"/>
+              <a:srgbClr val="E4E6E9"/>
             </a:solidFill>
           </a:ln>
           <a:effectLst>
             <a:outerShdw blurRad="182880" dist="64008" dir="5400000" rotWithShape="0">
-              <a:srgbClr val="2A3B55">
+              <a:srgbClr val="000000">
                 <a:alpha val="30000"/>
               </a:srgbClr>
             </a:outerShdw>
@@ -20489,7 +19893,7 @@
       </p:sp>
       <p:sp>
         <p:nvSpPr>
-          <p:cNvPr id="12" name="TextBox 11"/>
+          <p:cNvPr id="10" name="TextBox 9"/>
           <p:cNvSpPr txBox="1"/>
           <p:nvPr/>
         </p:nvSpPr>
@@ -20520,7 +19924,7 @@
             <a:r>
               <a:rPr sz="1300" b="1">
                 <a:solidFill>
-                  <a:srgbClr val="17456B"/>
+                  <a:srgbClr val="33393F"/>
                 </a:solidFill>
                 <a:latin typeface="맑은 고딕"/>
                 <a:ea typeface="맑은 고딕"/>
@@ -20540,7 +19944,7 @@
             <a:r>
               <a:rPr sz="1100" b="0">
                 <a:solidFill>
-                  <a:srgbClr val="222E40"/>
+                  <a:srgbClr val="1C1C1E"/>
                 </a:solidFill>
                 <a:latin typeface="맑은 고딕"/>
                 <a:ea typeface="맑은 고딕"/>
@@ -20560,7 +19964,7 @@
             <a:r>
               <a:rPr sz="1100" b="0">
                 <a:solidFill>
-                  <a:srgbClr val="222E40"/>
+                  <a:srgbClr val="1C1C1E"/>
                 </a:solidFill>
                 <a:latin typeface="맑은 고딕"/>
                 <a:ea typeface="맑은 고딕"/>
@@ -20580,7 +19984,7 @@
             <a:r>
               <a:rPr sz="1100" b="0">
                 <a:solidFill>
-                  <a:srgbClr val="222E40"/>
+                  <a:srgbClr val="1C1C1E"/>
                 </a:solidFill>
                 <a:latin typeface="맑은 고딕"/>
                 <a:ea typeface="맑은 고딕"/>
@@ -20600,7 +20004,7 @@
             <a:r>
               <a:rPr sz="1100" b="0">
                 <a:solidFill>
-                  <a:srgbClr val="222E40"/>
+                  <a:srgbClr val="1C1C1E"/>
                 </a:solidFill>
                 <a:latin typeface="맑은 고딕"/>
                 <a:ea typeface="맑은 고딕"/>
@@ -20612,7 +20016,7 @@
       </p:sp>
       <p:sp>
         <p:nvSpPr>
-          <p:cNvPr id="13" name="Rounded Rectangle 12"/>
+          <p:cNvPr id="11" name="Rounded Rectangle 10"/>
           <p:cNvSpPr/>
           <p:nvPr/>
         </p:nvSpPr>
@@ -20631,12 +20035,12 @@
           </a:solidFill>
           <a:ln w="12700">
             <a:solidFill>
-              <a:srgbClr val="E4EAF2"/>
+              <a:srgbClr val="E4E6E9"/>
             </a:solidFill>
           </a:ln>
           <a:effectLst>
             <a:outerShdw blurRad="182880" dist="64008" dir="5400000" rotWithShape="0">
-              <a:srgbClr val="2A3B55">
+              <a:srgbClr val="000000">
                 <a:alpha val="30000"/>
               </a:srgbClr>
             </a:outerShdw>
@@ -20666,7 +20070,7 @@
       </p:sp>
       <p:sp>
         <p:nvSpPr>
-          <p:cNvPr id="14" name="TextBox 13"/>
+          <p:cNvPr id="12" name="TextBox 11"/>
           <p:cNvSpPr txBox="1"/>
           <p:nvPr/>
         </p:nvSpPr>
@@ -20697,7 +20101,7 @@
             <a:r>
               <a:rPr sz="1300" b="1">
                 <a:solidFill>
-                  <a:srgbClr val="17456B"/>
+                  <a:srgbClr val="33393F"/>
                 </a:solidFill>
                 <a:latin typeface="맑은 고딕"/>
                 <a:ea typeface="맑은 고딕"/>
@@ -20717,7 +20121,7 @@
             <a:r>
               <a:rPr sz="1100" b="0">
                 <a:solidFill>
-                  <a:srgbClr val="222E40"/>
+                  <a:srgbClr val="1C1C1E"/>
                 </a:solidFill>
                 <a:latin typeface="맑은 고딕"/>
                 <a:ea typeface="맑은 고딕"/>
@@ -20737,7 +20141,7 @@
             <a:r>
               <a:rPr sz="1100" b="0">
                 <a:solidFill>
-                  <a:srgbClr val="222E40"/>
+                  <a:srgbClr val="1C1C1E"/>
                 </a:solidFill>
                 <a:latin typeface="맑은 고딕"/>
                 <a:ea typeface="맑은 고딕"/>
@@ -20757,7 +20161,7 @@
             <a:r>
               <a:rPr sz="1100" b="0">
                 <a:solidFill>
-                  <a:srgbClr val="222E40"/>
+                  <a:srgbClr val="1C1C1E"/>
                 </a:solidFill>
                 <a:latin typeface="맑은 고딕"/>
                 <a:ea typeface="맑은 고딕"/>
@@ -20777,7 +20181,7 @@
             <a:r>
               <a:rPr sz="1100" b="0">
                 <a:solidFill>
-                  <a:srgbClr val="222E40"/>
+                  <a:srgbClr val="1C1C1E"/>
                 </a:solidFill>
                 <a:latin typeface="맑은 고딕"/>
                 <a:ea typeface="맑은 고딕"/>

--- a/04_제출물/데이터분석_결과보고서.pptx
+++ b/04_제출물/데이터분석_결과보고서.pptx
@@ -24,6 +24,7 @@
     <p:sldId id="272" r:id="rId23"/>
     <p:sldId id="273" r:id="rId24"/>
     <p:sldId id="274" r:id="rId25"/>
+    <p:sldId id="275" r:id="rId26"/>
   </p:sldIdLst>
   <p:sldSz cx="12191695" cy="6858000" type="screen4x3"/>
   <p:notesSz cx="6858000" cy="9144000"/>
@@ -3588,7 +3589,7 @@
                 <a:latin typeface="맑은 고딕"/>
                 <a:ea typeface="맑은 고딕"/>
               </a:rPr>
-              <a:t>"60분 안에 갈 수 있으면 취약이 아니지 않은가" — 정면 대응</a:t>
+              <a:t>감사 I-② 걸러지는 지역 — 공급 공백형 사각지대</a:t>
             </a:r>
           </a:p>
         </p:txBody>
@@ -3731,20 +3732,305 @@
           </a:p>
         </p:txBody>
       </p:sp>
-      <p:sp>
-        <p:nvSpPr>
-          <p:cNvPr id="8" name="Rounded Rectangle 7"/>
+      <p:graphicFrame>
+        <p:nvGraphicFramePr>
+          <p:cNvPr id="8" name="Table 7"/>
+          <p:cNvGraphicFramePr>
+            <a:graphicFrameLocks noGrp="1"/>
+          </p:cNvGraphicFramePr>
+          <p:nvPr/>
+        </p:nvGraphicFramePr>
+        <p:xfrm>
+          <a:off x="502920" y="1280160"/>
+          <a:ext cx="11292840" cy="1536192"/>
+        </p:xfrm>
+        <a:graphic>
+          <a:graphicData uri="http://schemas.openxmlformats.org/drawingml/2006/table">
+            <a:tbl>
+              <a:tblPr>
+                <a:tableStyleId>{5C22544A-7EE6-4342-B048-85BDC9FD1C3A}</a:tableStyleId>
+              </a:tblPr>
+              <a:tblGrid>
+                <a:gridCol w="3291840"/>
+                <a:gridCol w="4846320"/>
+                <a:gridCol w="3154680"/>
+              </a:tblGrid>
+              <a:tr h="512064">
+                <a:tc>
+                  <a:txBody>
+                    <a:bodyPr/>
+                    <a:lstStyle/>
+                    <a:p>
+                      <a:pPr>
+                        <a:lnSpc>
+                          <a:spcPct val="105000"/>
+                        </a:lnSpc>
+                      </a:pPr>
+                      <a:r>
+                        <a:rPr sz="1150" b="1">
+                          <a:solidFill>
+                            <a:srgbClr val="FFFFFF"/>
+                          </a:solidFill>
+                          <a:latin typeface="맑은 고딕"/>
+                          <a:ea typeface="맑은 고딕"/>
+                        </a:rPr>
+                        <a:t>층위</a:t>
+                      </a:r>
+                    </a:p>
+                  </a:txBody>
+                  <a:tcPr marT="27432" marB="27432" marL="73152" marR="73152" anchor="ctr">
+                    <a:solidFill>
+                      <a:srgbClr val="33393F"/>
+                    </a:solidFill>
+                  </a:tcPr>
+                </a:tc>
+                <a:tc>
+                  <a:txBody>
+                    <a:bodyPr/>
+                    <a:lstStyle/>
+                    <a:p>
+                      <a:pPr>
+                        <a:lnSpc>
+                          <a:spcPct val="105000"/>
+                        </a:lnSpc>
+                      </a:pPr>
+                      <a:r>
+                        <a:rPr sz="1150" b="1">
+                          <a:solidFill>
+                            <a:srgbClr val="FFFFFF"/>
+                          </a:solidFill>
+                          <a:latin typeface="맑은 고딕"/>
+                          <a:ea typeface="맑은 고딕"/>
+                        </a:rPr>
+                        <a:t>지역</a:t>
+                      </a:r>
+                    </a:p>
+                  </a:txBody>
+                  <a:tcPr marT="27432" marB="27432" marL="73152" marR="73152" anchor="ctr">
+                    <a:solidFill>
+                      <a:srgbClr val="33393F"/>
+                    </a:solidFill>
+                  </a:tcPr>
+                </a:tc>
+                <a:tc>
+                  <a:txBody>
+                    <a:bodyPr/>
+                    <a:lstStyle/>
+                    <a:p>
+                      <a:pPr>
+                        <a:lnSpc>
+                          <a:spcPct val="105000"/>
+                        </a:lnSpc>
+                      </a:pPr>
+                      <a:r>
+                        <a:rPr sz="1150" b="1">
+                          <a:solidFill>
+                            <a:srgbClr val="FFFFFF"/>
+                          </a:solidFill>
+                          <a:latin typeface="맑은 고딕"/>
+                          <a:ea typeface="맑은 고딕"/>
+                        </a:rPr>
+                        <a:t>상태</a:t>
+                      </a:r>
+                    </a:p>
+                  </a:txBody>
+                  <a:tcPr marT="27432" marB="27432" marL="73152" marR="73152" anchor="ctr">
+                    <a:solidFill>
+                      <a:srgbClr val="33393F"/>
+                    </a:solidFill>
+                  </a:tcPr>
+                </a:tc>
+              </a:tr>
+              <a:tr h="512064">
+                <a:tc>
+                  <a:txBody>
+                    <a:bodyPr/>
+                    <a:lstStyle/>
+                    <a:p>
+                      <a:pPr>
+                        <a:lnSpc>
+                          <a:spcPct val="105000"/>
+                        </a:lnSpc>
+                      </a:pPr>
+                      <a:r>
+                        <a:rPr sz="1100" b="1">
+                          <a:solidFill>
+                            <a:srgbClr val="000000"/>
+                          </a:solidFill>
+                          <a:latin typeface="맑은 고딕"/>
+                          <a:ea typeface="맑은 고딕"/>
+                        </a:rPr>
+                        <a:t>완전 사각 (A/B/C 어디에도 없음)</a:t>
+                      </a:r>
+                    </a:p>
+                  </a:txBody>
+                  <a:tcPr marT="27432" marB="27432" marL="73152" marR="73152" anchor="ctr">
+                    <a:solidFill>
+                      <a:srgbClr val="E3E5E8"/>
+                    </a:solidFill>
+                  </a:tcPr>
+                </a:tc>
+                <a:tc>
+                  <a:txBody>
+                    <a:bodyPr/>
+                    <a:lstStyle/>
+                    <a:p>
+                      <a:pPr>
+                        <a:lnSpc>
+                          <a:spcPct val="105000"/>
+                        </a:lnSpc>
+                      </a:pPr>
+                      <a:r>
+                        <a:rPr sz="1100" b="1">
+                          <a:solidFill>
+                            <a:srgbClr val="000000"/>
+                          </a:solidFill>
+                          <a:latin typeface="맑은 고딕"/>
+                          <a:ea typeface="맑은 고딕"/>
+                        </a:rPr>
+                        <a:t>의왕(전문의 0.6명/10만)·과천·경기광주(인구 39만)·울주·울산북구</a:t>
+                      </a:r>
+                    </a:p>
+                  </a:txBody>
+                  <a:tcPr marT="27432" marB="27432" marL="73152" marR="73152" anchor="ctr">
+                    <a:solidFill>
+                      <a:srgbClr val="E3E5E8"/>
+                    </a:solidFill>
+                  </a:tcPr>
+                </a:tc>
+                <a:tc>
+                  <a:txBody>
+                    <a:bodyPr/>
+                    <a:lstStyle/>
+                    <a:p>
+                      <a:pPr>
+                        <a:lnSpc>
+                          <a:spcPct val="105000"/>
+                        </a:lnSpc>
+                      </a:pPr>
+                      <a:r>
+                        <a:rPr sz="1100" b="1">
+                          <a:solidFill>
+                            <a:srgbClr val="000000"/>
+                          </a:solidFill>
+                          <a:latin typeface="맑은 고딕"/>
+                          <a:ea typeface="맑은 고딕"/>
+                        </a:rPr>
+                        <a:t>분만실 없음 + 어떤 등급·자격도 없음</a:t>
+                      </a:r>
+                    </a:p>
+                  </a:txBody>
+                  <a:tcPr marT="27432" marB="27432" marL="73152" marR="73152" anchor="ctr">
+                    <a:solidFill>
+                      <a:srgbClr val="E3E5E8"/>
+                    </a:solidFill>
+                  </a:tcPr>
+                </a:tc>
+              </a:tr>
+              <a:tr h="512064">
+                <a:tc>
+                  <a:txBody>
+                    <a:bodyPr/>
+                    <a:lstStyle/>
+                    <a:p>
+                      <a:pPr>
+                        <a:lnSpc>
+                          <a:spcPct val="105000"/>
+                        </a:lnSpc>
+                      </a:pPr>
+                      <a:r>
+                        <a:rPr sz="1100" b="0">
+                          <a:solidFill>
+                            <a:srgbClr val="1C1C1E"/>
+                          </a:solidFill>
+                          <a:latin typeface="맑은 고딕"/>
+                          <a:ea typeface="맑은 고딕"/>
+                        </a:rPr>
+                        <a:t>C등급 인지 (하위 사업 자격은 있음)</a:t>
+                      </a:r>
+                    </a:p>
+                  </a:txBody>
+                  <a:tcPr marT="27432" marB="27432" marL="73152" marR="73152" anchor="ctr">
+                    <a:solidFill>
+                      <a:srgbClr val="F6F7F8"/>
+                    </a:solidFill>
+                  </a:tcPr>
+                </a:tc>
+                <a:tc>
+                  <a:txBody>
+                    <a:bodyPr/>
+                    <a:lstStyle/>
+                    <a:p>
+                      <a:pPr>
+                        <a:lnSpc>
+                          <a:spcPct val="105000"/>
+                        </a:lnSpc>
+                      </a:pPr>
+                      <a:r>
+                        <a:rPr sz="1100" b="0">
+                          <a:solidFill>
+                            <a:srgbClr val="1C1C1E"/>
+                          </a:solidFill>
+                          <a:latin typeface="맑은 고딕"/>
+                          <a:ea typeface="맑은 고딕"/>
+                        </a:rPr>
+                        <a:t>계룡·장성·예천 등</a:t>
+                      </a:r>
+                    </a:p>
+                  </a:txBody>
+                  <a:tcPr marT="27432" marB="27432" marL="73152" marR="73152" anchor="ctr">
+                    <a:solidFill>
+                      <a:srgbClr val="F6F7F8"/>
+                    </a:solidFill>
+                  </a:tcPr>
+                </a:tc>
+                <a:tc>
+                  <a:txBody>
+                    <a:bodyPr/>
+                    <a:lstStyle/>
+                    <a:p>
+                      <a:pPr>
+                        <a:lnSpc>
+                          <a:spcPct val="105000"/>
+                        </a:lnSpc>
+                      </a:pPr>
+                      <a:r>
+                        <a:rPr sz="1100" b="0">
+                          <a:solidFill>
+                            <a:srgbClr val="1C1C1E"/>
+                          </a:solidFill>
+                          <a:latin typeface="맑은 고딕"/>
+                          <a:ea typeface="맑은 고딕"/>
+                        </a:rPr>
+                        <a:t>설치 외 자격으로는 제도가 포착</a:t>
+                      </a:r>
+                    </a:p>
+                  </a:txBody>
+                  <a:tcPr marT="27432" marB="27432" marL="73152" marR="73152" anchor="ctr">
+                    <a:solidFill>
+                      <a:srgbClr val="F6F7F8"/>
+                    </a:solidFill>
+                  </a:tcPr>
+                </a:tc>
+              </a:tr>
+            </a:tbl>
+          </a:graphicData>
+        </a:graphic>
+      </p:graphicFrame>
+      <p:sp>
+        <p:nvSpPr>
+          <p:cNvPr id="9" name="Rounded Rectangle 8"/>
           <p:cNvSpPr/>
           <p:nvPr/>
         </p:nvSpPr>
         <p:spPr>
           <a:xfrm>
-            <a:off x="502920" y="1280160"/>
-            <a:ext cx="11292840" cy="914400"/>
+            <a:off x="502920" y="3108960"/>
+            <a:ext cx="5532120" cy="2331720"/>
           </a:xfrm>
           <a:prstGeom prst="roundRect">
             <a:avLst>
-              <a:gd name="adj" fmla="val 9000"/>
+              <a:gd name="adj" fmla="val 3529"/>
             </a:avLst>
           </a:prstGeom>
           <a:solidFill>
@@ -3787,14 +4073,14 @@
       </p:sp>
       <p:sp>
         <p:nvSpPr>
-          <p:cNvPr id="9" name="TextBox 8"/>
+          <p:cNvPr id="10" name="TextBox 9"/>
           <p:cNvSpPr txBox="1"/>
           <p:nvPr/>
         </p:nvSpPr>
         <p:spPr>
           <a:xfrm>
-            <a:off x="685800" y="1408176"/>
-            <a:ext cx="10927080" cy="658368"/>
+            <a:off x="685800" y="3236976"/>
+            <a:ext cx="5166359" cy="2075687"/>
           </a:xfrm>
           <a:prstGeom prst="rect">
             <a:avLst/>
@@ -3823,7 +4109,7 @@
                 <a:latin typeface="맑은 고딕"/>
                 <a:ea typeface="맑은 고딕"/>
               </a:rPr>
-              <a:t>반론을 인정하며 시작한다</a:t>
+              <a:t>소아청소년과 — 같은 구조의 극단 사례</a:t>
             </a:r>
           </a:p>
           <a:p>
@@ -3836,32 +4122,92 @@
               </a:spcAft>
             </a:pPr>
             <a:r>
-              <a:rPr sz="1150" b="0">
+              <a:rPr sz="1100" b="0">
                 <a:solidFill>
                   <a:srgbClr val="1C1C1E"/>
                 </a:solidFill>
                 <a:latin typeface="맑은 고딕"/>
                 <a:ea typeface="맑은 고딕"/>
               </a:rPr>
-              <a:t>• 현행 정의(도달 가능성) 안에서 이 반론은 옳다 — 본 연구는 정의를 부정하지 않고, 정의가 한 축만 잰다고 주장한다</a:t>
-            </a:r>
-          </a:p>
-        </p:txBody>
-      </p:sp>
-      <p:sp>
-        <p:nvSpPr>
-          <p:cNvPr id="10" name="Rounded Rectangle 9"/>
+              <a:t>• 거리 통과 ∧ 공급 공백 ∧ 관내 이용 0의 미지정 5곳(예산·함안·장성·증평·담양)</a:t>
+            </a:r>
+          </a:p>
+          <a:p>
+            <a:pPr marL="160020" indent="-160020">
+              <a:lnSpc>
+                <a:spcPct val="114000"/>
+              </a:lnSpc>
+              <a:spcAft>
+                <a:spcPts val="200"/>
+              </a:spcAft>
+            </a:pPr>
+            <a:r>
+              <a:rPr sz="1100" b="0">
+                <a:solidFill>
+                  <a:srgbClr val="1C1C1E"/>
+                </a:solidFill>
+                <a:latin typeface="맑은 고딕"/>
+                <a:ea typeface="맑은 고딕"/>
+              </a:rPr>
+              <a:t>• 소아 입원 5,689건 전량(100%)이 관외 유출</a:t>
+            </a:r>
+          </a:p>
+          <a:p>
+            <a:pPr marL="160020" indent="-160020">
+              <a:lnSpc>
+                <a:spcPct val="114000"/>
+              </a:lnSpc>
+              <a:spcAft>
+                <a:spcPts val="200"/>
+              </a:spcAft>
+            </a:pPr>
+            <a:r>
+              <a:rPr sz="1100" b="0">
+                <a:solidFill>
+                  <a:srgbClr val="1C1C1E"/>
+                </a:solidFill>
+                <a:latin typeface="맑은 고딕"/>
+                <a:ea typeface="맑은 고딕"/>
+              </a:rPr>
+              <a:t>• 중증 이송 반론은 동급(의원+병원+종합) 유출 분리로 통제 — 5곳 모두 전국 중앙값 이상, 증평 96.9%</a:t>
+            </a:r>
+          </a:p>
+          <a:p>
+            <a:pPr marL="160020" indent="-160020">
+              <a:lnSpc>
+                <a:spcPct val="114000"/>
+              </a:lnSpc>
+              <a:spcAft>
+                <a:spcPts val="200"/>
+              </a:spcAft>
+            </a:pPr>
+            <a:r>
+              <a:rPr sz="1100" b="0">
+                <a:solidFill>
+                  <a:srgbClr val="1C1C1E"/>
+                </a:solidFill>
+                <a:latin typeface="맑은 고딕"/>
+                <a:ea typeface="맑은 고딕"/>
+              </a:rPr>
+              <a:t>• 장성군은 소아·분만·투석 3분야 동시 공백</a:t>
+            </a:r>
+          </a:p>
+        </p:txBody>
+      </p:sp>
+      <p:sp>
+        <p:nvSpPr>
+          <p:cNvPr id="11" name="Rounded Rectangle 10"/>
           <p:cNvSpPr/>
           <p:nvPr/>
         </p:nvSpPr>
         <p:spPr>
           <a:xfrm>
-            <a:off x="502920" y="2468880"/>
-            <a:ext cx="3611880" cy="2743200"/>
+            <a:off x="6263640" y="3108960"/>
+            <a:ext cx="5532120" cy="2331720"/>
           </a:xfrm>
           <a:prstGeom prst="roundRect">
             <a:avLst>
-              <a:gd name="adj" fmla="val 3000"/>
+              <a:gd name="adj" fmla="val 3529"/>
             </a:avLst>
           </a:prstGeom>
           <a:solidFill>
@@ -3904,14 +4250,14 @@
       </p:sp>
       <p:sp>
         <p:nvSpPr>
-          <p:cNvPr id="11" name="TextBox 10"/>
+          <p:cNvPr id="12" name="TextBox 11"/>
           <p:cNvSpPr txBox="1"/>
           <p:nvPr/>
         </p:nvSpPr>
         <p:spPr>
           <a:xfrm>
-            <a:off x="685800" y="2596896"/>
-            <a:ext cx="3246120" cy="2487168"/>
+            <a:off x="6446520" y="3236976"/>
+            <a:ext cx="5166359" cy="2075687"/>
           </a:xfrm>
           <a:prstGeom prst="rect">
             <a:avLst/>
@@ -3940,7 +4286,7 @@
                 <a:latin typeface="맑은 고딕"/>
                 <a:ea typeface="맑은 고딕"/>
               </a:rPr>
-              <a:t>① 분만은 9개월의 과정</a:t>
+              <a:t>배제 메커니즘 — TRI 정의의 구조적 맹점</a:t>
             </a:r>
           </a:p>
           <a:p>
@@ -3960,7 +4306,7 @@
                 <a:latin typeface="맑은 고딕"/>
                 <a:ea typeface="맑은 고딕"/>
               </a:rPr>
-              <a:t>• 산전진찰 10여 회 + 산후·신생아 관리 — 관내 공급 0이면 전 과정이 원정, 부담은 매회 누적</a:t>
+              <a:t>• TRI는 관내/관외 구분 없이 "60분 내 이용"만 집계</a:t>
             </a:r>
           </a:p>
           <a:p>
@@ -3980,112 +4326,35 @@
                 <a:latin typeface="맑은 고딕"/>
                 <a:ea typeface="맑은 고딕"/>
               </a:rPr>
-              <a:t>• 정부가 "외래 산부인과"(산전진찰 전용) 사업을 따로 두는 것 자체가 이 구분의 제도적 인정</a:t>
-            </a:r>
-          </a:p>
-        </p:txBody>
-      </p:sp>
-      <p:sp>
-        <p:nvSpPr>
-          <p:cNvPr id="12" name="Rounded Rectangle 11"/>
-          <p:cNvSpPr/>
-          <p:nvPr/>
-        </p:nvSpPr>
-        <p:spPr>
-          <a:xfrm>
-            <a:off x="4343400" y="2468880"/>
-            <a:ext cx="3611880" cy="2743200"/>
-          </a:xfrm>
-          <a:prstGeom prst="roundRect">
-            <a:avLst>
-              <a:gd name="adj" fmla="val 3000"/>
-            </a:avLst>
-          </a:prstGeom>
-          <a:solidFill>
-            <a:srgbClr val="FFFFFF"/>
-          </a:solidFill>
-          <a:ln w="12700">
-            <a:solidFill>
-              <a:srgbClr val="E4E6E9"/>
-            </a:solidFill>
-          </a:ln>
-          <a:effectLst>
-            <a:outerShdw blurRad="182880" dist="64008" dir="5400000" rotWithShape="0">
-              <a:srgbClr val="000000">
-                <a:alpha val="30000"/>
-              </a:srgbClr>
-            </a:outerShdw>
-          </a:effectLst>
-        </p:spPr>
-        <p:style>
-          <a:lnRef idx="1">
-            <a:schemeClr val="accent1"/>
-          </a:lnRef>
-          <a:fillRef idx="3">
-            <a:schemeClr val="accent1"/>
-          </a:fillRef>
-          <a:effectRef idx="2">
-            <a:schemeClr val="accent1"/>
-          </a:effectRef>
-          <a:fontRef idx="minor">
-            <a:schemeClr val="lt1"/>
-          </a:fontRef>
-        </p:style>
-        <p:txBody>
-          <a:bodyPr rtlCol="0" anchor="ctr"/>
-          <a:lstStyle/>
-          <a:p>
-            <a:pPr algn="ctr"/>
-          </a:p>
-        </p:txBody>
-      </p:sp>
-      <p:sp>
-        <p:nvSpPr>
-          <p:cNvPr id="13" name="TextBox 12"/>
-          <p:cNvSpPr txBox="1"/>
-          <p:nvPr/>
-        </p:nvSpPr>
-        <p:spPr>
-          <a:xfrm>
-            <a:off x="4526280" y="2596896"/>
-            <a:ext cx="3246120" cy="2487168"/>
-          </a:xfrm>
-          <a:prstGeom prst="rect">
-            <a:avLst/>
-          </a:prstGeom>
-          <a:noFill/>
-        </p:spPr>
-        <p:txBody>
-          <a:bodyPr wrap="square" anchor="t">
-            <a:spAutoFit/>
-          </a:bodyPr>
-          <a:lstStyle/>
+              <a:t>• 원정이 가능하기만 하면 취약하지 않다고 판정</a:t>
+            </a:r>
+          </a:p>
+          <a:p>
+            <a:pPr marL="160020" indent="-160020">
+              <a:lnSpc>
+                <a:spcPct val="114000"/>
+              </a:lnSpc>
+              <a:spcAft>
+                <a:spcPts val="200"/>
+              </a:spcAft>
+            </a:pPr>
+            <a:r>
+              <a:rPr sz="1100" b="0">
+                <a:solidFill>
+                  <a:srgbClr val="1C1C1E"/>
+                </a:solidFill>
+                <a:latin typeface="맑은 고딕"/>
+                <a:ea typeface="맑은 고딕"/>
+              </a:rPr>
+              <a:t>• 제도의 질문("갈 수 있는가")과 주민의 현실("지역에 의사가 있는가")이 여기서 갈라진다</a:t>
+            </a:r>
+          </a:p>
           <a:p>
             <a:pPr>
               <a:lnSpc>
                 <a:spcPct val="114000"/>
               </a:lnSpc>
               <a:spcAft>
-                <a:spcPts val="350"/>
-              </a:spcAft>
-            </a:pPr>
-            <a:r>
-              <a:rPr sz="1300" b="1">
-                <a:solidFill>
-                  <a:srgbClr val="33393F"/>
-                </a:solidFill>
-                <a:latin typeface="맑은 고딕"/>
-                <a:ea typeface="맑은 고딕"/>
-              </a:rPr>
-              <a:t>② 정부 문서 사이의 긴장</a:t>
-            </a:r>
-          </a:p>
-          <a:p>
-            <a:pPr marL="160020" indent="-160020">
-              <a:lnSpc>
-                <a:spcPct val="114000"/>
-              </a:lnSpc>
-              <a:spcAft>
                 <a:spcPts val="200"/>
               </a:spcAft>
             </a:pPr>
@@ -4097,207 +4366,7 @@
                 <a:latin typeface="맑은 고딕"/>
                 <a:ea typeface="맑은 고딕"/>
               </a:rPr>
-              <a:t>• 판정식은 "문제없음" 처리, 같은 지침의 추진 배경은 "분만실 없는 시군구 증가"를 문제로 규정</a:t>
-            </a:r>
-          </a:p>
-          <a:p>
-            <a:pPr marL="160020" indent="-160020">
-              <a:lnSpc>
-                <a:spcPct val="114000"/>
-              </a:lnSpc>
-              <a:spcAft>
-                <a:spcPts val="200"/>
-              </a:spcAft>
-            </a:pPr>
-            <a:r>
-              <a:rPr sz="1100" b="0">
-                <a:solidFill>
-                  <a:srgbClr val="1C1C1E"/>
-                </a:solidFill>
-                <a:latin typeface="맑은 고딕"/>
-                <a:ea typeface="맑은 고딕"/>
-              </a:rPr>
-              <a:t>• 문제라고 쓰고 판정식으로는 못 잡는 틈 — 본 연구가 겨누는 지점</a:t>
-            </a:r>
-          </a:p>
-        </p:txBody>
-      </p:sp>
-      <p:sp>
-        <p:nvSpPr>
-          <p:cNvPr id="14" name="Rounded Rectangle 13"/>
-          <p:cNvSpPr/>
-          <p:nvPr/>
-        </p:nvSpPr>
-        <p:spPr>
-          <a:xfrm>
-            <a:off x="8183880" y="2468880"/>
-            <a:ext cx="3611880" cy="2743200"/>
-          </a:xfrm>
-          <a:prstGeom prst="roundRect">
-            <a:avLst>
-              <a:gd name="adj" fmla="val 3000"/>
-            </a:avLst>
-          </a:prstGeom>
-          <a:solidFill>
-            <a:srgbClr val="FFFFFF"/>
-          </a:solidFill>
-          <a:ln w="12700">
-            <a:solidFill>
-              <a:srgbClr val="E4E6E9"/>
-            </a:solidFill>
-          </a:ln>
-          <a:effectLst>
-            <a:outerShdw blurRad="182880" dist="64008" dir="5400000" rotWithShape="0">
-              <a:srgbClr val="000000">
-                <a:alpha val="30000"/>
-              </a:srgbClr>
-            </a:outerShdw>
-          </a:effectLst>
-        </p:spPr>
-        <p:style>
-          <a:lnRef idx="1">
-            <a:schemeClr val="accent1"/>
-          </a:lnRef>
-          <a:fillRef idx="3">
-            <a:schemeClr val="accent1"/>
-          </a:fillRef>
-          <a:effectRef idx="2">
-            <a:schemeClr val="accent1"/>
-          </a:effectRef>
-          <a:fontRef idx="minor">
-            <a:schemeClr val="lt1"/>
-          </a:fontRef>
-        </p:style>
-        <p:txBody>
-          <a:bodyPr rtlCol="0" anchor="ctr"/>
-          <a:lstStyle/>
-          <a:p>
-            <a:pPr algn="ctr"/>
-          </a:p>
-        </p:txBody>
-      </p:sp>
-      <p:sp>
-        <p:nvSpPr>
-          <p:cNvPr id="15" name="TextBox 14"/>
-          <p:cNvSpPr txBox="1"/>
-          <p:nvPr/>
-        </p:nvSpPr>
-        <p:spPr>
-          <a:xfrm>
-            <a:off x="8366760" y="2596896"/>
-            <a:ext cx="3246120" cy="2487168"/>
-          </a:xfrm>
-          <a:prstGeom prst="rect">
-            <a:avLst/>
-          </a:prstGeom>
-          <a:noFill/>
-        </p:spPr>
-        <p:txBody>
-          <a:bodyPr wrap="square" anchor="t">
-            <a:spAutoFit/>
-          </a:bodyPr>
-          <a:lstStyle/>
-          <a:p>
-            <a:pPr>
-              <a:lnSpc>
-                <a:spcPct val="114000"/>
-              </a:lnSpc>
-              <a:spcAft>
-                <a:spcPts val="350"/>
-              </a:spcAft>
-            </a:pPr>
-            <a:r>
-              <a:rPr sz="1300" b="1">
-                <a:solidFill>
-                  <a:srgbClr val="33393F"/>
-                </a:solidFill>
-                <a:latin typeface="맑은 고딕"/>
-                <a:ea typeface="맑은 고딕"/>
-              </a:rPr>
-              <a:t>③ 그러나 지정 ≠ 설치</a:t>
-            </a:r>
-          </a:p>
-          <a:p>
-            <a:pPr marL="160020" indent="-160020">
-              <a:lnSpc>
-                <a:spcPct val="114000"/>
-              </a:lnSpc>
-              <a:spcAft>
-                <a:spcPts val="200"/>
-              </a:spcAft>
-            </a:pPr>
-            <a:r>
-              <a:rPr sz="1100" b="0">
-                <a:solidFill>
-                  <a:srgbClr val="1C1C1E"/>
-                </a:solidFill>
-                <a:latin typeface="맑은 고딕"/>
-                <a:ea typeface="맑은 고딕"/>
-              </a:rPr>
-              <a:t>• 소규모 분만실 난립은 임상 안전상 역효과(연 50건 기준의 취지)</a:t>
-            </a:r>
-          </a:p>
-          <a:p>
-            <a:pPr marL="160020" indent="-160020">
-              <a:lnSpc>
-                <a:spcPct val="114000"/>
-              </a:lnSpc>
-              <a:spcAft>
-                <a:spcPts val="200"/>
-              </a:spcAft>
-            </a:pPr>
-            <a:r>
-              <a:rPr sz="1100" b="0">
-                <a:solidFill>
-                  <a:srgbClr val="1C1C1E"/>
-                </a:solidFill>
-                <a:latin typeface="맑은 고딕"/>
-                <a:ea typeface="맑은 고딕"/>
-              </a:rPr>
-              <a:t>• 올바른 결론은 "제도의 시야에 넣고 유형 배정(외래·순회·이송)으로 적정 개입" — §7과 접속</a:t>
-            </a:r>
-          </a:p>
-        </p:txBody>
-      </p:sp>
-      <p:sp>
-        <p:nvSpPr>
-          <p:cNvPr id="16" name="TextBox 15"/>
-          <p:cNvSpPr txBox="1"/>
-          <p:nvPr/>
-        </p:nvSpPr>
-        <p:spPr>
-          <a:xfrm>
-            <a:off x="502920" y="5486400"/>
-            <a:ext cx="11247120" cy="548640"/>
-          </a:xfrm>
-          <a:prstGeom prst="rect">
-            <a:avLst/>
-          </a:prstGeom>
-          <a:noFill/>
-        </p:spPr>
-        <p:txBody>
-          <a:bodyPr wrap="square" anchor="t">
-            <a:spAutoFit/>
-          </a:bodyPr>
-          <a:lstStyle/>
-          <a:p>
-            <a:pPr>
-              <a:lnSpc>
-                <a:spcPct val="114000"/>
-              </a:lnSpc>
-              <a:spcAft>
-                <a:spcPts val="0"/>
-              </a:spcAft>
-            </a:pPr>
-            <a:r>
-              <a:rPr sz="1150" b="0">
-                <a:solidFill>
-                  <a:srgbClr val="767A7F"/>
-                </a:solidFill>
-                <a:latin typeface="맑은 고딕"/>
-                <a:ea typeface="맑은 고딕"/>
-              </a:rPr>
-              <a:t>이 논쟁 섹션은 심사 Q&amp;A에서 나올 반론을 본문에서 선제적으로 다루기 위한 설계다.</a:t>
+              <a:t>→ 제언 ② TRI 관내/관외 병기</a:t>
             </a:r>
           </a:p>
         </p:txBody>
@@ -4462,7 +4531,7 @@
                 <a:latin typeface="맑은 고딕"/>
                 <a:ea typeface="맑은 고딕"/>
               </a:rPr>
-              <a:t>감사 II-① 등급이 지원을 가른다 — Fisher 정확검정</a:t>
+              <a:t>"60분 안에 갈 수 있으면 취약이 아니지 않은가" — 정면 대응</a:t>
             </a:r>
           </a:p>
         </p:txBody>
@@ -4614,11 +4683,11 @@
         <p:spPr>
           <a:xfrm>
             <a:off x="502920" y="1280160"/>
-            <a:ext cx="5120640" cy="1828800"/>
+            <a:ext cx="11292840" cy="914400"/>
           </a:xfrm>
           <a:prstGeom prst="roundRect">
             <a:avLst>
-              <a:gd name="adj" fmla="val 4500"/>
+              <a:gd name="adj" fmla="val 9000"/>
             </a:avLst>
           </a:prstGeom>
           <a:solidFill>
@@ -4668,7 +4737,7 @@
         <p:spPr>
           <a:xfrm>
             <a:off x="685800" y="1408176"/>
-            <a:ext cx="4754879" cy="1572768"/>
+            <a:ext cx="10927080" cy="658368"/>
           </a:xfrm>
           <a:prstGeom prst="rect">
             <a:avLst/>
@@ -4697,7 +4766,7 @@
                 <a:latin typeface="맑은 고딕"/>
                 <a:ea typeface="맑은 고딕"/>
               </a:rPr>
-              <a:t>설계: 왜 C 55곳을 제외하는가</a:t>
+              <a:t>반론을 인정하며 시작한다</a:t>
             </a:r>
           </a:p>
           <a:p>
@@ -4710,34 +4779,14 @@
               </a:spcAft>
             </a:pPr>
             <a:r>
-              <a:rPr sz="1100" b="0">
+              <a:rPr sz="1150" b="0">
                 <a:solidFill>
                   <a:srgbClr val="1C1C1E"/>
                 </a:solidFill>
                 <a:latin typeface="맑은 고딕"/>
                 <a:ea typeface="맑은 고딕"/>
               </a:rPr>
-              <a:t>• "지원받으면 C가 된다" — 종속변수가 집단 정의에 새어드는 순환</a:t>
-            </a:r>
-          </a:p>
-          <a:p>
-            <a:pPr marL="160020" indent="-160020">
-              <a:lnSpc>
-                <a:spcPct val="114000"/>
-              </a:lnSpc>
-              <a:spcAft>
-                <a:spcPts val="200"/>
-              </a:spcAft>
-            </a:pPr>
-            <a:r>
-              <a:rPr sz="1100" b="0">
-                <a:solidFill>
-                  <a:srgbClr val="1C1C1E"/>
-                </a:solidFill>
-                <a:latin typeface="맑은 고딕"/>
-                <a:ea typeface="맑은 고딕"/>
-              </a:rPr>
-              <a:t>• C 포함 초기 분석: 상관 0.011로 희석 → A·B 한정 시 +0.381 — 이 수정 과정 자체를 보고서에 공개</a:t>
+              <a:t>• 현행 정의(도달 가능성) 안에서 이 반론은 옳다 — 본 연구는 정의를 부정하지 않고, 정의가 한 축만 잰다고 주장한다</a:t>
             </a:r>
           </a:p>
         </p:txBody>
@@ -4750,12 +4799,12 @@
         </p:nvSpPr>
         <p:spPr>
           <a:xfrm>
-            <a:off x="502920" y="3337560"/>
-            <a:ext cx="5120640" cy="2103120"/>
+            <a:off x="502920" y="2468880"/>
+            <a:ext cx="3611880" cy="2743200"/>
           </a:xfrm>
           <a:prstGeom prst="roundRect">
             <a:avLst>
-              <a:gd name="adj" fmla="val 3913"/>
+              <a:gd name="adj" fmla="val 3000"/>
             </a:avLst>
           </a:prstGeom>
           <a:solidFill>
@@ -4804,8 +4853,8 @@
         </p:nvSpPr>
         <p:spPr>
           <a:xfrm>
-            <a:off x="685800" y="3465576"/>
-            <a:ext cx="4754879" cy="1847087"/>
+            <a:off x="685800" y="2596896"/>
+            <a:ext cx="3246120" cy="2487168"/>
           </a:xfrm>
           <a:prstGeom prst="rect">
             <a:avLst/>
@@ -4834,7 +4883,7 @@
                 <a:latin typeface="맑은 고딕"/>
                 <a:ea typeface="맑은 고딕"/>
               </a:rPr>
-              <a:t>결과</a:t>
+              <a:t>① 분만은 9개월의 과정</a:t>
             </a:r>
           </a:p>
           <a:p>
@@ -4854,7 +4903,7 @@
                 <a:latin typeface="맑은 고딕"/>
                 <a:ea typeface="맑은 고딕"/>
               </a:rPr>
-              <a:t>• A등급 지원율 53.1%(17/32) vs B등급 19.0%(4/21)</a:t>
+              <a:t>• 산전진찰 10여 회 + 산후·신생아 관리 — 관내 공급 0이면 전 과정이 원정, 부담은 매회 누적</a:t>
             </a:r>
           </a:p>
           <a:p>
@@ -4874,47 +4923,7 @@
                 <a:latin typeface="맑은 고딕"/>
                 <a:ea typeface="맑은 고딕"/>
               </a:rPr>
-              <a:t>• A의 지원 오즈(받을 확률/못 받을 확률)는 B의 4.82배, p=0.021 — 우연으로 보기 어렵다</a:t>
-            </a:r>
-          </a:p>
-          <a:p>
-            <a:pPr marL="160020" indent="-160020">
-              <a:lnSpc>
-                <a:spcPct val="114000"/>
-              </a:lnSpc>
-              <a:spcAft>
-                <a:spcPts val="200"/>
-              </a:spcAft>
-            </a:pPr>
-            <a:r>
-              <a:rPr sz="1100" b="0">
-                <a:solidFill>
-                  <a:srgbClr val="1C1C1E"/>
-                </a:solidFill>
-                <a:latin typeface="맑은 고딕"/>
-                <a:ea typeface="맑은 고딕"/>
-              </a:rPr>
-              <a:t>• 같은 실질 취약지인데 B는 사실상 배제</a:t>
-            </a:r>
-          </a:p>
-          <a:p>
-            <a:pPr>
-              <a:lnSpc>
-                <a:spcPct val="114000"/>
-              </a:lnSpc>
-              <a:spcAft>
-                <a:spcPts val="200"/>
-              </a:spcAft>
-            </a:pPr>
-            <a:r>
-              <a:rPr sz="1100" b="0">
-                <a:solidFill>
-                  <a:srgbClr val="1C1C1E"/>
-                </a:solidFill>
-                <a:latin typeface="맑은 고딕"/>
-                <a:ea typeface="맑은 고딕"/>
-              </a:rPr>
-              <a:t>→ 단, 이 격차만으로는 "심도 우선 원칙"과 구분 불가 — §7 부담 축까지 가야 완성</a:t>
+              <a:t>• 정부가 "외래 산부인과"(산전진찰 전용) 사업을 따로 두는 것 자체가 이 구분의 제도적 인정</a:t>
             </a:r>
           </a:p>
         </p:txBody>
@@ -4927,24 +4936,26 @@
         </p:nvSpPr>
         <p:spPr>
           <a:xfrm>
-            <a:off x="5852160" y="1301808"/>
-            <a:ext cx="5943600" cy="4848743"/>
+            <a:off x="4343400" y="2468880"/>
+            <a:ext cx="3611880" cy="2743200"/>
           </a:xfrm>
           <a:prstGeom prst="roundRect">
             <a:avLst>
-              <a:gd name="adj" fmla="val 1697"/>
+              <a:gd name="adj" fmla="val 3000"/>
             </a:avLst>
           </a:prstGeom>
           <a:solidFill>
             <a:srgbClr val="FFFFFF"/>
           </a:solidFill>
-          <a:ln>
-            <a:noFill/>
+          <a:ln w="12700">
+            <a:solidFill>
+              <a:srgbClr val="E4E6E9"/>
+            </a:solidFill>
           </a:ln>
           <a:effectLst>
-            <a:outerShdw blurRad="219456" dist="64008" dir="5400000" rotWithShape="0">
+            <a:outerShdw blurRad="182880" dist="64008" dir="5400000" rotWithShape="0">
               <a:srgbClr val="000000">
-                <a:alpha val="34000"/>
+                <a:alpha val="30000"/>
               </a:srgbClr>
             </a:outerShdw>
           </a:effectLst>
@@ -4971,30 +4982,269 @@
           </a:p>
         </p:txBody>
       </p:sp>
-      <p:pic>
-        <p:nvPicPr>
-          <p:cNvPr id="13" name="Picture 12" descr="그림2_등급별_지원율.png"/>
-          <p:cNvPicPr>
-            <a:picLocks noChangeAspect="1"/>
-          </p:cNvPicPr>
-          <p:nvPr/>
-        </p:nvPicPr>
-        <p:blipFill>
-          <a:blip r:embed="rId2"/>
-          <a:stretch>
-            <a:fillRect/>
-          </a:stretch>
-        </p:blipFill>
-        <p:spPr>
-          <a:xfrm>
-            <a:off x="5961888" y="1411536"/>
-            <a:ext cx="5724144" cy="4629287"/>
+      <p:sp>
+        <p:nvSpPr>
+          <p:cNvPr id="13" name="TextBox 12"/>
+          <p:cNvSpPr txBox="1"/>
+          <p:nvPr/>
+        </p:nvSpPr>
+        <p:spPr>
+          <a:xfrm>
+            <a:off x="4526280" y="2596896"/>
+            <a:ext cx="3246120" cy="2487168"/>
           </a:xfrm>
           <a:prstGeom prst="rect">
             <a:avLst/>
           </a:prstGeom>
-        </p:spPr>
-      </p:pic>
+          <a:noFill/>
+        </p:spPr>
+        <p:txBody>
+          <a:bodyPr wrap="square" anchor="t">
+            <a:spAutoFit/>
+          </a:bodyPr>
+          <a:lstStyle/>
+          <a:p>
+            <a:pPr>
+              <a:lnSpc>
+                <a:spcPct val="114000"/>
+              </a:lnSpc>
+              <a:spcAft>
+                <a:spcPts val="350"/>
+              </a:spcAft>
+            </a:pPr>
+            <a:r>
+              <a:rPr sz="1300" b="1">
+                <a:solidFill>
+                  <a:srgbClr val="33393F"/>
+                </a:solidFill>
+                <a:latin typeface="맑은 고딕"/>
+                <a:ea typeface="맑은 고딕"/>
+              </a:rPr>
+              <a:t>② 정부 문서 사이의 긴장</a:t>
+            </a:r>
+          </a:p>
+          <a:p>
+            <a:pPr marL="160020" indent="-160020">
+              <a:lnSpc>
+                <a:spcPct val="114000"/>
+              </a:lnSpc>
+              <a:spcAft>
+                <a:spcPts val="200"/>
+              </a:spcAft>
+            </a:pPr>
+            <a:r>
+              <a:rPr sz="1100" b="0">
+                <a:solidFill>
+                  <a:srgbClr val="1C1C1E"/>
+                </a:solidFill>
+                <a:latin typeface="맑은 고딕"/>
+                <a:ea typeface="맑은 고딕"/>
+              </a:rPr>
+              <a:t>• 판정식은 "문제없음" 처리, 같은 지침의 추진 배경은 "분만실 없는 시군구 증가"를 문제로 규정</a:t>
+            </a:r>
+          </a:p>
+          <a:p>
+            <a:pPr marL="160020" indent="-160020">
+              <a:lnSpc>
+                <a:spcPct val="114000"/>
+              </a:lnSpc>
+              <a:spcAft>
+                <a:spcPts val="200"/>
+              </a:spcAft>
+            </a:pPr>
+            <a:r>
+              <a:rPr sz="1100" b="0">
+                <a:solidFill>
+                  <a:srgbClr val="1C1C1E"/>
+                </a:solidFill>
+                <a:latin typeface="맑은 고딕"/>
+                <a:ea typeface="맑은 고딕"/>
+              </a:rPr>
+              <a:t>• 문제라고 쓰고 판정식으로는 못 잡는 틈 — 본 연구가 겨누는 지점</a:t>
+            </a:r>
+          </a:p>
+        </p:txBody>
+      </p:sp>
+      <p:sp>
+        <p:nvSpPr>
+          <p:cNvPr id="14" name="Rounded Rectangle 13"/>
+          <p:cNvSpPr/>
+          <p:nvPr/>
+        </p:nvSpPr>
+        <p:spPr>
+          <a:xfrm>
+            <a:off x="8183880" y="2468880"/>
+            <a:ext cx="3611880" cy="2743200"/>
+          </a:xfrm>
+          <a:prstGeom prst="roundRect">
+            <a:avLst>
+              <a:gd name="adj" fmla="val 3000"/>
+            </a:avLst>
+          </a:prstGeom>
+          <a:solidFill>
+            <a:srgbClr val="FFFFFF"/>
+          </a:solidFill>
+          <a:ln w="12700">
+            <a:solidFill>
+              <a:srgbClr val="E4E6E9"/>
+            </a:solidFill>
+          </a:ln>
+          <a:effectLst>
+            <a:outerShdw blurRad="182880" dist="64008" dir="5400000" rotWithShape="0">
+              <a:srgbClr val="000000">
+                <a:alpha val="30000"/>
+              </a:srgbClr>
+            </a:outerShdw>
+          </a:effectLst>
+        </p:spPr>
+        <p:style>
+          <a:lnRef idx="1">
+            <a:schemeClr val="accent1"/>
+          </a:lnRef>
+          <a:fillRef idx="3">
+            <a:schemeClr val="accent1"/>
+          </a:fillRef>
+          <a:effectRef idx="2">
+            <a:schemeClr val="accent1"/>
+          </a:effectRef>
+          <a:fontRef idx="minor">
+            <a:schemeClr val="lt1"/>
+          </a:fontRef>
+        </p:style>
+        <p:txBody>
+          <a:bodyPr rtlCol="0" anchor="ctr"/>
+          <a:lstStyle/>
+          <a:p>
+            <a:pPr algn="ctr"/>
+          </a:p>
+        </p:txBody>
+      </p:sp>
+      <p:sp>
+        <p:nvSpPr>
+          <p:cNvPr id="15" name="TextBox 14"/>
+          <p:cNvSpPr txBox="1"/>
+          <p:nvPr/>
+        </p:nvSpPr>
+        <p:spPr>
+          <a:xfrm>
+            <a:off x="8366760" y="2596896"/>
+            <a:ext cx="3246120" cy="2487168"/>
+          </a:xfrm>
+          <a:prstGeom prst="rect">
+            <a:avLst/>
+          </a:prstGeom>
+          <a:noFill/>
+        </p:spPr>
+        <p:txBody>
+          <a:bodyPr wrap="square" anchor="t">
+            <a:spAutoFit/>
+          </a:bodyPr>
+          <a:lstStyle/>
+          <a:p>
+            <a:pPr>
+              <a:lnSpc>
+                <a:spcPct val="114000"/>
+              </a:lnSpc>
+              <a:spcAft>
+                <a:spcPts val="350"/>
+              </a:spcAft>
+            </a:pPr>
+            <a:r>
+              <a:rPr sz="1300" b="1">
+                <a:solidFill>
+                  <a:srgbClr val="33393F"/>
+                </a:solidFill>
+                <a:latin typeface="맑은 고딕"/>
+                <a:ea typeface="맑은 고딕"/>
+              </a:rPr>
+              <a:t>③ 그러나 지정 ≠ 설치</a:t>
+            </a:r>
+          </a:p>
+          <a:p>
+            <a:pPr marL="160020" indent="-160020">
+              <a:lnSpc>
+                <a:spcPct val="114000"/>
+              </a:lnSpc>
+              <a:spcAft>
+                <a:spcPts val="200"/>
+              </a:spcAft>
+            </a:pPr>
+            <a:r>
+              <a:rPr sz="1100" b="0">
+                <a:solidFill>
+                  <a:srgbClr val="1C1C1E"/>
+                </a:solidFill>
+                <a:latin typeface="맑은 고딕"/>
+                <a:ea typeface="맑은 고딕"/>
+              </a:rPr>
+              <a:t>• 소규모 분만실 난립은 임상 안전상 역효과(연 50건 기준의 취지)</a:t>
+            </a:r>
+          </a:p>
+          <a:p>
+            <a:pPr marL="160020" indent="-160020">
+              <a:lnSpc>
+                <a:spcPct val="114000"/>
+              </a:lnSpc>
+              <a:spcAft>
+                <a:spcPts val="200"/>
+              </a:spcAft>
+            </a:pPr>
+            <a:r>
+              <a:rPr sz="1100" b="0">
+                <a:solidFill>
+                  <a:srgbClr val="1C1C1E"/>
+                </a:solidFill>
+                <a:latin typeface="맑은 고딕"/>
+                <a:ea typeface="맑은 고딕"/>
+              </a:rPr>
+              <a:t>• 올바른 결론은 "제도의 시야에 넣고 유형 배정(외래·순회·이송)으로 적정 개입" — §7과 접속</a:t>
+            </a:r>
+          </a:p>
+        </p:txBody>
+      </p:sp>
+      <p:sp>
+        <p:nvSpPr>
+          <p:cNvPr id="16" name="TextBox 15"/>
+          <p:cNvSpPr txBox="1"/>
+          <p:nvPr/>
+        </p:nvSpPr>
+        <p:spPr>
+          <a:xfrm>
+            <a:off x="502920" y="5486400"/>
+            <a:ext cx="11247120" cy="548640"/>
+          </a:xfrm>
+          <a:prstGeom prst="rect">
+            <a:avLst/>
+          </a:prstGeom>
+          <a:noFill/>
+        </p:spPr>
+        <p:txBody>
+          <a:bodyPr wrap="square" anchor="t">
+            <a:spAutoFit/>
+          </a:bodyPr>
+          <a:lstStyle/>
+          <a:p>
+            <a:pPr>
+              <a:lnSpc>
+                <a:spcPct val="114000"/>
+              </a:lnSpc>
+              <a:spcAft>
+                <a:spcPts val="0"/>
+              </a:spcAft>
+            </a:pPr>
+            <a:r>
+              <a:rPr sz="1150" b="0">
+                <a:solidFill>
+                  <a:srgbClr val="767A7F"/>
+                </a:solidFill>
+                <a:latin typeface="맑은 고딕"/>
+                <a:ea typeface="맑은 고딕"/>
+              </a:rPr>
+              <a:t>이 논쟁 섹션은 심사 Q&amp;A에서 나올 반론을 본문에서 선제적으로 다루기 위한 설계다.</a:t>
+            </a:r>
+          </a:p>
+        </p:txBody>
+      </p:sp>
     </p:spTree>
   </p:cSld>
   <p:clrMapOvr>
@@ -5155,7 +5405,7 @@
                 <a:latin typeface="맑은 고딕"/>
                 <a:ea typeface="맑은 고딕"/>
               </a:rPr>
-              <a:t>감사 II-② 배분은 무엇으로 설명되는가 — 대부분 설명되지 않는다</a:t>
+              <a:t>감사 II-① 등급이 지원을 가른다 — Fisher 정확검정</a:t>
             </a:r>
           </a:p>
         </p:txBody>
@@ -5251,6 +5501,699 @@
                 <a:ea typeface="맑은 고딕"/>
               </a:rPr>
               <a:t>12</a:t>
+            </a:r>
+          </a:p>
+        </p:txBody>
+      </p:sp>
+      <p:sp>
+        <p:nvSpPr>
+          <p:cNvPr id="7" name="TextBox 6"/>
+          <p:cNvSpPr txBox="1"/>
+          <p:nvPr/>
+        </p:nvSpPr>
+        <p:spPr>
+          <a:xfrm>
+            <a:off x="502920" y="6492240"/>
+            <a:ext cx="11247120" cy="320040"/>
+          </a:xfrm>
+          <a:prstGeom prst="rect">
+            <a:avLst/>
+          </a:prstGeom>
+          <a:noFill/>
+        </p:spPr>
+        <p:txBody>
+          <a:bodyPr wrap="square" anchor="t">
+            <a:spAutoFit/>
+          </a:bodyPr>
+          <a:lstStyle/>
+          <a:p>
+            <a:pPr>
+              <a:lnSpc>
+                <a:spcPct val="114000"/>
+              </a:lnSpc>
+              <a:spcAft>
+                <a:spcPts val="0"/>
+              </a:spcAft>
+            </a:pPr>
+            <a:r>
+              <a:rPr sz="850" b="0">
+                <a:solidFill>
+                  <a:srgbClr val="B2B5B9"/>
+                </a:solidFill>
+                <a:latin typeface="맑은 고딕"/>
+                <a:ea typeface="맑은 고딕"/>
+              </a:rPr>
+              <a:t>2026 명지대학교 창의적 SW프로그램 경진대회 · 빅데이터 분석 — 데이터 분석 결과보고서</a:t>
+            </a:r>
+          </a:p>
+        </p:txBody>
+      </p:sp>
+      <p:sp>
+        <p:nvSpPr>
+          <p:cNvPr id="8" name="Rounded Rectangle 7"/>
+          <p:cNvSpPr/>
+          <p:nvPr/>
+        </p:nvSpPr>
+        <p:spPr>
+          <a:xfrm>
+            <a:off x="502920" y="1280160"/>
+            <a:ext cx="5120640" cy="1828800"/>
+          </a:xfrm>
+          <a:prstGeom prst="roundRect">
+            <a:avLst>
+              <a:gd name="adj" fmla="val 4500"/>
+            </a:avLst>
+          </a:prstGeom>
+          <a:solidFill>
+            <a:srgbClr val="FFFFFF"/>
+          </a:solidFill>
+          <a:ln w="12700">
+            <a:solidFill>
+              <a:srgbClr val="E4E6E9"/>
+            </a:solidFill>
+          </a:ln>
+          <a:effectLst>
+            <a:outerShdw blurRad="182880" dist="64008" dir="5400000" rotWithShape="0">
+              <a:srgbClr val="000000">
+                <a:alpha val="30000"/>
+              </a:srgbClr>
+            </a:outerShdw>
+          </a:effectLst>
+        </p:spPr>
+        <p:style>
+          <a:lnRef idx="1">
+            <a:schemeClr val="accent1"/>
+          </a:lnRef>
+          <a:fillRef idx="3">
+            <a:schemeClr val="accent1"/>
+          </a:fillRef>
+          <a:effectRef idx="2">
+            <a:schemeClr val="accent1"/>
+          </a:effectRef>
+          <a:fontRef idx="minor">
+            <a:schemeClr val="lt1"/>
+          </a:fontRef>
+        </p:style>
+        <p:txBody>
+          <a:bodyPr rtlCol="0" anchor="ctr"/>
+          <a:lstStyle/>
+          <a:p>
+            <a:pPr algn="ctr"/>
+          </a:p>
+        </p:txBody>
+      </p:sp>
+      <p:sp>
+        <p:nvSpPr>
+          <p:cNvPr id="9" name="TextBox 8"/>
+          <p:cNvSpPr txBox="1"/>
+          <p:nvPr/>
+        </p:nvSpPr>
+        <p:spPr>
+          <a:xfrm>
+            <a:off x="685800" y="1408176"/>
+            <a:ext cx="4754879" cy="1572768"/>
+          </a:xfrm>
+          <a:prstGeom prst="rect">
+            <a:avLst/>
+          </a:prstGeom>
+          <a:noFill/>
+        </p:spPr>
+        <p:txBody>
+          <a:bodyPr wrap="square" anchor="t">
+            <a:spAutoFit/>
+          </a:bodyPr>
+          <a:lstStyle/>
+          <a:p>
+            <a:pPr>
+              <a:lnSpc>
+                <a:spcPct val="114000"/>
+              </a:lnSpc>
+              <a:spcAft>
+                <a:spcPts val="350"/>
+              </a:spcAft>
+            </a:pPr>
+            <a:r>
+              <a:rPr sz="1300" b="1">
+                <a:solidFill>
+                  <a:srgbClr val="33393F"/>
+                </a:solidFill>
+                <a:latin typeface="맑은 고딕"/>
+                <a:ea typeface="맑은 고딕"/>
+              </a:rPr>
+              <a:t>설계: 왜 C 55곳을 제외하는가</a:t>
+            </a:r>
+          </a:p>
+          <a:p>
+            <a:pPr marL="160020" indent="-160020">
+              <a:lnSpc>
+                <a:spcPct val="114000"/>
+              </a:lnSpc>
+              <a:spcAft>
+                <a:spcPts val="200"/>
+              </a:spcAft>
+            </a:pPr>
+            <a:r>
+              <a:rPr sz="1100" b="0">
+                <a:solidFill>
+                  <a:srgbClr val="1C1C1E"/>
+                </a:solidFill>
+                <a:latin typeface="맑은 고딕"/>
+                <a:ea typeface="맑은 고딕"/>
+              </a:rPr>
+              <a:t>• "지원받으면 C가 된다" — 종속변수가 집단 정의에 새어드는 순환</a:t>
+            </a:r>
+          </a:p>
+          <a:p>
+            <a:pPr marL="160020" indent="-160020">
+              <a:lnSpc>
+                <a:spcPct val="114000"/>
+              </a:lnSpc>
+              <a:spcAft>
+                <a:spcPts val="200"/>
+              </a:spcAft>
+            </a:pPr>
+            <a:r>
+              <a:rPr sz="1100" b="0">
+                <a:solidFill>
+                  <a:srgbClr val="1C1C1E"/>
+                </a:solidFill>
+                <a:latin typeface="맑은 고딕"/>
+                <a:ea typeface="맑은 고딕"/>
+              </a:rPr>
+              <a:t>• C 포함 초기 분석: 상관 0.011로 희석 → A·B 한정 시 +0.381 — 이 수정 과정 자체를 보고서에 공개</a:t>
+            </a:r>
+          </a:p>
+        </p:txBody>
+      </p:sp>
+      <p:sp>
+        <p:nvSpPr>
+          <p:cNvPr id="10" name="Rounded Rectangle 9"/>
+          <p:cNvSpPr/>
+          <p:nvPr/>
+        </p:nvSpPr>
+        <p:spPr>
+          <a:xfrm>
+            <a:off x="502920" y="3337560"/>
+            <a:ext cx="5120640" cy="2103120"/>
+          </a:xfrm>
+          <a:prstGeom prst="roundRect">
+            <a:avLst>
+              <a:gd name="adj" fmla="val 3913"/>
+            </a:avLst>
+          </a:prstGeom>
+          <a:solidFill>
+            <a:srgbClr val="FFFFFF"/>
+          </a:solidFill>
+          <a:ln w="12700">
+            <a:solidFill>
+              <a:srgbClr val="E4E6E9"/>
+            </a:solidFill>
+          </a:ln>
+          <a:effectLst>
+            <a:outerShdw blurRad="182880" dist="64008" dir="5400000" rotWithShape="0">
+              <a:srgbClr val="000000">
+                <a:alpha val="30000"/>
+              </a:srgbClr>
+            </a:outerShdw>
+          </a:effectLst>
+        </p:spPr>
+        <p:style>
+          <a:lnRef idx="1">
+            <a:schemeClr val="accent1"/>
+          </a:lnRef>
+          <a:fillRef idx="3">
+            <a:schemeClr val="accent1"/>
+          </a:fillRef>
+          <a:effectRef idx="2">
+            <a:schemeClr val="accent1"/>
+          </a:effectRef>
+          <a:fontRef idx="minor">
+            <a:schemeClr val="lt1"/>
+          </a:fontRef>
+        </p:style>
+        <p:txBody>
+          <a:bodyPr rtlCol="0" anchor="ctr"/>
+          <a:lstStyle/>
+          <a:p>
+            <a:pPr algn="ctr"/>
+          </a:p>
+        </p:txBody>
+      </p:sp>
+      <p:sp>
+        <p:nvSpPr>
+          <p:cNvPr id="11" name="TextBox 10"/>
+          <p:cNvSpPr txBox="1"/>
+          <p:nvPr/>
+        </p:nvSpPr>
+        <p:spPr>
+          <a:xfrm>
+            <a:off x="685800" y="3465576"/>
+            <a:ext cx="4754879" cy="1847087"/>
+          </a:xfrm>
+          <a:prstGeom prst="rect">
+            <a:avLst/>
+          </a:prstGeom>
+          <a:noFill/>
+        </p:spPr>
+        <p:txBody>
+          <a:bodyPr wrap="square" anchor="t">
+            <a:spAutoFit/>
+          </a:bodyPr>
+          <a:lstStyle/>
+          <a:p>
+            <a:pPr>
+              <a:lnSpc>
+                <a:spcPct val="114000"/>
+              </a:lnSpc>
+              <a:spcAft>
+                <a:spcPts val="350"/>
+              </a:spcAft>
+            </a:pPr>
+            <a:r>
+              <a:rPr sz="1300" b="1">
+                <a:solidFill>
+                  <a:srgbClr val="33393F"/>
+                </a:solidFill>
+                <a:latin typeface="맑은 고딕"/>
+                <a:ea typeface="맑은 고딕"/>
+              </a:rPr>
+              <a:t>결과</a:t>
+            </a:r>
+          </a:p>
+          <a:p>
+            <a:pPr marL="160020" indent="-160020">
+              <a:lnSpc>
+                <a:spcPct val="114000"/>
+              </a:lnSpc>
+              <a:spcAft>
+                <a:spcPts val="200"/>
+              </a:spcAft>
+            </a:pPr>
+            <a:r>
+              <a:rPr sz="1100" b="0">
+                <a:solidFill>
+                  <a:srgbClr val="1C1C1E"/>
+                </a:solidFill>
+                <a:latin typeface="맑은 고딕"/>
+                <a:ea typeface="맑은 고딕"/>
+              </a:rPr>
+              <a:t>• A등급 지원율 53.1%(17/32) vs B등급 19.0%(4/21)</a:t>
+            </a:r>
+          </a:p>
+          <a:p>
+            <a:pPr marL="160020" indent="-160020">
+              <a:lnSpc>
+                <a:spcPct val="114000"/>
+              </a:lnSpc>
+              <a:spcAft>
+                <a:spcPts val="200"/>
+              </a:spcAft>
+            </a:pPr>
+            <a:r>
+              <a:rPr sz="1100" b="0">
+                <a:solidFill>
+                  <a:srgbClr val="1C1C1E"/>
+                </a:solidFill>
+                <a:latin typeface="맑은 고딕"/>
+                <a:ea typeface="맑은 고딕"/>
+              </a:rPr>
+              <a:t>• A의 지원 오즈(받을 확률/못 받을 확률)는 B의 4.82배, p=0.021 — 우연으로 보기 어렵다</a:t>
+            </a:r>
+          </a:p>
+          <a:p>
+            <a:pPr marL="160020" indent="-160020">
+              <a:lnSpc>
+                <a:spcPct val="114000"/>
+              </a:lnSpc>
+              <a:spcAft>
+                <a:spcPts val="200"/>
+              </a:spcAft>
+            </a:pPr>
+            <a:r>
+              <a:rPr sz="1100" b="0">
+                <a:solidFill>
+                  <a:srgbClr val="1C1C1E"/>
+                </a:solidFill>
+                <a:latin typeface="맑은 고딕"/>
+                <a:ea typeface="맑은 고딕"/>
+              </a:rPr>
+              <a:t>• 같은 실질 취약지인데 B는 사실상 배제</a:t>
+            </a:r>
+          </a:p>
+          <a:p>
+            <a:pPr>
+              <a:lnSpc>
+                <a:spcPct val="114000"/>
+              </a:lnSpc>
+              <a:spcAft>
+                <a:spcPts val="200"/>
+              </a:spcAft>
+            </a:pPr>
+            <a:r>
+              <a:rPr sz="1100" b="0">
+                <a:solidFill>
+                  <a:srgbClr val="1C1C1E"/>
+                </a:solidFill>
+                <a:latin typeface="맑은 고딕"/>
+                <a:ea typeface="맑은 고딕"/>
+              </a:rPr>
+              <a:t>→ 단, 이 격차만으로는 "심도 우선 원칙"과 구분 불가 — §7 부담 축까지 가야 완성</a:t>
+            </a:r>
+          </a:p>
+        </p:txBody>
+      </p:sp>
+      <p:sp>
+        <p:nvSpPr>
+          <p:cNvPr id="12" name="Rounded Rectangle 11"/>
+          <p:cNvSpPr/>
+          <p:nvPr/>
+        </p:nvSpPr>
+        <p:spPr>
+          <a:xfrm>
+            <a:off x="5852160" y="1301808"/>
+            <a:ext cx="5943600" cy="4848743"/>
+          </a:xfrm>
+          <a:prstGeom prst="roundRect">
+            <a:avLst>
+              <a:gd name="adj" fmla="val 1697"/>
+            </a:avLst>
+          </a:prstGeom>
+          <a:solidFill>
+            <a:srgbClr val="FFFFFF"/>
+          </a:solidFill>
+          <a:ln>
+            <a:noFill/>
+          </a:ln>
+          <a:effectLst>
+            <a:outerShdw blurRad="219456" dist="64008" dir="5400000" rotWithShape="0">
+              <a:srgbClr val="000000">
+                <a:alpha val="34000"/>
+              </a:srgbClr>
+            </a:outerShdw>
+          </a:effectLst>
+        </p:spPr>
+        <p:style>
+          <a:lnRef idx="1">
+            <a:schemeClr val="accent1"/>
+          </a:lnRef>
+          <a:fillRef idx="3">
+            <a:schemeClr val="accent1"/>
+          </a:fillRef>
+          <a:effectRef idx="2">
+            <a:schemeClr val="accent1"/>
+          </a:effectRef>
+          <a:fontRef idx="minor">
+            <a:schemeClr val="lt1"/>
+          </a:fontRef>
+        </p:style>
+        <p:txBody>
+          <a:bodyPr rtlCol="0" anchor="ctr"/>
+          <a:lstStyle/>
+          <a:p>
+            <a:pPr algn="ctr"/>
+          </a:p>
+        </p:txBody>
+      </p:sp>
+      <p:pic>
+        <p:nvPicPr>
+          <p:cNvPr id="13" name="Picture 12" descr="그림2_등급별_지원율.png"/>
+          <p:cNvPicPr>
+            <a:picLocks noChangeAspect="1"/>
+          </p:cNvPicPr>
+          <p:nvPr/>
+        </p:nvPicPr>
+        <p:blipFill>
+          <a:blip r:embed="rId2"/>
+          <a:stretch>
+            <a:fillRect/>
+          </a:stretch>
+        </p:blipFill>
+        <p:spPr>
+          <a:xfrm>
+            <a:off x="5961888" y="1411536"/>
+            <a:ext cx="5724144" cy="4629287"/>
+          </a:xfrm>
+          <a:prstGeom prst="rect">
+            <a:avLst/>
+          </a:prstGeom>
+        </p:spPr>
+      </p:pic>
+    </p:spTree>
+  </p:cSld>
+  <p:clrMapOvr>
+    <a:masterClrMapping/>
+  </p:clrMapOvr>
+</p:sld>
+</file>
+
+<file path=ppt/slides/slide13.xml><?xml version="1.0" encoding="utf-8"?>
+<p:sld xmlns:a="http://schemas.openxmlformats.org/drawingml/2006/main" xmlns:p="http://schemas.openxmlformats.org/presentationml/2006/main" xmlns:r="http://schemas.openxmlformats.org/officeDocument/2006/relationships">
+  <p:cSld>
+    <p:spTree>
+      <p:nvGrpSpPr>
+        <p:cNvPr id="1" name=""/>
+        <p:cNvGrpSpPr/>
+        <p:nvPr/>
+      </p:nvGrpSpPr>
+      <p:grpSpPr/>
+      <p:sp>
+        <p:nvSpPr>
+          <p:cNvPr id="2" name="Rectangle 1"/>
+          <p:cNvSpPr/>
+          <p:nvPr/>
+        </p:nvSpPr>
+        <p:spPr>
+          <a:xfrm>
+            <a:off x="0" y="0"/>
+            <a:ext cx="12191695" cy="6858000"/>
+          </a:xfrm>
+          <a:prstGeom prst="rect">
+            <a:avLst/>
+          </a:prstGeom>
+          <a:solidFill>
+            <a:srgbClr val="FFFFFF"/>
+          </a:solidFill>
+          <a:ln>
+            <a:noFill/>
+          </a:ln>
+          <a:effectLst/>
+        </p:spPr>
+        <p:style>
+          <a:lnRef idx="1">
+            <a:schemeClr val="accent1"/>
+          </a:lnRef>
+          <a:fillRef idx="3">
+            <a:schemeClr val="accent1"/>
+          </a:fillRef>
+          <a:effectRef idx="2">
+            <a:schemeClr val="accent1"/>
+          </a:effectRef>
+          <a:fontRef idx="minor">
+            <a:schemeClr val="lt1"/>
+          </a:fontRef>
+        </p:style>
+        <p:txBody>
+          <a:bodyPr rtlCol="0" anchor="ctr"/>
+          <a:lstStyle/>
+          <a:p>
+            <a:pPr algn="ctr"/>
+          </a:p>
+        </p:txBody>
+      </p:sp>
+      <p:sp>
+        <p:nvSpPr>
+          <p:cNvPr id="3" name="Rounded Rectangle 2"/>
+          <p:cNvSpPr/>
+          <p:nvPr/>
+        </p:nvSpPr>
+        <p:spPr>
+          <a:xfrm>
+            <a:off x="502920" y="475488"/>
+            <a:ext cx="310896" cy="310896"/>
+          </a:xfrm>
+          <a:prstGeom prst="roundRect">
+            <a:avLst>
+              <a:gd name="adj" fmla="val 50000"/>
+            </a:avLst>
+          </a:prstGeom>
+          <a:gradFill rotWithShape="1">
+            <a:gsLst>
+              <a:gs pos="0">
+                <a:srgbClr val="3A3F45"/>
+              </a:gs>
+              <a:gs pos="100000">
+                <a:srgbClr val="73787E"/>
+              </a:gs>
+            </a:gsLst>
+            <a:lin scaled="0" ang="18900000"/>
+          </a:gradFill>
+          <a:ln>
+            <a:noFill/>
+          </a:ln>
+          <a:effectLst>
+            <a:outerShdw blurRad="109728" dist="36576" dir="5400000" rotWithShape="0">
+              <a:srgbClr val="000000">
+                <a:alpha val="35000"/>
+              </a:srgbClr>
+            </a:outerShdw>
+          </a:effectLst>
+        </p:spPr>
+        <p:style>
+          <a:lnRef idx="1">
+            <a:schemeClr val="accent1"/>
+          </a:lnRef>
+          <a:fillRef idx="3">
+            <a:schemeClr val="accent1"/>
+          </a:fillRef>
+          <a:effectRef idx="2">
+            <a:schemeClr val="accent1"/>
+          </a:effectRef>
+          <a:fontRef idx="minor">
+            <a:schemeClr val="lt1"/>
+          </a:fontRef>
+        </p:style>
+        <p:txBody>
+          <a:bodyPr rtlCol="0" anchor="ctr"/>
+          <a:lstStyle/>
+          <a:p>
+            <a:pPr algn="ctr"/>
+          </a:p>
+        </p:txBody>
+      </p:sp>
+      <p:sp>
+        <p:nvSpPr>
+          <p:cNvPr id="4" name="TextBox 3"/>
+          <p:cNvSpPr txBox="1"/>
+          <p:nvPr/>
+        </p:nvSpPr>
+        <p:spPr>
+          <a:xfrm>
+            <a:off x="960120" y="274320"/>
+            <a:ext cx="9692640" cy="685800"/>
+          </a:xfrm>
+          <a:prstGeom prst="rect">
+            <a:avLst/>
+          </a:prstGeom>
+          <a:noFill/>
+        </p:spPr>
+        <p:txBody>
+          <a:bodyPr wrap="square" anchor="ctr">
+            <a:spAutoFit/>
+          </a:bodyPr>
+          <a:lstStyle/>
+          <a:p>
+            <a:pPr>
+              <a:lnSpc>
+                <a:spcPct val="114000"/>
+              </a:lnSpc>
+              <a:spcAft>
+                <a:spcPts val="0"/>
+              </a:spcAft>
+            </a:pPr>
+            <a:r>
+              <a:rPr sz="2150" b="1">
+                <a:solidFill>
+                  <a:srgbClr val="1C1C1E"/>
+                </a:solidFill>
+                <a:latin typeface="맑은 고딕"/>
+                <a:ea typeface="맑은 고딕"/>
+              </a:rPr>
+              <a:t>감사 II-② 배분은 무엇으로 설명되는가 — 대부분 설명되지 않는다</a:t>
+            </a:r>
+          </a:p>
+        </p:txBody>
+      </p:sp>
+      <p:sp>
+        <p:nvSpPr>
+          <p:cNvPr id="5" name="Rectangle 4"/>
+          <p:cNvSpPr/>
+          <p:nvPr/>
+        </p:nvSpPr>
+        <p:spPr>
+          <a:xfrm>
+            <a:off x="521207" y="969264"/>
+            <a:ext cx="4206240" cy="27432"/>
+          </a:xfrm>
+          <a:prstGeom prst="rect">
+            <a:avLst/>
+          </a:prstGeom>
+          <a:gradFill rotWithShape="1">
+            <a:gsLst>
+              <a:gs pos="0">
+                <a:srgbClr val="2A2E33"/>
+              </a:gs>
+              <a:gs pos="100000">
+                <a:srgbClr val="FFFFFF"/>
+              </a:gs>
+            </a:gsLst>
+            <a:lin scaled="0" ang="0"/>
+          </a:gradFill>
+          <a:ln>
+            <a:noFill/>
+          </a:ln>
+          <a:effectLst/>
+        </p:spPr>
+        <p:style>
+          <a:lnRef idx="1">
+            <a:schemeClr val="accent1"/>
+          </a:lnRef>
+          <a:fillRef idx="3">
+            <a:schemeClr val="accent1"/>
+          </a:fillRef>
+          <a:effectRef idx="2">
+            <a:schemeClr val="accent1"/>
+          </a:effectRef>
+          <a:fontRef idx="minor">
+            <a:schemeClr val="lt1"/>
+          </a:fontRef>
+        </p:style>
+        <p:txBody>
+          <a:bodyPr rtlCol="0" anchor="ctr"/>
+          <a:lstStyle/>
+          <a:p>
+            <a:pPr algn="ctr"/>
+          </a:p>
+        </p:txBody>
+      </p:sp>
+      <p:sp>
+        <p:nvSpPr>
+          <p:cNvPr id="6" name="TextBox 5"/>
+          <p:cNvSpPr txBox="1"/>
+          <p:nvPr/>
+        </p:nvSpPr>
+        <p:spPr>
+          <a:xfrm>
+            <a:off x="10835640" y="164592"/>
+            <a:ext cx="1188720" cy="777240"/>
+          </a:xfrm>
+          <a:prstGeom prst="rect">
+            <a:avLst/>
+          </a:prstGeom>
+          <a:noFill/>
+        </p:spPr>
+        <p:txBody>
+          <a:bodyPr wrap="square" anchor="t">
+            <a:spAutoFit/>
+          </a:bodyPr>
+          <a:lstStyle/>
+          <a:p>
+            <a:pPr>
+              <a:lnSpc>
+                <a:spcPct val="114000"/>
+              </a:lnSpc>
+              <a:spcAft>
+                <a:spcPts val="0"/>
+              </a:spcAft>
+            </a:pPr>
+            <a:r>
+              <a:rPr sz="3000" b="1">
+                <a:solidFill>
+                  <a:srgbClr val="D8DADD"/>
+                </a:solidFill>
+                <a:latin typeface="맑은 고딕"/>
+                <a:ea typeface="맑은 고딕"/>
+              </a:rPr>
+              <a:t>13</a:t>
             </a:r>
           </a:p>
         </p:txBody>
@@ -6049,7 +6992,7 @@
 </p:sld>
 </file>
 
-<file path=ppt/slides/slide13.xml><?xml version="1.0" encoding="utf-8"?>
+<file path=ppt/slides/slide14.xml><?xml version="1.0" encoding="utf-8"?>
 <p:sld xmlns:a="http://schemas.openxmlformats.org/drawingml/2006/main" xmlns:p="http://schemas.openxmlformats.org/presentationml/2006/main" xmlns:r="http://schemas.openxmlformats.org/officeDocument/2006/relationships">
   <p:cSld>
     <p:spTree>
@@ -6296,7 +7239,7 @@
                 <a:latin typeface="맑은 고딕"/>
                 <a:ea typeface="맑은 고딕"/>
               </a:rPr>
-              <a:t>13</a:t>
+              <a:t>14</a:t>
             </a:r>
           </a:p>
         </p:txBody>
@@ -6742,7 +7685,7 @@
 </p:sld>
 </file>
 
-<file path=ppt/slides/slide14.xml><?xml version="1.0" encoding="utf-8"?>
+<file path=ppt/slides/slide15.xml><?xml version="1.0" encoding="utf-8"?>
 <p:sld xmlns:a="http://schemas.openxmlformats.org/drawingml/2006/main" xmlns:p="http://schemas.openxmlformats.org/presentationml/2006/main" xmlns:r="http://schemas.openxmlformats.org/officeDocument/2006/relationships">
   <p:cSld>
     <p:spTree>
@@ -6989,7 +7932,7 @@
                 <a:latin typeface="맑은 고딕"/>
                 <a:ea typeface="맑은 고딕"/>
               </a:rPr>
-              <a:t>14</a:t>
+              <a:t>15</a:t>
             </a:r>
           </a:p>
         </p:txBody>
@@ -7475,7 +8418,7 @@
 </p:sld>
 </file>
 
-<file path=ppt/slides/slide15.xml><?xml version="1.0" encoding="utf-8"?>
+<file path=ppt/slides/slide16.xml><?xml version="1.0" encoding="utf-8"?>
 <p:sld xmlns:a="http://schemas.openxmlformats.org/drawingml/2006/main" xmlns:p="http://schemas.openxmlformats.org/presentationml/2006/main" xmlns:r="http://schemas.openxmlformats.org/officeDocument/2006/relationships">
   <p:cSld>
     <p:spTree>
@@ -7722,7 +8665,7 @@
                 <a:latin typeface="맑은 고딕"/>
                 <a:ea typeface="맑은 고딕"/>
               </a:rPr>
-              <a:t>15</a:t>
+              <a:t>16</a:t>
             </a:r>
           </a:p>
         </p:txBody>
@@ -8168,7 +9111,7 @@
 </p:sld>
 </file>
 
-<file path=ppt/slides/slide16.xml><?xml version="1.0" encoding="utf-8"?>
+<file path=ppt/slides/slide17.xml><?xml version="1.0" encoding="utf-8"?>
 <p:sld xmlns:a="http://schemas.openxmlformats.org/drawingml/2006/main" xmlns:p="http://schemas.openxmlformats.org/presentationml/2006/main" xmlns:r="http://schemas.openxmlformats.org/officeDocument/2006/relationships">
   <p:cSld>
     <p:spTree>
@@ -8415,7 +9358,7 @@
                 <a:latin typeface="맑은 고딕"/>
                 <a:ea typeface="맑은 고딕"/>
               </a:rPr>
-              <a:t>16</a:t>
+              <a:t>17</a:t>
             </a:r>
           </a:p>
         </p:txBody>
@@ -9079,7 +10022,7 @@
 </p:sld>
 </file>
 
-<file path=ppt/slides/slide17.xml><?xml version="1.0" encoding="utf-8"?>
+<file path=ppt/slides/slide18.xml><?xml version="1.0" encoding="utf-8"?>
 <p:sld xmlns:a="http://schemas.openxmlformats.org/drawingml/2006/main" xmlns:p="http://schemas.openxmlformats.org/presentationml/2006/main" xmlns:r="http://schemas.openxmlformats.org/officeDocument/2006/relationships">
   <p:cSld>
     <p:spTree>
@@ -9326,7 +10269,7 @@
                 <a:latin typeface="맑은 고딕"/>
                 <a:ea typeface="맑은 고딕"/>
               </a:rPr>
-              <a:t>17</a:t>
+              <a:t>18</a:t>
             </a:r>
           </a:p>
         </p:txBody>
@@ -10157,7 +11100,7 @@
 </p:sld>
 </file>
 
-<file path=ppt/slides/slide18.xml><?xml version="1.0" encoding="utf-8"?>
+<file path=ppt/slides/slide19.xml><?xml version="1.0" encoding="utf-8"?>
 <p:sld xmlns:a="http://schemas.openxmlformats.org/drawingml/2006/main" xmlns:p="http://schemas.openxmlformats.org/presentationml/2006/main" xmlns:r="http://schemas.openxmlformats.org/officeDocument/2006/relationships">
   <p:cSld>
     <p:spTree>
@@ -10404,7 +11347,7 @@
                 <a:latin typeface="맑은 고딕"/>
                 <a:ea typeface="맑은 고딕"/>
               </a:rPr>
-              <a:t>18</a:t>
+              <a:t>19</a:t>
             </a:r>
           </a:p>
         </p:txBody>
@@ -10865,329 +11808,6 @@
                 <a:ea typeface="맑은 고딕"/>
               </a:rPr>
               <a:t>한계의 공개는 약점이 아니라 방어선이다 — 심사 Q&amp;A에서 나올 질문들을 본문이 먼저 답한다.</a:t>
-            </a:r>
-          </a:p>
-        </p:txBody>
-      </p:sp>
-    </p:spTree>
-  </p:cSld>
-  <p:clrMapOvr>
-    <a:masterClrMapping/>
-  </p:clrMapOvr>
-</p:sld>
-</file>
-
-<file path=ppt/slides/slide19.xml><?xml version="1.0" encoding="utf-8"?>
-<p:sld xmlns:a="http://schemas.openxmlformats.org/drawingml/2006/main" xmlns:p="http://schemas.openxmlformats.org/presentationml/2006/main" xmlns:r="http://schemas.openxmlformats.org/officeDocument/2006/relationships">
-  <p:cSld>
-    <p:spTree>
-      <p:nvGrpSpPr>
-        <p:cNvPr id="1" name=""/>
-        <p:cNvGrpSpPr/>
-        <p:nvPr/>
-      </p:nvGrpSpPr>
-      <p:grpSpPr/>
-      <p:sp>
-        <p:nvSpPr>
-          <p:cNvPr id="2" name="Rectangle 1"/>
-          <p:cNvSpPr/>
-          <p:nvPr/>
-        </p:nvSpPr>
-        <p:spPr>
-          <a:xfrm>
-            <a:off x="0" y="0"/>
-            <a:ext cx="12191695" cy="6858000"/>
-          </a:xfrm>
-          <a:prstGeom prst="rect">
-            <a:avLst/>
-          </a:prstGeom>
-          <a:solidFill>
-            <a:srgbClr val="FFFFFF"/>
-          </a:solidFill>
-          <a:ln>
-            <a:noFill/>
-          </a:ln>
-          <a:effectLst/>
-        </p:spPr>
-        <p:style>
-          <a:lnRef idx="1">
-            <a:schemeClr val="accent1"/>
-          </a:lnRef>
-          <a:fillRef idx="3">
-            <a:schemeClr val="accent1"/>
-          </a:fillRef>
-          <a:effectRef idx="2">
-            <a:schemeClr val="accent1"/>
-          </a:effectRef>
-          <a:fontRef idx="minor">
-            <a:schemeClr val="lt1"/>
-          </a:fontRef>
-        </p:style>
-        <p:txBody>
-          <a:bodyPr rtlCol="0" anchor="ctr"/>
-          <a:lstStyle/>
-          <a:p>
-            <a:pPr algn="ctr"/>
-          </a:p>
-        </p:txBody>
-      </p:sp>
-      <p:sp>
-        <p:nvSpPr>
-          <p:cNvPr id="3" name="TextBox 2"/>
-          <p:cNvSpPr txBox="1"/>
-          <p:nvPr/>
-        </p:nvSpPr>
-        <p:spPr>
-          <a:xfrm>
-            <a:off x="914400" y="868680"/>
-            <a:ext cx="10332720" cy="822960"/>
-          </a:xfrm>
-          <a:prstGeom prst="rect">
-            <a:avLst/>
-          </a:prstGeom>
-          <a:noFill/>
-        </p:spPr>
-        <p:txBody>
-          <a:bodyPr wrap="square" anchor="t">
-            <a:spAutoFit/>
-          </a:bodyPr>
-          <a:lstStyle/>
-          <a:p>
-            <a:pPr>
-              <a:lnSpc>
-                <a:spcPct val="114000"/>
-              </a:lnSpc>
-              <a:spcAft>
-                <a:spcPts val="0"/>
-              </a:spcAft>
-            </a:pPr>
-            <a:r>
-              <a:rPr sz="2600" b="1">
-                <a:solidFill>
-                  <a:srgbClr val="1C1C1E"/>
-                </a:solidFill>
-                <a:latin typeface="맑은 고딕"/>
-                <a:ea typeface="맑은 고딕"/>
-              </a:rPr>
-              <a:t>결론</a:t>
-            </a:r>
-          </a:p>
-        </p:txBody>
-      </p:sp>
-      <p:sp>
-        <p:nvSpPr>
-          <p:cNvPr id="4" name="Rectangle 3"/>
-          <p:cNvSpPr/>
-          <p:nvPr/>
-        </p:nvSpPr>
-        <p:spPr>
-          <a:xfrm>
-            <a:off x="932688" y="1920240"/>
-            <a:ext cx="4754880" cy="27432"/>
-          </a:xfrm>
-          <a:prstGeom prst="rect">
-            <a:avLst/>
-          </a:prstGeom>
-          <a:gradFill rotWithShape="1">
-            <a:gsLst>
-              <a:gs pos="0">
-                <a:srgbClr val="2A2E33"/>
-              </a:gs>
-              <a:gs pos="100000">
-                <a:srgbClr val="FFFFFF"/>
-              </a:gs>
-            </a:gsLst>
-            <a:lin scaled="0" ang="0"/>
-          </a:gradFill>
-          <a:ln>
-            <a:noFill/>
-          </a:ln>
-          <a:effectLst/>
-        </p:spPr>
-        <p:style>
-          <a:lnRef idx="1">
-            <a:schemeClr val="accent1"/>
-          </a:lnRef>
-          <a:fillRef idx="3">
-            <a:schemeClr val="accent1"/>
-          </a:fillRef>
-          <a:effectRef idx="2">
-            <a:schemeClr val="accent1"/>
-          </a:effectRef>
-          <a:fontRef idx="minor">
-            <a:schemeClr val="lt1"/>
-          </a:fontRef>
-        </p:style>
-        <p:txBody>
-          <a:bodyPr rtlCol="0" anchor="ctr"/>
-          <a:lstStyle/>
-          <a:p>
-            <a:pPr algn="ctr"/>
-          </a:p>
-        </p:txBody>
-      </p:sp>
-      <p:sp>
-        <p:nvSpPr>
-          <p:cNvPr id="5" name="TextBox 4"/>
-          <p:cNvSpPr txBox="1"/>
-          <p:nvPr/>
-        </p:nvSpPr>
-        <p:spPr>
-          <a:xfrm>
-            <a:off x="914400" y="2286000"/>
-            <a:ext cx="9144000" cy="2377440"/>
-          </a:xfrm>
-          <a:prstGeom prst="rect">
-            <a:avLst/>
-          </a:prstGeom>
-          <a:noFill/>
-        </p:spPr>
-        <p:txBody>
-          <a:bodyPr wrap="square" anchor="t">
-            <a:spAutoFit/>
-          </a:bodyPr>
-          <a:lstStyle/>
-          <a:p>
-            <a:pPr>
-              <a:lnSpc>
-                <a:spcPct val="114000"/>
-              </a:lnSpc>
-              <a:spcAft>
-                <a:spcPts val="600"/>
-              </a:spcAft>
-            </a:pPr>
-            <a:r>
-              <a:rPr sz="2200" b="1">
-                <a:solidFill>
-                  <a:srgbClr val="1C1C1E"/>
-                </a:solidFill>
-                <a:latin typeface="맑은 고딕"/>
-                <a:ea typeface="맑은 고딕"/>
-              </a:rPr>
-              <a:t>현행 배분은 취약의 깊이를 반영한다.</a:t>
-            </a:r>
-          </a:p>
-          <a:p>
-            <a:pPr>
-              <a:lnSpc>
-                <a:spcPct val="114000"/>
-              </a:lnSpc>
-              <a:spcAft>
-                <a:spcPts val="600"/>
-              </a:spcAft>
-            </a:pPr>
-            <a:r>
-              <a:rPr sz="2200" b="1">
-                <a:solidFill>
-                  <a:srgbClr val="1C1C1E"/>
-                </a:solidFill>
-                <a:latin typeface="맑은 고딕"/>
-                <a:ea typeface="맑은 고딕"/>
-              </a:rPr>
-              <a:t>다만 그 취약을 겪는 인원의 규모는 반영하지 않는다.</a:t>
-            </a:r>
-          </a:p>
-          <a:p>
-            <a:pPr>
-              <a:lnSpc>
-                <a:spcPct val="114000"/>
-              </a:lnSpc>
-              <a:spcAft>
-                <a:spcPts val="0"/>
-              </a:spcAft>
-            </a:pPr>
-            <a:r>
-              <a:rPr sz="2200" b="1">
-                <a:solidFill>
-                  <a:srgbClr val="000000"/>
-                </a:solidFill>
-                <a:latin typeface="맑은 고딕"/>
-                <a:ea typeface="맑은 고딕"/>
-              </a:rPr>
-              <a:t>우리는 정부 자신의 기준으로 그 축을 하나 추가했다.</a:t>
-            </a:r>
-          </a:p>
-        </p:txBody>
-      </p:sp>
-      <p:sp>
-        <p:nvSpPr>
-          <p:cNvPr id="6" name="TextBox 5"/>
-          <p:cNvSpPr txBox="1"/>
-          <p:nvPr/>
-        </p:nvSpPr>
-        <p:spPr>
-          <a:xfrm>
-            <a:off x="914400" y="4846320"/>
-            <a:ext cx="10332720" cy="1463040"/>
-          </a:xfrm>
-          <a:prstGeom prst="rect">
-            <a:avLst/>
-          </a:prstGeom>
-          <a:noFill/>
-        </p:spPr>
-        <p:txBody>
-          <a:bodyPr wrap="square" anchor="t">
-            <a:spAutoFit/>
-          </a:bodyPr>
-          <a:lstStyle/>
-          <a:p>
-            <a:pPr>
-              <a:lnSpc>
-                <a:spcPct val="114000"/>
-              </a:lnSpc>
-              <a:spcAft>
-                <a:spcPts val="400"/>
-              </a:spcAft>
-            </a:pPr>
-            <a:r>
-              <a:rPr sz="1300" b="0">
-                <a:solidFill>
-                  <a:srgbClr val="767A7F"/>
-                </a:solidFill>
-                <a:latin typeface="맑은 고딕"/>
-                <a:ea typeface="맑은 고딕"/>
-              </a:rPr>
-              <a:t>지정 단계: 판정식 99.4% 검증 + 공급 공백형 사각지대의 다중 증거</a:t>
-            </a:r>
-          </a:p>
-          <a:p>
-            <a:pPr>
-              <a:lnSpc>
-                <a:spcPct val="114000"/>
-              </a:lnSpc>
-              <a:spcAft>
-                <a:spcPts val="400"/>
-              </a:spcAft>
-            </a:pPr>
-            <a:r>
-              <a:rPr sz="1300" b="0">
-                <a:solidFill>
-                  <a:srgbClr val="767A7F"/>
-                </a:solidFill>
-                <a:latin typeface="맑은 고딕"/>
-                <a:ea typeface="맑은 고딕"/>
-              </a:rPr>
-              <a:t>배분 단계: 선정의 대부분이 공개 지표 밖 + 심도-부담 이원 우선순위·유형 배정 모형과 표 산출물</a:t>
-            </a:r>
-          </a:p>
-          <a:p>
-            <a:pPr>
-              <a:lnSpc>
-                <a:spcPct val="114000"/>
-              </a:lnSpc>
-              <a:spcAft>
-                <a:spcPts val="0"/>
-              </a:spcAft>
-            </a:pPr>
-            <a:r>
-              <a:rPr sz="1300" b="1">
-                <a:solidFill>
-                  <a:srgbClr val="33393F"/>
-                </a:solidFill>
-                <a:latin typeface="맑은 고딕"/>
-                <a:ea typeface="맑은 고딕"/>
-              </a:rPr>
-              <a:t>심도와 부담 중 무엇을 우선할지는 사회의 선택이다 — 본 연구의 기여는 그 선택을 명시적으로 만든 것이다.</a:t>
             </a:r>
           </a:p>
         </p:txBody>
@@ -11352,7 +11972,7 @@
                 <a:latin typeface="맑은 고딕"/>
                 <a:ea typeface="맑은 고딕"/>
               </a:rPr>
-              <a:t>연구 요약 — 네 가지 발견</a:t>
+              <a:t>출발점 — 의료 공백은 정말 "자원이 모자라서" 생기는가</a:t>
             </a:r>
           </a:p>
         </p:txBody>
@@ -11460,8 +12080,8 @@
         </p:nvSpPr>
         <p:spPr>
           <a:xfrm>
-            <a:off x="502920" y="6492240"/>
-            <a:ext cx="11247120" cy="320040"/>
+            <a:off x="548640" y="1097280"/>
+            <a:ext cx="11155680" cy="384048"/>
           </a:xfrm>
           <a:prstGeom prst="rect">
             <a:avLst/>
@@ -11483,6 +12103,49 @@
               </a:spcAft>
             </a:pPr>
             <a:r>
+              <a:rPr sz="1250" b="0">
+                <a:solidFill>
+                  <a:srgbClr val="767A7F"/>
+                </a:solidFill>
+                <a:latin typeface="맑은 고딕"/>
+                <a:ea typeface="맑은 고딕"/>
+              </a:rPr>
+              <a:t>이 연구가 어디서 시작했는지, 그리고 왜 "제도"를 분석 대상으로 삼았는지</a:t>
+            </a:r>
+          </a:p>
+        </p:txBody>
+      </p:sp>
+      <p:sp>
+        <p:nvSpPr>
+          <p:cNvPr id="8" name="TextBox 7"/>
+          <p:cNvSpPr txBox="1"/>
+          <p:nvPr/>
+        </p:nvSpPr>
+        <p:spPr>
+          <a:xfrm>
+            <a:off x="502920" y="6492240"/>
+            <a:ext cx="11247120" cy="320040"/>
+          </a:xfrm>
+          <a:prstGeom prst="rect">
+            <a:avLst/>
+          </a:prstGeom>
+          <a:noFill/>
+        </p:spPr>
+        <p:txBody>
+          <a:bodyPr wrap="square" anchor="t">
+            <a:spAutoFit/>
+          </a:bodyPr>
+          <a:lstStyle/>
+          <a:p>
+            <a:pPr>
+              <a:lnSpc>
+                <a:spcPct val="114000"/>
+              </a:lnSpc>
+              <a:spcAft>
+                <a:spcPts val="0"/>
+              </a:spcAft>
+            </a:pPr>
+            <a:r>
               <a:rPr sz="850" b="0">
                 <a:solidFill>
                   <a:srgbClr val="B2B5B9"/>
@@ -11497,18 +12160,18 @@
       </p:sp>
       <p:sp>
         <p:nvSpPr>
-          <p:cNvPr id="8" name="Rounded Rectangle 7"/>
+          <p:cNvPr id="9" name="Rounded Rectangle 8"/>
           <p:cNvSpPr/>
           <p:nvPr/>
         </p:nvSpPr>
         <p:spPr>
           <a:xfrm>
-            <a:off x="502920" y="1234440"/>
-            <a:ext cx="5532120" cy="1920240"/>
+            <a:off x="502920" y="1371600"/>
+            <a:ext cx="3611880" cy="1783080"/>
           </a:xfrm>
           <a:prstGeom prst="roundRect">
             <a:avLst>
-              <a:gd name="adj" fmla="val 4285"/>
+              <a:gd name="adj" fmla="val 4615"/>
             </a:avLst>
           </a:prstGeom>
           <a:solidFill>
@@ -11551,14 +12214,14 @@
       </p:sp>
       <p:sp>
         <p:nvSpPr>
-          <p:cNvPr id="9" name="TextBox 8"/>
+          <p:cNvPr id="10" name="TextBox 9"/>
           <p:cNvSpPr txBox="1"/>
           <p:nvPr/>
         </p:nvSpPr>
         <p:spPr>
           <a:xfrm>
-            <a:off x="685800" y="1362456"/>
-            <a:ext cx="5166359" cy="1664208"/>
+            <a:off x="685800" y="1499616"/>
+            <a:ext cx="3246120" cy="1527048"/>
           </a:xfrm>
           <a:prstGeom prst="rect">
             <a:avLst/>
@@ -11587,7 +12250,7 @@
                 <a:latin typeface="맑은 고딕"/>
                 <a:ea typeface="맑은 고딕"/>
               </a:rPr>
-              <a:t>발견 1 · 지정은 이동시간만 본다</a:t>
+              <a:t>① 익숙한 진단</a:t>
             </a:r>
           </a:p>
           <a:p>
@@ -11600,32 +12263,149 @@
               </a:spcAft>
             </a:pPr>
             <a:r>
-              <a:rPr sz="1150" b="0">
+              <a:rPr sz="1100" b="0">
                 <a:solidFill>
                   <a:srgbClr val="1C1C1E"/>
                 </a:solidFill>
                 <a:latin typeface="맑은 고딕"/>
                 <a:ea typeface="맑은 고딕"/>
               </a:rPr>
-              <a:t>• 공표 판정식(접근성·TRI)이 실제 지정 159건 중 158건(99.4%)을 재현. 공급 변수를 추가해도 판별력(AUC)은 전혀 늘지 않는다</a:t>
-            </a:r>
-          </a:p>
-        </p:txBody>
-      </p:sp>
-      <p:sp>
-        <p:nvSpPr>
-          <p:cNvPr id="10" name="Rounded Rectangle 9"/>
+              <a:t>• "지방에 분만실이 없다" — 해마다 반복되는 기사. 따라붙는 처방도 늘 같다: 의사를 늘리고 병원을 지어라</a:t>
+            </a:r>
+          </a:p>
+        </p:txBody>
+      </p:sp>
+      <p:sp>
+        <p:nvSpPr>
+          <p:cNvPr id="11" name="Rounded Rectangle 10"/>
           <p:cNvSpPr/>
           <p:nvPr/>
         </p:nvSpPr>
         <p:spPr>
           <a:xfrm>
-            <a:off x="6263640" y="1234440"/>
-            <a:ext cx="5532120" cy="1920240"/>
+            <a:off x="4343400" y="1371600"/>
+            <a:ext cx="3611880" cy="1783080"/>
           </a:xfrm>
           <a:prstGeom prst="roundRect">
             <a:avLst>
-              <a:gd name="adj" fmla="val 4285"/>
+              <a:gd name="adj" fmla="val 4615"/>
+            </a:avLst>
+          </a:prstGeom>
+          <a:solidFill>
+            <a:srgbClr val="FFFFFF"/>
+          </a:solidFill>
+          <a:ln w="12700">
+            <a:solidFill>
+              <a:srgbClr val="E4E6E9"/>
+            </a:solidFill>
+          </a:ln>
+          <a:effectLst>
+            <a:outerShdw blurRad="182880" dist="64008" dir="5400000" rotWithShape="0">
+              <a:srgbClr val="000000">
+                <a:alpha val="30000"/>
+              </a:srgbClr>
+            </a:outerShdw>
+          </a:effectLst>
+        </p:spPr>
+        <p:style>
+          <a:lnRef idx="1">
+            <a:schemeClr val="accent1"/>
+          </a:lnRef>
+          <a:fillRef idx="3">
+            <a:schemeClr val="accent1"/>
+          </a:fillRef>
+          <a:effectRef idx="2">
+            <a:schemeClr val="accent1"/>
+          </a:effectRef>
+          <a:fontRef idx="minor">
+            <a:schemeClr val="lt1"/>
+          </a:fontRef>
+        </p:style>
+        <p:txBody>
+          <a:bodyPr rtlCol="0" anchor="ctr"/>
+          <a:lstStyle/>
+          <a:p>
+            <a:pPr algn="ctr"/>
+          </a:p>
+        </p:txBody>
+      </p:sp>
+      <p:sp>
+        <p:nvSpPr>
+          <p:cNvPr id="12" name="TextBox 11"/>
+          <p:cNvSpPr txBox="1"/>
+          <p:nvPr/>
+        </p:nvSpPr>
+        <p:spPr>
+          <a:xfrm>
+            <a:off x="4526280" y="1499616"/>
+            <a:ext cx="3246120" cy="1527048"/>
+          </a:xfrm>
+          <a:prstGeom prst="rect">
+            <a:avLst/>
+          </a:prstGeom>
+          <a:noFill/>
+        </p:spPr>
+        <p:txBody>
+          <a:bodyPr wrap="square" anchor="t">
+            <a:spAutoFit/>
+          </a:bodyPr>
+          <a:lstStyle/>
+          <a:p>
+            <a:pPr>
+              <a:lnSpc>
+                <a:spcPct val="114000"/>
+              </a:lnSpc>
+              <a:spcAft>
+                <a:spcPts val="350"/>
+              </a:spcAft>
+            </a:pPr>
+            <a:r>
+              <a:rPr sz="1300" b="1">
+                <a:solidFill>
+                  <a:srgbClr val="33393F"/>
+                </a:solidFill>
+                <a:latin typeface="맑은 고딕"/>
+                <a:ea typeface="맑은 고딕"/>
+              </a:rPr>
+              <a:t>② 그 처방이 선 전제</a:t>
+            </a:r>
+          </a:p>
+          <a:p>
+            <a:pPr marL="160020" indent="-160020">
+              <a:lnSpc>
+                <a:spcPct val="114000"/>
+              </a:lnSpc>
+              <a:spcAft>
+                <a:spcPts val="200"/>
+              </a:spcAft>
+            </a:pPr>
+            <a:r>
+              <a:rPr sz="1100" b="0">
+                <a:solidFill>
+                  <a:srgbClr val="1C1C1E"/>
+                </a:solidFill>
+                <a:latin typeface="맑은 고딕"/>
+                <a:ea typeface="맑은 고딕"/>
+              </a:rPr>
+              <a:t>• 공백의 원인이 자원의 절대량 부족이라는 것. 사실이라면 답은 예산뿐이고, 데이터가 할 말은 없다</a:t>
+            </a:r>
+          </a:p>
+        </p:txBody>
+      </p:sp>
+      <p:sp>
+        <p:nvSpPr>
+          <p:cNvPr id="13" name="Rounded Rectangle 12"/>
+          <p:cNvSpPr/>
+          <p:nvPr/>
+        </p:nvSpPr>
+        <p:spPr>
+          <a:xfrm>
+            <a:off x="8183880" y="1371600"/>
+            <a:ext cx="3611880" cy="1783080"/>
+          </a:xfrm>
+          <a:prstGeom prst="roundRect">
+            <a:avLst>
+              <a:gd name="adj" fmla="val 4615"/>
             </a:avLst>
           </a:prstGeom>
           <a:solidFill>
@@ -11668,14 +12448,14 @@
       </p:sp>
       <p:sp>
         <p:nvSpPr>
-          <p:cNvPr id="11" name="TextBox 10"/>
+          <p:cNvPr id="14" name="TextBox 13"/>
           <p:cNvSpPr txBox="1"/>
           <p:nvPr/>
         </p:nvSpPr>
         <p:spPr>
           <a:xfrm>
-            <a:off x="6446520" y="1362456"/>
-            <a:ext cx="5166359" cy="1664208"/>
+            <a:off x="8366760" y="1499616"/>
+            <a:ext cx="3246120" cy="1527048"/>
           </a:xfrm>
           <a:prstGeom prst="rect">
             <a:avLst/>
@@ -11704,7 +12484,7 @@
                 <a:latin typeface="맑은 고딕"/>
                 <a:ea typeface="맑은 고딕"/>
               </a:rPr>
-              <a:t>발견 2 · 공급 공백형 사각지대 실재</a:t>
+              <a:t>③ 우리의 의심</a:t>
             </a:r>
           </a:p>
           <a:p>
@@ -11717,149 +12497,32 @@
               </a:spcAft>
             </a:pPr>
             <a:r>
-              <a:rPr sz="1150" b="0">
+              <a:rPr sz="1100" b="0">
                 <a:solidFill>
                   <a:srgbClr val="1C1C1E"/>
                 </a:solidFill>
                 <a:latin typeface="맑은 고딕"/>
                 <a:ea typeface="맑은 고딕"/>
               </a:rPr>
-              <a:t>• 거리 기준은 통과하지만 관내 공급이 소멸한 지역 — 분만 완전 사각 5곳(등급 체계 밖), 소아과 5개 지역 입원 5,689건 전량(100%) 관외 유출</a:t>
-            </a:r>
-          </a:p>
-        </p:txBody>
-      </p:sp>
-      <p:sp>
-        <p:nvSpPr>
-          <p:cNvPr id="12" name="Rounded Rectangle 11"/>
+              <a:t>• 자원이 없는 것과, 있는 자원이 필요한 곳에 닿지 않는 것은 다른 문제다. 뒤쪽이라면 예산 없이도 줄일 수 있다</a:t>
+            </a:r>
+          </a:p>
+        </p:txBody>
+      </p:sp>
+      <p:sp>
+        <p:nvSpPr>
+          <p:cNvPr id="15" name="Rounded Rectangle 14"/>
           <p:cNvSpPr/>
           <p:nvPr/>
         </p:nvSpPr>
         <p:spPr>
           <a:xfrm>
-            <a:off x="502920" y="3383280"/>
-            <a:ext cx="5532120" cy="1920240"/>
+            <a:off x="502920" y="3401568"/>
+            <a:ext cx="11292840" cy="1572768"/>
           </a:xfrm>
           <a:prstGeom prst="roundRect">
             <a:avLst>
-              <a:gd name="adj" fmla="val 4285"/>
-            </a:avLst>
-          </a:prstGeom>
-          <a:solidFill>
-            <a:srgbClr val="F1F2F3"/>
-          </a:solidFill>
-          <a:ln w="15875">
-            <a:solidFill>
-              <a:srgbClr val="9AA0A6"/>
-            </a:solidFill>
-          </a:ln>
-          <a:effectLst>
-            <a:outerShdw blurRad="182880" dist="64008" dir="5400000" rotWithShape="0">
-              <a:srgbClr val="000000">
-                <a:alpha val="32000"/>
-              </a:srgbClr>
-            </a:outerShdw>
-          </a:effectLst>
-        </p:spPr>
-        <p:style>
-          <a:lnRef idx="1">
-            <a:schemeClr val="accent1"/>
-          </a:lnRef>
-          <a:fillRef idx="3">
-            <a:schemeClr val="accent1"/>
-          </a:fillRef>
-          <a:effectRef idx="2">
-            <a:schemeClr val="accent1"/>
-          </a:effectRef>
-          <a:fontRef idx="minor">
-            <a:schemeClr val="lt1"/>
-          </a:fontRef>
-        </p:style>
-        <p:txBody>
-          <a:bodyPr rtlCol="0" anchor="ctr"/>
-          <a:lstStyle/>
-          <a:p>
-            <a:pPr algn="ctr"/>
-          </a:p>
-        </p:txBody>
-      </p:sp>
-      <p:sp>
-        <p:nvSpPr>
-          <p:cNvPr id="13" name="TextBox 12"/>
-          <p:cNvSpPr txBox="1"/>
-          <p:nvPr/>
-        </p:nvSpPr>
-        <p:spPr>
-          <a:xfrm>
-            <a:off x="685800" y="3511296"/>
-            <a:ext cx="5166359" cy="1664208"/>
-          </a:xfrm>
-          <a:prstGeom prst="rect">
-            <a:avLst/>
-          </a:prstGeom>
-          <a:noFill/>
-        </p:spPr>
-        <p:txBody>
-          <a:bodyPr wrap="square" anchor="t">
-            <a:spAutoFit/>
-          </a:bodyPr>
-          <a:lstStyle/>
-          <a:p>
-            <a:pPr>
-              <a:lnSpc>
-                <a:spcPct val="114000"/>
-              </a:lnSpc>
-              <a:spcAft>
-                <a:spcPts val="350"/>
-              </a:spcAft>
-            </a:pPr>
-            <a:r>
-              <a:rPr sz="1300" b="1">
-                <a:solidFill>
-                  <a:srgbClr val="000000"/>
-                </a:solidFill>
-                <a:latin typeface="맑은 고딕"/>
-                <a:ea typeface="맑은 고딕"/>
-              </a:rPr>
-              <a:t>발견 3 · 배분 규칙은 데이터 밖에 있다</a:t>
-            </a:r>
-          </a:p>
-          <a:p>
-            <a:pPr marL="160020" indent="-160020">
-              <a:lnSpc>
-                <a:spcPct val="114000"/>
-              </a:lnSpc>
-              <a:spcAft>
-                <a:spcPts val="200"/>
-              </a:spcAft>
-            </a:pPr>
-            <a:r>
-              <a:rPr sz="1150" b="0">
-                <a:solidFill>
-                  <a:srgbClr val="1C1C1E"/>
-                </a:solidFill>
-                <a:latin typeface="맑은 고딕"/>
-                <a:ea typeface="맑은 고딕"/>
-              </a:rPr>
-              <a:t>• 실질 취약지 A·B 53곳 중 21곳만 기지원. A등급 지원 오즈는 B의 4.82배(p=0.021)인데, 그 선정은 공개 지표로 16% 남짓만 설명된다(McFadden R² 0.163)</a:t>
-            </a:r>
-          </a:p>
-        </p:txBody>
-      </p:sp>
-      <p:sp>
-        <p:nvSpPr>
-          <p:cNvPr id="14" name="Rounded Rectangle 13"/>
-          <p:cNvSpPr/>
-          <p:nvPr/>
-        </p:nvSpPr>
-        <p:spPr>
-          <a:xfrm>
-            <a:off x="6263640" y="3383280"/>
-            <a:ext cx="5532120" cy="1920240"/>
-          </a:xfrm>
-          <a:prstGeom prst="roundRect">
-            <a:avLst>
-              <a:gd name="adj" fmla="val 4285"/>
+              <a:gd name="adj" fmla="val 5232"/>
             </a:avLst>
           </a:prstGeom>
           <a:solidFill>
@@ -11902,14 +12565,14 @@
       </p:sp>
       <p:sp>
         <p:nvSpPr>
-          <p:cNvPr id="15" name="TextBox 14"/>
+          <p:cNvPr id="16" name="TextBox 15"/>
           <p:cNvSpPr txBox="1"/>
           <p:nvPr/>
         </p:nvSpPr>
         <p:spPr>
           <a:xfrm>
-            <a:off x="6446520" y="3511296"/>
-            <a:ext cx="5166359" cy="1664208"/>
+            <a:off x="685800" y="3529584"/>
+            <a:ext cx="10927080" cy="1316736"/>
           </a:xfrm>
           <a:prstGeom prst="rect">
             <a:avLst/>
@@ -11938,7 +12601,7 @@
                 <a:latin typeface="맑은 고딕"/>
                 <a:ea typeface="맑은 고딕"/>
               </a:rPr>
-              <a:t>발견 4 · 깊이는 보지만 인원 수는 안 본다</a:t>
+              <a:t>그리고 자원을 공백 지역으로 보내는 제도는 이미 있다 — 「분만취약지 지원사업」(15년째)</a:t>
             </a:r>
           </a:p>
           <a:p>
@@ -11951,28 +12614,68 @@
               </a:spcAft>
             </a:pPr>
             <a:r>
-              <a:rPr sz="1150" b="0">
+              <a:rPr sz="1100" b="0">
                 <a:solidFill>
                   <a:srgbClr val="1C1C1E"/>
                 </a:solidFill>
                 <a:latin typeface="맑은 고딕"/>
                 <a:ea typeface="맑은 고딕"/>
               </a:rPr>
-              <a:t>• 현행 배분은 취약 심도와는 정렬(ρ=+0.381), 영향 인원 규모(부담)와는 무관(ρ=−0.131). 두 관점의 순위 상관은 −0.190 — 축의 선택이 결과를 바꾼다</a:t>
-            </a:r>
-          </a:p>
-        </p:txBody>
-      </p:sp>
-      <p:sp>
-        <p:nvSpPr>
-          <p:cNvPr id="16" name="TextBox 15"/>
+              <a:t>• 분만취약지 = 소득·인구가 적은 지역이 아니라, 그 지역 가임기 여성이 ① 분만 가능 기관까지 60분 안에 닿기 어렵고(접근성) ② 실제 출산도 60분 안에 하지 못하는(이용률) 시·군</a:t>
+            </a:r>
+          </a:p>
+          <a:p>
+            <a:pPr marL="160020" indent="-160020">
+              <a:lnSpc>
+                <a:spcPct val="114000"/>
+              </a:lnSpc>
+              <a:spcAft>
+                <a:spcPts val="200"/>
+              </a:spcAft>
+            </a:pPr>
+            <a:r>
+              <a:rPr sz="1100" b="0">
+                <a:solidFill>
+                  <a:srgbClr val="1C1C1E"/>
+                </a:solidFill>
+                <a:latin typeface="맑은 고딕"/>
+                <a:ea typeface="맑은 고딕"/>
+              </a:rPr>
+              <a:t>• 즉 이 제도에서 "취약"은 처음부터 끝까지 거리와 시간으로 정의된다 — 이 점이 본 연구의 첫 번째 표적이 된다</a:t>
+            </a:r>
+          </a:p>
+          <a:p>
+            <a:pPr marL="160020" indent="-160020">
+              <a:lnSpc>
+                <a:spcPct val="114000"/>
+              </a:lnSpc>
+              <a:spcAft>
+                <a:spcPts val="200"/>
+              </a:spcAft>
+            </a:pPr>
+            <a:r>
+              <a:rPr sz="1100" b="0">
+                <a:solidFill>
+                  <a:srgbClr val="1C1C1E"/>
+                </a:solidFill>
+                <a:latin typeface="맑은 고딕"/>
+                <a:ea typeface="맑은 고딕"/>
+              </a:rPr>
+              <a:t>• 정부는 2년마다 전국을 재어 A·B·C 등급을 매기고, 지정 지역 병원에 분만실 설치비 약 10억 원 + 연 운영비 약 5억 원을 지원 (15년 누적 57개소)</a:t>
+            </a:r>
+          </a:p>
+        </p:txBody>
+      </p:sp>
+      <p:sp>
+        <p:nvSpPr>
+          <p:cNvPr id="17" name="TextBox 16"/>
           <p:cNvSpPr txBox="1"/>
           <p:nvPr/>
         </p:nvSpPr>
         <p:spPr>
           <a:xfrm>
-            <a:off x="502920" y="5623560"/>
-            <a:ext cx="11247120" cy="548640"/>
+            <a:off x="502920" y="5230368"/>
+            <a:ext cx="11247120" cy="1005840"/>
           </a:xfrm>
           <a:prstGeom prst="rect">
             <a:avLst/>
@@ -11990,18 +12693,361 @@
                 <a:spcPct val="114000"/>
               </a:lnSpc>
               <a:spcAft>
+                <a:spcPts val="400"/>
+              </a:spcAft>
+            </a:pPr>
+            <a:r>
+              <a:rPr sz="1500" b="1">
+                <a:solidFill>
+                  <a:srgbClr val="1C1C1E"/>
+                </a:solidFill>
+                <a:latin typeface="맑은 고딕"/>
+                <a:ea typeface="맑은 고딕"/>
+              </a:rPr>
+              <a:t>통로가 이미 깔려 있다면, 물어야 할 것은 "얼마나 부족한가"가 아니다.</a:t>
+            </a:r>
+          </a:p>
+          <a:p>
+            <a:pPr>
+              <a:lnSpc>
+                <a:spcPct val="114000"/>
+              </a:lnSpc>
+              <a:spcAft>
                 <a:spcPts val="0"/>
               </a:spcAft>
             </a:pPr>
             <a:r>
-              <a:rPr sz="1200" b="1">
+              <a:rPr sz="1500" b="1">
+                <a:solidFill>
+                  <a:srgbClr val="000000"/>
+                </a:solidFill>
+                <a:latin typeface="맑은 고딕"/>
+                <a:ea typeface="맑은 고딕"/>
+              </a:rPr>
+              <a:t>"지금 있는 것은 필요한 곳으로 제대로 가고 있는가" — 이것이 본 연구의 질문이다.</a:t>
+            </a:r>
+          </a:p>
+        </p:txBody>
+      </p:sp>
+    </p:spTree>
+  </p:cSld>
+  <p:clrMapOvr>
+    <a:masterClrMapping/>
+  </p:clrMapOvr>
+</p:sld>
+</file>
+
+<file path=ppt/slides/slide20.xml><?xml version="1.0" encoding="utf-8"?>
+<p:sld xmlns:a="http://schemas.openxmlformats.org/drawingml/2006/main" xmlns:p="http://schemas.openxmlformats.org/presentationml/2006/main" xmlns:r="http://schemas.openxmlformats.org/officeDocument/2006/relationships">
+  <p:cSld>
+    <p:spTree>
+      <p:nvGrpSpPr>
+        <p:cNvPr id="1" name=""/>
+        <p:cNvGrpSpPr/>
+        <p:nvPr/>
+      </p:nvGrpSpPr>
+      <p:grpSpPr/>
+      <p:sp>
+        <p:nvSpPr>
+          <p:cNvPr id="2" name="Rectangle 1"/>
+          <p:cNvSpPr/>
+          <p:nvPr/>
+        </p:nvSpPr>
+        <p:spPr>
+          <a:xfrm>
+            <a:off x="0" y="0"/>
+            <a:ext cx="12191695" cy="6858000"/>
+          </a:xfrm>
+          <a:prstGeom prst="rect">
+            <a:avLst/>
+          </a:prstGeom>
+          <a:solidFill>
+            <a:srgbClr val="FFFFFF"/>
+          </a:solidFill>
+          <a:ln>
+            <a:noFill/>
+          </a:ln>
+          <a:effectLst/>
+        </p:spPr>
+        <p:style>
+          <a:lnRef idx="1">
+            <a:schemeClr val="accent1"/>
+          </a:lnRef>
+          <a:fillRef idx="3">
+            <a:schemeClr val="accent1"/>
+          </a:fillRef>
+          <a:effectRef idx="2">
+            <a:schemeClr val="accent1"/>
+          </a:effectRef>
+          <a:fontRef idx="minor">
+            <a:schemeClr val="lt1"/>
+          </a:fontRef>
+        </p:style>
+        <p:txBody>
+          <a:bodyPr rtlCol="0" anchor="ctr"/>
+          <a:lstStyle/>
+          <a:p>
+            <a:pPr algn="ctr"/>
+          </a:p>
+        </p:txBody>
+      </p:sp>
+      <p:sp>
+        <p:nvSpPr>
+          <p:cNvPr id="3" name="TextBox 2"/>
+          <p:cNvSpPr txBox="1"/>
+          <p:nvPr/>
+        </p:nvSpPr>
+        <p:spPr>
+          <a:xfrm>
+            <a:off x="914400" y="868680"/>
+            <a:ext cx="10332720" cy="822960"/>
+          </a:xfrm>
+          <a:prstGeom prst="rect">
+            <a:avLst/>
+          </a:prstGeom>
+          <a:noFill/>
+        </p:spPr>
+        <p:txBody>
+          <a:bodyPr wrap="square" anchor="t">
+            <a:spAutoFit/>
+          </a:bodyPr>
+          <a:lstStyle/>
+          <a:p>
+            <a:pPr>
+              <a:lnSpc>
+                <a:spcPct val="114000"/>
+              </a:lnSpc>
+              <a:spcAft>
+                <a:spcPts val="0"/>
+              </a:spcAft>
+            </a:pPr>
+            <a:r>
+              <a:rPr sz="2600" b="1">
                 <a:solidFill>
                   <a:srgbClr val="1C1C1E"/>
                 </a:solidFill>
                 <a:latin typeface="맑은 고딕"/>
                 <a:ea typeface="맑은 고딕"/>
               </a:rPr>
-              <a:t>데이터: 헬스맵 공공 데이터셋 9종(2023, 226만 행) + 복지부 공고·지침 — 전량 공개 자료, 전 수치 독립 재실행 검증 완료</a:t>
+              <a:t>결론</a:t>
+            </a:r>
+          </a:p>
+        </p:txBody>
+      </p:sp>
+      <p:sp>
+        <p:nvSpPr>
+          <p:cNvPr id="4" name="Rectangle 3"/>
+          <p:cNvSpPr/>
+          <p:nvPr/>
+        </p:nvSpPr>
+        <p:spPr>
+          <a:xfrm>
+            <a:off x="932688" y="1920240"/>
+            <a:ext cx="4754880" cy="27432"/>
+          </a:xfrm>
+          <a:prstGeom prst="rect">
+            <a:avLst/>
+          </a:prstGeom>
+          <a:gradFill rotWithShape="1">
+            <a:gsLst>
+              <a:gs pos="0">
+                <a:srgbClr val="2A2E33"/>
+              </a:gs>
+              <a:gs pos="100000">
+                <a:srgbClr val="FFFFFF"/>
+              </a:gs>
+            </a:gsLst>
+            <a:lin scaled="0" ang="0"/>
+          </a:gradFill>
+          <a:ln>
+            <a:noFill/>
+          </a:ln>
+          <a:effectLst/>
+        </p:spPr>
+        <p:style>
+          <a:lnRef idx="1">
+            <a:schemeClr val="accent1"/>
+          </a:lnRef>
+          <a:fillRef idx="3">
+            <a:schemeClr val="accent1"/>
+          </a:fillRef>
+          <a:effectRef idx="2">
+            <a:schemeClr val="accent1"/>
+          </a:effectRef>
+          <a:fontRef idx="minor">
+            <a:schemeClr val="lt1"/>
+          </a:fontRef>
+        </p:style>
+        <p:txBody>
+          <a:bodyPr rtlCol="0" anchor="ctr"/>
+          <a:lstStyle/>
+          <a:p>
+            <a:pPr algn="ctr"/>
+          </a:p>
+        </p:txBody>
+      </p:sp>
+      <p:sp>
+        <p:nvSpPr>
+          <p:cNvPr id="5" name="TextBox 4"/>
+          <p:cNvSpPr txBox="1"/>
+          <p:nvPr/>
+        </p:nvSpPr>
+        <p:spPr>
+          <a:xfrm>
+            <a:off x="914400" y="2286000"/>
+            <a:ext cx="9144000" cy="2377440"/>
+          </a:xfrm>
+          <a:prstGeom prst="rect">
+            <a:avLst/>
+          </a:prstGeom>
+          <a:noFill/>
+        </p:spPr>
+        <p:txBody>
+          <a:bodyPr wrap="square" anchor="t">
+            <a:spAutoFit/>
+          </a:bodyPr>
+          <a:lstStyle/>
+          <a:p>
+            <a:pPr>
+              <a:lnSpc>
+                <a:spcPct val="114000"/>
+              </a:lnSpc>
+              <a:spcAft>
+                <a:spcPts val="600"/>
+              </a:spcAft>
+            </a:pPr>
+            <a:r>
+              <a:rPr sz="2200" b="1">
+                <a:solidFill>
+                  <a:srgbClr val="1C1C1E"/>
+                </a:solidFill>
+                <a:latin typeface="맑은 고딕"/>
+                <a:ea typeface="맑은 고딕"/>
+              </a:rPr>
+              <a:t>현행 배분은 취약의 깊이를 반영한다.</a:t>
+            </a:r>
+          </a:p>
+          <a:p>
+            <a:pPr>
+              <a:lnSpc>
+                <a:spcPct val="114000"/>
+              </a:lnSpc>
+              <a:spcAft>
+                <a:spcPts val="600"/>
+              </a:spcAft>
+            </a:pPr>
+            <a:r>
+              <a:rPr sz="2200" b="1">
+                <a:solidFill>
+                  <a:srgbClr val="1C1C1E"/>
+                </a:solidFill>
+                <a:latin typeface="맑은 고딕"/>
+                <a:ea typeface="맑은 고딕"/>
+              </a:rPr>
+              <a:t>다만 그 취약을 겪는 인원의 규모는 반영하지 않는다.</a:t>
+            </a:r>
+          </a:p>
+          <a:p>
+            <a:pPr>
+              <a:lnSpc>
+                <a:spcPct val="114000"/>
+              </a:lnSpc>
+              <a:spcAft>
+                <a:spcPts val="0"/>
+              </a:spcAft>
+            </a:pPr>
+            <a:r>
+              <a:rPr sz="2200" b="1">
+                <a:solidFill>
+                  <a:srgbClr val="000000"/>
+                </a:solidFill>
+                <a:latin typeface="맑은 고딕"/>
+                <a:ea typeface="맑은 고딕"/>
+              </a:rPr>
+              <a:t>우리는 정부 자신의 기준으로 그 축을 하나 추가했다.</a:t>
+            </a:r>
+          </a:p>
+        </p:txBody>
+      </p:sp>
+      <p:sp>
+        <p:nvSpPr>
+          <p:cNvPr id="6" name="TextBox 5"/>
+          <p:cNvSpPr txBox="1"/>
+          <p:nvPr/>
+        </p:nvSpPr>
+        <p:spPr>
+          <a:xfrm>
+            <a:off x="914400" y="4846320"/>
+            <a:ext cx="10332720" cy="1463040"/>
+          </a:xfrm>
+          <a:prstGeom prst="rect">
+            <a:avLst/>
+          </a:prstGeom>
+          <a:noFill/>
+        </p:spPr>
+        <p:txBody>
+          <a:bodyPr wrap="square" anchor="t">
+            <a:spAutoFit/>
+          </a:bodyPr>
+          <a:lstStyle/>
+          <a:p>
+            <a:pPr>
+              <a:lnSpc>
+                <a:spcPct val="114000"/>
+              </a:lnSpc>
+              <a:spcAft>
+                <a:spcPts val="400"/>
+              </a:spcAft>
+            </a:pPr>
+            <a:r>
+              <a:rPr sz="1300" b="0">
+                <a:solidFill>
+                  <a:srgbClr val="767A7F"/>
+                </a:solidFill>
+                <a:latin typeface="맑은 고딕"/>
+                <a:ea typeface="맑은 고딕"/>
+              </a:rPr>
+              <a:t>지정 단계: 판정식 99.4% 검증 + 공급 공백형 사각지대의 다중 증거</a:t>
+            </a:r>
+          </a:p>
+          <a:p>
+            <a:pPr>
+              <a:lnSpc>
+                <a:spcPct val="114000"/>
+              </a:lnSpc>
+              <a:spcAft>
+                <a:spcPts val="400"/>
+              </a:spcAft>
+            </a:pPr>
+            <a:r>
+              <a:rPr sz="1300" b="0">
+                <a:solidFill>
+                  <a:srgbClr val="767A7F"/>
+                </a:solidFill>
+                <a:latin typeface="맑은 고딕"/>
+                <a:ea typeface="맑은 고딕"/>
+              </a:rPr>
+              <a:t>배분 단계: 선정의 대부분이 공개 지표 밖 + 심도-부담 이원 우선순위·유형 배정 모형과 표 산출물</a:t>
+            </a:r>
+          </a:p>
+          <a:p>
+            <a:pPr>
+              <a:lnSpc>
+                <a:spcPct val="114000"/>
+              </a:lnSpc>
+              <a:spcAft>
+                <a:spcPts val="0"/>
+              </a:spcAft>
+            </a:pPr>
+            <a:r>
+              <a:rPr sz="1300" b="1">
+                <a:solidFill>
+                  <a:srgbClr val="33393F"/>
+                </a:solidFill>
+                <a:latin typeface="맑은 고딕"/>
+                <a:ea typeface="맑은 고딕"/>
+              </a:rPr>
+              <a:t>심도와 부담 중 무엇을 우선할지는 사회의 선택이다 — 본 연구의 기여는 그 선택을 명시적으로 만든 것이다.</a:t>
             </a:r>
           </a:p>
         </p:txBody>
@@ -12166,7 +13212,7 @@
                 <a:latin typeface="맑은 고딕"/>
                 <a:ea typeface="맑은 고딕"/>
               </a:rPr>
-              <a:t>문제 — 측정·지정·배분 파이프라인의 두 공백</a:t>
+              <a:t>연구 요약 — 네 가지 발견</a:t>
             </a:r>
           </a:p>
         </p:txBody>
@@ -12318,11 +13364,11 @@
         <p:spPr>
           <a:xfrm>
             <a:off x="502920" y="1234440"/>
-            <a:ext cx="3291840" cy="1005840"/>
+            <a:ext cx="5532120" cy="1920240"/>
           </a:xfrm>
           <a:prstGeom prst="roundRect">
             <a:avLst>
-              <a:gd name="adj" fmla="val 8181"/>
+              <a:gd name="adj" fmla="val 4285"/>
             </a:avLst>
           </a:prstGeom>
           <a:solidFill>
@@ -12371,8 +13417,8 @@
         </p:nvSpPr>
         <p:spPr>
           <a:xfrm>
-            <a:off x="640080" y="1325880"/>
-            <a:ext cx="3017520" cy="822960"/>
+            <a:off x="685800" y="1362456"/>
+            <a:ext cx="5166359" cy="1664208"/>
           </a:xfrm>
           <a:prstGeom prst="rect">
             <a:avLst/>
@@ -12390,30 +13436,30 @@
                 <a:spcPct val="114000"/>
               </a:lnSpc>
               <a:spcAft>
+                <a:spcPts val="350"/>
+              </a:spcAft>
+            </a:pPr>
+            <a:r>
+              <a:rPr sz="1300" b="1">
+                <a:solidFill>
+                  <a:srgbClr val="33393F"/>
+                </a:solidFill>
+                <a:latin typeface="맑은 고딕"/>
+                <a:ea typeface="맑은 고딕"/>
+              </a:rPr>
+              <a:t>발견 1 · 지정은 이동시간만 본다</a:t>
+            </a:r>
+          </a:p>
+          <a:p>
+            <a:pPr marL="160020" indent="-160020">
+              <a:lnSpc>
+                <a:spcPct val="114000"/>
+              </a:lnSpc>
+              <a:spcAft>
                 <a:spcPts val="200"/>
               </a:spcAft>
             </a:pPr>
             <a:r>
-              <a:rPr sz="1400" b="1">
-                <a:solidFill>
-                  <a:srgbClr val="33393F"/>
-                </a:solidFill>
-                <a:latin typeface="맑은 고딕"/>
-                <a:ea typeface="맑은 고딕"/>
-              </a:rPr>
-              <a:t>① 측정</a:t>
-            </a:r>
-          </a:p>
-          <a:p>
-            <a:pPr>
-              <a:lnSpc>
-                <a:spcPct val="114000"/>
-              </a:lnSpc>
-              <a:spcAft>
-                <a:spcPts val="0"/>
-              </a:spcAft>
-            </a:pPr>
-            <a:r>
               <a:rPr sz="1150" b="0">
                 <a:solidFill>
                   <a:srgbClr val="1C1C1E"/>
@@ -12421,68 +13467,25 @@
                 <a:latin typeface="맑은 고딕"/>
                 <a:ea typeface="맑은 고딕"/>
               </a:rPr>
-              <a:t>2년마다 접근성·이용률 산출</a:t>
-            </a:r>
-          </a:p>
-        </p:txBody>
-      </p:sp>
-      <p:sp>
-        <p:nvSpPr>
-          <p:cNvPr id="10" name="TextBox 9"/>
-          <p:cNvSpPr txBox="1"/>
-          <p:nvPr/>
-        </p:nvSpPr>
-        <p:spPr>
-          <a:xfrm>
-            <a:off x="3813048" y="1417320"/>
-            <a:ext cx="685800" cy="548640"/>
-          </a:xfrm>
-          <a:prstGeom prst="rect">
-            <a:avLst/>
-          </a:prstGeom>
-          <a:noFill/>
-        </p:spPr>
-        <p:txBody>
-          <a:bodyPr wrap="square" anchor="t">
-            <a:spAutoFit/>
-          </a:bodyPr>
-          <a:lstStyle/>
-          <a:p>
-            <a:pPr>
-              <a:lnSpc>
-                <a:spcPct val="114000"/>
-              </a:lnSpc>
-              <a:spcAft>
-                <a:spcPts val="0"/>
-              </a:spcAft>
-            </a:pPr>
-            <a:r>
-              <a:rPr sz="2200" b="1">
-                <a:solidFill>
-                  <a:srgbClr val="767A7F"/>
-                </a:solidFill>
-                <a:latin typeface="맑은 고딕"/>
-                <a:ea typeface="맑은 고딕"/>
-              </a:rPr>
-              <a:t>→</a:t>
-            </a:r>
-          </a:p>
-        </p:txBody>
-      </p:sp>
-      <p:sp>
-        <p:nvSpPr>
-          <p:cNvPr id="11" name="Rounded Rectangle 10"/>
+              <a:t>• 공표 판정식(접근성·TRI)이 실제 지정 159건 중 158건(99.4%)을 재현. 공급 변수를 추가해도 판별력(AUC)은 전혀 늘지 않는다</a:t>
+            </a:r>
+          </a:p>
+        </p:txBody>
+      </p:sp>
+      <p:sp>
+        <p:nvSpPr>
+          <p:cNvPr id="10" name="Rounded Rectangle 9"/>
           <p:cNvSpPr/>
           <p:nvPr/>
         </p:nvSpPr>
         <p:spPr>
           <a:xfrm>
-            <a:off x="4480559" y="1234440"/>
-            <a:ext cx="3291840" cy="1005840"/>
+            <a:off x="6263640" y="1234440"/>
+            <a:ext cx="5532120" cy="1920240"/>
           </a:xfrm>
           <a:prstGeom prst="roundRect">
             <a:avLst>
-              <a:gd name="adj" fmla="val 8181"/>
+              <a:gd name="adj" fmla="val 4285"/>
             </a:avLst>
           </a:prstGeom>
           <a:solidFill>
@@ -12525,14 +13528,14 @@
       </p:sp>
       <p:sp>
         <p:nvSpPr>
-          <p:cNvPr id="12" name="TextBox 11"/>
+          <p:cNvPr id="11" name="TextBox 10"/>
           <p:cNvSpPr txBox="1"/>
           <p:nvPr/>
         </p:nvSpPr>
         <p:spPr>
           <a:xfrm>
-            <a:off x="4617720" y="1325880"/>
-            <a:ext cx="3017520" cy="822960"/>
+            <a:off x="6446520" y="1362456"/>
+            <a:ext cx="5166359" cy="1664208"/>
           </a:xfrm>
           <a:prstGeom prst="rect">
             <a:avLst/>
@@ -12550,30 +13553,30 @@
                 <a:spcPct val="114000"/>
               </a:lnSpc>
               <a:spcAft>
+                <a:spcPts val="350"/>
+              </a:spcAft>
+            </a:pPr>
+            <a:r>
+              <a:rPr sz="1300" b="1">
+                <a:solidFill>
+                  <a:srgbClr val="000000"/>
+                </a:solidFill>
+                <a:latin typeface="맑은 고딕"/>
+                <a:ea typeface="맑은 고딕"/>
+              </a:rPr>
+              <a:t>발견 2 · 공급 공백형 사각지대 실재</a:t>
+            </a:r>
+          </a:p>
+          <a:p>
+            <a:pPr marL="160020" indent="-160020">
+              <a:lnSpc>
+                <a:spcPct val="114000"/>
+              </a:lnSpc>
+              <a:spcAft>
                 <a:spcPts val="200"/>
               </a:spcAft>
             </a:pPr>
             <a:r>
-              <a:rPr sz="1400" b="1">
-                <a:solidFill>
-                  <a:srgbClr val="33393F"/>
-                </a:solidFill>
-                <a:latin typeface="맑은 고딕"/>
-                <a:ea typeface="맑은 고딕"/>
-              </a:rPr>
-              <a:t>② 지정</a:t>
-            </a:r>
-          </a:p>
-          <a:p>
-            <a:pPr>
-              <a:lnSpc>
-                <a:spcPct val="114000"/>
-              </a:lnSpc>
-              <a:spcAft>
-                <a:spcPts val="0"/>
-              </a:spcAft>
-            </a:pPr>
-            <a:r>
               <a:rPr sz="1150" b="0">
                 <a:solidFill>
                   <a:srgbClr val="1C1C1E"/>
@@ -12581,68 +13584,25 @@
                 <a:latin typeface="맑은 고딕"/>
                 <a:ea typeface="맑은 고딕"/>
               </a:rPr>
-              <a:t>이동시간 지표만으로 판정</a:t>
-            </a:r>
-          </a:p>
-        </p:txBody>
-      </p:sp>
-      <p:sp>
-        <p:nvSpPr>
-          <p:cNvPr id="13" name="TextBox 12"/>
-          <p:cNvSpPr txBox="1"/>
-          <p:nvPr/>
-        </p:nvSpPr>
-        <p:spPr>
-          <a:xfrm>
-            <a:off x="7790688" y="1417320"/>
-            <a:ext cx="685800" cy="548640"/>
-          </a:xfrm>
-          <a:prstGeom prst="rect">
-            <a:avLst/>
-          </a:prstGeom>
-          <a:noFill/>
-        </p:spPr>
-        <p:txBody>
-          <a:bodyPr wrap="square" anchor="t">
-            <a:spAutoFit/>
-          </a:bodyPr>
-          <a:lstStyle/>
-          <a:p>
-            <a:pPr>
-              <a:lnSpc>
-                <a:spcPct val="114000"/>
-              </a:lnSpc>
-              <a:spcAft>
-                <a:spcPts val="0"/>
-              </a:spcAft>
-            </a:pPr>
-            <a:r>
-              <a:rPr sz="2200" b="1">
-                <a:solidFill>
-                  <a:srgbClr val="767A7F"/>
-                </a:solidFill>
-                <a:latin typeface="맑은 고딕"/>
-                <a:ea typeface="맑은 고딕"/>
-              </a:rPr>
-              <a:t>→</a:t>
-            </a:r>
-          </a:p>
-        </p:txBody>
-      </p:sp>
-      <p:sp>
-        <p:nvSpPr>
-          <p:cNvPr id="14" name="Rounded Rectangle 13"/>
+              <a:t>• 거리 기준은 통과하지만 관내 공급이 소멸한 지역 — 분만 완전 사각 5곳(등급 체계 밖), 소아과 5개 지역 입원 5,689건 전량(100%) 관외 유출</a:t>
+            </a:r>
+          </a:p>
+        </p:txBody>
+      </p:sp>
+      <p:sp>
+        <p:nvSpPr>
+          <p:cNvPr id="12" name="Rounded Rectangle 11"/>
           <p:cNvSpPr/>
           <p:nvPr/>
         </p:nvSpPr>
         <p:spPr>
           <a:xfrm>
-            <a:off x="8458200" y="1234440"/>
-            <a:ext cx="3291840" cy="1005840"/>
+            <a:off x="502920" y="3383280"/>
+            <a:ext cx="5532120" cy="1920240"/>
           </a:xfrm>
           <a:prstGeom prst="roundRect">
             <a:avLst>
-              <a:gd name="adj" fmla="val 8181"/>
+              <a:gd name="adj" fmla="val 4285"/>
             </a:avLst>
           </a:prstGeom>
           <a:solidFill>
@@ -12685,14 +13645,14 @@
       </p:sp>
       <p:sp>
         <p:nvSpPr>
-          <p:cNvPr id="15" name="TextBox 14"/>
+          <p:cNvPr id="13" name="TextBox 12"/>
           <p:cNvSpPr txBox="1"/>
           <p:nvPr/>
         </p:nvSpPr>
         <p:spPr>
           <a:xfrm>
-            <a:off x="8595360" y="1325880"/>
-            <a:ext cx="3017520" cy="822960"/>
+            <a:off x="685800" y="3511296"/>
+            <a:ext cx="5166359" cy="1664208"/>
           </a:xfrm>
           <a:prstGeom prst="rect">
             <a:avLst/>
@@ -12710,10 +13670,633 @@
                 <a:spcPct val="114000"/>
               </a:lnSpc>
               <a:spcAft>
+                <a:spcPts val="350"/>
+              </a:spcAft>
+            </a:pPr>
+            <a:r>
+              <a:rPr sz="1300" b="1">
+                <a:solidFill>
+                  <a:srgbClr val="000000"/>
+                </a:solidFill>
+                <a:latin typeface="맑은 고딕"/>
+                <a:ea typeface="맑은 고딕"/>
+              </a:rPr>
+              <a:t>발견 3 · 배분 규칙은 데이터 밖에 있다</a:t>
+            </a:r>
+          </a:p>
+          <a:p>
+            <a:pPr marL="160020" indent="-160020">
+              <a:lnSpc>
+                <a:spcPct val="114000"/>
+              </a:lnSpc>
+              <a:spcAft>
                 <a:spcPts val="200"/>
               </a:spcAft>
             </a:pPr>
             <a:r>
+              <a:rPr sz="1150" b="0">
+                <a:solidFill>
+                  <a:srgbClr val="1C1C1E"/>
+                </a:solidFill>
+                <a:latin typeface="맑은 고딕"/>
+                <a:ea typeface="맑은 고딕"/>
+              </a:rPr>
+              <a:t>• 실질 취약지 A·B 53곳 중 21곳만 기지원. A등급 지원 오즈는 B의 4.82배(p=0.021)인데, 그 선정은 공개 지표로 16% 남짓만 설명된다(McFadden R² 0.163)</a:t>
+            </a:r>
+          </a:p>
+        </p:txBody>
+      </p:sp>
+      <p:sp>
+        <p:nvSpPr>
+          <p:cNvPr id="14" name="Rounded Rectangle 13"/>
+          <p:cNvSpPr/>
+          <p:nvPr/>
+        </p:nvSpPr>
+        <p:spPr>
+          <a:xfrm>
+            <a:off x="6263640" y="3383280"/>
+            <a:ext cx="5532120" cy="1920240"/>
+          </a:xfrm>
+          <a:prstGeom prst="roundRect">
+            <a:avLst>
+              <a:gd name="adj" fmla="val 4285"/>
+            </a:avLst>
+          </a:prstGeom>
+          <a:solidFill>
+            <a:srgbClr val="FFFFFF"/>
+          </a:solidFill>
+          <a:ln w="12700">
+            <a:solidFill>
+              <a:srgbClr val="E4E6E9"/>
+            </a:solidFill>
+          </a:ln>
+          <a:effectLst>
+            <a:outerShdw blurRad="182880" dist="64008" dir="5400000" rotWithShape="0">
+              <a:srgbClr val="000000">
+                <a:alpha val="30000"/>
+              </a:srgbClr>
+            </a:outerShdw>
+          </a:effectLst>
+        </p:spPr>
+        <p:style>
+          <a:lnRef idx="1">
+            <a:schemeClr val="accent1"/>
+          </a:lnRef>
+          <a:fillRef idx="3">
+            <a:schemeClr val="accent1"/>
+          </a:fillRef>
+          <a:effectRef idx="2">
+            <a:schemeClr val="accent1"/>
+          </a:effectRef>
+          <a:fontRef idx="minor">
+            <a:schemeClr val="lt1"/>
+          </a:fontRef>
+        </p:style>
+        <p:txBody>
+          <a:bodyPr rtlCol="0" anchor="ctr"/>
+          <a:lstStyle/>
+          <a:p>
+            <a:pPr algn="ctr"/>
+          </a:p>
+        </p:txBody>
+      </p:sp>
+      <p:sp>
+        <p:nvSpPr>
+          <p:cNvPr id="15" name="TextBox 14"/>
+          <p:cNvSpPr txBox="1"/>
+          <p:nvPr/>
+        </p:nvSpPr>
+        <p:spPr>
+          <a:xfrm>
+            <a:off x="6446520" y="3511296"/>
+            <a:ext cx="5166359" cy="1664208"/>
+          </a:xfrm>
+          <a:prstGeom prst="rect">
+            <a:avLst/>
+          </a:prstGeom>
+          <a:noFill/>
+        </p:spPr>
+        <p:txBody>
+          <a:bodyPr wrap="square" anchor="t">
+            <a:spAutoFit/>
+          </a:bodyPr>
+          <a:lstStyle/>
+          <a:p>
+            <a:pPr>
+              <a:lnSpc>
+                <a:spcPct val="114000"/>
+              </a:lnSpc>
+              <a:spcAft>
+                <a:spcPts val="350"/>
+              </a:spcAft>
+            </a:pPr>
+            <a:r>
+              <a:rPr sz="1300" b="1">
+                <a:solidFill>
+                  <a:srgbClr val="33393F"/>
+                </a:solidFill>
+                <a:latin typeface="맑은 고딕"/>
+                <a:ea typeface="맑은 고딕"/>
+              </a:rPr>
+              <a:t>발견 4 · 깊이는 보지만 인원 수는 안 본다</a:t>
+            </a:r>
+          </a:p>
+          <a:p>
+            <a:pPr marL="160020" indent="-160020">
+              <a:lnSpc>
+                <a:spcPct val="114000"/>
+              </a:lnSpc>
+              <a:spcAft>
+                <a:spcPts val="200"/>
+              </a:spcAft>
+            </a:pPr>
+            <a:r>
+              <a:rPr sz="1150" b="0">
+                <a:solidFill>
+                  <a:srgbClr val="1C1C1E"/>
+                </a:solidFill>
+                <a:latin typeface="맑은 고딕"/>
+                <a:ea typeface="맑은 고딕"/>
+              </a:rPr>
+              <a:t>• 현행 배분은 취약 심도와는 정렬(ρ=+0.381), 영향 인원 규모(부담)와는 무관(ρ=−0.131). 두 관점의 순위 상관은 −0.190 — 축의 선택이 결과를 바꾼다</a:t>
+            </a:r>
+          </a:p>
+        </p:txBody>
+      </p:sp>
+      <p:sp>
+        <p:nvSpPr>
+          <p:cNvPr id="16" name="TextBox 15"/>
+          <p:cNvSpPr txBox="1"/>
+          <p:nvPr/>
+        </p:nvSpPr>
+        <p:spPr>
+          <a:xfrm>
+            <a:off x="502920" y="5623560"/>
+            <a:ext cx="11247120" cy="548640"/>
+          </a:xfrm>
+          <a:prstGeom prst="rect">
+            <a:avLst/>
+          </a:prstGeom>
+          <a:noFill/>
+        </p:spPr>
+        <p:txBody>
+          <a:bodyPr wrap="square" anchor="t">
+            <a:spAutoFit/>
+          </a:bodyPr>
+          <a:lstStyle/>
+          <a:p>
+            <a:pPr>
+              <a:lnSpc>
+                <a:spcPct val="114000"/>
+              </a:lnSpc>
+              <a:spcAft>
+                <a:spcPts val="0"/>
+              </a:spcAft>
+            </a:pPr>
+            <a:r>
+              <a:rPr sz="1200" b="1">
+                <a:solidFill>
+                  <a:srgbClr val="1C1C1E"/>
+                </a:solidFill>
+                <a:latin typeface="맑은 고딕"/>
+                <a:ea typeface="맑은 고딕"/>
+              </a:rPr>
+              <a:t>데이터: 헬스맵 공공 데이터셋 9종(2023, 226만 행) + 복지부 공고·지침 — 전량 공개 자료, 전 수치 독립 재실행 검증 완료</a:t>
+            </a:r>
+          </a:p>
+        </p:txBody>
+      </p:sp>
+    </p:spTree>
+  </p:cSld>
+  <p:clrMapOvr>
+    <a:masterClrMapping/>
+  </p:clrMapOvr>
+</p:sld>
+</file>
+
+<file path=ppt/slides/slide4.xml><?xml version="1.0" encoding="utf-8"?>
+<p:sld xmlns:a="http://schemas.openxmlformats.org/drawingml/2006/main" xmlns:p="http://schemas.openxmlformats.org/presentationml/2006/main" xmlns:r="http://schemas.openxmlformats.org/officeDocument/2006/relationships">
+  <p:cSld>
+    <p:spTree>
+      <p:nvGrpSpPr>
+        <p:cNvPr id="1" name=""/>
+        <p:cNvGrpSpPr/>
+        <p:nvPr/>
+      </p:nvGrpSpPr>
+      <p:grpSpPr/>
+      <p:sp>
+        <p:nvSpPr>
+          <p:cNvPr id="2" name="Rectangle 1"/>
+          <p:cNvSpPr/>
+          <p:nvPr/>
+        </p:nvSpPr>
+        <p:spPr>
+          <a:xfrm>
+            <a:off x="0" y="0"/>
+            <a:ext cx="12191695" cy="6858000"/>
+          </a:xfrm>
+          <a:prstGeom prst="rect">
+            <a:avLst/>
+          </a:prstGeom>
+          <a:solidFill>
+            <a:srgbClr val="FFFFFF"/>
+          </a:solidFill>
+          <a:ln>
+            <a:noFill/>
+          </a:ln>
+          <a:effectLst/>
+        </p:spPr>
+        <p:style>
+          <a:lnRef idx="1">
+            <a:schemeClr val="accent1"/>
+          </a:lnRef>
+          <a:fillRef idx="3">
+            <a:schemeClr val="accent1"/>
+          </a:fillRef>
+          <a:effectRef idx="2">
+            <a:schemeClr val="accent1"/>
+          </a:effectRef>
+          <a:fontRef idx="minor">
+            <a:schemeClr val="lt1"/>
+          </a:fontRef>
+        </p:style>
+        <p:txBody>
+          <a:bodyPr rtlCol="0" anchor="ctr"/>
+          <a:lstStyle/>
+          <a:p>
+            <a:pPr algn="ctr"/>
+          </a:p>
+        </p:txBody>
+      </p:sp>
+      <p:sp>
+        <p:nvSpPr>
+          <p:cNvPr id="3" name="Rounded Rectangle 2"/>
+          <p:cNvSpPr/>
+          <p:nvPr/>
+        </p:nvSpPr>
+        <p:spPr>
+          <a:xfrm>
+            <a:off x="502920" y="475488"/>
+            <a:ext cx="310896" cy="310896"/>
+          </a:xfrm>
+          <a:prstGeom prst="roundRect">
+            <a:avLst>
+              <a:gd name="adj" fmla="val 50000"/>
+            </a:avLst>
+          </a:prstGeom>
+          <a:gradFill rotWithShape="1">
+            <a:gsLst>
+              <a:gs pos="0">
+                <a:srgbClr val="3A3F45"/>
+              </a:gs>
+              <a:gs pos="100000">
+                <a:srgbClr val="73787E"/>
+              </a:gs>
+            </a:gsLst>
+            <a:lin scaled="0" ang="18900000"/>
+          </a:gradFill>
+          <a:ln>
+            <a:noFill/>
+          </a:ln>
+          <a:effectLst>
+            <a:outerShdw blurRad="109728" dist="36576" dir="5400000" rotWithShape="0">
+              <a:srgbClr val="000000">
+                <a:alpha val="35000"/>
+              </a:srgbClr>
+            </a:outerShdw>
+          </a:effectLst>
+        </p:spPr>
+        <p:style>
+          <a:lnRef idx="1">
+            <a:schemeClr val="accent1"/>
+          </a:lnRef>
+          <a:fillRef idx="3">
+            <a:schemeClr val="accent1"/>
+          </a:fillRef>
+          <a:effectRef idx="2">
+            <a:schemeClr val="accent1"/>
+          </a:effectRef>
+          <a:fontRef idx="minor">
+            <a:schemeClr val="lt1"/>
+          </a:fontRef>
+        </p:style>
+        <p:txBody>
+          <a:bodyPr rtlCol="0" anchor="ctr"/>
+          <a:lstStyle/>
+          <a:p>
+            <a:pPr algn="ctr"/>
+          </a:p>
+        </p:txBody>
+      </p:sp>
+      <p:sp>
+        <p:nvSpPr>
+          <p:cNvPr id="4" name="TextBox 3"/>
+          <p:cNvSpPr txBox="1"/>
+          <p:nvPr/>
+        </p:nvSpPr>
+        <p:spPr>
+          <a:xfrm>
+            <a:off x="960120" y="274320"/>
+            <a:ext cx="9692640" cy="685800"/>
+          </a:xfrm>
+          <a:prstGeom prst="rect">
+            <a:avLst/>
+          </a:prstGeom>
+          <a:noFill/>
+        </p:spPr>
+        <p:txBody>
+          <a:bodyPr wrap="square" anchor="ctr">
+            <a:spAutoFit/>
+          </a:bodyPr>
+          <a:lstStyle/>
+          <a:p>
+            <a:pPr>
+              <a:lnSpc>
+                <a:spcPct val="114000"/>
+              </a:lnSpc>
+              <a:spcAft>
+                <a:spcPts val="0"/>
+              </a:spcAft>
+            </a:pPr>
+            <a:r>
+              <a:rPr sz="2150" b="1">
+                <a:solidFill>
+                  <a:srgbClr val="1C1C1E"/>
+                </a:solidFill>
+                <a:latin typeface="맑은 고딕"/>
+                <a:ea typeface="맑은 고딕"/>
+              </a:rPr>
+              <a:t>문제 — 제도는 세 단계로 자원을 흘려보낸다, 그 중 두 곳이 비어 있다</a:t>
+            </a:r>
+          </a:p>
+        </p:txBody>
+      </p:sp>
+      <p:sp>
+        <p:nvSpPr>
+          <p:cNvPr id="5" name="Rectangle 4"/>
+          <p:cNvSpPr/>
+          <p:nvPr/>
+        </p:nvSpPr>
+        <p:spPr>
+          <a:xfrm>
+            <a:off x="521207" y="969264"/>
+            <a:ext cx="4206240" cy="27432"/>
+          </a:xfrm>
+          <a:prstGeom prst="rect">
+            <a:avLst/>
+          </a:prstGeom>
+          <a:gradFill rotWithShape="1">
+            <a:gsLst>
+              <a:gs pos="0">
+                <a:srgbClr val="2A2E33"/>
+              </a:gs>
+              <a:gs pos="100000">
+                <a:srgbClr val="FFFFFF"/>
+              </a:gs>
+            </a:gsLst>
+            <a:lin scaled="0" ang="0"/>
+          </a:gradFill>
+          <a:ln>
+            <a:noFill/>
+          </a:ln>
+          <a:effectLst/>
+        </p:spPr>
+        <p:style>
+          <a:lnRef idx="1">
+            <a:schemeClr val="accent1"/>
+          </a:lnRef>
+          <a:fillRef idx="3">
+            <a:schemeClr val="accent1"/>
+          </a:fillRef>
+          <a:effectRef idx="2">
+            <a:schemeClr val="accent1"/>
+          </a:effectRef>
+          <a:fontRef idx="minor">
+            <a:schemeClr val="lt1"/>
+          </a:fontRef>
+        </p:style>
+        <p:txBody>
+          <a:bodyPr rtlCol="0" anchor="ctr"/>
+          <a:lstStyle/>
+          <a:p>
+            <a:pPr algn="ctr"/>
+          </a:p>
+        </p:txBody>
+      </p:sp>
+      <p:sp>
+        <p:nvSpPr>
+          <p:cNvPr id="6" name="TextBox 5"/>
+          <p:cNvSpPr txBox="1"/>
+          <p:nvPr/>
+        </p:nvSpPr>
+        <p:spPr>
+          <a:xfrm>
+            <a:off x="10835640" y="164592"/>
+            <a:ext cx="1188720" cy="777240"/>
+          </a:xfrm>
+          <a:prstGeom prst="rect">
+            <a:avLst/>
+          </a:prstGeom>
+          <a:noFill/>
+        </p:spPr>
+        <p:txBody>
+          <a:bodyPr wrap="square" anchor="t">
+            <a:spAutoFit/>
+          </a:bodyPr>
+          <a:lstStyle/>
+          <a:p>
+            <a:pPr>
+              <a:lnSpc>
+                <a:spcPct val="114000"/>
+              </a:lnSpc>
+              <a:spcAft>
+                <a:spcPts val="0"/>
+              </a:spcAft>
+            </a:pPr>
+            <a:r>
+              <a:rPr sz="3000" b="1">
+                <a:solidFill>
+                  <a:srgbClr val="D8DADD"/>
+                </a:solidFill>
+                <a:latin typeface="맑은 고딕"/>
+                <a:ea typeface="맑은 고딕"/>
+              </a:rPr>
+              <a:t>04</a:t>
+            </a:r>
+          </a:p>
+        </p:txBody>
+      </p:sp>
+      <p:sp>
+        <p:nvSpPr>
+          <p:cNvPr id="7" name="TextBox 6"/>
+          <p:cNvSpPr txBox="1"/>
+          <p:nvPr/>
+        </p:nvSpPr>
+        <p:spPr>
+          <a:xfrm>
+            <a:off x="548640" y="1097280"/>
+            <a:ext cx="11155680" cy="384048"/>
+          </a:xfrm>
+          <a:prstGeom prst="rect">
+            <a:avLst/>
+          </a:prstGeom>
+          <a:noFill/>
+        </p:spPr>
+        <p:txBody>
+          <a:bodyPr wrap="square" anchor="t">
+            <a:spAutoFit/>
+          </a:bodyPr>
+          <a:lstStyle/>
+          <a:p>
+            <a:pPr>
+              <a:lnSpc>
+                <a:spcPct val="114000"/>
+              </a:lnSpc>
+              <a:spcAft>
+                <a:spcPts val="0"/>
+              </a:spcAft>
+            </a:pPr>
+            <a:r>
+              <a:rPr sz="1250" b="0">
+                <a:solidFill>
+                  <a:srgbClr val="767A7F"/>
+                </a:solidFill>
+                <a:latin typeface="맑은 고딕"/>
+                <a:ea typeface="맑은 고딕"/>
+              </a:rPr>
+              <a:t>한 단계라도 막히거나 새면 앞 단계가 아무리 정확해도 자원은 엉뚱한 곳으로 간다</a:t>
+            </a:r>
+          </a:p>
+        </p:txBody>
+      </p:sp>
+      <p:sp>
+        <p:nvSpPr>
+          <p:cNvPr id="8" name="TextBox 7"/>
+          <p:cNvSpPr txBox="1"/>
+          <p:nvPr/>
+        </p:nvSpPr>
+        <p:spPr>
+          <a:xfrm>
+            <a:off x="502920" y="6492240"/>
+            <a:ext cx="11247120" cy="320040"/>
+          </a:xfrm>
+          <a:prstGeom prst="rect">
+            <a:avLst/>
+          </a:prstGeom>
+          <a:noFill/>
+        </p:spPr>
+        <p:txBody>
+          <a:bodyPr wrap="square" anchor="t">
+            <a:spAutoFit/>
+          </a:bodyPr>
+          <a:lstStyle/>
+          <a:p>
+            <a:pPr>
+              <a:lnSpc>
+                <a:spcPct val="114000"/>
+              </a:lnSpc>
+              <a:spcAft>
+                <a:spcPts val="0"/>
+              </a:spcAft>
+            </a:pPr>
+            <a:r>
+              <a:rPr sz="850" b="0">
+                <a:solidFill>
+                  <a:srgbClr val="B2B5B9"/>
+                </a:solidFill>
+                <a:latin typeface="맑은 고딕"/>
+                <a:ea typeface="맑은 고딕"/>
+              </a:rPr>
+              <a:t>2026 명지대학교 창의적 SW프로그램 경진대회 · 빅데이터 분석 — 데이터 분석 결과보고서</a:t>
+            </a:r>
+          </a:p>
+        </p:txBody>
+      </p:sp>
+      <p:sp>
+        <p:nvSpPr>
+          <p:cNvPr id="9" name="Rounded Rectangle 8"/>
+          <p:cNvSpPr/>
+          <p:nvPr/>
+        </p:nvSpPr>
+        <p:spPr>
+          <a:xfrm>
+            <a:off x="502920" y="1371600"/>
+            <a:ext cx="3291840" cy="1115568"/>
+          </a:xfrm>
+          <a:prstGeom prst="roundRect">
+            <a:avLst>
+              <a:gd name="adj" fmla="val 7377"/>
+            </a:avLst>
+          </a:prstGeom>
+          <a:solidFill>
+            <a:srgbClr val="FFFFFF"/>
+          </a:solidFill>
+          <a:ln w="12700">
+            <a:solidFill>
+              <a:srgbClr val="E4E6E9"/>
+            </a:solidFill>
+          </a:ln>
+          <a:effectLst>
+            <a:outerShdw blurRad="182880" dist="64008" dir="5400000" rotWithShape="0">
+              <a:srgbClr val="000000">
+                <a:alpha val="30000"/>
+              </a:srgbClr>
+            </a:outerShdw>
+          </a:effectLst>
+        </p:spPr>
+        <p:style>
+          <a:lnRef idx="1">
+            <a:schemeClr val="accent1"/>
+          </a:lnRef>
+          <a:fillRef idx="3">
+            <a:schemeClr val="accent1"/>
+          </a:fillRef>
+          <a:effectRef idx="2">
+            <a:schemeClr val="accent1"/>
+          </a:effectRef>
+          <a:fontRef idx="minor">
+            <a:schemeClr val="lt1"/>
+          </a:fontRef>
+        </p:style>
+        <p:txBody>
+          <a:bodyPr rtlCol="0" anchor="ctr"/>
+          <a:lstStyle/>
+          <a:p>
+            <a:pPr algn="ctr"/>
+          </a:p>
+        </p:txBody>
+      </p:sp>
+      <p:sp>
+        <p:nvSpPr>
+          <p:cNvPr id="10" name="TextBox 9"/>
+          <p:cNvSpPr txBox="1"/>
+          <p:nvPr/>
+        </p:nvSpPr>
+        <p:spPr>
+          <a:xfrm>
+            <a:off x="640080" y="1444752"/>
+            <a:ext cx="3035808" cy="969264"/>
+          </a:xfrm>
+          <a:prstGeom prst="rect">
+            <a:avLst/>
+          </a:prstGeom>
+          <a:noFill/>
+        </p:spPr>
+        <p:txBody>
+          <a:bodyPr wrap="square" anchor="t">
+            <a:spAutoFit/>
+          </a:bodyPr>
+          <a:lstStyle/>
+          <a:p>
+            <a:pPr>
+              <a:lnSpc>
+                <a:spcPct val="114000"/>
+              </a:lnSpc>
+              <a:spcAft>
+                <a:spcPts val="200"/>
+              </a:spcAft>
+            </a:pPr>
+            <a:r>
               <a:rPr sz="1400" b="1">
                 <a:solidFill>
                   <a:srgbClr val="33393F"/>
@@ -12721,6 +14304,366 @@
                 <a:latin typeface="맑은 고딕"/>
                 <a:ea typeface="맑은 고딕"/>
               </a:rPr>
+              <a:t>① 측정</a:t>
+            </a:r>
+          </a:p>
+          <a:p>
+            <a:pPr>
+              <a:lnSpc>
+                <a:spcPct val="114000"/>
+              </a:lnSpc>
+              <a:spcAft>
+                <a:spcPts val="0"/>
+              </a:spcAft>
+            </a:pPr>
+            <a:r>
+              <a:rPr sz="1050" b="0">
+                <a:solidFill>
+                  <a:srgbClr val="1C1C1E"/>
+                </a:solidFill>
+                <a:latin typeface="맑은 고딕"/>
+                <a:ea typeface="맑은 고딕"/>
+              </a:rPr>
+              <a:t>2년마다 전국 시·군·구의</a:t>
+            </a:r>
+          </a:p>
+          <a:p>
+            <a:pPr>
+              <a:lnSpc>
+                <a:spcPct val="114000"/>
+              </a:lnSpc>
+              <a:spcAft>
+                <a:spcPts val="0"/>
+              </a:spcAft>
+            </a:pPr>
+            <a:r>
+              <a:rPr sz="1050" b="0">
+                <a:solidFill>
+                  <a:srgbClr val="1C1C1E"/>
+                </a:solidFill>
+                <a:latin typeface="맑은 고딕"/>
+                <a:ea typeface="맑은 고딕"/>
+              </a:rPr>
+              <a:t>분만실 60분 접근성·이용률 산출</a:t>
+            </a:r>
+          </a:p>
+        </p:txBody>
+      </p:sp>
+      <p:sp>
+        <p:nvSpPr>
+          <p:cNvPr id="11" name="TextBox 10"/>
+          <p:cNvSpPr txBox="1"/>
+          <p:nvPr/>
+        </p:nvSpPr>
+        <p:spPr>
+          <a:xfrm>
+            <a:off x="3813048" y="1627632"/>
+            <a:ext cx="685800" cy="548640"/>
+          </a:xfrm>
+          <a:prstGeom prst="rect">
+            <a:avLst/>
+          </a:prstGeom>
+          <a:noFill/>
+        </p:spPr>
+        <p:txBody>
+          <a:bodyPr wrap="square" anchor="t">
+            <a:spAutoFit/>
+          </a:bodyPr>
+          <a:lstStyle/>
+          <a:p>
+            <a:pPr>
+              <a:lnSpc>
+                <a:spcPct val="114000"/>
+              </a:lnSpc>
+              <a:spcAft>
+                <a:spcPts val="0"/>
+              </a:spcAft>
+            </a:pPr>
+            <a:r>
+              <a:rPr sz="2200" b="1">
+                <a:solidFill>
+                  <a:srgbClr val="767A7F"/>
+                </a:solidFill>
+                <a:latin typeface="맑은 고딕"/>
+                <a:ea typeface="맑은 고딕"/>
+              </a:rPr>
+              <a:t>→</a:t>
+            </a:r>
+          </a:p>
+        </p:txBody>
+      </p:sp>
+      <p:sp>
+        <p:nvSpPr>
+          <p:cNvPr id="12" name="Rounded Rectangle 11"/>
+          <p:cNvSpPr/>
+          <p:nvPr/>
+        </p:nvSpPr>
+        <p:spPr>
+          <a:xfrm>
+            <a:off x="4480559" y="1371600"/>
+            <a:ext cx="3291840" cy="1115568"/>
+          </a:xfrm>
+          <a:prstGeom prst="roundRect">
+            <a:avLst>
+              <a:gd name="adj" fmla="val 7377"/>
+            </a:avLst>
+          </a:prstGeom>
+          <a:solidFill>
+            <a:srgbClr val="F1F2F3"/>
+          </a:solidFill>
+          <a:ln w="15875">
+            <a:solidFill>
+              <a:srgbClr val="9AA0A6"/>
+            </a:solidFill>
+          </a:ln>
+          <a:effectLst>
+            <a:outerShdw blurRad="182880" dist="64008" dir="5400000" rotWithShape="0">
+              <a:srgbClr val="000000">
+                <a:alpha val="32000"/>
+              </a:srgbClr>
+            </a:outerShdw>
+          </a:effectLst>
+        </p:spPr>
+        <p:style>
+          <a:lnRef idx="1">
+            <a:schemeClr val="accent1"/>
+          </a:lnRef>
+          <a:fillRef idx="3">
+            <a:schemeClr val="accent1"/>
+          </a:fillRef>
+          <a:effectRef idx="2">
+            <a:schemeClr val="accent1"/>
+          </a:effectRef>
+          <a:fontRef idx="minor">
+            <a:schemeClr val="lt1"/>
+          </a:fontRef>
+        </p:style>
+        <p:txBody>
+          <a:bodyPr rtlCol="0" anchor="ctr"/>
+          <a:lstStyle/>
+          <a:p>
+            <a:pPr algn="ctr"/>
+          </a:p>
+        </p:txBody>
+      </p:sp>
+      <p:sp>
+        <p:nvSpPr>
+          <p:cNvPr id="13" name="TextBox 12"/>
+          <p:cNvSpPr txBox="1"/>
+          <p:nvPr/>
+        </p:nvSpPr>
+        <p:spPr>
+          <a:xfrm>
+            <a:off x="4617720" y="1444752"/>
+            <a:ext cx="3035808" cy="969264"/>
+          </a:xfrm>
+          <a:prstGeom prst="rect">
+            <a:avLst/>
+          </a:prstGeom>
+          <a:noFill/>
+        </p:spPr>
+        <p:txBody>
+          <a:bodyPr wrap="square" anchor="t">
+            <a:spAutoFit/>
+          </a:bodyPr>
+          <a:lstStyle/>
+          <a:p>
+            <a:pPr>
+              <a:lnSpc>
+                <a:spcPct val="114000"/>
+              </a:lnSpc>
+              <a:spcAft>
+                <a:spcPts val="200"/>
+              </a:spcAft>
+            </a:pPr>
+            <a:r>
+              <a:rPr sz="1400" b="1">
+                <a:solidFill>
+                  <a:srgbClr val="33393F"/>
+                </a:solidFill>
+                <a:latin typeface="맑은 고딕"/>
+                <a:ea typeface="맑은 고딕"/>
+              </a:rPr>
+              <a:t>② 지정</a:t>
+            </a:r>
+          </a:p>
+          <a:p>
+            <a:pPr>
+              <a:lnSpc>
+                <a:spcPct val="114000"/>
+              </a:lnSpc>
+              <a:spcAft>
+                <a:spcPts val="0"/>
+              </a:spcAft>
+            </a:pPr>
+            <a:r>
+              <a:rPr sz="1050" b="0">
+                <a:solidFill>
+                  <a:srgbClr val="1C1C1E"/>
+                </a:solidFill>
+                <a:latin typeface="맑은 고딕"/>
+                <a:ea typeface="맑은 고딕"/>
+              </a:rPr>
+              <a:t>그 값을 임계값(30/30)과 대조해</a:t>
+            </a:r>
+          </a:p>
+          <a:p>
+            <a:pPr>
+              <a:lnSpc>
+                <a:spcPct val="114000"/>
+              </a:lnSpc>
+              <a:spcAft>
+                <a:spcPts val="0"/>
+              </a:spcAft>
+            </a:pPr>
+            <a:r>
+              <a:rPr sz="1050" b="0">
+                <a:solidFill>
+                  <a:srgbClr val="1C1C1E"/>
+                </a:solidFill>
+                <a:latin typeface="맑은 고딕"/>
+                <a:ea typeface="맑은 고딕"/>
+              </a:rPr>
+              <a:t>분만취약지 판정 — 이동시간만 본다</a:t>
+            </a:r>
+          </a:p>
+        </p:txBody>
+      </p:sp>
+      <p:sp>
+        <p:nvSpPr>
+          <p:cNvPr id="14" name="TextBox 13"/>
+          <p:cNvSpPr txBox="1"/>
+          <p:nvPr/>
+        </p:nvSpPr>
+        <p:spPr>
+          <a:xfrm>
+            <a:off x="7790688" y="1627632"/>
+            <a:ext cx="685800" cy="548640"/>
+          </a:xfrm>
+          <a:prstGeom prst="rect">
+            <a:avLst/>
+          </a:prstGeom>
+          <a:noFill/>
+        </p:spPr>
+        <p:txBody>
+          <a:bodyPr wrap="square" anchor="t">
+            <a:spAutoFit/>
+          </a:bodyPr>
+          <a:lstStyle/>
+          <a:p>
+            <a:pPr>
+              <a:lnSpc>
+                <a:spcPct val="114000"/>
+              </a:lnSpc>
+              <a:spcAft>
+                <a:spcPts val="0"/>
+              </a:spcAft>
+            </a:pPr>
+            <a:r>
+              <a:rPr sz="2200" b="1">
+                <a:solidFill>
+                  <a:srgbClr val="767A7F"/>
+                </a:solidFill>
+                <a:latin typeface="맑은 고딕"/>
+                <a:ea typeface="맑은 고딕"/>
+              </a:rPr>
+              <a:t>→</a:t>
+            </a:r>
+          </a:p>
+        </p:txBody>
+      </p:sp>
+      <p:sp>
+        <p:nvSpPr>
+          <p:cNvPr id="15" name="Rounded Rectangle 14"/>
+          <p:cNvSpPr/>
+          <p:nvPr/>
+        </p:nvSpPr>
+        <p:spPr>
+          <a:xfrm>
+            <a:off x="8458200" y="1371600"/>
+            <a:ext cx="3291840" cy="1115568"/>
+          </a:xfrm>
+          <a:prstGeom prst="roundRect">
+            <a:avLst>
+              <a:gd name="adj" fmla="val 7377"/>
+            </a:avLst>
+          </a:prstGeom>
+          <a:solidFill>
+            <a:srgbClr val="F1F2F3"/>
+          </a:solidFill>
+          <a:ln w="15875">
+            <a:solidFill>
+              <a:srgbClr val="9AA0A6"/>
+            </a:solidFill>
+          </a:ln>
+          <a:effectLst>
+            <a:outerShdw blurRad="182880" dist="64008" dir="5400000" rotWithShape="0">
+              <a:srgbClr val="000000">
+                <a:alpha val="32000"/>
+              </a:srgbClr>
+            </a:outerShdw>
+          </a:effectLst>
+        </p:spPr>
+        <p:style>
+          <a:lnRef idx="1">
+            <a:schemeClr val="accent1"/>
+          </a:lnRef>
+          <a:fillRef idx="3">
+            <a:schemeClr val="accent1"/>
+          </a:fillRef>
+          <a:effectRef idx="2">
+            <a:schemeClr val="accent1"/>
+          </a:effectRef>
+          <a:fontRef idx="minor">
+            <a:schemeClr val="lt1"/>
+          </a:fontRef>
+        </p:style>
+        <p:txBody>
+          <a:bodyPr rtlCol="0" anchor="ctr"/>
+          <a:lstStyle/>
+          <a:p>
+            <a:pPr algn="ctr"/>
+          </a:p>
+        </p:txBody>
+      </p:sp>
+      <p:sp>
+        <p:nvSpPr>
+          <p:cNvPr id="16" name="TextBox 15"/>
+          <p:cNvSpPr txBox="1"/>
+          <p:nvPr/>
+        </p:nvSpPr>
+        <p:spPr>
+          <a:xfrm>
+            <a:off x="8595360" y="1444752"/>
+            <a:ext cx="3035808" cy="969264"/>
+          </a:xfrm>
+          <a:prstGeom prst="rect">
+            <a:avLst/>
+          </a:prstGeom>
+          <a:noFill/>
+        </p:spPr>
+        <p:txBody>
+          <a:bodyPr wrap="square" anchor="t">
+            <a:spAutoFit/>
+          </a:bodyPr>
+          <a:lstStyle/>
+          <a:p>
+            <a:pPr>
+              <a:lnSpc>
+                <a:spcPct val="114000"/>
+              </a:lnSpc>
+              <a:spcAft>
+                <a:spcPts val="200"/>
+              </a:spcAft>
+            </a:pPr>
+            <a:r>
+              <a:rPr sz="1400" b="1">
+                <a:solidFill>
+                  <a:srgbClr val="33393F"/>
+                </a:solidFill>
+                <a:latin typeface="맑은 고딕"/>
+                <a:ea typeface="맑은 고딕"/>
+              </a:rPr>
               <a:t>③ 배분</a:t>
             </a:r>
           </a:p>
@@ -12734,27 +14677,47 @@
               </a:spcAft>
             </a:pPr>
             <a:r>
-              <a:rPr sz="1150" b="0">
+              <a:rPr sz="1050" b="0">
                 <a:solidFill>
                   <a:srgbClr val="1C1C1E"/>
                 </a:solidFill>
                 <a:latin typeface="맑은 고딕"/>
                 <a:ea typeface="맑은 고딕"/>
               </a:rPr>
-              <a:t>줄 세우는 규칙이 없음</a:t>
-            </a:r>
-          </a:p>
-        </p:txBody>
-      </p:sp>
-      <p:sp>
-        <p:nvSpPr>
-          <p:cNvPr id="16" name="Rounded Rectangle 15"/>
+              <a:t>지정 지역 병원에 설치·운영비 지급</a:t>
+            </a:r>
+          </a:p>
+          <a:p>
+            <a:pPr>
+              <a:lnSpc>
+                <a:spcPct val="114000"/>
+              </a:lnSpc>
+              <a:spcAft>
+                <a:spcPts val="0"/>
+              </a:spcAft>
+            </a:pPr>
+            <a:r>
+              <a:rPr sz="1050" b="0">
+                <a:solidFill>
+                  <a:srgbClr val="1C1C1E"/>
+                </a:solidFill>
+                <a:latin typeface="맑은 고딕"/>
+                <a:ea typeface="맑은 고딕"/>
+              </a:rPr>
+              <a:t>— 누가 먼저인지의 규칙이 없다</a:t>
+            </a:r>
+          </a:p>
+        </p:txBody>
+      </p:sp>
+      <p:sp>
+        <p:nvSpPr>
+          <p:cNvPr id="17" name="Rounded Rectangle 16"/>
           <p:cNvSpPr/>
           <p:nvPr/>
         </p:nvSpPr>
         <p:spPr>
           <a:xfrm>
-            <a:off x="502920" y="2606040"/>
+            <a:off x="502920" y="2697480"/>
             <a:ext cx="1188720" cy="658368"/>
           </a:xfrm>
           <a:prstGeom prst="roundRect">
@@ -12808,13 +14771,13 @@
       </p:sp>
       <p:sp>
         <p:nvSpPr>
-          <p:cNvPr id="17" name="TextBox 16"/>
+          <p:cNvPr id="18" name="TextBox 17"/>
           <p:cNvSpPr txBox="1"/>
           <p:nvPr/>
         </p:nvSpPr>
         <p:spPr>
           <a:xfrm>
-            <a:off x="502920" y="2679192"/>
+            <a:off x="502920" y="2770632"/>
             <a:ext cx="1188720" cy="502920"/>
           </a:xfrm>
           <a:prstGeom prst="rect">
@@ -12851,13 +14814,13 @@
       </p:sp>
       <p:sp>
         <p:nvSpPr>
-          <p:cNvPr id="18" name="Rounded Rectangle 17"/>
+          <p:cNvPr id="19" name="Rounded Rectangle 18"/>
           <p:cNvSpPr/>
           <p:nvPr/>
         </p:nvSpPr>
         <p:spPr>
           <a:xfrm>
-            <a:off x="1828800" y="2606040"/>
+            <a:off x="1828800" y="2697480"/>
             <a:ext cx="7589520" cy="658368"/>
           </a:xfrm>
           <a:prstGeom prst="roundRect">
@@ -12905,13 +14868,13 @@
       </p:sp>
       <p:sp>
         <p:nvSpPr>
-          <p:cNvPr id="19" name="TextBox 18"/>
+          <p:cNvPr id="20" name="TextBox 19"/>
           <p:cNvSpPr txBox="1"/>
           <p:nvPr/>
         </p:nvSpPr>
         <p:spPr>
           <a:xfrm>
-            <a:off x="2011680" y="2679192"/>
+            <a:off x="2011680" y="2770632"/>
             <a:ext cx="7315200" cy="502920"/>
           </a:xfrm>
           <a:prstGeom prst="rect">
@@ -12948,14 +14911,111 @@
       </p:sp>
       <p:sp>
         <p:nvSpPr>
-          <p:cNvPr id="20" name="Rounded Rectangle 19"/>
+          <p:cNvPr id="21" name="Rounded Rectangle 20"/>
           <p:cNvSpPr/>
           <p:nvPr/>
         </p:nvSpPr>
         <p:spPr>
           <a:xfrm>
-            <a:off x="9555480" y="2606040"/>
+            <a:off x="9555480" y="2697480"/>
             <a:ext cx="2240280" cy="658368"/>
+          </a:xfrm>
+          <a:prstGeom prst="roundRect">
+            <a:avLst>
+              <a:gd name="adj" fmla="val 12500"/>
+            </a:avLst>
+          </a:prstGeom>
+          <a:solidFill>
+            <a:srgbClr val="F1F2F3"/>
+          </a:solidFill>
+          <a:ln w="15875">
+            <a:solidFill>
+              <a:srgbClr val="9AA0A6"/>
+            </a:solidFill>
+          </a:ln>
+          <a:effectLst>
+            <a:outerShdw blurRad="182880" dist="64008" dir="5400000" rotWithShape="0">
+              <a:srgbClr val="000000">
+                <a:alpha val="32000"/>
+              </a:srgbClr>
+            </a:outerShdw>
+          </a:effectLst>
+        </p:spPr>
+        <p:style>
+          <a:lnRef idx="1">
+            <a:schemeClr val="accent1"/>
+          </a:lnRef>
+          <a:fillRef idx="3">
+            <a:schemeClr val="accent1"/>
+          </a:fillRef>
+          <a:effectRef idx="2">
+            <a:schemeClr val="accent1"/>
+          </a:effectRef>
+          <a:fontRef idx="minor">
+            <a:schemeClr val="lt1"/>
+          </a:fontRef>
+        </p:style>
+        <p:txBody>
+          <a:bodyPr rtlCol="0" anchor="ctr"/>
+          <a:lstStyle/>
+          <a:p>
+            <a:pPr algn="ctr"/>
+          </a:p>
+        </p:txBody>
+      </p:sp>
+      <p:sp>
+        <p:nvSpPr>
+          <p:cNvPr id="22" name="TextBox 21"/>
+          <p:cNvSpPr txBox="1"/>
+          <p:nvPr/>
+        </p:nvSpPr>
+        <p:spPr>
+          <a:xfrm>
+            <a:off x="9555480" y="2770632"/>
+            <a:ext cx="2240280" cy="502920"/>
+          </a:xfrm>
+          <a:prstGeom prst="rect">
+            <a:avLst/>
+          </a:prstGeom>
+          <a:noFill/>
+        </p:spPr>
+        <p:txBody>
+          <a:bodyPr wrap="square" anchor="ctr">
+            <a:spAutoFit/>
+          </a:bodyPr>
+          <a:lstStyle/>
+          <a:p>
+            <a:pPr>
+              <a:lnSpc>
+                <a:spcPct val="114000"/>
+              </a:lnSpc>
+              <a:spcAft>
+                <a:spcPts val="0"/>
+              </a:spcAft>
+            </a:pPr>
+            <a:r>
+              <a:rPr sz="1150" b="1">
+                <a:solidFill>
+                  <a:srgbClr val="1C1C1E"/>
+                </a:solidFill>
+                <a:latin typeface="맑은 고딕"/>
+                <a:ea typeface="맑은 고딕"/>
+              </a:rPr>
+              <a:t>§5 · 발견 1</a:t>
+            </a:r>
+          </a:p>
+        </p:txBody>
+      </p:sp>
+      <p:sp>
+        <p:nvSpPr>
+          <p:cNvPr id="23" name="Rounded Rectangle 22"/>
+          <p:cNvSpPr/>
+          <p:nvPr/>
+        </p:nvSpPr>
+        <p:spPr>
+          <a:xfrm>
+            <a:off x="502920" y="3538728"/>
+            <a:ext cx="1188720" cy="658368"/>
           </a:xfrm>
           <a:prstGeom prst="roundRect">
             <a:avLst>
@@ -13008,14 +15068,14 @@
       </p:sp>
       <p:sp>
         <p:nvSpPr>
-          <p:cNvPr id="21" name="TextBox 20"/>
+          <p:cNvPr id="24" name="TextBox 23"/>
           <p:cNvSpPr txBox="1"/>
           <p:nvPr/>
         </p:nvSpPr>
         <p:spPr>
           <a:xfrm>
-            <a:off x="9555480" y="2679192"/>
-            <a:ext cx="2240280" cy="502920"/>
+            <a:off x="502920" y="3611880"/>
+            <a:ext cx="1188720" cy="502920"/>
           </a:xfrm>
           <a:prstGeom prst="rect">
             <a:avLst/>
@@ -13037,27 +15097,221 @@
               </a:spcAft>
             </a:pPr>
             <a:r>
+              <a:rPr sz="1400" b="1">
+                <a:solidFill>
+                  <a:srgbClr val="FFFFFF"/>
+                </a:solidFill>
+                <a:latin typeface="맑은 고딕"/>
+                <a:ea typeface="맑은 고딕"/>
+              </a:rPr>
+              <a:t>RQ2</a:t>
+            </a:r>
+          </a:p>
+        </p:txBody>
+      </p:sp>
+      <p:sp>
+        <p:nvSpPr>
+          <p:cNvPr id="25" name="Rounded Rectangle 24"/>
+          <p:cNvSpPr/>
+          <p:nvPr/>
+        </p:nvSpPr>
+        <p:spPr>
+          <a:xfrm>
+            <a:off x="1828800" y="3538728"/>
+            <a:ext cx="7589520" cy="658368"/>
+          </a:xfrm>
+          <a:prstGeom prst="roundRect">
+            <a:avLst>
+              <a:gd name="adj" fmla="val 12500"/>
+            </a:avLst>
+          </a:prstGeom>
+          <a:solidFill>
+            <a:srgbClr val="FFFFFF"/>
+          </a:solidFill>
+          <a:ln w="12700">
+            <a:solidFill>
+              <a:srgbClr val="E4E6E9"/>
+            </a:solidFill>
+          </a:ln>
+          <a:effectLst>
+            <a:outerShdw blurRad="182880" dist="64008" dir="5400000" rotWithShape="0">
+              <a:srgbClr val="000000">
+                <a:alpha val="30000"/>
+              </a:srgbClr>
+            </a:outerShdw>
+          </a:effectLst>
+        </p:spPr>
+        <p:style>
+          <a:lnRef idx="1">
+            <a:schemeClr val="accent1"/>
+          </a:lnRef>
+          <a:fillRef idx="3">
+            <a:schemeClr val="accent1"/>
+          </a:fillRef>
+          <a:effectRef idx="2">
+            <a:schemeClr val="accent1"/>
+          </a:effectRef>
+          <a:fontRef idx="minor">
+            <a:schemeClr val="lt1"/>
+          </a:fontRef>
+        </p:style>
+        <p:txBody>
+          <a:bodyPr rtlCol="0" anchor="ctr"/>
+          <a:lstStyle/>
+          <a:p>
+            <a:pPr algn="ctr"/>
+          </a:p>
+        </p:txBody>
+      </p:sp>
+      <p:sp>
+        <p:nvSpPr>
+          <p:cNvPr id="26" name="TextBox 25"/>
+          <p:cNvSpPr txBox="1"/>
+          <p:nvPr/>
+        </p:nvSpPr>
+        <p:spPr>
+          <a:xfrm>
+            <a:off x="2011680" y="3611880"/>
+            <a:ext cx="7315200" cy="502920"/>
+          </a:xfrm>
+          <a:prstGeom prst="rect">
+            <a:avLst/>
+          </a:prstGeom>
+          <a:noFill/>
+        </p:spPr>
+        <p:txBody>
+          <a:bodyPr wrap="square" anchor="ctr">
+            <a:spAutoFit/>
+          </a:bodyPr>
+          <a:lstStyle/>
+          <a:p>
+            <a:pPr>
+              <a:lnSpc>
+                <a:spcPct val="114000"/>
+              </a:lnSpc>
+              <a:spcAft>
+                <a:spcPts val="0"/>
+              </a:spcAft>
+            </a:pPr>
+            <a:r>
+              <a:rPr sz="1250" b="0">
+                <a:solidFill>
+                  <a:srgbClr val="1C1C1E"/>
+                </a:solidFill>
+                <a:latin typeface="맑은 고딕"/>
+                <a:ea typeface="맑은 고딕"/>
+              </a:rPr>
+              <a:t>판정식이 구조적으로 놓치는 지역이 실재하는가?</a:t>
+            </a:r>
+          </a:p>
+        </p:txBody>
+      </p:sp>
+      <p:sp>
+        <p:nvSpPr>
+          <p:cNvPr id="27" name="Rounded Rectangle 26"/>
+          <p:cNvSpPr/>
+          <p:nvPr/>
+        </p:nvSpPr>
+        <p:spPr>
+          <a:xfrm>
+            <a:off x="9555480" y="3538728"/>
+            <a:ext cx="2240280" cy="658368"/>
+          </a:xfrm>
+          <a:prstGeom prst="roundRect">
+            <a:avLst>
+              <a:gd name="adj" fmla="val 12500"/>
+            </a:avLst>
+          </a:prstGeom>
+          <a:solidFill>
+            <a:srgbClr val="F1F2F3"/>
+          </a:solidFill>
+          <a:ln w="15875">
+            <a:solidFill>
+              <a:srgbClr val="9AA0A6"/>
+            </a:solidFill>
+          </a:ln>
+          <a:effectLst>
+            <a:outerShdw blurRad="182880" dist="64008" dir="5400000" rotWithShape="0">
+              <a:srgbClr val="000000">
+                <a:alpha val="32000"/>
+              </a:srgbClr>
+            </a:outerShdw>
+          </a:effectLst>
+        </p:spPr>
+        <p:style>
+          <a:lnRef idx="1">
+            <a:schemeClr val="accent1"/>
+          </a:lnRef>
+          <a:fillRef idx="3">
+            <a:schemeClr val="accent1"/>
+          </a:fillRef>
+          <a:effectRef idx="2">
+            <a:schemeClr val="accent1"/>
+          </a:effectRef>
+          <a:fontRef idx="minor">
+            <a:schemeClr val="lt1"/>
+          </a:fontRef>
+        </p:style>
+        <p:txBody>
+          <a:bodyPr rtlCol="0" anchor="ctr"/>
+          <a:lstStyle/>
+          <a:p>
+            <a:pPr algn="ctr"/>
+          </a:p>
+        </p:txBody>
+      </p:sp>
+      <p:sp>
+        <p:nvSpPr>
+          <p:cNvPr id="28" name="TextBox 27"/>
+          <p:cNvSpPr txBox="1"/>
+          <p:nvPr/>
+        </p:nvSpPr>
+        <p:spPr>
+          <a:xfrm>
+            <a:off x="9555480" y="3611880"/>
+            <a:ext cx="2240280" cy="502920"/>
+          </a:xfrm>
+          <a:prstGeom prst="rect">
+            <a:avLst/>
+          </a:prstGeom>
+          <a:noFill/>
+        </p:spPr>
+        <p:txBody>
+          <a:bodyPr wrap="square" anchor="ctr">
+            <a:spAutoFit/>
+          </a:bodyPr>
+          <a:lstStyle/>
+          <a:p>
+            <a:pPr>
+              <a:lnSpc>
+                <a:spcPct val="114000"/>
+              </a:lnSpc>
+              <a:spcAft>
+                <a:spcPts val="0"/>
+              </a:spcAft>
+            </a:pPr>
+            <a:r>
               <a:rPr sz="1150" b="1">
                 <a:solidFill>
-                  <a:srgbClr val="33393F"/>
-                </a:solidFill>
-                <a:latin typeface="맑은 고딕"/>
-                <a:ea typeface="맑은 고딕"/>
-              </a:rPr>
-              <a:t>§5 · 발견 1</a:t>
-            </a:r>
-          </a:p>
-        </p:txBody>
-      </p:sp>
-      <p:sp>
-        <p:nvSpPr>
-          <p:cNvPr id="22" name="Rounded Rectangle 21"/>
+                  <a:srgbClr val="1C1C1E"/>
+                </a:solidFill>
+                <a:latin typeface="맑은 고딕"/>
+                <a:ea typeface="맑은 고딕"/>
+              </a:rPr>
+              <a:t>§5 · 발견 2</a:t>
+            </a:r>
+          </a:p>
+        </p:txBody>
+      </p:sp>
+      <p:sp>
+        <p:nvSpPr>
+          <p:cNvPr id="29" name="Rounded Rectangle 28"/>
           <p:cNvSpPr/>
           <p:nvPr/>
         </p:nvSpPr>
         <p:spPr>
           <a:xfrm>
-            <a:off x="502920" y="3447288"/>
+            <a:off x="502920" y="4379976"/>
             <a:ext cx="1188720" cy="658368"/>
           </a:xfrm>
           <a:prstGeom prst="roundRect">
@@ -13111,13 +15365,13 @@
       </p:sp>
       <p:sp>
         <p:nvSpPr>
-          <p:cNvPr id="23" name="TextBox 22"/>
+          <p:cNvPr id="30" name="TextBox 29"/>
           <p:cNvSpPr txBox="1"/>
           <p:nvPr/>
         </p:nvSpPr>
         <p:spPr>
           <a:xfrm>
-            <a:off x="502920" y="3520440"/>
+            <a:off x="502920" y="4453128"/>
             <a:ext cx="1188720" cy="502920"/>
           </a:xfrm>
           <a:prstGeom prst="rect">
@@ -13147,20 +15401,20 @@
                 <a:latin typeface="맑은 고딕"/>
                 <a:ea typeface="맑은 고딕"/>
               </a:rPr>
-              <a:t>RQ2</a:t>
-            </a:r>
-          </a:p>
-        </p:txBody>
-      </p:sp>
-      <p:sp>
-        <p:nvSpPr>
-          <p:cNvPr id="24" name="Rounded Rectangle 23"/>
+              <a:t>RQ3</a:t>
+            </a:r>
+          </a:p>
+        </p:txBody>
+      </p:sp>
+      <p:sp>
+        <p:nvSpPr>
+          <p:cNvPr id="31" name="Rounded Rectangle 30"/>
           <p:cNvSpPr/>
           <p:nvPr/>
         </p:nvSpPr>
         <p:spPr>
           <a:xfrm>
-            <a:off x="1828800" y="3447288"/>
+            <a:off x="1828800" y="4379976"/>
             <a:ext cx="7589520" cy="658368"/>
           </a:xfrm>
           <a:prstGeom prst="roundRect">
@@ -13208,13 +15462,13 @@
       </p:sp>
       <p:sp>
         <p:nvSpPr>
-          <p:cNvPr id="25" name="TextBox 24"/>
+          <p:cNvPr id="32" name="TextBox 31"/>
           <p:cNvSpPr txBox="1"/>
           <p:nvPr/>
         </p:nvSpPr>
         <p:spPr>
           <a:xfrm>
-            <a:off x="2011680" y="3520440"/>
+            <a:off x="2011680" y="4453128"/>
             <a:ext cx="7315200" cy="502920"/>
           </a:xfrm>
           <a:prstGeom prst="rect">
@@ -13244,21 +15498,118 @@
                 <a:latin typeface="맑은 고딕"/>
                 <a:ea typeface="맑은 고딕"/>
               </a:rPr>
-              <a:t>판정식이 구조적으로 놓치는 지역이 실재하는가?</a:t>
-            </a:r>
-          </a:p>
-        </p:txBody>
-      </p:sp>
-      <p:sp>
-        <p:nvSpPr>
-          <p:cNvPr id="26" name="Rounded Rectangle 25"/>
+              <a:t>지원 배분은 무엇으로 설명되는가?</a:t>
+            </a:r>
+          </a:p>
+        </p:txBody>
+      </p:sp>
+      <p:sp>
+        <p:nvSpPr>
+          <p:cNvPr id="33" name="Rounded Rectangle 32"/>
           <p:cNvSpPr/>
           <p:nvPr/>
         </p:nvSpPr>
         <p:spPr>
           <a:xfrm>
-            <a:off x="9555480" y="3447288"/>
+            <a:off x="9555480" y="4379976"/>
             <a:ext cx="2240280" cy="658368"/>
+          </a:xfrm>
+          <a:prstGeom prst="roundRect">
+            <a:avLst>
+              <a:gd name="adj" fmla="val 12500"/>
+            </a:avLst>
+          </a:prstGeom>
+          <a:solidFill>
+            <a:srgbClr val="F1F2F3"/>
+          </a:solidFill>
+          <a:ln w="15875">
+            <a:solidFill>
+              <a:srgbClr val="9AA0A6"/>
+            </a:solidFill>
+          </a:ln>
+          <a:effectLst>
+            <a:outerShdw blurRad="182880" dist="64008" dir="5400000" rotWithShape="0">
+              <a:srgbClr val="000000">
+                <a:alpha val="32000"/>
+              </a:srgbClr>
+            </a:outerShdw>
+          </a:effectLst>
+        </p:spPr>
+        <p:style>
+          <a:lnRef idx="1">
+            <a:schemeClr val="accent1"/>
+          </a:lnRef>
+          <a:fillRef idx="3">
+            <a:schemeClr val="accent1"/>
+          </a:fillRef>
+          <a:effectRef idx="2">
+            <a:schemeClr val="accent1"/>
+          </a:effectRef>
+          <a:fontRef idx="minor">
+            <a:schemeClr val="lt1"/>
+          </a:fontRef>
+        </p:style>
+        <p:txBody>
+          <a:bodyPr rtlCol="0" anchor="ctr"/>
+          <a:lstStyle/>
+          <a:p>
+            <a:pPr algn="ctr"/>
+          </a:p>
+        </p:txBody>
+      </p:sp>
+      <p:sp>
+        <p:nvSpPr>
+          <p:cNvPr id="34" name="TextBox 33"/>
+          <p:cNvSpPr txBox="1"/>
+          <p:nvPr/>
+        </p:nvSpPr>
+        <p:spPr>
+          <a:xfrm>
+            <a:off x="9555480" y="4453128"/>
+            <a:ext cx="2240280" cy="502920"/>
+          </a:xfrm>
+          <a:prstGeom prst="rect">
+            <a:avLst/>
+          </a:prstGeom>
+          <a:noFill/>
+        </p:spPr>
+        <p:txBody>
+          <a:bodyPr wrap="square" anchor="ctr">
+            <a:spAutoFit/>
+          </a:bodyPr>
+          <a:lstStyle/>
+          <a:p>
+            <a:pPr>
+              <a:lnSpc>
+                <a:spcPct val="114000"/>
+              </a:lnSpc>
+              <a:spcAft>
+                <a:spcPts val="0"/>
+              </a:spcAft>
+            </a:pPr>
+            <a:r>
+              <a:rPr sz="1150" b="1">
+                <a:solidFill>
+                  <a:srgbClr val="1C1C1E"/>
+                </a:solidFill>
+                <a:latin typeface="맑은 고딕"/>
+                <a:ea typeface="맑은 고딕"/>
+              </a:rPr>
+              <a:t>§6 · 발견 3</a:t>
+            </a:r>
+          </a:p>
+        </p:txBody>
+      </p:sp>
+      <p:sp>
+        <p:nvSpPr>
+          <p:cNvPr id="35" name="Rounded Rectangle 34"/>
+          <p:cNvSpPr/>
+          <p:nvPr/>
+        </p:nvSpPr>
+        <p:spPr>
+          <a:xfrm>
+            <a:off x="502920" y="5221224"/>
+            <a:ext cx="1188720" cy="658368"/>
           </a:xfrm>
           <a:prstGeom prst="roundRect">
             <a:avLst>
@@ -13311,14 +15662,14 @@
       </p:sp>
       <p:sp>
         <p:nvSpPr>
-          <p:cNvPr id="27" name="TextBox 26"/>
+          <p:cNvPr id="36" name="TextBox 35"/>
           <p:cNvSpPr txBox="1"/>
           <p:nvPr/>
         </p:nvSpPr>
         <p:spPr>
           <a:xfrm>
-            <a:off x="9555480" y="3520440"/>
-            <a:ext cx="2240280" cy="502920"/>
+            <a:off x="502920" y="5294376"/>
+            <a:ext cx="1188720" cy="502920"/>
           </a:xfrm>
           <a:prstGeom prst="rect">
             <a:avLst/>
@@ -13340,130 +15691,27 @@
               </a:spcAft>
             </a:pPr>
             <a:r>
-              <a:rPr sz="1150" b="1">
-                <a:solidFill>
-                  <a:srgbClr val="33393F"/>
-                </a:solidFill>
-                <a:latin typeface="맑은 고딕"/>
-                <a:ea typeface="맑은 고딕"/>
-              </a:rPr>
-              <a:t>§5 · 발견 2</a:t>
-            </a:r>
-          </a:p>
-        </p:txBody>
-      </p:sp>
-      <p:sp>
-        <p:nvSpPr>
-          <p:cNvPr id="28" name="Rounded Rectangle 27"/>
+              <a:rPr sz="1400" b="1">
+                <a:solidFill>
+                  <a:srgbClr val="FFFFFF"/>
+                </a:solidFill>
+                <a:latin typeface="맑은 고딕"/>
+                <a:ea typeface="맑은 고딕"/>
+              </a:rPr>
+              <a:t>RQ4</a:t>
+            </a:r>
+          </a:p>
+        </p:txBody>
+      </p:sp>
+      <p:sp>
+        <p:nvSpPr>
+          <p:cNvPr id="37" name="Rounded Rectangle 36"/>
           <p:cNvSpPr/>
           <p:nvPr/>
         </p:nvSpPr>
         <p:spPr>
           <a:xfrm>
-            <a:off x="502920" y="4288536"/>
-            <a:ext cx="1188720" cy="658368"/>
-          </a:xfrm>
-          <a:prstGeom prst="roundRect">
-            <a:avLst>
-              <a:gd name="adj" fmla="val 12500"/>
-            </a:avLst>
-          </a:prstGeom>
-          <a:gradFill rotWithShape="1">
-            <a:gsLst>
-              <a:gs pos="0">
-                <a:srgbClr val="2A2E33"/>
-              </a:gs>
-              <a:gs pos="100000">
-                <a:srgbClr val="4A4F55"/>
-              </a:gs>
-            </a:gsLst>
-            <a:lin scaled="0" ang="14700000"/>
-          </a:gradFill>
-          <a:ln>
-            <a:noFill/>
-          </a:ln>
-          <a:effectLst>
-            <a:outerShdw blurRad="182880" dist="64008" dir="5400000" rotWithShape="0">
-              <a:srgbClr val="000000">
-                <a:alpha val="38000"/>
-              </a:srgbClr>
-            </a:outerShdw>
-          </a:effectLst>
-        </p:spPr>
-        <p:style>
-          <a:lnRef idx="1">
-            <a:schemeClr val="accent1"/>
-          </a:lnRef>
-          <a:fillRef idx="3">
-            <a:schemeClr val="accent1"/>
-          </a:fillRef>
-          <a:effectRef idx="2">
-            <a:schemeClr val="accent1"/>
-          </a:effectRef>
-          <a:fontRef idx="minor">
-            <a:schemeClr val="lt1"/>
-          </a:fontRef>
-        </p:style>
-        <p:txBody>
-          <a:bodyPr rtlCol="0" anchor="ctr"/>
-          <a:lstStyle/>
-          <a:p>
-            <a:pPr algn="ctr"/>
-          </a:p>
-        </p:txBody>
-      </p:sp>
-      <p:sp>
-        <p:nvSpPr>
-          <p:cNvPr id="29" name="TextBox 28"/>
-          <p:cNvSpPr txBox="1"/>
-          <p:nvPr/>
-        </p:nvSpPr>
-        <p:spPr>
-          <a:xfrm>
-            <a:off x="502920" y="4361688"/>
-            <a:ext cx="1188720" cy="502920"/>
-          </a:xfrm>
-          <a:prstGeom prst="rect">
-            <a:avLst/>
-          </a:prstGeom>
-          <a:noFill/>
-        </p:spPr>
-        <p:txBody>
-          <a:bodyPr wrap="square" anchor="ctr">
-            <a:spAutoFit/>
-          </a:bodyPr>
-          <a:lstStyle/>
-          <a:p>
-            <a:pPr>
-              <a:lnSpc>
-                <a:spcPct val="114000"/>
-              </a:lnSpc>
-              <a:spcAft>
-                <a:spcPts val="0"/>
-              </a:spcAft>
-            </a:pPr>
-            <a:r>
-              <a:rPr sz="1400" b="1">
-                <a:solidFill>
-                  <a:srgbClr val="FFFFFF"/>
-                </a:solidFill>
-                <a:latin typeface="맑은 고딕"/>
-                <a:ea typeface="맑은 고딕"/>
-              </a:rPr>
-              <a:t>RQ3</a:t>
-            </a:r>
-          </a:p>
-        </p:txBody>
-      </p:sp>
-      <p:sp>
-        <p:nvSpPr>
-          <p:cNvPr id="30" name="Rounded Rectangle 29"/>
-          <p:cNvSpPr/>
-          <p:nvPr/>
-        </p:nvSpPr>
-        <p:spPr>
-          <a:xfrm>
-            <a:off x="1828800" y="4288536"/>
+            <a:off x="1828800" y="5221224"/>
             <a:ext cx="7589520" cy="658368"/>
           </a:xfrm>
           <a:prstGeom prst="roundRect">
@@ -13511,13 +15759,13 @@
       </p:sp>
       <p:sp>
         <p:nvSpPr>
-          <p:cNvPr id="31" name="TextBox 30"/>
+          <p:cNvPr id="38" name="TextBox 37"/>
           <p:cNvSpPr txBox="1"/>
           <p:nvPr/>
         </p:nvSpPr>
         <p:spPr>
           <a:xfrm>
-            <a:off x="2011680" y="4361688"/>
+            <a:off x="2011680" y="5294376"/>
             <a:ext cx="7315200" cy="502920"/>
           </a:xfrm>
           <a:prstGeom prst="rect">
@@ -13547,20 +15795,20 @@
                 <a:latin typeface="맑은 고딕"/>
                 <a:ea typeface="맑은 고딕"/>
               </a:rPr>
-              <a:t>지원 배분은 무엇으로 설명되는가?</a:t>
-            </a:r>
-          </a:p>
-        </p:txBody>
-      </p:sp>
-      <p:sp>
-        <p:nvSpPr>
-          <p:cNvPr id="32" name="Rounded Rectangle 31"/>
+              <a:t>정부 기준만으로 배분 규칙을 만들면 어디가 어긋나는가?</a:t>
+            </a:r>
+          </a:p>
+        </p:txBody>
+      </p:sp>
+      <p:sp>
+        <p:nvSpPr>
+          <p:cNvPr id="39" name="Rounded Rectangle 38"/>
           <p:cNvSpPr/>
           <p:nvPr/>
         </p:nvSpPr>
         <p:spPr>
           <a:xfrm>
-            <a:off x="9555480" y="4288536"/>
+            <a:off x="9555480" y="5221224"/>
             <a:ext cx="2240280" cy="658368"/>
           </a:xfrm>
           <a:prstGeom prst="roundRect">
@@ -13568,24 +15816,18 @@
               <a:gd name="adj" fmla="val 12500"/>
             </a:avLst>
           </a:prstGeom>
-          <a:gradFill rotWithShape="1">
-            <a:gsLst>
-              <a:gs pos="0">
-                <a:srgbClr val="2A2E33"/>
-              </a:gs>
-              <a:gs pos="100000">
-                <a:srgbClr val="4A4F55"/>
-              </a:gs>
-            </a:gsLst>
-            <a:lin scaled="0" ang="14700000"/>
-          </a:gradFill>
-          <a:ln>
-            <a:noFill/>
+          <a:solidFill>
+            <a:srgbClr val="F1F2F3"/>
+          </a:solidFill>
+          <a:ln w="15875">
+            <a:solidFill>
+              <a:srgbClr val="9AA0A6"/>
+            </a:solidFill>
           </a:ln>
           <a:effectLst>
             <a:outerShdw blurRad="182880" dist="64008" dir="5400000" rotWithShape="0">
               <a:srgbClr val="000000">
-                <a:alpha val="38000"/>
+                <a:alpha val="32000"/>
               </a:srgbClr>
             </a:outerShdw>
           </a:effectLst>
@@ -13614,13 +15856,13 @@
       </p:sp>
       <p:sp>
         <p:nvSpPr>
-          <p:cNvPr id="33" name="TextBox 32"/>
+          <p:cNvPr id="40" name="TextBox 39"/>
           <p:cNvSpPr txBox="1"/>
           <p:nvPr/>
         </p:nvSpPr>
         <p:spPr>
           <a:xfrm>
-            <a:off x="9555480" y="4361688"/>
+            <a:off x="9555480" y="5294376"/>
             <a:ext cx="2240280" cy="502920"/>
           </a:xfrm>
           <a:prstGeom prst="rect">
@@ -13645,314 +15887,11 @@
             <a:r>
               <a:rPr sz="1150" b="1">
                 <a:solidFill>
-                  <a:srgbClr val="33393F"/>
-                </a:solidFill>
-                <a:latin typeface="맑은 고딕"/>
-                <a:ea typeface="맑은 고딕"/>
-              </a:rPr>
-              <a:t>§6 · 발견 3</a:t>
-            </a:r>
-          </a:p>
-        </p:txBody>
-      </p:sp>
-      <p:sp>
-        <p:nvSpPr>
-          <p:cNvPr id="34" name="Rounded Rectangle 33"/>
-          <p:cNvSpPr/>
-          <p:nvPr/>
-        </p:nvSpPr>
-        <p:spPr>
-          <a:xfrm>
-            <a:off x="502920" y="5129784"/>
-            <a:ext cx="1188720" cy="658368"/>
-          </a:xfrm>
-          <a:prstGeom prst="roundRect">
-            <a:avLst>
-              <a:gd name="adj" fmla="val 12500"/>
-            </a:avLst>
-          </a:prstGeom>
-          <a:gradFill rotWithShape="1">
-            <a:gsLst>
-              <a:gs pos="0">
-                <a:srgbClr val="2A2E33"/>
-              </a:gs>
-              <a:gs pos="100000">
-                <a:srgbClr val="4A4F55"/>
-              </a:gs>
-            </a:gsLst>
-            <a:lin scaled="0" ang="14700000"/>
-          </a:gradFill>
-          <a:ln>
-            <a:noFill/>
-          </a:ln>
-          <a:effectLst>
-            <a:outerShdw blurRad="182880" dist="64008" dir="5400000" rotWithShape="0">
-              <a:srgbClr val="000000">
-                <a:alpha val="38000"/>
-              </a:srgbClr>
-            </a:outerShdw>
-          </a:effectLst>
-        </p:spPr>
-        <p:style>
-          <a:lnRef idx="1">
-            <a:schemeClr val="accent1"/>
-          </a:lnRef>
-          <a:fillRef idx="3">
-            <a:schemeClr val="accent1"/>
-          </a:fillRef>
-          <a:effectRef idx="2">
-            <a:schemeClr val="accent1"/>
-          </a:effectRef>
-          <a:fontRef idx="minor">
-            <a:schemeClr val="lt1"/>
-          </a:fontRef>
-        </p:style>
-        <p:txBody>
-          <a:bodyPr rtlCol="0" anchor="ctr"/>
-          <a:lstStyle/>
-          <a:p>
-            <a:pPr algn="ctr"/>
-          </a:p>
-        </p:txBody>
-      </p:sp>
-      <p:sp>
-        <p:nvSpPr>
-          <p:cNvPr id="35" name="TextBox 34"/>
-          <p:cNvSpPr txBox="1"/>
-          <p:nvPr/>
-        </p:nvSpPr>
-        <p:spPr>
-          <a:xfrm>
-            <a:off x="502920" y="5202936"/>
-            <a:ext cx="1188720" cy="502920"/>
-          </a:xfrm>
-          <a:prstGeom prst="rect">
-            <a:avLst/>
-          </a:prstGeom>
-          <a:noFill/>
-        </p:spPr>
-        <p:txBody>
-          <a:bodyPr wrap="square" anchor="ctr">
-            <a:spAutoFit/>
-          </a:bodyPr>
-          <a:lstStyle/>
-          <a:p>
-            <a:pPr>
-              <a:lnSpc>
-                <a:spcPct val="114000"/>
-              </a:lnSpc>
-              <a:spcAft>
-                <a:spcPts val="0"/>
-              </a:spcAft>
-            </a:pPr>
-            <a:r>
-              <a:rPr sz="1400" b="1">
-                <a:solidFill>
-                  <a:srgbClr val="FFFFFF"/>
-                </a:solidFill>
-                <a:latin typeface="맑은 고딕"/>
-                <a:ea typeface="맑은 고딕"/>
-              </a:rPr>
-              <a:t>RQ4</a:t>
-            </a:r>
-          </a:p>
-        </p:txBody>
-      </p:sp>
-      <p:sp>
-        <p:nvSpPr>
-          <p:cNvPr id="36" name="Rounded Rectangle 35"/>
-          <p:cNvSpPr/>
-          <p:nvPr/>
-        </p:nvSpPr>
-        <p:spPr>
-          <a:xfrm>
-            <a:off x="1828800" y="5129784"/>
-            <a:ext cx="7589520" cy="658368"/>
-          </a:xfrm>
-          <a:prstGeom prst="roundRect">
-            <a:avLst>
-              <a:gd name="adj" fmla="val 12500"/>
-            </a:avLst>
-          </a:prstGeom>
-          <a:solidFill>
-            <a:srgbClr val="FFFFFF"/>
-          </a:solidFill>
-          <a:ln w="12700">
-            <a:solidFill>
-              <a:srgbClr val="E4E6E9"/>
-            </a:solidFill>
-          </a:ln>
-          <a:effectLst>
-            <a:outerShdw blurRad="182880" dist="64008" dir="5400000" rotWithShape="0">
-              <a:srgbClr val="000000">
-                <a:alpha val="30000"/>
-              </a:srgbClr>
-            </a:outerShdw>
-          </a:effectLst>
-        </p:spPr>
-        <p:style>
-          <a:lnRef idx="1">
-            <a:schemeClr val="accent1"/>
-          </a:lnRef>
-          <a:fillRef idx="3">
-            <a:schemeClr val="accent1"/>
-          </a:fillRef>
-          <a:effectRef idx="2">
-            <a:schemeClr val="accent1"/>
-          </a:effectRef>
-          <a:fontRef idx="minor">
-            <a:schemeClr val="lt1"/>
-          </a:fontRef>
-        </p:style>
-        <p:txBody>
-          <a:bodyPr rtlCol="0" anchor="ctr"/>
-          <a:lstStyle/>
-          <a:p>
-            <a:pPr algn="ctr"/>
-          </a:p>
-        </p:txBody>
-      </p:sp>
-      <p:sp>
-        <p:nvSpPr>
-          <p:cNvPr id="37" name="TextBox 36"/>
-          <p:cNvSpPr txBox="1"/>
-          <p:nvPr/>
-        </p:nvSpPr>
-        <p:spPr>
-          <a:xfrm>
-            <a:off x="2011680" y="5202936"/>
-            <a:ext cx="7315200" cy="502920"/>
-          </a:xfrm>
-          <a:prstGeom prst="rect">
-            <a:avLst/>
-          </a:prstGeom>
-          <a:noFill/>
-        </p:spPr>
-        <p:txBody>
-          <a:bodyPr wrap="square" anchor="ctr">
-            <a:spAutoFit/>
-          </a:bodyPr>
-          <a:lstStyle/>
-          <a:p>
-            <a:pPr>
-              <a:lnSpc>
-                <a:spcPct val="114000"/>
-              </a:lnSpc>
-              <a:spcAft>
-                <a:spcPts val="0"/>
-              </a:spcAft>
-            </a:pPr>
-            <a:r>
-              <a:rPr sz="1250" b="0">
-                <a:solidFill>
                   <a:srgbClr val="1C1C1E"/>
                 </a:solidFill>
                 <a:latin typeface="맑은 고딕"/>
                 <a:ea typeface="맑은 고딕"/>
               </a:rPr>
-              <a:t>정부 기준만으로 배분 규칙을 만들면 어디가 어긋나는가?</a:t>
-            </a:r>
-          </a:p>
-        </p:txBody>
-      </p:sp>
-      <p:sp>
-        <p:nvSpPr>
-          <p:cNvPr id="38" name="Rounded Rectangle 37"/>
-          <p:cNvSpPr/>
-          <p:nvPr/>
-        </p:nvSpPr>
-        <p:spPr>
-          <a:xfrm>
-            <a:off x="9555480" y="5129784"/>
-            <a:ext cx="2240280" cy="658368"/>
-          </a:xfrm>
-          <a:prstGeom prst="roundRect">
-            <a:avLst>
-              <a:gd name="adj" fmla="val 12500"/>
-            </a:avLst>
-          </a:prstGeom>
-          <a:gradFill rotWithShape="1">
-            <a:gsLst>
-              <a:gs pos="0">
-                <a:srgbClr val="2A2E33"/>
-              </a:gs>
-              <a:gs pos="100000">
-                <a:srgbClr val="4A4F55"/>
-              </a:gs>
-            </a:gsLst>
-            <a:lin scaled="0" ang="14700000"/>
-          </a:gradFill>
-          <a:ln>
-            <a:noFill/>
-          </a:ln>
-          <a:effectLst>
-            <a:outerShdw blurRad="182880" dist="64008" dir="5400000" rotWithShape="0">
-              <a:srgbClr val="000000">
-                <a:alpha val="38000"/>
-              </a:srgbClr>
-            </a:outerShdw>
-          </a:effectLst>
-        </p:spPr>
-        <p:style>
-          <a:lnRef idx="1">
-            <a:schemeClr val="accent1"/>
-          </a:lnRef>
-          <a:fillRef idx="3">
-            <a:schemeClr val="accent1"/>
-          </a:fillRef>
-          <a:effectRef idx="2">
-            <a:schemeClr val="accent1"/>
-          </a:effectRef>
-          <a:fontRef idx="minor">
-            <a:schemeClr val="lt1"/>
-          </a:fontRef>
-        </p:style>
-        <p:txBody>
-          <a:bodyPr rtlCol="0" anchor="ctr"/>
-          <a:lstStyle/>
-          <a:p>
-            <a:pPr algn="ctr"/>
-          </a:p>
-        </p:txBody>
-      </p:sp>
-      <p:sp>
-        <p:nvSpPr>
-          <p:cNvPr id="39" name="TextBox 38"/>
-          <p:cNvSpPr txBox="1"/>
-          <p:nvPr/>
-        </p:nvSpPr>
-        <p:spPr>
-          <a:xfrm>
-            <a:off x="9555480" y="5202936"/>
-            <a:ext cx="2240280" cy="502920"/>
-          </a:xfrm>
-          <a:prstGeom prst="rect">
-            <a:avLst/>
-          </a:prstGeom>
-          <a:noFill/>
-        </p:spPr>
-        <p:txBody>
-          <a:bodyPr wrap="square" anchor="ctr">
-            <a:spAutoFit/>
-          </a:bodyPr>
-          <a:lstStyle/>
-          <a:p>
-            <a:pPr>
-              <a:lnSpc>
-                <a:spcPct val="114000"/>
-              </a:lnSpc>
-              <a:spcAft>
-                <a:spcPts val="0"/>
-              </a:spcAft>
-            </a:pPr>
-            <a:r>
-              <a:rPr sz="1150" b="1">
-                <a:solidFill>
-                  <a:srgbClr val="33393F"/>
-                </a:solidFill>
-                <a:latin typeface="맑은 고딕"/>
-                <a:ea typeface="맑은 고딕"/>
-              </a:rPr>
               <a:t>§7 · 발견 4</a:t>
             </a:r>
           </a:p>
@@ -13960,7 +15899,7 @@
       </p:sp>
       <p:sp>
         <p:nvSpPr>
-          <p:cNvPr id="40" name="TextBox 39"/>
+          <p:cNvPr id="41" name="TextBox 40"/>
           <p:cNvSpPr txBox="1"/>
           <p:nvPr/>
         </p:nvSpPr>
@@ -14009,7 +15948,7 @@
 </p:sld>
 </file>
 
-<file path=ppt/slides/slide4.xml><?xml version="1.0" encoding="utf-8"?>
+<file path=ppt/slides/slide5.xml><?xml version="1.0" encoding="utf-8"?>
 <p:sld xmlns:a="http://schemas.openxmlformats.org/drawingml/2006/main" xmlns:p="http://schemas.openxmlformats.org/presentationml/2006/main" xmlns:r="http://schemas.openxmlformats.org/officeDocument/2006/relationships">
   <p:cSld>
     <p:spTree>
@@ -14256,7 +16195,7 @@
                 <a:latin typeface="맑은 고딕"/>
                 <a:ea typeface="맑은 고딕"/>
               </a:rPr>
-              <a:t>04</a:t>
+              <a:t>05</a:t>
             </a:r>
           </a:p>
         </p:txBody>
@@ -15108,7 +17047,7 @@
 </p:sld>
 </file>
 
-<file path=ppt/slides/slide5.xml><?xml version="1.0" encoding="utf-8"?>
+<file path=ppt/slides/slide6.xml><?xml version="1.0" encoding="utf-8"?>
 <p:sld xmlns:a="http://schemas.openxmlformats.org/drawingml/2006/main" xmlns:p="http://schemas.openxmlformats.org/presentationml/2006/main" xmlns:r="http://schemas.openxmlformats.org/officeDocument/2006/relationships">
   <p:cSld>
     <p:spTree>
@@ -15355,7 +17294,7 @@
                 <a:latin typeface="맑은 고딕"/>
                 <a:ea typeface="맑은 고딕"/>
               </a:rPr>
-              <a:t>05</a:t>
+              <a:t>06</a:t>
             </a:r>
           </a:p>
         </p:txBody>
@@ -16276,7 +18215,7 @@
 </p:sld>
 </file>
 
-<file path=ppt/slides/slide6.xml><?xml version="1.0" encoding="utf-8"?>
+<file path=ppt/slides/slide7.xml><?xml version="1.0" encoding="utf-8"?>
 <p:sld xmlns:a="http://schemas.openxmlformats.org/drawingml/2006/main" xmlns:p="http://schemas.openxmlformats.org/presentationml/2006/main" xmlns:r="http://schemas.openxmlformats.org/officeDocument/2006/relationships">
   <p:cSld>
     <p:spTree>
@@ -16523,7 +18462,7 @@
                 <a:latin typeface="맑은 고딕"/>
                 <a:ea typeface="맑은 고딕"/>
               </a:rPr>
-              <a:t>06</a:t>
+              <a:t>07</a:t>
             </a:r>
           </a:p>
         </p:txBody>
@@ -17287,7 +19226,7 @@
 </p:sld>
 </file>
 
-<file path=ppt/slides/slide7.xml><?xml version="1.0" encoding="utf-8"?>
+<file path=ppt/slides/slide8.xml><?xml version="1.0" encoding="utf-8"?>
 <p:sld xmlns:a="http://schemas.openxmlformats.org/drawingml/2006/main" xmlns:p="http://schemas.openxmlformats.org/presentationml/2006/main" xmlns:r="http://schemas.openxmlformats.org/officeDocument/2006/relationships">
   <p:cSld>
     <p:spTree>
@@ -17534,7 +19473,7 @@
                 <a:latin typeface="맑은 고딕"/>
                 <a:ea typeface="맑은 고딕"/>
               </a:rPr>
-              <a:t>07</a:t>
+              <a:t>08</a:t>
             </a:r>
           </a:p>
         </p:txBody>
@@ -18454,7 +20393,7 @@
 </p:sld>
 </file>
 
-<file path=ppt/slides/slide8.xml><?xml version="1.0" encoding="utf-8"?>
+<file path=ppt/slides/slide9.xml><?xml version="1.0" encoding="utf-8"?>
 <p:sld xmlns:a="http://schemas.openxmlformats.org/drawingml/2006/main" xmlns:p="http://schemas.openxmlformats.org/presentationml/2006/main" xmlns:r="http://schemas.openxmlformats.org/officeDocument/2006/relationships">
   <p:cSld>
     <p:spTree>
@@ -18701,7 +20640,7 @@
                 <a:latin typeface="맑은 고딕"/>
                 <a:ea typeface="맑은 고딕"/>
               </a:rPr>
-              <a:t>08</a:t>
+              <a:t>09</a:t>
             </a:r>
           </a:p>
         </p:txBody>
@@ -19245,948 +21184,6 @@
                 <a:ea typeface="맑은 고딕"/>
               </a:rPr>
               <a:t>→ "지정은 이동시간만 본다"는 공표 기준 그대로이며, 공급 축은 실제로도 판정에 들어가지 않는다</a:t>
-            </a:r>
-          </a:p>
-        </p:txBody>
-      </p:sp>
-    </p:spTree>
-  </p:cSld>
-  <p:clrMapOvr>
-    <a:masterClrMapping/>
-  </p:clrMapOvr>
-</p:sld>
-</file>
-
-<file path=ppt/slides/slide9.xml><?xml version="1.0" encoding="utf-8"?>
-<p:sld xmlns:a="http://schemas.openxmlformats.org/drawingml/2006/main" xmlns:p="http://schemas.openxmlformats.org/presentationml/2006/main" xmlns:r="http://schemas.openxmlformats.org/officeDocument/2006/relationships">
-  <p:cSld>
-    <p:spTree>
-      <p:nvGrpSpPr>
-        <p:cNvPr id="1" name=""/>
-        <p:cNvGrpSpPr/>
-        <p:nvPr/>
-      </p:nvGrpSpPr>
-      <p:grpSpPr/>
-      <p:sp>
-        <p:nvSpPr>
-          <p:cNvPr id="2" name="Rectangle 1"/>
-          <p:cNvSpPr/>
-          <p:nvPr/>
-        </p:nvSpPr>
-        <p:spPr>
-          <a:xfrm>
-            <a:off x="0" y="0"/>
-            <a:ext cx="12191695" cy="6858000"/>
-          </a:xfrm>
-          <a:prstGeom prst="rect">
-            <a:avLst/>
-          </a:prstGeom>
-          <a:solidFill>
-            <a:srgbClr val="FFFFFF"/>
-          </a:solidFill>
-          <a:ln>
-            <a:noFill/>
-          </a:ln>
-          <a:effectLst/>
-        </p:spPr>
-        <p:style>
-          <a:lnRef idx="1">
-            <a:schemeClr val="accent1"/>
-          </a:lnRef>
-          <a:fillRef idx="3">
-            <a:schemeClr val="accent1"/>
-          </a:fillRef>
-          <a:effectRef idx="2">
-            <a:schemeClr val="accent1"/>
-          </a:effectRef>
-          <a:fontRef idx="minor">
-            <a:schemeClr val="lt1"/>
-          </a:fontRef>
-        </p:style>
-        <p:txBody>
-          <a:bodyPr rtlCol="0" anchor="ctr"/>
-          <a:lstStyle/>
-          <a:p>
-            <a:pPr algn="ctr"/>
-          </a:p>
-        </p:txBody>
-      </p:sp>
-      <p:sp>
-        <p:nvSpPr>
-          <p:cNvPr id="3" name="Rounded Rectangle 2"/>
-          <p:cNvSpPr/>
-          <p:nvPr/>
-        </p:nvSpPr>
-        <p:spPr>
-          <a:xfrm>
-            <a:off x="502920" y="475488"/>
-            <a:ext cx="310896" cy="310896"/>
-          </a:xfrm>
-          <a:prstGeom prst="roundRect">
-            <a:avLst>
-              <a:gd name="adj" fmla="val 50000"/>
-            </a:avLst>
-          </a:prstGeom>
-          <a:gradFill rotWithShape="1">
-            <a:gsLst>
-              <a:gs pos="0">
-                <a:srgbClr val="3A3F45"/>
-              </a:gs>
-              <a:gs pos="100000">
-                <a:srgbClr val="73787E"/>
-              </a:gs>
-            </a:gsLst>
-            <a:lin scaled="0" ang="18900000"/>
-          </a:gradFill>
-          <a:ln>
-            <a:noFill/>
-          </a:ln>
-          <a:effectLst>
-            <a:outerShdw blurRad="109728" dist="36576" dir="5400000" rotWithShape="0">
-              <a:srgbClr val="000000">
-                <a:alpha val="35000"/>
-              </a:srgbClr>
-            </a:outerShdw>
-          </a:effectLst>
-        </p:spPr>
-        <p:style>
-          <a:lnRef idx="1">
-            <a:schemeClr val="accent1"/>
-          </a:lnRef>
-          <a:fillRef idx="3">
-            <a:schemeClr val="accent1"/>
-          </a:fillRef>
-          <a:effectRef idx="2">
-            <a:schemeClr val="accent1"/>
-          </a:effectRef>
-          <a:fontRef idx="minor">
-            <a:schemeClr val="lt1"/>
-          </a:fontRef>
-        </p:style>
-        <p:txBody>
-          <a:bodyPr rtlCol="0" anchor="ctr"/>
-          <a:lstStyle/>
-          <a:p>
-            <a:pPr algn="ctr"/>
-          </a:p>
-        </p:txBody>
-      </p:sp>
-      <p:sp>
-        <p:nvSpPr>
-          <p:cNvPr id="4" name="TextBox 3"/>
-          <p:cNvSpPr txBox="1"/>
-          <p:nvPr/>
-        </p:nvSpPr>
-        <p:spPr>
-          <a:xfrm>
-            <a:off x="960120" y="274320"/>
-            <a:ext cx="9692640" cy="685800"/>
-          </a:xfrm>
-          <a:prstGeom prst="rect">
-            <a:avLst/>
-          </a:prstGeom>
-          <a:noFill/>
-        </p:spPr>
-        <p:txBody>
-          <a:bodyPr wrap="square" anchor="ctr">
-            <a:spAutoFit/>
-          </a:bodyPr>
-          <a:lstStyle/>
-          <a:p>
-            <a:pPr>
-              <a:lnSpc>
-                <a:spcPct val="114000"/>
-              </a:lnSpc>
-              <a:spcAft>
-                <a:spcPts val="0"/>
-              </a:spcAft>
-            </a:pPr>
-            <a:r>
-              <a:rPr sz="2150" b="1">
-                <a:solidFill>
-                  <a:srgbClr val="1C1C1E"/>
-                </a:solidFill>
-                <a:latin typeface="맑은 고딕"/>
-                <a:ea typeface="맑은 고딕"/>
-              </a:rPr>
-              <a:t>감사 I-② 걸러지는 지역 — 공급 공백형 사각지대</a:t>
-            </a:r>
-          </a:p>
-        </p:txBody>
-      </p:sp>
-      <p:sp>
-        <p:nvSpPr>
-          <p:cNvPr id="5" name="Rectangle 4"/>
-          <p:cNvSpPr/>
-          <p:nvPr/>
-        </p:nvSpPr>
-        <p:spPr>
-          <a:xfrm>
-            <a:off x="521207" y="969264"/>
-            <a:ext cx="4206240" cy="27432"/>
-          </a:xfrm>
-          <a:prstGeom prst="rect">
-            <a:avLst/>
-          </a:prstGeom>
-          <a:gradFill rotWithShape="1">
-            <a:gsLst>
-              <a:gs pos="0">
-                <a:srgbClr val="2A2E33"/>
-              </a:gs>
-              <a:gs pos="100000">
-                <a:srgbClr val="FFFFFF"/>
-              </a:gs>
-            </a:gsLst>
-            <a:lin scaled="0" ang="0"/>
-          </a:gradFill>
-          <a:ln>
-            <a:noFill/>
-          </a:ln>
-          <a:effectLst/>
-        </p:spPr>
-        <p:style>
-          <a:lnRef idx="1">
-            <a:schemeClr val="accent1"/>
-          </a:lnRef>
-          <a:fillRef idx="3">
-            <a:schemeClr val="accent1"/>
-          </a:fillRef>
-          <a:effectRef idx="2">
-            <a:schemeClr val="accent1"/>
-          </a:effectRef>
-          <a:fontRef idx="minor">
-            <a:schemeClr val="lt1"/>
-          </a:fontRef>
-        </p:style>
-        <p:txBody>
-          <a:bodyPr rtlCol="0" anchor="ctr"/>
-          <a:lstStyle/>
-          <a:p>
-            <a:pPr algn="ctr"/>
-          </a:p>
-        </p:txBody>
-      </p:sp>
-      <p:sp>
-        <p:nvSpPr>
-          <p:cNvPr id="6" name="TextBox 5"/>
-          <p:cNvSpPr txBox="1"/>
-          <p:nvPr/>
-        </p:nvSpPr>
-        <p:spPr>
-          <a:xfrm>
-            <a:off x="10835640" y="164592"/>
-            <a:ext cx="1188720" cy="777240"/>
-          </a:xfrm>
-          <a:prstGeom prst="rect">
-            <a:avLst/>
-          </a:prstGeom>
-          <a:noFill/>
-        </p:spPr>
-        <p:txBody>
-          <a:bodyPr wrap="square" anchor="t">
-            <a:spAutoFit/>
-          </a:bodyPr>
-          <a:lstStyle/>
-          <a:p>
-            <a:pPr>
-              <a:lnSpc>
-                <a:spcPct val="114000"/>
-              </a:lnSpc>
-              <a:spcAft>
-                <a:spcPts val="0"/>
-              </a:spcAft>
-            </a:pPr>
-            <a:r>
-              <a:rPr sz="3000" b="1">
-                <a:solidFill>
-                  <a:srgbClr val="D8DADD"/>
-                </a:solidFill>
-                <a:latin typeface="맑은 고딕"/>
-                <a:ea typeface="맑은 고딕"/>
-              </a:rPr>
-              <a:t>09</a:t>
-            </a:r>
-          </a:p>
-        </p:txBody>
-      </p:sp>
-      <p:sp>
-        <p:nvSpPr>
-          <p:cNvPr id="7" name="TextBox 6"/>
-          <p:cNvSpPr txBox="1"/>
-          <p:nvPr/>
-        </p:nvSpPr>
-        <p:spPr>
-          <a:xfrm>
-            <a:off x="502920" y="6492240"/>
-            <a:ext cx="11247120" cy="320040"/>
-          </a:xfrm>
-          <a:prstGeom prst="rect">
-            <a:avLst/>
-          </a:prstGeom>
-          <a:noFill/>
-        </p:spPr>
-        <p:txBody>
-          <a:bodyPr wrap="square" anchor="t">
-            <a:spAutoFit/>
-          </a:bodyPr>
-          <a:lstStyle/>
-          <a:p>
-            <a:pPr>
-              <a:lnSpc>
-                <a:spcPct val="114000"/>
-              </a:lnSpc>
-              <a:spcAft>
-                <a:spcPts val="0"/>
-              </a:spcAft>
-            </a:pPr>
-            <a:r>
-              <a:rPr sz="850" b="0">
-                <a:solidFill>
-                  <a:srgbClr val="B2B5B9"/>
-                </a:solidFill>
-                <a:latin typeface="맑은 고딕"/>
-                <a:ea typeface="맑은 고딕"/>
-              </a:rPr>
-              <a:t>2026 명지대학교 창의적 SW프로그램 경진대회 · 빅데이터 분석 — 데이터 분석 결과보고서</a:t>
-            </a:r>
-          </a:p>
-        </p:txBody>
-      </p:sp>
-      <p:graphicFrame>
-        <p:nvGraphicFramePr>
-          <p:cNvPr id="8" name="Table 7"/>
-          <p:cNvGraphicFramePr>
-            <a:graphicFrameLocks noGrp="1"/>
-          </p:cNvGraphicFramePr>
-          <p:nvPr/>
-        </p:nvGraphicFramePr>
-        <p:xfrm>
-          <a:off x="502920" y="1280160"/>
-          <a:ext cx="11292840" cy="1536192"/>
-        </p:xfrm>
-        <a:graphic>
-          <a:graphicData uri="http://schemas.openxmlformats.org/drawingml/2006/table">
-            <a:tbl>
-              <a:tblPr>
-                <a:tableStyleId>{5C22544A-7EE6-4342-B048-85BDC9FD1C3A}</a:tableStyleId>
-              </a:tblPr>
-              <a:tblGrid>
-                <a:gridCol w="3291840"/>
-                <a:gridCol w="4846320"/>
-                <a:gridCol w="3154680"/>
-              </a:tblGrid>
-              <a:tr h="512064">
-                <a:tc>
-                  <a:txBody>
-                    <a:bodyPr/>
-                    <a:lstStyle/>
-                    <a:p>
-                      <a:pPr>
-                        <a:lnSpc>
-                          <a:spcPct val="105000"/>
-                        </a:lnSpc>
-                      </a:pPr>
-                      <a:r>
-                        <a:rPr sz="1150" b="1">
-                          <a:solidFill>
-                            <a:srgbClr val="FFFFFF"/>
-                          </a:solidFill>
-                          <a:latin typeface="맑은 고딕"/>
-                          <a:ea typeface="맑은 고딕"/>
-                        </a:rPr>
-                        <a:t>층위</a:t>
-                      </a:r>
-                    </a:p>
-                  </a:txBody>
-                  <a:tcPr marT="27432" marB="27432" marL="73152" marR="73152" anchor="ctr">
-                    <a:solidFill>
-                      <a:srgbClr val="33393F"/>
-                    </a:solidFill>
-                  </a:tcPr>
-                </a:tc>
-                <a:tc>
-                  <a:txBody>
-                    <a:bodyPr/>
-                    <a:lstStyle/>
-                    <a:p>
-                      <a:pPr>
-                        <a:lnSpc>
-                          <a:spcPct val="105000"/>
-                        </a:lnSpc>
-                      </a:pPr>
-                      <a:r>
-                        <a:rPr sz="1150" b="1">
-                          <a:solidFill>
-                            <a:srgbClr val="FFFFFF"/>
-                          </a:solidFill>
-                          <a:latin typeface="맑은 고딕"/>
-                          <a:ea typeface="맑은 고딕"/>
-                        </a:rPr>
-                        <a:t>지역</a:t>
-                      </a:r>
-                    </a:p>
-                  </a:txBody>
-                  <a:tcPr marT="27432" marB="27432" marL="73152" marR="73152" anchor="ctr">
-                    <a:solidFill>
-                      <a:srgbClr val="33393F"/>
-                    </a:solidFill>
-                  </a:tcPr>
-                </a:tc>
-                <a:tc>
-                  <a:txBody>
-                    <a:bodyPr/>
-                    <a:lstStyle/>
-                    <a:p>
-                      <a:pPr>
-                        <a:lnSpc>
-                          <a:spcPct val="105000"/>
-                        </a:lnSpc>
-                      </a:pPr>
-                      <a:r>
-                        <a:rPr sz="1150" b="1">
-                          <a:solidFill>
-                            <a:srgbClr val="FFFFFF"/>
-                          </a:solidFill>
-                          <a:latin typeface="맑은 고딕"/>
-                          <a:ea typeface="맑은 고딕"/>
-                        </a:rPr>
-                        <a:t>상태</a:t>
-                      </a:r>
-                    </a:p>
-                  </a:txBody>
-                  <a:tcPr marT="27432" marB="27432" marL="73152" marR="73152" anchor="ctr">
-                    <a:solidFill>
-                      <a:srgbClr val="33393F"/>
-                    </a:solidFill>
-                  </a:tcPr>
-                </a:tc>
-              </a:tr>
-              <a:tr h="512064">
-                <a:tc>
-                  <a:txBody>
-                    <a:bodyPr/>
-                    <a:lstStyle/>
-                    <a:p>
-                      <a:pPr>
-                        <a:lnSpc>
-                          <a:spcPct val="105000"/>
-                        </a:lnSpc>
-                      </a:pPr>
-                      <a:r>
-                        <a:rPr sz="1100" b="1">
-                          <a:solidFill>
-                            <a:srgbClr val="000000"/>
-                          </a:solidFill>
-                          <a:latin typeface="맑은 고딕"/>
-                          <a:ea typeface="맑은 고딕"/>
-                        </a:rPr>
-                        <a:t>완전 사각 (A/B/C 어디에도 없음)</a:t>
-                      </a:r>
-                    </a:p>
-                  </a:txBody>
-                  <a:tcPr marT="27432" marB="27432" marL="73152" marR="73152" anchor="ctr">
-                    <a:solidFill>
-                      <a:srgbClr val="E3E5E8"/>
-                    </a:solidFill>
-                  </a:tcPr>
-                </a:tc>
-                <a:tc>
-                  <a:txBody>
-                    <a:bodyPr/>
-                    <a:lstStyle/>
-                    <a:p>
-                      <a:pPr>
-                        <a:lnSpc>
-                          <a:spcPct val="105000"/>
-                        </a:lnSpc>
-                      </a:pPr>
-                      <a:r>
-                        <a:rPr sz="1100" b="1">
-                          <a:solidFill>
-                            <a:srgbClr val="000000"/>
-                          </a:solidFill>
-                          <a:latin typeface="맑은 고딕"/>
-                          <a:ea typeface="맑은 고딕"/>
-                        </a:rPr>
-                        <a:t>의왕(전문의 0.6명/10만)·과천·경기광주(인구 39만)·울주·울산북구</a:t>
-                      </a:r>
-                    </a:p>
-                  </a:txBody>
-                  <a:tcPr marT="27432" marB="27432" marL="73152" marR="73152" anchor="ctr">
-                    <a:solidFill>
-                      <a:srgbClr val="E3E5E8"/>
-                    </a:solidFill>
-                  </a:tcPr>
-                </a:tc>
-                <a:tc>
-                  <a:txBody>
-                    <a:bodyPr/>
-                    <a:lstStyle/>
-                    <a:p>
-                      <a:pPr>
-                        <a:lnSpc>
-                          <a:spcPct val="105000"/>
-                        </a:lnSpc>
-                      </a:pPr>
-                      <a:r>
-                        <a:rPr sz="1100" b="1">
-                          <a:solidFill>
-                            <a:srgbClr val="000000"/>
-                          </a:solidFill>
-                          <a:latin typeface="맑은 고딕"/>
-                          <a:ea typeface="맑은 고딕"/>
-                        </a:rPr>
-                        <a:t>분만실 없음 + 어떤 등급·자격도 없음</a:t>
-                      </a:r>
-                    </a:p>
-                  </a:txBody>
-                  <a:tcPr marT="27432" marB="27432" marL="73152" marR="73152" anchor="ctr">
-                    <a:solidFill>
-                      <a:srgbClr val="E3E5E8"/>
-                    </a:solidFill>
-                  </a:tcPr>
-                </a:tc>
-              </a:tr>
-              <a:tr h="512064">
-                <a:tc>
-                  <a:txBody>
-                    <a:bodyPr/>
-                    <a:lstStyle/>
-                    <a:p>
-                      <a:pPr>
-                        <a:lnSpc>
-                          <a:spcPct val="105000"/>
-                        </a:lnSpc>
-                      </a:pPr>
-                      <a:r>
-                        <a:rPr sz="1100" b="0">
-                          <a:solidFill>
-                            <a:srgbClr val="1C1C1E"/>
-                          </a:solidFill>
-                          <a:latin typeface="맑은 고딕"/>
-                          <a:ea typeface="맑은 고딕"/>
-                        </a:rPr>
-                        <a:t>C등급 인지 (하위 사업 자격은 있음)</a:t>
-                      </a:r>
-                    </a:p>
-                  </a:txBody>
-                  <a:tcPr marT="27432" marB="27432" marL="73152" marR="73152" anchor="ctr">
-                    <a:solidFill>
-                      <a:srgbClr val="F6F7F8"/>
-                    </a:solidFill>
-                  </a:tcPr>
-                </a:tc>
-                <a:tc>
-                  <a:txBody>
-                    <a:bodyPr/>
-                    <a:lstStyle/>
-                    <a:p>
-                      <a:pPr>
-                        <a:lnSpc>
-                          <a:spcPct val="105000"/>
-                        </a:lnSpc>
-                      </a:pPr>
-                      <a:r>
-                        <a:rPr sz="1100" b="0">
-                          <a:solidFill>
-                            <a:srgbClr val="1C1C1E"/>
-                          </a:solidFill>
-                          <a:latin typeface="맑은 고딕"/>
-                          <a:ea typeface="맑은 고딕"/>
-                        </a:rPr>
-                        <a:t>계룡·장성·예천 등</a:t>
-                      </a:r>
-                    </a:p>
-                  </a:txBody>
-                  <a:tcPr marT="27432" marB="27432" marL="73152" marR="73152" anchor="ctr">
-                    <a:solidFill>
-                      <a:srgbClr val="F6F7F8"/>
-                    </a:solidFill>
-                  </a:tcPr>
-                </a:tc>
-                <a:tc>
-                  <a:txBody>
-                    <a:bodyPr/>
-                    <a:lstStyle/>
-                    <a:p>
-                      <a:pPr>
-                        <a:lnSpc>
-                          <a:spcPct val="105000"/>
-                        </a:lnSpc>
-                      </a:pPr>
-                      <a:r>
-                        <a:rPr sz="1100" b="0">
-                          <a:solidFill>
-                            <a:srgbClr val="1C1C1E"/>
-                          </a:solidFill>
-                          <a:latin typeface="맑은 고딕"/>
-                          <a:ea typeface="맑은 고딕"/>
-                        </a:rPr>
-                        <a:t>설치 외 자격으로는 제도가 포착</a:t>
-                      </a:r>
-                    </a:p>
-                  </a:txBody>
-                  <a:tcPr marT="27432" marB="27432" marL="73152" marR="73152" anchor="ctr">
-                    <a:solidFill>
-                      <a:srgbClr val="F6F7F8"/>
-                    </a:solidFill>
-                  </a:tcPr>
-                </a:tc>
-              </a:tr>
-            </a:tbl>
-          </a:graphicData>
-        </a:graphic>
-      </p:graphicFrame>
-      <p:sp>
-        <p:nvSpPr>
-          <p:cNvPr id="9" name="Rounded Rectangle 8"/>
-          <p:cNvSpPr/>
-          <p:nvPr/>
-        </p:nvSpPr>
-        <p:spPr>
-          <a:xfrm>
-            <a:off x="502920" y="3108960"/>
-            <a:ext cx="5532120" cy="2331720"/>
-          </a:xfrm>
-          <a:prstGeom prst="roundRect">
-            <a:avLst>
-              <a:gd name="adj" fmla="val 3529"/>
-            </a:avLst>
-          </a:prstGeom>
-          <a:solidFill>
-            <a:srgbClr val="FFFFFF"/>
-          </a:solidFill>
-          <a:ln w="12700">
-            <a:solidFill>
-              <a:srgbClr val="E4E6E9"/>
-            </a:solidFill>
-          </a:ln>
-          <a:effectLst>
-            <a:outerShdw blurRad="182880" dist="64008" dir="5400000" rotWithShape="0">
-              <a:srgbClr val="000000">
-                <a:alpha val="30000"/>
-              </a:srgbClr>
-            </a:outerShdw>
-          </a:effectLst>
-        </p:spPr>
-        <p:style>
-          <a:lnRef idx="1">
-            <a:schemeClr val="accent1"/>
-          </a:lnRef>
-          <a:fillRef idx="3">
-            <a:schemeClr val="accent1"/>
-          </a:fillRef>
-          <a:effectRef idx="2">
-            <a:schemeClr val="accent1"/>
-          </a:effectRef>
-          <a:fontRef idx="minor">
-            <a:schemeClr val="lt1"/>
-          </a:fontRef>
-        </p:style>
-        <p:txBody>
-          <a:bodyPr rtlCol="0" anchor="ctr"/>
-          <a:lstStyle/>
-          <a:p>
-            <a:pPr algn="ctr"/>
-          </a:p>
-        </p:txBody>
-      </p:sp>
-      <p:sp>
-        <p:nvSpPr>
-          <p:cNvPr id="10" name="TextBox 9"/>
-          <p:cNvSpPr txBox="1"/>
-          <p:nvPr/>
-        </p:nvSpPr>
-        <p:spPr>
-          <a:xfrm>
-            <a:off x="685800" y="3236976"/>
-            <a:ext cx="5166359" cy="2075687"/>
-          </a:xfrm>
-          <a:prstGeom prst="rect">
-            <a:avLst/>
-          </a:prstGeom>
-          <a:noFill/>
-        </p:spPr>
-        <p:txBody>
-          <a:bodyPr wrap="square" anchor="t">
-            <a:spAutoFit/>
-          </a:bodyPr>
-          <a:lstStyle/>
-          <a:p>
-            <a:pPr>
-              <a:lnSpc>
-                <a:spcPct val="114000"/>
-              </a:lnSpc>
-              <a:spcAft>
-                <a:spcPts val="350"/>
-              </a:spcAft>
-            </a:pPr>
-            <a:r>
-              <a:rPr sz="1300" b="1">
-                <a:solidFill>
-                  <a:srgbClr val="33393F"/>
-                </a:solidFill>
-                <a:latin typeface="맑은 고딕"/>
-                <a:ea typeface="맑은 고딕"/>
-              </a:rPr>
-              <a:t>소아청소년과 — 같은 구조의 극단 사례</a:t>
-            </a:r>
-          </a:p>
-          <a:p>
-            <a:pPr marL="160020" indent="-160020">
-              <a:lnSpc>
-                <a:spcPct val="114000"/>
-              </a:lnSpc>
-              <a:spcAft>
-                <a:spcPts val="200"/>
-              </a:spcAft>
-            </a:pPr>
-            <a:r>
-              <a:rPr sz="1100" b="0">
-                <a:solidFill>
-                  <a:srgbClr val="1C1C1E"/>
-                </a:solidFill>
-                <a:latin typeface="맑은 고딕"/>
-                <a:ea typeface="맑은 고딕"/>
-              </a:rPr>
-              <a:t>• 거리 통과 ∧ 공급 공백 ∧ 관내 이용 0의 미지정 5곳(예산·함안·장성·증평·담양)</a:t>
-            </a:r>
-          </a:p>
-          <a:p>
-            <a:pPr marL="160020" indent="-160020">
-              <a:lnSpc>
-                <a:spcPct val="114000"/>
-              </a:lnSpc>
-              <a:spcAft>
-                <a:spcPts val="200"/>
-              </a:spcAft>
-            </a:pPr>
-            <a:r>
-              <a:rPr sz="1100" b="0">
-                <a:solidFill>
-                  <a:srgbClr val="1C1C1E"/>
-                </a:solidFill>
-                <a:latin typeface="맑은 고딕"/>
-                <a:ea typeface="맑은 고딕"/>
-              </a:rPr>
-              <a:t>• 소아 입원 5,689건 전량(100%)이 관외 유출</a:t>
-            </a:r>
-          </a:p>
-          <a:p>
-            <a:pPr marL="160020" indent="-160020">
-              <a:lnSpc>
-                <a:spcPct val="114000"/>
-              </a:lnSpc>
-              <a:spcAft>
-                <a:spcPts val="200"/>
-              </a:spcAft>
-            </a:pPr>
-            <a:r>
-              <a:rPr sz="1100" b="0">
-                <a:solidFill>
-                  <a:srgbClr val="1C1C1E"/>
-                </a:solidFill>
-                <a:latin typeface="맑은 고딕"/>
-                <a:ea typeface="맑은 고딕"/>
-              </a:rPr>
-              <a:t>• 중증 이송 반론은 동급(의원+병원+종합) 유출 분리로 통제 — 5곳 모두 전국 중앙값 이상, 증평 96.9%</a:t>
-            </a:r>
-          </a:p>
-          <a:p>
-            <a:pPr marL="160020" indent="-160020">
-              <a:lnSpc>
-                <a:spcPct val="114000"/>
-              </a:lnSpc>
-              <a:spcAft>
-                <a:spcPts val="200"/>
-              </a:spcAft>
-            </a:pPr>
-            <a:r>
-              <a:rPr sz="1100" b="0">
-                <a:solidFill>
-                  <a:srgbClr val="1C1C1E"/>
-                </a:solidFill>
-                <a:latin typeface="맑은 고딕"/>
-                <a:ea typeface="맑은 고딕"/>
-              </a:rPr>
-              <a:t>• 장성군은 소아·분만·투석 3분야 동시 공백</a:t>
-            </a:r>
-          </a:p>
-        </p:txBody>
-      </p:sp>
-      <p:sp>
-        <p:nvSpPr>
-          <p:cNvPr id="11" name="Rounded Rectangle 10"/>
-          <p:cNvSpPr/>
-          <p:nvPr/>
-        </p:nvSpPr>
-        <p:spPr>
-          <a:xfrm>
-            <a:off x="6263640" y="3108960"/>
-            <a:ext cx="5532120" cy="2331720"/>
-          </a:xfrm>
-          <a:prstGeom prst="roundRect">
-            <a:avLst>
-              <a:gd name="adj" fmla="val 3529"/>
-            </a:avLst>
-          </a:prstGeom>
-          <a:solidFill>
-            <a:srgbClr val="FFFFFF"/>
-          </a:solidFill>
-          <a:ln w="12700">
-            <a:solidFill>
-              <a:srgbClr val="E4E6E9"/>
-            </a:solidFill>
-          </a:ln>
-          <a:effectLst>
-            <a:outerShdw blurRad="182880" dist="64008" dir="5400000" rotWithShape="0">
-              <a:srgbClr val="000000">
-                <a:alpha val="30000"/>
-              </a:srgbClr>
-            </a:outerShdw>
-          </a:effectLst>
-        </p:spPr>
-        <p:style>
-          <a:lnRef idx="1">
-            <a:schemeClr val="accent1"/>
-          </a:lnRef>
-          <a:fillRef idx="3">
-            <a:schemeClr val="accent1"/>
-          </a:fillRef>
-          <a:effectRef idx="2">
-            <a:schemeClr val="accent1"/>
-          </a:effectRef>
-          <a:fontRef idx="minor">
-            <a:schemeClr val="lt1"/>
-          </a:fontRef>
-        </p:style>
-        <p:txBody>
-          <a:bodyPr rtlCol="0" anchor="ctr"/>
-          <a:lstStyle/>
-          <a:p>
-            <a:pPr algn="ctr"/>
-          </a:p>
-        </p:txBody>
-      </p:sp>
-      <p:sp>
-        <p:nvSpPr>
-          <p:cNvPr id="12" name="TextBox 11"/>
-          <p:cNvSpPr txBox="1"/>
-          <p:nvPr/>
-        </p:nvSpPr>
-        <p:spPr>
-          <a:xfrm>
-            <a:off x="6446520" y="3236976"/>
-            <a:ext cx="5166359" cy="2075687"/>
-          </a:xfrm>
-          <a:prstGeom prst="rect">
-            <a:avLst/>
-          </a:prstGeom>
-          <a:noFill/>
-        </p:spPr>
-        <p:txBody>
-          <a:bodyPr wrap="square" anchor="t">
-            <a:spAutoFit/>
-          </a:bodyPr>
-          <a:lstStyle/>
-          <a:p>
-            <a:pPr>
-              <a:lnSpc>
-                <a:spcPct val="114000"/>
-              </a:lnSpc>
-              <a:spcAft>
-                <a:spcPts val="350"/>
-              </a:spcAft>
-            </a:pPr>
-            <a:r>
-              <a:rPr sz="1300" b="1">
-                <a:solidFill>
-                  <a:srgbClr val="33393F"/>
-                </a:solidFill>
-                <a:latin typeface="맑은 고딕"/>
-                <a:ea typeface="맑은 고딕"/>
-              </a:rPr>
-              <a:t>배제 메커니즘 — TRI 정의의 구조적 맹점</a:t>
-            </a:r>
-          </a:p>
-          <a:p>
-            <a:pPr marL="160020" indent="-160020">
-              <a:lnSpc>
-                <a:spcPct val="114000"/>
-              </a:lnSpc>
-              <a:spcAft>
-                <a:spcPts val="200"/>
-              </a:spcAft>
-            </a:pPr>
-            <a:r>
-              <a:rPr sz="1100" b="0">
-                <a:solidFill>
-                  <a:srgbClr val="1C1C1E"/>
-                </a:solidFill>
-                <a:latin typeface="맑은 고딕"/>
-                <a:ea typeface="맑은 고딕"/>
-              </a:rPr>
-              <a:t>• TRI는 관내/관외 구분 없이 "60분 내 이용"만 집계</a:t>
-            </a:r>
-          </a:p>
-          <a:p>
-            <a:pPr marL="160020" indent="-160020">
-              <a:lnSpc>
-                <a:spcPct val="114000"/>
-              </a:lnSpc>
-              <a:spcAft>
-                <a:spcPts val="200"/>
-              </a:spcAft>
-            </a:pPr>
-            <a:r>
-              <a:rPr sz="1100" b="0">
-                <a:solidFill>
-                  <a:srgbClr val="1C1C1E"/>
-                </a:solidFill>
-                <a:latin typeface="맑은 고딕"/>
-                <a:ea typeface="맑은 고딕"/>
-              </a:rPr>
-              <a:t>• 원정이 가능하기만 하면 취약하지 않다고 판정</a:t>
-            </a:r>
-          </a:p>
-          <a:p>
-            <a:pPr marL="160020" indent="-160020">
-              <a:lnSpc>
-                <a:spcPct val="114000"/>
-              </a:lnSpc>
-              <a:spcAft>
-                <a:spcPts val="200"/>
-              </a:spcAft>
-            </a:pPr>
-            <a:r>
-              <a:rPr sz="1100" b="0">
-                <a:solidFill>
-                  <a:srgbClr val="1C1C1E"/>
-                </a:solidFill>
-                <a:latin typeface="맑은 고딕"/>
-                <a:ea typeface="맑은 고딕"/>
-              </a:rPr>
-              <a:t>• 제도의 질문("갈 수 있는가")과 주민의 현실("지역에 의사가 있는가")이 여기서 갈라진다</a:t>
-            </a:r>
-          </a:p>
-          <a:p>
-            <a:pPr>
-              <a:lnSpc>
-                <a:spcPct val="114000"/>
-              </a:lnSpc>
-              <a:spcAft>
-                <a:spcPts val="200"/>
-              </a:spcAft>
-            </a:pPr>
-            <a:r>
-              <a:rPr sz="1100" b="0">
-                <a:solidFill>
-                  <a:srgbClr val="1C1C1E"/>
-                </a:solidFill>
-                <a:latin typeface="맑은 고딕"/>
-                <a:ea typeface="맑은 고딕"/>
-              </a:rPr>
-              <a:t>→ 제언 ② TRI 관내/관외 병기</a:t>
             </a:r>
           </a:p>
         </p:txBody>

--- a/04_제출물/데이터분석_결과보고서.pptx
+++ b/04_제출물/데이터분석_결과보고서.pptx
@@ -5,28 +5,28 @@
     <p:sldMasterId id="2147483648" r:id="rId1"/>
   </p:sldMasterIdLst>
   <p:sldIdLst>
-    <p:sldId id="256" r:id="rId7"/>
-    <p:sldId id="257" r:id="rId8"/>
-    <p:sldId id="258" r:id="rId9"/>
-    <p:sldId id="259" r:id="rId10"/>
-    <p:sldId id="260" r:id="rId11"/>
-    <p:sldId id="261" r:id="rId12"/>
-    <p:sldId id="262" r:id="rId13"/>
-    <p:sldId id="263" r:id="rId14"/>
-    <p:sldId id="264" r:id="rId15"/>
-    <p:sldId id="265" r:id="rId16"/>
-    <p:sldId id="266" r:id="rId17"/>
-    <p:sldId id="267" r:id="rId18"/>
-    <p:sldId id="268" r:id="rId19"/>
-    <p:sldId id="269" r:id="rId20"/>
-    <p:sldId id="270" r:id="rId21"/>
-    <p:sldId id="271" r:id="rId22"/>
-    <p:sldId id="272" r:id="rId23"/>
-    <p:sldId id="273" r:id="rId24"/>
-    <p:sldId id="274" r:id="rId25"/>
-    <p:sldId id="275" r:id="rId26"/>
+    <p:sldId id="256" r:id="rId2"/>
+    <p:sldId id="257" r:id="rId3"/>
+    <p:sldId id="258" r:id="rId4"/>
+    <p:sldId id="259" r:id="rId5"/>
+    <p:sldId id="260" r:id="rId6"/>
+    <p:sldId id="261" r:id="rId7"/>
+    <p:sldId id="262" r:id="rId8"/>
+    <p:sldId id="263" r:id="rId9"/>
+    <p:sldId id="264" r:id="rId10"/>
+    <p:sldId id="265" r:id="rId11"/>
+    <p:sldId id="266" r:id="rId12"/>
+    <p:sldId id="267" r:id="rId13"/>
+    <p:sldId id="268" r:id="rId14"/>
+    <p:sldId id="269" r:id="rId15"/>
+    <p:sldId id="270" r:id="rId16"/>
+    <p:sldId id="271" r:id="rId17"/>
+    <p:sldId id="272" r:id="rId18"/>
+    <p:sldId id="273" r:id="rId19"/>
+    <p:sldId id="274" r:id="rId20"/>
+    <p:sldId id="275" r:id="rId21"/>
   </p:sldIdLst>
-  <p:sldSz cx="12191695" cy="6858000" type="screen4x3"/>
+  <p:sldSz cx="12192000" cy="6858000"/>
   <p:notesSz cx="6858000" cy="9144000"/>
   <p:defaultTextStyle>
     <a:defPPr>
@@ -123,6 +123,22 @@
       </a:defRPr>
     </a:lvl9pPr>
   </p:defaultTextStyle>
+  <p:extLst>
+    <p:ext uri="{EFAFB233-063F-42B5-8137-9DF3F51BA10A}">
+      <p15:sldGuideLst xmlns:p15="http://schemas.microsoft.com/office/powerpoint/2012/main">
+        <p15:guide id="1" orient="horz" pos="2160">
+          <p15:clr>
+            <a:srgbClr val="A4A3A4"/>
+          </p15:clr>
+        </p15:guide>
+        <p15:guide id="2" pos="2880">
+          <p15:clr>
+            <a:srgbClr val="A4A3A4"/>
+          </p15:clr>
+        </p15:guide>
+      </p15:sldGuideLst>
+    </p:ext>
+  </p:extLst>
 </p:presentation>
 </file>
 
@@ -164,10 +180,9 @@
           <a:lstStyle/>
           <a:p>
             <a:r>
-              <a:rPr lang="en-US" smtClean="0"/>
+              <a:rPr lang="en-US"/>
               <a:t>Click to edit Master title style</a:t>
             </a:r>
-            <a:endParaRPr lang="en-US"/>
           </a:p>
         </p:txBody>
       </p:sp>
@@ -283,10 +298,9 @@
           </a:lstStyle>
           <a:p>
             <a:r>
-              <a:rPr lang="en-US" smtClean="0"/>
+              <a:rPr lang="en-US"/>
               <a:t>Click to edit Master subtitle style</a:t>
             </a:r>
-            <a:endParaRPr lang="en-US"/>
           </a:p>
         </p:txBody>
       </p:sp>
@@ -307,7 +321,7 @@
           <a:p>
             <a:fld id="{5BCAD085-E8A6-8845-BD4E-CB4CCA059FC4}" type="datetimeFigureOut">
               <a:rPr lang="en-US" smtClean="0"/>
-              <a:t>1/27/13</a:t>
+              <a:t>8/12/2026</a:t>
             </a:fld>
             <a:endParaRPr lang="en-US"/>
           </a:p>
@@ -401,10 +415,9 @@
           <a:lstStyle/>
           <a:p>
             <a:r>
-              <a:rPr lang="en-US" smtClean="0"/>
+              <a:rPr lang="en-US"/>
               <a:t>Click to edit Master title style</a:t>
             </a:r>
-            <a:endParaRPr lang="en-US"/>
           </a:p>
         </p:txBody>
       </p:sp>
@@ -425,38 +438,37 @@
           <a:p>
             <a:pPr lvl="0"/>
             <a:r>
-              <a:rPr lang="en-US" smtClean="0"/>
+              <a:rPr lang="en-US"/>
               <a:t>Click to edit Master text styles</a:t>
             </a:r>
           </a:p>
           <a:p>
             <a:pPr lvl="1"/>
             <a:r>
-              <a:rPr lang="en-US" smtClean="0"/>
+              <a:rPr lang="en-US"/>
               <a:t>Second level</a:t>
             </a:r>
           </a:p>
           <a:p>
             <a:pPr lvl="2"/>
             <a:r>
-              <a:rPr lang="en-US" smtClean="0"/>
+              <a:rPr lang="en-US"/>
               <a:t>Third level</a:t>
             </a:r>
           </a:p>
           <a:p>
             <a:pPr lvl="3"/>
             <a:r>
-              <a:rPr lang="en-US" smtClean="0"/>
+              <a:rPr lang="en-US"/>
               <a:t>Fourth level</a:t>
             </a:r>
           </a:p>
           <a:p>
             <a:pPr lvl="4"/>
             <a:r>
-              <a:rPr lang="en-US" smtClean="0"/>
+              <a:rPr lang="en-US"/>
               <a:t>Fifth level</a:t>
             </a:r>
-            <a:endParaRPr lang="en-US"/>
           </a:p>
         </p:txBody>
       </p:sp>
@@ -477,7 +489,7 @@
           <a:p>
             <a:fld id="{5BCAD085-E8A6-8845-BD4E-CB4CCA059FC4}" type="datetimeFigureOut">
               <a:rPr lang="en-US" smtClean="0"/>
-              <a:t>1/27/13</a:t>
+              <a:t>8/12/2026</a:t>
             </a:fld>
             <a:endParaRPr lang="en-US"/>
           </a:p>
@@ -576,10 +588,9 @@
           <a:lstStyle/>
           <a:p>
             <a:r>
-              <a:rPr lang="en-US" smtClean="0"/>
+              <a:rPr lang="en-US"/>
               <a:t>Click to edit Master title style</a:t>
             </a:r>
-            <a:endParaRPr lang="en-US"/>
           </a:p>
         </p:txBody>
       </p:sp>
@@ -605,38 +616,37 @@
           <a:p>
             <a:pPr lvl="0"/>
             <a:r>
-              <a:rPr lang="en-US" smtClean="0"/>
+              <a:rPr lang="en-US"/>
               <a:t>Click to edit Master text styles</a:t>
             </a:r>
           </a:p>
           <a:p>
             <a:pPr lvl="1"/>
             <a:r>
-              <a:rPr lang="en-US" smtClean="0"/>
+              <a:rPr lang="en-US"/>
               <a:t>Second level</a:t>
             </a:r>
           </a:p>
           <a:p>
             <a:pPr lvl="2"/>
             <a:r>
-              <a:rPr lang="en-US" smtClean="0"/>
+              <a:rPr lang="en-US"/>
               <a:t>Third level</a:t>
             </a:r>
           </a:p>
           <a:p>
             <a:pPr lvl="3"/>
             <a:r>
-              <a:rPr lang="en-US" smtClean="0"/>
+              <a:rPr lang="en-US"/>
               <a:t>Fourth level</a:t>
             </a:r>
           </a:p>
           <a:p>
             <a:pPr lvl="4"/>
             <a:r>
-              <a:rPr lang="en-US" smtClean="0"/>
+              <a:rPr lang="en-US"/>
               <a:t>Fifth level</a:t>
             </a:r>
-            <a:endParaRPr lang="en-US"/>
           </a:p>
         </p:txBody>
       </p:sp>
@@ -657,7 +667,7 @@
           <a:p>
             <a:fld id="{5BCAD085-E8A6-8845-BD4E-CB4CCA059FC4}" type="datetimeFigureOut">
               <a:rPr lang="en-US" smtClean="0"/>
-              <a:t>1/27/13</a:t>
+              <a:t>8/12/2026</a:t>
             </a:fld>
             <a:endParaRPr lang="en-US"/>
           </a:p>
@@ -751,10 +761,9 @@
           <a:lstStyle/>
           <a:p>
             <a:r>
-              <a:rPr lang="en-US" smtClean="0"/>
+              <a:rPr lang="en-US"/>
               <a:t>Click to edit Master title style</a:t>
             </a:r>
-            <a:endParaRPr lang="en-US"/>
           </a:p>
         </p:txBody>
       </p:sp>
@@ -775,38 +784,37 @@
           <a:p>
             <a:pPr lvl="0"/>
             <a:r>
-              <a:rPr lang="en-US" smtClean="0"/>
+              <a:rPr lang="en-US"/>
               <a:t>Click to edit Master text styles</a:t>
             </a:r>
           </a:p>
           <a:p>
             <a:pPr lvl="1"/>
             <a:r>
-              <a:rPr lang="en-US" smtClean="0"/>
+              <a:rPr lang="en-US"/>
               <a:t>Second level</a:t>
             </a:r>
           </a:p>
           <a:p>
             <a:pPr lvl="2"/>
             <a:r>
-              <a:rPr lang="en-US" smtClean="0"/>
+              <a:rPr lang="en-US"/>
               <a:t>Third level</a:t>
             </a:r>
           </a:p>
           <a:p>
             <a:pPr lvl="3"/>
             <a:r>
-              <a:rPr lang="en-US" smtClean="0"/>
+              <a:rPr lang="en-US"/>
               <a:t>Fourth level</a:t>
             </a:r>
           </a:p>
           <a:p>
             <a:pPr lvl="4"/>
             <a:r>
-              <a:rPr lang="en-US" smtClean="0"/>
+              <a:rPr lang="en-US"/>
               <a:t>Fifth level</a:t>
             </a:r>
-            <a:endParaRPr lang="en-US"/>
           </a:p>
         </p:txBody>
       </p:sp>
@@ -827,7 +835,7 @@
           <a:p>
             <a:fld id="{5BCAD085-E8A6-8845-BD4E-CB4CCA059FC4}" type="datetimeFigureOut">
               <a:rPr lang="en-US" smtClean="0"/>
-              <a:t>1/27/13</a:t>
+              <a:t>8/12/2026</a:t>
             </a:fld>
             <a:endParaRPr lang="en-US"/>
           </a:p>
@@ -930,10 +938,9 @@
           </a:lstStyle>
           <a:p>
             <a:r>
-              <a:rPr lang="en-US" smtClean="0"/>
+              <a:rPr lang="en-US"/>
               <a:t>Click to edit Master title style</a:t>
             </a:r>
-            <a:endParaRPr lang="en-US"/>
           </a:p>
         </p:txBody>
       </p:sp>
@@ -1050,7 +1057,7 @@
           <a:p>
             <a:pPr lvl="0"/>
             <a:r>
-              <a:rPr lang="en-US" smtClean="0"/>
+              <a:rPr lang="en-US"/>
               <a:t>Click to edit Master text styles</a:t>
             </a:r>
           </a:p>
@@ -1073,7 +1080,7 @@
           <a:p>
             <a:fld id="{5BCAD085-E8A6-8845-BD4E-CB4CCA059FC4}" type="datetimeFigureOut">
               <a:rPr lang="en-US" smtClean="0"/>
-              <a:t>1/27/13</a:t>
+              <a:t>8/12/2026</a:t>
             </a:fld>
             <a:endParaRPr lang="en-US"/>
           </a:p>
@@ -1167,10 +1174,9 @@
           <a:lstStyle/>
           <a:p>
             <a:r>
-              <a:rPr lang="en-US" smtClean="0"/>
+              <a:rPr lang="en-US"/>
               <a:t>Click to edit Master title style</a:t>
             </a:r>
-            <a:endParaRPr lang="en-US"/>
           </a:p>
         </p:txBody>
       </p:sp>
@@ -1224,38 +1230,37 @@
           <a:p>
             <a:pPr lvl="0"/>
             <a:r>
-              <a:rPr lang="en-US" smtClean="0"/>
+              <a:rPr lang="en-US"/>
               <a:t>Click to edit Master text styles</a:t>
             </a:r>
           </a:p>
           <a:p>
             <a:pPr lvl="1"/>
             <a:r>
-              <a:rPr lang="en-US" smtClean="0"/>
+              <a:rPr lang="en-US"/>
               <a:t>Second level</a:t>
             </a:r>
           </a:p>
           <a:p>
             <a:pPr lvl="2"/>
             <a:r>
-              <a:rPr lang="en-US" smtClean="0"/>
+              <a:rPr lang="en-US"/>
               <a:t>Third level</a:t>
             </a:r>
           </a:p>
           <a:p>
             <a:pPr lvl="3"/>
             <a:r>
-              <a:rPr lang="en-US" smtClean="0"/>
+              <a:rPr lang="en-US"/>
               <a:t>Fourth level</a:t>
             </a:r>
           </a:p>
           <a:p>
             <a:pPr lvl="4"/>
             <a:r>
-              <a:rPr lang="en-US" smtClean="0"/>
+              <a:rPr lang="en-US"/>
               <a:t>Fifth level</a:t>
             </a:r>
-            <a:endParaRPr lang="en-US"/>
           </a:p>
         </p:txBody>
       </p:sp>
@@ -1309,38 +1314,37 @@
           <a:p>
             <a:pPr lvl="0"/>
             <a:r>
-              <a:rPr lang="en-US" smtClean="0"/>
+              <a:rPr lang="en-US"/>
               <a:t>Click to edit Master text styles</a:t>
             </a:r>
           </a:p>
           <a:p>
             <a:pPr lvl="1"/>
             <a:r>
-              <a:rPr lang="en-US" smtClean="0"/>
+              <a:rPr lang="en-US"/>
               <a:t>Second level</a:t>
             </a:r>
           </a:p>
           <a:p>
             <a:pPr lvl="2"/>
             <a:r>
-              <a:rPr lang="en-US" smtClean="0"/>
+              <a:rPr lang="en-US"/>
               <a:t>Third level</a:t>
             </a:r>
           </a:p>
           <a:p>
             <a:pPr lvl="3"/>
             <a:r>
-              <a:rPr lang="en-US" smtClean="0"/>
+              <a:rPr lang="en-US"/>
               <a:t>Fourth level</a:t>
             </a:r>
           </a:p>
           <a:p>
             <a:pPr lvl="4"/>
             <a:r>
-              <a:rPr lang="en-US" smtClean="0"/>
+              <a:rPr lang="en-US"/>
               <a:t>Fifth level</a:t>
             </a:r>
-            <a:endParaRPr lang="en-US"/>
           </a:p>
         </p:txBody>
       </p:sp>
@@ -1361,7 +1365,7 @@
           <a:p>
             <a:fld id="{5BCAD085-E8A6-8845-BD4E-CB4CCA059FC4}" type="datetimeFigureOut">
               <a:rPr lang="en-US" smtClean="0"/>
-              <a:t>1/27/13</a:t>
+              <a:t>8/12/2026</a:t>
             </a:fld>
             <a:endParaRPr lang="en-US"/>
           </a:p>
@@ -1459,10 +1463,9 @@
           </a:lstStyle>
           <a:p>
             <a:r>
-              <a:rPr lang="en-US" smtClean="0"/>
+              <a:rPr lang="en-US"/>
               <a:t>Click to edit Master title style</a:t>
             </a:r>
-            <a:endParaRPr lang="en-US"/>
           </a:p>
         </p:txBody>
       </p:sp>
@@ -1525,7 +1528,7 @@
           <a:p>
             <a:pPr lvl="0"/>
             <a:r>
-              <a:rPr lang="en-US" smtClean="0"/>
+              <a:rPr lang="en-US"/>
               <a:t>Click to edit Master text styles</a:t>
             </a:r>
           </a:p>
@@ -1581,38 +1584,37 @@
           <a:p>
             <a:pPr lvl="0"/>
             <a:r>
-              <a:rPr lang="en-US" smtClean="0"/>
+              <a:rPr lang="en-US"/>
               <a:t>Click to edit Master text styles</a:t>
             </a:r>
           </a:p>
           <a:p>
             <a:pPr lvl="1"/>
             <a:r>
-              <a:rPr lang="en-US" smtClean="0"/>
+              <a:rPr lang="en-US"/>
               <a:t>Second level</a:t>
             </a:r>
           </a:p>
           <a:p>
             <a:pPr lvl="2"/>
             <a:r>
-              <a:rPr lang="en-US" smtClean="0"/>
+              <a:rPr lang="en-US"/>
               <a:t>Third level</a:t>
             </a:r>
           </a:p>
           <a:p>
             <a:pPr lvl="3"/>
             <a:r>
-              <a:rPr lang="en-US" smtClean="0"/>
+              <a:rPr lang="en-US"/>
               <a:t>Fourth level</a:t>
             </a:r>
           </a:p>
           <a:p>
             <a:pPr lvl="4"/>
             <a:r>
-              <a:rPr lang="en-US" smtClean="0"/>
+              <a:rPr lang="en-US"/>
               <a:t>Fifth level</a:t>
             </a:r>
-            <a:endParaRPr lang="en-US"/>
           </a:p>
         </p:txBody>
       </p:sp>
@@ -1675,7 +1677,7 @@
           <a:p>
             <a:pPr lvl="0"/>
             <a:r>
-              <a:rPr lang="en-US" smtClean="0"/>
+              <a:rPr lang="en-US"/>
               <a:t>Click to edit Master text styles</a:t>
             </a:r>
           </a:p>
@@ -1731,38 +1733,37 @@
           <a:p>
             <a:pPr lvl="0"/>
             <a:r>
-              <a:rPr lang="en-US" smtClean="0"/>
+              <a:rPr lang="en-US"/>
               <a:t>Click to edit Master text styles</a:t>
             </a:r>
           </a:p>
           <a:p>
             <a:pPr lvl="1"/>
             <a:r>
-              <a:rPr lang="en-US" smtClean="0"/>
+              <a:rPr lang="en-US"/>
               <a:t>Second level</a:t>
             </a:r>
           </a:p>
           <a:p>
             <a:pPr lvl="2"/>
             <a:r>
-              <a:rPr lang="en-US" smtClean="0"/>
+              <a:rPr lang="en-US"/>
               <a:t>Third level</a:t>
             </a:r>
           </a:p>
           <a:p>
             <a:pPr lvl="3"/>
             <a:r>
-              <a:rPr lang="en-US" smtClean="0"/>
+              <a:rPr lang="en-US"/>
               <a:t>Fourth level</a:t>
             </a:r>
           </a:p>
           <a:p>
             <a:pPr lvl="4"/>
             <a:r>
-              <a:rPr lang="en-US" smtClean="0"/>
+              <a:rPr lang="en-US"/>
               <a:t>Fifth level</a:t>
             </a:r>
-            <a:endParaRPr lang="en-US"/>
           </a:p>
         </p:txBody>
       </p:sp>
@@ -1783,7 +1784,7 @@
           <a:p>
             <a:fld id="{5BCAD085-E8A6-8845-BD4E-CB4CCA059FC4}" type="datetimeFigureOut">
               <a:rPr lang="en-US" smtClean="0"/>
-              <a:t>1/27/13</a:t>
+              <a:t>8/12/2026</a:t>
             </a:fld>
             <a:endParaRPr lang="en-US"/>
           </a:p>
@@ -1877,10 +1878,9 @@
           <a:lstStyle/>
           <a:p>
             <a:r>
-              <a:rPr lang="en-US" smtClean="0"/>
+              <a:rPr lang="en-US"/>
               <a:t>Click to edit Master title style</a:t>
             </a:r>
-            <a:endParaRPr lang="en-US"/>
           </a:p>
         </p:txBody>
       </p:sp>
@@ -1901,7 +1901,7 @@
           <a:p>
             <a:fld id="{5BCAD085-E8A6-8845-BD4E-CB4CCA059FC4}" type="datetimeFigureOut">
               <a:rPr lang="en-US" smtClean="0"/>
-              <a:t>1/27/13</a:t>
+              <a:t>8/12/2026</a:t>
             </a:fld>
             <a:endParaRPr lang="en-US"/>
           </a:p>
@@ -1996,7 +1996,7 @@
           <a:p>
             <a:fld id="{5BCAD085-E8A6-8845-BD4E-CB4CCA059FC4}" type="datetimeFigureOut">
               <a:rPr lang="en-US" smtClean="0"/>
-              <a:t>1/27/13</a:t>
+              <a:t>8/12/2026</a:t>
             </a:fld>
             <a:endParaRPr lang="en-US"/>
           </a:p>
@@ -2099,10 +2099,9 @@
           </a:lstStyle>
           <a:p>
             <a:r>
-              <a:rPr lang="en-US" smtClean="0"/>
+              <a:rPr lang="en-US"/>
               <a:t>Click to edit Master title style</a:t>
             </a:r>
-            <a:endParaRPr lang="en-US"/>
           </a:p>
         </p:txBody>
       </p:sp>
@@ -2156,38 +2155,37 @@
           <a:p>
             <a:pPr lvl="0"/>
             <a:r>
-              <a:rPr lang="en-US" smtClean="0"/>
+              <a:rPr lang="en-US"/>
               <a:t>Click to edit Master text styles</a:t>
             </a:r>
           </a:p>
           <a:p>
             <a:pPr lvl="1"/>
             <a:r>
-              <a:rPr lang="en-US" smtClean="0"/>
+              <a:rPr lang="en-US"/>
               <a:t>Second level</a:t>
             </a:r>
           </a:p>
           <a:p>
             <a:pPr lvl="2"/>
             <a:r>
-              <a:rPr lang="en-US" smtClean="0"/>
+              <a:rPr lang="en-US"/>
               <a:t>Third level</a:t>
             </a:r>
           </a:p>
           <a:p>
             <a:pPr lvl="3"/>
             <a:r>
-              <a:rPr lang="en-US" smtClean="0"/>
+              <a:rPr lang="en-US"/>
               <a:t>Fourth level</a:t>
             </a:r>
           </a:p>
           <a:p>
             <a:pPr lvl="4"/>
             <a:r>
-              <a:rPr lang="en-US" smtClean="0"/>
+              <a:rPr lang="en-US"/>
               <a:t>Fifth level</a:t>
             </a:r>
-            <a:endParaRPr lang="en-US"/>
           </a:p>
         </p:txBody>
       </p:sp>
@@ -2250,7 +2248,7 @@
           <a:p>
             <a:pPr lvl="0"/>
             <a:r>
-              <a:rPr lang="en-US" smtClean="0"/>
+              <a:rPr lang="en-US"/>
               <a:t>Click to edit Master text styles</a:t>
             </a:r>
           </a:p>
@@ -2273,7 +2271,7 @@
           <a:p>
             <a:fld id="{5BCAD085-E8A6-8845-BD4E-CB4CCA059FC4}" type="datetimeFigureOut">
               <a:rPr lang="en-US" smtClean="0"/>
-              <a:t>1/27/13</a:t>
+              <a:t>8/12/2026</a:t>
             </a:fld>
             <a:endParaRPr lang="en-US"/>
           </a:p>
@@ -2376,10 +2374,9 @@
           </a:lstStyle>
           <a:p>
             <a:r>
-              <a:rPr lang="en-US" smtClean="0"/>
+              <a:rPr lang="en-US"/>
               <a:t>Click to edit Master title style</a:t>
             </a:r>
-            <a:endParaRPr lang="en-US"/>
           </a:p>
         </p:txBody>
       </p:sp>
@@ -2503,7 +2500,7 @@
           <a:p>
             <a:pPr lvl="0"/>
             <a:r>
-              <a:rPr lang="en-US" smtClean="0"/>
+              <a:rPr lang="en-US"/>
               <a:t>Click to edit Master text styles</a:t>
             </a:r>
           </a:p>
@@ -2526,7 +2523,7 @@
           <a:p>
             <a:fld id="{5BCAD085-E8A6-8845-BD4E-CB4CCA059FC4}" type="datetimeFigureOut">
               <a:rPr lang="en-US" smtClean="0"/>
-              <a:t>1/27/13</a:t>
+              <a:t>8/12/2026</a:t>
             </a:fld>
             <a:endParaRPr lang="en-US"/>
           </a:p>
@@ -2635,10 +2632,9 @@
           <a:lstStyle/>
           <a:p>
             <a:r>
-              <a:rPr lang="en-US" smtClean="0"/>
+              <a:rPr lang="en-US"/>
               <a:t>Click to edit Master title style</a:t>
             </a:r>
-            <a:endParaRPr lang="en-US"/>
           </a:p>
         </p:txBody>
       </p:sp>
@@ -2669,38 +2665,37 @@
           <a:p>
             <a:pPr lvl="0"/>
             <a:r>
-              <a:rPr lang="en-US" smtClean="0"/>
+              <a:rPr lang="en-US"/>
               <a:t>Click to edit Master text styles</a:t>
             </a:r>
           </a:p>
           <a:p>
             <a:pPr lvl="1"/>
             <a:r>
-              <a:rPr lang="en-US" smtClean="0"/>
+              <a:rPr lang="en-US"/>
               <a:t>Second level</a:t>
             </a:r>
           </a:p>
           <a:p>
             <a:pPr lvl="2"/>
             <a:r>
-              <a:rPr lang="en-US" smtClean="0"/>
+              <a:rPr lang="en-US"/>
               <a:t>Third level</a:t>
             </a:r>
           </a:p>
           <a:p>
             <a:pPr lvl="3"/>
             <a:r>
-              <a:rPr lang="en-US" smtClean="0"/>
+              <a:rPr lang="en-US"/>
               <a:t>Fourth level</a:t>
             </a:r>
           </a:p>
           <a:p>
             <a:pPr lvl="4"/>
             <a:r>
-              <a:rPr lang="en-US" smtClean="0"/>
+              <a:rPr lang="en-US"/>
               <a:t>Fifth level</a:t>
             </a:r>
-            <a:endParaRPr lang="en-US"/>
           </a:p>
         </p:txBody>
       </p:sp>
@@ -2739,7 +2734,7 @@
           <a:p>
             <a:fld id="{5BCAD085-E8A6-8845-BD4E-CB4CCA059FC4}" type="datetimeFigureOut">
               <a:rPr lang="en-US" smtClean="0"/>
-              <a:t>1/27/13</a:t>
+              <a:t>8/12/2026</a:t>
             </a:fld>
             <a:endParaRPr lang="en-US"/>
           </a:p>
@@ -3098,7 +3093,7 @@
 </file>
 
 <file path=ppt/slides/slide1.xml><?xml version="1.0" encoding="utf-8"?>
-<p:sld xmlns:a="http://schemas.openxmlformats.org/drawingml/2006/main" xmlns:p="http://schemas.openxmlformats.org/presentationml/2006/main" xmlns:r="http://schemas.openxmlformats.org/officeDocument/2006/relationships">
+<p:sld xmlns:a="http://schemas.openxmlformats.org/drawingml/2006/main" xmlns:r="http://schemas.openxmlformats.org/officeDocument/2006/relationships" xmlns:p="http://schemas.openxmlformats.org/presentationml/2006/main">
   <p:cSld>
     <p:spTree>
       <p:nvGrpSpPr>
@@ -3106,7 +3101,14 @@
         <p:cNvGrpSpPr/>
         <p:nvPr/>
       </p:nvGrpSpPr>
-      <p:grpSpPr/>
+      <p:grpSpPr>
+        <a:xfrm>
+          <a:off x="0" y="0"/>
+          <a:ext cx="0" cy="0"/>
+          <a:chOff x="0" y="0"/>
+          <a:chExt cx="0" cy="0"/>
+        </a:xfrm>
+      </p:grpSpPr>
       <p:sp>
         <p:nvSpPr>
           <p:cNvPr id="2" name="Rectangle 1"/>
@@ -3148,6 +3150,7 @@
           <a:lstStyle/>
           <a:p>
             <a:pPr algn="ctr"/>
+            <a:endParaRPr/>
           </a:p>
         </p:txBody>
       </p:sp>
@@ -3176,7 +3179,7 @@
                 <a:srgbClr val="73787E"/>
               </a:gs>
             </a:gsLst>
-            <a:lin scaled="0" ang="18900000"/>
+            <a:lin ang="18900000" scaled="0"/>
           </a:gradFill>
           <a:ln>
             <a:noFill/>
@@ -3208,6 +3211,7 @@
           <a:lstStyle/>
           <a:p>
             <a:pPr algn="ctr"/>
+            <a:endParaRPr/>
           </a:p>
         </p:txBody>
       </p:sp>
@@ -3219,8 +3223,8 @@
         </p:nvSpPr>
         <p:spPr>
           <a:xfrm>
-            <a:off x="914400" y="1481328"/>
-            <a:ext cx="7315200" cy="2834640"/>
+            <a:off x="914399" y="1481328"/>
+            <a:ext cx="8464063" cy="1769267"/>
           </a:xfrm>
           <a:prstGeom prst="rect">
             <a:avLst/>
@@ -3242,15 +3246,62 @@
               </a:spcAft>
             </a:pPr>
             <a:r>
-              <a:rPr sz="1450" b="0">
+              <a:rPr sz="1450" b="0" dirty="0" err="1">
                 <a:solidFill>
                   <a:srgbClr val="767A7F"/>
                 </a:solidFill>
                 <a:latin typeface="맑은 고딕"/>
                 <a:ea typeface="맑은 고딕"/>
               </a:rPr>
-              <a:t>데이터 분석 결과보고서</a:t>
-            </a:r>
+              <a:t>데이터</a:t>
+            </a:r>
+            <a:r>
+              <a:rPr sz="1450" b="0" dirty="0">
+                <a:solidFill>
+                  <a:srgbClr val="767A7F"/>
+                </a:solidFill>
+                <a:latin typeface="맑은 고딕"/>
+                <a:ea typeface="맑은 고딕"/>
+              </a:rPr>
+              <a:t> </a:t>
+            </a:r>
+            <a:r>
+              <a:rPr sz="1450" b="0" dirty="0" err="1">
+                <a:solidFill>
+                  <a:srgbClr val="767A7F"/>
+                </a:solidFill>
+                <a:latin typeface="맑은 고딕"/>
+                <a:ea typeface="맑은 고딕"/>
+              </a:rPr>
+              <a:t>분석</a:t>
+            </a:r>
+            <a:r>
+              <a:rPr sz="1450" b="0" dirty="0">
+                <a:solidFill>
+                  <a:srgbClr val="767A7F"/>
+                </a:solidFill>
+                <a:latin typeface="맑은 고딕"/>
+                <a:ea typeface="맑은 고딕"/>
+              </a:rPr>
+              <a:t> </a:t>
+            </a:r>
+            <a:r>
+              <a:rPr sz="1450" b="0" dirty="0" err="1">
+                <a:solidFill>
+                  <a:srgbClr val="767A7F"/>
+                </a:solidFill>
+                <a:latin typeface="맑은 고딕"/>
+                <a:ea typeface="맑은 고딕"/>
+              </a:rPr>
+              <a:t>결과보고서</a:t>
+            </a:r>
+            <a:endParaRPr sz="1450" b="0" dirty="0">
+              <a:solidFill>
+                <a:srgbClr val="767A7F"/>
+              </a:solidFill>
+              <a:latin typeface="맑은 고딕"/>
+              <a:ea typeface="맑은 고딕"/>
+            </a:endParaRPr>
           </a:p>
           <a:p>
             <a:pPr>
@@ -3262,15 +3313,22 @@
               </a:spcAft>
             </a:pPr>
             <a:r>
-              <a:rPr sz="4700" b="1">
+              <a:rPr lang="ko-KR" altLang="en-US" sz="4700" b="1" dirty="0">
                 <a:solidFill>
                   <a:srgbClr val="1C1C1E"/>
                 </a:solidFill>
                 <a:latin typeface="맑은 고딕"/>
                 <a:ea typeface="맑은 고딕"/>
               </a:rPr>
-              <a:t>측정과 배분 사이</a:t>
-            </a:r>
+              <a:t>분만취약지 지원제도 개선안</a:t>
+            </a:r>
+            <a:endParaRPr lang="en-US" altLang="ko-KR" sz="1900" dirty="0">
+              <a:solidFill>
+                <a:srgbClr val="33393F"/>
+              </a:solidFill>
+              <a:latin typeface="맑은 고딕"/>
+              <a:ea typeface="맑은 고딕"/>
+            </a:endParaRPr>
           </a:p>
           <a:p>
             <a:pPr>
@@ -3278,19 +3336,156 @@
                 <a:spcPct val="114000"/>
               </a:lnSpc>
               <a:spcAft>
-                <a:spcPts val="0"/>
-              </a:spcAft>
-            </a:pPr>
-            <a:r>
-              <a:rPr sz="1900" b="0">
+                <a:spcPts val="800"/>
+              </a:spcAft>
+            </a:pPr>
+            <a:r>
+              <a:rPr sz="1900" b="0" dirty="0" err="1">
                 <a:solidFill>
                   <a:srgbClr val="33393F"/>
                 </a:solidFill>
                 <a:latin typeface="맑은 고딕"/>
                 <a:ea typeface="맑은 고딕"/>
               </a:rPr>
-              <a:t>— 분만취약지 제도의 전 과정 데이터 감사와 우선순위 모형</a:t>
-            </a:r>
+              <a:t>분만취약지</a:t>
+            </a:r>
+            <a:r>
+              <a:rPr sz="1900" b="0" dirty="0">
+                <a:solidFill>
+                  <a:srgbClr val="33393F"/>
+                </a:solidFill>
+                <a:latin typeface="맑은 고딕"/>
+                <a:ea typeface="맑은 고딕"/>
+              </a:rPr>
+              <a:t> </a:t>
+            </a:r>
+            <a:r>
+              <a:rPr lang="ko-KR" altLang="en-US" sz="1900" b="0" dirty="0">
+                <a:solidFill>
+                  <a:srgbClr val="33393F"/>
+                </a:solidFill>
+                <a:latin typeface="맑은 고딕"/>
+                <a:ea typeface="맑은 고딕"/>
+              </a:rPr>
+              <a:t>지원 </a:t>
+            </a:r>
+            <a:r>
+              <a:rPr sz="1900" b="0" dirty="0" err="1">
+                <a:solidFill>
+                  <a:srgbClr val="33393F"/>
+                </a:solidFill>
+                <a:latin typeface="맑은 고딕"/>
+                <a:ea typeface="맑은 고딕"/>
+              </a:rPr>
+              <a:t>제도의</a:t>
+            </a:r>
+            <a:r>
+              <a:rPr sz="1900" b="0" dirty="0">
+                <a:solidFill>
+                  <a:srgbClr val="33393F"/>
+                </a:solidFill>
+                <a:latin typeface="맑은 고딕"/>
+                <a:ea typeface="맑은 고딕"/>
+              </a:rPr>
+              <a:t> </a:t>
+            </a:r>
+            <a:r>
+              <a:rPr lang="ko-KR" altLang="en-US" sz="1900" b="0" dirty="0">
+                <a:solidFill>
+                  <a:srgbClr val="33393F"/>
+                </a:solidFill>
+                <a:latin typeface="맑은 고딕"/>
+                <a:ea typeface="맑은 고딕"/>
+              </a:rPr>
+              <a:t>모든 절차 속 데이터</a:t>
+            </a:r>
+            <a:r>
+              <a:rPr sz="1900" b="0" dirty="0">
+                <a:solidFill>
+                  <a:srgbClr val="33393F"/>
+                </a:solidFill>
+                <a:latin typeface="맑은 고딕"/>
+                <a:ea typeface="맑은 고딕"/>
+              </a:rPr>
+              <a:t> </a:t>
+            </a:r>
+            <a:r>
+              <a:rPr sz="1900" b="0" dirty="0" err="1">
+                <a:solidFill>
+                  <a:srgbClr val="33393F"/>
+                </a:solidFill>
+                <a:latin typeface="맑은 고딕"/>
+                <a:ea typeface="맑은 고딕"/>
+              </a:rPr>
+              <a:t>감사와</a:t>
+            </a:r>
+            <a:r>
+              <a:rPr sz="1900" b="0" dirty="0">
+                <a:solidFill>
+                  <a:srgbClr val="33393F"/>
+                </a:solidFill>
+                <a:latin typeface="맑은 고딕"/>
+                <a:ea typeface="맑은 고딕"/>
+              </a:rPr>
+              <a:t> </a:t>
+            </a:r>
+            <a:r>
+              <a:rPr lang="ko-KR" altLang="en-US" sz="1900" dirty="0">
+                <a:solidFill>
+                  <a:srgbClr val="33393F"/>
+                </a:solidFill>
+                <a:latin typeface="맑은 고딕"/>
+                <a:ea typeface="맑은 고딕"/>
+              </a:rPr>
+              <a:t>개선된 분석</a:t>
+            </a:r>
+            <a:r>
+              <a:rPr sz="1900" b="0" dirty="0">
+                <a:solidFill>
+                  <a:srgbClr val="33393F"/>
+                </a:solidFill>
+                <a:latin typeface="맑은 고딕"/>
+                <a:ea typeface="맑은 고딕"/>
+              </a:rPr>
+              <a:t> </a:t>
+            </a:r>
+            <a:r>
+              <a:rPr sz="1900" b="0" dirty="0" err="1">
+                <a:solidFill>
+                  <a:srgbClr val="33393F"/>
+                </a:solidFill>
+                <a:latin typeface="맑은 고딕"/>
+                <a:ea typeface="맑은 고딕"/>
+              </a:rPr>
+              <a:t>모형</a:t>
+            </a:r>
+            <a:r>
+              <a:rPr lang="en-US" sz="1900" b="0" dirty="0">
+                <a:solidFill>
+                  <a:srgbClr val="33393F"/>
+                </a:solidFill>
+                <a:latin typeface="맑은 고딕"/>
+                <a:ea typeface="맑은 고딕"/>
+              </a:rPr>
+              <a:t> </a:t>
+            </a:r>
+            <a:r>
+              <a:rPr lang="ko-KR" altLang="en-US" sz="1900" b="0" dirty="0">
+                <a:solidFill>
+                  <a:srgbClr val="33393F"/>
+                </a:solidFill>
+                <a:latin typeface="맑은 고딕"/>
+                <a:ea typeface="맑은 고딕"/>
+              </a:rPr>
+              <a:t>제안</a:t>
+            </a:r>
+            <a:endParaRPr sz="1900" b="0" dirty="0">
+              <a:solidFill>
+                <a:srgbClr val="33393F"/>
+              </a:solidFill>
+              <a:latin typeface="맑은 고딕"/>
+              <a:ea typeface="맑은 고딕"/>
+            </a:endParaRPr>
           </a:p>
         </p:txBody>
       </p:sp>
@@ -3317,7 +3512,7 @@
                 <a:srgbClr val="FFFFFF"/>
               </a:gs>
             </a:gsLst>
-            <a:lin scaled="0" ang="0"/>
+            <a:lin ang="0" scaled="0"/>
           </a:gradFill>
           <a:ln>
             <a:noFill/>
@@ -3343,6 +3538,7 @@
           <a:lstStyle/>
           <a:p>
             <a:pPr algn="ctr"/>
+            <a:endParaRPr/>
           </a:p>
         </p:txBody>
       </p:sp>
@@ -3355,7 +3551,7 @@
         <p:spPr>
           <a:xfrm>
             <a:off x="914400" y="4663440"/>
-            <a:ext cx="6949440" cy="1554480"/>
+            <a:ext cx="6949440" cy="307777"/>
           </a:xfrm>
           <a:prstGeom prst="rect">
             <a:avLst/>
@@ -3377,55 +3573,152 @@
               </a:spcAft>
             </a:pPr>
             <a:r>
-              <a:rPr sz="1350" b="1">
+              <a:rPr sz="1350" b="1" dirty="0">
                 <a:solidFill>
                   <a:srgbClr val="1C1C1E"/>
                 </a:solidFill>
                 <a:latin typeface="맑은 고딕"/>
                 <a:ea typeface="맑은 고딕"/>
               </a:rPr>
-              <a:t>2026 제5회 명지대학교 창의적 SW프로그램 경진대회 · 빅데이터 분석 부문</a:t>
-            </a:r>
-          </a:p>
-          <a:p>
-            <a:pPr>
-              <a:lnSpc>
-                <a:spcPct val="114000"/>
-              </a:lnSpc>
-              <a:spcAft>
-                <a:spcPts val="200"/>
-              </a:spcAft>
-            </a:pPr>
-            <a:r>
-              <a:rPr sz="1250" b="0">
-                <a:solidFill>
-                  <a:srgbClr val="767A7F"/>
-                </a:solidFill>
-                <a:latin typeface="맑은 고딕"/>
-                <a:ea typeface="맑은 고딕"/>
-              </a:rPr>
-              <a:t>정부는 분만취약지를 정밀하게 측정한다. 그러나 지정 규칙은 이동시간만 보고,</a:t>
-            </a:r>
-          </a:p>
-          <a:p>
-            <a:pPr>
-              <a:lnSpc>
-                <a:spcPct val="114000"/>
-              </a:lnSpc>
-              <a:spcAft>
-                <a:spcPts val="0"/>
-              </a:spcAft>
-            </a:pPr>
-            <a:r>
-              <a:rPr sz="1250" b="0">
-                <a:solidFill>
-                  <a:srgbClr val="767A7F"/>
-                </a:solidFill>
-                <a:latin typeface="맑은 고딕"/>
-                <a:ea typeface="맑은 고딕"/>
-              </a:rPr>
-              <a:t>배분은 그 측정값조차 따르지 않는다 — 두 개의 공백을 정부 자신의 데이터로 메운다.</a:t>
-            </a:r>
+              <a:t>2026 제5회 </a:t>
+            </a:r>
+            <a:r>
+              <a:rPr sz="1350" b="1" dirty="0" err="1">
+                <a:solidFill>
+                  <a:srgbClr val="1C1C1E"/>
+                </a:solidFill>
+                <a:latin typeface="맑은 고딕"/>
+                <a:ea typeface="맑은 고딕"/>
+              </a:rPr>
+              <a:t>명지대학교</a:t>
+            </a:r>
+            <a:r>
+              <a:rPr sz="1350" b="1" dirty="0">
+                <a:solidFill>
+                  <a:srgbClr val="1C1C1E"/>
+                </a:solidFill>
+                <a:latin typeface="맑은 고딕"/>
+                <a:ea typeface="맑은 고딕"/>
+              </a:rPr>
+              <a:t> </a:t>
+            </a:r>
+            <a:r>
+              <a:rPr sz="1350" b="1" dirty="0" err="1">
+                <a:solidFill>
+                  <a:srgbClr val="1C1C1E"/>
+                </a:solidFill>
+                <a:latin typeface="맑은 고딕"/>
+                <a:ea typeface="맑은 고딕"/>
+              </a:rPr>
+              <a:t>창의적</a:t>
+            </a:r>
+            <a:r>
+              <a:rPr sz="1350" b="1" dirty="0">
+                <a:solidFill>
+                  <a:srgbClr val="1C1C1E"/>
+                </a:solidFill>
+                <a:latin typeface="맑은 고딕"/>
+                <a:ea typeface="맑은 고딕"/>
+              </a:rPr>
+              <a:t> </a:t>
+            </a:r>
+            <a:r>
+              <a:rPr sz="1350" b="1" dirty="0" err="1">
+                <a:solidFill>
+                  <a:srgbClr val="1C1C1E"/>
+                </a:solidFill>
+                <a:latin typeface="맑은 고딕"/>
+                <a:ea typeface="맑은 고딕"/>
+              </a:rPr>
+              <a:t>SW프로그램</a:t>
+            </a:r>
+            <a:r>
+              <a:rPr sz="1350" b="1" dirty="0">
+                <a:solidFill>
+                  <a:srgbClr val="1C1C1E"/>
+                </a:solidFill>
+                <a:latin typeface="맑은 고딕"/>
+                <a:ea typeface="맑은 고딕"/>
+              </a:rPr>
+              <a:t> </a:t>
+            </a:r>
+            <a:r>
+              <a:rPr sz="1350" b="1" dirty="0" err="1">
+                <a:solidFill>
+                  <a:srgbClr val="1C1C1E"/>
+                </a:solidFill>
+                <a:latin typeface="맑은 고딕"/>
+                <a:ea typeface="맑은 고딕"/>
+              </a:rPr>
+              <a:t>경진대회</a:t>
+            </a:r>
+            <a:r>
+              <a:rPr sz="1350" b="1" dirty="0">
+                <a:solidFill>
+                  <a:srgbClr val="1C1C1E"/>
+                </a:solidFill>
+                <a:latin typeface="맑은 고딕"/>
+                <a:ea typeface="맑은 고딕"/>
+              </a:rPr>
+              <a:t> · </a:t>
+            </a:r>
+            <a:r>
+              <a:rPr sz="1350" b="1" dirty="0" err="1">
+                <a:solidFill>
+                  <a:srgbClr val="1C1C1E"/>
+                </a:solidFill>
+                <a:latin typeface="맑은 고딕"/>
+                <a:ea typeface="맑은 고딕"/>
+              </a:rPr>
+              <a:t>빅데이터</a:t>
+            </a:r>
+            <a:r>
+              <a:rPr sz="1350" b="1" dirty="0">
+                <a:solidFill>
+                  <a:srgbClr val="1C1C1E"/>
+                </a:solidFill>
+                <a:latin typeface="맑은 고딕"/>
+                <a:ea typeface="맑은 고딕"/>
+              </a:rPr>
+              <a:t> </a:t>
+            </a:r>
+            <a:r>
+              <a:rPr sz="1350" b="1" dirty="0" err="1">
+                <a:solidFill>
+                  <a:srgbClr val="1C1C1E"/>
+                </a:solidFill>
+                <a:latin typeface="맑은 고딕"/>
+                <a:ea typeface="맑은 고딕"/>
+              </a:rPr>
+              <a:t>분석</a:t>
+            </a:r>
+            <a:r>
+              <a:rPr sz="1350" b="1" dirty="0">
+                <a:solidFill>
+                  <a:srgbClr val="1C1C1E"/>
+                </a:solidFill>
+                <a:latin typeface="맑은 고딕"/>
+                <a:ea typeface="맑은 고딕"/>
+              </a:rPr>
+              <a:t> </a:t>
+            </a:r>
+            <a:r>
+              <a:rPr sz="1350" b="1" dirty="0" err="1">
+                <a:solidFill>
+                  <a:srgbClr val="1C1C1E"/>
+                </a:solidFill>
+                <a:latin typeface="맑은 고딕"/>
+                <a:ea typeface="맑은 고딕"/>
+              </a:rPr>
+              <a:t>부문</a:t>
+            </a:r>
+            <a:endParaRPr sz="1350" b="1" dirty="0">
+              <a:solidFill>
+                <a:srgbClr val="1C1C1E"/>
+              </a:solidFill>
+              <a:latin typeface="맑은 고딕"/>
+              <a:ea typeface="맑은 고딕"/>
+            </a:endParaRPr>
           </a:p>
         </p:txBody>
       </p:sp>
@@ -3438,7 +3731,7 @@
 </file>
 
 <file path=ppt/slides/slide10.xml><?xml version="1.0" encoding="utf-8"?>
-<p:sld xmlns:a="http://schemas.openxmlformats.org/drawingml/2006/main" xmlns:p="http://schemas.openxmlformats.org/presentationml/2006/main" xmlns:r="http://schemas.openxmlformats.org/officeDocument/2006/relationships">
+<p:sld xmlns:a="http://schemas.openxmlformats.org/drawingml/2006/main" xmlns:r="http://schemas.openxmlformats.org/officeDocument/2006/relationships" xmlns:p="http://schemas.openxmlformats.org/presentationml/2006/main">
   <p:cSld>
     <p:spTree>
       <p:nvGrpSpPr>
@@ -3446,7 +3739,14 @@
         <p:cNvGrpSpPr/>
         <p:nvPr/>
       </p:nvGrpSpPr>
-      <p:grpSpPr/>
+      <p:grpSpPr>
+        <a:xfrm>
+          <a:off x="0" y="0"/>
+          <a:ext cx="0" cy="0"/>
+          <a:chOff x="0" y="0"/>
+          <a:chExt cx="0" cy="0"/>
+        </a:xfrm>
+      </p:grpSpPr>
       <p:sp>
         <p:nvSpPr>
           <p:cNvPr id="2" name="Rectangle 1"/>
@@ -3488,6 +3788,7 @@
           <a:lstStyle/>
           <a:p>
             <a:pPr algn="ctr"/>
+            <a:endParaRPr/>
           </a:p>
         </p:txBody>
       </p:sp>
@@ -3516,7 +3817,7 @@
                 <a:srgbClr val="73787E"/>
               </a:gs>
             </a:gsLst>
-            <a:lin scaled="0" ang="18900000"/>
+            <a:lin ang="18900000" scaled="0"/>
           </a:gradFill>
           <a:ln>
             <a:noFill/>
@@ -3548,6 +3849,7 @@
           <a:lstStyle/>
           <a:p>
             <a:pPr algn="ctr"/>
+            <a:endParaRPr/>
           </a:p>
         </p:txBody>
       </p:sp>
@@ -3617,7 +3919,7 @@
                 <a:srgbClr val="FFFFFF"/>
               </a:gs>
             </a:gsLst>
-            <a:lin scaled="0" ang="0"/>
+            <a:lin ang="0" scaled="0"/>
           </a:gradFill>
           <a:ln>
             <a:noFill/>
@@ -3643,6 +3945,7 @@
           <a:lstStyle/>
           <a:p>
             <a:pPr algn="ctr"/>
+            <a:endParaRPr/>
           </a:p>
         </p:txBody>
       </p:sp>
@@ -3751,9 +4054,27 @@
                 <a:tableStyleId>{5C22544A-7EE6-4342-B048-85BDC9FD1C3A}</a:tableStyleId>
               </a:tblPr>
               <a:tblGrid>
-                <a:gridCol w="3291840"/>
-                <a:gridCol w="4846320"/>
-                <a:gridCol w="3154680"/>
+                <a:gridCol w="3291840">
+                  <a:extLst>
+                    <a:ext uri="{9D8B030D-6E8A-4147-A177-3AD203B41FA5}">
+                      <a16:colId xmlns:a16="http://schemas.microsoft.com/office/drawing/2014/main" val="20000"/>
+                    </a:ext>
+                  </a:extLst>
+                </a:gridCol>
+                <a:gridCol w="4846320">
+                  <a:extLst>
+                    <a:ext uri="{9D8B030D-6E8A-4147-A177-3AD203B41FA5}">
+                      <a16:colId xmlns:a16="http://schemas.microsoft.com/office/drawing/2014/main" val="20001"/>
+                    </a:ext>
+                  </a:extLst>
+                </a:gridCol>
+                <a:gridCol w="3154680">
+                  <a:extLst>
+                    <a:ext uri="{9D8B030D-6E8A-4147-A177-3AD203B41FA5}">
+                      <a16:colId xmlns:a16="http://schemas.microsoft.com/office/drawing/2014/main" val="20002"/>
+                    </a:ext>
+                  </a:extLst>
+                </a:gridCol>
               </a:tblGrid>
               <a:tr h="512064">
                 <a:tc>
@@ -3778,7 +4099,7 @@
                       </a:r>
                     </a:p>
                   </a:txBody>
-                  <a:tcPr marT="27432" marB="27432" marL="73152" marR="73152" anchor="ctr">
+                  <a:tcPr marL="73152" marR="73152" marT="27432" marB="27432" anchor="ctr">
                     <a:solidFill>
                       <a:srgbClr val="33393F"/>
                     </a:solidFill>
@@ -3806,7 +4127,7 @@
                       </a:r>
                     </a:p>
                   </a:txBody>
-                  <a:tcPr marT="27432" marB="27432" marL="73152" marR="73152" anchor="ctr">
+                  <a:tcPr marL="73152" marR="73152" marT="27432" marB="27432" anchor="ctr">
                     <a:solidFill>
                       <a:srgbClr val="33393F"/>
                     </a:solidFill>
@@ -3834,12 +4155,17 @@
                       </a:r>
                     </a:p>
                   </a:txBody>
-                  <a:tcPr marT="27432" marB="27432" marL="73152" marR="73152" anchor="ctr">
+                  <a:tcPr marL="73152" marR="73152" marT="27432" marB="27432" anchor="ctr">
                     <a:solidFill>
                       <a:srgbClr val="33393F"/>
                     </a:solidFill>
                   </a:tcPr>
                 </a:tc>
+                <a:extLst>
+                  <a:ext uri="{0D108BD9-81ED-4DB2-BD59-A6C34878D82A}">
+                    <a16:rowId xmlns:a16="http://schemas.microsoft.com/office/drawing/2014/main" val="10000"/>
+                  </a:ext>
+                </a:extLst>
               </a:tr>
               <a:tr h="512064">
                 <a:tc>
@@ -3864,7 +4190,7 @@
                       </a:r>
                     </a:p>
                   </a:txBody>
-                  <a:tcPr marT="27432" marB="27432" marL="73152" marR="73152" anchor="ctr">
+                  <a:tcPr marL="73152" marR="73152" marT="27432" marB="27432" anchor="ctr">
                     <a:solidFill>
                       <a:srgbClr val="E3E5E8"/>
                     </a:solidFill>
@@ -3892,7 +4218,7 @@
                       </a:r>
                     </a:p>
                   </a:txBody>
-                  <a:tcPr marT="27432" marB="27432" marL="73152" marR="73152" anchor="ctr">
+                  <a:tcPr marL="73152" marR="73152" marT="27432" marB="27432" anchor="ctr">
                     <a:solidFill>
                       <a:srgbClr val="E3E5E8"/>
                     </a:solidFill>
@@ -3920,12 +4246,17 @@
                       </a:r>
                     </a:p>
                   </a:txBody>
-                  <a:tcPr marT="27432" marB="27432" marL="73152" marR="73152" anchor="ctr">
+                  <a:tcPr marL="73152" marR="73152" marT="27432" marB="27432" anchor="ctr">
                     <a:solidFill>
                       <a:srgbClr val="E3E5E8"/>
                     </a:solidFill>
                   </a:tcPr>
                 </a:tc>
+                <a:extLst>
+                  <a:ext uri="{0D108BD9-81ED-4DB2-BD59-A6C34878D82A}">
+                    <a16:rowId xmlns:a16="http://schemas.microsoft.com/office/drawing/2014/main" val="10001"/>
+                  </a:ext>
+                </a:extLst>
               </a:tr>
               <a:tr h="512064">
                 <a:tc>
@@ -3950,7 +4281,7 @@
                       </a:r>
                     </a:p>
                   </a:txBody>
-                  <a:tcPr marT="27432" marB="27432" marL="73152" marR="73152" anchor="ctr">
+                  <a:tcPr marL="73152" marR="73152" marT="27432" marB="27432" anchor="ctr">
                     <a:solidFill>
                       <a:srgbClr val="F6F7F8"/>
                     </a:solidFill>
@@ -3978,7 +4309,7 @@
                       </a:r>
                     </a:p>
                   </a:txBody>
-                  <a:tcPr marT="27432" marB="27432" marL="73152" marR="73152" anchor="ctr">
+                  <a:tcPr marL="73152" marR="73152" marT="27432" marB="27432" anchor="ctr">
                     <a:solidFill>
                       <a:srgbClr val="F6F7F8"/>
                     </a:solidFill>
@@ -4006,12 +4337,17 @@
                       </a:r>
                     </a:p>
                   </a:txBody>
-                  <a:tcPr marT="27432" marB="27432" marL="73152" marR="73152" anchor="ctr">
+                  <a:tcPr marL="73152" marR="73152" marT="27432" marB="27432" anchor="ctr">
                     <a:solidFill>
                       <a:srgbClr val="F6F7F8"/>
                     </a:solidFill>
                   </a:tcPr>
                 </a:tc>
+                <a:extLst>
+                  <a:ext uri="{0D108BD9-81ED-4DB2-BD59-A6C34878D82A}">
+                    <a16:rowId xmlns:a16="http://schemas.microsoft.com/office/drawing/2014/main" val="10002"/>
+                  </a:ext>
+                </a:extLst>
               </a:tr>
             </a:tbl>
           </a:graphicData>
@@ -4068,6 +4404,7 @@
           <a:lstStyle/>
           <a:p>
             <a:pPr algn="ctr"/>
+            <a:endParaRPr/>
           </a:p>
         </p:txBody>
       </p:sp>
@@ -4245,6 +4582,7 @@
           <a:lstStyle/>
           <a:p>
             <a:pPr algn="ctr"/>
+            <a:endParaRPr/>
           </a:p>
         </p:txBody>
       </p:sp>
@@ -4380,7 +4718,7 @@
 </file>
 
 <file path=ppt/slides/slide11.xml><?xml version="1.0" encoding="utf-8"?>
-<p:sld xmlns:a="http://schemas.openxmlformats.org/drawingml/2006/main" xmlns:p="http://schemas.openxmlformats.org/presentationml/2006/main" xmlns:r="http://schemas.openxmlformats.org/officeDocument/2006/relationships">
+<p:sld xmlns:a="http://schemas.openxmlformats.org/drawingml/2006/main" xmlns:r="http://schemas.openxmlformats.org/officeDocument/2006/relationships" xmlns:p="http://schemas.openxmlformats.org/presentationml/2006/main">
   <p:cSld>
     <p:spTree>
       <p:nvGrpSpPr>
@@ -4388,7 +4726,14 @@
         <p:cNvGrpSpPr/>
         <p:nvPr/>
       </p:nvGrpSpPr>
-      <p:grpSpPr/>
+      <p:grpSpPr>
+        <a:xfrm>
+          <a:off x="0" y="0"/>
+          <a:ext cx="0" cy="0"/>
+          <a:chOff x="0" y="0"/>
+          <a:chExt cx="0" cy="0"/>
+        </a:xfrm>
+      </p:grpSpPr>
       <p:sp>
         <p:nvSpPr>
           <p:cNvPr id="2" name="Rectangle 1"/>
@@ -4430,6 +4775,7 @@
           <a:lstStyle/>
           <a:p>
             <a:pPr algn="ctr"/>
+            <a:endParaRPr/>
           </a:p>
         </p:txBody>
       </p:sp>
@@ -4458,7 +4804,7 @@
                 <a:srgbClr val="73787E"/>
               </a:gs>
             </a:gsLst>
-            <a:lin scaled="0" ang="18900000"/>
+            <a:lin ang="18900000" scaled="0"/>
           </a:gradFill>
           <a:ln>
             <a:noFill/>
@@ -4490,6 +4836,7 @@
           <a:lstStyle/>
           <a:p>
             <a:pPr algn="ctr"/>
+            <a:endParaRPr/>
           </a:p>
         </p:txBody>
       </p:sp>
@@ -4559,7 +4906,7 @@
                 <a:srgbClr val="FFFFFF"/>
               </a:gs>
             </a:gsLst>
-            <a:lin scaled="0" ang="0"/>
+            <a:lin ang="0" scaled="0"/>
           </a:gradFill>
           <a:ln>
             <a:noFill/>
@@ -4585,6 +4932,7 @@
           <a:lstStyle/>
           <a:p>
             <a:pPr algn="ctr"/>
+            <a:endParaRPr/>
           </a:p>
         </p:txBody>
       </p:sp>
@@ -4725,6 +5073,7 @@
           <a:lstStyle/>
           <a:p>
             <a:pPr algn="ctr"/>
+            <a:endParaRPr/>
           </a:p>
         </p:txBody>
       </p:sp>
@@ -4842,6 +5191,7 @@
           <a:lstStyle/>
           <a:p>
             <a:pPr algn="ctr"/>
+            <a:endParaRPr/>
           </a:p>
         </p:txBody>
       </p:sp>
@@ -4979,6 +5329,7 @@
           <a:lstStyle/>
           <a:p>
             <a:pPr algn="ctr"/>
+            <a:endParaRPr/>
           </a:p>
         </p:txBody>
       </p:sp>
@@ -5116,6 +5467,7 @@
           <a:lstStyle/>
           <a:p>
             <a:pPr algn="ctr"/>
+            <a:endParaRPr/>
           </a:p>
         </p:txBody>
       </p:sp>
@@ -5254,7 +5606,7 @@
 </file>
 
 <file path=ppt/slides/slide12.xml><?xml version="1.0" encoding="utf-8"?>
-<p:sld xmlns:a="http://schemas.openxmlformats.org/drawingml/2006/main" xmlns:p="http://schemas.openxmlformats.org/presentationml/2006/main" xmlns:r="http://schemas.openxmlformats.org/officeDocument/2006/relationships">
+<p:sld xmlns:a="http://schemas.openxmlformats.org/drawingml/2006/main" xmlns:r="http://schemas.openxmlformats.org/officeDocument/2006/relationships" xmlns:p="http://schemas.openxmlformats.org/presentationml/2006/main">
   <p:cSld>
     <p:spTree>
       <p:nvGrpSpPr>
@@ -5262,7 +5614,14 @@
         <p:cNvGrpSpPr/>
         <p:nvPr/>
       </p:nvGrpSpPr>
-      <p:grpSpPr/>
+      <p:grpSpPr>
+        <a:xfrm>
+          <a:off x="0" y="0"/>
+          <a:ext cx="0" cy="0"/>
+          <a:chOff x="0" y="0"/>
+          <a:chExt cx="0" cy="0"/>
+        </a:xfrm>
+      </p:grpSpPr>
       <p:sp>
         <p:nvSpPr>
           <p:cNvPr id="2" name="Rectangle 1"/>
@@ -5304,6 +5663,7 @@
           <a:lstStyle/>
           <a:p>
             <a:pPr algn="ctr"/>
+            <a:endParaRPr/>
           </a:p>
         </p:txBody>
       </p:sp>
@@ -5332,7 +5692,7 @@
                 <a:srgbClr val="73787E"/>
               </a:gs>
             </a:gsLst>
-            <a:lin scaled="0" ang="18900000"/>
+            <a:lin ang="18900000" scaled="0"/>
           </a:gradFill>
           <a:ln>
             <a:noFill/>
@@ -5364,6 +5724,7 @@
           <a:lstStyle/>
           <a:p>
             <a:pPr algn="ctr"/>
+            <a:endParaRPr/>
           </a:p>
         </p:txBody>
       </p:sp>
@@ -5433,7 +5794,7 @@
                 <a:srgbClr val="FFFFFF"/>
               </a:gs>
             </a:gsLst>
-            <a:lin scaled="0" ang="0"/>
+            <a:lin ang="0" scaled="0"/>
           </a:gradFill>
           <a:ln>
             <a:noFill/>
@@ -5459,6 +5820,7 @@
           <a:lstStyle/>
           <a:p>
             <a:pPr algn="ctr"/>
+            <a:endParaRPr/>
           </a:p>
         </p:txBody>
       </p:sp>
@@ -5599,6 +5961,7 @@
           <a:lstStyle/>
           <a:p>
             <a:pPr algn="ctr"/>
+            <a:endParaRPr/>
           </a:p>
         </p:txBody>
       </p:sp>
@@ -5736,6 +6099,7 @@
           <a:lstStyle/>
           <a:p>
             <a:pPr algn="ctr"/>
+            <a:endParaRPr/>
           </a:p>
         </p:txBody>
       </p:sp>
@@ -5911,6 +6275,7 @@
           <a:lstStyle/>
           <a:p>
             <a:pPr algn="ctr"/>
+            <a:endParaRPr/>
           </a:p>
         </p:txBody>
       </p:sp>
@@ -5947,7 +6312,7 @@
 </file>
 
 <file path=ppt/slides/slide13.xml><?xml version="1.0" encoding="utf-8"?>
-<p:sld xmlns:a="http://schemas.openxmlformats.org/drawingml/2006/main" xmlns:p="http://schemas.openxmlformats.org/presentationml/2006/main" xmlns:r="http://schemas.openxmlformats.org/officeDocument/2006/relationships">
+<p:sld xmlns:a="http://schemas.openxmlformats.org/drawingml/2006/main" xmlns:r="http://schemas.openxmlformats.org/officeDocument/2006/relationships" xmlns:p="http://schemas.openxmlformats.org/presentationml/2006/main">
   <p:cSld>
     <p:spTree>
       <p:nvGrpSpPr>
@@ -5955,7 +6320,14 @@
         <p:cNvGrpSpPr/>
         <p:nvPr/>
       </p:nvGrpSpPr>
-      <p:grpSpPr/>
+      <p:grpSpPr>
+        <a:xfrm>
+          <a:off x="0" y="0"/>
+          <a:ext cx="0" cy="0"/>
+          <a:chOff x="0" y="0"/>
+          <a:chExt cx="0" cy="0"/>
+        </a:xfrm>
+      </p:grpSpPr>
       <p:sp>
         <p:nvSpPr>
           <p:cNvPr id="2" name="Rectangle 1"/>
@@ -5997,6 +6369,7 @@
           <a:lstStyle/>
           <a:p>
             <a:pPr algn="ctr"/>
+            <a:endParaRPr/>
           </a:p>
         </p:txBody>
       </p:sp>
@@ -6025,7 +6398,7 @@
                 <a:srgbClr val="73787E"/>
               </a:gs>
             </a:gsLst>
-            <a:lin scaled="0" ang="18900000"/>
+            <a:lin ang="18900000" scaled="0"/>
           </a:gradFill>
           <a:ln>
             <a:noFill/>
@@ -6057,6 +6430,7 @@
           <a:lstStyle/>
           <a:p>
             <a:pPr algn="ctr"/>
+            <a:endParaRPr/>
           </a:p>
         </p:txBody>
       </p:sp>
@@ -6126,7 +6500,7 @@
                 <a:srgbClr val="FFFFFF"/>
               </a:gs>
             </a:gsLst>
-            <a:lin scaled="0" ang="0"/>
+            <a:lin ang="0" scaled="0"/>
           </a:gradFill>
           <a:ln>
             <a:noFill/>
@@ -6152,6 +6526,7 @@
           <a:lstStyle/>
           <a:p>
             <a:pPr algn="ctr"/>
+            <a:endParaRPr/>
           </a:p>
         </p:txBody>
       </p:sp>
@@ -6303,9 +6678,27 @@
                 <a:tableStyleId>{5C22544A-7EE6-4342-B048-85BDC9FD1C3A}</a:tableStyleId>
               </a:tblPr>
               <a:tblGrid>
-                <a:gridCol w="3931920"/>
-                <a:gridCol w="4206240"/>
-                <a:gridCol w="3154680"/>
+                <a:gridCol w="3931920">
+                  <a:extLst>
+                    <a:ext uri="{9D8B030D-6E8A-4147-A177-3AD203B41FA5}">
+                      <a16:colId xmlns:a16="http://schemas.microsoft.com/office/drawing/2014/main" val="20000"/>
+                    </a:ext>
+                  </a:extLst>
+                </a:gridCol>
+                <a:gridCol w="4206240">
+                  <a:extLst>
+                    <a:ext uri="{9D8B030D-6E8A-4147-A177-3AD203B41FA5}">
+                      <a16:colId xmlns:a16="http://schemas.microsoft.com/office/drawing/2014/main" val="20001"/>
+                    </a:ext>
+                  </a:extLst>
+                </a:gridCol>
+                <a:gridCol w="3154680">
+                  <a:extLst>
+                    <a:ext uri="{9D8B030D-6E8A-4147-A177-3AD203B41FA5}">
+                      <a16:colId xmlns:a16="http://schemas.microsoft.com/office/drawing/2014/main" val="20002"/>
+                    </a:ext>
+                  </a:extLst>
+                </a:gridCol>
               </a:tblGrid>
               <a:tr h="457200">
                 <a:tc>
@@ -6330,7 +6723,7 @@
                       </a:r>
                     </a:p>
                   </a:txBody>
-                  <a:tcPr marT="27432" marB="27432" marL="73152" marR="73152" anchor="ctr">
+                  <a:tcPr marL="73152" marR="73152" marT="27432" marB="27432" anchor="ctr">
                     <a:solidFill>
                       <a:srgbClr val="33393F"/>
                     </a:solidFill>
@@ -6358,7 +6751,7 @@
                       </a:r>
                     </a:p>
                   </a:txBody>
-                  <a:tcPr marT="27432" marB="27432" marL="73152" marR="73152" anchor="ctr">
+                  <a:tcPr marL="73152" marR="73152" marT="27432" marB="27432" anchor="ctr">
                     <a:solidFill>
                       <a:srgbClr val="33393F"/>
                     </a:solidFill>
@@ -6386,12 +6779,17 @@
                       </a:r>
                     </a:p>
                   </a:txBody>
-                  <a:tcPr marT="27432" marB="27432" marL="73152" marR="73152" anchor="ctr">
+                  <a:tcPr marL="73152" marR="73152" marT="27432" marB="27432" anchor="ctr">
                     <a:solidFill>
                       <a:srgbClr val="33393F"/>
                     </a:solidFill>
                   </a:tcPr>
                 </a:tc>
+                <a:extLst>
+                  <a:ext uri="{0D108BD9-81ED-4DB2-BD59-A6C34878D82A}">
+                    <a16:rowId xmlns:a16="http://schemas.microsoft.com/office/drawing/2014/main" val="10000"/>
+                  </a:ext>
+                </a:extLst>
               </a:tr>
               <a:tr h="457200">
                 <a:tc>
@@ -6416,7 +6814,7 @@
                       </a:r>
                     </a:p>
                   </a:txBody>
-                  <a:tcPr marT="27432" marB="27432" marL="73152" marR="73152" anchor="ctr">
+                  <a:tcPr marL="73152" marR="73152" marT="27432" marB="27432" anchor="ctr">
                     <a:solidFill>
                       <a:srgbClr val="FFFFFF"/>
                     </a:solidFill>
@@ -6444,7 +6842,7 @@
                       </a:r>
                     </a:p>
                   </a:txBody>
-                  <a:tcPr marT="27432" marB="27432" marL="73152" marR="73152" anchor="ctr">
+                  <a:tcPr marL="73152" marR="73152" marT="27432" marB="27432" anchor="ctr">
                     <a:solidFill>
                       <a:srgbClr val="FFFFFF"/>
                     </a:solidFill>
@@ -6472,12 +6870,17 @@
                       </a:r>
                     </a:p>
                   </a:txBody>
-                  <a:tcPr marT="27432" marB="27432" marL="73152" marR="73152" anchor="ctr">
+                  <a:tcPr marL="73152" marR="73152" marT="27432" marB="27432" anchor="ctr">
                     <a:solidFill>
                       <a:srgbClr val="FFFFFF"/>
                     </a:solidFill>
                   </a:tcPr>
                 </a:tc>
+                <a:extLst>
+                  <a:ext uri="{0D108BD9-81ED-4DB2-BD59-A6C34878D82A}">
+                    <a16:rowId xmlns:a16="http://schemas.microsoft.com/office/drawing/2014/main" val="10001"/>
+                  </a:ext>
+                </a:extLst>
               </a:tr>
               <a:tr h="457200">
                 <a:tc>
@@ -6502,7 +6905,7 @@
                       </a:r>
                     </a:p>
                   </a:txBody>
-                  <a:tcPr marT="27432" marB="27432" marL="73152" marR="73152" anchor="ctr">
+                  <a:tcPr marL="73152" marR="73152" marT="27432" marB="27432" anchor="ctr">
                     <a:solidFill>
                       <a:srgbClr val="F6F7F8"/>
                     </a:solidFill>
@@ -6530,7 +6933,7 @@
                       </a:r>
                     </a:p>
                   </a:txBody>
-                  <a:tcPr marT="27432" marB="27432" marL="73152" marR="73152" anchor="ctr">
+                  <a:tcPr marL="73152" marR="73152" marT="27432" marB="27432" anchor="ctr">
                     <a:solidFill>
                       <a:srgbClr val="F6F7F8"/>
                     </a:solidFill>
@@ -6558,12 +6961,17 @@
                       </a:r>
                     </a:p>
                   </a:txBody>
-                  <a:tcPr marT="27432" marB="27432" marL="73152" marR="73152" anchor="ctr">
+                  <a:tcPr marL="73152" marR="73152" marT="27432" marB="27432" anchor="ctr">
                     <a:solidFill>
                       <a:srgbClr val="F6F7F8"/>
                     </a:solidFill>
                   </a:tcPr>
                 </a:tc>
+                <a:extLst>
+                  <a:ext uri="{0D108BD9-81ED-4DB2-BD59-A6C34878D82A}">
+                    <a16:rowId xmlns:a16="http://schemas.microsoft.com/office/drawing/2014/main" val="10002"/>
+                  </a:ext>
+                </a:extLst>
               </a:tr>
               <a:tr h="457200">
                 <a:tc>
@@ -6588,7 +6996,7 @@
                       </a:r>
                     </a:p>
                   </a:txBody>
-                  <a:tcPr marT="27432" marB="27432" marL="73152" marR="73152" anchor="ctr">
+                  <a:tcPr marL="73152" marR="73152" marT="27432" marB="27432" anchor="ctr">
                     <a:solidFill>
                       <a:srgbClr val="FFFFFF"/>
                     </a:solidFill>
@@ -6616,7 +7024,7 @@
                       </a:r>
                     </a:p>
                   </a:txBody>
-                  <a:tcPr marT="27432" marB="27432" marL="73152" marR="73152" anchor="ctr">
+                  <a:tcPr marL="73152" marR="73152" marT="27432" marB="27432" anchor="ctr">
                     <a:solidFill>
                       <a:srgbClr val="FFFFFF"/>
                     </a:solidFill>
@@ -6644,12 +7052,17 @@
                       </a:r>
                     </a:p>
                   </a:txBody>
-                  <a:tcPr marT="27432" marB="27432" marL="73152" marR="73152" anchor="ctr">
+                  <a:tcPr marL="73152" marR="73152" marT="27432" marB="27432" anchor="ctr">
                     <a:solidFill>
                       <a:srgbClr val="FFFFFF"/>
                     </a:solidFill>
                   </a:tcPr>
                 </a:tc>
+                <a:extLst>
+                  <a:ext uri="{0D108BD9-81ED-4DB2-BD59-A6C34878D82A}">
+                    <a16:rowId xmlns:a16="http://schemas.microsoft.com/office/drawing/2014/main" val="10003"/>
+                  </a:ext>
+                </a:extLst>
               </a:tr>
               <a:tr h="457200">
                 <a:tc>
@@ -6674,7 +7087,7 @@
                       </a:r>
                     </a:p>
                   </a:txBody>
-                  <a:tcPr marT="27432" marB="27432" marL="73152" marR="73152" anchor="ctr">
+                  <a:tcPr marL="73152" marR="73152" marT="27432" marB="27432" anchor="ctr">
                     <a:solidFill>
                       <a:srgbClr val="F6F7F8"/>
                     </a:solidFill>
@@ -6702,7 +7115,7 @@
                       </a:r>
                     </a:p>
                   </a:txBody>
-                  <a:tcPr marT="27432" marB="27432" marL="73152" marR="73152" anchor="ctr">
+                  <a:tcPr marL="73152" marR="73152" marT="27432" marB="27432" anchor="ctr">
                     <a:solidFill>
                       <a:srgbClr val="F6F7F8"/>
                     </a:solidFill>
@@ -6730,12 +7143,17 @@
                       </a:r>
                     </a:p>
                   </a:txBody>
-                  <a:tcPr marT="27432" marB="27432" marL="73152" marR="73152" anchor="ctr">
+                  <a:tcPr marL="73152" marR="73152" marT="27432" marB="27432" anchor="ctr">
                     <a:solidFill>
                       <a:srgbClr val="F6F7F8"/>
                     </a:solidFill>
                   </a:tcPr>
                 </a:tc>
+                <a:extLst>
+                  <a:ext uri="{0D108BD9-81ED-4DB2-BD59-A6C34878D82A}">
+                    <a16:rowId xmlns:a16="http://schemas.microsoft.com/office/drawing/2014/main" val="10004"/>
+                  </a:ext>
+                </a:extLst>
               </a:tr>
               <a:tr h="457200">
                 <a:tc>
@@ -6760,7 +7178,7 @@
                       </a:r>
                     </a:p>
                   </a:txBody>
-                  <a:tcPr marT="27432" marB="27432" marL="73152" marR="73152" anchor="ctr">
+                  <a:tcPr marL="73152" marR="73152" marT="27432" marB="27432" anchor="ctr">
                     <a:solidFill>
                       <a:srgbClr val="E3E5E8"/>
                     </a:solidFill>
@@ -6788,7 +7206,7 @@
                       </a:r>
                     </a:p>
                   </a:txBody>
-                  <a:tcPr marT="27432" marB="27432" marL="73152" marR="73152" anchor="ctr">
+                  <a:tcPr marL="73152" marR="73152" marT="27432" marB="27432" anchor="ctr">
                     <a:solidFill>
                       <a:srgbClr val="E3E5E8"/>
                     </a:solidFill>
@@ -6816,12 +7234,17 @@
                       </a:r>
                     </a:p>
                   </a:txBody>
-                  <a:tcPr marT="27432" marB="27432" marL="73152" marR="73152" anchor="ctr">
+                  <a:tcPr marL="73152" marR="73152" marT="27432" marB="27432" anchor="ctr">
                     <a:solidFill>
                       <a:srgbClr val="E3E5E8"/>
                     </a:solidFill>
                   </a:tcPr>
                 </a:tc>
+                <a:extLst>
+                  <a:ext uri="{0D108BD9-81ED-4DB2-BD59-A6C34878D82A}">
+                    <a16:rowId xmlns:a16="http://schemas.microsoft.com/office/drawing/2014/main" val="10005"/>
+                  </a:ext>
+                </a:extLst>
               </a:tr>
             </a:tbl>
           </a:graphicData>
@@ -6878,6 +7301,7 @@
           <a:lstStyle/>
           <a:p>
             <a:pPr algn="ctr"/>
+            <a:endParaRPr/>
           </a:p>
         </p:txBody>
       </p:sp>
@@ -6993,7 +7417,7 @@
 </file>
 
 <file path=ppt/slides/slide14.xml><?xml version="1.0" encoding="utf-8"?>
-<p:sld xmlns:a="http://schemas.openxmlformats.org/drawingml/2006/main" xmlns:p="http://schemas.openxmlformats.org/presentationml/2006/main" xmlns:r="http://schemas.openxmlformats.org/officeDocument/2006/relationships">
+<p:sld xmlns:a="http://schemas.openxmlformats.org/drawingml/2006/main" xmlns:r="http://schemas.openxmlformats.org/officeDocument/2006/relationships" xmlns:p="http://schemas.openxmlformats.org/presentationml/2006/main">
   <p:cSld>
     <p:spTree>
       <p:nvGrpSpPr>
@@ -7001,7 +7425,14 @@
         <p:cNvGrpSpPr/>
         <p:nvPr/>
       </p:nvGrpSpPr>
-      <p:grpSpPr/>
+      <p:grpSpPr>
+        <a:xfrm>
+          <a:off x="0" y="0"/>
+          <a:ext cx="0" cy="0"/>
+          <a:chOff x="0" y="0"/>
+          <a:chExt cx="0" cy="0"/>
+        </a:xfrm>
+      </p:grpSpPr>
       <p:sp>
         <p:nvSpPr>
           <p:cNvPr id="2" name="Rectangle 1"/>
@@ -7043,6 +7474,7 @@
           <a:lstStyle/>
           <a:p>
             <a:pPr algn="ctr"/>
+            <a:endParaRPr/>
           </a:p>
         </p:txBody>
       </p:sp>
@@ -7071,7 +7503,7 @@
                 <a:srgbClr val="73787E"/>
               </a:gs>
             </a:gsLst>
-            <a:lin scaled="0" ang="18900000"/>
+            <a:lin ang="18900000" scaled="0"/>
           </a:gradFill>
           <a:ln>
             <a:noFill/>
@@ -7103,6 +7535,7 @@
           <a:lstStyle/>
           <a:p>
             <a:pPr algn="ctr"/>
+            <a:endParaRPr/>
           </a:p>
         </p:txBody>
       </p:sp>
@@ -7172,7 +7605,7 @@
                 <a:srgbClr val="FFFFFF"/>
               </a:gs>
             </a:gsLst>
-            <a:lin scaled="0" ang="0"/>
+            <a:lin ang="0" scaled="0"/>
           </a:gradFill>
           <a:ln>
             <a:noFill/>
@@ -7198,6 +7631,7 @@
           <a:lstStyle/>
           <a:p>
             <a:pPr algn="ctr"/>
+            <a:endParaRPr/>
           </a:p>
         </p:txBody>
       </p:sp>
@@ -7338,6 +7772,7 @@
           <a:lstStyle/>
           <a:p>
             <a:pPr algn="ctr"/>
+            <a:endParaRPr/>
           </a:p>
         </p:txBody>
       </p:sp>
@@ -7495,6 +7930,7 @@
           <a:lstStyle/>
           <a:p>
             <a:pPr algn="ctr"/>
+            <a:endParaRPr/>
           </a:p>
         </p:txBody>
       </p:sp>
@@ -7650,6 +8086,7 @@
           <a:lstStyle/>
           <a:p>
             <a:pPr algn="ctr"/>
+            <a:endParaRPr/>
           </a:p>
         </p:txBody>
       </p:sp>
@@ -7686,7 +8123,7 @@
 </file>
 
 <file path=ppt/slides/slide15.xml><?xml version="1.0" encoding="utf-8"?>
-<p:sld xmlns:a="http://schemas.openxmlformats.org/drawingml/2006/main" xmlns:p="http://schemas.openxmlformats.org/presentationml/2006/main" xmlns:r="http://schemas.openxmlformats.org/officeDocument/2006/relationships">
+<p:sld xmlns:a="http://schemas.openxmlformats.org/drawingml/2006/main" xmlns:r="http://schemas.openxmlformats.org/officeDocument/2006/relationships" xmlns:p="http://schemas.openxmlformats.org/presentationml/2006/main">
   <p:cSld>
     <p:spTree>
       <p:nvGrpSpPr>
@@ -7694,7 +8131,14 @@
         <p:cNvGrpSpPr/>
         <p:nvPr/>
       </p:nvGrpSpPr>
-      <p:grpSpPr/>
+      <p:grpSpPr>
+        <a:xfrm>
+          <a:off x="0" y="0"/>
+          <a:ext cx="0" cy="0"/>
+          <a:chOff x="0" y="0"/>
+          <a:chExt cx="0" cy="0"/>
+        </a:xfrm>
+      </p:grpSpPr>
       <p:sp>
         <p:nvSpPr>
           <p:cNvPr id="2" name="Rectangle 1"/>
@@ -7736,6 +8180,7 @@
           <a:lstStyle/>
           <a:p>
             <a:pPr algn="ctr"/>
+            <a:endParaRPr/>
           </a:p>
         </p:txBody>
       </p:sp>
@@ -7764,7 +8209,7 @@
                 <a:srgbClr val="73787E"/>
               </a:gs>
             </a:gsLst>
-            <a:lin scaled="0" ang="18900000"/>
+            <a:lin ang="18900000" scaled="0"/>
           </a:gradFill>
           <a:ln>
             <a:noFill/>
@@ -7796,6 +8241,7 @@
           <a:lstStyle/>
           <a:p>
             <a:pPr algn="ctr"/>
+            <a:endParaRPr/>
           </a:p>
         </p:txBody>
       </p:sp>
@@ -7865,7 +8311,7 @@
                 <a:srgbClr val="FFFFFF"/>
               </a:gs>
             </a:gsLst>
-            <a:lin scaled="0" ang="0"/>
+            <a:lin ang="0" scaled="0"/>
           </a:gradFill>
           <a:ln>
             <a:noFill/>
@@ -7891,6 +8337,7 @@
           <a:lstStyle/>
           <a:p>
             <a:pPr algn="ctr"/>
+            <a:endParaRPr/>
           </a:p>
         </p:txBody>
       </p:sp>
@@ -8031,6 +8478,7 @@
           <a:lstStyle/>
           <a:p>
             <a:pPr algn="ctr"/>
+            <a:endParaRPr/>
           </a:p>
         </p:txBody>
       </p:sp>
@@ -8228,6 +8676,7 @@
           <a:lstStyle/>
           <a:p>
             <a:pPr algn="ctr"/>
+            <a:endParaRPr/>
           </a:p>
         </p:txBody>
       </p:sp>
@@ -8383,6 +8832,7 @@
           <a:lstStyle/>
           <a:p>
             <a:pPr algn="ctr"/>
+            <a:endParaRPr/>
           </a:p>
         </p:txBody>
       </p:sp>
@@ -8419,7 +8869,7 @@
 </file>
 
 <file path=ppt/slides/slide16.xml><?xml version="1.0" encoding="utf-8"?>
-<p:sld xmlns:a="http://schemas.openxmlformats.org/drawingml/2006/main" xmlns:p="http://schemas.openxmlformats.org/presentationml/2006/main" xmlns:r="http://schemas.openxmlformats.org/officeDocument/2006/relationships">
+<p:sld xmlns:a="http://schemas.openxmlformats.org/drawingml/2006/main" xmlns:r="http://schemas.openxmlformats.org/officeDocument/2006/relationships" xmlns:p="http://schemas.openxmlformats.org/presentationml/2006/main">
   <p:cSld>
     <p:spTree>
       <p:nvGrpSpPr>
@@ -8427,7 +8877,14 @@
         <p:cNvGrpSpPr/>
         <p:nvPr/>
       </p:nvGrpSpPr>
-      <p:grpSpPr/>
+      <p:grpSpPr>
+        <a:xfrm>
+          <a:off x="0" y="0"/>
+          <a:ext cx="0" cy="0"/>
+          <a:chOff x="0" y="0"/>
+          <a:chExt cx="0" cy="0"/>
+        </a:xfrm>
+      </p:grpSpPr>
       <p:sp>
         <p:nvSpPr>
           <p:cNvPr id="2" name="Rectangle 1"/>
@@ -8469,6 +8926,7 @@
           <a:lstStyle/>
           <a:p>
             <a:pPr algn="ctr"/>
+            <a:endParaRPr/>
           </a:p>
         </p:txBody>
       </p:sp>
@@ -8497,7 +8955,7 @@
                 <a:srgbClr val="73787E"/>
               </a:gs>
             </a:gsLst>
-            <a:lin scaled="0" ang="18900000"/>
+            <a:lin ang="18900000" scaled="0"/>
           </a:gradFill>
           <a:ln>
             <a:noFill/>
@@ -8529,6 +8987,7 @@
           <a:lstStyle/>
           <a:p>
             <a:pPr algn="ctr"/>
+            <a:endParaRPr/>
           </a:p>
         </p:txBody>
       </p:sp>
@@ -8598,7 +9057,7 @@
                 <a:srgbClr val="FFFFFF"/>
               </a:gs>
             </a:gsLst>
-            <a:lin scaled="0" ang="0"/>
+            <a:lin ang="0" scaled="0"/>
           </a:gradFill>
           <a:ln>
             <a:noFill/>
@@ -8624,6 +9083,7 @@
           <a:lstStyle/>
           <a:p>
             <a:pPr algn="ctr"/>
+            <a:endParaRPr/>
           </a:p>
         </p:txBody>
       </p:sp>
@@ -8762,6 +9222,7 @@
           <a:lstStyle/>
           <a:p>
             <a:pPr algn="ctr"/>
+            <a:endParaRPr/>
           </a:p>
         </p:txBody>
       </p:sp>
@@ -8840,6 +9301,7 @@
           <a:lstStyle/>
           <a:p>
             <a:pPr algn="ctr"/>
+            <a:endParaRPr/>
           </a:p>
         </p:txBody>
       </p:sp>
@@ -8997,6 +9459,7 @@
           <a:lstStyle/>
           <a:p>
             <a:pPr algn="ctr"/>
+            <a:endParaRPr/>
           </a:p>
         </p:txBody>
       </p:sp>
@@ -9112,7 +9575,7 @@
 </file>
 
 <file path=ppt/slides/slide17.xml><?xml version="1.0" encoding="utf-8"?>
-<p:sld xmlns:a="http://schemas.openxmlformats.org/drawingml/2006/main" xmlns:p="http://schemas.openxmlformats.org/presentationml/2006/main" xmlns:r="http://schemas.openxmlformats.org/officeDocument/2006/relationships">
+<p:sld xmlns:a="http://schemas.openxmlformats.org/drawingml/2006/main" xmlns:r="http://schemas.openxmlformats.org/officeDocument/2006/relationships" xmlns:p="http://schemas.openxmlformats.org/presentationml/2006/main">
   <p:cSld>
     <p:spTree>
       <p:nvGrpSpPr>
@@ -9120,7 +9583,14 @@
         <p:cNvGrpSpPr/>
         <p:nvPr/>
       </p:nvGrpSpPr>
-      <p:grpSpPr/>
+      <p:grpSpPr>
+        <a:xfrm>
+          <a:off x="0" y="0"/>
+          <a:ext cx="0" cy="0"/>
+          <a:chOff x="0" y="0"/>
+          <a:chExt cx="0" cy="0"/>
+        </a:xfrm>
+      </p:grpSpPr>
       <p:sp>
         <p:nvSpPr>
           <p:cNvPr id="2" name="Rectangle 1"/>
@@ -9162,6 +9632,7 @@
           <a:lstStyle/>
           <a:p>
             <a:pPr algn="ctr"/>
+            <a:endParaRPr/>
           </a:p>
         </p:txBody>
       </p:sp>
@@ -9190,7 +9661,7 @@
                 <a:srgbClr val="73787E"/>
               </a:gs>
             </a:gsLst>
-            <a:lin scaled="0" ang="18900000"/>
+            <a:lin ang="18900000" scaled="0"/>
           </a:gradFill>
           <a:ln>
             <a:noFill/>
@@ -9222,6 +9693,7 @@
           <a:lstStyle/>
           <a:p>
             <a:pPr algn="ctr"/>
+            <a:endParaRPr/>
           </a:p>
         </p:txBody>
       </p:sp>
@@ -9291,7 +9763,7 @@
                 <a:srgbClr val="FFFFFF"/>
               </a:gs>
             </a:gsLst>
-            <a:lin scaled="0" ang="0"/>
+            <a:lin ang="0" scaled="0"/>
           </a:gradFill>
           <a:ln>
             <a:noFill/>
@@ -9317,6 +9789,7 @@
           <a:lstStyle/>
           <a:p>
             <a:pPr algn="ctr"/>
+            <a:endParaRPr/>
           </a:p>
         </p:txBody>
       </p:sp>
@@ -9457,6 +9930,7 @@
           <a:lstStyle/>
           <a:p>
             <a:pPr algn="ctr"/>
+            <a:endParaRPr/>
           </a:p>
         </p:txBody>
       </p:sp>
@@ -9614,6 +10088,7 @@
           <a:lstStyle/>
           <a:p>
             <a:pPr algn="ctr"/>
+            <a:endParaRPr/>
           </a:p>
         </p:txBody>
       </p:sp>
@@ -9771,6 +10246,7 @@
           <a:lstStyle/>
           <a:p>
             <a:pPr algn="ctr"/>
+            <a:endParaRPr/>
           </a:p>
         </p:txBody>
       </p:sp>
@@ -9928,6 +10404,7 @@
           <a:lstStyle/>
           <a:p>
             <a:pPr algn="ctr"/>
+            <a:endParaRPr/>
           </a:p>
         </p:txBody>
       </p:sp>
@@ -10023,7 +10500,7 @@
 </file>
 
 <file path=ppt/slides/slide18.xml><?xml version="1.0" encoding="utf-8"?>
-<p:sld xmlns:a="http://schemas.openxmlformats.org/drawingml/2006/main" xmlns:p="http://schemas.openxmlformats.org/presentationml/2006/main" xmlns:r="http://schemas.openxmlformats.org/officeDocument/2006/relationships">
+<p:sld xmlns:a="http://schemas.openxmlformats.org/drawingml/2006/main" xmlns:r="http://schemas.openxmlformats.org/officeDocument/2006/relationships" xmlns:p="http://schemas.openxmlformats.org/presentationml/2006/main">
   <p:cSld>
     <p:spTree>
       <p:nvGrpSpPr>
@@ -10031,7 +10508,14 @@
         <p:cNvGrpSpPr/>
         <p:nvPr/>
       </p:nvGrpSpPr>
-      <p:grpSpPr/>
+      <p:grpSpPr>
+        <a:xfrm>
+          <a:off x="0" y="0"/>
+          <a:ext cx="0" cy="0"/>
+          <a:chOff x="0" y="0"/>
+          <a:chExt cx="0" cy="0"/>
+        </a:xfrm>
+      </p:grpSpPr>
       <p:sp>
         <p:nvSpPr>
           <p:cNvPr id="2" name="Rectangle 1"/>
@@ -10073,6 +10557,7 @@
           <a:lstStyle/>
           <a:p>
             <a:pPr algn="ctr"/>
+            <a:endParaRPr/>
           </a:p>
         </p:txBody>
       </p:sp>
@@ -10101,7 +10586,7 @@
                 <a:srgbClr val="73787E"/>
               </a:gs>
             </a:gsLst>
-            <a:lin scaled="0" ang="18900000"/>
+            <a:lin ang="18900000" scaled="0"/>
           </a:gradFill>
           <a:ln>
             <a:noFill/>
@@ -10133,6 +10618,7 @@
           <a:lstStyle/>
           <a:p>
             <a:pPr algn="ctr"/>
+            <a:endParaRPr/>
           </a:p>
         </p:txBody>
       </p:sp>
@@ -10202,7 +10688,7 @@
                 <a:srgbClr val="FFFFFF"/>
               </a:gs>
             </a:gsLst>
-            <a:lin scaled="0" ang="0"/>
+            <a:lin ang="0" scaled="0"/>
           </a:gradFill>
           <a:ln>
             <a:noFill/>
@@ -10228,6 +10714,7 @@
           <a:lstStyle/>
           <a:p>
             <a:pPr algn="ctr"/>
+            <a:endParaRPr/>
           </a:p>
         </p:txBody>
       </p:sp>
@@ -10336,10 +10823,34 @@
                 <a:tableStyleId>{5C22544A-7EE6-4342-B048-85BDC9FD1C3A}</a:tableStyleId>
               </a:tblPr>
               <a:tblGrid>
-                <a:gridCol w="502920"/>
-                <a:gridCol w="5577840"/>
-                <a:gridCol w="3840480"/>
-                <a:gridCol w="1371600"/>
+                <a:gridCol w="502920">
+                  <a:extLst>
+                    <a:ext uri="{9D8B030D-6E8A-4147-A177-3AD203B41FA5}">
+                      <a16:colId xmlns:a16="http://schemas.microsoft.com/office/drawing/2014/main" val="20000"/>
+                    </a:ext>
+                  </a:extLst>
+                </a:gridCol>
+                <a:gridCol w="5577840">
+                  <a:extLst>
+                    <a:ext uri="{9D8B030D-6E8A-4147-A177-3AD203B41FA5}">
+                      <a16:colId xmlns:a16="http://schemas.microsoft.com/office/drawing/2014/main" val="20001"/>
+                    </a:ext>
+                  </a:extLst>
+                </a:gridCol>
+                <a:gridCol w="3840480">
+                  <a:extLst>
+                    <a:ext uri="{9D8B030D-6E8A-4147-A177-3AD203B41FA5}">
+                      <a16:colId xmlns:a16="http://schemas.microsoft.com/office/drawing/2014/main" val="20002"/>
+                    </a:ext>
+                  </a:extLst>
+                </a:gridCol>
+                <a:gridCol w="1371600">
+                  <a:extLst>
+                    <a:ext uri="{9D8B030D-6E8A-4147-A177-3AD203B41FA5}">
+                      <a16:colId xmlns:a16="http://schemas.microsoft.com/office/drawing/2014/main" val="20003"/>
+                    </a:ext>
+                  </a:extLst>
+                </a:gridCol>
               </a:tblGrid>
               <a:tr h="475488">
                 <a:tc>
@@ -10364,7 +10875,7 @@
                       </a:r>
                     </a:p>
                   </a:txBody>
-                  <a:tcPr marT="27432" marB="27432" marL="73152" marR="73152" anchor="ctr">
+                  <a:tcPr marL="73152" marR="73152" marT="27432" marB="27432" anchor="ctr">
                     <a:solidFill>
                       <a:srgbClr val="33393F"/>
                     </a:solidFill>
@@ -10392,7 +10903,7 @@
                       </a:r>
                     </a:p>
                   </a:txBody>
-                  <a:tcPr marT="27432" marB="27432" marL="73152" marR="73152" anchor="ctr">
+                  <a:tcPr marL="73152" marR="73152" marT="27432" marB="27432" anchor="ctr">
                     <a:solidFill>
                       <a:srgbClr val="33393F"/>
                     </a:solidFill>
@@ -10420,7 +10931,7 @@
                       </a:r>
                     </a:p>
                   </a:txBody>
-                  <a:tcPr marT="27432" marB="27432" marL="73152" marR="73152" anchor="ctr">
+                  <a:tcPr marL="73152" marR="73152" marT="27432" marB="27432" anchor="ctr">
                     <a:solidFill>
                       <a:srgbClr val="33393F"/>
                     </a:solidFill>
@@ -10448,12 +10959,17 @@
                       </a:r>
                     </a:p>
                   </a:txBody>
-                  <a:tcPr marT="27432" marB="27432" marL="73152" marR="73152" anchor="ctr">
+                  <a:tcPr marL="73152" marR="73152" marT="27432" marB="27432" anchor="ctr">
                     <a:solidFill>
                       <a:srgbClr val="33393F"/>
                     </a:solidFill>
                   </a:tcPr>
                 </a:tc>
+                <a:extLst>
+                  <a:ext uri="{0D108BD9-81ED-4DB2-BD59-A6C34878D82A}">
+                    <a16:rowId xmlns:a16="http://schemas.microsoft.com/office/drawing/2014/main" val="10000"/>
+                  </a:ext>
+                </a:extLst>
               </a:tr>
               <a:tr h="475488">
                 <a:tc>
@@ -10478,7 +10994,7 @@
                       </a:r>
                     </a:p>
                   </a:txBody>
-                  <a:tcPr marT="27432" marB="27432" marL="73152" marR="73152" anchor="ctr">
+                  <a:tcPr marL="73152" marR="73152" marT="27432" marB="27432" anchor="ctr">
                     <a:solidFill>
                       <a:srgbClr val="FFFFFF"/>
                     </a:solidFill>
@@ -10506,7 +11022,7 @@
                       </a:r>
                     </a:p>
                   </a:txBody>
-                  <a:tcPr marT="27432" marB="27432" marL="73152" marR="73152" anchor="ctr">
+                  <a:tcPr marL="73152" marR="73152" marT="27432" marB="27432" anchor="ctr">
                     <a:solidFill>
                       <a:srgbClr val="FFFFFF"/>
                     </a:solidFill>
@@ -10534,7 +11050,7 @@
                       </a:r>
                     </a:p>
                   </a:txBody>
-                  <a:tcPr marT="27432" marB="27432" marL="73152" marR="73152" anchor="ctr">
+                  <a:tcPr marL="73152" marR="73152" marT="27432" marB="27432" anchor="ctr">
                     <a:solidFill>
                       <a:srgbClr val="FFFFFF"/>
                     </a:solidFill>
@@ -10562,12 +11078,17 @@
                       </a:r>
                     </a:p>
                   </a:txBody>
-                  <a:tcPr marT="27432" marB="27432" marL="73152" marR="73152" anchor="ctr">
+                  <a:tcPr marL="73152" marR="73152" marT="27432" marB="27432" anchor="ctr">
                     <a:solidFill>
                       <a:srgbClr val="FFFFFF"/>
                     </a:solidFill>
                   </a:tcPr>
                 </a:tc>
+                <a:extLst>
+                  <a:ext uri="{0D108BD9-81ED-4DB2-BD59-A6C34878D82A}">
+                    <a16:rowId xmlns:a16="http://schemas.microsoft.com/office/drawing/2014/main" val="10001"/>
+                  </a:ext>
+                </a:extLst>
               </a:tr>
               <a:tr h="475488">
                 <a:tc>
@@ -10592,7 +11113,7 @@
                       </a:r>
                     </a:p>
                   </a:txBody>
-                  <a:tcPr marT="27432" marB="27432" marL="73152" marR="73152" anchor="ctr">
+                  <a:tcPr marL="73152" marR="73152" marT="27432" marB="27432" anchor="ctr">
                     <a:solidFill>
                       <a:srgbClr val="F6F7F8"/>
                     </a:solidFill>
@@ -10620,7 +11141,7 @@
                       </a:r>
                     </a:p>
                   </a:txBody>
-                  <a:tcPr marT="27432" marB="27432" marL="73152" marR="73152" anchor="ctr">
+                  <a:tcPr marL="73152" marR="73152" marT="27432" marB="27432" anchor="ctr">
                     <a:solidFill>
                       <a:srgbClr val="F6F7F8"/>
                     </a:solidFill>
@@ -10648,7 +11169,7 @@
                       </a:r>
                     </a:p>
                   </a:txBody>
-                  <a:tcPr marT="27432" marB="27432" marL="73152" marR="73152" anchor="ctr">
+                  <a:tcPr marL="73152" marR="73152" marT="27432" marB="27432" anchor="ctr">
                     <a:solidFill>
                       <a:srgbClr val="F6F7F8"/>
                     </a:solidFill>
@@ -10676,12 +11197,17 @@
                       </a:r>
                     </a:p>
                   </a:txBody>
-                  <a:tcPr marT="27432" marB="27432" marL="73152" marR="73152" anchor="ctr">
+                  <a:tcPr marL="73152" marR="73152" marT="27432" marB="27432" anchor="ctr">
                     <a:solidFill>
                       <a:srgbClr val="F6F7F8"/>
                     </a:solidFill>
                   </a:tcPr>
                 </a:tc>
+                <a:extLst>
+                  <a:ext uri="{0D108BD9-81ED-4DB2-BD59-A6C34878D82A}">
+                    <a16:rowId xmlns:a16="http://schemas.microsoft.com/office/drawing/2014/main" val="10002"/>
+                  </a:ext>
+                </a:extLst>
               </a:tr>
               <a:tr h="475488">
                 <a:tc>
@@ -10706,7 +11232,7 @@
                       </a:r>
                     </a:p>
                   </a:txBody>
-                  <a:tcPr marT="27432" marB="27432" marL="73152" marR="73152" anchor="ctr">
+                  <a:tcPr marL="73152" marR="73152" marT="27432" marB="27432" anchor="ctr">
                     <a:solidFill>
                       <a:srgbClr val="FFFFFF"/>
                     </a:solidFill>
@@ -10734,7 +11260,7 @@
                       </a:r>
                     </a:p>
                   </a:txBody>
-                  <a:tcPr marT="27432" marB="27432" marL="73152" marR="73152" anchor="ctr">
+                  <a:tcPr marL="73152" marR="73152" marT="27432" marB="27432" anchor="ctr">
                     <a:solidFill>
                       <a:srgbClr val="FFFFFF"/>
                     </a:solidFill>
@@ -10762,7 +11288,7 @@
                       </a:r>
                     </a:p>
                   </a:txBody>
-                  <a:tcPr marT="27432" marB="27432" marL="73152" marR="73152" anchor="ctr">
+                  <a:tcPr marL="73152" marR="73152" marT="27432" marB="27432" anchor="ctr">
                     <a:solidFill>
                       <a:srgbClr val="FFFFFF"/>
                     </a:solidFill>
@@ -10790,12 +11316,17 @@
                       </a:r>
                     </a:p>
                   </a:txBody>
-                  <a:tcPr marT="27432" marB="27432" marL="73152" marR="73152" anchor="ctr">
+                  <a:tcPr marL="73152" marR="73152" marT="27432" marB="27432" anchor="ctr">
                     <a:solidFill>
                       <a:srgbClr val="FFFFFF"/>
                     </a:solidFill>
                   </a:tcPr>
                 </a:tc>
+                <a:extLst>
+                  <a:ext uri="{0D108BD9-81ED-4DB2-BD59-A6C34878D82A}">
+                    <a16:rowId xmlns:a16="http://schemas.microsoft.com/office/drawing/2014/main" val="10003"/>
+                  </a:ext>
+                </a:extLst>
               </a:tr>
               <a:tr h="475488">
                 <a:tc>
@@ -10820,7 +11351,7 @@
                       </a:r>
                     </a:p>
                   </a:txBody>
-                  <a:tcPr marT="27432" marB="27432" marL="73152" marR="73152" anchor="ctr">
+                  <a:tcPr marL="73152" marR="73152" marT="27432" marB="27432" anchor="ctr">
                     <a:solidFill>
                       <a:srgbClr val="F6F7F8"/>
                     </a:solidFill>
@@ -10848,7 +11379,7 @@
                       </a:r>
                     </a:p>
                   </a:txBody>
-                  <a:tcPr marT="27432" marB="27432" marL="73152" marR="73152" anchor="ctr">
+                  <a:tcPr marL="73152" marR="73152" marT="27432" marB="27432" anchor="ctr">
                     <a:solidFill>
                       <a:srgbClr val="F6F7F8"/>
                     </a:solidFill>
@@ -10876,7 +11407,7 @@
                       </a:r>
                     </a:p>
                   </a:txBody>
-                  <a:tcPr marT="27432" marB="27432" marL="73152" marR="73152" anchor="ctr">
+                  <a:tcPr marL="73152" marR="73152" marT="27432" marB="27432" anchor="ctr">
                     <a:solidFill>
                       <a:srgbClr val="F6F7F8"/>
                     </a:solidFill>
@@ -10904,12 +11435,17 @@
                       </a:r>
                     </a:p>
                   </a:txBody>
-                  <a:tcPr marT="27432" marB="27432" marL="73152" marR="73152" anchor="ctr">
+                  <a:tcPr marL="73152" marR="73152" marT="27432" marB="27432" anchor="ctr">
                     <a:solidFill>
                       <a:srgbClr val="F6F7F8"/>
                     </a:solidFill>
                   </a:tcPr>
                 </a:tc>
+                <a:extLst>
+                  <a:ext uri="{0D108BD9-81ED-4DB2-BD59-A6C34878D82A}">
+                    <a16:rowId xmlns:a16="http://schemas.microsoft.com/office/drawing/2014/main" val="10004"/>
+                  </a:ext>
+                </a:extLst>
               </a:tr>
               <a:tr h="475488">
                 <a:tc>
@@ -10934,7 +11470,7 @@
                       </a:r>
                     </a:p>
                   </a:txBody>
-                  <a:tcPr marT="27432" marB="27432" marL="73152" marR="73152" anchor="ctr">
+                  <a:tcPr marL="73152" marR="73152" marT="27432" marB="27432" anchor="ctr">
                     <a:solidFill>
                       <a:srgbClr val="FFFFFF"/>
                     </a:solidFill>
@@ -10962,7 +11498,7 @@
                       </a:r>
                     </a:p>
                   </a:txBody>
-                  <a:tcPr marT="27432" marB="27432" marL="73152" marR="73152" anchor="ctr">
+                  <a:tcPr marL="73152" marR="73152" marT="27432" marB="27432" anchor="ctr">
                     <a:solidFill>
                       <a:srgbClr val="FFFFFF"/>
                     </a:solidFill>
@@ -10990,7 +11526,7 @@
                       </a:r>
                     </a:p>
                   </a:txBody>
-                  <a:tcPr marT="27432" marB="27432" marL="73152" marR="73152" anchor="ctr">
+                  <a:tcPr marL="73152" marR="73152" marT="27432" marB="27432" anchor="ctr">
                     <a:solidFill>
                       <a:srgbClr val="FFFFFF"/>
                     </a:solidFill>
@@ -11018,12 +11554,17 @@
                       </a:r>
                     </a:p>
                   </a:txBody>
-                  <a:tcPr marT="27432" marB="27432" marL="73152" marR="73152" anchor="ctr">
+                  <a:tcPr marL="73152" marR="73152" marT="27432" marB="27432" anchor="ctr">
                     <a:solidFill>
                       <a:srgbClr val="FFFFFF"/>
                     </a:solidFill>
                   </a:tcPr>
                 </a:tc>
+                <a:extLst>
+                  <a:ext uri="{0D108BD9-81ED-4DB2-BD59-A6C34878D82A}">
+                    <a16:rowId xmlns:a16="http://schemas.microsoft.com/office/drawing/2014/main" val="10005"/>
+                  </a:ext>
+                </a:extLst>
               </a:tr>
             </a:tbl>
           </a:graphicData>
@@ -11101,7 +11642,7 @@
 </file>
 
 <file path=ppt/slides/slide19.xml><?xml version="1.0" encoding="utf-8"?>
-<p:sld xmlns:a="http://schemas.openxmlformats.org/drawingml/2006/main" xmlns:p="http://schemas.openxmlformats.org/presentationml/2006/main" xmlns:r="http://schemas.openxmlformats.org/officeDocument/2006/relationships">
+<p:sld xmlns:a="http://schemas.openxmlformats.org/drawingml/2006/main" xmlns:r="http://schemas.openxmlformats.org/officeDocument/2006/relationships" xmlns:p="http://schemas.openxmlformats.org/presentationml/2006/main">
   <p:cSld>
     <p:spTree>
       <p:nvGrpSpPr>
@@ -11109,7 +11650,14 @@
         <p:cNvGrpSpPr/>
         <p:nvPr/>
       </p:nvGrpSpPr>
-      <p:grpSpPr/>
+      <p:grpSpPr>
+        <a:xfrm>
+          <a:off x="0" y="0"/>
+          <a:ext cx="0" cy="0"/>
+          <a:chOff x="0" y="0"/>
+          <a:chExt cx="0" cy="0"/>
+        </a:xfrm>
+      </p:grpSpPr>
       <p:sp>
         <p:nvSpPr>
           <p:cNvPr id="2" name="Rectangle 1"/>
@@ -11151,6 +11699,7 @@
           <a:lstStyle/>
           <a:p>
             <a:pPr algn="ctr"/>
+            <a:endParaRPr/>
           </a:p>
         </p:txBody>
       </p:sp>
@@ -11179,7 +11728,7 @@
                 <a:srgbClr val="73787E"/>
               </a:gs>
             </a:gsLst>
-            <a:lin scaled="0" ang="18900000"/>
+            <a:lin ang="18900000" scaled="0"/>
           </a:gradFill>
           <a:ln>
             <a:noFill/>
@@ -11211,6 +11760,7 @@
           <a:lstStyle/>
           <a:p>
             <a:pPr algn="ctr"/>
+            <a:endParaRPr/>
           </a:p>
         </p:txBody>
       </p:sp>
@@ -11280,7 +11830,7 @@
                 <a:srgbClr val="FFFFFF"/>
               </a:gs>
             </a:gsLst>
-            <a:lin scaled="0" ang="0"/>
+            <a:lin ang="0" scaled="0"/>
           </a:gradFill>
           <a:ln>
             <a:noFill/>
@@ -11306,6 +11856,7 @@
           <a:lstStyle/>
           <a:p>
             <a:pPr algn="ctr"/>
+            <a:endParaRPr/>
           </a:p>
         </p:txBody>
       </p:sp>
@@ -11446,6 +11997,7 @@
           <a:lstStyle/>
           <a:p>
             <a:pPr algn="ctr"/>
+            <a:endParaRPr/>
           </a:p>
         </p:txBody>
       </p:sp>
@@ -11643,6 +12195,7 @@
           <a:lstStyle/>
           <a:p>
             <a:pPr algn="ctr"/>
+            <a:endParaRPr/>
           </a:p>
         </p:txBody>
       </p:sp>
@@ -11821,7 +12374,7 @@
 </file>
 
 <file path=ppt/slides/slide2.xml><?xml version="1.0" encoding="utf-8"?>
-<p:sld xmlns:a="http://schemas.openxmlformats.org/drawingml/2006/main" xmlns:p="http://schemas.openxmlformats.org/presentationml/2006/main" xmlns:r="http://schemas.openxmlformats.org/officeDocument/2006/relationships">
+<p:sld xmlns:a="http://schemas.openxmlformats.org/drawingml/2006/main" xmlns:r="http://schemas.openxmlformats.org/officeDocument/2006/relationships" xmlns:p="http://schemas.openxmlformats.org/presentationml/2006/main">
   <p:cSld>
     <p:spTree>
       <p:nvGrpSpPr>
@@ -11829,7 +12382,14 @@
         <p:cNvGrpSpPr/>
         <p:nvPr/>
       </p:nvGrpSpPr>
-      <p:grpSpPr/>
+      <p:grpSpPr>
+        <a:xfrm>
+          <a:off x="0" y="0"/>
+          <a:ext cx="0" cy="0"/>
+          <a:chOff x="0" y="0"/>
+          <a:chExt cx="0" cy="0"/>
+        </a:xfrm>
+      </p:grpSpPr>
       <p:sp>
         <p:nvSpPr>
           <p:cNvPr id="2" name="Rectangle 1"/>
@@ -11871,6 +12431,7 @@
           <a:lstStyle/>
           <a:p>
             <a:pPr algn="ctr"/>
+            <a:endParaRPr/>
           </a:p>
         </p:txBody>
       </p:sp>
@@ -11899,7 +12460,7 @@
                 <a:srgbClr val="73787E"/>
               </a:gs>
             </a:gsLst>
-            <a:lin scaled="0" ang="18900000"/>
+            <a:lin ang="18900000" scaled="0"/>
           </a:gradFill>
           <a:ln>
             <a:noFill/>
@@ -11931,6 +12492,7 @@
           <a:lstStyle/>
           <a:p>
             <a:pPr algn="ctr"/>
+            <a:endParaRPr/>
           </a:p>
         </p:txBody>
       </p:sp>
@@ -12000,7 +12562,7 @@
                 <a:srgbClr val="FFFFFF"/>
               </a:gs>
             </a:gsLst>
-            <a:lin scaled="0" ang="0"/>
+            <a:lin ang="0" scaled="0"/>
           </a:gradFill>
           <a:ln>
             <a:noFill/>
@@ -12026,6 +12588,7 @@
           <a:lstStyle/>
           <a:p>
             <a:pPr algn="ctr"/>
+            <a:endParaRPr/>
           </a:p>
         </p:txBody>
       </p:sp>
@@ -12209,6 +12772,7 @@
           <a:lstStyle/>
           <a:p>
             <a:pPr algn="ctr"/>
+            <a:endParaRPr/>
           </a:p>
         </p:txBody>
       </p:sp>
@@ -12326,6 +12890,7 @@
           <a:lstStyle/>
           <a:p>
             <a:pPr algn="ctr"/>
+            <a:endParaRPr/>
           </a:p>
         </p:txBody>
       </p:sp>
@@ -12443,6 +13008,7 @@
           <a:lstStyle/>
           <a:p>
             <a:pPr algn="ctr"/>
+            <a:endParaRPr/>
           </a:p>
         </p:txBody>
       </p:sp>
@@ -12560,6 +13126,7 @@
           <a:lstStyle/>
           <a:p>
             <a:pPr algn="ctr"/>
+            <a:endParaRPr/>
           </a:p>
         </p:txBody>
       </p:sp>
@@ -12738,7 +13305,7 @@
 </file>
 
 <file path=ppt/slides/slide20.xml><?xml version="1.0" encoding="utf-8"?>
-<p:sld xmlns:a="http://schemas.openxmlformats.org/drawingml/2006/main" xmlns:p="http://schemas.openxmlformats.org/presentationml/2006/main" xmlns:r="http://schemas.openxmlformats.org/officeDocument/2006/relationships">
+<p:sld xmlns:a="http://schemas.openxmlformats.org/drawingml/2006/main" xmlns:r="http://schemas.openxmlformats.org/officeDocument/2006/relationships" xmlns:p="http://schemas.openxmlformats.org/presentationml/2006/main">
   <p:cSld>
     <p:spTree>
       <p:nvGrpSpPr>
@@ -12746,7 +13313,14 @@
         <p:cNvGrpSpPr/>
         <p:nvPr/>
       </p:nvGrpSpPr>
-      <p:grpSpPr/>
+      <p:grpSpPr>
+        <a:xfrm>
+          <a:off x="0" y="0"/>
+          <a:ext cx="0" cy="0"/>
+          <a:chOff x="0" y="0"/>
+          <a:chExt cx="0" cy="0"/>
+        </a:xfrm>
+      </p:grpSpPr>
       <p:sp>
         <p:nvSpPr>
           <p:cNvPr id="2" name="Rectangle 1"/>
@@ -12788,6 +13362,7 @@
           <a:lstStyle/>
           <a:p>
             <a:pPr algn="ctr"/>
+            <a:endParaRPr/>
           </a:p>
         </p:txBody>
       </p:sp>
@@ -12857,7 +13432,7 @@
                 <a:srgbClr val="FFFFFF"/>
               </a:gs>
             </a:gsLst>
-            <a:lin scaled="0" ang="0"/>
+            <a:lin ang="0" scaled="0"/>
           </a:gradFill>
           <a:ln>
             <a:noFill/>
@@ -12883,6 +13458,7 @@
           <a:lstStyle/>
           <a:p>
             <a:pPr algn="ctr"/>
+            <a:endParaRPr/>
           </a:p>
         </p:txBody>
       </p:sp>
@@ -13061,7 +13637,7 @@
 </file>
 
 <file path=ppt/slides/slide3.xml><?xml version="1.0" encoding="utf-8"?>
-<p:sld xmlns:a="http://schemas.openxmlformats.org/drawingml/2006/main" xmlns:p="http://schemas.openxmlformats.org/presentationml/2006/main" xmlns:r="http://schemas.openxmlformats.org/officeDocument/2006/relationships">
+<p:sld xmlns:a="http://schemas.openxmlformats.org/drawingml/2006/main" xmlns:r="http://schemas.openxmlformats.org/officeDocument/2006/relationships" xmlns:p="http://schemas.openxmlformats.org/presentationml/2006/main">
   <p:cSld>
     <p:spTree>
       <p:nvGrpSpPr>
@@ -13069,7 +13645,14 @@
         <p:cNvGrpSpPr/>
         <p:nvPr/>
       </p:nvGrpSpPr>
-      <p:grpSpPr/>
+      <p:grpSpPr>
+        <a:xfrm>
+          <a:off x="0" y="0"/>
+          <a:ext cx="0" cy="0"/>
+          <a:chOff x="0" y="0"/>
+          <a:chExt cx="0" cy="0"/>
+        </a:xfrm>
+      </p:grpSpPr>
       <p:sp>
         <p:nvSpPr>
           <p:cNvPr id="2" name="Rectangle 1"/>
@@ -13111,6 +13694,7 @@
           <a:lstStyle/>
           <a:p>
             <a:pPr algn="ctr"/>
+            <a:endParaRPr/>
           </a:p>
         </p:txBody>
       </p:sp>
@@ -13139,7 +13723,7 @@
                 <a:srgbClr val="73787E"/>
               </a:gs>
             </a:gsLst>
-            <a:lin scaled="0" ang="18900000"/>
+            <a:lin ang="18900000" scaled="0"/>
           </a:gradFill>
           <a:ln>
             <a:noFill/>
@@ -13171,6 +13755,7 @@
           <a:lstStyle/>
           <a:p>
             <a:pPr algn="ctr"/>
+            <a:endParaRPr/>
           </a:p>
         </p:txBody>
       </p:sp>
@@ -13240,7 +13825,7 @@
                 <a:srgbClr val="FFFFFF"/>
               </a:gs>
             </a:gsLst>
-            <a:lin scaled="0" ang="0"/>
+            <a:lin ang="0" scaled="0"/>
           </a:gradFill>
           <a:ln>
             <a:noFill/>
@@ -13266,6 +13851,7 @@
           <a:lstStyle/>
           <a:p>
             <a:pPr algn="ctr"/>
+            <a:endParaRPr/>
           </a:p>
         </p:txBody>
       </p:sp>
@@ -13406,6 +13992,7 @@
           <a:lstStyle/>
           <a:p>
             <a:pPr algn="ctr"/>
+            <a:endParaRPr/>
           </a:p>
         </p:txBody>
       </p:sp>
@@ -13523,6 +14110,7 @@
           <a:lstStyle/>
           <a:p>
             <a:pPr algn="ctr"/>
+            <a:endParaRPr/>
           </a:p>
         </p:txBody>
       </p:sp>
@@ -13640,6 +14228,7 @@
           <a:lstStyle/>
           <a:p>
             <a:pPr algn="ctr"/>
+            <a:endParaRPr/>
           </a:p>
         </p:txBody>
       </p:sp>
@@ -13757,6 +14346,7 @@
           <a:lstStyle/>
           <a:p>
             <a:pPr algn="ctr"/>
+            <a:endParaRPr/>
           </a:p>
         </p:txBody>
       </p:sp>
@@ -13875,7 +14465,7 @@
 </file>
 
 <file path=ppt/slides/slide4.xml><?xml version="1.0" encoding="utf-8"?>
-<p:sld xmlns:a="http://schemas.openxmlformats.org/drawingml/2006/main" xmlns:p="http://schemas.openxmlformats.org/presentationml/2006/main" xmlns:r="http://schemas.openxmlformats.org/officeDocument/2006/relationships">
+<p:sld xmlns:a="http://schemas.openxmlformats.org/drawingml/2006/main" xmlns:r="http://schemas.openxmlformats.org/officeDocument/2006/relationships" xmlns:p="http://schemas.openxmlformats.org/presentationml/2006/main">
   <p:cSld>
     <p:spTree>
       <p:nvGrpSpPr>
@@ -13883,7 +14473,14 @@
         <p:cNvGrpSpPr/>
         <p:nvPr/>
       </p:nvGrpSpPr>
-      <p:grpSpPr/>
+      <p:grpSpPr>
+        <a:xfrm>
+          <a:off x="0" y="0"/>
+          <a:ext cx="0" cy="0"/>
+          <a:chOff x="0" y="0"/>
+          <a:chExt cx="0" cy="0"/>
+        </a:xfrm>
+      </p:grpSpPr>
       <p:sp>
         <p:nvSpPr>
           <p:cNvPr id="2" name="Rectangle 1"/>
@@ -13925,6 +14522,7 @@
           <a:lstStyle/>
           <a:p>
             <a:pPr algn="ctr"/>
+            <a:endParaRPr/>
           </a:p>
         </p:txBody>
       </p:sp>
@@ -13953,7 +14551,7 @@
                 <a:srgbClr val="73787E"/>
               </a:gs>
             </a:gsLst>
-            <a:lin scaled="0" ang="18900000"/>
+            <a:lin ang="18900000" scaled="0"/>
           </a:gradFill>
           <a:ln>
             <a:noFill/>
@@ -13985,6 +14583,7 @@
           <a:lstStyle/>
           <a:p>
             <a:pPr algn="ctr"/>
+            <a:endParaRPr/>
           </a:p>
         </p:txBody>
       </p:sp>
@@ -14054,7 +14653,7 @@
                 <a:srgbClr val="FFFFFF"/>
               </a:gs>
             </a:gsLst>
-            <a:lin scaled="0" ang="0"/>
+            <a:lin ang="0" scaled="0"/>
           </a:gradFill>
           <a:ln>
             <a:noFill/>
@@ -14080,6 +14679,7 @@
           <a:lstStyle/>
           <a:p>
             <a:pPr algn="ctr"/>
+            <a:endParaRPr/>
           </a:p>
         </p:txBody>
       </p:sp>
@@ -14263,6 +14863,7 @@
           <a:lstStyle/>
           <a:p>
             <a:pPr algn="ctr"/>
+            <a:endParaRPr/>
           </a:p>
         </p:txBody>
       </p:sp>
@@ -14443,6 +15044,7 @@
           <a:lstStyle/>
           <a:p>
             <a:pPr algn="ctr"/>
+            <a:endParaRPr/>
           </a:p>
         </p:txBody>
       </p:sp>
@@ -14623,6 +15225,7 @@
           <a:lstStyle/>
           <a:p>
             <a:pPr algn="ctr"/>
+            <a:endParaRPr/>
           </a:p>
         </p:txBody>
       </p:sp>
@@ -14734,7 +15337,7 @@
                 <a:srgbClr val="4A4F55"/>
               </a:gs>
             </a:gsLst>
-            <a:lin scaled="0" ang="14700000"/>
+            <a:lin ang="14700000" scaled="0"/>
           </a:gradFill>
           <a:ln>
             <a:noFill/>
@@ -14766,6 +15369,7 @@
           <a:lstStyle/>
           <a:p>
             <a:pPr algn="ctr"/>
+            <a:endParaRPr/>
           </a:p>
         </p:txBody>
       </p:sp>
@@ -14863,6 +15467,7 @@
           <a:lstStyle/>
           <a:p>
             <a:pPr algn="ctr"/>
+            <a:endParaRPr/>
           </a:p>
         </p:txBody>
       </p:sp>
@@ -14960,6 +15565,7 @@
           <a:lstStyle/>
           <a:p>
             <a:pPr algn="ctr"/>
+            <a:endParaRPr/>
           </a:p>
         </p:txBody>
       </p:sp>
@@ -15031,7 +15637,7 @@
                 <a:srgbClr val="4A4F55"/>
               </a:gs>
             </a:gsLst>
-            <a:lin scaled="0" ang="14700000"/>
+            <a:lin ang="14700000" scaled="0"/>
           </a:gradFill>
           <a:ln>
             <a:noFill/>
@@ -15063,6 +15669,7 @@
           <a:lstStyle/>
           <a:p>
             <a:pPr algn="ctr"/>
+            <a:endParaRPr/>
           </a:p>
         </p:txBody>
       </p:sp>
@@ -15160,6 +15767,7 @@
           <a:lstStyle/>
           <a:p>
             <a:pPr algn="ctr"/>
+            <a:endParaRPr/>
           </a:p>
         </p:txBody>
       </p:sp>
@@ -15257,6 +15865,7 @@
           <a:lstStyle/>
           <a:p>
             <a:pPr algn="ctr"/>
+            <a:endParaRPr/>
           </a:p>
         </p:txBody>
       </p:sp>
@@ -15328,7 +15937,7 @@
                 <a:srgbClr val="4A4F55"/>
               </a:gs>
             </a:gsLst>
-            <a:lin scaled="0" ang="14700000"/>
+            <a:lin ang="14700000" scaled="0"/>
           </a:gradFill>
           <a:ln>
             <a:noFill/>
@@ -15360,6 +15969,7 @@
           <a:lstStyle/>
           <a:p>
             <a:pPr algn="ctr"/>
+            <a:endParaRPr/>
           </a:p>
         </p:txBody>
       </p:sp>
@@ -15457,6 +16067,7 @@
           <a:lstStyle/>
           <a:p>
             <a:pPr algn="ctr"/>
+            <a:endParaRPr/>
           </a:p>
         </p:txBody>
       </p:sp>
@@ -15554,6 +16165,7 @@
           <a:lstStyle/>
           <a:p>
             <a:pPr algn="ctr"/>
+            <a:endParaRPr/>
           </a:p>
         </p:txBody>
       </p:sp>
@@ -15625,7 +16237,7 @@
                 <a:srgbClr val="4A4F55"/>
               </a:gs>
             </a:gsLst>
-            <a:lin scaled="0" ang="14700000"/>
+            <a:lin ang="14700000" scaled="0"/>
           </a:gradFill>
           <a:ln>
             <a:noFill/>
@@ -15657,6 +16269,7 @@
           <a:lstStyle/>
           <a:p>
             <a:pPr algn="ctr"/>
+            <a:endParaRPr/>
           </a:p>
         </p:txBody>
       </p:sp>
@@ -15754,6 +16367,7 @@
           <a:lstStyle/>
           <a:p>
             <a:pPr algn="ctr"/>
+            <a:endParaRPr/>
           </a:p>
         </p:txBody>
       </p:sp>
@@ -15851,6 +16465,7 @@
           <a:lstStyle/>
           <a:p>
             <a:pPr algn="ctr"/>
+            <a:endParaRPr/>
           </a:p>
         </p:txBody>
       </p:sp>
@@ -15949,7 +16564,7 @@
 </file>
 
 <file path=ppt/slides/slide5.xml><?xml version="1.0" encoding="utf-8"?>
-<p:sld xmlns:a="http://schemas.openxmlformats.org/drawingml/2006/main" xmlns:p="http://schemas.openxmlformats.org/presentationml/2006/main" xmlns:r="http://schemas.openxmlformats.org/officeDocument/2006/relationships">
+<p:sld xmlns:a="http://schemas.openxmlformats.org/drawingml/2006/main" xmlns:r="http://schemas.openxmlformats.org/officeDocument/2006/relationships" xmlns:p="http://schemas.openxmlformats.org/presentationml/2006/main">
   <p:cSld>
     <p:spTree>
       <p:nvGrpSpPr>
@@ -15957,7 +16572,14 @@
         <p:cNvGrpSpPr/>
         <p:nvPr/>
       </p:nvGrpSpPr>
-      <p:grpSpPr/>
+      <p:grpSpPr>
+        <a:xfrm>
+          <a:off x="0" y="0"/>
+          <a:ext cx="0" cy="0"/>
+          <a:chOff x="0" y="0"/>
+          <a:chExt cx="0" cy="0"/>
+        </a:xfrm>
+      </p:grpSpPr>
       <p:sp>
         <p:nvSpPr>
           <p:cNvPr id="2" name="Rectangle 1"/>
@@ -15999,6 +16621,7 @@
           <a:lstStyle/>
           <a:p>
             <a:pPr algn="ctr"/>
+            <a:endParaRPr/>
           </a:p>
         </p:txBody>
       </p:sp>
@@ -16027,7 +16650,7 @@
                 <a:srgbClr val="73787E"/>
               </a:gs>
             </a:gsLst>
-            <a:lin scaled="0" ang="18900000"/>
+            <a:lin ang="18900000" scaled="0"/>
           </a:gradFill>
           <a:ln>
             <a:noFill/>
@@ -16059,6 +16682,7 @@
           <a:lstStyle/>
           <a:p>
             <a:pPr algn="ctr"/>
+            <a:endParaRPr/>
           </a:p>
         </p:txBody>
       </p:sp>
@@ -16128,7 +16752,7 @@
                 <a:srgbClr val="FFFFFF"/>
               </a:gs>
             </a:gsLst>
-            <a:lin scaled="0" ang="0"/>
+            <a:lin ang="0" scaled="0"/>
           </a:gradFill>
           <a:ln>
             <a:noFill/>
@@ -16154,6 +16778,7 @@
           <a:lstStyle/>
           <a:p>
             <a:pPr algn="ctr"/>
+            <a:endParaRPr/>
           </a:p>
         </p:txBody>
       </p:sp>
@@ -16262,9 +16887,27 @@
                 <a:tableStyleId>{5C22544A-7EE6-4342-B048-85BDC9FD1C3A}</a:tableStyleId>
               </a:tblPr>
               <a:tblGrid>
-                <a:gridCol w="2834640"/>
-                <a:gridCol w="6675120"/>
-                <a:gridCol w="1783080"/>
+                <a:gridCol w="2834640">
+                  <a:extLst>
+                    <a:ext uri="{9D8B030D-6E8A-4147-A177-3AD203B41FA5}">
+                      <a16:colId xmlns:a16="http://schemas.microsoft.com/office/drawing/2014/main" val="20000"/>
+                    </a:ext>
+                  </a:extLst>
+                </a:gridCol>
+                <a:gridCol w="6675120">
+                  <a:extLst>
+                    <a:ext uri="{9D8B030D-6E8A-4147-A177-3AD203B41FA5}">
+                      <a16:colId xmlns:a16="http://schemas.microsoft.com/office/drawing/2014/main" val="20001"/>
+                    </a:ext>
+                  </a:extLst>
+                </a:gridCol>
+                <a:gridCol w="1783080">
+                  <a:extLst>
+                    <a:ext uri="{9D8B030D-6E8A-4147-A177-3AD203B41FA5}">
+                      <a16:colId xmlns:a16="http://schemas.microsoft.com/office/drawing/2014/main" val="20002"/>
+                    </a:ext>
+                  </a:extLst>
+                </a:gridCol>
               </a:tblGrid>
               <a:tr h="457200">
                 <a:tc>
@@ -16289,7 +16932,7 @@
                       </a:r>
                     </a:p>
                   </a:txBody>
-                  <a:tcPr marT="27432" marB="27432" marL="73152" marR="73152" anchor="ctr">
+                  <a:tcPr marL="73152" marR="73152" marT="27432" marB="27432" anchor="ctr">
                     <a:solidFill>
                       <a:srgbClr val="33393F"/>
                     </a:solidFill>
@@ -16317,7 +16960,7 @@
                       </a:r>
                     </a:p>
                   </a:txBody>
-                  <a:tcPr marT="27432" marB="27432" marL="73152" marR="73152" anchor="ctr">
+                  <a:tcPr marL="73152" marR="73152" marT="27432" marB="27432" anchor="ctr">
                     <a:solidFill>
                       <a:srgbClr val="33393F"/>
                     </a:solidFill>
@@ -16345,12 +16988,17 @@
                       </a:r>
                     </a:p>
                   </a:txBody>
-                  <a:tcPr marT="27432" marB="27432" marL="73152" marR="73152" anchor="ctr">
+                  <a:tcPr marL="73152" marR="73152" marT="27432" marB="27432" anchor="ctr">
                     <a:solidFill>
                       <a:srgbClr val="33393F"/>
                     </a:solidFill>
                   </a:tcPr>
                 </a:tc>
+                <a:extLst>
+                  <a:ext uri="{0D108BD9-81ED-4DB2-BD59-A6C34878D82A}">
+                    <a16:rowId xmlns:a16="http://schemas.microsoft.com/office/drawing/2014/main" val="10000"/>
+                  </a:ext>
+                </a:extLst>
               </a:tr>
               <a:tr h="457200">
                 <a:tc>
@@ -16375,7 +17023,7 @@
                       </a:r>
                     </a:p>
                   </a:txBody>
-                  <a:tcPr marT="27432" marB="27432" marL="73152" marR="73152" anchor="ctr">
+                  <a:tcPr marL="73152" marR="73152" marT="27432" marB="27432" anchor="ctr">
                     <a:solidFill>
                       <a:srgbClr val="FFFFFF"/>
                     </a:solidFill>
@@ -16403,7 +17051,7 @@
                       </a:r>
                     </a:p>
                   </a:txBody>
-                  <a:tcPr marT="27432" marB="27432" marL="73152" marR="73152" anchor="ctr">
+                  <a:tcPr marL="73152" marR="73152" marT="27432" marB="27432" anchor="ctr">
                     <a:solidFill>
                       <a:srgbClr val="FFFFFF"/>
                     </a:solidFill>
@@ -16431,12 +17079,17 @@
                       </a:r>
                     </a:p>
                   </a:txBody>
-                  <a:tcPr marT="27432" marB="27432" marL="73152" marR="73152" anchor="ctr">
+                  <a:tcPr marL="73152" marR="73152" marT="27432" marB="27432" anchor="ctr">
                     <a:solidFill>
                       <a:srgbClr val="FFFFFF"/>
                     </a:solidFill>
                   </a:tcPr>
                 </a:tc>
+                <a:extLst>
+                  <a:ext uri="{0D108BD9-81ED-4DB2-BD59-A6C34878D82A}">
+                    <a16:rowId xmlns:a16="http://schemas.microsoft.com/office/drawing/2014/main" val="10001"/>
+                  </a:ext>
+                </a:extLst>
               </a:tr>
               <a:tr h="457200">
                 <a:tc>
@@ -16461,7 +17114,7 @@
                       </a:r>
                     </a:p>
                   </a:txBody>
-                  <a:tcPr marT="27432" marB="27432" marL="73152" marR="73152" anchor="ctr">
+                  <a:tcPr marL="73152" marR="73152" marT="27432" marB="27432" anchor="ctr">
                     <a:solidFill>
                       <a:srgbClr val="F6F7F8"/>
                     </a:solidFill>
@@ -16489,7 +17142,7 @@
                       </a:r>
                     </a:p>
                   </a:txBody>
-                  <a:tcPr marT="27432" marB="27432" marL="73152" marR="73152" anchor="ctr">
+                  <a:tcPr marL="73152" marR="73152" marT="27432" marB="27432" anchor="ctr">
                     <a:solidFill>
                       <a:srgbClr val="F6F7F8"/>
                     </a:solidFill>
@@ -16517,12 +17170,17 @@
                       </a:r>
                     </a:p>
                   </a:txBody>
-                  <a:tcPr marT="27432" marB="27432" marL="73152" marR="73152" anchor="ctr">
+                  <a:tcPr marL="73152" marR="73152" marT="27432" marB="27432" anchor="ctr">
                     <a:solidFill>
                       <a:srgbClr val="F6F7F8"/>
                     </a:solidFill>
                   </a:tcPr>
                 </a:tc>
+                <a:extLst>
+                  <a:ext uri="{0D108BD9-81ED-4DB2-BD59-A6C34878D82A}">
+                    <a16:rowId xmlns:a16="http://schemas.microsoft.com/office/drawing/2014/main" val="10002"/>
+                  </a:ext>
+                </a:extLst>
               </a:tr>
             </a:tbl>
           </a:graphicData>
@@ -16622,6 +17280,7 @@
           <a:lstStyle/>
           <a:p>
             <a:pPr algn="ctr"/>
+            <a:endParaRPr/>
           </a:p>
         </p:txBody>
       </p:sp>
@@ -16739,6 +17398,7 @@
           <a:lstStyle/>
           <a:p>
             <a:pPr algn="ctr"/>
+            <a:endParaRPr/>
           </a:p>
         </p:txBody>
       </p:sp>
@@ -16856,6 +17516,7 @@
           <a:lstStyle/>
           <a:p>
             <a:pPr algn="ctr"/>
+            <a:endParaRPr/>
           </a:p>
         </p:txBody>
       </p:sp>
@@ -16973,6 +17634,7 @@
           <a:lstStyle/>
           <a:p>
             <a:pPr algn="ctr"/>
+            <a:endParaRPr/>
           </a:p>
         </p:txBody>
       </p:sp>
@@ -17048,7 +17710,7 @@
 </file>
 
 <file path=ppt/slides/slide6.xml><?xml version="1.0" encoding="utf-8"?>
-<p:sld xmlns:a="http://schemas.openxmlformats.org/drawingml/2006/main" xmlns:p="http://schemas.openxmlformats.org/presentationml/2006/main" xmlns:r="http://schemas.openxmlformats.org/officeDocument/2006/relationships">
+<p:sld xmlns:a="http://schemas.openxmlformats.org/drawingml/2006/main" xmlns:r="http://schemas.openxmlformats.org/officeDocument/2006/relationships" xmlns:p="http://schemas.openxmlformats.org/presentationml/2006/main">
   <p:cSld>
     <p:spTree>
       <p:nvGrpSpPr>
@@ -17056,7 +17718,14 @@
         <p:cNvGrpSpPr/>
         <p:nvPr/>
       </p:nvGrpSpPr>
-      <p:grpSpPr/>
+      <p:grpSpPr>
+        <a:xfrm>
+          <a:off x="0" y="0"/>
+          <a:ext cx="0" cy="0"/>
+          <a:chOff x="0" y="0"/>
+          <a:chExt cx="0" cy="0"/>
+        </a:xfrm>
+      </p:grpSpPr>
       <p:sp>
         <p:nvSpPr>
           <p:cNvPr id="2" name="Rectangle 1"/>
@@ -17098,6 +17767,7 @@
           <a:lstStyle/>
           <a:p>
             <a:pPr algn="ctr"/>
+            <a:endParaRPr/>
           </a:p>
         </p:txBody>
       </p:sp>
@@ -17126,7 +17796,7 @@
                 <a:srgbClr val="73787E"/>
               </a:gs>
             </a:gsLst>
-            <a:lin scaled="0" ang="18900000"/>
+            <a:lin ang="18900000" scaled="0"/>
           </a:gradFill>
           <a:ln>
             <a:noFill/>
@@ -17158,6 +17828,7 @@
           <a:lstStyle/>
           <a:p>
             <a:pPr algn="ctr"/>
+            <a:endParaRPr/>
           </a:p>
         </p:txBody>
       </p:sp>
@@ -17227,7 +17898,7 @@
                 <a:srgbClr val="FFFFFF"/>
               </a:gs>
             </a:gsLst>
-            <a:lin scaled="0" ang="0"/>
+            <a:lin ang="0" scaled="0"/>
           </a:gradFill>
           <a:ln>
             <a:noFill/>
@@ -17253,6 +17924,7 @@
           <a:lstStyle/>
           <a:p>
             <a:pPr algn="ctr"/>
+            <a:endParaRPr/>
           </a:p>
         </p:txBody>
       </p:sp>
@@ -17361,9 +18033,27 @@
                 <a:tableStyleId>{5C22544A-7EE6-4342-B048-85BDC9FD1C3A}</a:tableStyleId>
               </a:tblPr>
               <a:tblGrid>
-                <a:gridCol w="822960"/>
-                <a:gridCol w="3931920"/>
-                <a:gridCol w="1188720"/>
+                <a:gridCol w="822960">
+                  <a:extLst>
+                    <a:ext uri="{9D8B030D-6E8A-4147-A177-3AD203B41FA5}">
+                      <a16:colId xmlns:a16="http://schemas.microsoft.com/office/drawing/2014/main" val="20000"/>
+                    </a:ext>
+                  </a:extLst>
+                </a:gridCol>
+                <a:gridCol w="3931920">
+                  <a:extLst>
+                    <a:ext uri="{9D8B030D-6E8A-4147-A177-3AD203B41FA5}">
+                      <a16:colId xmlns:a16="http://schemas.microsoft.com/office/drawing/2014/main" val="20001"/>
+                    </a:ext>
+                  </a:extLst>
+                </a:gridCol>
+                <a:gridCol w="1188720">
+                  <a:extLst>
+                    <a:ext uri="{9D8B030D-6E8A-4147-A177-3AD203B41FA5}">
+                      <a16:colId xmlns:a16="http://schemas.microsoft.com/office/drawing/2014/main" val="20002"/>
+                    </a:ext>
+                  </a:extLst>
+                </a:gridCol>
               </a:tblGrid>
               <a:tr h="457200">
                 <a:tc>
@@ -17388,7 +18078,7 @@
                       </a:r>
                     </a:p>
                   </a:txBody>
-                  <a:tcPr marT="27432" marB="27432" marL="73152" marR="73152" anchor="ctr">
+                  <a:tcPr marL="73152" marR="73152" marT="27432" marB="27432" anchor="ctr">
                     <a:solidFill>
                       <a:srgbClr val="33393F"/>
                     </a:solidFill>
@@ -17416,7 +18106,7 @@
                       </a:r>
                     </a:p>
                   </a:txBody>
-                  <a:tcPr marT="27432" marB="27432" marL="73152" marR="73152" anchor="ctr">
+                  <a:tcPr marL="73152" marR="73152" marT="27432" marB="27432" anchor="ctr">
                     <a:solidFill>
                       <a:srgbClr val="33393F"/>
                     </a:solidFill>
@@ -17444,12 +18134,17 @@
                       </a:r>
                     </a:p>
                   </a:txBody>
-                  <a:tcPr marT="27432" marB="27432" marL="73152" marR="73152" anchor="ctr">
+                  <a:tcPr marL="73152" marR="73152" marT="27432" marB="27432" anchor="ctr">
                     <a:solidFill>
                       <a:srgbClr val="33393F"/>
                     </a:solidFill>
                   </a:tcPr>
                 </a:tc>
+                <a:extLst>
+                  <a:ext uri="{0D108BD9-81ED-4DB2-BD59-A6C34878D82A}">
+                    <a16:rowId xmlns:a16="http://schemas.microsoft.com/office/drawing/2014/main" val="10000"/>
+                  </a:ext>
+                </a:extLst>
               </a:tr>
               <a:tr h="457200">
                 <a:tc>
@@ -17474,7 +18169,7 @@
                       </a:r>
                     </a:p>
                   </a:txBody>
-                  <a:tcPr marT="27432" marB="27432" marL="73152" marR="73152" anchor="ctr">
+                  <a:tcPr marL="73152" marR="73152" marT="27432" marB="27432" anchor="ctr">
                     <a:solidFill>
                       <a:srgbClr val="FFFFFF"/>
                     </a:solidFill>
@@ -17502,7 +18197,7 @@
                       </a:r>
                     </a:p>
                   </a:txBody>
-                  <a:tcPr marT="27432" marB="27432" marL="73152" marR="73152" anchor="ctr">
+                  <a:tcPr marL="73152" marR="73152" marT="27432" marB="27432" anchor="ctr">
                     <a:solidFill>
                       <a:srgbClr val="FFFFFF"/>
                     </a:solidFill>
@@ -17530,12 +18225,17 @@
                       </a:r>
                     </a:p>
                   </a:txBody>
-                  <a:tcPr marT="27432" marB="27432" marL="73152" marR="73152" anchor="ctr">
+                  <a:tcPr marL="73152" marR="73152" marT="27432" marB="27432" anchor="ctr">
                     <a:solidFill>
                       <a:srgbClr val="FFFFFF"/>
                     </a:solidFill>
                   </a:tcPr>
                 </a:tc>
+                <a:extLst>
+                  <a:ext uri="{0D108BD9-81ED-4DB2-BD59-A6C34878D82A}">
+                    <a16:rowId xmlns:a16="http://schemas.microsoft.com/office/drawing/2014/main" val="10001"/>
+                  </a:ext>
+                </a:extLst>
               </a:tr>
               <a:tr h="457200">
                 <a:tc>
@@ -17560,7 +18260,7 @@
                       </a:r>
                     </a:p>
                   </a:txBody>
-                  <a:tcPr marT="27432" marB="27432" marL="73152" marR="73152" anchor="ctr">
+                  <a:tcPr marL="73152" marR="73152" marT="27432" marB="27432" anchor="ctr">
                     <a:solidFill>
                       <a:srgbClr val="F6F7F8"/>
                     </a:solidFill>
@@ -17588,7 +18288,7 @@
                       </a:r>
                     </a:p>
                   </a:txBody>
-                  <a:tcPr marT="27432" marB="27432" marL="73152" marR="73152" anchor="ctr">
+                  <a:tcPr marL="73152" marR="73152" marT="27432" marB="27432" anchor="ctr">
                     <a:solidFill>
                       <a:srgbClr val="F6F7F8"/>
                     </a:solidFill>
@@ -17616,12 +18316,17 @@
                       </a:r>
                     </a:p>
                   </a:txBody>
-                  <a:tcPr marT="27432" marB="27432" marL="73152" marR="73152" anchor="ctr">
+                  <a:tcPr marL="73152" marR="73152" marT="27432" marB="27432" anchor="ctr">
                     <a:solidFill>
                       <a:srgbClr val="F6F7F8"/>
                     </a:solidFill>
                   </a:tcPr>
                 </a:tc>
+                <a:extLst>
+                  <a:ext uri="{0D108BD9-81ED-4DB2-BD59-A6C34878D82A}">
+                    <a16:rowId xmlns:a16="http://schemas.microsoft.com/office/drawing/2014/main" val="10002"/>
+                  </a:ext>
+                </a:extLst>
               </a:tr>
               <a:tr h="457200">
                 <a:tc>
@@ -17646,7 +18351,7 @@
                       </a:r>
                     </a:p>
                   </a:txBody>
-                  <a:tcPr marT="27432" marB="27432" marL="73152" marR="73152" anchor="ctr">
+                  <a:tcPr marL="73152" marR="73152" marT="27432" marB="27432" anchor="ctr">
                     <a:solidFill>
                       <a:srgbClr val="FFFFFF"/>
                     </a:solidFill>
@@ -17674,7 +18379,7 @@
                       </a:r>
                     </a:p>
                   </a:txBody>
-                  <a:tcPr marT="27432" marB="27432" marL="73152" marR="73152" anchor="ctr">
+                  <a:tcPr marL="73152" marR="73152" marT="27432" marB="27432" anchor="ctr">
                     <a:solidFill>
                       <a:srgbClr val="FFFFFF"/>
                     </a:solidFill>
@@ -17702,12 +18407,17 @@
                       </a:r>
                     </a:p>
                   </a:txBody>
-                  <a:tcPr marT="27432" marB="27432" marL="73152" marR="73152" anchor="ctr">
+                  <a:tcPr marL="73152" marR="73152" marT="27432" marB="27432" anchor="ctr">
                     <a:solidFill>
                       <a:srgbClr val="FFFFFF"/>
                     </a:solidFill>
                   </a:tcPr>
                 </a:tc>
+                <a:extLst>
+                  <a:ext uri="{0D108BD9-81ED-4DB2-BD59-A6C34878D82A}">
+                    <a16:rowId xmlns:a16="http://schemas.microsoft.com/office/drawing/2014/main" val="10003"/>
+                  </a:ext>
+                </a:extLst>
               </a:tr>
             </a:tbl>
           </a:graphicData>
@@ -17764,6 +18474,7 @@
           <a:lstStyle/>
           <a:p>
             <a:pPr algn="ctr"/>
+            <a:endParaRPr/>
           </a:p>
         </p:txBody>
       </p:sp>
@@ -17901,6 +18612,7 @@
           <a:lstStyle/>
           <a:p>
             <a:pPr algn="ctr"/>
+            <a:endParaRPr/>
           </a:p>
         </p:txBody>
       </p:sp>
@@ -18078,6 +18790,7 @@
           <a:lstStyle/>
           <a:p>
             <a:pPr algn="ctr"/>
+            <a:endParaRPr/>
           </a:p>
         </p:txBody>
       </p:sp>
@@ -18216,7 +18929,7 @@
 </file>
 
 <file path=ppt/slides/slide7.xml><?xml version="1.0" encoding="utf-8"?>
-<p:sld xmlns:a="http://schemas.openxmlformats.org/drawingml/2006/main" xmlns:p="http://schemas.openxmlformats.org/presentationml/2006/main" xmlns:r="http://schemas.openxmlformats.org/officeDocument/2006/relationships">
+<p:sld xmlns:a="http://schemas.openxmlformats.org/drawingml/2006/main" xmlns:r="http://schemas.openxmlformats.org/officeDocument/2006/relationships" xmlns:p="http://schemas.openxmlformats.org/presentationml/2006/main">
   <p:cSld>
     <p:spTree>
       <p:nvGrpSpPr>
@@ -18224,7 +18937,14 @@
         <p:cNvGrpSpPr/>
         <p:nvPr/>
       </p:nvGrpSpPr>
-      <p:grpSpPr/>
+      <p:grpSpPr>
+        <a:xfrm>
+          <a:off x="0" y="0"/>
+          <a:ext cx="0" cy="0"/>
+          <a:chOff x="0" y="0"/>
+          <a:chExt cx="0" cy="0"/>
+        </a:xfrm>
+      </p:grpSpPr>
       <p:sp>
         <p:nvSpPr>
           <p:cNvPr id="2" name="Rectangle 1"/>
@@ -18266,6 +18986,7 @@
           <a:lstStyle/>
           <a:p>
             <a:pPr algn="ctr"/>
+            <a:endParaRPr/>
           </a:p>
         </p:txBody>
       </p:sp>
@@ -18294,7 +19015,7 @@
                 <a:srgbClr val="73787E"/>
               </a:gs>
             </a:gsLst>
-            <a:lin scaled="0" ang="18900000"/>
+            <a:lin ang="18900000" scaled="0"/>
           </a:gradFill>
           <a:ln>
             <a:noFill/>
@@ -18326,6 +19047,7 @@
           <a:lstStyle/>
           <a:p>
             <a:pPr algn="ctr"/>
+            <a:endParaRPr/>
           </a:p>
         </p:txBody>
       </p:sp>
@@ -18395,7 +19117,7 @@
                 <a:srgbClr val="FFFFFF"/>
               </a:gs>
             </a:gsLst>
-            <a:lin scaled="0" ang="0"/>
+            <a:lin ang="0" scaled="0"/>
           </a:gradFill>
           <a:ln>
             <a:noFill/>
@@ -18421,6 +19143,7 @@
           <a:lstStyle/>
           <a:p>
             <a:pPr algn="ctr"/>
+            <a:endParaRPr/>
           </a:p>
         </p:txBody>
       </p:sp>
@@ -18529,8 +19252,20 @@
                 <a:tableStyleId>{5C22544A-7EE6-4342-B048-85BDC9FD1C3A}</a:tableStyleId>
               </a:tblPr>
               <a:tblGrid>
-                <a:gridCol w="5760720"/>
-                <a:gridCol w="5532120"/>
+                <a:gridCol w="5760720">
+                  <a:extLst>
+                    <a:ext uri="{9D8B030D-6E8A-4147-A177-3AD203B41FA5}">
+                      <a16:colId xmlns:a16="http://schemas.microsoft.com/office/drawing/2014/main" val="20000"/>
+                    </a:ext>
+                  </a:extLst>
+                </a:gridCol>
+                <a:gridCol w="5532120">
+                  <a:extLst>
+                    <a:ext uri="{9D8B030D-6E8A-4147-A177-3AD203B41FA5}">
+                      <a16:colId xmlns:a16="http://schemas.microsoft.com/office/drawing/2014/main" val="20001"/>
+                    </a:ext>
+                  </a:extLst>
+                </a:gridCol>
               </a:tblGrid>
               <a:tr h="475488">
                 <a:tc>
@@ -18555,7 +19290,7 @@
                       </a:r>
                     </a:p>
                   </a:txBody>
-                  <a:tcPr marT="27432" marB="27432" marL="73152" marR="73152" anchor="ctr">
+                  <a:tcPr marL="73152" marR="73152" marT="27432" marB="27432" anchor="ctr">
                     <a:solidFill>
                       <a:srgbClr val="33393F"/>
                     </a:solidFill>
@@ -18583,12 +19318,17 @@
                       </a:r>
                     </a:p>
                   </a:txBody>
-                  <a:tcPr marT="27432" marB="27432" marL="73152" marR="73152" anchor="ctr">
+                  <a:tcPr marL="73152" marR="73152" marT="27432" marB="27432" anchor="ctr">
                     <a:solidFill>
                       <a:srgbClr val="33393F"/>
                     </a:solidFill>
                   </a:tcPr>
                 </a:tc>
+                <a:extLst>
+                  <a:ext uri="{0D108BD9-81ED-4DB2-BD59-A6C34878D82A}">
+                    <a16:rowId xmlns:a16="http://schemas.microsoft.com/office/drawing/2014/main" val="10000"/>
+                  </a:ext>
+                </a:extLst>
               </a:tr>
               <a:tr h="475488">
                 <a:tc>
@@ -18613,7 +19353,7 @@
                       </a:r>
                     </a:p>
                   </a:txBody>
-                  <a:tcPr marT="27432" marB="27432" marL="73152" marR="73152" anchor="ctr">
+                  <a:tcPr marL="73152" marR="73152" marT="27432" marB="27432" anchor="ctr">
                     <a:solidFill>
                       <a:srgbClr val="FFFFFF"/>
                     </a:solidFill>
@@ -18641,12 +19381,17 @@
                       </a:r>
                     </a:p>
                   </a:txBody>
-                  <a:tcPr marT="27432" marB="27432" marL="73152" marR="73152" anchor="ctr">
+                  <a:tcPr marL="73152" marR="73152" marT="27432" marB="27432" anchor="ctr">
                     <a:solidFill>
                       <a:srgbClr val="FFFFFF"/>
                     </a:solidFill>
                   </a:tcPr>
                 </a:tc>
+                <a:extLst>
+                  <a:ext uri="{0D108BD9-81ED-4DB2-BD59-A6C34878D82A}">
+                    <a16:rowId xmlns:a16="http://schemas.microsoft.com/office/drawing/2014/main" val="10001"/>
+                  </a:ext>
+                </a:extLst>
               </a:tr>
               <a:tr h="475488">
                 <a:tc>
@@ -18671,7 +19416,7 @@
                       </a:r>
                     </a:p>
                   </a:txBody>
-                  <a:tcPr marT="27432" marB="27432" marL="73152" marR="73152" anchor="ctr">
+                  <a:tcPr marL="73152" marR="73152" marT="27432" marB="27432" anchor="ctr">
                     <a:solidFill>
                       <a:srgbClr val="F6F7F8"/>
                     </a:solidFill>
@@ -18699,12 +19444,17 @@
                       </a:r>
                     </a:p>
                   </a:txBody>
-                  <a:tcPr marT="27432" marB="27432" marL="73152" marR="73152" anchor="ctr">
+                  <a:tcPr marL="73152" marR="73152" marT="27432" marB="27432" anchor="ctr">
                     <a:solidFill>
                       <a:srgbClr val="F6F7F8"/>
                     </a:solidFill>
                   </a:tcPr>
                 </a:tc>
+                <a:extLst>
+                  <a:ext uri="{0D108BD9-81ED-4DB2-BD59-A6C34878D82A}">
+                    <a16:rowId xmlns:a16="http://schemas.microsoft.com/office/drawing/2014/main" val="10002"/>
+                  </a:ext>
+                </a:extLst>
               </a:tr>
             </a:tbl>
           </a:graphicData>
@@ -18761,6 +19511,7 @@
           <a:lstStyle/>
           <a:p>
             <a:pPr algn="ctr"/>
+            <a:endParaRPr/>
           </a:p>
         </p:txBody>
       </p:sp>
@@ -18878,6 +19629,7 @@
           <a:lstStyle/>
           <a:p>
             <a:pPr algn="ctr"/>
+            <a:endParaRPr/>
           </a:p>
         </p:txBody>
       </p:sp>
@@ -18995,6 +19747,7 @@
           <a:lstStyle/>
           <a:p>
             <a:pPr algn="ctr"/>
+            <a:endParaRPr/>
           </a:p>
         </p:txBody>
       </p:sp>
@@ -19112,6 +19865,7 @@
           <a:lstStyle/>
           <a:p>
             <a:pPr algn="ctr"/>
+            <a:endParaRPr/>
           </a:p>
         </p:txBody>
       </p:sp>
@@ -19227,7 +19981,7 @@
 </file>
 
 <file path=ppt/slides/slide8.xml><?xml version="1.0" encoding="utf-8"?>
-<p:sld xmlns:a="http://schemas.openxmlformats.org/drawingml/2006/main" xmlns:p="http://schemas.openxmlformats.org/presentationml/2006/main" xmlns:r="http://schemas.openxmlformats.org/officeDocument/2006/relationships">
+<p:sld xmlns:a="http://schemas.openxmlformats.org/drawingml/2006/main" xmlns:r="http://schemas.openxmlformats.org/officeDocument/2006/relationships" xmlns:p="http://schemas.openxmlformats.org/presentationml/2006/main">
   <p:cSld>
     <p:spTree>
       <p:nvGrpSpPr>
@@ -19235,7 +19989,14 @@
         <p:cNvGrpSpPr/>
         <p:nvPr/>
       </p:nvGrpSpPr>
-      <p:grpSpPr/>
+      <p:grpSpPr>
+        <a:xfrm>
+          <a:off x="0" y="0"/>
+          <a:ext cx="0" cy="0"/>
+          <a:chOff x="0" y="0"/>
+          <a:chExt cx="0" cy="0"/>
+        </a:xfrm>
+      </p:grpSpPr>
       <p:sp>
         <p:nvSpPr>
           <p:cNvPr id="2" name="Rectangle 1"/>
@@ -19277,6 +20038,7 @@
           <a:lstStyle/>
           <a:p>
             <a:pPr algn="ctr"/>
+            <a:endParaRPr/>
           </a:p>
         </p:txBody>
       </p:sp>
@@ -19305,7 +20067,7 @@
                 <a:srgbClr val="73787E"/>
               </a:gs>
             </a:gsLst>
-            <a:lin scaled="0" ang="18900000"/>
+            <a:lin ang="18900000" scaled="0"/>
           </a:gradFill>
           <a:ln>
             <a:noFill/>
@@ -19337,6 +20099,7 @@
           <a:lstStyle/>
           <a:p>
             <a:pPr algn="ctr"/>
+            <a:endParaRPr/>
           </a:p>
         </p:txBody>
       </p:sp>
@@ -19406,7 +20169,7 @@
                 <a:srgbClr val="FFFFFF"/>
               </a:gs>
             </a:gsLst>
-            <a:lin scaled="0" ang="0"/>
+            <a:lin ang="0" scaled="0"/>
           </a:gradFill>
           <a:ln>
             <a:noFill/>
@@ -19432,6 +20195,7 @@
           <a:lstStyle/>
           <a:p>
             <a:pPr algn="ctr"/>
+            <a:endParaRPr/>
           </a:p>
         </p:txBody>
       </p:sp>
@@ -19572,6 +20336,7 @@
           <a:lstStyle/>
           <a:p>
             <a:pPr algn="ctr"/>
+            <a:endParaRPr/>
           </a:p>
         </p:txBody>
       </p:sp>
@@ -19740,10 +20505,34 @@
                 <a:tableStyleId>{5C22544A-7EE6-4342-B048-85BDC9FD1C3A}</a:tableStyleId>
               </a:tblPr>
               <a:tblGrid>
-                <a:gridCol w="822960"/>
-                <a:gridCol w="822960"/>
-                <a:gridCol w="914400"/>
-                <a:gridCol w="2971800"/>
+                <a:gridCol w="822960">
+                  <a:extLst>
+                    <a:ext uri="{9D8B030D-6E8A-4147-A177-3AD203B41FA5}">
+                      <a16:colId xmlns:a16="http://schemas.microsoft.com/office/drawing/2014/main" val="20000"/>
+                    </a:ext>
+                  </a:extLst>
+                </a:gridCol>
+                <a:gridCol w="822960">
+                  <a:extLst>
+                    <a:ext uri="{9D8B030D-6E8A-4147-A177-3AD203B41FA5}">
+                      <a16:colId xmlns:a16="http://schemas.microsoft.com/office/drawing/2014/main" val="20001"/>
+                    </a:ext>
+                  </a:extLst>
+                </a:gridCol>
+                <a:gridCol w="914400">
+                  <a:extLst>
+                    <a:ext uri="{9D8B030D-6E8A-4147-A177-3AD203B41FA5}">
+                      <a16:colId xmlns:a16="http://schemas.microsoft.com/office/drawing/2014/main" val="20002"/>
+                    </a:ext>
+                  </a:extLst>
+                </a:gridCol>
+                <a:gridCol w="2971800">
+                  <a:extLst>
+                    <a:ext uri="{9D8B030D-6E8A-4147-A177-3AD203B41FA5}">
+                      <a16:colId xmlns:a16="http://schemas.microsoft.com/office/drawing/2014/main" val="20003"/>
+                    </a:ext>
+                  </a:extLst>
+                </a:gridCol>
               </a:tblGrid>
               <a:tr h="438912">
                 <a:tc>
@@ -19768,7 +20557,7 @@
                       </a:r>
                     </a:p>
                   </a:txBody>
-                  <a:tcPr marT="27432" marB="27432" marL="73152" marR="73152" anchor="ctr">
+                  <a:tcPr marL="73152" marR="73152" marT="27432" marB="27432" anchor="ctr">
                     <a:solidFill>
                       <a:srgbClr val="33393F"/>
                     </a:solidFill>
@@ -19796,7 +20585,7 @@
                       </a:r>
                     </a:p>
                   </a:txBody>
-                  <a:tcPr marT="27432" marB="27432" marL="73152" marR="73152" anchor="ctr">
+                  <a:tcPr marL="73152" marR="73152" marT="27432" marB="27432" anchor="ctr">
                     <a:solidFill>
                       <a:srgbClr val="33393F"/>
                     </a:solidFill>
@@ -19824,7 +20613,7 @@
                       </a:r>
                     </a:p>
                   </a:txBody>
-                  <a:tcPr marT="27432" marB="27432" marL="73152" marR="73152" anchor="ctr">
+                  <a:tcPr marL="73152" marR="73152" marT="27432" marB="27432" anchor="ctr">
                     <a:solidFill>
                       <a:srgbClr val="33393F"/>
                     </a:solidFill>
@@ -19852,12 +20641,17 @@
                       </a:r>
                     </a:p>
                   </a:txBody>
-                  <a:tcPr marT="27432" marB="27432" marL="73152" marR="73152" anchor="ctr">
+                  <a:tcPr marL="73152" marR="73152" marT="27432" marB="27432" anchor="ctr">
                     <a:solidFill>
                       <a:srgbClr val="33393F"/>
                     </a:solidFill>
                   </a:tcPr>
                 </a:tc>
+                <a:extLst>
+                  <a:ext uri="{0D108BD9-81ED-4DB2-BD59-A6C34878D82A}">
+                    <a16:rowId xmlns:a16="http://schemas.microsoft.com/office/drawing/2014/main" val="10000"/>
+                  </a:ext>
+                </a:extLst>
               </a:tr>
               <a:tr h="438912">
                 <a:tc>
@@ -19882,7 +20676,7 @@
                       </a:r>
                     </a:p>
                   </a:txBody>
-                  <a:tcPr marT="27432" marB="27432" marL="73152" marR="73152" anchor="ctr">
+                  <a:tcPr marL="73152" marR="73152" marT="27432" marB="27432" anchor="ctr">
                     <a:solidFill>
                       <a:srgbClr val="FFFFFF"/>
                     </a:solidFill>
@@ -19910,7 +20704,7 @@
                       </a:r>
                     </a:p>
                   </a:txBody>
-                  <a:tcPr marT="27432" marB="27432" marL="73152" marR="73152" anchor="ctr">
+                  <a:tcPr marL="73152" marR="73152" marT="27432" marB="27432" anchor="ctr">
                     <a:solidFill>
                       <a:srgbClr val="FFFFFF"/>
                     </a:solidFill>
@@ -19938,7 +20732,7 @@
                       </a:r>
                     </a:p>
                   </a:txBody>
-                  <a:tcPr marT="27432" marB="27432" marL="73152" marR="73152" anchor="ctr">
+                  <a:tcPr marL="73152" marR="73152" marT="27432" marB="27432" anchor="ctr">
                     <a:solidFill>
                       <a:srgbClr val="FFFFFF"/>
                     </a:solidFill>
@@ -19966,12 +20760,17 @@
                       </a:r>
                     </a:p>
                   </a:txBody>
-                  <a:tcPr marT="27432" marB="27432" marL="73152" marR="73152" anchor="ctr">
+                  <a:tcPr marL="73152" marR="73152" marT="27432" marB="27432" anchor="ctr">
                     <a:solidFill>
                       <a:srgbClr val="FFFFFF"/>
                     </a:solidFill>
                   </a:tcPr>
                 </a:tc>
+                <a:extLst>
+                  <a:ext uri="{0D108BD9-81ED-4DB2-BD59-A6C34878D82A}">
+                    <a16:rowId xmlns:a16="http://schemas.microsoft.com/office/drawing/2014/main" val="10001"/>
+                  </a:ext>
+                </a:extLst>
               </a:tr>
               <a:tr h="438912">
                 <a:tc>
@@ -19996,7 +20795,7 @@
                       </a:r>
                     </a:p>
                   </a:txBody>
-                  <a:tcPr marT="27432" marB="27432" marL="73152" marR="73152" anchor="ctr">
+                  <a:tcPr marL="73152" marR="73152" marT="27432" marB="27432" anchor="ctr">
                     <a:solidFill>
                       <a:srgbClr val="E3E5E8"/>
                     </a:solidFill>
@@ -20024,7 +20823,7 @@
                       </a:r>
                     </a:p>
                   </a:txBody>
-                  <a:tcPr marT="27432" marB="27432" marL="73152" marR="73152" anchor="ctr">
+                  <a:tcPr marL="73152" marR="73152" marT="27432" marB="27432" anchor="ctr">
                     <a:solidFill>
                       <a:srgbClr val="E3E5E8"/>
                     </a:solidFill>
@@ -20052,7 +20851,7 @@
                       </a:r>
                     </a:p>
                   </a:txBody>
-                  <a:tcPr marT="27432" marB="27432" marL="73152" marR="73152" anchor="ctr">
+                  <a:tcPr marL="73152" marR="73152" marT="27432" marB="27432" anchor="ctr">
                     <a:solidFill>
                       <a:srgbClr val="E3E5E8"/>
                     </a:solidFill>
@@ -20080,12 +20879,17 @@
                       </a:r>
                     </a:p>
                   </a:txBody>
-                  <a:tcPr marT="27432" marB="27432" marL="73152" marR="73152" anchor="ctr">
+                  <a:tcPr marL="73152" marR="73152" marT="27432" marB="27432" anchor="ctr">
                     <a:solidFill>
                       <a:srgbClr val="E3E5E8"/>
                     </a:solidFill>
                   </a:tcPr>
                 </a:tc>
+                <a:extLst>
+                  <a:ext uri="{0D108BD9-81ED-4DB2-BD59-A6C34878D82A}">
+                    <a16:rowId xmlns:a16="http://schemas.microsoft.com/office/drawing/2014/main" val="10002"/>
+                  </a:ext>
+                </a:extLst>
               </a:tr>
               <a:tr h="438912">
                 <a:tc>
@@ -20110,7 +20914,7 @@
                       </a:r>
                     </a:p>
                   </a:txBody>
-                  <a:tcPr marT="27432" marB="27432" marL="73152" marR="73152" anchor="ctr">
+                  <a:tcPr marL="73152" marR="73152" marT="27432" marB="27432" anchor="ctr">
                     <a:solidFill>
                       <a:srgbClr val="FFFFFF"/>
                     </a:solidFill>
@@ -20138,7 +20942,7 @@
                       </a:r>
                     </a:p>
                   </a:txBody>
-                  <a:tcPr marT="27432" marB="27432" marL="73152" marR="73152" anchor="ctr">
+                  <a:tcPr marL="73152" marR="73152" marT="27432" marB="27432" anchor="ctr">
                     <a:solidFill>
                       <a:srgbClr val="FFFFFF"/>
                     </a:solidFill>
@@ -20166,7 +20970,7 @@
                       </a:r>
                     </a:p>
                   </a:txBody>
-                  <a:tcPr marT="27432" marB="27432" marL="73152" marR="73152" anchor="ctr">
+                  <a:tcPr marL="73152" marR="73152" marT="27432" marB="27432" anchor="ctr">
                     <a:solidFill>
                       <a:srgbClr val="FFFFFF"/>
                     </a:solidFill>
@@ -20194,12 +20998,17 @@
                       </a:r>
                     </a:p>
                   </a:txBody>
-                  <a:tcPr marT="27432" marB="27432" marL="73152" marR="73152" anchor="ctr">
+                  <a:tcPr marL="73152" marR="73152" marT="27432" marB="27432" anchor="ctr">
                     <a:solidFill>
                       <a:srgbClr val="FFFFFF"/>
                     </a:solidFill>
                   </a:tcPr>
                 </a:tc>
+                <a:extLst>
+                  <a:ext uri="{0D108BD9-81ED-4DB2-BD59-A6C34878D82A}">
+                    <a16:rowId xmlns:a16="http://schemas.microsoft.com/office/drawing/2014/main" val="10003"/>
+                  </a:ext>
+                </a:extLst>
               </a:tr>
             </a:tbl>
           </a:graphicData>
@@ -20256,6 +21065,7 @@
           <a:lstStyle/>
           <a:p>
             <a:pPr algn="ctr"/>
+            <a:endParaRPr/>
           </a:p>
         </p:txBody>
       </p:sp>
@@ -20394,7 +21204,7 @@
 </file>
 
 <file path=ppt/slides/slide9.xml><?xml version="1.0" encoding="utf-8"?>
-<p:sld xmlns:a="http://schemas.openxmlformats.org/drawingml/2006/main" xmlns:p="http://schemas.openxmlformats.org/presentationml/2006/main" xmlns:r="http://schemas.openxmlformats.org/officeDocument/2006/relationships">
+<p:sld xmlns:a="http://schemas.openxmlformats.org/drawingml/2006/main" xmlns:r="http://schemas.openxmlformats.org/officeDocument/2006/relationships" xmlns:p="http://schemas.openxmlformats.org/presentationml/2006/main">
   <p:cSld>
     <p:spTree>
       <p:nvGrpSpPr>
@@ -20402,7 +21212,14 @@
         <p:cNvGrpSpPr/>
         <p:nvPr/>
       </p:nvGrpSpPr>
-      <p:grpSpPr/>
+      <p:grpSpPr>
+        <a:xfrm>
+          <a:off x="0" y="0"/>
+          <a:ext cx="0" cy="0"/>
+          <a:chOff x="0" y="0"/>
+          <a:chExt cx="0" cy="0"/>
+        </a:xfrm>
+      </p:grpSpPr>
       <p:sp>
         <p:nvSpPr>
           <p:cNvPr id="2" name="Rectangle 1"/>
@@ -20444,6 +21261,7 @@
           <a:lstStyle/>
           <a:p>
             <a:pPr algn="ctr"/>
+            <a:endParaRPr/>
           </a:p>
         </p:txBody>
       </p:sp>
@@ -20472,7 +21290,7 @@
                 <a:srgbClr val="73787E"/>
               </a:gs>
             </a:gsLst>
-            <a:lin scaled="0" ang="18900000"/>
+            <a:lin ang="18900000" scaled="0"/>
           </a:gradFill>
           <a:ln>
             <a:noFill/>
@@ -20504,6 +21322,7 @@
           <a:lstStyle/>
           <a:p>
             <a:pPr algn="ctr"/>
+            <a:endParaRPr/>
           </a:p>
         </p:txBody>
       </p:sp>
@@ -20573,7 +21392,7 @@
                 <a:srgbClr val="FFFFFF"/>
               </a:gs>
             </a:gsLst>
-            <a:lin scaled="0" ang="0"/>
+            <a:lin ang="0" scaled="0"/>
           </a:gradFill>
           <a:ln>
             <a:noFill/>
@@ -20599,6 +21418,7 @@
           <a:lstStyle/>
           <a:p>
             <a:pPr algn="ctr"/>
+            <a:endParaRPr/>
           </a:p>
         </p:txBody>
       </p:sp>
@@ -20756,7 +21576,7 @@
                 <a:srgbClr val="4A4F55"/>
               </a:gs>
             </a:gsLst>
-            <a:lin scaled="0" ang="14700000"/>
+            <a:lin ang="14700000" scaled="0"/>
           </a:gradFill>
           <a:ln>
             <a:noFill/>
@@ -20788,6 +21608,7 @@
           <a:lstStyle/>
           <a:p>
             <a:pPr algn="ctr"/>
+            <a:endParaRPr/>
           </a:p>
         </p:txBody>
       </p:sp>
@@ -20905,6 +21726,7 @@
           <a:lstStyle/>
           <a:p>
             <a:pPr algn="ctr"/>
+            <a:endParaRPr/>
           </a:p>
         </p:txBody>
       </p:sp>
@@ -21062,6 +21884,7 @@
           <a:lstStyle/>
           <a:p>
             <a:pPr algn="ctr"/>
+            <a:endParaRPr/>
           </a:p>
         </p:txBody>
       </p:sp>

--- a/04_제출물/데이터분석_결과보고서.pptx
+++ b/04_제출물/데이터분석_결과보고서.pptx
@@ -3109,51 +3109,6 @@
           <a:chExt cx="0" cy="0"/>
         </a:xfrm>
       </p:grpSpPr>
-      <p:sp>
-        <p:nvSpPr>
-          <p:cNvPr id="2" name="Rectangle 1"/>
-          <p:cNvSpPr/>
-          <p:nvPr/>
-        </p:nvSpPr>
-        <p:spPr>
-          <a:xfrm>
-            <a:off x="0" y="0"/>
-            <a:ext cx="12191695" cy="6858000"/>
-          </a:xfrm>
-          <a:prstGeom prst="rect">
-            <a:avLst/>
-          </a:prstGeom>
-          <a:solidFill>
-            <a:srgbClr val="FFFFFF"/>
-          </a:solidFill>
-          <a:ln>
-            <a:noFill/>
-          </a:ln>
-          <a:effectLst/>
-        </p:spPr>
-        <p:style>
-          <a:lnRef idx="1">
-            <a:schemeClr val="accent1"/>
-          </a:lnRef>
-          <a:fillRef idx="3">
-            <a:schemeClr val="accent1"/>
-          </a:fillRef>
-          <a:effectRef idx="2">
-            <a:schemeClr val="accent1"/>
-          </a:effectRef>
-          <a:fontRef idx="minor">
-            <a:schemeClr val="lt1"/>
-          </a:fontRef>
-        </p:style>
-        <p:txBody>
-          <a:bodyPr rtlCol="0" anchor="ctr"/>
-          <a:lstStyle/>
-          <a:p>
-            <a:pPr algn="ctr"/>
-            <a:endParaRPr/>
-          </a:p>
-        </p:txBody>
-      </p:sp>
       <p:sp>
         <p:nvSpPr>
           <p:cNvPr id="3" name="Rounded Rectangle 2"/>
@@ -12504,8 +12459,8 @@
         </p:nvSpPr>
         <p:spPr>
           <a:xfrm>
-            <a:off x="960120" y="274320"/>
-            <a:ext cx="9692640" cy="685800"/>
+            <a:off x="960120" y="399564"/>
+            <a:ext cx="9692640" cy="435312"/>
           </a:xfrm>
           <a:prstGeom prst="rect">
             <a:avLst/>
@@ -12527,15 +12482,142 @@
               </a:spcAft>
             </a:pPr>
             <a:r>
-              <a:rPr sz="2150" b="1">
-                <a:solidFill>
-                  <a:srgbClr val="1C1C1E"/>
-                </a:solidFill>
-                <a:latin typeface="맑은 고딕"/>
-                <a:ea typeface="맑은 고딕"/>
-              </a:rPr>
-              <a:t>출발점 — 의료 공백은 정말 "자원이 모자라서" 생기는가</a:t>
-            </a:r>
+              <a:rPr lang="ko-KR" altLang="en-US" sz="2150" b="1" dirty="0">
+                <a:solidFill>
+                  <a:srgbClr val="1C1C1E"/>
+                </a:solidFill>
+                <a:latin typeface="맑은 고딕"/>
+                <a:ea typeface="맑은 고딕"/>
+              </a:rPr>
+              <a:t>아이디어의 발단</a:t>
+            </a:r>
+            <a:r>
+              <a:rPr sz="2150" b="1" dirty="0">
+                <a:solidFill>
+                  <a:srgbClr val="1C1C1E"/>
+                </a:solidFill>
+                <a:latin typeface="맑은 고딕"/>
+                <a:ea typeface="맑은 고딕"/>
+              </a:rPr>
+              <a:t> — </a:t>
+            </a:r>
+            <a:r>
+              <a:rPr sz="2150" b="1" dirty="0" err="1">
+                <a:solidFill>
+                  <a:srgbClr val="1C1C1E"/>
+                </a:solidFill>
+                <a:latin typeface="맑은 고딕"/>
+                <a:ea typeface="맑은 고딕"/>
+              </a:rPr>
+              <a:t>의료</a:t>
+            </a:r>
+            <a:r>
+              <a:rPr sz="2150" b="1" dirty="0">
+                <a:solidFill>
+                  <a:srgbClr val="1C1C1E"/>
+                </a:solidFill>
+                <a:latin typeface="맑은 고딕"/>
+                <a:ea typeface="맑은 고딕"/>
+              </a:rPr>
+              <a:t> </a:t>
+            </a:r>
+            <a:r>
+              <a:rPr sz="2150" b="1" dirty="0" err="1">
+                <a:solidFill>
+                  <a:srgbClr val="1C1C1E"/>
+                </a:solidFill>
+                <a:latin typeface="맑은 고딕"/>
+                <a:ea typeface="맑은 고딕"/>
+              </a:rPr>
+              <a:t>공백은</a:t>
+            </a:r>
+            <a:r>
+              <a:rPr sz="2150" b="1" dirty="0">
+                <a:solidFill>
+                  <a:srgbClr val="1C1C1E"/>
+                </a:solidFill>
+                <a:latin typeface="맑은 고딕"/>
+                <a:ea typeface="맑은 고딕"/>
+              </a:rPr>
+              <a:t> </a:t>
+            </a:r>
+            <a:r>
+              <a:rPr sz="2150" b="1" dirty="0" err="1">
+                <a:solidFill>
+                  <a:srgbClr val="1C1C1E"/>
+                </a:solidFill>
+                <a:latin typeface="맑은 고딕"/>
+                <a:ea typeface="맑은 고딕"/>
+              </a:rPr>
+              <a:t>정말</a:t>
+            </a:r>
+            <a:r>
+              <a:rPr sz="2150" b="1" dirty="0">
+                <a:solidFill>
+                  <a:srgbClr val="1C1C1E"/>
+                </a:solidFill>
+                <a:latin typeface="맑은 고딕"/>
+                <a:ea typeface="맑은 고딕"/>
+              </a:rPr>
+              <a:t> "</a:t>
+            </a:r>
+            <a:r>
+              <a:rPr sz="2150" b="1" dirty="0" err="1">
+                <a:solidFill>
+                  <a:srgbClr val="1C1C1E"/>
+                </a:solidFill>
+                <a:latin typeface="맑은 고딕"/>
+                <a:ea typeface="맑은 고딕"/>
+              </a:rPr>
+              <a:t>자원이</a:t>
+            </a:r>
+            <a:r>
+              <a:rPr sz="2150" b="1" dirty="0">
+                <a:solidFill>
+                  <a:srgbClr val="1C1C1E"/>
+                </a:solidFill>
+                <a:latin typeface="맑은 고딕"/>
+                <a:ea typeface="맑은 고딕"/>
+              </a:rPr>
+              <a:t> </a:t>
+            </a:r>
+            <a:r>
+              <a:rPr sz="2150" b="1" dirty="0" err="1">
+                <a:solidFill>
+                  <a:srgbClr val="1C1C1E"/>
+                </a:solidFill>
+                <a:latin typeface="맑은 고딕"/>
+                <a:ea typeface="맑은 고딕"/>
+              </a:rPr>
+              <a:t>모자라서</a:t>
+            </a:r>
+            <a:r>
+              <a:rPr sz="2150" b="1" dirty="0">
+                <a:solidFill>
+                  <a:srgbClr val="1C1C1E"/>
+                </a:solidFill>
+                <a:latin typeface="맑은 고딕"/>
+                <a:ea typeface="맑은 고딕"/>
+              </a:rPr>
+              <a:t>" </a:t>
+            </a:r>
+            <a:r>
+              <a:rPr sz="2150" b="1" dirty="0" err="1">
+                <a:solidFill>
+                  <a:srgbClr val="1C1C1E"/>
+                </a:solidFill>
+                <a:latin typeface="맑은 고딕"/>
+                <a:ea typeface="맑은 고딕"/>
+              </a:rPr>
+              <a:t>생기는가</a:t>
+            </a:r>
+            <a:endParaRPr sz="2150" b="1" dirty="0">
+              <a:solidFill>
+                <a:srgbClr val="1C1C1E"/>
+              </a:solidFill>
+              <a:latin typeface="맑은 고딕"/>
+              <a:ea typeface="맑은 고딕"/>
+            </a:endParaRPr>
           </a:p>
         </p:txBody>
       </p:sp>
@@ -12644,7 +12726,7 @@
         <p:spPr>
           <a:xfrm>
             <a:off x="548640" y="1097280"/>
-            <a:ext cx="11155680" cy="384048"/>
+            <a:ext cx="11155680" cy="291747"/>
           </a:xfrm>
           <a:prstGeom prst="rect">
             <a:avLst/>
@@ -12666,15 +12748,122 @@
               </a:spcAft>
             </a:pPr>
             <a:r>
-              <a:rPr sz="1250" b="0">
+              <a:rPr lang="ko-KR" altLang="en-US" sz="1250" b="0" dirty="0">
                 <a:solidFill>
                   <a:srgbClr val="767A7F"/>
                 </a:solidFill>
                 <a:latin typeface="맑은 고딕"/>
                 <a:ea typeface="맑은 고딕"/>
               </a:rPr>
-              <a:t>이 연구가 어디서 시작했는지, 그리고 왜 "제도"를 분석 대상으로 삼았는지</a:t>
-            </a:r>
+              <a:t>본 연구의 시작점</a:t>
+            </a:r>
+            <a:r>
+              <a:rPr lang="en-US" altLang="ko-KR" sz="1250" b="0" dirty="0">
+                <a:solidFill>
+                  <a:srgbClr val="767A7F"/>
+                </a:solidFill>
+                <a:latin typeface="맑은 고딕"/>
+                <a:ea typeface="맑은 고딕"/>
+              </a:rPr>
+              <a:t>: </a:t>
+            </a:r>
+            <a:r>
+              <a:rPr sz="1250" b="0" dirty="0">
+                <a:solidFill>
+                  <a:srgbClr val="767A7F"/>
+                </a:solidFill>
+                <a:latin typeface="맑은 고딕"/>
+                <a:ea typeface="맑은 고딕"/>
+              </a:rPr>
+              <a:t>왜 "</a:t>
+            </a:r>
+            <a:r>
+              <a:rPr sz="1250" b="0" dirty="0" err="1">
+                <a:solidFill>
+                  <a:srgbClr val="767A7F"/>
+                </a:solidFill>
+                <a:latin typeface="맑은 고딕"/>
+                <a:ea typeface="맑은 고딕"/>
+              </a:rPr>
+              <a:t>제도"를</a:t>
+            </a:r>
+            <a:r>
+              <a:rPr sz="1250" b="0" dirty="0">
+                <a:solidFill>
+                  <a:srgbClr val="767A7F"/>
+                </a:solidFill>
+                <a:latin typeface="맑은 고딕"/>
+                <a:ea typeface="맑은 고딕"/>
+              </a:rPr>
+              <a:t> </a:t>
+            </a:r>
+            <a:r>
+              <a:rPr sz="1250" b="0" dirty="0" err="1">
+                <a:solidFill>
+                  <a:srgbClr val="767A7F"/>
+                </a:solidFill>
+                <a:latin typeface="맑은 고딕"/>
+                <a:ea typeface="맑은 고딕"/>
+              </a:rPr>
+              <a:t>분석</a:t>
+            </a:r>
+            <a:r>
+              <a:rPr sz="1250" b="0" dirty="0">
+                <a:solidFill>
+                  <a:srgbClr val="767A7F"/>
+                </a:solidFill>
+                <a:latin typeface="맑은 고딕"/>
+                <a:ea typeface="맑은 고딕"/>
+              </a:rPr>
+              <a:t> </a:t>
+            </a:r>
+            <a:r>
+              <a:rPr sz="1250" b="0" dirty="0" err="1">
+                <a:solidFill>
+                  <a:srgbClr val="767A7F"/>
+                </a:solidFill>
+                <a:latin typeface="맑은 고딕"/>
+                <a:ea typeface="맑은 고딕"/>
+              </a:rPr>
+              <a:t>대상으로</a:t>
+            </a:r>
+            <a:r>
+              <a:rPr sz="1250" b="0" dirty="0">
+                <a:solidFill>
+                  <a:srgbClr val="767A7F"/>
+                </a:solidFill>
+                <a:latin typeface="맑은 고딕"/>
+                <a:ea typeface="맑은 고딕"/>
+              </a:rPr>
+              <a:t> </a:t>
+            </a:r>
+            <a:r>
+              <a:rPr sz="1250" b="0" dirty="0" err="1">
+                <a:solidFill>
+                  <a:srgbClr val="767A7F"/>
+                </a:solidFill>
+                <a:latin typeface="맑은 고딕"/>
+                <a:ea typeface="맑은 고딕"/>
+              </a:rPr>
+              <a:t>삼았는</a:t>
+            </a:r>
+            <a:r>
+              <a:rPr lang="ko-KR" altLang="en-US" sz="1250" b="0" dirty="0">
+                <a:solidFill>
+                  <a:srgbClr val="767A7F"/>
+                </a:solidFill>
+                <a:latin typeface="맑은 고딕"/>
+                <a:ea typeface="맑은 고딕"/>
+              </a:rPr>
+              <a:t>가</a:t>
+            </a:r>
+            <a:endParaRPr sz="1250" b="0" dirty="0">
+              <a:solidFill>
+                <a:srgbClr val="767A7F"/>
+              </a:solidFill>
+              <a:latin typeface="맑은 고딕"/>
+              <a:ea typeface="맑은 고딕"/>
+            </a:endParaRPr>
           </a:p>
         </p:txBody>
       </p:sp>
@@ -12785,7 +12974,7 @@
         <p:spPr>
           <a:xfrm>
             <a:off x="685800" y="1499616"/>
-            <a:ext cx="3246120" cy="1527048"/>
+            <a:ext cx="3246120" cy="933269"/>
           </a:xfrm>
           <a:prstGeom prst="rect">
             <a:avLst/>
@@ -12807,35 +12996,309 @@
               </a:spcAft>
             </a:pPr>
             <a:r>
-              <a:rPr sz="1300" b="1">
+              <a:rPr sz="1300" b="1" dirty="0">
                 <a:solidFill>
                   <a:srgbClr val="33393F"/>
                 </a:solidFill>
                 <a:latin typeface="맑은 고딕"/>
                 <a:ea typeface="맑은 고딕"/>
               </a:rPr>
-              <a:t>① 익숙한 진단</a:t>
-            </a:r>
-          </a:p>
-          <a:p>
-            <a:pPr marL="160020" indent="-160020">
-              <a:lnSpc>
-                <a:spcPct val="114000"/>
-              </a:lnSpc>
-              <a:spcAft>
-                <a:spcPts val="200"/>
-              </a:spcAft>
-            </a:pPr>
-            <a:r>
-              <a:rPr sz="1100" b="0">
-                <a:solidFill>
-                  <a:srgbClr val="1C1C1E"/>
-                </a:solidFill>
-                <a:latin typeface="맑은 고딕"/>
-                <a:ea typeface="맑은 고딕"/>
-              </a:rPr>
-              <a:t>• "지방에 분만실이 없다" — 해마다 반복되는 기사. 따라붙는 처방도 늘 같다: 의사를 늘리고 병원을 지어라</a:t>
-            </a:r>
+              <a:t>① </a:t>
+            </a:r>
+            <a:r>
+              <a:rPr lang="ko-KR" altLang="en-US" sz="1300" b="1" dirty="0">
+                <a:solidFill>
+                  <a:srgbClr val="33393F"/>
+                </a:solidFill>
+                <a:latin typeface="맑은 고딕"/>
+                <a:ea typeface="맑은 고딕"/>
+              </a:rPr>
+              <a:t>여전히 존재하는 분만취약지</a:t>
+            </a:r>
+            <a:endParaRPr lang="en-US" altLang="ko-KR" sz="1300" b="1" dirty="0">
+              <a:solidFill>
+                <a:srgbClr val="33393F"/>
+              </a:solidFill>
+              <a:latin typeface="맑은 고딕"/>
+              <a:ea typeface="맑은 고딕"/>
+            </a:endParaRPr>
+          </a:p>
+          <a:p>
+            <a:pPr>
+              <a:lnSpc>
+                <a:spcPct val="114000"/>
+              </a:lnSpc>
+              <a:spcAft>
+                <a:spcPts val="350"/>
+              </a:spcAft>
+            </a:pPr>
+            <a:r>
+              <a:rPr sz="1100" b="0" dirty="0">
+                <a:solidFill>
+                  <a:srgbClr val="1C1C1E"/>
+                </a:solidFill>
+                <a:latin typeface="맑은 고딕"/>
+                <a:ea typeface="맑은 고딕"/>
+              </a:rPr>
+              <a:t>• "</a:t>
+            </a:r>
+            <a:r>
+              <a:rPr sz="1100" b="0" dirty="0" err="1">
+                <a:solidFill>
+                  <a:srgbClr val="1C1C1E"/>
+                </a:solidFill>
+                <a:latin typeface="맑은 고딕"/>
+                <a:ea typeface="맑은 고딕"/>
+              </a:rPr>
+              <a:t>지방에</a:t>
+            </a:r>
+            <a:r>
+              <a:rPr sz="1100" b="0" dirty="0">
+                <a:solidFill>
+                  <a:srgbClr val="1C1C1E"/>
+                </a:solidFill>
+                <a:latin typeface="맑은 고딕"/>
+                <a:ea typeface="맑은 고딕"/>
+              </a:rPr>
+              <a:t> </a:t>
+            </a:r>
+            <a:r>
+              <a:rPr sz="1100" b="0" dirty="0" err="1">
+                <a:solidFill>
+                  <a:srgbClr val="1C1C1E"/>
+                </a:solidFill>
+                <a:latin typeface="맑은 고딕"/>
+                <a:ea typeface="맑은 고딕"/>
+              </a:rPr>
+              <a:t>분만실이</a:t>
+            </a:r>
+            <a:r>
+              <a:rPr sz="1100" b="0" dirty="0">
+                <a:solidFill>
+                  <a:srgbClr val="1C1C1E"/>
+                </a:solidFill>
+                <a:latin typeface="맑은 고딕"/>
+                <a:ea typeface="맑은 고딕"/>
+              </a:rPr>
+              <a:t> </a:t>
+            </a:r>
+            <a:r>
+              <a:rPr sz="1100" b="0" dirty="0" err="1">
+                <a:solidFill>
+                  <a:srgbClr val="1C1C1E"/>
+                </a:solidFill>
+                <a:latin typeface="맑은 고딕"/>
+                <a:ea typeface="맑은 고딕"/>
+              </a:rPr>
+              <a:t>없다</a:t>
+            </a:r>
+            <a:r>
+              <a:rPr sz="1100" b="0" dirty="0">
+                <a:solidFill>
+                  <a:srgbClr val="1C1C1E"/>
+                </a:solidFill>
+                <a:latin typeface="맑은 고딕"/>
+                <a:ea typeface="맑은 고딕"/>
+              </a:rPr>
+              <a:t>" — </a:t>
+            </a:r>
+            <a:r>
+              <a:rPr sz="1100" b="0" dirty="0" err="1">
+                <a:solidFill>
+                  <a:srgbClr val="1C1C1E"/>
+                </a:solidFill>
+                <a:latin typeface="맑은 고딕"/>
+                <a:ea typeface="맑은 고딕"/>
+              </a:rPr>
+              <a:t>해마다</a:t>
+            </a:r>
+            <a:r>
+              <a:rPr sz="1100" b="0" dirty="0">
+                <a:solidFill>
+                  <a:srgbClr val="1C1C1E"/>
+                </a:solidFill>
+                <a:latin typeface="맑은 고딕"/>
+                <a:ea typeface="맑은 고딕"/>
+              </a:rPr>
+              <a:t> </a:t>
+            </a:r>
+            <a:r>
+              <a:rPr sz="1100" b="0" dirty="0" err="1">
+                <a:solidFill>
+                  <a:srgbClr val="1C1C1E"/>
+                </a:solidFill>
+                <a:latin typeface="맑은 고딕"/>
+                <a:ea typeface="맑은 고딕"/>
+              </a:rPr>
+              <a:t>반복되는</a:t>
+            </a:r>
+            <a:r>
+              <a:rPr sz="1100" b="0" dirty="0">
+                <a:solidFill>
+                  <a:srgbClr val="1C1C1E"/>
+                </a:solidFill>
+                <a:latin typeface="맑은 고딕"/>
+                <a:ea typeface="맑은 고딕"/>
+              </a:rPr>
+              <a:t> </a:t>
+            </a:r>
+            <a:r>
+              <a:rPr sz="1100" b="0" dirty="0" err="1">
+                <a:solidFill>
+                  <a:srgbClr val="1C1C1E"/>
+                </a:solidFill>
+                <a:latin typeface="맑은 고딕"/>
+                <a:ea typeface="맑은 고딕"/>
+              </a:rPr>
+              <a:t>기사</a:t>
+            </a:r>
+            <a:r>
+              <a:rPr sz="1100" b="0" dirty="0">
+                <a:solidFill>
+                  <a:srgbClr val="1C1C1E"/>
+                </a:solidFill>
+                <a:latin typeface="맑은 고딕"/>
+                <a:ea typeface="맑은 고딕"/>
+              </a:rPr>
+              <a:t>. </a:t>
+            </a:r>
+            <a:r>
+              <a:rPr sz="1100" b="0" dirty="0" err="1">
+                <a:solidFill>
+                  <a:srgbClr val="1C1C1E"/>
+                </a:solidFill>
+                <a:latin typeface="맑은 고딕"/>
+                <a:ea typeface="맑은 고딕"/>
+              </a:rPr>
+              <a:t>따라붙는</a:t>
+            </a:r>
+            <a:r>
+              <a:rPr sz="1100" b="0" dirty="0">
+                <a:solidFill>
+                  <a:srgbClr val="1C1C1E"/>
+                </a:solidFill>
+                <a:latin typeface="맑은 고딕"/>
+                <a:ea typeface="맑은 고딕"/>
+              </a:rPr>
+              <a:t> </a:t>
+            </a:r>
+            <a:r>
+              <a:rPr sz="1100" b="0" dirty="0" err="1">
+                <a:solidFill>
+                  <a:srgbClr val="1C1C1E"/>
+                </a:solidFill>
+                <a:latin typeface="맑은 고딕"/>
+                <a:ea typeface="맑은 고딕"/>
+              </a:rPr>
+              <a:t>처방도</a:t>
+            </a:r>
+            <a:r>
+              <a:rPr sz="1100" b="0" dirty="0">
+                <a:solidFill>
+                  <a:srgbClr val="1C1C1E"/>
+                </a:solidFill>
+                <a:latin typeface="맑은 고딕"/>
+                <a:ea typeface="맑은 고딕"/>
+              </a:rPr>
+              <a:t> 늘 </a:t>
+            </a:r>
+            <a:r>
+              <a:rPr sz="1100" b="0" dirty="0" err="1">
+                <a:solidFill>
+                  <a:srgbClr val="1C1C1E"/>
+                </a:solidFill>
+                <a:latin typeface="맑은 고딕"/>
+                <a:ea typeface="맑은 고딕"/>
+              </a:rPr>
+              <a:t>같다</a:t>
+            </a:r>
+            <a:r>
+              <a:rPr sz="1100" b="0" dirty="0">
+                <a:solidFill>
+                  <a:srgbClr val="1C1C1E"/>
+                </a:solidFill>
+                <a:latin typeface="맑은 고딕"/>
+                <a:ea typeface="맑은 고딕"/>
+              </a:rPr>
+              <a:t>: </a:t>
+            </a:r>
+            <a:r>
+              <a:rPr sz="1100" b="0" dirty="0" err="1">
+                <a:solidFill>
+                  <a:srgbClr val="1C1C1E"/>
+                </a:solidFill>
+                <a:latin typeface="맑은 고딕"/>
+                <a:ea typeface="맑은 고딕"/>
+              </a:rPr>
+              <a:t>의사를</a:t>
+            </a:r>
+            <a:r>
+              <a:rPr sz="1100" b="0" dirty="0">
+                <a:solidFill>
+                  <a:srgbClr val="1C1C1E"/>
+                </a:solidFill>
+                <a:latin typeface="맑은 고딕"/>
+                <a:ea typeface="맑은 고딕"/>
+              </a:rPr>
+              <a:t> </a:t>
+            </a:r>
+            <a:r>
+              <a:rPr sz="1100" b="0" dirty="0" err="1">
+                <a:solidFill>
+                  <a:srgbClr val="1C1C1E"/>
+                </a:solidFill>
+                <a:latin typeface="맑은 고딕"/>
+                <a:ea typeface="맑은 고딕"/>
+              </a:rPr>
+              <a:t>늘리고</a:t>
+            </a:r>
+            <a:r>
+              <a:rPr sz="1100" b="0" dirty="0">
+                <a:solidFill>
+                  <a:srgbClr val="1C1C1E"/>
+                </a:solidFill>
+                <a:latin typeface="맑은 고딕"/>
+                <a:ea typeface="맑은 고딕"/>
+              </a:rPr>
+              <a:t> </a:t>
+            </a:r>
+            <a:r>
+              <a:rPr sz="1100" b="0" dirty="0" err="1">
+                <a:solidFill>
+                  <a:srgbClr val="1C1C1E"/>
+                </a:solidFill>
+                <a:latin typeface="맑은 고딕"/>
+                <a:ea typeface="맑은 고딕"/>
+              </a:rPr>
+              <a:t>병원을</a:t>
+            </a:r>
+            <a:r>
+              <a:rPr sz="1100" b="0" dirty="0">
+                <a:solidFill>
+                  <a:srgbClr val="1C1C1E"/>
+                </a:solidFill>
+                <a:latin typeface="맑은 고딕"/>
+                <a:ea typeface="맑은 고딕"/>
+              </a:rPr>
+              <a:t> </a:t>
+            </a:r>
+            <a:r>
+              <a:rPr sz="1100" b="0" dirty="0" err="1">
+                <a:solidFill>
+                  <a:srgbClr val="1C1C1E"/>
+                </a:solidFill>
+                <a:latin typeface="맑은 고딕"/>
+                <a:ea typeface="맑은 고딕"/>
+              </a:rPr>
+              <a:t>지어라</a:t>
+            </a:r>
+            <a:endParaRPr sz="1100" b="0" dirty="0">
+              <a:solidFill>
+                <a:srgbClr val="1C1C1E"/>
+              </a:solidFill>
+              <a:latin typeface="맑은 고딕"/>
+              <a:ea typeface="맑은 고딕"/>
+            </a:endParaRPr>
           </a:p>
         </p:txBody>
       </p:sp>
@@ -12925,15 +13388,52 @@
               </a:spcAft>
             </a:pPr>
             <a:r>
-              <a:rPr sz="1300" b="1">
+              <a:rPr sz="1300" b="1" dirty="0">
                 <a:solidFill>
                   <a:srgbClr val="33393F"/>
                 </a:solidFill>
                 <a:latin typeface="맑은 고딕"/>
                 <a:ea typeface="맑은 고딕"/>
               </a:rPr>
-              <a:t>② 그 처방이 선 전제</a:t>
-            </a:r>
+              <a:t>② 그 </a:t>
+            </a:r>
+            <a:r>
+              <a:rPr sz="1300" b="1" dirty="0" err="1">
+                <a:solidFill>
+                  <a:srgbClr val="33393F"/>
+                </a:solidFill>
+                <a:latin typeface="맑은 고딕"/>
+                <a:ea typeface="맑은 고딕"/>
+              </a:rPr>
+              <a:t>처방이</a:t>
+            </a:r>
+            <a:r>
+              <a:rPr sz="1300" b="1" dirty="0">
+                <a:solidFill>
+                  <a:srgbClr val="33393F"/>
+                </a:solidFill>
+                <a:latin typeface="맑은 고딕"/>
+                <a:ea typeface="맑은 고딕"/>
+              </a:rPr>
+              <a:t> 선 </a:t>
+            </a:r>
+            <a:r>
+              <a:rPr sz="1300" b="1" dirty="0" err="1">
+                <a:solidFill>
+                  <a:srgbClr val="33393F"/>
+                </a:solidFill>
+                <a:latin typeface="맑은 고딕"/>
+                <a:ea typeface="맑은 고딕"/>
+              </a:rPr>
+              <a:t>전제</a:t>
+            </a:r>
+            <a:endParaRPr sz="1300" b="1" dirty="0">
+              <a:solidFill>
+                <a:srgbClr val="33393F"/>
+              </a:solidFill>
+              <a:latin typeface="맑은 고딕"/>
+              <a:ea typeface="맑은 고딕"/>
+            </a:endParaRPr>
           </a:p>
           <a:p>
             <a:pPr marL="160020" indent="-160020">
@@ -12945,15 +13445,232 @@
               </a:spcAft>
             </a:pPr>
             <a:r>
-              <a:rPr sz="1100" b="0">
-                <a:solidFill>
-                  <a:srgbClr val="1C1C1E"/>
-                </a:solidFill>
-                <a:latin typeface="맑은 고딕"/>
-                <a:ea typeface="맑은 고딕"/>
-              </a:rPr>
-              <a:t>• 공백의 원인이 자원의 절대량 부족이라는 것. 사실이라면 답은 예산뿐이고, 데이터가 할 말은 없다</a:t>
-            </a:r>
+              <a:rPr sz="1100" b="0" dirty="0">
+                <a:solidFill>
+                  <a:srgbClr val="1C1C1E"/>
+                </a:solidFill>
+                <a:latin typeface="맑은 고딕"/>
+                <a:ea typeface="맑은 고딕"/>
+              </a:rPr>
+              <a:t>• </a:t>
+            </a:r>
+            <a:r>
+              <a:rPr sz="1100" b="0" dirty="0" err="1">
+                <a:solidFill>
+                  <a:srgbClr val="1C1C1E"/>
+                </a:solidFill>
+                <a:latin typeface="맑은 고딕"/>
+                <a:ea typeface="맑은 고딕"/>
+              </a:rPr>
+              <a:t>공백의</a:t>
+            </a:r>
+            <a:r>
+              <a:rPr sz="1100" b="0" dirty="0">
+                <a:solidFill>
+                  <a:srgbClr val="1C1C1E"/>
+                </a:solidFill>
+                <a:latin typeface="맑은 고딕"/>
+                <a:ea typeface="맑은 고딕"/>
+              </a:rPr>
+              <a:t> </a:t>
+            </a:r>
+            <a:r>
+              <a:rPr sz="1100" b="0" dirty="0" err="1">
+                <a:solidFill>
+                  <a:srgbClr val="1C1C1E"/>
+                </a:solidFill>
+                <a:latin typeface="맑은 고딕"/>
+                <a:ea typeface="맑은 고딕"/>
+              </a:rPr>
+              <a:t>원인이</a:t>
+            </a:r>
+            <a:r>
+              <a:rPr sz="1100" b="0" dirty="0">
+                <a:solidFill>
+                  <a:srgbClr val="1C1C1E"/>
+                </a:solidFill>
+                <a:latin typeface="맑은 고딕"/>
+                <a:ea typeface="맑은 고딕"/>
+              </a:rPr>
+              <a:t> </a:t>
+            </a:r>
+            <a:r>
+              <a:rPr sz="1100" b="0" dirty="0" err="1">
+                <a:solidFill>
+                  <a:srgbClr val="1C1C1E"/>
+                </a:solidFill>
+                <a:latin typeface="맑은 고딕"/>
+                <a:ea typeface="맑은 고딕"/>
+              </a:rPr>
+              <a:t>자원의</a:t>
+            </a:r>
+            <a:r>
+              <a:rPr sz="1100" b="0" dirty="0">
+                <a:solidFill>
+                  <a:srgbClr val="1C1C1E"/>
+                </a:solidFill>
+                <a:latin typeface="맑은 고딕"/>
+                <a:ea typeface="맑은 고딕"/>
+              </a:rPr>
+              <a:t> </a:t>
+            </a:r>
+            <a:r>
+              <a:rPr sz="1100" b="0" dirty="0" err="1">
+                <a:solidFill>
+                  <a:srgbClr val="1C1C1E"/>
+                </a:solidFill>
+                <a:latin typeface="맑은 고딕"/>
+                <a:ea typeface="맑은 고딕"/>
+              </a:rPr>
+              <a:t>절대량</a:t>
+            </a:r>
+            <a:r>
+              <a:rPr sz="1100" b="0" dirty="0">
+                <a:solidFill>
+                  <a:srgbClr val="1C1C1E"/>
+                </a:solidFill>
+                <a:latin typeface="맑은 고딕"/>
+                <a:ea typeface="맑은 고딕"/>
+              </a:rPr>
+              <a:t> </a:t>
+            </a:r>
+            <a:r>
+              <a:rPr sz="1100" b="0" dirty="0" err="1">
+                <a:solidFill>
+                  <a:srgbClr val="1C1C1E"/>
+                </a:solidFill>
+                <a:latin typeface="맑은 고딕"/>
+                <a:ea typeface="맑은 고딕"/>
+              </a:rPr>
+              <a:t>부족이라는</a:t>
+            </a:r>
+            <a:r>
+              <a:rPr sz="1100" b="0" dirty="0">
+                <a:solidFill>
+                  <a:srgbClr val="1C1C1E"/>
+                </a:solidFill>
+                <a:latin typeface="맑은 고딕"/>
+                <a:ea typeface="맑은 고딕"/>
+              </a:rPr>
+              <a:t> 것. </a:t>
+            </a:r>
+            <a:r>
+              <a:rPr sz="1100" b="0" dirty="0" err="1">
+                <a:solidFill>
+                  <a:srgbClr val="1C1C1E"/>
+                </a:solidFill>
+                <a:latin typeface="맑은 고딕"/>
+                <a:ea typeface="맑은 고딕"/>
+              </a:rPr>
+              <a:t>사실이라면</a:t>
+            </a:r>
+            <a:r>
+              <a:rPr sz="1100" b="0" dirty="0">
+                <a:solidFill>
+                  <a:srgbClr val="1C1C1E"/>
+                </a:solidFill>
+                <a:latin typeface="맑은 고딕"/>
+                <a:ea typeface="맑은 고딕"/>
+              </a:rPr>
+              <a:t> </a:t>
+            </a:r>
+            <a:r>
+              <a:rPr sz="1100" b="0" dirty="0" err="1">
+                <a:solidFill>
+                  <a:srgbClr val="1C1C1E"/>
+                </a:solidFill>
+                <a:latin typeface="맑은 고딕"/>
+                <a:ea typeface="맑은 고딕"/>
+              </a:rPr>
+              <a:t>답은</a:t>
+            </a:r>
+            <a:r>
+              <a:rPr sz="1100" b="0" dirty="0">
+                <a:solidFill>
+                  <a:srgbClr val="1C1C1E"/>
+                </a:solidFill>
+                <a:latin typeface="맑은 고딕"/>
+                <a:ea typeface="맑은 고딕"/>
+              </a:rPr>
+              <a:t> </a:t>
+            </a:r>
+            <a:r>
+              <a:rPr sz="1100" b="0" dirty="0" err="1">
+                <a:solidFill>
+                  <a:srgbClr val="1C1C1E"/>
+                </a:solidFill>
+                <a:latin typeface="맑은 고딕"/>
+                <a:ea typeface="맑은 고딕"/>
+              </a:rPr>
+              <a:t>예산뿐이고</a:t>
+            </a:r>
+            <a:r>
+              <a:rPr sz="1100" b="0" dirty="0">
+                <a:solidFill>
+                  <a:srgbClr val="1C1C1E"/>
+                </a:solidFill>
+                <a:latin typeface="맑은 고딕"/>
+                <a:ea typeface="맑은 고딕"/>
+              </a:rPr>
+              <a:t>, </a:t>
+            </a:r>
+            <a:r>
+              <a:rPr sz="1100" b="0" dirty="0" err="1">
+                <a:solidFill>
+                  <a:srgbClr val="1C1C1E"/>
+                </a:solidFill>
+                <a:latin typeface="맑은 고딕"/>
+                <a:ea typeface="맑은 고딕"/>
+              </a:rPr>
+              <a:t>데이터가</a:t>
+            </a:r>
+            <a:r>
+              <a:rPr sz="1100" b="0" dirty="0">
+                <a:solidFill>
+                  <a:srgbClr val="1C1C1E"/>
+                </a:solidFill>
+                <a:latin typeface="맑은 고딕"/>
+                <a:ea typeface="맑은 고딕"/>
+              </a:rPr>
+              <a:t> 할 </a:t>
+            </a:r>
+            <a:r>
+              <a:rPr sz="1100" b="0" dirty="0" err="1">
+                <a:solidFill>
+                  <a:srgbClr val="1C1C1E"/>
+                </a:solidFill>
+                <a:latin typeface="맑은 고딕"/>
+                <a:ea typeface="맑은 고딕"/>
+              </a:rPr>
+              <a:t>말은</a:t>
+            </a:r>
+            <a:r>
+              <a:rPr sz="1100" b="0" dirty="0">
+                <a:solidFill>
+                  <a:srgbClr val="1C1C1E"/>
+                </a:solidFill>
+                <a:latin typeface="맑은 고딕"/>
+                <a:ea typeface="맑은 고딕"/>
+              </a:rPr>
+              <a:t> </a:t>
+            </a:r>
+            <a:r>
+              <a:rPr sz="1100" b="0" dirty="0" err="1">
+                <a:solidFill>
+                  <a:srgbClr val="1C1C1E"/>
+                </a:solidFill>
+                <a:latin typeface="맑은 고딕"/>
+                <a:ea typeface="맑은 고딕"/>
+              </a:rPr>
+              <a:t>없다</a:t>
+            </a:r>
+            <a:endParaRPr sz="1100" b="0" dirty="0">
+              <a:solidFill>
+                <a:srgbClr val="1C1C1E"/>
+              </a:solidFill>
+              <a:latin typeface="맑은 고딕"/>
+              <a:ea typeface="맑은 고딕"/>
+            </a:endParaRPr>
           </a:p>
         </p:txBody>
       </p:sp>
@@ -13021,7 +13738,7 @@
         <p:spPr>
           <a:xfrm>
             <a:off x="8366760" y="1499616"/>
-            <a:ext cx="3246120" cy="1527048"/>
+            <a:ext cx="3246120" cy="933269"/>
           </a:xfrm>
           <a:prstGeom prst="rect">
             <a:avLst/>
@@ -13043,35 +13760,389 @@
               </a:spcAft>
             </a:pPr>
             <a:r>
-              <a:rPr sz="1300" b="1">
+              <a:rPr sz="1300" b="1" dirty="0">
                 <a:solidFill>
                   <a:srgbClr val="000000"/>
                 </a:solidFill>
                 <a:latin typeface="맑은 고딕"/>
                 <a:ea typeface="맑은 고딕"/>
               </a:rPr>
-              <a:t>③ 우리의 의심</a:t>
-            </a:r>
-          </a:p>
-          <a:p>
-            <a:pPr marL="160020" indent="-160020">
-              <a:lnSpc>
-                <a:spcPct val="114000"/>
-              </a:lnSpc>
-              <a:spcAft>
-                <a:spcPts val="200"/>
-              </a:spcAft>
-            </a:pPr>
-            <a:r>
-              <a:rPr sz="1100" b="0">
-                <a:solidFill>
-                  <a:srgbClr val="1C1C1E"/>
-                </a:solidFill>
-                <a:latin typeface="맑은 고딕"/>
-                <a:ea typeface="맑은 고딕"/>
-              </a:rPr>
-              <a:t>• 자원이 없는 것과, 있는 자원이 필요한 곳에 닿지 않는 것은 다른 문제다. 뒤쪽이라면 예산 없이도 줄일 수 있다</a:t>
-            </a:r>
+              <a:t>③ </a:t>
+            </a:r>
+            <a:r>
+              <a:rPr lang="ko-KR" altLang="en-US" sz="1300" b="1" dirty="0">
+                <a:solidFill>
+                  <a:srgbClr val="000000"/>
+                </a:solidFill>
+                <a:latin typeface="맑은 고딕"/>
+                <a:ea typeface="맑은 고딕"/>
+              </a:rPr>
+              <a:t>해결할 수 있는 문제</a:t>
+            </a:r>
+            <a:endParaRPr lang="en-US" altLang="ko-KR" sz="1300" b="1" dirty="0">
+              <a:solidFill>
+                <a:srgbClr val="000000"/>
+              </a:solidFill>
+              <a:latin typeface="맑은 고딕"/>
+              <a:ea typeface="맑은 고딕"/>
+            </a:endParaRPr>
+          </a:p>
+          <a:p>
+            <a:pPr>
+              <a:lnSpc>
+                <a:spcPct val="114000"/>
+              </a:lnSpc>
+              <a:spcAft>
+                <a:spcPts val="350"/>
+              </a:spcAft>
+            </a:pPr>
+            <a:r>
+              <a:rPr sz="1100" b="0" dirty="0">
+                <a:solidFill>
+                  <a:srgbClr val="1C1C1E"/>
+                </a:solidFill>
+                <a:latin typeface="맑은 고딕"/>
+                <a:ea typeface="맑은 고딕"/>
+              </a:rPr>
+              <a:t>• </a:t>
+            </a:r>
+            <a:r>
+              <a:rPr sz="1100" b="0" dirty="0" err="1">
+                <a:solidFill>
+                  <a:srgbClr val="1C1C1E"/>
+                </a:solidFill>
+                <a:latin typeface="맑은 고딕"/>
+                <a:ea typeface="맑은 고딕"/>
+              </a:rPr>
+              <a:t>자원이</a:t>
+            </a:r>
+            <a:r>
+              <a:rPr sz="1100" b="0" dirty="0">
+                <a:solidFill>
+                  <a:srgbClr val="1C1C1E"/>
+                </a:solidFill>
+                <a:latin typeface="맑은 고딕"/>
+                <a:ea typeface="맑은 고딕"/>
+              </a:rPr>
+              <a:t> </a:t>
+            </a:r>
+            <a:r>
+              <a:rPr sz="1100" b="0" dirty="0" err="1">
+                <a:solidFill>
+                  <a:srgbClr val="1C1C1E"/>
+                </a:solidFill>
+                <a:latin typeface="맑은 고딕"/>
+                <a:ea typeface="맑은 고딕"/>
+              </a:rPr>
+              <a:t>없는</a:t>
+            </a:r>
+            <a:r>
+              <a:rPr sz="1100" b="0" dirty="0">
+                <a:solidFill>
+                  <a:srgbClr val="1C1C1E"/>
+                </a:solidFill>
+                <a:latin typeface="맑은 고딕"/>
+                <a:ea typeface="맑은 고딕"/>
+              </a:rPr>
+              <a:t> </a:t>
+            </a:r>
+            <a:r>
+              <a:rPr sz="1100" b="0" dirty="0" err="1">
+                <a:solidFill>
+                  <a:srgbClr val="1C1C1E"/>
+                </a:solidFill>
+                <a:latin typeface="맑은 고딕"/>
+                <a:ea typeface="맑은 고딕"/>
+              </a:rPr>
+              <a:t>것과</a:t>
+            </a:r>
+            <a:r>
+              <a:rPr sz="1100" b="0" dirty="0">
+                <a:solidFill>
+                  <a:srgbClr val="1C1C1E"/>
+                </a:solidFill>
+                <a:latin typeface="맑은 고딕"/>
+                <a:ea typeface="맑은 고딕"/>
+              </a:rPr>
+              <a:t>, </a:t>
+            </a:r>
+            <a:r>
+              <a:rPr sz="1100" b="0" dirty="0" err="1">
+                <a:solidFill>
+                  <a:srgbClr val="1C1C1E"/>
+                </a:solidFill>
+                <a:latin typeface="맑은 고딕"/>
+                <a:ea typeface="맑은 고딕"/>
+              </a:rPr>
+              <a:t>있는</a:t>
+            </a:r>
+            <a:r>
+              <a:rPr sz="1100" b="0" dirty="0">
+                <a:solidFill>
+                  <a:srgbClr val="1C1C1E"/>
+                </a:solidFill>
+                <a:latin typeface="맑은 고딕"/>
+                <a:ea typeface="맑은 고딕"/>
+              </a:rPr>
+              <a:t> </a:t>
+            </a:r>
+            <a:r>
+              <a:rPr sz="1100" b="0" dirty="0" err="1">
+                <a:solidFill>
+                  <a:srgbClr val="1C1C1E"/>
+                </a:solidFill>
+                <a:latin typeface="맑은 고딕"/>
+                <a:ea typeface="맑은 고딕"/>
+              </a:rPr>
+              <a:t>자원이</a:t>
+            </a:r>
+            <a:r>
+              <a:rPr sz="1100" b="0" dirty="0">
+                <a:solidFill>
+                  <a:srgbClr val="1C1C1E"/>
+                </a:solidFill>
+                <a:latin typeface="맑은 고딕"/>
+                <a:ea typeface="맑은 고딕"/>
+              </a:rPr>
+              <a:t> </a:t>
+            </a:r>
+            <a:r>
+              <a:rPr sz="1100" b="0" dirty="0" err="1">
+                <a:solidFill>
+                  <a:srgbClr val="1C1C1E"/>
+                </a:solidFill>
+                <a:latin typeface="맑은 고딕"/>
+                <a:ea typeface="맑은 고딕"/>
+              </a:rPr>
+              <a:t>필요한</a:t>
+            </a:r>
+            <a:r>
+              <a:rPr sz="1100" b="0" dirty="0">
+                <a:solidFill>
+                  <a:srgbClr val="1C1C1E"/>
+                </a:solidFill>
+                <a:latin typeface="맑은 고딕"/>
+                <a:ea typeface="맑은 고딕"/>
+              </a:rPr>
+              <a:t> </a:t>
+            </a:r>
+            <a:r>
+              <a:rPr sz="1100" b="0" dirty="0" err="1">
+                <a:solidFill>
+                  <a:srgbClr val="1C1C1E"/>
+                </a:solidFill>
+                <a:latin typeface="맑은 고딕"/>
+                <a:ea typeface="맑은 고딕"/>
+              </a:rPr>
+              <a:t>곳에</a:t>
+            </a:r>
+            <a:r>
+              <a:rPr sz="1100" b="0" dirty="0">
+                <a:solidFill>
+                  <a:srgbClr val="1C1C1E"/>
+                </a:solidFill>
+                <a:latin typeface="맑은 고딕"/>
+                <a:ea typeface="맑은 고딕"/>
+              </a:rPr>
+              <a:t> </a:t>
+            </a:r>
+            <a:r>
+              <a:rPr sz="1100" b="0" dirty="0" err="1">
+                <a:solidFill>
+                  <a:srgbClr val="1C1C1E"/>
+                </a:solidFill>
+                <a:latin typeface="맑은 고딕"/>
+                <a:ea typeface="맑은 고딕"/>
+              </a:rPr>
+              <a:t>닿지</a:t>
+            </a:r>
+            <a:r>
+              <a:rPr sz="1100" b="0" dirty="0">
+                <a:solidFill>
+                  <a:srgbClr val="1C1C1E"/>
+                </a:solidFill>
+                <a:latin typeface="맑은 고딕"/>
+                <a:ea typeface="맑은 고딕"/>
+              </a:rPr>
+              <a:t> </a:t>
+            </a:r>
+            <a:r>
+              <a:rPr sz="1100" b="0" dirty="0" err="1">
+                <a:solidFill>
+                  <a:srgbClr val="1C1C1E"/>
+                </a:solidFill>
+                <a:latin typeface="맑은 고딕"/>
+                <a:ea typeface="맑은 고딕"/>
+              </a:rPr>
+              <a:t>않는</a:t>
+            </a:r>
+            <a:r>
+              <a:rPr sz="1100" b="0" dirty="0">
+                <a:solidFill>
+                  <a:srgbClr val="1C1C1E"/>
+                </a:solidFill>
+                <a:latin typeface="맑은 고딕"/>
+                <a:ea typeface="맑은 고딕"/>
+              </a:rPr>
+              <a:t> </a:t>
+            </a:r>
+            <a:r>
+              <a:rPr sz="1100" b="0" dirty="0" err="1">
+                <a:solidFill>
+                  <a:srgbClr val="1C1C1E"/>
+                </a:solidFill>
+                <a:latin typeface="맑은 고딕"/>
+                <a:ea typeface="맑은 고딕"/>
+              </a:rPr>
+              <a:t>것은</a:t>
+            </a:r>
+            <a:r>
+              <a:rPr sz="1100" b="0" dirty="0">
+                <a:solidFill>
+                  <a:srgbClr val="1C1C1E"/>
+                </a:solidFill>
+                <a:latin typeface="맑은 고딕"/>
+                <a:ea typeface="맑은 고딕"/>
+              </a:rPr>
+              <a:t> </a:t>
+            </a:r>
+            <a:r>
+              <a:rPr sz="1100" b="0" dirty="0" err="1">
+                <a:solidFill>
+                  <a:srgbClr val="1C1C1E"/>
+                </a:solidFill>
+                <a:latin typeface="맑은 고딕"/>
+                <a:ea typeface="맑은 고딕"/>
+              </a:rPr>
+              <a:t>다른</a:t>
+            </a:r>
+            <a:r>
+              <a:rPr sz="1100" b="0" dirty="0">
+                <a:solidFill>
+                  <a:srgbClr val="1C1C1E"/>
+                </a:solidFill>
+                <a:latin typeface="맑은 고딕"/>
+                <a:ea typeface="맑은 고딕"/>
+              </a:rPr>
+              <a:t> </a:t>
+            </a:r>
+            <a:r>
+              <a:rPr sz="1100" b="0" dirty="0" err="1">
+                <a:solidFill>
+                  <a:srgbClr val="1C1C1E"/>
+                </a:solidFill>
+                <a:latin typeface="맑은 고딕"/>
+                <a:ea typeface="맑은 고딕"/>
+              </a:rPr>
+              <a:t>문제다</a:t>
+            </a:r>
+            <a:r>
+              <a:rPr sz="1100" b="0" dirty="0">
+                <a:solidFill>
+                  <a:srgbClr val="1C1C1E"/>
+                </a:solidFill>
+                <a:latin typeface="맑은 고딕"/>
+                <a:ea typeface="맑은 고딕"/>
+              </a:rPr>
+              <a:t>. </a:t>
+            </a:r>
+            <a:r>
+              <a:rPr sz="1100" b="0" dirty="0" err="1">
+                <a:solidFill>
+                  <a:srgbClr val="1C1C1E"/>
+                </a:solidFill>
+                <a:latin typeface="맑은 고딕"/>
+                <a:ea typeface="맑은 고딕"/>
+              </a:rPr>
+              <a:t>뒤쪽이라면</a:t>
+            </a:r>
+            <a:r>
+              <a:rPr sz="1100" b="0" dirty="0">
+                <a:solidFill>
+                  <a:srgbClr val="1C1C1E"/>
+                </a:solidFill>
+                <a:latin typeface="맑은 고딕"/>
+                <a:ea typeface="맑은 고딕"/>
+              </a:rPr>
+              <a:t> </a:t>
+            </a:r>
+            <a:r>
+              <a:rPr sz="1100" b="0" dirty="0" err="1">
+                <a:solidFill>
+                  <a:srgbClr val="1C1C1E"/>
+                </a:solidFill>
+                <a:latin typeface="맑은 고딕"/>
+                <a:ea typeface="맑은 고딕"/>
+              </a:rPr>
+              <a:t>예산</a:t>
+            </a:r>
+            <a:r>
+              <a:rPr sz="1100" b="0" dirty="0">
+                <a:solidFill>
+                  <a:srgbClr val="1C1C1E"/>
+                </a:solidFill>
+                <a:latin typeface="맑은 고딕"/>
+                <a:ea typeface="맑은 고딕"/>
+              </a:rPr>
+              <a:t> </a:t>
+            </a:r>
+            <a:r>
+              <a:rPr sz="1100" b="0" dirty="0" err="1">
+                <a:solidFill>
+                  <a:srgbClr val="1C1C1E"/>
+                </a:solidFill>
+                <a:latin typeface="맑은 고딕"/>
+                <a:ea typeface="맑은 고딕"/>
+              </a:rPr>
+              <a:t>없이도</a:t>
+            </a:r>
+            <a:r>
+              <a:rPr sz="1100" b="0" dirty="0">
+                <a:solidFill>
+                  <a:srgbClr val="1C1C1E"/>
+                </a:solidFill>
+                <a:latin typeface="맑은 고딕"/>
+                <a:ea typeface="맑은 고딕"/>
+              </a:rPr>
+              <a:t> </a:t>
+            </a:r>
+            <a:r>
+              <a:rPr sz="1100" b="0" dirty="0" err="1">
+                <a:solidFill>
+                  <a:srgbClr val="1C1C1E"/>
+                </a:solidFill>
+                <a:latin typeface="맑은 고딕"/>
+                <a:ea typeface="맑은 고딕"/>
+              </a:rPr>
+              <a:t>줄일</a:t>
+            </a:r>
+            <a:r>
+              <a:rPr sz="1100" b="0" dirty="0">
+                <a:solidFill>
+                  <a:srgbClr val="1C1C1E"/>
+                </a:solidFill>
+                <a:latin typeface="맑은 고딕"/>
+                <a:ea typeface="맑은 고딕"/>
+              </a:rPr>
+              <a:t> 수 </a:t>
+            </a:r>
+            <a:r>
+              <a:rPr sz="1100" b="0" dirty="0" err="1">
+                <a:solidFill>
+                  <a:srgbClr val="1C1C1E"/>
+                </a:solidFill>
+                <a:latin typeface="맑은 고딕"/>
+                <a:ea typeface="맑은 고딕"/>
+              </a:rPr>
+              <a:t>있다</a:t>
+            </a:r>
+            <a:endParaRPr sz="1100" b="0" dirty="0">
+              <a:solidFill>
+                <a:srgbClr val="1C1C1E"/>
+              </a:solidFill>
+              <a:latin typeface="맑은 고딕"/>
+              <a:ea typeface="맑은 고딕"/>
+            </a:endParaRPr>
           </a:p>
         </p:txBody>
       </p:sp>
@@ -13139,7 +14210,7 @@
         <p:spPr>
           <a:xfrm>
             <a:off x="685800" y="3529584"/>
-            <a:ext cx="10927080" cy="1316736"/>
+            <a:ext cx="10927080" cy="1370568"/>
           </a:xfrm>
           <a:prstGeom prst="rect">
             <a:avLst/>
@@ -13161,14 +14232,204 @@
               </a:spcAft>
             </a:pPr>
             <a:r>
-              <a:rPr sz="1300" b="1">
+              <a:rPr sz="1300" b="1" dirty="0" err="1">
                 <a:solidFill>
                   <a:srgbClr val="33393F"/>
                 </a:solidFill>
                 <a:latin typeface="맑은 고딕"/>
                 <a:ea typeface="맑은 고딕"/>
               </a:rPr>
-              <a:t>그리고 자원을 공백 지역으로 보내는 제도는 이미 있다 — 「분만취약지 지원사업」(15년째)</a:t>
+              <a:t>그리고</a:t>
+            </a:r>
+            <a:r>
+              <a:rPr sz="1300" b="1" dirty="0">
+                <a:solidFill>
+                  <a:srgbClr val="33393F"/>
+                </a:solidFill>
+                <a:latin typeface="맑은 고딕"/>
+                <a:ea typeface="맑은 고딕"/>
+              </a:rPr>
+              <a:t> </a:t>
+            </a:r>
+            <a:r>
+              <a:rPr sz="1300" b="1" dirty="0" err="1">
+                <a:solidFill>
+                  <a:srgbClr val="33393F"/>
+                </a:solidFill>
+                <a:latin typeface="맑은 고딕"/>
+                <a:ea typeface="맑은 고딕"/>
+              </a:rPr>
+              <a:t>자원을</a:t>
+            </a:r>
+            <a:r>
+              <a:rPr sz="1300" b="1" dirty="0">
+                <a:solidFill>
+                  <a:srgbClr val="33393F"/>
+                </a:solidFill>
+                <a:latin typeface="맑은 고딕"/>
+                <a:ea typeface="맑은 고딕"/>
+              </a:rPr>
+              <a:t> </a:t>
+            </a:r>
+            <a:r>
+              <a:rPr sz="1300" b="1" dirty="0" err="1">
+                <a:solidFill>
+                  <a:srgbClr val="33393F"/>
+                </a:solidFill>
+                <a:latin typeface="맑은 고딕"/>
+                <a:ea typeface="맑은 고딕"/>
+              </a:rPr>
+              <a:t>공백</a:t>
+            </a:r>
+            <a:r>
+              <a:rPr sz="1300" b="1" dirty="0">
+                <a:solidFill>
+                  <a:srgbClr val="33393F"/>
+                </a:solidFill>
+                <a:latin typeface="맑은 고딕"/>
+                <a:ea typeface="맑은 고딕"/>
+              </a:rPr>
+              <a:t> </a:t>
+            </a:r>
+            <a:r>
+              <a:rPr sz="1300" b="1" dirty="0" err="1">
+                <a:solidFill>
+                  <a:srgbClr val="33393F"/>
+                </a:solidFill>
+                <a:latin typeface="맑은 고딕"/>
+                <a:ea typeface="맑은 고딕"/>
+              </a:rPr>
+              <a:t>지역으로</a:t>
+            </a:r>
+            <a:r>
+              <a:rPr sz="1300" b="1" dirty="0">
+                <a:solidFill>
+                  <a:srgbClr val="33393F"/>
+                </a:solidFill>
+                <a:latin typeface="맑은 고딕"/>
+                <a:ea typeface="맑은 고딕"/>
+              </a:rPr>
+              <a:t> </a:t>
+            </a:r>
+            <a:r>
+              <a:rPr sz="1300" b="1" dirty="0" err="1">
+                <a:solidFill>
+                  <a:srgbClr val="33393F"/>
+                </a:solidFill>
+                <a:latin typeface="맑은 고딕"/>
+                <a:ea typeface="맑은 고딕"/>
+              </a:rPr>
+              <a:t>보내는</a:t>
+            </a:r>
+            <a:r>
+              <a:rPr sz="1300" b="1" dirty="0">
+                <a:solidFill>
+                  <a:srgbClr val="33393F"/>
+                </a:solidFill>
+                <a:latin typeface="맑은 고딕"/>
+                <a:ea typeface="맑은 고딕"/>
+              </a:rPr>
+              <a:t> </a:t>
+            </a:r>
+            <a:r>
+              <a:rPr sz="1300" b="1" dirty="0" err="1">
+                <a:solidFill>
+                  <a:srgbClr val="33393F"/>
+                </a:solidFill>
+                <a:latin typeface="맑은 고딕"/>
+                <a:ea typeface="맑은 고딕"/>
+              </a:rPr>
+              <a:t>제도는</a:t>
+            </a:r>
+            <a:r>
+              <a:rPr sz="1300" b="1" dirty="0">
+                <a:solidFill>
+                  <a:srgbClr val="33393F"/>
+                </a:solidFill>
+                <a:latin typeface="맑은 고딕"/>
+                <a:ea typeface="맑은 고딕"/>
+              </a:rPr>
+              <a:t> </a:t>
+            </a:r>
+            <a:r>
+              <a:rPr sz="1300" b="1" dirty="0" err="1">
+                <a:solidFill>
+                  <a:srgbClr val="33393F"/>
+                </a:solidFill>
+                <a:latin typeface="맑은 고딕"/>
+                <a:ea typeface="맑은 고딕"/>
+              </a:rPr>
+              <a:t>이미</a:t>
+            </a:r>
+            <a:r>
+              <a:rPr sz="1300" b="1" dirty="0">
+                <a:solidFill>
+                  <a:srgbClr val="33393F"/>
+                </a:solidFill>
+                <a:latin typeface="맑은 고딕"/>
+                <a:ea typeface="맑은 고딕"/>
+              </a:rPr>
+              <a:t> </a:t>
+            </a:r>
+            <a:r>
+              <a:rPr sz="1300" b="1" dirty="0" err="1">
+                <a:solidFill>
+                  <a:srgbClr val="33393F"/>
+                </a:solidFill>
+                <a:latin typeface="맑은 고딕"/>
+                <a:ea typeface="맑은 고딕"/>
+              </a:rPr>
+              <a:t>있다</a:t>
+            </a:r>
+            <a:r>
+              <a:rPr sz="1300" b="1" dirty="0">
+                <a:solidFill>
+                  <a:srgbClr val="33393F"/>
+                </a:solidFill>
+                <a:latin typeface="맑은 고딕"/>
+                <a:ea typeface="맑은 고딕"/>
+              </a:rPr>
+              <a:t> — 「</a:t>
+            </a:r>
+            <a:r>
+              <a:rPr sz="1300" b="1" dirty="0" err="1">
+                <a:solidFill>
+                  <a:srgbClr val="33393F"/>
+                </a:solidFill>
+                <a:latin typeface="맑은 고딕"/>
+                <a:ea typeface="맑은 고딕"/>
+              </a:rPr>
+              <a:t>분만취약지</a:t>
+            </a:r>
+            <a:r>
+              <a:rPr sz="1300" b="1" dirty="0">
+                <a:solidFill>
+                  <a:srgbClr val="33393F"/>
+                </a:solidFill>
+                <a:latin typeface="맑은 고딕"/>
+                <a:ea typeface="맑은 고딕"/>
+              </a:rPr>
+              <a:t> </a:t>
+            </a:r>
+            <a:r>
+              <a:rPr sz="1300" b="1" dirty="0" err="1">
+                <a:solidFill>
+                  <a:srgbClr val="33393F"/>
+                </a:solidFill>
+                <a:latin typeface="맑은 고딕"/>
+                <a:ea typeface="맑은 고딕"/>
+              </a:rPr>
+              <a:t>지원사업</a:t>
+            </a:r>
+            <a:r>
+              <a:rPr sz="1300" b="1" dirty="0">
+                <a:solidFill>
+                  <a:srgbClr val="33393F"/>
+                </a:solidFill>
+                <a:latin typeface="맑은 고딕"/>
+                <a:ea typeface="맑은 고딕"/>
+              </a:rPr>
+              <a:t>」(15년째)</a:t>
             </a:r>
           </a:p>
           <a:p>
@@ -13181,15 +14442,452 @@
               </a:spcAft>
             </a:pPr>
             <a:r>
-              <a:rPr sz="1100" b="0">
-                <a:solidFill>
-                  <a:srgbClr val="1C1C1E"/>
-                </a:solidFill>
-                <a:latin typeface="맑은 고딕"/>
-                <a:ea typeface="맑은 고딕"/>
-              </a:rPr>
-              <a:t>• 분만취약지 = 소득·인구가 적은 지역이 아니라, 그 지역 가임기 여성이 ① 분만 가능 기관까지 60분 안에 닿기 어렵고(접근성) ② 실제 출산도 60분 안에 하지 못하는(이용률) 시·군</a:t>
-            </a:r>
+              <a:rPr sz="1100" b="0" dirty="0">
+                <a:solidFill>
+                  <a:srgbClr val="1C1C1E"/>
+                </a:solidFill>
+                <a:latin typeface="맑은 고딕"/>
+                <a:ea typeface="맑은 고딕"/>
+              </a:rPr>
+              <a:t>• </a:t>
+            </a:r>
+            <a:r>
+              <a:rPr sz="1100" b="0" dirty="0" err="1">
+                <a:solidFill>
+                  <a:srgbClr val="1C1C1E"/>
+                </a:solidFill>
+                <a:latin typeface="맑은 고딕"/>
+                <a:ea typeface="맑은 고딕"/>
+              </a:rPr>
+              <a:t>분만취약지</a:t>
+            </a:r>
+            <a:r>
+              <a:rPr sz="1100" b="0" dirty="0">
+                <a:solidFill>
+                  <a:srgbClr val="1C1C1E"/>
+                </a:solidFill>
+                <a:latin typeface="맑은 고딕"/>
+                <a:ea typeface="맑은 고딕"/>
+              </a:rPr>
+              <a:t> = </a:t>
+            </a:r>
+            <a:r>
+              <a:rPr sz="1100" b="0" dirty="0" err="1">
+                <a:solidFill>
+                  <a:srgbClr val="1C1C1E"/>
+                </a:solidFill>
+                <a:latin typeface="맑은 고딕"/>
+                <a:ea typeface="맑은 고딕"/>
+              </a:rPr>
+              <a:t>소득·인구가</a:t>
+            </a:r>
+            <a:r>
+              <a:rPr sz="1100" b="0" dirty="0">
+                <a:solidFill>
+                  <a:srgbClr val="1C1C1E"/>
+                </a:solidFill>
+                <a:latin typeface="맑은 고딕"/>
+                <a:ea typeface="맑은 고딕"/>
+              </a:rPr>
+              <a:t> </a:t>
+            </a:r>
+            <a:r>
+              <a:rPr sz="1100" b="0" dirty="0" err="1">
+                <a:solidFill>
+                  <a:srgbClr val="1C1C1E"/>
+                </a:solidFill>
+                <a:latin typeface="맑은 고딕"/>
+                <a:ea typeface="맑은 고딕"/>
+              </a:rPr>
+              <a:t>적은</a:t>
+            </a:r>
+            <a:r>
+              <a:rPr sz="1100" b="0" dirty="0">
+                <a:solidFill>
+                  <a:srgbClr val="1C1C1E"/>
+                </a:solidFill>
+                <a:latin typeface="맑은 고딕"/>
+                <a:ea typeface="맑은 고딕"/>
+              </a:rPr>
+              <a:t> </a:t>
+            </a:r>
+            <a:r>
+              <a:rPr sz="1100" b="0" dirty="0" err="1">
+                <a:solidFill>
+                  <a:srgbClr val="1C1C1E"/>
+                </a:solidFill>
+                <a:latin typeface="맑은 고딕"/>
+                <a:ea typeface="맑은 고딕"/>
+              </a:rPr>
+              <a:t>지역이</a:t>
+            </a:r>
+            <a:r>
+              <a:rPr sz="1100" b="0" dirty="0">
+                <a:solidFill>
+                  <a:srgbClr val="1C1C1E"/>
+                </a:solidFill>
+                <a:latin typeface="맑은 고딕"/>
+                <a:ea typeface="맑은 고딕"/>
+              </a:rPr>
+              <a:t> </a:t>
+            </a:r>
+            <a:r>
+              <a:rPr sz="1100" b="0" dirty="0" err="1">
+                <a:solidFill>
+                  <a:srgbClr val="1C1C1E"/>
+                </a:solidFill>
+                <a:latin typeface="맑은 고딕"/>
+                <a:ea typeface="맑은 고딕"/>
+              </a:rPr>
+              <a:t>아니라</a:t>
+            </a:r>
+            <a:r>
+              <a:rPr sz="1100" b="0" dirty="0">
+                <a:solidFill>
+                  <a:srgbClr val="1C1C1E"/>
+                </a:solidFill>
+                <a:latin typeface="맑은 고딕"/>
+                <a:ea typeface="맑은 고딕"/>
+              </a:rPr>
+              <a:t>, 그 </a:t>
+            </a:r>
+            <a:r>
+              <a:rPr sz="1100" b="0" dirty="0" err="1">
+                <a:solidFill>
+                  <a:srgbClr val="1C1C1E"/>
+                </a:solidFill>
+                <a:latin typeface="맑은 고딕"/>
+                <a:ea typeface="맑은 고딕"/>
+              </a:rPr>
+              <a:t>지역</a:t>
+            </a:r>
+            <a:r>
+              <a:rPr sz="1100" b="0" dirty="0">
+                <a:solidFill>
+                  <a:srgbClr val="1C1C1E"/>
+                </a:solidFill>
+                <a:latin typeface="맑은 고딕"/>
+                <a:ea typeface="맑은 고딕"/>
+              </a:rPr>
+              <a:t> </a:t>
+            </a:r>
+            <a:r>
+              <a:rPr sz="1100" b="0" dirty="0" err="1">
+                <a:solidFill>
+                  <a:srgbClr val="1C1C1E"/>
+                </a:solidFill>
+                <a:latin typeface="맑은 고딕"/>
+                <a:ea typeface="맑은 고딕"/>
+              </a:rPr>
+              <a:t>가임기</a:t>
+            </a:r>
+            <a:r>
+              <a:rPr sz="1100" b="0" dirty="0">
+                <a:solidFill>
+                  <a:srgbClr val="1C1C1E"/>
+                </a:solidFill>
+                <a:latin typeface="맑은 고딕"/>
+                <a:ea typeface="맑은 고딕"/>
+              </a:rPr>
+              <a:t> </a:t>
+            </a:r>
+            <a:r>
+              <a:rPr sz="1100" b="0" dirty="0" err="1">
+                <a:solidFill>
+                  <a:srgbClr val="1C1C1E"/>
+                </a:solidFill>
+                <a:latin typeface="맑은 고딕"/>
+                <a:ea typeface="맑은 고딕"/>
+              </a:rPr>
+              <a:t>여성이</a:t>
+            </a:r>
+            <a:r>
+              <a:rPr sz="1100" b="0" dirty="0">
+                <a:solidFill>
+                  <a:srgbClr val="1C1C1E"/>
+                </a:solidFill>
+                <a:latin typeface="맑은 고딕"/>
+                <a:ea typeface="맑은 고딕"/>
+              </a:rPr>
+              <a:t> ① </a:t>
+            </a:r>
+            <a:r>
+              <a:rPr sz="1100" b="0" dirty="0" err="1">
+                <a:solidFill>
+                  <a:srgbClr val="1C1C1E"/>
+                </a:solidFill>
+                <a:latin typeface="맑은 고딕"/>
+                <a:ea typeface="맑은 고딕"/>
+              </a:rPr>
+              <a:t>분만</a:t>
+            </a:r>
+            <a:r>
+              <a:rPr sz="1100" b="0" dirty="0">
+                <a:solidFill>
+                  <a:srgbClr val="1C1C1E"/>
+                </a:solidFill>
+                <a:latin typeface="맑은 고딕"/>
+                <a:ea typeface="맑은 고딕"/>
+              </a:rPr>
+              <a:t> </a:t>
+            </a:r>
+            <a:r>
+              <a:rPr sz="1100" b="0" dirty="0" err="1">
+                <a:solidFill>
+                  <a:srgbClr val="1C1C1E"/>
+                </a:solidFill>
+                <a:latin typeface="맑은 고딕"/>
+                <a:ea typeface="맑은 고딕"/>
+              </a:rPr>
+              <a:t>가능</a:t>
+            </a:r>
+            <a:r>
+              <a:rPr sz="1100" b="0" dirty="0">
+                <a:solidFill>
+                  <a:srgbClr val="1C1C1E"/>
+                </a:solidFill>
+                <a:latin typeface="맑은 고딕"/>
+                <a:ea typeface="맑은 고딕"/>
+              </a:rPr>
+              <a:t> </a:t>
+            </a:r>
+            <a:r>
+              <a:rPr sz="1100" b="0" dirty="0" err="1">
+                <a:solidFill>
+                  <a:srgbClr val="1C1C1E"/>
+                </a:solidFill>
+                <a:latin typeface="맑은 고딕"/>
+                <a:ea typeface="맑은 고딕"/>
+              </a:rPr>
+              <a:t>기관까지</a:t>
+            </a:r>
+            <a:r>
+              <a:rPr sz="1100" b="0" dirty="0">
+                <a:solidFill>
+                  <a:srgbClr val="1C1C1E"/>
+                </a:solidFill>
+                <a:latin typeface="맑은 고딕"/>
+                <a:ea typeface="맑은 고딕"/>
+              </a:rPr>
+              <a:t> 60분 </a:t>
+            </a:r>
+            <a:r>
+              <a:rPr sz="1100" b="0" dirty="0" err="1">
+                <a:solidFill>
+                  <a:srgbClr val="1C1C1E"/>
+                </a:solidFill>
+                <a:latin typeface="맑은 고딕"/>
+                <a:ea typeface="맑은 고딕"/>
+              </a:rPr>
+              <a:t>안에</a:t>
+            </a:r>
+            <a:r>
+              <a:rPr sz="1100" b="0" dirty="0">
+                <a:solidFill>
+                  <a:srgbClr val="1C1C1E"/>
+                </a:solidFill>
+                <a:latin typeface="맑은 고딕"/>
+                <a:ea typeface="맑은 고딕"/>
+              </a:rPr>
+              <a:t> </a:t>
+            </a:r>
+            <a:r>
+              <a:rPr sz="1100" b="0" dirty="0" err="1">
+                <a:solidFill>
+                  <a:srgbClr val="1C1C1E"/>
+                </a:solidFill>
+                <a:latin typeface="맑은 고딕"/>
+                <a:ea typeface="맑은 고딕"/>
+              </a:rPr>
+              <a:t>닿기</a:t>
+            </a:r>
+            <a:r>
+              <a:rPr sz="1100" b="0" dirty="0">
+                <a:solidFill>
+                  <a:srgbClr val="1C1C1E"/>
+                </a:solidFill>
+                <a:latin typeface="맑은 고딕"/>
+                <a:ea typeface="맑은 고딕"/>
+              </a:rPr>
+              <a:t> </a:t>
+            </a:r>
+            <a:r>
+              <a:rPr sz="1100" b="0" dirty="0" err="1">
+                <a:solidFill>
+                  <a:srgbClr val="1C1C1E"/>
+                </a:solidFill>
+                <a:latin typeface="맑은 고딕"/>
+                <a:ea typeface="맑은 고딕"/>
+              </a:rPr>
+              <a:t>어렵고</a:t>
+            </a:r>
+            <a:r>
+              <a:rPr sz="1100" b="0" dirty="0">
+                <a:solidFill>
+                  <a:srgbClr val="1C1C1E"/>
+                </a:solidFill>
+                <a:latin typeface="맑은 고딕"/>
+                <a:ea typeface="맑은 고딕"/>
+              </a:rPr>
+              <a:t>(</a:t>
+            </a:r>
+            <a:r>
+              <a:rPr sz="1100" b="0" dirty="0" err="1">
+                <a:solidFill>
+                  <a:srgbClr val="1C1C1E"/>
+                </a:solidFill>
+                <a:latin typeface="맑은 고딕"/>
+                <a:ea typeface="맑은 고딕"/>
+              </a:rPr>
+              <a:t>접근성</a:t>
+            </a:r>
+            <a:r>
+              <a:rPr sz="1100" b="0" dirty="0">
+                <a:solidFill>
+                  <a:srgbClr val="1C1C1E"/>
+                </a:solidFill>
+                <a:latin typeface="맑은 고딕"/>
+                <a:ea typeface="맑은 고딕"/>
+              </a:rPr>
+              <a:t>) ② </a:t>
+            </a:r>
+            <a:r>
+              <a:rPr sz="1100" b="0" dirty="0" err="1">
+                <a:solidFill>
+                  <a:srgbClr val="1C1C1E"/>
+                </a:solidFill>
+                <a:latin typeface="맑은 고딕"/>
+                <a:ea typeface="맑은 고딕"/>
+              </a:rPr>
+              <a:t>실제</a:t>
+            </a:r>
+            <a:r>
+              <a:rPr sz="1100" b="0" dirty="0">
+                <a:solidFill>
+                  <a:srgbClr val="1C1C1E"/>
+                </a:solidFill>
+                <a:latin typeface="맑은 고딕"/>
+                <a:ea typeface="맑은 고딕"/>
+              </a:rPr>
+              <a:t> </a:t>
+            </a:r>
+            <a:r>
+              <a:rPr sz="1100" b="0" dirty="0" err="1">
+                <a:solidFill>
+                  <a:srgbClr val="1C1C1E"/>
+                </a:solidFill>
+                <a:latin typeface="맑은 고딕"/>
+                <a:ea typeface="맑은 고딕"/>
+              </a:rPr>
+              <a:t>출산도</a:t>
+            </a:r>
+            <a:r>
+              <a:rPr sz="1100" b="0" dirty="0">
+                <a:solidFill>
+                  <a:srgbClr val="1C1C1E"/>
+                </a:solidFill>
+                <a:latin typeface="맑은 고딕"/>
+                <a:ea typeface="맑은 고딕"/>
+              </a:rPr>
+              <a:t> 60분 </a:t>
+            </a:r>
+            <a:r>
+              <a:rPr sz="1100" b="0" dirty="0" err="1">
+                <a:solidFill>
+                  <a:srgbClr val="1C1C1E"/>
+                </a:solidFill>
+                <a:latin typeface="맑은 고딕"/>
+                <a:ea typeface="맑은 고딕"/>
+              </a:rPr>
+              <a:t>안에</a:t>
+            </a:r>
+            <a:r>
+              <a:rPr sz="1100" b="0" dirty="0">
+                <a:solidFill>
+                  <a:srgbClr val="1C1C1E"/>
+                </a:solidFill>
+                <a:latin typeface="맑은 고딕"/>
+                <a:ea typeface="맑은 고딕"/>
+              </a:rPr>
+              <a:t> </a:t>
+            </a:r>
+            <a:r>
+              <a:rPr sz="1100" b="0" dirty="0" err="1">
+                <a:solidFill>
+                  <a:srgbClr val="1C1C1E"/>
+                </a:solidFill>
+                <a:latin typeface="맑은 고딕"/>
+                <a:ea typeface="맑은 고딕"/>
+              </a:rPr>
+              <a:t>하지</a:t>
+            </a:r>
+            <a:r>
+              <a:rPr sz="1100" b="0" dirty="0">
+                <a:solidFill>
+                  <a:srgbClr val="1C1C1E"/>
+                </a:solidFill>
+                <a:latin typeface="맑은 고딕"/>
+                <a:ea typeface="맑은 고딕"/>
+              </a:rPr>
+              <a:t> </a:t>
+            </a:r>
+            <a:r>
+              <a:rPr sz="1100" b="0" dirty="0" err="1">
+                <a:solidFill>
+                  <a:srgbClr val="1C1C1E"/>
+                </a:solidFill>
+                <a:latin typeface="맑은 고딕"/>
+                <a:ea typeface="맑은 고딕"/>
+              </a:rPr>
+              <a:t>못하는</a:t>
+            </a:r>
+            <a:r>
+              <a:rPr sz="1100" b="0" dirty="0">
+                <a:solidFill>
+                  <a:srgbClr val="1C1C1E"/>
+                </a:solidFill>
+                <a:latin typeface="맑은 고딕"/>
+                <a:ea typeface="맑은 고딕"/>
+              </a:rPr>
+              <a:t>(</a:t>
+            </a:r>
+            <a:r>
+              <a:rPr sz="1100" b="0" dirty="0" err="1">
+                <a:solidFill>
+                  <a:srgbClr val="1C1C1E"/>
+                </a:solidFill>
+                <a:latin typeface="맑은 고딕"/>
+                <a:ea typeface="맑은 고딕"/>
+              </a:rPr>
+              <a:t>이용률</a:t>
+            </a:r>
+            <a:r>
+              <a:rPr sz="1100" b="0" dirty="0">
+                <a:solidFill>
+                  <a:srgbClr val="1C1C1E"/>
+                </a:solidFill>
+                <a:latin typeface="맑은 고딕"/>
+                <a:ea typeface="맑은 고딕"/>
+              </a:rPr>
+              <a:t>) </a:t>
+            </a:r>
+            <a:r>
+              <a:rPr sz="1100" b="0" dirty="0" err="1">
+                <a:solidFill>
+                  <a:srgbClr val="1C1C1E"/>
+                </a:solidFill>
+                <a:latin typeface="맑은 고딕"/>
+                <a:ea typeface="맑은 고딕"/>
+              </a:rPr>
+              <a:t>시·군</a:t>
+            </a:r>
+            <a:endParaRPr sz="1100" b="0" dirty="0">
+              <a:solidFill>
+                <a:srgbClr val="1C1C1E"/>
+              </a:solidFill>
+              <a:latin typeface="맑은 고딕"/>
+              <a:ea typeface="맑은 고딕"/>
+            </a:endParaRPr>
           </a:p>
           <a:p>
             <a:pPr marL="160020" indent="-160020">
@@ -13201,15 +14899,252 @@
               </a:spcAft>
             </a:pPr>
             <a:r>
-              <a:rPr sz="1100" b="0">
-                <a:solidFill>
-                  <a:srgbClr val="1C1C1E"/>
-                </a:solidFill>
-                <a:latin typeface="맑은 고딕"/>
-                <a:ea typeface="맑은 고딕"/>
-              </a:rPr>
-              <a:t>• 즉 이 제도에서 "취약"은 처음부터 끝까지 거리와 시간으로 정의된다 — 이 점이 본 연구의 첫 번째 표적이 된다</a:t>
-            </a:r>
+              <a:rPr sz="1100" b="0" dirty="0">
+                <a:solidFill>
+                  <a:srgbClr val="1C1C1E"/>
+                </a:solidFill>
+                <a:latin typeface="맑은 고딕"/>
+                <a:ea typeface="맑은 고딕"/>
+              </a:rPr>
+              <a:t>• 즉 이 </a:t>
+            </a:r>
+            <a:r>
+              <a:rPr sz="1100" b="0" dirty="0" err="1">
+                <a:solidFill>
+                  <a:srgbClr val="1C1C1E"/>
+                </a:solidFill>
+                <a:latin typeface="맑은 고딕"/>
+                <a:ea typeface="맑은 고딕"/>
+              </a:rPr>
+              <a:t>제도에서</a:t>
+            </a:r>
+            <a:r>
+              <a:rPr sz="1100" b="0" dirty="0">
+                <a:solidFill>
+                  <a:srgbClr val="1C1C1E"/>
+                </a:solidFill>
+                <a:latin typeface="맑은 고딕"/>
+                <a:ea typeface="맑은 고딕"/>
+              </a:rPr>
+              <a:t> "</a:t>
+            </a:r>
+            <a:r>
+              <a:rPr sz="1100" b="0" dirty="0" err="1">
+                <a:solidFill>
+                  <a:srgbClr val="1C1C1E"/>
+                </a:solidFill>
+                <a:latin typeface="맑은 고딕"/>
+                <a:ea typeface="맑은 고딕"/>
+              </a:rPr>
+              <a:t>취약"은</a:t>
+            </a:r>
+            <a:r>
+              <a:rPr sz="1100" b="0" dirty="0">
+                <a:solidFill>
+                  <a:srgbClr val="1C1C1E"/>
+                </a:solidFill>
+                <a:latin typeface="맑은 고딕"/>
+                <a:ea typeface="맑은 고딕"/>
+              </a:rPr>
+              <a:t> </a:t>
+            </a:r>
+            <a:r>
+              <a:rPr sz="1100" b="0" dirty="0" err="1">
+                <a:solidFill>
+                  <a:srgbClr val="1C1C1E"/>
+                </a:solidFill>
+                <a:latin typeface="맑은 고딕"/>
+                <a:ea typeface="맑은 고딕"/>
+              </a:rPr>
+              <a:t>처음부터</a:t>
+            </a:r>
+            <a:r>
+              <a:rPr sz="1100" b="0" dirty="0">
+                <a:solidFill>
+                  <a:srgbClr val="1C1C1E"/>
+                </a:solidFill>
+                <a:latin typeface="맑은 고딕"/>
+                <a:ea typeface="맑은 고딕"/>
+              </a:rPr>
+              <a:t> </a:t>
+            </a:r>
+            <a:r>
+              <a:rPr sz="1100" b="0" dirty="0" err="1">
+                <a:solidFill>
+                  <a:srgbClr val="1C1C1E"/>
+                </a:solidFill>
+                <a:latin typeface="맑은 고딕"/>
+                <a:ea typeface="맑은 고딕"/>
+              </a:rPr>
+              <a:t>끝까지</a:t>
+            </a:r>
+            <a:r>
+              <a:rPr sz="1100" b="0" dirty="0">
+                <a:solidFill>
+                  <a:srgbClr val="1C1C1E"/>
+                </a:solidFill>
+                <a:latin typeface="맑은 고딕"/>
+                <a:ea typeface="맑은 고딕"/>
+              </a:rPr>
+              <a:t> </a:t>
+            </a:r>
+            <a:r>
+              <a:rPr sz="1100" b="0" dirty="0" err="1">
+                <a:solidFill>
+                  <a:srgbClr val="1C1C1E"/>
+                </a:solidFill>
+                <a:latin typeface="맑은 고딕"/>
+                <a:ea typeface="맑은 고딕"/>
+              </a:rPr>
+              <a:t>거리와</a:t>
+            </a:r>
+            <a:r>
+              <a:rPr sz="1100" b="0" dirty="0">
+                <a:solidFill>
+                  <a:srgbClr val="1C1C1E"/>
+                </a:solidFill>
+                <a:latin typeface="맑은 고딕"/>
+                <a:ea typeface="맑은 고딕"/>
+              </a:rPr>
+              <a:t> </a:t>
+            </a:r>
+            <a:r>
+              <a:rPr sz="1100" b="0" dirty="0" err="1">
+                <a:solidFill>
+                  <a:srgbClr val="1C1C1E"/>
+                </a:solidFill>
+                <a:latin typeface="맑은 고딕"/>
+                <a:ea typeface="맑은 고딕"/>
+              </a:rPr>
+              <a:t>시간으로</a:t>
+            </a:r>
+            <a:r>
+              <a:rPr sz="1100" b="0" dirty="0">
+                <a:solidFill>
+                  <a:srgbClr val="1C1C1E"/>
+                </a:solidFill>
+                <a:latin typeface="맑은 고딕"/>
+                <a:ea typeface="맑은 고딕"/>
+              </a:rPr>
+              <a:t> </a:t>
+            </a:r>
+            <a:r>
+              <a:rPr sz="1100" b="0" dirty="0" err="1">
+                <a:solidFill>
+                  <a:srgbClr val="1C1C1E"/>
+                </a:solidFill>
+                <a:latin typeface="맑은 고딕"/>
+                <a:ea typeface="맑은 고딕"/>
+              </a:rPr>
+              <a:t>정의된다</a:t>
+            </a:r>
+            <a:r>
+              <a:rPr sz="1100" b="0" dirty="0">
+                <a:solidFill>
+                  <a:srgbClr val="1C1C1E"/>
+                </a:solidFill>
+                <a:latin typeface="맑은 고딕"/>
+                <a:ea typeface="맑은 고딕"/>
+              </a:rPr>
+              <a:t> — 이 </a:t>
+            </a:r>
+            <a:r>
+              <a:rPr sz="1100" b="0" dirty="0" err="1">
+                <a:solidFill>
+                  <a:srgbClr val="1C1C1E"/>
+                </a:solidFill>
+                <a:latin typeface="맑은 고딕"/>
+                <a:ea typeface="맑은 고딕"/>
+              </a:rPr>
+              <a:t>점이</a:t>
+            </a:r>
+            <a:r>
+              <a:rPr sz="1100" b="0" dirty="0">
+                <a:solidFill>
+                  <a:srgbClr val="1C1C1E"/>
+                </a:solidFill>
+                <a:latin typeface="맑은 고딕"/>
+                <a:ea typeface="맑은 고딕"/>
+              </a:rPr>
+              <a:t> 본 </a:t>
+            </a:r>
+            <a:r>
+              <a:rPr sz="1100" b="0" dirty="0" err="1">
+                <a:solidFill>
+                  <a:srgbClr val="1C1C1E"/>
+                </a:solidFill>
+                <a:latin typeface="맑은 고딕"/>
+                <a:ea typeface="맑은 고딕"/>
+              </a:rPr>
+              <a:t>연구의</a:t>
+            </a:r>
+            <a:r>
+              <a:rPr sz="1100" b="0" dirty="0">
+                <a:solidFill>
+                  <a:srgbClr val="1C1C1E"/>
+                </a:solidFill>
+                <a:latin typeface="맑은 고딕"/>
+                <a:ea typeface="맑은 고딕"/>
+              </a:rPr>
+              <a:t> 첫 </a:t>
+            </a:r>
+            <a:r>
+              <a:rPr sz="1100" b="0" dirty="0" err="1">
+                <a:solidFill>
+                  <a:srgbClr val="1C1C1E"/>
+                </a:solidFill>
+                <a:latin typeface="맑은 고딕"/>
+                <a:ea typeface="맑은 고딕"/>
+              </a:rPr>
+              <a:t>번째</a:t>
+            </a:r>
+            <a:r>
+              <a:rPr sz="1100" b="0" dirty="0">
+                <a:solidFill>
+                  <a:srgbClr val="1C1C1E"/>
+                </a:solidFill>
+                <a:latin typeface="맑은 고딕"/>
+                <a:ea typeface="맑은 고딕"/>
+              </a:rPr>
+              <a:t> </a:t>
+            </a:r>
+            <a:r>
+              <a:rPr sz="1100" b="0" dirty="0" err="1">
+                <a:solidFill>
+                  <a:srgbClr val="1C1C1E"/>
+                </a:solidFill>
+                <a:latin typeface="맑은 고딕"/>
+                <a:ea typeface="맑은 고딕"/>
+              </a:rPr>
+              <a:t>표적이</a:t>
+            </a:r>
+            <a:r>
+              <a:rPr sz="1100" b="0" dirty="0">
+                <a:solidFill>
+                  <a:srgbClr val="1C1C1E"/>
+                </a:solidFill>
+                <a:latin typeface="맑은 고딕"/>
+                <a:ea typeface="맑은 고딕"/>
+              </a:rPr>
+              <a:t> </a:t>
+            </a:r>
+            <a:r>
+              <a:rPr sz="1100" b="0" dirty="0" err="1">
+                <a:solidFill>
+                  <a:srgbClr val="1C1C1E"/>
+                </a:solidFill>
+                <a:latin typeface="맑은 고딕"/>
+                <a:ea typeface="맑은 고딕"/>
+              </a:rPr>
+              <a:t>된다</a:t>
+            </a:r>
+            <a:endParaRPr sz="1100" b="0" dirty="0">
+              <a:solidFill>
+                <a:srgbClr val="1C1C1E"/>
+              </a:solidFill>
+              <a:latin typeface="맑은 고딕"/>
+              <a:ea typeface="맑은 고딕"/>
+            </a:endParaRPr>
           </a:p>
           <a:p>
             <a:pPr marL="160020" indent="-160020">
@@ -13221,14 +15156,304 @@
               </a:spcAft>
             </a:pPr>
             <a:r>
-              <a:rPr sz="1100" b="0">
-                <a:solidFill>
-                  <a:srgbClr val="1C1C1E"/>
-                </a:solidFill>
-                <a:latin typeface="맑은 고딕"/>
-                <a:ea typeface="맑은 고딕"/>
-              </a:rPr>
-              <a:t>• 정부는 2년마다 전국을 재어 A·B·C 등급을 매기고, 지정 지역 병원에 분만실 설치비 약 10억 원 + 연 운영비 약 5억 원을 지원 (15년 누적 57개소)</a:t>
+              <a:rPr sz="1100" b="0" dirty="0">
+                <a:solidFill>
+                  <a:srgbClr val="1C1C1E"/>
+                </a:solidFill>
+                <a:latin typeface="맑은 고딕"/>
+                <a:ea typeface="맑은 고딕"/>
+              </a:rPr>
+              <a:t>• </a:t>
+            </a:r>
+            <a:r>
+              <a:rPr sz="1100" b="0" dirty="0" err="1">
+                <a:solidFill>
+                  <a:srgbClr val="1C1C1E"/>
+                </a:solidFill>
+                <a:latin typeface="맑은 고딕"/>
+                <a:ea typeface="맑은 고딕"/>
+              </a:rPr>
+              <a:t>정부는</a:t>
+            </a:r>
+            <a:r>
+              <a:rPr sz="1100" b="0" dirty="0">
+                <a:solidFill>
+                  <a:srgbClr val="1C1C1E"/>
+                </a:solidFill>
+                <a:latin typeface="맑은 고딕"/>
+                <a:ea typeface="맑은 고딕"/>
+              </a:rPr>
+              <a:t> 2년마다 </a:t>
+            </a:r>
+            <a:r>
+              <a:rPr sz="1100" b="0" dirty="0" err="1">
+                <a:solidFill>
+                  <a:srgbClr val="1C1C1E"/>
+                </a:solidFill>
+                <a:latin typeface="맑은 고딕"/>
+                <a:ea typeface="맑은 고딕"/>
+              </a:rPr>
+              <a:t>전국</a:t>
+            </a:r>
+            <a:r>
+              <a:rPr lang="en-US" sz="1100" b="0" dirty="0">
+                <a:solidFill>
+                  <a:srgbClr val="1C1C1E"/>
+                </a:solidFill>
+                <a:latin typeface="맑은 고딕"/>
+                <a:ea typeface="맑은 고딕"/>
+              </a:rPr>
+              <a:t> </a:t>
+            </a:r>
+            <a:r>
+              <a:rPr lang="ko-KR" altLang="en-US" sz="1100" b="0" dirty="0">
+                <a:solidFill>
+                  <a:srgbClr val="1C1C1E"/>
+                </a:solidFill>
+                <a:latin typeface="맑은 고딕"/>
+                <a:ea typeface="맑은 고딕"/>
+              </a:rPr>
+              <a:t>단위 조사를 통해</a:t>
+            </a:r>
+            <a:r>
+              <a:rPr sz="1100" b="0" dirty="0">
+                <a:solidFill>
+                  <a:srgbClr val="1C1C1E"/>
+                </a:solidFill>
+                <a:latin typeface="맑은 고딕"/>
+                <a:ea typeface="맑은 고딕"/>
+              </a:rPr>
+              <a:t> </a:t>
+            </a:r>
+            <a:r>
+              <a:rPr lang="ko-KR" altLang="en-US" sz="1100" b="0" dirty="0">
+                <a:solidFill>
+                  <a:srgbClr val="1C1C1E"/>
+                </a:solidFill>
+                <a:latin typeface="맑은 고딕"/>
+                <a:ea typeface="맑은 고딕"/>
+              </a:rPr>
+              <a:t>취약지를 선정하여 </a:t>
+            </a:r>
+            <a:r>
+              <a:rPr sz="1100" b="0" dirty="0">
+                <a:solidFill>
+                  <a:srgbClr val="1C1C1E"/>
+                </a:solidFill>
+                <a:latin typeface="맑은 고딕"/>
+                <a:ea typeface="맑은 고딕"/>
+              </a:rPr>
+              <a:t>A·B·C </a:t>
+            </a:r>
+            <a:r>
+              <a:rPr sz="1100" b="0" dirty="0" err="1">
+                <a:solidFill>
+                  <a:srgbClr val="1C1C1E"/>
+                </a:solidFill>
+                <a:latin typeface="맑은 고딕"/>
+                <a:ea typeface="맑은 고딕"/>
+              </a:rPr>
+              <a:t>등급을</a:t>
+            </a:r>
+            <a:r>
+              <a:rPr sz="1100" b="0" dirty="0">
+                <a:solidFill>
+                  <a:srgbClr val="1C1C1E"/>
+                </a:solidFill>
+                <a:latin typeface="맑은 고딕"/>
+                <a:ea typeface="맑은 고딕"/>
+              </a:rPr>
+              <a:t> </a:t>
+            </a:r>
+            <a:r>
+              <a:rPr sz="1100" b="0" dirty="0" err="1">
+                <a:solidFill>
+                  <a:srgbClr val="1C1C1E"/>
+                </a:solidFill>
+                <a:latin typeface="맑은 고딕"/>
+                <a:ea typeface="맑은 고딕"/>
+              </a:rPr>
+              <a:t>매기고</a:t>
+            </a:r>
+            <a:r>
+              <a:rPr sz="1100" b="0" dirty="0">
+                <a:solidFill>
+                  <a:srgbClr val="1C1C1E"/>
+                </a:solidFill>
+                <a:latin typeface="맑은 고딕"/>
+                <a:ea typeface="맑은 고딕"/>
+              </a:rPr>
+              <a:t>, </a:t>
+            </a:r>
+            <a:r>
+              <a:rPr sz="1100" b="0" dirty="0" err="1">
+                <a:solidFill>
+                  <a:srgbClr val="1C1C1E"/>
+                </a:solidFill>
+                <a:latin typeface="맑은 고딕"/>
+                <a:ea typeface="맑은 고딕"/>
+              </a:rPr>
+              <a:t>지정</a:t>
+            </a:r>
+            <a:r>
+              <a:rPr sz="1100" b="0" dirty="0">
+                <a:solidFill>
+                  <a:srgbClr val="1C1C1E"/>
+                </a:solidFill>
+                <a:latin typeface="맑은 고딕"/>
+                <a:ea typeface="맑은 고딕"/>
+              </a:rPr>
+              <a:t> </a:t>
+            </a:r>
+            <a:r>
+              <a:rPr sz="1100" b="0" dirty="0" err="1">
+                <a:solidFill>
+                  <a:srgbClr val="1C1C1E"/>
+                </a:solidFill>
+                <a:latin typeface="맑은 고딕"/>
+                <a:ea typeface="맑은 고딕"/>
+              </a:rPr>
+              <a:t>지역</a:t>
+            </a:r>
+            <a:r>
+              <a:rPr lang="ko-KR" altLang="en-US" sz="1100" b="0" dirty="0">
+                <a:solidFill>
+                  <a:srgbClr val="1C1C1E"/>
+                </a:solidFill>
+                <a:latin typeface="맑은 고딕"/>
+                <a:ea typeface="맑은 고딕"/>
+              </a:rPr>
+              <a:t>중 일부 병원을 선발하여</a:t>
+            </a:r>
+            <a:r>
+              <a:rPr sz="1100" b="0" dirty="0">
+                <a:solidFill>
+                  <a:srgbClr val="1C1C1E"/>
+                </a:solidFill>
+                <a:latin typeface="맑은 고딕"/>
+                <a:ea typeface="맑은 고딕"/>
+              </a:rPr>
+              <a:t> </a:t>
+            </a:r>
+            <a:r>
+              <a:rPr sz="1100" b="0" dirty="0" err="1">
+                <a:solidFill>
+                  <a:srgbClr val="1C1C1E"/>
+                </a:solidFill>
+                <a:latin typeface="맑은 고딕"/>
+                <a:ea typeface="맑은 고딕"/>
+              </a:rPr>
+              <a:t>분만실</a:t>
+            </a:r>
+            <a:r>
+              <a:rPr sz="1100" b="0" dirty="0">
+                <a:solidFill>
+                  <a:srgbClr val="1C1C1E"/>
+                </a:solidFill>
+                <a:latin typeface="맑은 고딕"/>
+                <a:ea typeface="맑은 고딕"/>
+              </a:rPr>
+              <a:t> </a:t>
+            </a:r>
+            <a:r>
+              <a:rPr sz="1100" b="0" dirty="0" err="1">
+                <a:solidFill>
+                  <a:srgbClr val="1C1C1E"/>
+                </a:solidFill>
+                <a:latin typeface="맑은 고딕"/>
+                <a:ea typeface="맑은 고딕"/>
+              </a:rPr>
+              <a:t>설치비</a:t>
+            </a:r>
+            <a:r>
+              <a:rPr sz="1100" b="0" dirty="0">
+                <a:solidFill>
+                  <a:srgbClr val="1C1C1E"/>
+                </a:solidFill>
+                <a:latin typeface="맑은 고딕"/>
+                <a:ea typeface="맑은 고딕"/>
+              </a:rPr>
+              <a:t> 약 10억 원 + 연 </a:t>
+            </a:r>
+            <a:r>
+              <a:rPr sz="1100" b="0" dirty="0" err="1">
+                <a:solidFill>
+                  <a:srgbClr val="1C1C1E"/>
+                </a:solidFill>
+                <a:latin typeface="맑은 고딕"/>
+                <a:ea typeface="맑은 고딕"/>
+              </a:rPr>
+              <a:t>운영비</a:t>
+            </a:r>
+            <a:r>
+              <a:rPr sz="1100" b="0" dirty="0">
+                <a:solidFill>
+                  <a:srgbClr val="1C1C1E"/>
+                </a:solidFill>
+                <a:latin typeface="맑은 고딕"/>
+                <a:ea typeface="맑은 고딕"/>
+              </a:rPr>
+              <a:t> 약 5억 </a:t>
+            </a:r>
+            <a:r>
+              <a:rPr sz="1100" b="0" dirty="0" err="1">
+                <a:solidFill>
+                  <a:srgbClr val="1C1C1E"/>
+                </a:solidFill>
+                <a:latin typeface="맑은 고딕"/>
+                <a:ea typeface="맑은 고딕"/>
+              </a:rPr>
+              <a:t>원을</a:t>
+            </a:r>
+            <a:r>
+              <a:rPr sz="1100" b="0" dirty="0">
+                <a:solidFill>
+                  <a:srgbClr val="1C1C1E"/>
+                </a:solidFill>
+                <a:latin typeface="맑은 고딕"/>
+                <a:ea typeface="맑은 고딕"/>
+              </a:rPr>
+              <a:t> </a:t>
+            </a:r>
+            <a:r>
+              <a:rPr sz="1100" b="0" dirty="0" err="1">
+                <a:solidFill>
+                  <a:srgbClr val="1C1C1E"/>
+                </a:solidFill>
+                <a:latin typeface="맑은 고딕"/>
+                <a:ea typeface="맑은 고딕"/>
+              </a:rPr>
+              <a:t>지원</a:t>
+            </a:r>
+            <a:r>
+              <a:rPr sz="1100" b="0" dirty="0">
+                <a:solidFill>
+                  <a:srgbClr val="1C1C1E"/>
+                </a:solidFill>
+                <a:latin typeface="맑은 고딕"/>
+                <a:ea typeface="맑은 고딕"/>
+              </a:rPr>
+              <a:t> (15년 </a:t>
+            </a:r>
+            <a:r>
+              <a:rPr sz="1100" b="0" dirty="0" err="1">
+                <a:solidFill>
+                  <a:srgbClr val="1C1C1E"/>
+                </a:solidFill>
+                <a:latin typeface="맑은 고딕"/>
+                <a:ea typeface="맑은 고딕"/>
+              </a:rPr>
+              <a:t>누적</a:t>
+            </a:r>
+            <a:r>
+              <a:rPr sz="1100" b="0" dirty="0">
+                <a:solidFill>
+                  <a:srgbClr val="1C1C1E"/>
+                </a:solidFill>
+                <a:latin typeface="맑은 고딕"/>
+                <a:ea typeface="맑은 고딕"/>
+              </a:rPr>
+              <a:t> 57개소)</a:t>
             </a:r>
           </a:p>
         </p:txBody>
@@ -13242,7 +15467,7 @@
         <p:spPr>
           <a:xfrm>
             <a:off x="502920" y="5230368"/>
-            <a:ext cx="11247120" cy="1005840"/>
+            <a:ext cx="11247120" cy="331629"/>
           </a:xfrm>
           <a:prstGeom prst="rect">
             <a:avLst/>
@@ -13264,35 +15489,272 @@
               </a:spcAft>
             </a:pPr>
             <a:r>
-              <a:rPr sz="1500" b="1">
-                <a:solidFill>
-                  <a:srgbClr val="1C1C1E"/>
-                </a:solidFill>
-                <a:latin typeface="맑은 고딕"/>
-                <a:ea typeface="맑은 고딕"/>
-              </a:rPr>
-              <a:t>통로가 이미 깔려 있다면, 물어야 할 것은 "얼마나 부족한가"가 아니다.</a:t>
-            </a:r>
-          </a:p>
-          <a:p>
-            <a:pPr>
-              <a:lnSpc>
-                <a:spcPct val="114000"/>
-              </a:lnSpc>
-              <a:spcAft>
-                <a:spcPts val="0"/>
-              </a:spcAft>
-            </a:pPr>
-            <a:r>
-              <a:rPr sz="1500" b="1">
+              <a:rPr sz="1500" b="1" dirty="0">
+                <a:solidFill>
+                  <a:srgbClr val="1C1C1E"/>
+                </a:solidFill>
+                <a:latin typeface="맑은 고딕"/>
+                <a:ea typeface="맑은 고딕"/>
+              </a:rPr>
+              <a:t>"</a:t>
+            </a:r>
+            <a:r>
+              <a:rPr lang="ko-KR" altLang="en-US" sz="1500" b="1" dirty="0">
+                <a:solidFill>
+                  <a:srgbClr val="1C1C1E"/>
+                </a:solidFill>
+                <a:latin typeface="맑은 고딕"/>
+                <a:ea typeface="맑은 고딕"/>
+              </a:rPr>
+              <a:t>의료자원이 </a:t>
+            </a:r>
+            <a:r>
+              <a:rPr sz="1500" b="1" dirty="0" err="1">
+                <a:solidFill>
+                  <a:srgbClr val="1C1C1E"/>
+                </a:solidFill>
+                <a:latin typeface="맑은 고딕"/>
+                <a:ea typeface="맑은 고딕"/>
+              </a:rPr>
+              <a:t>얼마나</a:t>
+            </a:r>
+            <a:r>
+              <a:rPr sz="1500" b="1" dirty="0">
+                <a:solidFill>
+                  <a:srgbClr val="1C1C1E"/>
+                </a:solidFill>
+                <a:latin typeface="맑은 고딕"/>
+                <a:ea typeface="맑은 고딕"/>
+              </a:rPr>
+              <a:t> </a:t>
+            </a:r>
+            <a:r>
+              <a:rPr sz="1500" b="1" dirty="0" err="1">
+                <a:solidFill>
+                  <a:srgbClr val="1C1C1E"/>
+                </a:solidFill>
+                <a:latin typeface="맑은 고딕"/>
+                <a:ea typeface="맑은 고딕"/>
+              </a:rPr>
+              <a:t>부족한가"가</a:t>
+            </a:r>
+            <a:r>
+              <a:rPr sz="1500" b="1" dirty="0">
+                <a:solidFill>
+                  <a:srgbClr val="1C1C1E"/>
+                </a:solidFill>
+                <a:latin typeface="맑은 고딕"/>
+                <a:ea typeface="맑은 고딕"/>
+              </a:rPr>
+              <a:t> </a:t>
+            </a:r>
+            <a:r>
+              <a:rPr lang="ko-KR" altLang="en-US" sz="1500" b="1" dirty="0">
+                <a:solidFill>
+                  <a:srgbClr val="1C1C1E"/>
+                </a:solidFill>
+                <a:latin typeface="맑은 고딕"/>
+                <a:ea typeface="맑은 고딕"/>
+              </a:rPr>
+              <a:t>아닌</a:t>
+            </a:r>
+            <a:r>
+              <a:rPr lang="en-US" altLang="ko-KR" sz="1500" b="1" dirty="0">
+                <a:solidFill>
+                  <a:srgbClr val="1C1C1E"/>
+                </a:solidFill>
+                <a:latin typeface="맑은 고딕"/>
+                <a:ea typeface="맑은 고딕"/>
+              </a:rPr>
+              <a:t>, </a:t>
+            </a:r>
+            <a:r>
+              <a:rPr sz="1500" b="1" dirty="0">
                 <a:solidFill>
                   <a:srgbClr val="000000"/>
                 </a:solidFill>
                 <a:latin typeface="맑은 고딕"/>
                 <a:ea typeface="맑은 고딕"/>
               </a:rPr>
-              <a:t>"지금 있는 것은 필요한 곳으로 제대로 가고 있는가" — 이것이 본 연구의 질문이다.</a:t>
-            </a:r>
+              <a:t>"</a:t>
+            </a:r>
+            <a:r>
+              <a:rPr lang="ko-KR" altLang="en-US" sz="1500" b="1" dirty="0">
+                <a:solidFill>
+                  <a:srgbClr val="000000"/>
+                </a:solidFill>
+                <a:latin typeface="맑은 고딕"/>
+                <a:ea typeface="맑은 고딕"/>
+              </a:rPr>
+              <a:t>현재 주어진 자원이 </a:t>
+            </a:r>
+            <a:r>
+              <a:rPr sz="1500" b="1" dirty="0" err="1">
+                <a:solidFill>
+                  <a:srgbClr val="000000"/>
+                </a:solidFill>
+                <a:latin typeface="맑은 고딕"/>
+                <a:ea typeface="맑은 고딕"/>
+              </a:rPr>
+              <a:t>필요한</a:t>
+            </a:r>
+            <a:r>
+              <a:rPr sz="1500" b="1" dirty="0">
+                <a:solidFill>
+                  <a:srgbClr val="000000"/>
+                </a:solidFill>
+                <a:latin typeface="맑은 고딕"/>
+                <a:ea typeface="맑은 고딕"/>
+              </a:rPr>
+              <a:t> </a:t>
+            </a:r>
+            <a:r>
+              <a:rPr sz="1500" b="1" dirty="0" err="1">
+                <a:solidFill>
+                  <a:srgbClr val="000000"/>
+                </a:solidFill>
+                <a:latin typeface="맑은 고딕"/>
+                <a:ea typeface="맑은 고딕"/>
+              </a:rPr>
+              <a:t>곳으로</a:t>
+            </a:r>
+            <a:r>
+              <a:rPr sz="1500" b="1" dirty="0">
+                <a:solidFill>
+                  <a:srgbClr val="000000"/>
+                </a:solidFill>
+                <a:latin typeface="맑은 고딕"/>
+                <a:ea typeface="맑은 고딕"/>
+              </a:rPr>
+              <a:t> </a:t>
+            </a:r>
+            <a:r>
+              <a:rPr sz="1500" b="1" dirty="0" err="1">
+                <a:solidFill>
+                  <a:srgbClr val="000000"/>
+                </a:solidFill>
+                <a:latin typeface="맑은 고딕"/>
+                <a:ea typeface="맑은 고딕"/>
+              </a:rPr>
+              <a:t>제대로</a:t>
+            </a:r>
+            <a:r>
+              <a:rPr sz="1500" b="1" dirty="0">
+                <a:solidFill>
+                  <a:srgbClr val="000000"/>
+                </a:solidFill>
+                <a:latin typeface="맑은 고딕"/>
+                <a:ea typeface="맑은 고딕"/>
+              </a:rPr>
+              <a:t> </a:t>
+            </a:r>
+            <a:r>
+              <a:rPr sz="1500" b="1" dirty="0" err="1">
+                <a:solidFill>
+                  <a:srgbClr val="000000"/>
+                </a:solidFill>
+                <a:latin typeface="맑은 고딕"/>
+                <a:ea typeface="맑은 고딕"/>
+              </a:rPr>
+              <a:t>가고</a:t>
+            </a:r>
+            <a:r>
+              <a:rPr sz="1500" b="1" dirty="0">
+                <a:solidFill>
+                  <a:srgbClr val="000000"/>
+                </a:solidFill>
+                <a:latin typeface="맑은 고딕"/>
+                <a:ea typeface="맑은 고딕"/>
+              </a:rPr>
+              <a:t> </a:t>
+            </a:r>
+            <a:r>
+              <a:rPr sz="1500" b="1" dirty="0" err="1">
+                <a:solidFill>
+                  <a:srgbClr val="000000"/>
+                </a:solidFill>
+                <a:latin typeface="맑은 고딕"/>
+                <a:ea typeface="맑은 고딕"/>
+              </a:rPr>
+              <a:t>있는가</a:t>
+            </a:r>
+            <a:r>
+              <a:rPr sz="1500" b="1" dirty="0">
+                <a:solidFill>
+                  <a:srgbClr val="000000"/>
+                </a:solidFill>
+                <a:latin typeface="맑은 고딕"/>
+                <a:ea typeface="맑은 고딕"/>
+              </a:rPr>
+              <a:t>" — </a:t>
+            </a:r>
+            <a:r>
+              <a:rPr sz="1500" b="1" dirty="0" err="1">
+                <a:solidFill>
+                  <a:srgbClr val="000000"/>
+                </a:solidFill>
+                <a:latin typeface="맑은 고딕"/>
+                <a:ea typeface="맑은 고딕"/>
+              </a:rPr>
+              <a:t>이것이</a:t>
+            </a:r>
+            <a:r>
+              <a:rPr sz="1500" b="1" dirty="0">
+                <a:solidFill>
+                  <a:srgbClr val="000000"/>
+                </a:solidFill>
+                <a:latin typeface="맑은 고딕"/>
+                <a:ea typeface="맑은 고딕"/>
+              </a:rPr>
+              <a:t> 본 </a:t>
+            </a:r>
+            <a:r>
+              <a:rPr sz="1500" b="1" dirty="0" err="1">
+                <a:solidFill>
+                  <a:srgbClr val="000000"/>
+                </a:solidFill>
+                <a:latin typeface="맑은 고딕"/>
+                <a:ea typeface="맑은 고딕"/>
+              </a:rPr>
+              <a:t>연구의</a:t>
+            </a:r>
+            <a:r>
+              <a:rPr sz="1500" b="1" dirty="0">
+                <a:solidFill>
+                  <a:srgbClr val="000000"/>
+                </a:solidFill>
+                <a:latin typeface="맑은 고딕"/>
+                <a:ea typeface="맑은 고딕"/>
+              </a:rPr>
+              <a:t> </a:t>
+            </a:r>
+            <a:r>
+              <a:rPr sz="1500" b="1" dirty="0" err="1">
+                <a:solidFill>
+                  <a:srgbClr val="000000"/>
+                </a:solidFill>
+                <a:latin typeface="맑은 고딕"/>
+                <a:ea typeface="맑은 고딕"/>
+              </a:rPr>
+              <a:t>질문이다</a:t>
+            </a:r>
+            <a:r>
+              <a:rPr sz="1500" b="1" dirty="0">
+                <a:solidFill>
+                  <a:srgbClr val="000000"/>
+                </a:solidFill>
+                <a:latin typeface="맑은 고딕"/>
+                <a:ea typeface="맑은 고딕"/>
+              </a:rPr>
+              <a:t>.</a:t>
+            </a:r>
+            <a:endParaRPr lang="en-US" sz="1500" b="1" dirty="0">
+              <a:solidFill>
+                <a:srgbClr val="000000"/>
+              </a:solidFill>
+              <a:latin typeface="맑은 고딕"/>
+              <a:ea typeface="맑은 고딕"/>
+            </a:endParaRPr>
           </a:p>
         </p:txBody>
       </p:sp>

--- a/04_제출물/데이터분석_결과보고서.pptx
+++ b/04_제출물/데이터분석_결과보고서.pptx
@@ -15286,34 +15286,14 @@
               <a:t>, </a:t>
             </a:r>
             <a:r>
-              <a:rPr sz="1100" b="0" dirty="0" err="1">
-                <a:solidFill>
-                  <a:srgbClr val="1C1C1E"/>
-                </a:solidFill>
-                <a:latin typeface="맑은 고딕"/>
-                <a:ea typeface="맑은 고딕"/>
-              </a:rPr>
-              <a:t>지정</a:t>
-            </a:r>
-            <a:r>
-              <a:rPr sz="1100" b="0" dirty="0">
-                <a:solidFill>
-                  <a:srgbClr val="1C1C1E"/>
-                </a:solidFill>
-                <a:latin typeface="맑은 고딕"/>
-                <a:ea typeface="맑은 고딕"/>
-              </a:rPr>
-              <a:t> </a:t>
-            </a:r>
-            <a:r>
-              <a:rPr sz="1100" b="0" dirty="0" err="1">
-                <a:solidFill>
-                  <a:srgbClr val="1C1C1E"/>
-                </a:solidFill>
-                <a:latin typeface="맑은 고딕"/>
-                <a:ea typeface="맑은 고딕"/>
-              </a:rPr>
-              <a:t>지역</a:t>
+              <a:rPr lang="ko-KR" altLang="en-US" sz="1100" dirty="0">
+                <a:solidFill>
+                  <a:srgbClr val="1C1C1E"/>
+                </a:solidFill>
+                <a:latin typeface="맑은 고딕"/>
+                <a:ea typeface="맑은 고딕"/>
+              </a:rPr>
+              <a:t>해당 지역 내</a:t>
             </a:r>
             <a:r>
               <a:rPr lang="ko-KR" altLang="en-US" sz="1100" b="0" dirty="0">
@@ -15323,7 +15303,7 @@
                 <a:latin typeface="맑은 고딕"/>
                 <a:ea typeface="맑은 고딕"/>
               </a:rPr>
-              <a:t>중 일부 병원을 선발하여</a:t>
+              <a:t> 일부 병원을 선발하여</a:t>
             </a:r>
             <a:r>
               <a:rPr sz="1100" b="0" dirty="0">
@@ -16229,8 +16209,8 @@
         </p:nvSpPr>
         <p:spPr>
           <a:xfrm>
-            <a:off x="960120" y="274320"/>
-            <a:ext cx="9692640" cy="685800"/>
+            <a:off x="960120" y="399564"/>
+            <a:ext cx="9692640" cy="435312"/>
           </a:xfrm>
           <a:prstGeom prst="rect">
             <a:avLst/>
@@ -16252,15 +16232,62 @@
               </a:spcAft>
             </a:pPr>
             <a:r>
-              <a:rPr sz="2150" b="1">
-                <a:solidFill>
-                  <a:srgbClr val="1C1C1E"/>
-                </a:solidFill>
-                <a:latin typeface="맑은 고딕"/>
-                <a:ea typeface="맑은 고딕"/>
-              </a:rPr>
-              <a:t>연구 요약 — 네 가지 발견</a:t>
-            </a:r>
+              <a:rPr lang="ko-KR" altLang="en-US" sz="2150" b="1" dirty="0">
+                <a:solidFill>
+                  <a:srgbClr val="1C1C1E"/>
+                </a:solidFill>
+                <a:latin typeface="맑은 고딕"/>
+                <a:ea typeface="맑은 고딕"/>
+              </a:rPr>
+              <a:t>데이터 분석을 통한 </a:t>
+            </a:r>
+            <a:r>
+              <a:rPr sz="2150" b="1" dirty="0">
+                <a:solidFill>
+                  <a:srgbClr val="1C1C1E"/>
+                </a:solidFill>
+                <a:latin typeface="맑은 고딕"/>
+                <a:ea typeface="맑은 고딕"/>
+              </a:rPr>
+              <a:t>네 </a:t>
+            </a:r>
+            <a:r>
+              <a:rPr sz="2150" b="1" dirty="0" err="1">
+                <a:solidFill>
+                  <a:srgbClr val="1C1C1E"/>
+                </a:solidFill>
+                <a:latin typeface="맑은 고딕"/>
+                <a:ea typeface="맑은 고딕"/>
+              </a:rPr>
+              <a:t>가지</a:t>
+            </a:r>
+            <a:r>
+              <a:rPr sz="2150" b="1" dirty="0">
+                <a:solidFill>
+                  <a:srgbClr val="1C1C1E"/>
+                </a:solidFill>
+                <a:latin typeface="맑은 고딕"/>
+                <a:ea typeface="맑은 고딕"/>
+              </a:rPr>
+              <a:t> </a:t>
+            </a:r>
+            <a:r>
+              <a:rPr sz="2150" b="1" dirty="0" err="1">
+                <a:solidFill>
+                  <a:srgbClr val="1C1C1E"/>
+                </a:solidFill>
+                <a:latin typeface="맑은 고딕"/>
+                <a:ea typeface="맑은 고딕"/>
+              </a:rPr>
+              <a:t>발견</a:t>
+            </a:r>
+            <a:endParaRPr sz="2150" b="1" dirty="0">
+              <a:solidFill>
+                <a:srgbClr val="1C1C1E"/>
+              </a:solidFill>
+              <a:latin typeface="맑은 고딕"/>
+              <a:ea typeface="맑은 고딕"/>
+            </a:endParaRPr>
           </a:p>
         </p:txBody>
       </p:sp>
@@ -16467,7 +16494,7 @@
         <p:spPr>
           <a:xfrm>
             <a:off x="685800" y="1362456"/>
-            <a:ext cx="5166359" cy="1664208"/>
+            <a:ext cx="5166359" cy="958660"/>
           </a:xfrm>
           <a:prstGeom prst="rect">
             <a:avLst/>
@@ -16489,15 +16516,82 @@
               </a:spcAft>
             </a:pPr>
             <a:r>
-              <a:rPr sz="1300" b="1">
+              <a:rPr sz="1300" b="1" dirty="0" err="1">
                 <a:solidFill>
                   <a:srgbClr val="33393F"/>
                 </a:solidFill>
                 <a:latin typeface="맑은 고딕"/>
                 <a:ea typeface="맑은 고딕"/>
               </a:rPr>
-              <a:t>발견 1 · 지정은 이동시간만 본다</a:t>
-            </a:r>
+              <a:t>발견</a:t>
+            </a:r>
+            <a:r>
+              <a:rPr sz="1300" b="1" dirty="0">
+                <a:solidFill>
+                  <a:srgbClr val="33393F"/>
+                </a:solidFill>
+                <a:latin typeface="맑은 고딕"/>
+                <a:ea typeface="맑은 고딕"/>
+              </a:rPr>
+              <a:t> 1 · </a:t>
+            </a:r>
+            <a:r>
+              <a:rPr sz="1300" b="1" dirty="0" err="1">
+                <a:solidFill>
+                  <a:srgbClr val="33393F"/>
+                </a:solidFill>
+                <a:latin typeface="맑은 고딕"/>
+                <a:ea typeface="맑은 고딕"/>
+              </a:rPr>
+              <a:t>지정은</a:t>
+            </a:r>
+            <a:r>
+              <a:rPr sz="1300" b="1" dirty="0">
+                <a:solidFill>
+                  <a:srgbClr val="33393F"/>
+                </a:solidFill>
+                <a:latin typeface="맑은 고딕"/>
+                <a:ea typeface="맑은 고딕"/>
+              </a:rPr>
+              <a:t> </a:t>
+            </a:r>
+            <a:r>
+              <a:rPr sz="1300" b="1" dirty="0" err="1">
+                <a:solidFill>
+                  <a:srgbClr val="33393F"/>
+                </a:solidFill>
+                <a:latin typeface="맑은 고딕"/>
+                <a:ea typeface="맑은 고딕"/>
+              </a:rPr>
+              <a:t>이동시간만</a:t>
+            </a:r>
+            <a:r>
+              <a:rPr sz="1300" b="1" dirty="0">
+                <a:solidFill>
+                  <a:srgbClr val="33393F"/>
+                </a:solidFill>
+                <a:latin typeface="맑은 고딕"/>
+                <a:ea typeface="맑은 고딕"/>
+              </a:rPr>
+              <a:t> </a:t>
+            </a:r>
+            <a:r>
+              <a:rPr sz="1300" b="1" dirty="0" err="1">
+                <a:solidFill>
+                  <a:srgbClr val="33393F"/>
+                </a:solidFill>
+                <a:latin typeface="맑은 고딕"/>
+                <a:ea typeface="맑은 고딕"/>
+              </a:rPr>
+              <a:t>본다</a:t>
+            </a:r>
+            <a:endParaRPr sz="1300" b="1" dirty="0">
+              <a:solidFill>
+                <a:srgbClr val="33393F"/>
+              </a:solidFill>
+              <a:latin typeface="맑은 고딕"/>
+              <a:ea typeface="맑은 고딕"/>
+            </a:endParaRPr>
           </a:p>
           <a:p>
             <a:pPr marL="160020" indent="-160020">
@@ -16509,15 +16603,332 @@
               </a:spcAft>
             </a:pPr>
             <a:r>
-              <a:rPr sz="1150" b="0">
-                <a:solidFill>
-                  <a:srgbClr val="1C1C1E"/>
-                </a:solidFill>
-                <a:latin typeface="맑은 고딕"/>
-                <a:ea typeface="맑은 고딕"/>
-              </a:rPr>
-              <a:t>• 공표 판정식(접근성·TRI)이 실제 지정 159건 중 158건(99.4%)을 재현. 공급 변수를 추가해도 판별력(AUC)은 전혀 늘지 않는다</a:t>
-            </a:r>
+              <a:rPr sz="1150" b="0" dirty="0">
+                <a:solidFill>
+                  <a:srgbClr val="1C1C1E"/>
+                </a:solidFill>
+                <a:latin typeface="맑은 고딕"/>
+                <a:ea typeface="맑은 고딕"/>
+              </a:rPr>
+              <a:t>• </a:t>
+            </a:r>
+            <a:r>
+              <a:rPr lang="ko-KR" altLang="en-US" sz="1150" dirty="0">
+                <a:solidFill>
+                  <a:srgbClr val="1C1C1E"/>
+                </a:solidFill>
+                <a:latin typeface="맑은 고딕"/>
+                <a:ea typeface="맑은 고딕"/>
+              </a:rPr>
+              <a:t>의료</a:t>
+            </a:r>
+            <a:r>
+              <a:rPr lang="ko-KR" altLang="en-US" sz="1150" b="0" dirty="0">
+                <a:solidFill>
+                  <a:srgbClr val="1C1C1E"/>
+                </a:solidFill>
+                <a:latin typeface="맑은 고딕"/>
+                <a:ea typeface="맑은 고딕"/>
+              </a:rPr>
+              <a:t> </a:t>
+            </a:r>
+            <a:r>
+              <a:rPr lang="ko-KR" altLang="en-US" sz="1150" dirty="0">
+                <a:solidFill>
+                  <a:srgbClr val="1C1C1E"/>
+                </a:solidFill>
+                <a:latin typeface="맑은 고딕"/>
+                <a:ea typeface="맑은 고딕"/>
+              </a:rPr>
+              <a:t>접근성과 </a:t>
+            </a:r>
+            <a:r>
+              <a:rPr lang="en-US" altLang="ko-KR" sz="1150" dirty="0">
+                <a:solidFill>
+                  <a:srgbClr val="1C1C1E"/>
+                </a:solidFill>
+                <a:latin typeface="맑은 고딕"/>
+                <a:ea typeface="맑은 고딕"/>
+              </a:rPr>
+              <a:t>TRI(</a:t>
+            </a:r>
+            <a:r>
+              <a:rPr lang="ko-KR" altLang="en-US" sz="1150" dirty="0">
+                <a:solidFill>
+                  <a:srgbClr val="1C1C1E"/>
+                </a:solidFill>
+                <a:latin typeface="맑은 고딕"/>
+                <a:ea typeface="맑은 고딕"/>
+              </a:rPr>
+              <a:t>기준시간내 </a:t>
+            </a:r>
+            <a:r>
+              <a:rPr lang="ko-KR" altLang="en-US" sz="1150" dirty="0" err="1">
+                <a:solidFill>
+                  <a:srgbClr val="1C1C1E"/>
+                </a:solidFill>
+                <a:latin typeface="맑은 고딕"/>
+                <a:ea typeface="맑은 고딕"/>
+              </a:rPr>
+              <a:t>의료이용률</a:t>
+            </a:r>
+            <a:r>
+              <a:rPr lang="en-US" altLang="ko-KR" sz="1150" dirty="0">
+                <a:solidFill>
+                  <a:srgbClr val="1C1C1E"/>
+                </a:solidFill>
+                <a:latin typeface="맑은 고딕"/>
+                <a:ea typeface="맑은 고딕"/>
+              </a:rPr>
+              <a:t>) </a:t>
+            </a:r>
+            <a:r>
+              <a:rPr lang="ko-KR" altLang="en-US" sz="1150" dirty="0">
+                <a:solidFill>
+                  <a:srgbClr val="1C1C1E"/>
+                </a:solidFill>
+                <a:latin typeface="맑은 고딕"/>
+                <a:ea typeface="맑은 고딕"/>
+              </a:rPr>
+              <a:t>만 반영하는 </a:t>
+            </a:r>
+            <a:r>
+              <a:rPr sz="1150" b="0" dirty="0" err="1">
+                <a:solidFill>
+                  <a:srgbClr val="1C1C1E"/>
+                </a:solidFill>
+                <a:latin typeface="맑은 고딕"/>
+                <a:ea typeface="맑은 고딕"/>
+              </a:rPr>
+              <a:t>공표</a:t>
+            </a:r>
+            <a:r>
+              <a:rPr sz="1150" b="0" dirty="0">
+                <a:solidFill>
+                  <a:srgbClr val="1C1C1E"/>
+                </a:solidFill>
+                <a:latin typeface="맑은 고딕"/>
+                <a:ea typeface="맑은 고딕"/>
+              </a:rPr>
+              <a:t> </a:t>
+            </a:r>
+            <a:r>
+              <a:rPr sz="1150" b="0" dirty="0" err="1">
+                <a:solidFill>
+                  <a:srgbClr val="1C1C1E"/>
+                </a:solidFill>
+                <a:latin typeface="맑은 고딕"/>
+                <a:ea typeface="맑은 고딕"/>
+              </a:rPr>
+              <a:t>판정식이</a:t>
+            </a:r>
+            <a:r>
+              <a:rPr sz="1150" b="0" dirty="0">
+                <a:solidFill>
+                  <a:srgbClr val="1C1C1E"/>
+                </a:solidFill>
+                <a:latin typeface="맑은 고딕"/>
+                <a:ea typeface="맑은 고딕"/>
+              </a:rPr>
+              <a:t> </a:t>
+            </a:r>
+            <a:r>
+              <a:rPr sz="1150" b="0" dirty="0" err="1">
+                <a:solidFill>
+                  <a:srgbClr val="1C1C1E"/>
+                </a:solidFill>
+                <a:latin typeface="맑은 고딕"/>
+                <a:ea typeface="맑은 고딕"/>
+              </a:rPr>
+              <a:t>실제</a:t>
+            </a:r>
+            <a:r>
+              <a:rPr sz="1150" b="0" dirty="0">
+                <a:solidFill>
+                  <a:srgbClr val="1C1C1E"/>
+                </a:solidFill>
+                <a:latin typeface="맑은 고딕"/>
+                <a:ea typeface="맑은 고딕"/>
+              </a:rPr>
+              <a:t> </a:t>
+            </a:r>
+            <a:r>
+              <a:rPr sz="1150" b="0" dirty="0" err="1">
+                <a:solidFill>
+                  <a:srgbClr val="1C1C1E"/>
+                </a:solidFill>
+                <a:latin typeface="맑은 고딕"/>
+                <a:ea typeface="맑은 고딕"/>
+              </a:rPr>
+              <a:t>지정</a:t>
+            </a:r>
+            <a:r>
+              <a:rPr sz="1150" b="0" dirty="0">
+                <a:solidFill>
+                  <a:srgbClr val="1C1C1E"/>
+                </a:solidFill>
+                <a:latin typeface="맑은 고딕"/>
+                <a:ea typeface="맑은 고딕"/>
+              </a:rPr>
+              <a:t> 159건 중 158건(99.4%)을 </a:t>
+            </a:r>
+            <a:r>
+              <a:rPr sz="1150" b="0" dirty="0" err="1">
+                <a:solidFill>
+                  <a:srgbClr val="1C1C1E"/>
+                </a:solidFill>
+                <a:latin typeface="맑은 고딕"/>
+                <a:ea typeface="맑은 고딕"/>
+              </a:rPr>
+              <a:t>재현</a:t>
+            </a:r>
+            <a:r>
+              <a:rPr sz="1150" b="0" dirty="0">
+                <a:solidFill>
+                  <a:srgbClr val="1C1C1E"/>
+                </a:solidFill>
+                <a:latin typeface="맑은 고딕"/>
+                <a:ea typeface="맑은 고딕"/>
+              </a:rPr>
+              <a:t>. </a:t>
+            </a:r>
+            <a:r>
+              <a:rPr sz="1150" b="0" dirty="0" err="1">
+                <a:solidFill>
+                  <a:srgbClr val="1C1C1E"/>
+                </a:solidFill>
+                <a:latin typeface="맑은 고딕"/>
+                <a:ea typeface="맑은 고딕"/>
+              </a:rPr>
+              <a:t>공급</a:t>
+            </a:r>
+            <a:r>
+              <a:rPr sz="1150" b="0" dirty="0">
+                <a:solidFill>
+                  <a:srgbClr val="1C1C1E"/>
+                </a:solidFill>
+                <a:latin typeface="맑은 고딕"/>
+                <a:ea typeface="맑은 고딕"/>
+              </a:rPr>
+              <a:t> </a:t>
+            </a:r>
+            <a:r>
+              <a:rPr sz="1150" b="0" dirty="0" err="1">
+                <a:solidFill>
+                  <a:srgbClr val="1C1C1E"/>
+                </a:solidFill>
+                <a:latin typeface="맑은 고딕"/>
+                <a:ea typeface="맑은 고딕"/>
+              </a:rPr>
+              <a:t>변수를</a:t>
+            </a:r>
+            <a:r>
+              <a:rPr sz="1150" b="0" dirty="0">
+                <a:solidFill>
+                  <a:srgbClr val="1C1C1E"/>
+                </a:solidFill>
+                <a:latin typeface="맑은 고딕"/>
+                <a:ea typeface="맑은 고딕"/>
+              </a:rPr>
+              <a:t> </a:t>
+            </a:r>
+            <a:r>
+              <a:rPr sz="1150" b="0" dirty="0" err="1">
+                <a:solidFill>
+                  <a:srgbClr val="1C1C1E"/>
+                </a:solidFill>
+                <a:latin typeface="맑은 고딕"/>
+                <a:ea typeface="맑은 고딕"/>
+              </a:rPr>
+              <a:t>추가해도</a:t>
+            </a:r>
+            <a:r>
+              <a:rPr sz="1150" b="0" dirty="0">
+                <a:solidFill>
+                  <a:srgbClr val="1C1C1E"/>
+                </a:solidFill>
+                <a:latin typeface="맑은 고딕"/>
+                <a:ea typeface="맑은 고딕"/>
+              </a:rPr>
+              <a:t> </a:t>
+            </a:r>
+            <a:r>
+              <a:rPr sz="1150" b="0" dirty="0" err="1">
+                <a:solidFill>
+                  <a:srgbClr val="1C1C1E"/>
+                </a:solidFill>
+                <a:latin typeface="맑은 고딕"/>
+                <a:ea typeface="맑은 고딕"/>
+              </a:rPr>
+              <a:t>판별력</a:t>
+            </a:r>
+            <a:r>
+              <a:rPr sz="1150" b="0" dirty="0">
+                <a:solidFill>
+                  <a:srgbClr val="1C1C1E"/>
+                </a:solidFill>
+                <a:latin typeface="맑은 고딕"/>
+                <a:ea typeface="맑은 고딕"/>
+              </a:rPr>
+              <a:t>(AUC)은 </a:t>
+            </a:r>
+            <a:r>
+              <a:rPr sz="1150" b="0" dirty="0" err="1">
+                <a:solidFill>
+                  <a:srgbClr val="1C1C1E"/>
+                </a:solidFill>
+                <a:latin typeface="맑은 고딕"/>
+                <a:ea typeface="맑은 고딕"/>
+              </a:rPr>
+              <a:t>전혀</a:t>
+            </a:r>
+            <a:r>
+              <a:rPr sz="1150" b="0" dirty="0">
+                <a:solidFill>
+                  <a:srgbClr val="1C1C1E"/>
+                </a:solidFill>
+                <a:latin typeface="맑은 고딕"/>
+                <a:ea typeface="맑은 고딕"/>
+              </a:rPr>
+              <a:t> </a:t>
+            </a:r>
+            <a:r>
+              <a:rPr sz="1150" b="0" dirty="0" err="1">
+                <a:solidFill>
+                  <a:srgbClr val="1C1C1E"/>
+                </a:solidFill>
+                <a:latin typeface="맑은 고딕"/>
+                <a:ea typeface="맑은 고딕"/>
+              </a:rPr>
+              <a:t>늘지</a:t>
+            </a:r>
+            <a:r>
+              <a:rPr sz="1150" b="0" dirty="0">
+                <a:solidFill>
+                  <a:srgbClr val="1C1C1E"/>
+                </a:solidFill>
+                <a:latin typeface="맑은 고딕"/>
+                <a:ea typeface="맑은 고딕"/>
+              </a:rPr>
+              <a:t> </a:t>
+            </a:r>
+            <a:r>
+              <a:rPr sz="1150" b="0" dirty="0" err="1">
+                <a:solidFill>
+                  <a:srgbClr val="1C1C1E"/>
+                </a:solidFill>
+                <a:latin typeface="맑은 고딕"/>
+                <a:ea typeface="맑은 고딕"/>
+              </a:rPr>
+              <a:t>않는다</a:t>
+            </a:r>
+            <a:endParaRPr sz="1150" b="0" dirty="0">
+              <a:solidFill>
+                <a:srgbClr val="1C1C1E"/>
+              </a:solidFill>
+              <a:latin typeface="맑은 고딕"/>
+              <a:ea typeface="맑은 고딕"/>
+            </a:endParaRPr>
           </a:p>
         </p:txBody>
       </p:sp>
@@ -16585,7 +16996,7 @@
         <p:spPr>
           <a:xfrm>
             <a:off x="6446520" y="1362456"/>
-            <a:ext cx="5166359" cy="1664208"/>
+            <a:ext cx="5166359" cy="958660"/>
           </a:xfrm>
           <a:prstGeom prst="rect">
             <a:avLst/>
@@ -16607,15 +17018,112 @@
               </a:spcAft>
             </a:pPr>
             <a:r>
-              <a:rPr sz="1300" b="1">
+              <a:rPr sz="1300" b="1" dirty="0" err="1">
                 <a:solidFill>
                   <a:srgbClr val="000000"/>
                 </a:solidFill>
                 <a:latin typeface="맑은 고딕"/>
                 <a:ea typeface="맑은 고딕"/>
               </a:rPr>
-              <a:t>발견 2 · 공급 공백형 사각지대 실재</a:t>
-            </a:r>
+              <a:t>발견</a:t>
+            </a:r>
+            <a:r>
+              <a:rPr sz="1300" b="1" dirty="0">
+                <a:solidFill>
+                  <a:srgbClr val="000000"/>
+                </a:solidFill>
+                <a:latin typeface="맑은 고딕"/>
+                <a:ea typeface="맑은 고딕"/>
+              </a:rPr>
+              <a:t> 2 · </a:t>
+            </a:r>
+            <a:r>
+              <a:rPr sz="1300" b="1" dirty="0" err="1">
+                <a:solidFill>
+                  <a:srgbClr val="000000"/>
+                </a:solidFill>
+                <a:latin typeface="맑은 고딕"/>
+                <a:ea typeface="맑은 고딕"/>
+              </a:rPr>
+              <a:t>공급</a:t>
+            </a:r>
+            <a:r>
+              <a:rPr sz="1300" b="1" dirty="0">
+                <a:solidFill>
+                  <a:srgbClr val="000000"/>
+                </a:solidFill>
+                <a:latin typeface="맑은 고딕"/>
+                <a:ea typeface="맑은 고딕"/>
+              </a:rPr>
+              <a:t> </a:t>
+            </a:r>
+            <a:r>
+              <a:rPr sz="1300" b="1" dirty="0" err="1">
+                <a:solidFill>
+                  <a:srgbClr val="000000"/>
+                </a:solidFill>
+                <a:latin typeface="맑은 고딕"/>
+                <a:ea typeface="맑은 고딕"/>
+              </a:rPr>
+              <a:t>공백</a:t>
+            </a:r>
+            <a:r>
+              <a:rPr lang="ko-KR" altLang="en-US" sz="1300" b="1" dirty="0">
+                <a:solidFill>
+                  <a:srgbClr val="000000"/>
+                </a:solidFill>
+                <a:latin typeface="맑은 고딕"/>
+                <a:ea typeface="맑은 고딕"/>
+              </a:rPr>
+              <a:t>이 있는</a:t>
+            </a:r>
+            <a:r>
+              <a:rPr sz="1300" b="1" dirty="0">
+                <a:solidFill>
+                  <a:srgbClr val="000000"/>
+                </a:solidFill>
+                <a:latin typeface="맑은 고딕"/>
+                <a:ea typeface="맑은 고딕"/>
+              </a:rPr>
+              <a:t> </a:t>
+            </a:r>
+            <a:r>
+              <a:rPr sz="1300" b="1" dirty="0" err="1">
+                <a:solidFill>
+                  <a:srgbClr val="000000"/>
+                </a:solidFill>
+                <a:latin typeface="맑은 고딕"/>
+                <a:ea typeface="맑은 고딕"/>
+              </a:rPr>
+              <a:t>사각지대</a:t>
+            </a:r>
+            <a:r>
+              <a:rPr lang="en-US" sz="1300" b="1" dirty="0">
+                <a:solidFill>
+                  <a:srgbClr val="000000"/>
+                </a:solidFill>
+                <a:latin typeface="맑은 고딕"/>
+                <a:ea typeface="맑은 고딕"/>
+              </a:rPr>
+              <a:t> </a:t>
+            </a:r>
+            <a:r>
+              <a:rPr lang="ko-KR" altLang="en-US" sz="1300" b="1" dirty="0">
+                <a:solidFill>
+                  <a:srgbClr val="000000"/>
+                </a:solidFill>
+                <a:latin typeface="맑은 고딕"/>
+                <a:ea typeface="맑은 고딕"/>
+              </a:rPr>
+              <a:t>실재</a:t>
+            </a:r>
+            <a:endParaRPr sz="1300" b="1" dirty="0">
+              <a:solidFill>
+                <a:srgbClr val="000000"/>
+              </a:solidFill>
+              <a:latin typeface="맑은 고딕"/>
+              <a:ea typeface="맑은 고딕"/>
+            </a:endParaRPr>
           </a:p>
           <a:p>
             <a:pPr marL="160020" indent="-160020">
@@ -16627,15 +17135,412 @@
               </a:spcAft>
             </a:pPr>
             <a:r>
-              <a:rPr sz="1150" b="0">
-                <a:solidFill>
-                  <a:srgbClr val="1C1C1E"/>
-                </a:solidFill>
-                <a:latin typeface="맑은 고딕"/>
-                <a:ea typeface="맑은 고딕"/>
-              </a:rPr>
-              <a:t>• 거리 기준은 통과하지만 관내 공급이 소멸한 지역 — 분만 완전 사각 5곳(등급 체계 밖), 소아과 5개 지역 입원 5,689건 전량(100%) 관외 유출</a:t>
-            </a:r>
+              <a:rPr sz="1150" b="0" dirty="0">
+                <a:solidFill>
+                  <a:srgbClr val="1C1C1E"/>
+                </a:solidFill>
+                <a:latin typeface="맑은 고딕"/>
+                <a:ea typeface="맑은 고딕"/>
+              </a:rPr>
+              <a:t>• </a:t>
+            </a:r>
+            <a:r>
+              <a:rPr sz="1150" b="0" dirty="0" err="1">
+                <a:solidFill>
+                  <a:srgbClr val="1C1C1E"/>
+                </a:solidFill>
+                <a:latin typeface="맑은 고딕"/>
+                <a:ea typeface="맑은 고딕"/>
+              </a:rPr>
+              <a:t>거리</a:t>
+            </a:r>
+            <a:r>
+              <a:rPr sz="1150" b="0" dirty="0">
+                <a:solidFill>
+                  <a:srgbClr val="1C1C1E"/>
+                </a:solidFill>
+                <a:latin typeface="맑은 고딕"/>
+                <a:ea typeface="맑은 고딕"/>
+              </a:rPr>
+              <a:t> </a:t>
+            </a:r>
+            <a:r>
+              <a:rPr sz="1150" b="0" dirty="0" err="1">
+                <a:solidFill>
+                  <a:srgbClr val="1C1C1E"/>
+                </a:solidFill>
+                <a:latin typeface="맑은 고딕"/>
+                <a:ea typeface="맑은 고딕"/>
+              </a:rPr>
+              <a:t>기준은</a:t>
+            </a:r>
+            <a:r>
+              <a:rPr sz="1150" b="0" dirty="0">
+                <a:solidFill>
+                  <a:srgbClr val="1C1C1E"/>
+                </a:solidFill>
+                <a:latin typeface="맑은 고딕"/>
+                <a:ea typeface="맑은 고딕"/>
+              </a:rPr>
+              <a:t> </a:t>
+            </a:r>
+            <a:r>
+              <a:rPr sz="1150" b="0" dirty="0" err="1">
+                <a:solidFill>
+                  <a:srgbClr val="1C1C1E"/>
+                </a:solidFill>
+                <a:latin typeface="맑은 고딕"/>
+                <a:ea typeface="맑은 고딕"/>
+              </a:rPr>
+              <a:t>통과하지만</a:t>
+            </a:r>
+            <a:r>
+              <a:rPr sz="1150" b="0" dirty="0">
+                <a:solidFill>
+                  <a:srgbClr val="1C1C1E"/>
+                </a:solidFill>
+                <a:latin typeface="맑은 고딕"/>
+                <a:ea typeface="맑은 고딕"/>
+              </a:rPr>
+              <a:t> </a:t>
+            </a:r>
+            <a:r>
+              <a:rPr sz="1150" b="0" dirty="0" err="1">
+                <a:solidFill>
+                  <a:srgbClr val="1C1C1E"/>
+                </a:solidFill>
+                <a:latin typeface="맑은 고딕"/>
+                <a:ea typeface="맑은 고딕"/>
+              </a:rPr>
+              <a:t>관내</a:t>
+            </a:r>
+            <a:r>
+              <a:rPr sz="1150" b="0" dirty="0">
+                <a:solidFill>
+                  <a:srgbClr val="1C1C1E"/>
+                </a:solidFill>
+                <a:latin typeface="맑은 고딕"/>
+                <a:ea typeface="맑은 고딕"/>
+              </a:rPr>
+              <a:t> </a:t>
+            </a:r>
+            <a:r>
+              <a:rPr sz="1150" b="0" dirty="0" err="1">
+                <a:solidFill>
+                  <a:srgbClr val="1C1C1E"/>
+                </a:solidFill>
+                <a:latin typeface="맑은 고딕"/>
+                <a:ea typeface="맑은 고딕"/>
+              </a:rPr>
+              <a:t>공급이</a:t>
+            </a:r>
+            <a:r>
+              <a:rPr sz="1150" b="0" dirty="0">
+                <a:solidFill>
+                  <a:srgbClr val="1C1C1E"/>
+                </a:solidFill>
+                <a:latin typeface="맑은 고딕"/>
+                <a:ea typeface="맑은 고딕"/>
+              </a:rPr>
+              <a:t> </a:t>
+            </a:r>
+            <a:r>
+              <a:rPr sz="1150" b="0" dirty="0" err="1">
+                <a:solidFill>
+                  <a:srgbClr val="1C1C1E"/>
+                </a:solidFill>
+                <a:latin typeface="맑은 고딕"/>
+                <a:ea typeface="맑은 고딕"/>
+              </a:rPr>
+              <a:t>소멸한</a:t>
+            </a:r>
+            <a:r>
+              <a:rPr sz="1150" b="0" dirty="0">
+                <a:solidFill>
+                  <a:srgbClr val="1C1C1E"/>
+                </a:solidFill>
+                <a:latin typeface="맑은 고딕"/>
+                <a:ea typeface="맑은 고딕"/>
+              </a:rPr>
+              <a:t> </a:t>
+            </a:r>
+            <a:r>
+              <a:rPr sz="1150" b="0" dirty="0" err="1">
+                <a:solidFill>
+                  <a:srgbClr val="1C1C1E"/>
+                </a:solidFill>
+                <a:latin typeface="맑은 고딕"/>
+                <a:ea typeface="맑은 고딕"/>
+              </a:rPr>
+              <a:t>지역</a:t>
+            </a:r>
+            <a:r>
+              <a:rPr lang="en-US" sz="1150" b="0" dirty="0">
+                <a:solidFill>
+                  <a:srgbClr val="1C1C1E"/>
+                </a:solidFill>
+                <a:latin typeface="맑은 고딕"/>
+                <a:ea typeface="맑은 고딕"/>
+              </a:rPr>
+              <a:t>(</a:t>
+            </a:r>
+            <a:r>
+              <a:rPr lang="ko-KR" altLang="en-US" sz="1150" b="0" dirty="0">
+                <a:solidFill>
+                  <a:srgbClr val="1C1C1E"/>
+                </a:solidFill>
+                <a:latin typeface="맑은 고딕"/>
+                <a:ea typeface="맑은 고딕"/>
+              </a:rPr>
+              <a:t>가까운 의료시설은 존재하나</a:t>
+            </a:r>
+            <a:r>
+              <a:rPr lang="en-US" altLang="ko-KR" sz="1150" b="0" dirty="0">
+                <a:solidFill>
+                  <a:srgbClr val="1C1C1E"/>
+                </a:solidFill>
+                <a:latin typeface="맑은 고딕"/>
+                <a:ea typeface="맑은 고딕"/>
+              </a:rPr>
+              <a:t>, </a:t>
+            </a:r>
+            <a:r>
+              <a:rPr lang="ko-KR" altLang="en-US" sz="1150" b="0" dirty="0">
+                <a:solidFill>
+                  <a:srgbClr val="1C1C1E"/>
+                </a:solidFill>
+                <a:latin typeface="맑은 고딕"/>
+                <a:ea typeface="맑은 고딕"/>
+              </a:rPr>
+              <a:t>정작 해당 지역 사람들은 </a:t>
+            </a:r>
+            <a:r>
+              <a:rPr lang="ko-KR" altLang="en-US" sz="1150" b="0" dirty="0" err="1">
+                <a:solidFill>
+                  <a:srgbClr val="1C1C1E"/>
+                </a:solidFill>
+                <a:latin typeface="맑은 고딕"/>
+                <a:ea typeface="맑은 고딕"/>
+              </a:rPr>
+              <a:t>타지역</a:t>
+            </a:r>
+            <a:r>
+              <a:rPr lang="ko-KR" altLang="en-US" sz="1150" b="0" dirty="0">
+                <a:solidFill>
+                  <a:srgbClr val="1C1C1E"/>
+                </a:solidFill>
+                <a:latin typeface="맑은 고딕"/>
+                <a:ea typeface="맑은 고딕"/>
+              </a:rPr>
+              <a:t> 의료시설을 이용</a:t>
+            </a:r>
+            <a:r>
+              <a:rPr lang="en-US" altLang="ko-KR" sz="1150" b="0" dirty="0">
+                <a:solidFill>
+                  <a:srgbClr val="1C1C1E"/>
+                </a:solidFill>
+                <a:latin typeface="맑은 고딕"/>
+                <a:ea typeface="맑은 고딕"/>
+              </a:rPr>
+              <a:t>)</a:t>
+            </a:r>
+            <a:r>
+              <a:rPr sz="1150" b="0" dirty="0">
+                <a:solidFill>
+                  <a:srgbClr val="1C1C1E"/>
+                </a:solidFill>
+                <a:latin typeface="맑은 고딕"/>
+                <a:ea typeface="맑은 고딕"/>
+              </a:rPr>
+              <a:t> — </a:t>
+            </a:r>
+            <a:r>
+              <a:rPr sz="1150" b="0" dirty="0" err="1">
+                <a:solidFill>
+                  <a:srgbClr val="1C1C1E"/>
+                </a:solidFill>
+                <a:latin typeface="맑은 고딕"/>
+                <a:ea typeface="맑은 고딕"/>
+              </a:rPr>
+              <a:t>분만</a:t>
+            </a:r>
+            <a:r>
+              <a:rPr sz="1150" b="0" dirty="0">
+                <a:solidFill>
+                  <a:srgbClr val="1C1C1E"/>
+                </a:solidFill>
+                <a:latin typeface="맑은 고딕"/>
+                <a:ea typeface="맑은 고딕"/>
+              </a:rPr>
+              <a:t> </a:t>
+            </a:r>
+            <a:r>
+              <a:rPr sz="1150" b="0" dirty="0" err="1">
+                <a:solidFill>
+                  <a:srgbClr val="1C1C1E"/>
+                </a:solidFill>
+                <a:latin typeface="맑은 고딕"/>
+                <a:ea typeface="맑은 고딕"/>
+              </a:rPr>
+              <a:t>완전</a:t>
+            </a:r>
+            <a:r>
+              <a:rPr sz="1150" b="0" dirty="0">
+                <a:solidFill>
+                  <a:srgbClr val="1C1C1E"/>
+                </a:solidFill>
+                <a:latin typeface="맑은 고딕"/>
+                <a:ea typeface="맑은 고딕"/>
+              </a:rPr>
+              <a:t> </a:t>
+            </a:r>
+            <a:r>
+              <a:rPr sz="1150" b="0" dirty="0" err="1">
+                <a:solidFill>
+                  <a:srgbClr val="1C1C1E"/>
+                </a:solidFill>
+                <a:latin typeface="맑은 고딕"/>
+                <a:ea typeface="맑은 고딕"/>
+              </a:rPr>
+              <a:t>사각</a:t>
+            </a:r>
+            <a:r>
+              <a:rPr sz="1150" b="0" dirty="0">
+                <a:solidFill>
+                  <a:srgbClr val="1C1C1E"/>
+                </a:solidFill>
+                <a:latin typeface="맑은 고딕"/>
+                <a:ea typeface="맑은 고딕"/>
+              </a:rPr>
+              <a:t> 5곳</a:t>
+            </a:r>
+            <a:r>
+              <a:rPr lang="en-US" sz="1150" b="0" dirty="0">
+                <a:solidFill>
+                  <a:srgbClr val="1C1C1E"/>
+                </a:solidFill>
+                <a:latin typeface="맑은 고딕"/>
+                <a:ea typeface="맑은 고딕"/>
+              </a:rPr>
+              <a:t>, </a:t>
+            </a:r>
+            <a:r>
+              <a:rPr sz="1150" b="0" dirty="0" err="1">
+                <a:solidFill>
+                  <a:srgbClr val="1C1C1E"/>
+                </a:solidFill>
+                <a:latin typeface="맑은 고딕"/>
+                <a:ea typeface="맑은 고딕"/>
+              </a:rPr>
+              <a:t>소아과</a:t>
+            </a:r>
+            <a:r>
+              <a:rPr sz="1150" b="0" dirty="0">
+                <a:solidFill>
+                  <a:srgbClr val="1C1C1E"/>
+                </a:solidFill>
+                <a:latin typeface="맑은 고딕"/>
+                <a:ea typeface="맑은 고딕"/>
+              </a:rPr>
+              <a:t> 5개 </a:t>
+            </a:r>
+            <a:r>
+              <a:rPr sz="1150" b="0" dirty="0" err="1">
+                <a:solidFill>
+                  <a:srgbClr val="1C1C1E"/>
+                </a:solidFill>
+                <a:latin typeface="맑은 고딕"/>
+                <a:ea typeface="맑은 고딕"/>
+              </a:rPr>
+              <a:t>지역</a:t>
+            </a:r>
+            <a:r>
+              <a:rPr sz="1150" b="0" dirty="0">
+                <a:solidFill>
+                  <a:srgbClr val="1C1C1E"/>
+                </a:solidFill>
+                <a:latin typeface="맑은 고딕"/>
+                <a:ea typeface="맑은 고딕"/>
+              </a:rPr>
+              <a:t> </a:t>
+            </a:r>
+            <a:r>
+              <a:rPr sz="1150" b="0" dirty="0" err="1">
+                <a:solidFill>
+                  <a:srgbClr val="1C1C1E"/>
+                </a:solidFill>
+                <a:latin typeface="맑은 고딕"/>
+                <a:ea typeface="맑은 고딕"/>
+              </a:rPr>
+              <a:t>입원</a:t>
+            </a:r>
+            <a:r>
+              <a:rPr sz="1150" b="0" dirty="0">
+                <a:solidFill>
+                  <a:srgbClr val="1C1C1E"/>
+                </a:solidFill>
+                <a:latin typeface="맑은 고딕"/>
+                <a:ea typeface="맑은 고딕"/>
+              </a:rPr>
+              <a:t> 5,689건 </a:t>
+            </a:r>
+            <a:r>
+              <a:rPr sz="1150" b="0" dirty="0" err="1">
+                <a:solidFill>
+                  <a:srgbClr val="1C1C1E"/>
+                </a:solidFill>
+                <a:latin typeface="맑은 고딕"/>
+                <a:ea typeface="맑은 고딕"/>
+              </a:rPr>
+              <a:t>전량</a:t>
+            </a:r>
+            <a:r>
+              <a:rPr sz="1150" b="0" dirty="0">
+                <a:solidFill>
+                  <a:srgbClr val="1C1C1E"/>
+                </a:solidFill>
+                <a:latin typeface="맑은 고딕"/>
+                <a:ea typeface="맑은 고딕"/>
+              </a:rPr>
+              <a:t>(100%) </a:t>
+            </a:r>
+            <a:r>
+              <a:rPr sz="1150" b="0" dirty="0" err="1">
+                <a:solidFill>
+                  <a:srgbClr val="1C1C1E"/>
+                </a:solidFill>
+                <a:latin typeface="맑은 고딕"/>
+                <a:ea typeface="맑은 고딕"/>
+              </a:rPr>
+              <a:t>관외</a:t>
+            </a:r>
+            <a:r>
+              <a:rPr sz="1150" b="0" dirty="0">
+                <a:solidFill>
+                  <a:srgbClr val="1C1C1E"/>
+                </a:solidFill>
+                <a:latin typeface="맑은 고딕"/>
+                <a:ea typeface="맑은 고딕"/>
+              </a:rPr>
+              <a:t> </a:t>
+            </a:r>
+            <a:r>
+              <a:rPr sz="1150" b="0" dirty="0" err="1">
+                <a:solidFill>
+                  <a:srgbClr val="1C1C1E"/>
+                </a:solidFill>
+                <a:latin typeface="맑은 고딕"/>
+                <a:ea typeface="맑은 고딕"/>
+              </a:rPr>
+              <a:t>유출</a:t>
+            </a:r>
+            <a:endParaRPr sz="1150" b="0" dirty="0">
+              <a:solidFill>
+                <a:srgbClr val="1C1C1E"/>
+              </a:solidFill>
+              <a:latin typeface="맑은 고딕"/>
+              <a:ea typeface="맑은 고딕"/>
+            </a:endParaRPr>
           </a:p>
         </p:txBody>
       </p:sp>
@@ -16725,15 +17630,122 @@
               </a:spcAft>
             </a:pPr>
             <a:r>
-              <a:rPr sz="1300" b="1">
+              <a:rPr sz="1300" b="1" dirty="0" err="1">
                 <a:solidFill>
                   <a:srgbClr val="000000"/>
                 </a:solidFill>
                 <a:latin typeface="맑은 고딕"/>
                 <a:ea typeface="맑은 고딕"/>
               </a:rPr>
-              <a:t>발견 3 · 배분 규칙은 데이터 밖에 있다</a:t>
-            </a:r>
+              <a:t>발견</a:t>
+            </a:r>
+            <a:r>
+              <a:rPr sz="1300" b="1" dirty="0">
+                <a:solidFill>
+                  <a:srgbClr val="000000"/>
+                </a:solidFill>
+                <a:latin typeface="맑은 고딕"/>
+                <a:ea typeface="맑은 고딕"/>
+              </a:rPr>
+              <a:t> 3 · </a:t>
+            </a:r>
+            <a:r>
+              <a:rPr sz="1300" b="1" dirty="0" err="1">
+                <a:solidFill>
+                  <a:srgbClr val="000000"/>
+                </a:solidFill>
+                <a:latin typeface="맑은 고딕"/>
+                <a:ea typeface="맑은 고딕"/>
+              </a:rPr>
+              <a:t>배분</a:t>
+            </a:r>
+            <a:r>
+              <a:rPr sz="1300" b="1" dirty="0">
+                <a:solidFill>
+                  <a:srgbClr val="000000"/>
+                </a:solidFill>
+                <a:latin typeface="맑은 고딕"/>
+                <a:ea typeface="맑은 고딕"/>
+              </a:rPr>
+              <a:t> </a:t>
+            </a:r>
+            <a:r>
+              <a:rPr sz="1300" b="1" dirty="0" err="1">
+                <a:solidFill>
+                  <a:srgbClr val="000000"/>
+                </a:solidFill>
+                <a:latin typeface="맑은 고딕"/>
+                <a:ea typeface="맑은 고딕"/>
+              </a:rPr>
+              <a:t>규칙은</a:t>
+            </a:r>
+            <a:r>
+              <a:rPr sz="1300" b="1" dirty="0">
+                <a:solidFill>
+                  <a:srgbClr val="000000"/>
+                </a:solidFill>
+                <a:latin typeface="맑은 고딕"/>
+                <a:ea typeface="맑은 고딕"/>
+              </a:rPr>
+              <a:t> </a:t>
+            </a:r>
+            <a:r>
+              <a:rPr sz="1300" b="1" dirty="0" err="1">
+                <a:solidFill>
+                  <a:srgbClr val="000000"/>
+                </a:solidFill>
+                <a:latin typeface="맑은 고딕"/>
+                <a:ea typeface="맑은 고딕"/>
+              </a:rPr>
+              <a:t>데이터</a:t>
+            </a:r>
+            <a:r>
+              <a:rPr sz="1300" b="1" dirty="0">
+                <a:solidFill>
+                  <a:srgbClr val="000000"/>
+                </a:solidFill>
+                <a:latin typeface="맑은 고딕"/>
+                <a:ea typeface="맑은 고딕"/>
+              </a:rPr>
+              <a:t> </a:t>
+            </a:r>
+            <a:r>
+              <a:rPr sz="1300" b="1" dirty="0" err="1">
+                <a:solidFill>
+                  <a:srgbClr val="000000"/>
+                </a:solidFill>
+                <a:latin typeface="맑은 고딕"/>
+                <a:ea typeface="맑은 고딕"/>
+              </a:rPr>
+              <a:t>밖에</a:t>
+            </a:r>
+            <a:r>
+              <a:rPr sz="1300" b="1" dirty="0">
+                <a:solidFill>
+                  <a:srgbClr val="000000"/>
+                </a:solidFill>
+                <a:latin typeface="맑은 고딕"/>
+                <a:ea typeface="맑은 고딕"/>
+              </a:rPr>
+              <a:t> </a:t>
+            </a:r>
+            <a:r>
+              <a:rPr sz="1300" b="1" dirty="0" err="1">
+                <a:solidFill>
+                  <a:srgbClr val="000000"/>
+                </a:solidFill>
+                <a:latin typeface="맑은 고딕"/>
+                <a:ea typeface="맑은 고딕"/>
+              </a:rPr>
+              <a:t>있다</a:t>
+            </a:r>
+            <a:endParaRPr sz="1300" b="1" dirty="0">
+              <a:solidFill>
+                <a:srgbClr val="000000"/>
+              </a:solidFill>
+              <a:latin typeface="맑은 고딕"/>
+              <a:ea typeface="맑은 고딕"/>
+            </a:endParaRPr>
           </a:p>
           <a:p>
             <a:pPr marL="160020" indent="-160020">
@@ -16745,14 +17757,274 @@
               </a:spcAft>
             </a:pPr>
             <a:r>
-              <a:rPr sz="1150" b="0">
-                <a:solidFill>
-                  <a:srgbClr val="1C1C1E"/>
-                </a:solidFill>
-                <a:latin typeface="맑은 고딕"/>
-                <a:ea typeface="맑은 고딕"/>
-              </a:rPr>
-              <a:t>• 실질 취약지 A·B 53곳 중 21곳만 기지원. A등급 지원 오즈는 B의 4.82배(p=0.021)인데, 그 선정은 공개 지표로 16% 남짓만 설명된다(McFadden R² 0.163)</a:t>
+              <a:rPr sz="1150" b="0" dirty="0">
+                <a:solidFill>
+                  <a:srgbClr val="1C1C1E"/>
+                </a:solidFill>
+                <a:latin typeface="맑은 고딕"/>
+                <a:ea typeface="맑은 고딕"/>
+              </a:rPr>
+              <a:t>• </a:t>
+            </a:r>
+            <a:r>
+              <a:rPr sz="1150" b="0" dirty="0" err="1">
+                <a:solidFill>
+                  <a:srgbClr val="1C1C1E"/>
+                </a:solidFill>
+                <a:latin typeface="맑은 고딕"/>
+                <a:ea typeface="맑은 고딕"/>
+              </a:rPr>
+              <a:t>실질</a:t>
+            </a:r>
+            <a:r>
+              <a:rPr sz="1150" b="0" dirty="0">
+                <a:solidFill>
+                  <a:srgbClr val="1C1C1E"/>
+                </a:solidFill>
+                <a:latin typeface="맑은 고딕"/>
+                <a:ea typeface="맑은 고딕"/>
+              </a:rPr>
+              <a:t> </a:t>
+            </a:r>
+            <a:r>
+              <a:rPr sz="1150" b="0" dirty="0" err="1">
+                <a:solidFill>
+                  <a:srgbClr val="1C1C1E"/>
+                </a:solidFill>
+                <a:latin typeface="맑은 고딕"/>
+                <a:ea typeface="맑은 고딕"/>
+              </a:rPr>
+              <a:t>취약지</a:t>
+            </a:r>
+            <a:r>
+              <a:rPr sz="1150" b="0" dirty="0">
+                <a:solidFill>
+                  <a:srgbClr val="1C1C1E"/>
+                </a:solidFill>
+                <a:latin typeface="맑은 고딕"/>
+                <a:ea typeface="맑은 고딕"/>
+              </a:rPr>
+              <a:t> A·B 53곳 중 21곳만 </a:t>
+            </a:r>
+            <a:r>
+              <a:rPr sz="1150" b="0" dirty="0" err="1">
+                <a:solidFill>
+                  <a:srgbClr val="1C1C1E"/>
+                </a:solidFill>
+                <a:latin typeface="맑은 고딕"/>
+                <a:ea typeface="맑은 고딕"/>
+              </a:rPr>
+              <a:t>기지원</a:t>
+            </a:r>
+            <a:r>
+              <a:rPr sz="1150" b="0" dirty="0">
+                <a:solidFill>
+                  <a:srgbClr val="1C1C1E"/>
+                </a:solidFill>
+                <a:latin typeface="맑은 고딕"/>
+                <a:ea typeface="맑은 고딕"/>
+              </a:rPr>
+              <a:t>. </a:t>
+            </a:r>
+            <a:r>
+              <a:rPr sz="1150" b="0" dirty="0" err="1">
+                <a:solidFill>
+                  <a:srgbClr val="1C1C1E"/>
+                </a:solidFill>
+                <a:latin typeface="맑은 고딕"/>
+                <a:ea typeface="맑은 고딕"/>
+              </a:rPr>
+              <a:t>A등급</a:t>
+            </a:r>
+            <a:r>
+              <a:rPr sz="1150" b="0" dirty="0">
+                <a:solidFill>
+                  <a:srgbClr val="1C1C1E"/>
+                </a:solidFill>
+                <a:latin typeface="맑은 고딕"/>
+                <a:ea typeface="맑은 고딕"/>
+              </a:rPr>
+              <a:t> </a:t>
+            </a:r>
+            <a:r>
+              <a:rPr sz="1150" b="0" dirty="0" err="1">
+                <a:solidFill>
+                  <a:srgbClr val="1C1C1E"/>
+                </a:solidFill>
+                <a:latin typeface="맑은 고딕"/>
+                <a:ea typeface="맑은 고딕"/>
+              </a:rPr>
+              <a:t>지원</a:t>
+            </a:r>
+            <a:r>
+              <a:rPr sz="1150" b="0" dirty="0">
+                <a:solidFill>
+                  <a:srgbClr val="1C1C1E"/>
+                </a:solidFill>
+                <a:latin typeface="맑은 고딕"/>
+                <a:ea typeface="맑은 고딕"/>
+              </a:rPr>
+              <a:t> </a:t>
+            </a:r>
+            <a:r>
+              <a:rPr sz="1150" b="0" dirty="0" err="1">
+                <a:solidFill>
+                  <a:srgbClr val="1C1C1E"/>
+                </a:solidFill>
+                <a:latin typeface="맑은 고딕"/>
+                <a:ea typeface="맑은 고딕"/>
+              </a:rPr>
+              <a:t>오즈는</a:t>
+            </a:r>
+            <a:r>
+              <a:rPr sz="1150" b="0" dirty="0">
+                <a:solidFill>
+                  <a:srgbClr val="1C1C1E"/>
+                </a:solidFill>
+                <a:latin typeface="맑은 고딕"/>
+                <a:ea typeface="맑은 고딕"/>
+              </a:rPr>
+              <a:t> </a:t>
+            </a:r>
+            <a:r>
+              <a:rPr sz="1150" b="0" dirty="0" err="1">
+                <a:solidFill>
+                  <a:srgbClr val="1C1C1E"/>
+                </a:solidFill>
+                <a:latin typeface="맑은 고딕"/>
+                <a:ea typeface="맑은 고딕"/>
+              </a:rPr>
+              <a:t>B의</a:t>
+            </a:r>
+            <a:r>
+              <a:rPr sz="1150" b="0" dirty="0">
+                <a:solidFill>
+                  <a:srgbClr val="1C1C1E"/>
+                </a:solidFill>
+                <a:latin typeface="맑은 고딕"/>
+                <a:ea typeface="맑은 고딕"/>
+              </a:rPr>
+              <a:t> 4.82배(p=0.021)</a:t>
+            </a:r>
+            <a:r>
+              <a:rPr sz="1150" b="0" dirty="0" err="1">
+                <a:solidFill>
+                  <a:srgbClr val="1C1C1E"/>
+                </a:solidFill>
+                <a:latin typeface="맑은 고딕"/>
+                <a:ea typeface="맑은 고딕"/>
+              </a:rPr>
+              <a:t>인데</a:t>
+            </a:r>
+            <a:r>
+              <a:rPr sz="1150" b="0" dirty="0">
+                <a:solidFill>
+                  <a:srgbClr val="1C1C1E"/>
+                </a:solidFill>
+                <a:latin typeface="맑은 고딕"/>
+                <a:ea typeface="맑은 고딕"/>
+              </a:rPr>
+              <a:t>, 그 </a:t>
+            </a:r>
+            <a:r>
+              <a:rPr sz="1150" b="0" dirty="0" err="1">
+                <a:solidFill>
+                  <a:srgbClr val="1C1C1E"/>
+                </a:solidFill>
+                <a:latin typeface="맑은 고딕"/>
+                <a:ea typeface="맑은 고딕"/>
+              </a:rPr>
+              <a:t>선정은</a:t>
+            </a:r>
+            <a:r>
+              <a:rPr sz="1150" b="0" dirty="0">
+                <a:solidFill>
+                  <a:srgbClr val="1C1C1E"/>
+                </a:solidFill>
+                <a:latin typeface="맑은 고딕"/>
+                <a:ea typeface="맑은 고딕"/>
+              </a:rPr>
+              <a:t> </a:t>
+            </a:r>
+            <a:r>
+              <a:rPr sz="1150" b="0" dirty="0" err="1">
+                <a:solidFill>
+                  <a:srgbClr val="1C1C1E"/>
+                </a:solidFill>
+                <a:latin typeface="맑은 고딕"/>
+                <a:ea typeface="맑은 고딕"/>
+              </a:rPr>
+              <a:t>공개</a:t>
+            </a:r>
+            <a:r>
+              <a:rPr sz="1150" b="0" dirty="0">
+                <a:solidFill>
+                  <a:srgbClr val="1C1C1E"/>
+                </a:solidFill>
+                <a:latin typeface="맑은 고딕"/>
+                <a:ea typeface="맑은 고딕"/>
+              </a:rPr>
+              <a:t> </a:t>
+            </a:r>
+            <a:r>
+              <a:rPr sz="1150" b="0" dirty="0" err="1">
+                <a:solidFill>
+                  <a:srgbClr val="1C1C1E"/>
+                </a:solidFill>
+                <a:latin typeface="맑은 고딕"/>
+                <a:ea typeface="맑은 고딕"/>
+              </a:rPr>
+              <a:t>지표로</a:t>
+            </a:r>
+            <a:r>
+              <a:rPr sz="1150" b="0" dirty="0">
+                <a:solidFill>
+                  <a:srgbClr val="1C1C1E"/>
+                </a:solidFill>
+                <a:latin typeface="맑은 고딕"/>
+                <a:ea typeface="맑은 고딕"/>
+              </a:rPr>
+              <a:t> 16% </a:t>
+            </a:r>
+            <a:r>
+              <a:rPr sz="1150" b="0" dirty="0" err="1">
+                <a:solidFill>
+                  <a:srgbClr val="1C1C1E"/>
+                </a:solidFill>
+                <a:latin typeface="맑은 고딕"/>
+                <a:ea typeface="맑은 고딕"/>
+              </a:rPr>
+              <a:t>남짓만</a:t>
+            </a:r>
+            <a:r>
+              <a:rPr sz="1150" b="0" dirty="0">
+                <a:solidFill>
+                  <a:srgbClr val="1C1C1E"/>
+                </a:solidFill>
+                <a:latin typeface="맑은 고딕"/>
+                <a:ea typeface="맑은 고딕"/>
+              </a:rPr>
+              <a:t> </a:t>
+            </a:r>
+            <a:r>
+              <a:rPr sz="1150" b="0" dirty="0" err="1">
+                <a:solidFill>
+                  <a:srgbClr val="1C1C1E"/>
+                </a:solidFill>
+                <a:latin typeface="맑은 고딕"/>
+                <a:ea typeface="맑은 고딕"/>
+              </a:rPr>
+              <a:t>설명된다</a:t>
+            </a:r>
+            <a:r>
+              <a:rPr sz="1150" b="0" dirty="0">
+                <a:solidFill>
+                  <a:srgbClr val="1C1C1E"/>
+                </a:solidFill>
+                <a:latin typeface="맑은 고딕"/>
+                <a:ea typeface="맑은 고딕"/>
+              </a:rPr>
+              <a:t>(McFadden R² 0.163)</a:t>
             </a:r>
           </a:p>
         </p:txBody>
@@ -16843,15 +18115,122 @@
               </a:spcAft>
             </a:pPr>
             <a:r>
-              <a:rPr sz="1300" b="1">
+              <a:rPr sz="1300" b="1" dirty="0" err="1">
                 <a:solidFill>
                   <a:srgbClr val="33393F"/>
                 </a:solidFill>
                 <a:latin typeface="맑은 고딕"/>
                 <a:ea typeface="맑은 고딕"/>
               </a:rPr>
-              <a:t>발견 4 · 깊이는 보지만 인원 수는 안 본다</a:t>
-            </a:r>
+              <a:t>발견</a:t>
+            </a:r>
+            <a:r>
+              <a:rPr sz="1300" b="1" dirty="0">
+                <a:solidFill>
+                  <a:srgbClr val="33393F"/>
+                </a:solidFill>
+                <a:latin typeface="맑은 고딕"/>
+                <a:ea typeface="맑은 고딕"/>
+              </a:rPr>
+              <a:t> 4 · </a:t>
+            </a:r>
+            <a:r>
+              <a:rPr sz="1300" b="1" dirty="0" err="1">
+                <a:solidFill>
+                  <a:srgbClr val="33393F"/>
+                </a:solidFill>
+                <a:latin typeface="맑은 고딕"/>
+                <a:ea typeface="맑은 고딕"/>
+              </a:rPr>
+              <a:t>깊이는</a:t>
+            </a:r>
+            <a:r>
+              <a:rPr sz="1300" b="1" dirty="0">
+                <a:solidFill>
+                  <a:srgbClr val="33393F"/>
+                </a:solidFill>
+                <a:latin typeface="맑은 고딕"/>
+                <a:ea typeface="맑은 고딕"/>
+              </a:rPr>
+              <a:t> </a:t>
+            </a:r>
+            <a:r>
+              <a:rPr sz="1300" b="1" dirty="0" err="1">
+                <a:solidFill>
+                  <a:srgbClr val="33393F"/>
+                </a:solidFill>
+                <a:latin typeface="맑은 고딕"/>
+                <a:ea typeface="맑은 고딕"/>
+              </a:rPr>
+              <a:t>보지만</a:t>
+            </a:r>
+            <a:r>
+              <a:rPr sz="1300" b="1" dirty="0">
+                <a:solidFill>
+                  <a:srgbClr val="33393F"/>
+                </a:solidFill>
+                <a:latin typeface="맑은 고딕"/>
+                <a:ea typeface="맑은 고딕"/>
+              </a:rPr>
+              <a:t> </a:t>
+            </a:r>
+            <a:r>
+              <a:rPr sz="1300" b="1" dirty="0" err="1">
+                <a:solidFill>
+                  <a:srgbClr val="33393F"/>
+                </a:solidFill>
+                <a:latin typeface="맑은 고딕"/>
+                <a:ea typeface="맑은 고딕"/>
+              </a:rPr>
+              <a:t>인원</a:t>
+            </a:r>
+            <a:r>
+              <a:rPr sz="1300" b="1" dirty="0">
+                <a:solidFill>
+                  <a:srgbClr val="33393F"/>
+                </a:solidFill>
+                <a:latin typeface="맑은 고딕"/>
+                <a:ea typeface="맑은 고딕"/>
+              </a:rPr>
+              <a:t> </a:t>
+            </a:r>
+            <a:r>
+              <a:rPr sz="1300" b="1" dirty="0" err="1">
+                <a:solidFill>
+                  <a:srgbClr val="33393F"/>
+                </a:solidFill>
+                <a:latin typeface="맑은 고딕"/>
+                <a:ea typeface="맑은 고딕"/>
+              </a:rPr>
+              <a:t>수는</a:t>
+            </a:r>
+            <a:r>
+              <a:rPr sz="1300" b="1" dirty="0">
+                <a:solidFill>
+                  <a:srgbClr val="33393F"/>
+                </a:solidFill>
+                <a:latin typeface="맑은 고딕"/>
+                <a:ea typeface="맑은 고딕"/>
+              </a:rPr>
+              <a:t> 안 </a:t>
+            </a:r>
+            <a:r>
+              <a:rPr sz="1300" b="1" dirty="0" err="1">
+                <a:solidFill>
+                  <a:srgbClr val="33393F"/>
+                </a:solidFill>
+                <a:latin typeface="맑은 고딕"/>
+                <a:ea typeface="맑은 고딕"/>
+              </a:rPr>
+              <a:t>본다</a:t>
+            </a:r>
+            <a:endParaRPr sz="1300" b="1" dirty="0">
+              <a:solidFill>
+                <a:srgbClr val="33393F"/>
+              </a:solidFill>
+              <a:latin typeface="맑은 고딕"/>
+              <a:ea typeface="맑은 고딕"/>
+            </a:endParaRPr>
           </a:p>
           <a:p>
             <a:pPr marL="160020" indent="-160020">
@@ -16863,15 +18242,372 @@
               </a:spcAft>
             </a:pPr>
             <a:r>
-              <a:rPr sz="1150" b="0">
-                <a:solidFill>
-                  <a:srgbClr val="1C1C1E"/>
-                </a:solidFill>
-                <a:latin typeface="맑은 고딕"/>
-                <a:ea typeface="맑은 고딕"/>
-              </a:rPr>
-              <a:t>• 현행 배분은 취약 심도와는 정렬(ρ=+0.381), 영향 인원 규모(부담)와는 무관(ρ=−0.131). 두 관점의 순위 상관은 −0.190 — 축의 선택이 결과를 바꾼다</a:t>
-            </a:r>
+              <a:rPr sz="1150" b="0" dirty="0">
+                <a:solidFill>
+                  <a:srgbClr val="1C1C1E"/>
+                </a:solidFill>
+                <a:latin typeface="맑은 고딕"/>
+                <a:ea typeface="맑은 고딕"/>
+              </a:rPr>
+              <a:t>• </a:t>
+            </a:r>
+            <a:r>
+              <a:rPr sz="1150" b="0" dirty="0" err="1">
+                <a:solidFill>
+                  <a:srgbClr val="1C1C1E"/>
+                </a:solidFill>
+                <a:latin typeface="맑은 고딕"/>
+                <a:ea typeface="맑은 고딕"/>
+              </a:rPr>
+              <a:t>현행</a:t>
+            </a:r>
+            <a:r>
+              <a:rPr sz="1150" b="0" dirty="0">
+                <a:solidFill>
+                  <a:srgbClr val="1C1C1E"/>
+                </a:solidFill>
+                <a:latin typeface="맑은 고딕"/>
+                <a:ea typeface="맑은 고딕"/>
+              </a:rPr>
+              <a:t> </a:t>
+            </a:r>
+            <a:r>
+              <a:rPr sz="1150" b="0" dirty="0" err="1">
+                <a:solidFill>
+                  <a:srgbClr val="1C1C1E"/>
+                </a:solidFill>
+                <a:latin typeface="맑은 고딕"/>
+                <a:ea typeface="맑은 고딕"/>
+              </a:rPr>
+              <a:t>배분은</a:t>
+            </a:r>
+            <a:r>
+              <a:rPr sz="1150" b="0" dirty="0">
+                <a:solidFill>
+                  <a:srgbClr val="1C1C1E"/>
+                </a:solidFill>
+                <a:latin typeface="맑은 고딕"/>
+                <a:ea typeface="맑은 고딕"/>
+              </a:rPr>
+              <a:t> </a:t>
+            </a:r>
+            <a:r>
+              <a:rPr sz="1150" b="0" dirty="0" err="1">
+                <a:solidFill>
+                  <a:srgbClr val="1C1C1E"/>
+                </a:solidFill>
+                <a:latin typeface="맑은 고딕"/>
+                <a:ea typeface="맑은 고딕"/>
+              </a:rPr>
+              <a:t>취약</a:t>
+            </a:r>
+            <a:r>
+              <a:rPr sz="1150" b="0" dirty="0">
+                <a:solidFill>
+                  <a:srgbClr val="1C1C1E"/>
+                </a:solidFill>
+                <a:latin typeface="맑은 고딕"/>
+                <a:ea typeface="맑은 고딕"/>
+              </a:rPr>
+              <a:t> </a:t>
+            </a:r>
+            <a:r>
+              <a:rPr sz="1150" b="0" dirty="0" err="1">
+                <a:solidFill>
+                  <a:srgbClr val="1C1C1E"/>
+                </a:solidFill>
+                <a:latin typeface="맑은 고딕"/>
+                <a:ea typeface="맑은 고딕"/>
+              </a:rPr>
+              <a:t>심도와는</a:t>
+            </a:r>
+            <a:r>
+              <a:rPr sz="1150" b="0" dirty="0">
+                <a:solidFill>
+                  <a:srgbClr val="1C1C1E"/>
+                </a:solidFill>
+                <a:latin typeface="맑은 고딕"/>
+                <a:ea typeface="맑은 고딕"/>
+              </a:rPr>
+              <a:t> </a:t>
+            </a:r>
+            <a:r>
+              <a:rPr sz="1150" b="0" dirty="0" err="1">
+                <a:solidFill>
+                  <a:srgbClr val="1C1C1E"/>
+                </a:solidFill>
+                <a:latin typeface="맑은 고딕"/>
+                <a:ea typeface="맑은 고딕"/>
+              </a:rPr>
+              <a:t>정렬</a:t>
+            </a:r>
+            <a:r>
+              <a:rPr sz="1150" b="0" dirty="0">
+                <a:solidFill>
+                  <a:srgbClr val="1C1C1E"/>
+                </a:solidFill>
+                <a:latin typeface="맑은 고딕"/>
+                <a:ea typeface="맑은 고딕"/>
+              </a:rPr>
+              <a:t>(ρ=+0.381), </a:t>
+            </a:r>
+            <a:r>
+              <a:rPr sz="1150" b="0" dirty="0" err="1">
+                <a:solidFill>
+                  <a:srgbClr val="1C1C1E"/>
+                </a:solidFill>
+                <a:latin typeface="맑은 고딕"/>
+                <a:ea typeface="맑은 고딕"/>
+              </a:rPr>
+              <a:t>영향</a:t>
+            </a:r>
+            <a:r>
+              <a:rPr sz="1150" b="0" dirty="0">
+                <a:solidFill>
+                  <a:srgbClr val="1C1C1E"/>
+                </a:solidFill>
+                <a:latin typeface="맑은 고딕"/>
+                <a:ea typeface="맑은 고딕"/>
+              </a:rPr>
+              <a:t> </a:t>
+            </a:r>
+            <a:r>
+              <a:rPr sz="1150" b="0" dirty="0" err="1">
+                <a:solidFill>
+                  <a:srgbClr val="1C1C1E"/>
+                </a:solidFill>
+                <a:latin typeface="맑은 고딕"/>
+                <a:ea typeface="맑은 고딕"/>
+              </a:rPr>
+              <a:t>인원</a:t>
+            </a:r>
+            <a:r>
+              <a:rPr sz="1150" b="0" dirty="0">
+                <a:solidFill>
+                  <a:srgbClr val="1C1C1E"/>
+                </a:solidFill>
+                <a:latin typeface="맑은 고딕"/>
+                <a:ea typeface="맑은 고딕"/>
+              </a:rPr>
+              <a:t> </a:t>
+            </a:r>
+            <a:r>
+              <a:rPr sz="1150" b="0" dirty="0" err="1">
+                <a:solidFill>
+                  <a:srgbClr val="1C1C1E"/>
+                </a:solidFill>
+                <a:latin typeface="맑은 고딕"/>
+                <a:ea typeface="맑은 고딕"/>
+              </a:rPr>
+              <a:t>규모</a:t>
+            </a:r>
+            <a:r>
+              <a:rPr sz="1150" b="0" dirty="0">
+                <a:solidFill>
+                  <a:srgbClr val="1C1C1E"/>
+                </a:solidFill>
+                <a:latin typeface="맑은 고딕"/>
+                <a:ea typeface="맑은 고딕"/>
+              </a:rPr>
+              <a:t>(</a:t>
+            </a:r>
+            <a:r>
+              <a:rPr sz="1150" b="0" dirty="0" err="1">
+                <a:solidFill>
+                  <a:srgbClr val="1C1C1E"/>
+                </a:solidFill>
+                <a:latin typeface="맑은 고딕"/>
+                <a:ea typeface="맑은 고딕"/>
+              </a:rPr>
+              <a:t>부담</a:t>
+            </a:r>
+            <a:r>
+              <a:rPr sz="1150" b="0" dirty="0">
+                <a:solidFill>
+                  <a:srgbClr val="1C1C1E"/>
+                </a:solidFill>
+                <a:latin typeface="맑은 고딕"/>
+                <a:ea typeface="맑은 고딕"/>
+              </a:rPr>
+              <a:t>)</a:t>
+            </a:r>
+            <a:r>
+              <a:rPr sz="1150" b="0" dirty="0" err="1">
+                <a:solidFill>
+                  <a:srgbClr val="1C1C1E"/>
+                </a:solidFill>
+                <a:latin typeface="맑은 고딕"/>
+                <a:ea typeface="맑은 고딕"/>
+              </a:rPr>
+              <a:t>와는</a:t>
+            </a:r>
+            <a:r>
+              <a:rPr sz="1150" b="0" dirty="0">
+                <a:solidFill>
+                  <a:srgbClr val="1C1C1E"/>
+                </a:solidFill>
+                <a:latin typeface="맑은 고딕"/>
+                <a:ea typeface="맑은 고딕"/>
+              </a:rPr>
+              <a:t> </a:t>
+            </a:r>
+            <a:r>
+              <a:rPr sz="1150" b="0" dirty="0" err="1">
+                <a:solidFill>
+                  <a:srgbClr val="1C1C1E"/>
+                </a:solidFill>
+                <a:latin typeface="맑은 고딕"/>
+                <a:ea typeface="맑은 고딕"/>
+              </a:rPr>
+              <a:t>무관</a:t>
+            </a:r>
+            <a:r>
+              <a:rPr sz="1150" b="0" dirty="0">
+                <a:solidFill>
+                  <a:srgbClr val="1C1C1E"/>
+                </a:solidFill>
+                <a:latin typeface="맑은 고딕"/>
+                <a:ea typeface="맑은 고딕"/>
+              </a:rPr>
+              <a:t>(ρ=−0.131). 두 </a:t>
+            </a:r>
+            <a:r>
+              <a:rPr sz="1150" b="0" dirty="0" err="1">
+                <a:solidFill>
+                  <a:srgbClr val="1C1C1E"/>
+                </a:solidFill>
+                <a:latin typeface="맑은 고딕"/>
+                <a:ea typeface="맑은 고딕"/>
+              </a:rPr>
+              <a:t>관점의</a:t>
+            </a:r>
+            <a:r>
+              <a:rPr sz="1150" b="0" dirty="0">
+                <a:solidFill>
+                  <a:srgbClr val="1C1C1E"/>
+                </a:solidFill>
+                <a:latin typeface="맑은 고딕"/>
+                <a:ea typeface="맑은 고딕"/>
+              </a:rPr>
+              <a:t> </a:t>
+            </a:r>
+            <a:r>
+              <a:rPr sz="1150" b="0" dirty="0" err="1">
+                <a:solidFill>
+                  <a:srgbClr val="1C1C1E"/>
+                </a:solidFill>
+                <a:latin typeface="맑은 고딕"/>
+                <a:ea typeface="맑은 고딕"/>
+              </a:rPr>
+              <a:t>순위</a:t>
+            </a:r>
+            <a:r>
+              <a:rPr sz="1150" b="0" dirty="0">
+                <a:solidFill>
+                  <a:srgbClr val="1C1C1E"/>
+                </a:solidFill>
+                <a:latin typeface="맑은 고딕"/>
+                <a:ea typeface="맑은 고딕"/>
+              </a:rPr>
+              <a:t> </a:t>
+            </a:r>
+            <a:r>
+              <a:rPr sz="1150" b="0" dirty="0" err="1">
+                <a:solidFill>
+                  <a:srgbClr val="1C1C1E"/>
+                </a:solidFill>
+                <a:latin typeface="맑은 고딕"/>
+                <a:ea typeface="맑은 고딕"/>
+              </a:rPr>
+              <a:t>상관은</a:t>
+            </a:r>
+            <a:r>
+              <a:rPr sz="1150" b="0" dirty="0">
+                <a:solidFill>
+                  <a:srgbClr val="1C1C1E"/>
+                </a:solidFill>
+                <a:latin typeface="맑은 고딕"/>
+                <a:ea typeface="맑은 고딕"/>
+              </a:rPr>
+              <a:t> −0.190 — </a:t>
+            </a:r>
+            <a:r>
+              <a:rPr sz="1150" b="0" dirty="0" err="1">
+                <a:solidFill>
+                  <a:srgbClr val="1C1C1E"/>
+                </a:solidFill>
+                <a:latin typeface="맑은 고딕"/>
+                <a:ea typeface="맑은 고딕"/>
+              </a:rPr>
+              <a:t>축의</a:t>
+            </a:r>
+            <a:r>
+              <a:rPr sz="1150" b="0" dirty="0">
+                <a:solidFill>
+                  <a:srgbClr val="1C1C1E"/>
+                </a:solidFill>
+                <a:latin typeface="맑은 고딕"/>
+                <a:ea typeface="맑은 고딕"/>
+              </a:rPr>
+              <a:t> </a:t>
+            </a:r>
+            <a:r>
+              <a:rPr sz="1150" b="0" dirty="0" err="1">
+                <a:solidFill>
+                  <a:srgbClr val="1C1C1E"/>
+                </a:solidFill>
+                <a:latin typeface="맑은 고딕"/>
+                <a:ea typeface="맑은 고딕"/>
+              </a:rPr>
+              <a:t>선택이</a:t>
+            </a:r>
+            <a:r>
+              <a:rPr sz="1150" b="0" dirty="0">
+                <a:solidFill>
+                  <a:srgbClr val="1C1C1E"/>
+                </a:solidFill>
+                <a:latin typeface="맑은 고딕"/>
+                <a:ea typeface="맑은 고딕"/>
+              </a:rPr>
+              <a:t> </a:t>
+            </a:r>
+            <a:r>
+              <a:rPr sz="1150" b="0" dirty="0" err="1">
+                <a:solidFill>
+                  <a:srgbClr val="1C1C1E"/>
+                </a:solidFill>
+                <a:latin typeface="맑은 고딕"/>
+                <a:ea typeface="맑은 고딕"/>
+              </a:rPr>
+              <a:t>결과를</a:t>
+            </a:r>
+            <a:r>
+              <a:rPr sz="1150" b="0" dirty="0">
+                <a:solidFill>
+                  <a:srgbClr val="1C1C1E"/>
+                </a:solidFill>
+                <a:latin typeface="맑은 고딕"/>
+                <a:ea typeface="맑은 고딕"/>
+              </a:rPr>
+              <a:t> </a:t>
+            </a:r>
+            <a:r>
+              <a:rPr sz="1150" b="0" dirty="0" err="1">
+                <a:solidFill>
+                  <a:srgbClr val="1C1C1E"/>
+                </a:solidFill>
+                <a:latin typeface="맑은 고딕"/>
+                <a:ea typeface="맑은 고딕"/>
+              </a:rPr>
+              <a:t>바꾼다</a:t>
+            </a:r>
+            <a:endParaRPr sz="1150" b="0" dirty="0">
+              <a:solidFill>
+                <a:srgbClr val="1C1C1E"/>
+              </a:solidFill>
+              <a:latin typeface="맑은 고딕"/>
+              <a:ea typeface="맑은 고딕"/>
+            </a:endParaRPr>
           </a:p>
         </p:txBody>
       </p:sp>

--- a/04_제출물/데이터분석_결과보고서.pptx
+++ b/04_제출물/데이터분석_결과보고서.pptx
@@ -3986,7 +3986,7 @@
                 <a:latin typeface="맑은 고딕"/>
                 <a:ea typeface="맑은 고딕"/>
               </a:rPr>
-              <a:t>판정식은 우리가 캐낸 가설이 아니라 고시에 공표된 기준 — 본 연구는 그것을 검산했다</a:t>
+              <a:t>판정식은 우리가 캐낸 가설이 아니라 고시에 공표된 기준 — 이 프로젝트는 그것을 검산했다</a:t>
             </a:r>
           </a:p>
         </p:txBody>
@@ -5907,7 +5907,7 @@
                 <a:latin typeface="맑은 고딕"/>
                 <a:ea typeface="맑은 고딕"/>
               </a:rPr>
-              <a:t>• 현행 정의(도달 가능성) 안에서 이 반론은 옳다 — 본 연구는 정의를 부정하지 않고, 정의가 한 축만 잰다고 주장한다</a:t>
+              <a:t>• 현행 정의(도달 가능성) 안에서 이 반론은 옳다 — 이 프로젝트는 정의를 부정하지 않고, 정의가 한 축만 잰다고 주장한다</a:t>
             </a:r>
           </a:p>
         </p:txBody>
@@ -6183,7 +6183,7 @@
                 <a:latin typeface="맑은 고딕"/>
                 <a:ea typeface="맑은 고딕"/>
               </a:rPr>
-              <a:t>• 문제라고 쓰고 판정식으로는 못 잡는 틈 — 본 연구가 겨누는 지점</a:t>
+              <a:t>• 문제라고 쓰고 판정식으로는 못 잡는 틈 — 이 프로젝트가 겨누는 지점</a:t>
             </a:r>
           </a:p>
         </p:txBody>
@@ -11218,7 +11218,7 @@
                 <a:latin typeface="맑은 고딕"/>
                 <a:ea typeface="맑은 고딕"/>
               </a:rPr>
-              <a:t>임계값 차용 공개 2건 — 지침에 없는 본 연구의 가정</a:t>
+              <a:t>임계값 차용 공개 2건 — 지침에 없는 이 프로젝트의 가정</a:t>
             </a:r>
           </a:p>
           <a:p>
@@ -12777,7 +12777,7 @@
                 <a:latin typeface="맑은 고딕"/>
                 <a:ea typeface="맑은 고딕"/>
               </a:rPr>
-              <a:t>03   연구 배경 — 제도와 접근성의 두 축</a:t>
+              <a:t>03   프로젝트 배경 — 제도와 접근성의 두 축</a:t>
             </a:r>
           </a:p>
           <a:p>
@@ -12817,7 +12817,7 @@
                 <a:latin typeface="맑은 고딕"/>
                 <a:ea typeface="맑은 고딕"/>
               </a:rPr>
-              <a:t>05   문제와 연구 질문</a:t>
+              <a:t>05   문제와 핵심 질문</a:t>
             </a:r>
           </a:p>
         </p:txBody>
@@ -13665,7 +13665,7 @@
                 <a:latin typeface="맑은 고딕"/>
                 <a:ea typeface="맑은 고딕"/>
               </a:rPr>
-              <a:t>연구의 발단·문제의식과 분석 설계의 상세는 「데이터 분석 계획서」에서 다룬다. 본 보고서는 그 결과를 보고한다.</a:t>
+              <a:t>프로젝트의 발단·문제의식과 분석 설계의 상세는 「데이터 분석 계획서」에서 다룬다. 본 보고서는 그 결과를 보고한다.</a:t>
             </a:r>
           </a:p>
         </p:txBody>
@@ -14076,7 +14076,7 @@
                 <a:latin typeface="맑은 고딕"/>
                 <a:ea typeface="맑은 고딕"/>
               </a:rPr>
-              <a:t>연구의 한계 (보고서 §9, 10개 중 핵심)</a:t>
+              <a:t>분석의 한계 (보고서 §9, 10개 중 핵심)</a:t>
             </a:r>
           </a:p>
           <a:p>
@@ -14729,7 +14729,7 @@
                 <a:latin typeface="맑은 고딕"/>
                 <a:ea typeface="맑은 고딕"/>
               </a:rPr>
-              <a:t>심도와 부담 중 무엇을 우선할지는 사회의 선택이다 — 본 연구의 기여는 그 선택을 명시적으로 만든 것이다.</a:t>
+              <a:t>심도와 부담 중 무엇을 우선할지는 사회의 선택이다 — 이 프로젝트의 기여는 그 선택을 명시적으로 만든 것이다.</a:t>
             </a:r>
           </a:p>
         </p:txBody>
@@ -14903,7 +14903,7 @@
                 <a:latin typeface="맑은 고딕"/>
                 <a:ea typeface="맑은 고딕"/>
               </a:rPr>
-              <a:t>연구 배경 — 분만취약지 제도와 접근성의 두 축</a:t>
+              <a:t>프로젝트 배경 — 분만취약지 제도와 접근성의 두 축</a:t>
             </a:r>
             <a:r>
               <a:rPr sz="2150" b="1" dirty="0">
@@ -15169,7 +15169,7 @@
                 <a:latin typeface="맑은 고딕"/>
                 <a:ea typeface="맑은 고딕"/>
               </a:rPr>
-              <a:t>무엇을 다루는 제도이고, 이 연구는 그중 무엇을 감사했는가</a:t>
+              <a:t>무엇을 다루는 제도이고, 이 프로젝트는 그중 무엇을 감사했는가</a:t>
             </a:r>
             <a:r>
               <a:rPr lang="en-US" altLang="ko-KR" sz="1250" b="0" dirty="0">
@@ -16181,7 +16181,7 @@
                 <a:latin typeface="맑은 고딕"/>
                 <a:ea typeface="맑은 고딕"/>
               </a:rPr>
-              <a:t>③ 이 연구가 감사한 것</a:t>
+              <a:t>③ 이 프로젝트가 감사한 것</a:t>
             </a:r>
             <a:r>
               <a:rPr lang="ko-KR" altLang="en-US" sz="1300" b="1" dirty="0">
@@ -16218,7 +16218,7 @@
                 <a:latin typeface="맑은 고딕"/>
                 <a:ea typeface="맑은 고딕"/>
               </a:rPr>
-              <a:t>• 자원이 모자란 것(㉠)은 예산·인력의 영역이라 데이터가 답할 수 없다. 있는 자원이 체계적으로 배분되지 않는 것(㉡)은 규칙의 문제이므로 데이터로 답할 수 있다 — 본 연구는 ㉡을 감사했다</a:t>
+              <a:t>• 자원이 모자란 것(㉠)은 예산·인력의 영역이라 데이터가 답할 수 없다. 있는 자원이 체계적으로 배분되지 않는 것(㉡)은 규칙의 문제이므로 데이터로 답할 수 있다 — 이 프로젝트는 ㉡을 감사했다</a:t>
             </a:r>
             <a:r>
               <a:rPr sz="1100" b="0" dirty="0" err="1">
@@ -21691,7 +21691,7 @@
                 <a:latin typeface="맑은 고딕"/>
                 <a:ea typeface="맑은 고딕"/>
               </a:rPr>
-              <a:t>RQ1</a:t>
+              <a:t>Q1</a:t>
             </a:r>
           </a:p>
         </p:txBody>
@@ -21991,7 +21991,7 @@
                 <a:latin typeface="맑은 고딕"/>
                 <a:ea typeface="맑은 고딕"/>
               </a:rPr>
-              <a:t>RQ2</a:t>
+              <a:t>Q2</a:t>
             </a:r>
           </a:p>
         </p:txBody>
@@ -22291,7 +22291,7 @@
                 <a:latin typeface="맑은 고딕"/>
                 <a:ea typeface="맑은 고딕"/>
               </a:rPr>
-              <a:t>RQ3</a:t>
+              <a:t>Q3</a:t>
             </a:r>
           </a:p>
         </p:txBody>
@@ -22591,7 +22591,7 @@
                 <a:latin typeface="맑은 고딕"/>
                 <a:ea typeface="맑은 고딕"/>
               </a:rPr>
-              <a:t>RQ4</a:t>
+              <a:t>Q4</a:t>
             </a:r>
           </a:p>
         </p:txBody>
@@ -23858,7 +23858,7 @@
                 <a:latin typeface="맑은 고딕"/>
                 <a:ea typeface="맑은 고딕"/>
               </a:rPr>
-              <a:t>• 옆 도시 병원이라도 60분 안이면 "이용됨" — 본 연구 지정 감사의 핵심 열쇠</a:t>
+              <a:t>• 옆 도시 병원이라도 60분 안이면 "이용됨" — 이 프로젝트 지정 감사의 핵심 열쇠</a:t>
             </a:r>
           </a:p>
         </p:txBody>

--- a/04_제출물/데이터분석_결과보고서.pptx
+++ b/04_제출물/데이터분석_결과보고서.pptx
@@ -17577,7 +17577,7 @@
                 <a:latin typeface="맑은 고딕"/>
                 <a:ea typeface="맑은 고딕"/>
               </a:rPr>
-              <a:t>• 통로도 있고 자격을 갖춘 지역도 있는데 한 해에 열리는 문은 하나다 — 그렇다면 순서를 정하는 규칙이 있어야 한다</a:t>
+              <a:t>• 나눠 줄 것이 적을수록 순서는 오히려 더 중요해진다 — 한 해에 한 곳뿐이면 순서가 곧 결과다. 그런데 그 순서를 정하는 규칙이 제도에 없다</a:t>
             </a:r>
             <a:r>
               <a:rPr sz="1100" b="0" dirty="0" err="1">

--- a/04_제출물/데이터분석_결과보고서.pptx
+++ b/04_제출물/데이터분석_결과보고서.pptx
@@ -3756,8 +3756,8 @@
         </p:nvSpPr>
         <p:spPr>
           <a:xfrm>
-            <a:off x="502920" y="475488"/>
-            <a:ext cx="310896" cy="310896"/>
+            <a:off x="554736" y="527304"/>
+            <a:ext cx="207264" cy="207264"/>
           </a:xfrm>
           <a:prstGeom prst="roundRect">
             <a:avLst>
@@ -4572,8 +4572,8 @@
         </p:nvSpPr>
         <p:spPr>
           <a:xfrm>
-            <a:off x="502920" y="475488"/>
-            <a:ext cx="310896" cy="310896"/>
+            <a:off x="554736" y="527304"/>
+            <a:ext cx="207264" cy="207264"/>
           </a:xfrm>
           <a:prstGeom prst="roundRect">
             <a:avLst>
@@ -5559,8 +5559,8 @@
         </p:nvSpPr>
         <p:spPr>
           <a:xfrm>
-            <a:off x="502920" y="475488"/>
-            <a:ext cx="310896" cy="310896"/>
+            <a:off x="554736" y="527304"/>
+            <a:ext cx="207264" cy="207264"/>
           </a:xfrm>
           <a:prstGeom prst="roundRect">
             <a:avLst>
@@ -6447,8 +6447,8 @@
         </p:nvSpPr>
         <p:spPr>
           <a:xfrm>
-            <a:off x="502920" y="475488"/>
-            <a:ext cx="310896" cy="310896"/>
+            <a:off x="554736" y="527304"/>
+            <a:ext cx="207264" cy="207264"/>
           </a:xfrm>
           <a:prstGeom prst="roundRect">
             <a:avLst>
@@ -7153,8 +7153,8 @@
         </p:nvSpPr>
         <p:spPr>
           <a:xfrm>
-            <a:off x="502920" y="475488"/>
-            <a:ext cx="310896" cy="310896"/>
+            <a:off x="554736" y="527304"/>
+            <a:ext cx="207264" cy="207264"/>
           </a:xfrm>
           <a:prstGeom prst="roundRect">
             <a:avLst>
@@ -8258,8 +8258,8 @@
         </p:nvSpPr>
         <p:spPr>
           <a:xfrm>
-            <a:off x="502920" y="475488"/>
-            <a:ext cx="310896" cy="310896"/>
+            <a:off x="554736" y="527304"/>
+            <a:ext cx="207264" cy="207264"/>
           </a:xfrm>
           <a:prstGeom prst="roundRect">
             <a:avLst>
@@ -8964,8 +8964,8 @@
         </p:nvSpPr>
         <p:spPr>
           <a:xfrm>
-            <a:off x="502920" y="475488"/>
-            <a:ext cx="310896" cy="310896"/>
+            <a:off x="554736" y="527304"/>
+            <a:ext cx="207264" cy="207264"/>
           </a:xfrm>
           <a:prstGeom prst="roundRect">
             <a:avLst>
@@ -9710,8 +9710,8 @@
         </p:nvSpPr>
         <p:spPr>
           <a:xfrm>
-            <a:off x="502920" y="475488"/>
-            <a:ext cx="310896" cy="310896"/>
+            <a:off x="554736" y="527304"/>
+            <a:ext cx="207264" cy="207264"/>
           </a:xfrm>
           <a:prstGeom prst="roundRect">
             <a:avLst>
@@ -10416,8 +10416,8 @@
         </p:nvSpPr>
         <p:spPr>
           <a:xfrm>
-            <a:off x="502920" y="475488"/>
-            <a:ext cx="310896" cy="310896"/>
+            <a:off x="554736" y="527304"/>
+            <a:ext cx="207264" cy="207264"/>
           </a:xfrm>
           <a:prstGeom prst="roundRect">
             <a:avLst>
@@ -11341,8 +11341,8 @@
         </p:nvSpPr>
         <p:spPr>
           <a:xfrm>
-            <a:off x="502920" y="475488"/>
-            <a:ext cx="310896" cy="310896"/>
+            <a:off x="554736" y="527304"/>
+            <a:ext cx="207264" cy="207264"/>
           </a:xfrm>
           <a:prstGeom prst="roundRect">
             <a:avLst>
@@ -12475,8 +12475,8 @@
         </p:nvSpPr>
         <p:spPr>
           <a:xfrm>
-            <a:off x="502920" y="475488"/>
-            <a:ext cx="310896" cy="310896"/>
+            <a:off x="554736" y="527304"/>
+            <a:ext cx="207264" cy="207264"/>
           </a:xfrm>
           <a:prstGeom prst="roundRect">
             <a:avLst>
@@ -13748,8 +13748,8 @@
         </p:nvSpPr>
         <p:spPr>
           <a:xfrm>
-            <a:off x="502920" y="475488"/>
-            <a:ext cx="310896" cy="310896"/>
+            <a:off x="554736" y="527304"/>
+            <a:ext cx="207264" cy="207264"/>
           </a:xfrm>
           <a:prstGeom prst="roundRect">
             <a:avLst>
@@ -14812,8 +14812,8 @@
         </p:nvSpPr>
         <p:spPr>
           <a:xfrm>
-            <a:off x="502920" y="475488"/>
-            <a:ext cx="310896" cy="310896"/>
+            <a:off x="554736" y="527304"/>
+            <a:ext cx="207264" cy="207264"/>
           </a:xfrm>
           <a:prstGeom prst="roundRect">
             <a:avLst>
@@ -18230,8 +18230,8 @@
         </p:nvSpPr>
         <p:spPr>
           <a:xfrm>
-            <a:off x="502920" y="475488"/>
-            <a:ext cx="310896" cy="310896"/>
+            <a:off x="554736" y="527304"/>
+            <a:ext cx="207264" cy="207264"/>
           </a:xfrm>
           <a:prstGeom prst="roundRect">
             <a:avLst>
@@ -20814,8 +20814,8 @@
         </p:nvSpPr>
         <p:spPr>
           <a:xfrm>
-            <a:off x="502920" y="475488"/>
-            <a:ext cx="310896" cy="310896"/>
+            <a:off x="554736" y="527304"/>
+            <a:ext cx="207264" cy="207264"/>
           </a:xfrm>
           <a:prstGeom prst="roundRect">
             <a:avLst>
@@ -22913,8 +22913,8 @@
         </p:nvSpPr>
         <p:spPr>
           <a:xfrm>
-            <a:off x="502920" y="475488"/>
-            <a:ext cx="310896" cy="310896"/>
+            <a:off x="554736" y="527304"/>
+            <a:ext cx="207264" cy="207264"/>
           </a:xfrm>
           <a:prstGeom prst="roundRect">
             <a:avLst>
@@ -24059,8 +24059,8 @@
         </p:nvSpPr>
         <p:spPr>
           <a:xfrm>
-            <a:off x="502920" y="475488"/>
-            <a:ext cx="310896" cy="310896"/>
+            <a:off x="554736" y="527304"/>
+            <a:ext cx="207264" cy="207264"/>
           </a:xfrm>
           <a:prstGeom prst="roundRect">
             <a:avLst>
@@ -25278,8 +25278,8 @@
         </p:nvSpPr>
         <p:spPr>
           <a:xfrm>
-            <a:off x="502920" y="475488"/>
-            <a:ext cx="310896" cy="310896"/>
+            <a:off x="554736" y="527304"/>
+            <a:ext cx="207264" cy="207264"/>
           </a:xfrm>
           <a:prstGeom prst="roundRect">
             <a:avLst>
@@ -26330,8 +26330,8 @@
         </p:nvSpPr>
         <p:spPr>
           <a:xfrm>
-            <a:off x="502920" y="475488"/>
-            <a:ext cx="310896" cy="310896"/>
+            <a:off x="554736" y="527304"/>
+            <a:ext cx="207264" cy="207264"/>
           </a:xfrm>
           <a:prstGeom prst="roundRect">
             <a:avLst>

--- a/04_제출물/데이터분석_결과보고서.pptx
+++ b/04_제출물/데이터분석_결과보고서.pptx
@@ -3756,8 +3756,8 @@
         </p:nvSpPr>
         <p:spPr>
           <a:xfrm>
-            <a:off x="554736" y="527304"/>
-            <a:ext cx="207264" cy="207264"/>
+            <a:off x="606475" y="579043"/>
+            <a:ext cx="103784" cy="103784"/>
           </a:xfrm>
           <a:prstGeom prst="roundRect">
             <a:avLst>
@@ -4572,8 +4572,8 @@
         </p:nvSpPr>
         <p:spPr>
           <a:xfrm>
-            <a:off x="554736" y="527304"/>
-            <a:ext cx="207264" cy="207264"/>
+            <a:off x="606475" y="579043"/>
+            <a:ext cx="103784" cy="103784"/>
           </a:xfrm>
           <a:prstGeom prst="roundRect">
             <a:avLst>
@@ -5559,8 +5559,8 @@
         </p:nvSpPr>
         <p:spPr>
           <a:xfrm>
-            <a:off x="554736" y="527304"/>
-            <a:ext cx="207264" cy="207264"/>
+            <a:off x="606475" y="579043"/>
+            <a:ext cx="103784" cy="103784"/>
           </a:xfrm>
           <a:prstGeom prst="roundRect">
             <a:avLst>
@@ -6447,8 +6447,8 @@
         </p:nvSpPr>
         <p:spPr>
           <a:xfrm>
-            <a:off x="554736" y="527304"/>
-            <a:ext cx="207264" cy="207264"/>
+            <a:off x="606475" y="579043"/>
+            <a:ext cx="103784" cy="103784"/>
           </a:xfrm>
           <a:prstGeom prst="roundRect">
             <a:avLst>
@@ -7153,8 +7153,8 @@
         </p:nvSpPr>
         <p:spPr>
           <a:xfrm>
-            <a:off x="554736" y="527304"/>
-            <a:ext cx="207264" cy="207264"/>
+            <a:off x="606475" y="579043"/>
+            <a:ext cx="103784" cy="103784"/>
           </a:xfrm>
           <a:prstGeom prst="roundRect">
             <a:avLst>
@@ -8258,8 +8258,8 @@
         </p:nvSpPr>
         <p:spPr>
           <a:xfrm>
-            <a:off x="554736" y="527304"/>
-            <a:ext cx="207264" cy="207264"/>
+            <a:off x="606475" y="579043"/>
+            <a:ext cx="103784" cy="103784"/>
           </a:xfrm>
           <a:prstGeom prst="roundRect">
             <a:avLst>
@@ -8964,8 +8964,8 @@
         </p:nvSpPr>
         <p:spPr>
           <a:xfrm>
-            <a:off x="554736" y="527304"/>
-            <a:ext cx="207264" cy="207264"/>
+            <a:off x="606475" y="579043"/>
+            <a:ext cx="103784" cy="103784"/>
           </a:xfrm>
           <a:prstGeom prst="roundRect">
             <a:avLst>
@@ -9710,8 +9710,8 @@
         </p:nvSpPr>
         <p:spPr>
           <a:xfrm>
-            <a:off x="554736" y="527304"/>
-            <a:ext cx="207264" cy="207264"/>
+            <a:off x="606475" y="579043"/>
+            <a:ext cx="103784" cy="103784"/>
           </a:xfrm>
           <a:prstGeom prst="roundRect">
             <a:avLst>
@@ -10416,8 +10416,8 @@
         </p:nvSpPr>
         <p:spPr>
           <a:xfrm>
-            <a:off x="554736" y="527304"/>
-            <a:ext cx="207264" cy="207264"/>
+            <a:off x="606475" y="579043"/>
+            <a:ext cx="103784" cy="103784"/>
           </a:xfrm>
           <a:prstGeom prst="roundRect">
             <a:avLst>
@@ -11341,8 +11341,8 @@
         </p:nvSpPr>
         <p:spPr>
           <a:xfrm>
-            <a:off x="554736" y="527304"/>
-            <a:ext cx="207264" cy="207264"/>
+            <a:off x="606475" y="579043"/>
+            <a:ext cx="103784" cy="103784"/>
           </a:xfrm>
           <a:prstGeom prst="roundRect">
             <a:avLst>
@@ -12475,8 +12475,8 @@
         </p:nvSpPr>
         <p:spPr>
           <a:xfrm>
-            <a:off x="554736" y="527304"/>
-            <a:ext cx="207264" cy="207264"/>
+            <a:off x="606475" y="579043"/>
+            <a:ext cx="103784" cy="103784"/>
           </a:xfrm>
           <a:prstGeom prst="roundRect">
             <a:avLst>
@@ -13748,8 +13748,8 @@
         </p:nvSpPr>
         <p:spPr>
           <a:xfrm>
-            <a:off x="554736" y="527304"/>
-            <a:ext cx="207264" cy="207264"/>
+            <a:off x="606475" y="579043"/>
+            <a:ext cx="103784" cy="103784"/>
           </a:xfrm>
           <a:prstGeom prst="roundRect">
             <a:avLst>
@@ -14812,8 +14812,8 @@
         </p:nvSpPr>
         <p:spPr>
           <a:xfrm>
-            <a:off x="554736" y="527304"/>
-            <a:ext cx="207264" cy="207264"/>
+            <a:off x="606475" y="579043"/>
+            <a:ext cx="103784" cy="103784"/>
           </a:xfrm>
           <a:prstGeom prst="roundRect">
             <a:avLst>
@@ -18230,8 +18230,8 @@
         </p:nvSpPr>
         <p:spPr>
           <a:xfrm>
-            <a:off x="554736" y="527304"/>
-            <a:ext cx="207264" cy="207264"/>
+            <a:off x="606475" y="579043"/>
+            <a:ext cx="103784" cy="103784"/>
           </a:xfrm>
           <a:prstGeom prst="roundRect">
             <a:avLst>
@@ -20814,8 +20814,8 @@
         </p:nvSpPr>
         <p:spPr>
           <a:xfrm>
-            <a:off x="554736" y="527304"/>
-            <a:ext cx="207264" cy="207264"/>
+            <a:off x="606475" y="579043"/>
+            <a:ext cx="103784" cy="103784"/>
           </a:xfrm>
           <a:prstGeom prst="roundRect">
             <a:avLst>
@@ -22913,8 +22913,8 @@
         </p:nvSpPr>
         <p:spPr>
           <a:xfrm>
-            <a:off x="554736" y="527304"/>
-            <a:ext cx="207264" cy="207264"/>
+            <a:off x="606475" y="579043"/>
+            <a:ext cx="103784" cy="103784"/>
           </a:xfrm>
           <a:prstGeom prst="roundRect">
             <a:avLst>
@@ -24059,8 +24059,8 @@
         </p:nvSpPr>
         <p:spPr>
           <a:xfrm>
-            <a:off x="554736" y="527304"/>
-            <a:ext cx="207264" cy="207264"/>
+            <a:off x="606475" y="579043"/>
+            <a:ext cx="103784" cy="103784"/>
           </a:xfrm>
           <a:prstGeom prst="roundRect">
             <a:avLst>
@@ -25278,8 +25278,8 @@
         </p:nvSpPr>
         <p:spPr>
           <a:xfrm>
-            <a:off x="554736" y="527304"/>
-            <a:ext cx="207264" cy="207264"/>
+            <a:off x="606475" y="579043"/>
+            <a:ext cx="103784" cy="103784"/>
           </a:xfrm>
           <a:prstGeom prst="roundRect">
             <a:avLst>
@@ -26330,8 +26330,8 @@
         </p:nvSpPr>
         <p:spPr>
           <a:xfrm>
-            <a:off x="554736" y="527304"/>
-            <a:ext cx="207264" cy="207264"/>
+            <a:off x="606475" y="579043"/>
+            <a:ext cx="103784" cy="103784"/>
           </a:xfrm>
           <a:prstGeom prst="roundRect">
             <a:avLst>
